--- a/ppt/RoadAssist-Bharat-FINAL.pptx
+++ b/ppt/RoadAssist-Bharat-FINAL.pptx
@@ -4,44 +4,41 @@
   <p:sldMasterIdLst>
     <p:sldMasterId id="2147483648" r:id="rId1"/>
   </p:sldMasterIdLst>
-  <p:notesMasterIdLst>
-    <p:notesMasterId r:id="rId34"/>
-  </p:notesMasterIdLst>
   <p:sldIdLst>
-    <p:sldId id="256" r:id="rId2"/>
-    <p:sldId id="257" r:id="rId3"/>
-    <p:sldId id="258" r:id="rId4"/>
-    <p:sldId id="259" r:id="rId5"/>
-    <p:sldId id="260" r:id="rId6"/>
-    <p:sldId id="261" r:id="rId7"/>
-    <p:sldId id="262" r:id="rId8"/>
-    <p:sldId id="263" r:id="rId9"/>
-    <p:sldId id="264" r:id="rId10"/>
-    <p:sldId id="265" r:id="rId11"/>
-    <p:sldId id="266" r:id="rId12"/>
-    <p:sldId id="267" r:id="rId13"/>
-    <p:sldId id="268" r:id="rId14"/>
-    <p:sldId id="269" r:id="rId15"/>
-    <p:sldId id="270" r:id="rId16"/>
-    <p:sldId id="271" r:id="rId17"/>
-    <p:sldId id="272" r:id="rId18"/>
-    <p:sldId id="273" r:id="rId19"/>
-    <p:sldId id="274" r:id="rId20"/>
-    <p:sldId id="275" r:id="rId21"/>
-    <p:sldId id="276" r:id="rId22"/>
-    <p:sldId id="277" r:id="rId23"/>
-    <p:sldId id="278" r:id="rId24"/>
-    <p:sldId id="279" r:id="rId25"/>
-    <p:sldId id="280" r:id="rId26"/>
-    <p:sldId id="281" r:id="rId27"/>
-    <p:sldId id="282" r:id="rId28"/>
-    <p:sldId id="283" r:id="rId29"/>
-    <p:sldId id="284" r:id="rId30"/>
-    <p:sldId id="285" r:id="rId31"/>
-    <p:sldId id="286" r:id="rId32"/>
-    <p:sldId id="287" r:id="rId33"/>
+    <p:sldId id="256" r:id="rId7"/>
+    <p:sldId id="257" r:id="rId9"/>
+    <p:sldId id="258" r:id="rId10"/>
+    <p:sldId id="259" r:id="rId11"/>
+    <p:sldId id="260" r:id="rId12"/>
+    <p:sldId id="261" r:id="rId13"/>
+    <p:sldId id="262" r:id="rId14"/>
+    <p:sldId id="263" r:id="rId15"/>
+    <p:sldId id="264" r:id="rId16"/>
+    <p:sldId id="265" r:id="rId17"/>
+    <p:sldId id="266" r:id="rId18"/>
+    <p:sldId id="267" r:id="rId19"/>
+    <p:sldId id="268" r:id="rId20"/>
+    <p:sldId id="269" r:id="rId21"/>
+    <p:sldId id="270" r:id="rId22"/>
+    <p:sldId id="271" r:id="rId23"/>
+    <p:sldId id="272" r:id="rId24"/>
+    <p:sldId id="273" r:id="rId25"/>
+    <p:sldId id="274" r:id="rId26"/>
+    <p:sldId id="275" r:id="rId27"/>
+    <p:sldId id="276" r:id="rId28"/>
+    <p:sldId id="277" r:id="rId29"/>
+    <p:sldId id="278" r:id="rId30"/>
+    <p:sldId id="279" r:id="rId31"/>
+    <p:sldId id="280" r:id="rId32"/>
+    <p:sldId id="281" r:id="rId33"/>
+    <p:sldId id="282" r:id="rId34"/>
+    <p:sldId id="283" r:id="rId35"/>
+    <p:sldId id="284" r:id="rId36"/>
+    <p:sldId id="285" r:id="rId37"/>
+    <p:sldId id="286" r:id="rId38"/>
+    <p:sldId id="287" r:id="rId39"/>
   </p:sldIdLst>
-  <p:sldSz cx="12192000" cy="6858000"/>
+  <p:sldSz cx="12191695" cy="6858000" type="screen4x3"/>
   <p:notesSz cx="6858000" cy="9144000"/>
   <p:defaultTextStyle>
     <a:defPPr>
@@ -138,27 +135,11 @@
       </a:defRPr>
     </a:lvl9pPr>
   </p:defaultTextStyle>
-  <p:extLst>
-    <p:ext uri="{EFAFB233-063F-42B5-8137-9DF3F51BA10A}">
-      <p15:sldGuideLst xmlns:p15="http://schemas.microsoft.com/office/powerpoint/2012/main">
-        <p15:guide id="1" orient="horz" pos="2160">
-          <p15:clr>
-            <a:srgbClr val="A4A3A4"/>
-          </p15:clr>
-        </p15:guide>
-        <p15:guide id="2" pos="2880">
-          <p15:clr>
-            <a:srgbClr val="A4A3A4"/>
-          </p15:clr>
-        </p15:guide>
-      </p15:sldGuideLst>
-    </p:ext>
-  </p:extLst>
 </p:presentation>
 </file>
 
 <file path=ppt/notesMasters/notesMaster1.xml><?xml version="1.0" encoding="utf-8"?>
-<p:notesMaster xmlns:a="http://schemas.openxmlformats.org/drawingml/2006/main" xmlns:r="http://schemas.openxmlformats.org/officeDocument/2006/relationships" xmlns:p="http://schemas.openxmlformats.org/presentationml/2006/main">
+<p:notesMaster xmlns:a="http://schemas.openxmlformats.org/drawingml/2006/main" xmlns:p="http://schemas.openxmlformats.org/presentationml/2006/main" xmlns:r="http://schemas.openxmlformats.org/officeDocument/2006/relationships">
   <p:cSld>
     <p:bg>
       <p:bgRef idx="1001">
@@ -179,16 +160,241 @@
           <a:chExt cx="0" cy="0"/>
         </a:xfrm>
       </p:grpSpPr>
+      <p:sp>
+        <p:nvSpPr>
+          <p:cNvPr id="2" name="Header Placeholder 1"/>
+          <p:cNvSpPr>
+            <a:spLocks noGrp="1"/>
+          </p:cNvSpPr>
+          <p:nvPr>
+            <p:ph type="hdr" sz="quarter"/>
+          </p:nvPr>
+        </p:nvSpPr>
+        <p:spPr>
+          <a:xfrm>
+            <a:off x="0" y="0"/>
+            <a:ext cx="2971800" cy="457200"/>
+          </a:xfrm>
+          <a:prstGeom prst="rect">
+            <a:avLst/>
+          </a:prstGeom>
+        </p:spPr>
+        <p:txBody>
+          <a:bodyPr vert="horz" lIns="91440" tIns="45720" rIns="91440" bIns="45720" rtlCol="0"/>
+          <a:lstStyle>
+            <a:lvl1pPr algn="l">
+              <a:defRPr sz="1200"/>
+            </a:lvl1pPr>
+          </a:lstStyle>
+          <a:p>
+            <a:endParaRPr lang="en-US"/>
+          </a:p>
+        </p:txBody>
+      </p:sp>
+      <p:sp>
+        <p:nvSpPr>
+          <p:cNvPr id="3" name="Date Placeholder 2"/>
+          <p:cNvSpPr>
+            <a:spLocks noGrp="1"/>
+          </p:cNvSpPr>
+          <p:nvPr>
+            <p:ph type="dt" idx="1"/>
+          </p:nvPr>
+        </p:nvSpPr>
+        <p:spPr>
+          <a:xfrm>
+            <a:off x="3884613" y="0"/>
+            <a:ext cx="2971800" cy="457200"/>
+          </a:xfrm>
+          <a:prstGeom prst="rect">
+            <a:avLst/>
+          </a:prstGeom>
+        </p:spPr>
+        <p:txBody>
+          <a:bodyPr vert="horz" lIns="91440" tIns="45720" rIns="91440" bIns="45720" rtlCol="0"/>
+          <a:lstStyle>
+            <a:lvl1pPr algn="r">
+              <a:defRPr sz="1200"/>
+            </a:lvl1pPr>
+          </a:lstStyle>
+          <a:p>
+            <a:fld id="{0F89C1C7-3DCD-1040-A9CF-14679D8B5DDD}" type="datetimeFigureOut">
+              <a:rPr lang="en-US" smtClean="0"/>
+              <a:t>10/17/16</a:t>
+            </a:fld>
+            <a:endParaRPr lang="en-US"/>
+          </a:p>
+        </p:txBody>
+      </p:sp>
+      <p:sp>
+        <p:nvSpPr>
+          <p:cNvPr id="4" name="Slide Image Placeholder 3"/>
+          <p:cNvSpPr>
+            <a:spLocks noGrp="1" noRot="1" noChangeAspect="1"/>
+          </p:cNvSpPr>
+          <p:nvPr>
+            <p:ph type="sldImg" idx="2"/>
+          </p:nvPr>
+        </p:nvSpPr>
+        <p:spPr>
+          <a:xfrm>
+            <a:off x="1143000" y="685800"/>
+            <a:ext cx="4572000" cy="3429000"/>
+          </a:xfrm>
+          <a:prstGeom prst="rect">
+            <a:avLst/>
+          </a:prstGeom>
+          <a:noFill/>
+          <a:ln w="12700">
+            <a:solidFill>
+              <a:prstClr val="black"/>
+            </a:solidFill>
+          </a:ln>
+        </p:spPr>
+        <p:txBody>
+          <a:bodyPr vert="horz" lIns="91440" tIns="45720" rIns="91440" bIns="45720" rtlCol="0" anchor="ctr"/>
+          <a:lstStyle/>
+          <a:p>
+            <a:endParaRPr lang="en-US"/>
+          </a:p>
+        </p:txBody>
+      </p:sp>
+      <p:sp>
+        <p:nvSpPr>
+          <p:cNvPr id="5" name="Notes Placeholder 4"/>
+          <p:cNvSpPr>
+            <a:spLocks noGrp="1"/>
+          </p:cNvSpPr>
+          <p:nvPr>
+            <p:ph type="body" sz="quarter" idx="3"/>
+          </p:nvPr>
+        </p:nvSpPr>
+        <p:spPr>
+          <a:xfrm>
+            <a:off x="685800" y="4343400"/>
+            <a:ext cx="5486400" cy="4114800"/>
+          </a:xfrm>
+          <a:prstGeom prst="rect">
+            <a:avLst/>
+          </a:prstGeom>
+        </p:spPr>
+        <p:txBody>
+          <a:bodyPr vert="horz" lIns="91440" tIns="45720" rIns="91440" bIns="45720" rtlCol="0"/>
+          <a:lstStyle/>
+          <a:p>
+            <a:pPr lvl="0"/>
+            <a:r>
+              <a:rPr lang="en-US" smtClean="0"/>
+              <a:t>Click to edit Master text styles</a:t>
+            </a:r>
+          </a:p>
+          <a:p>
+            <a:pPr lvl="1"/>
+            <a:r>
+              <a:rPr lang="en-US" smtClean="0"/>
+              <a:t>Second level</a:t>
+            </a:r>
+          </a:p>
+          <a:p>
+            <a:pPr lvl="2"/>
+            <a:r>
+              <a:rPr lang="en-US" smtClean="0"/>
+              <a:t>Third level</a:t>
+            </a:r>
+          </a:p>
+          <a:p>
+            <a:pPr lvl="3"/>
+            <a:r>
+              <a:rPr lang="en-US" smtClean="0"/>
+              <a:t>Fourth level</a:t>
+            </a:r>
+          </a:p>
+          <a:p>
+            <a:pPr lvl="4"/>
+            <a:r>
+              <a:rPr lang="en-US" smtClean="0"/>
+              <a:t>Fifth level</a:t>
+            </a:r>
+            <a:endParaRPr lang="en-US"/>
+          </a:p>
+        </p:txBody>
+      </p:sp>
+      <p:sp>
+        <p:nvSpPr>
+          <p:cNvPr id="6" name="Footer Placeholder 5"/>
+          <p:cNvSpPr>
+            <a:spLocks noGrp="1"/>
+          </p:cNvSpPr>
+          <p:nvPr>
+            <p:ph type="ftr" sz="quarter" idx="4"/>
+          </p:nvPr>
+        </p:nvSpPr>
+        <p:spPr>
+          <a:xfrm>
+            <a:off x="0" y="8685213"/>
+            <a:ext cx="2971800" cy="457200"/>
+          </a:xfrm>
+          <a:prstGeom prst="rect">
+            <a:avLst/>
+          </a:prstGeom>
+        </p:spPr>
+        <p:txBody>
+          <a:bodyPr vert="horz" lIns="91440" tIns="45720" rIns="91440" bIns="45720" rtlCol="0" anchor="b"/>
+          <a:lstStyle>
+            <a:lvl1pPr algn="l">
+              <a:defRPr sz="1200"/>
+            </a:lvl1pPr>
+          </a:lstStyle>
+          <a:p>
+            <a:endParaRPr lang="en-US"/>
+          </a:p>
+        </p:txBody>
+      </p:sp>
+      <p:sp>
+        <p:nvSpPr>
+          <p:cNvPr id="7" name="Slide Number Placeholder 6"/>
+          <p:cNvSpPr>
+            <a:spLocks noGrp="1"/>
+          </p:cNvSpPr>
+          <p:nvPr>
+            <p:ph type="sldNum" sz="quarter" idx="5"/>
+          </p:nvPr>
+        </p:nvSpPr>
+        <p:spPr>
+          <a:xfrm>
+            <a:off x="3884613" y="8685213"/>
+            <a:ext cx="2971800" cy="457200"/>
+          </a:xfrm>
+          <a:prstGeom prst="rect">
+            <a:avLst/>
+          </a:prstGeom>
+        </p:spPr>
+        <p:txBody>
+          <a:bodyPr vert="horz" lIns="91440" tIns="45720" rIns="91440" bIns="45720" rtlCol="0" anchor="b"/>
+          <a:lstStyle>
+            <a:lvl1pPr algn="r">
+              <a:defRPr sz="1200"/>
+            </a:lvl1pPr>
+          </a:lstStyle>
+          <a:p>
+            <a:fld id="{BB5E49A5-4136-284D-997B-48E1D791AD67}" type="slidenum">
+              <a:rPr lang="en-US" smtClean="0"/>
+              <a:t>‹#›</a:t>
+            </a:fld>
+            <a:endParaRPr lang="en-US"/>
+          </a:p>
+        </p:txBody>
+      </p:sp>
     </p:spTree>
     <p:extLst>
       <p:ext uri="{BB962C8B-B14F-4D97-AF65-F5344CB8AC3E}">
-        <p14:creationId xmlns:p14="http://schemas.microsoft.com/office/powerpoint/2010/main" val="4204442022"/>
+        <p14:creationId xmlns:p14="http://schemas.microsoft.com/office/powerpoint/2010/main" val="2623252185"/>
       </p:ext>
     </p:extLst>
   </p:cSld>
   <p:clrMap bg1="lt1" tx1="dk1" bg2="lt2" tx2="dk2" accent1="accent1" accent2="accent2" accent3="accent3" accent4="accent4" accent5="accent5" accent6="accent6" hlink="hlink" folHlink="folHlink"/>
   <p:notesStyle>
-    <a:lvl1pPr marL="0" algn="l" defTabSz="914400" rtl="0" eaLnBrk="1" latinLnBrk="0" hangingPunct="1">
+    <a:lvl1pPr marL="0" algn="l" defTabSz="457200" rtl="0" eaLnBrk="1" latinLnBrk="0" hangingPunct="1">
       <a:defRPr sz="1200" kern="1200">
         <a:solidFill>
           <a:schemeClr val="tx1"/>
@@ -198,7 +404,7 @@
         <a:cs typeface="+mn-cs"/>
       </a:defRPr>
     </a:lvl1pPr>
-    <a:lvl2pPr marL="457200" algn="l" defTabSz="914400" rtl="0" eaLnBrk="1" latinLnBrk="0" hangingPunct="1">
+    <a:lvl2pPr marL="457200" algn="l" defTabSz="457200" rtl="0" eaLnBrk="1" latinLnBrk="0" hangingPunct="1">
       <a:defRPr sz="1200" kern="1200">
         <a:solidFill>
           <a:schemeClr val="tx1"/>
@@ -208,7 +414,7 @@
         <a:cs typeface="+mn-cs"/>
       </a:defRPr>
     </a:lvl2pPr>
-    <a:lvl3pPr marL="914400" algn="l" defTabSz="914400" rtl="0" eaLnBrk="1" latinLnBrk="0" hangingPunct="1">
+    <a:lvl3pPr marL="914400" algn="l" defTabSz="457200" rtl="0" eaLnBrk="1" latinLnBrk="0" hangingPunct="1">
       <a:defRPr sz="1200" kern="1200">
         <a:solidFill>
           <a:schemeClr val="tx1"/>
@@ -218,7 +424,7 @@
         <a:cs typeface="+mn-cs"/>
       </a:defRPr>
     </a:lvl3pPr>
-    <a:lvl4pPr marL="1371600" algn="l" defTabSz="914400" rtl="0" eaLnBrk="1" latinLnBrk="0" hangingPunct="1">
+    <a:lvl4pPr marL="1371600" algn="l" defTabSz="457200" rtl="0" eaLnBrk="1" latinLnBrk="0" hangingPunct="1">
       <a:defRPr sz="1200" kern="1200">
         <a:solidFill>
           <a:schemeClr val="tx1"/>
@@ -228,7 +434,7 @@
         <a:cs typeface="+mn-cs"/>
       </a:defRPr>
     </a:lvl4pPr>
-    <a:lvl5pPr marL="1828800" algn="l" defTabSz="914400" rtl="0" eaLnBrk="1" latinLnBrk="0" hangingPunct="1">
+    <a:lvl5pPr marL="1828800" algn="l" defTabSz="457200" rtl="0" eaLnBrk="1" latinLnBrk="0" hangingPunct="1">
       <a:defRPr sz="1200" kern="1200">
         <a:solidFill>
           <a:schemeClr val="tx1"/>
@@ -238,7 +444,7 @@
         <a:cs typeface="+mn-cs"/>
       </a:defRPr>
     </a:lvl5pPr>
-    <a:lvl6pPr marL="2286000" algn="l" defTabSz="914400" rtl="0" eaLnBrk="1" latinLnBrk="0" hangingPunct="1">
+    <a:lvl6pPr marL="2286000" algn="l" defTabSz="457200" rtl="0" eaLnBrk="1" latinLnBrk="0" hangingPunct="1">
       <a:defRPr sz="1200" kern="1200">
         <a:solidFill>
           <a:schemeClr val="tx1"/>
@@ -248,7 +454,7 @@
         <a:cs typeface="+mn-cs"/>
       </a:defRPr>
     </a:lvl6pPr>
-    <a:lvl7pPr marL="2743200" algn="l" defTabSz="914400" rtl="0" eaLnBrk="1" latinLnBrk="0" hangingPunct="1">
+    <a:lvl7pPr marL="2743200" algn="l" defTabSz="457200" rtl="0" eaLnBrk="1" latinLnBrk="0" hangingPunct="1">
       <a:defRPr sz="1200" kern="1200">
         <a:solidFill>
           <a:schemeClr val="tx1"/>
@@ -258,7 +464,7 @@
         <a:cs typeface="+mn-cs"/>
       </a:defRPr>
     </a:lvl7pPr>
-    <a:lvl8pPr marL="3200400" algn="l" defTabSz="914400" rtl="0" eaLnBrk="1" latinLnBrk="0" hangingPunct="1">
+    <a:lvl8pPr marL="3200400" algn="l" defTabSz="457200" rtl="0" eaLnBrk="1" latinLnBrk="0" hangingPunct="1">
       <a:defRPr sz="1200" kern="1200">
         <a:solidFill>
           <a:schemeClr val="tx1"/>
@@ -268,7 +474,7 @@
         <a:cs typeface="+mn-cs"/>
       </a:defRPr>
     </a:lvl8pPr>
-    <a:lvl9pPr marL="3657600" algn="l" defTabSz="914400" rtl="0" eaLnBrk="1" latinLnBrk="0" hangingPunct="1">
+    <a:lvl9pPr marL="3657600" algn="l" defTabSz="457200" rtl="0" eaLnBrk="1" latinLnBrk="0" hangingPunct="1">
       <a:defRPr sz="1200" kern="1200">
         <a:solidFill>
           <a:schemeClr val="tx1"/>
@@ -283,7 +489,7 @@
 </file>
 
 <file path=ppt/notesSlides/notesSlide1.xml><?xml version="1.0" encoding="utf-8"?>
-<p:notes xmlns:a="http://schemas.openxmlformats.org/drawingml/2006/main" xmlns:r="http://schemas.openxmlformats.org/officeDocument/2006/relationships" xmlns:p="http://schemas.openxmlformats.org/presentationml/2006/main">
+<p:notes xmlns:a="http://schemas.openxmlformats.org/drawingml/2006/main" xmlns:p="http://schemas.openxmlformats.org/presentationml/2006/main" xmlns:r="http://schemas.openxmlformats.org/officeDocument/2006/relationships">
   <p:cSld>
     <p:spTree>
       <p:nvGrpSpPr>
@@ -303,7 +509,7 @@
         <p:nvSpPr>
           <p:cNvPr id="2" name="Slide Image Placeholder 1"/>
           <p:cNvSpPr>
-            <a:spLocks noGrp="1" noRot="1" noChangeAspect="1"/>
+            <a:spLocks noGrp="1"/>
           </p:cNvSpPr>
           <p:nvPr>
             <p:ph type="sldImg" idx="2"/>
@@ -318,7 +524,7 @@
             <a:spLocks noGrp="1"/>
           </p:cNvSpPr>
           <p:nvPr>
-            <p:ph type="body" sz="quarter" idx="3"/>
+            <p:ph type="body" idx="3" sz="quarter"/>
           </p:nvPr>
         </p:nvSpPr>
         <p:spPr/>
@@ -335,9 +541,7 @@
               <a:t>evidence is in the next thirty slides.</a:t>
             </a:r>
           </a:p>
-          <a:p>
-            <a:endParaRPr/>
-          </a:p>
+          <a:p/>
           <a:p>
             <a:r>
               <a:t>The three adjectives are ordered deliberately: AI is the least novel, cloud is</a:t>
@@ -357,7 +561,7 @@
             <a:spLocks noGrp="1"/>
           </p:cNvSpPr>
           <p:nvPr>
-            <p:ph type="sldNum" sz="quarter" idx="5"/>
+            <p:ph type="sldNum" idx="5" sz="quarter"/>
           </p:nvPr>
         </p:nvSpPr>
         <p:spPr/>
@@ -371,7 +575,7 @@
 </file>
 
 <file path=ppt/notesSlides/notesSlide10.xml><?xml version="1.0" encoding="utf-8"?>
-<p:notes xmlns:a="http://schemas.openxmlformats.org/drawingml/2006/main" xmlns:r="http://schemas.openxmlformats.org/officeDocument/2006/relationships" xmlns:p="http://schemas.openxmlformats.org/presentationml/2006/main">
+<p:notes xmlns:a="http://schemas.openxmlformats.org/drawingml/2006/main" xmlns:p="http://schemas.openxmlformats.org/presentationml/2006/main" xmlns:r="http://schemas.openxmlformats.org/officeDocument/2006/relationships">
   <p:cSld>
     <p:spTree>
       <p:nvGrpSpPr>
@@ -391,7 +595,7 @@
         <p:nvSpPr>
           <p:cNvPr id="2" name="Slide Image Placeholder 1"/>
           <p:cNvSpPr>
-            <a:spLocks noGrp="1" noRot="1" noChangeAspect="1"/>
+            <a:spLocks noGrp="1"/>
           </p:cNvSpPr>
           <p:nvPr>
             <p:ph type="sldImg" idx="2"/>
@@ -406,7 +610,7 @@
             <a:spLocks noGrp="1"/>
           </p:cNvSpPr>
           <p:nvPr>
-            <p:ph type="body" sz="quarter" idx="3"/>
+            <p:ph type="body" idx="3" sz="quarter"/>
           </p:nvPr>
         </p:nvSpPr>
         <p:spPr/>
@@ -437,7 +641,7 @@
             <a:spLocks noGrp="1"/>
           </p:cNvSpPr>
           <p:nvPr>
-            <p:ph type="sldNum" sz="quarter" idx="5"/>
+            <p:ph type="sldNum" idx="5" sz="quarter"/>
           </p:nvPr>
         </p:nvSpPr>
         <p:spPr/>
@@ -451,7 +655,7 @@
 </file>
 
 <file path=ppt/notesSlides/notesSlide2.xml><?xml version="1.0" encoding="utf-8"?>
-<p:notes xmlns:a="http://schemas.openxmlformats.org/drawingml/2006/main" xmlns:r="http://schemas.openxmlformats.org/officeDocument/2006/relationships" xmlns:p="http://schemas.openxmlformats.org/presentationml/2006/main">
+<p:notes xmlns:a="http://schemas.openxmlformats.org/drawingml/2006/main" xmlns:p="http://schemas.openxmlformats.org/presentationml/2006/main" xmlns:r="http://schemas.openxmlformats.org/officeDocument/2006/relationships">
   <p:cSld>
     <p:spTree>
       <p:nvGrpSpPr>
@@ -471,7 +675,7 @@
         <p:nvSpPr>
           <p:cNvPr id="2" name="Slide Image Placeholder 1"/>
           <p:cNvSpPr>
-            <a:spLocks noGrp="1" noRot="1" noChangeAspect="1"/>
+            <a:spLocks noGrp="1"/>
           </p:cNvSpPr>
           <p:nvPr>
             <p:ph type="sldImg" idx="2"/>
@@ -486,7 +690,7 @@
             <a:spLocks noGrp="1"/>
           </p:cNvSpPr>
           <p:nvPr>
-            <p:ph type="body" sz="quarter" idx="3"/>
+            <p:ph type="body" idx="3" sz="quarter"/>
           </p:nvPr>
         </p:nvSpPr>
         <p:spPr/>
@@ -512,7 +716,7 @@
             <a:spLocks noGrp="1"/>
           </p:cNvSpPr>
           <p:nvPr>
-            <p:ph type="sldNum" sz="quarter" idx="5"/>
+            <p:ph type="sldNum" idx="5" sz="quarter"/>
           </p:nvPr>
         </p:nvSpPr>
         <p:spPr/>
@@ -526,7 +730,7 @@
 </file>
 
 <file path=ppt/notesSlides/notesSlide3.xml><?xml version="1.0" encoding="utf-8"?>
-<p:notes xmlns:a="http://schemas.openxmlformats.org/drawingml/2006/main" xmlns:r="http://schemas.openxmlformats.org/officeDocument/2006/relationships" xmlns:p="http://schemas.openxmlformats.org/presentationml/2006/main">
+<p:notes xmlns:a="http://schemas.openxmlformats.org/drawingml/2006/main" xmlns:p="http://schemas.openxmlformats.org/presentationml/2006/main" xmlns:r="http://schemas.openxmlformats.org/officeDocument/2006/relationships">
   <p:cSld>
     <p:spTree>
       <p:nvGrpSpPr>
@@ -546,7 +750,7 @@
         <p:nvSpPr>
           <p:cNvPr id="2" name="Slide Image Placeholder 1"/>
           <p:cNvSpPr>
-            <a:spLocks noGrp="1" noRot="1" noChangeAspect="1"/>
+            <a:spLocks noGrp="1"/>
           </p:cNvSpPr>
           <p:nvPr>
             <p:ph type="sldImg" idx="2"/>
@@ -561,7 +765,7 @@
             <a:spLocks noGrp="1"/>
           </p:cNvSpPr>
           <p:nvPr>
-            <p:ph type="body" sz="quarter" idx="3"/>
+            <p:ph type="body" idx="3" sz="quarter"/>
           </p:nvPr>
         </p:nvSpPr>
         <p:spPr/>
@@ -587,7 +791,7 @@
             <a:spLocks noGrp="1"/>
           </p:cNvSpPr>
           <p:nvPr>
-            <p:ph type="sldNum" sz="quarter" idx="5"/>
+            <p:ph type="sldNum" idx="5" sz="quarter"/>
           </p:nvPr>
         </p:nvSpPr>
         <p:spPr/>
@@ -601,7 +805,7 @@
 </file>
 
 <file path=ppt/notesSlides/notesSlide4.xml><?xml version="1.0" encoding="utf-8"?>
-<p:notes xmlns:a="http://schemas.openxmlformats.org/drawingml/2006/main" xmlns:r="http://schemas.openxmlformats.org/officeDocument/2006/relationships" xmlns:p="http://schemas.openxmlformats.org/presentationml/2006/main">
+<p:notes xmlns:a="http://schemas.openxmlformats.org/drawingml/2006/main" xmlns:p="http://schemas.openxmlformats.org/presentationml/2006/main" xmlns:r="http://schemas.openxmlformats.org/officeDocument/2006/relationships">
   <p:cSld>
     <p:spTree>
       <p:nvGrpSpPr>
@@ -621,7 +825,7 @@
         <p:nvSpPr>
           <p:cNvPr id="2" name="Slide Image Placeholder 1"/>
           <p:cNvSpPr>
-            <a:spLocks noGrp="1" noRot="1" noChangeAspect="1"/>
+            <a:spLocks noGrp="1"/>
           </p:cNvSpPr>
           <p:nvPr>
             <p:ph type="sldImg" idx="2"/>
@@ -636,7 +840,7 @@
             <a:spLocks noGrp="1"/>
           </p:cNvSpPr>
           <p:nvPr>
-            <p:ph type="body" sz="quarter" idx="3"/>
+            <p:ph type="body" idx="3" sz="quarter"/>
           </p:nvPr>
         </p:nvSpPr>
         <p:spPr/>
@@ -662,7 +866,7 @@
             <a:spLocks noGrp="1"/>
           </p:cNvSpPr>
           <p:nvPr>
-            <p:ph type="sldNum" sz="quarter" idx="5"/>
+            <p:ph type="sldNum" idx="5" sz="quarter"/>
           </p:nvPr>
         </p:nvSpPr>
         <p:spPr/>
@@ -676,7 +880,7 @@
 </file>
 
 <file path=ppt/notesSlides/notesSlide5.xml><?xml version="1.0" encoding="utf-8"?>
-<p:notes xmlns:a="http://schemas.openxmlformats.org/drawingml/2006/main" xmlns:r="http://schemas.openxmlformats.org/officeDocument/2006/relationships" xmlns:p="http://schemas.openxmlformats.org/presentationml/2006/main">
+<p:notes xmlns:a="http://schemas.openxmlformats.org/drawingml/2006/main" xmlns:p="http://schemas.openxmlformats.org/presentationml/2006/main" xmlns:r="http://schemas.openxmlformats.org/officeDocument/2006/relationships">
   <p:cSld>
     <p:spTree>
       <p:nvGrpSpPr>
@@ -696,7 +900,7 @@
         <p:nvSpPr>
           <p:cNvPr id="2" name="Slide Image Placeholder 1"/>
           <p:cNvSpPr>
-            <a:spLocks noGrp="1" noRot="1" noChangeAspect="1"/>
+            <a:spLocks noGrp="1"/>
           </p:cNvSpPr>
           <p:nvPr>
             <p:ph type="sldImg" idx="2"/>
@@ -711,7 +915,7 @@
             <a:spLocks noGrp="1"/>
           </p:cNvSpPr>
           <p:nvPr>
-            <p:ph type="body" sz="quarter" idx="3"/>
+            <p:ph type="body" idx="3" sz="quarter"/>
           </p:nvPr>
         </p:nvSpPr>
         <p:spPr/>
@@ -742,7 +946,7 @@
             <a:spLocks noGrp="1"/>
           </p:cNvSpPr>
           <p:nvPr>
-            <p:ph type="sldNum" sz="quarter" idx="5"/>
+            <p:ph type="sldNum" idx="5" sz="quarter"/>
           </p:nvPr>
         </p:nvSpPr>
         <p:spPr/>
@@ -756,7 +960,7 @@
 </file>
 
 <file path=ppt/notesSlides/notesSlide6.xml><?xml version="1.0" encoding="utf-8"?>
-<p:notes xmlns:a="http://schemas.openxmlformats.org/drawingml/2006/main" xmlns:r="http://schemas.openxmlformats.org/officeDocument/2006/relationships" xmlns:p="http://schemas.openxmlformats.org/presentationml/2006/main">
+<p:notes xmlns:a="http://schemas.openxmlformats.org/drawingml/2006/main" xmlns:p="http://schemas.openxmlformats.org/presentationml/2006/main" xmlns:r="http://schemas.openxmlformats.org/officeDocument/2006/relationships">
   <p:cSld>
     <p:spTree>
       <p:nvGrpSpPr>
@@ -776,7 +980,7 @@
         <p:nvSpPr>
           <p:cNvPr id="2" name="Slide Image Placeholder 1"/>
           <p:cNvSpPr>
-            <a:spLocks noGrp="1" noRot="1" noChangeAspect="1"/>
+            <a:spLocks noGrp="1"/>
           </p:cNvSpPr>
           <p:nvPr>
             <p:ph type="sldImg" idx="2"/>
@@ -791,7 +995,7 @@
             <a:spLocks noGrp="1"/>
           </p:cNvSpPr>
           <p:nvPr>
-            <p:ph type="body" sz="quarter" idx="3"/>
+            <p:ph type="body" idx="3" sz="quarter"/>
           </p:nvPr>
         </p:nvSpPr>
         <p:spPr/>
@@ -817,7 +1021,7 @@
             <a:spLocks noGrp="1"/>
           </p:cNvSpPr>
           <p:nvPr>
-            <p:ph type="sldNum" sz="quarter" idx="5"/>
+            <p:ph type="sldNum" idx="5" sz="quarter"/>
           </p:nvPr>
         </p:nvSpPr>
         <p:spPr/>
@@ -831,7 +1035,7 @@
 </file>
 
 <file path=ppt/notesSlides/notesSlide7.xml><?xml version="1.0" encoding="utf-8"?>
-<p:notes xmlns:a="http://schemas.openxmlformats.org/drawingml/2006/main" xmlns:r="http://schemas.openxmlformats.org/officeDocument/2006/relationships" xmlns:p="http://schemas.openxmlformats.org/presentationml/2006/main">
+<p:notes xmlns:a="http://schemas.openxmlformats.org/drawingml/2006/main" xmlns:p="http://schemas.openxmlformats.org/presentationml/2006/main" xmlns:r="http://schemas.openxmlformats.org/officeDocument/2006/relationships">
   <p:cSld>
     <p:spTree>
       <p:nvGrpSpPr>
@@ -851,7 +1055,7 @@
         <p:nvSpPr>
           <p:cNvPr id="2" name="Slide Image Placeholder 1"/>
           <p:cNvSpPr>
-            <a:spLocks noGrp="1" noRot="1" noChangeAspect="1"/>
+            <a:spLocks noGrp="1"/>
           </p:cNvSpPr>
           <p:nvPr>
             <p:ph type="sldImg" idx="2"/>
@@ -866,7 +1070,7 @@
             <a:spLocks noGrp="1"/>
           </p:cNvSpPr>
           <p:nvPr>
-            <p:ph type="body" sz="quarter" idx="3"/>
+            <p:ph type="body" idx="3" sz="quarter"/>
           </p:nvPr>
         </p:nvSpPr>
         <p:spPr/>
@@ -892,7 +1096,7 @@
             <a:spLocks noGrp="1"/>
           </p:cNvSpPr>
           <p:nvPr>
-            <p:ph type="sldNum" sz="quarter" idx="5"/>
+            <p:ph type="sldNum" idx="5" sz="quarter"/>
           </p:nvPr>
         </p:nvSpPr>
         <p:spPr/>
@@ -906,7 +1110,7 @@
 </file>
 
 <file path=ppt/notesSlides/notesSlide8.xml><?xml version="1.0" encoding="utf-8"?>
-<p:notes xmlns:a="http://schemas.openxmlformats.org/drawingml/2006/main" xmlns:r="http://schemas.openxmlformats.org/officeDocument/2006/relationships" xmlns:p="http://schemas.openxmlformats.org/presentationml/2006/main">
+<p:notes xmlns:a="http://schemas.openxmlformats.org/drawingml/2006/main" xmlns:p="http://schemas.openxmlformats.org/presentationml/2006/main" xmlns:r="http://schemas.openxmlformats.org/officeDocument/2006/relationships">
   <p:cSld>
     <p:spTree>
       <p:nvGrpSpPr>
@@ -926,7 +1130,7 @@
         <p:nvSpPr>
           <p:cNvPr id="2" name="Slide Image Placeholder 1"/>
           <p:cNvSpPr>
-            <a:spLocks noGrp="1" noRot="1" noChangeAspect="1"/>
+            <a:spLocks noGrp="1"/>
           </p:cNvSpPr>
           <p:nvPr>
             <p:ph type="sldImg" idx="2"/>
@@ -941,7 +1145,7 @@
             <a:spLocks noGrp="1"/>
           </p:cNvSpPr>
           <p:nvPr>
-            <p:ph type="body" sz="quarter" idx="3"/>
+            <p:ph type="body" idx="3" sz="quarter"/>
           </p:nvPr>
         </p:nvSpPr>
         <p:spPr/>
@@ -967,7 +1171,7 @@
             <a:spLocks noGrp="1"/>
           </p:cNvSpPr>
           <p:nvPr>
-            <p:ph type="sldNum" sz="quarter" idx="5"/>
+            <p:ph type="sldNum" idx="5" sz="quarter"/>
           </p:nvPr>
         </p:nvSpPr>
         <p:spPr/>
@@ -981,7 +1185,7 @@
 </file>
 
 <file path=ppt/notesSlides/notesSlide9.xml><?xml version="1.0" encoding="utf-8"?>
-<p:notes xmlns:a="http://schemas.openxmlformats.org/drawingml/2006/main" xmlns:r="http://schemas.openxmlformats.org/officeDocument/2006/relationships" xmlns:p="http://schemas.openxmlformats.org/presentationml/2006/main">
+<p:notes xmlns:a="http://schemas.openxmlformats.org/drawingml/2006/main" xmlns:p="http://schemas.openxmlformats.org/presentationml/2006/main" xmlns:r="http://schemas.openxmlformats.org/officeDocument/2006/relationships">
   <p:cSld>
     <p:spTree>
       <p:nvGrpSpPr>
@@ -1001,7 +1205,7 @@
         <p:nvSpPr>
           <p:cNvPr id="2" name="Slide Image Placeholder 1"/>
           <p:cNvSpPr>
-            <a:spLocks noGrp="1" noRot="1" noChangeAspect="1"/>
+            <a:spLocks noGrp="1"/>
           </p:cNvSpPr>
           <p:nvPr>
             <p:ph type="sldImg" idx="2"/>
@@ -1016,7 +1220,7 @@
             <a:spLocks noGrp="1"/>
           </p:cNvSpPr>
           <p:nvPr>
-            <p:ph type="body" sz="quarter" idx="3"/>
+            <p:ph type="body" idx="3" sz="quarter"/>
           </p:nvPr>
         </p:nvSpPr>
         <p:spPr/>
@@ -1042,7 +1246,7 @@
             <a:spLocks noGrp="1"/>
           </p:cNvSpPr>
           <p:nvPr>
-            <p:ph type="sldNum" sz="quarter" idx="5"/>
+            <p:ph type="sldNum" idx="5" sz="quarter"/>
           </p:nvPr>
         </p:nvSpPr>
         <p:spPr/>
@@ -1093,9 +1297,10 @@
           <a:lstStyle/>
           <a:p>
             <a:r>
-              <a:rPr lang="en-US"/>
+              <a:rPr lang="en-US" smtClean="0"/>
               <a:t>Click to edit Master title style</a:t>
             </a:r>
+            <a:endParaRPr lang="en-US"/>
           </a:p>
         </p:txBody>
       </p:sp>
@@ -1211,9 +1416,10 @@
           </a:lstStyle>
           <a:p>
             <a:r>
-              <a:rPr lang="en-US"/>
+              <a:rPr lang="en-US" smtClean="0"/>
               <a:t>Click to edit Master subtitle style</a:t>
             </a:r>
+            <a:endParaRPr lang="en-US"/>
           </a:p>
         </p:txBody>
       </p:sp>
@@ -1234,7 +1440,7 @@
           <a:p>
             <a:fld id="{5BCAD085-E8A6-8845-BD4E-CB4CCA059FC4}" type="datetimeFigureOut">
               <a:rPr lang="en-US" smtClean="0"/>
-              <a:t>9/6/2026</a:t>
+              <a:t>1/27/13</a:t>
             </a:fld>
             <a:endParaRPr lang="en-US"/>
           </a:p>
@@ -1328,9 +1534,10 @@
           <a:lstStyle/>
           <a:p>
             <a:r>
-              <a:rPr lang="en-US"/>
+              <a:rPr lang="en-US" smtClean="0"/>
               <a:t>Click to edit Master title style</a:t>
             </a:r>
+            <a:endParaRPr lang="en-US"/>
           </a:p>
         </p:txBody>
       </p:sp>
@@ -1351,37 +1558,38 @@
           <a:p>
             <a:pPr lvl="0"/>
             <a:r>
-              <a:rPr lang="en-US"/>
+              <a:rPr lang="en-US" smtClean="0"/>
               <a:t>Click to edit Master text styles</a:t>
             </a:r>
           </a:p>
           <a:p>
             <a:pPr lvl="1"/>
             <a:r>
-              <a:rPr lang="en-US"/>
+              <a:rPr lang="en-US" smtClean="0"/>
               <a:t>Second level</a:t>
             </a:r>
           </a:p>
           <a:p>
             <a:pPr lvl="2"/>
             <a:r>
-              <a:rPr lang="en-US"/>
+              <a:rPr lang="en-US" smtClean="0"/>
               <a:t>Third level</a:t>
             </a:r>
           </a:p>
           <a:p>
             <a:pPr lvl="3"/>
             <a:r>
-              <a:rPr lang="en-US"/>
+              <a:rPr lang="en-US" smtClean="0"/>
               <a:t>Fourth level</a:t>
             </a:r>
           </a:p>
           <a:p>
             <a:pPr lvl="4"/>
             <a:r>
-              <a:rPr lang="en-US"/>
+              <a:rPr lang="en-US" smtClean="0"/>
               <a:t>Fifth level</a:t>
             </a:r>
+            <a:endParaRPr lang="en-US"/>
           </a:p>
         </p:txBody>
       </p:sp>
@@ -1402,7 +1610,7 @@
           <a:p>
             <a:fld id="{5BCAD085-E8A6-8845-BD4E-CB4CCA059FC4}" type="datetimeFigureOut">
               <a:rPr lang="en-US" smtClean="0"/>
-              <a:t>9/6/2026</a:t>
+              <a:t>1/27/13</a:t>
             </a:fld>
             <a:endParaRPr lang="en-US"/>
           </a:p>
@@ -1501,9 +1709,10 @@
           <a:lstStyle/>
           <a:p>
             <a:r>
-              <a:rPr lang="en-US"/>
+              <a:rPr lang="en-US" smtClean="0"/>
               <a:t>Click to edit Master title style</a:t>
             </a:r>
+            <a:endParaRPr lang="en-US"/>
           </a:p>
         </p:txBody>
       </p:sp>
@@ -1529,37 +1738,38 @@
           <a:p>
             <a:pPr lvl="0"/>
             <a:r>
-              <a:rPr lang="en-US"/>
+              <a:rPr lang="en-US" smtClean="0"/>
               <a:t>Click to edit Master text styles</a:t>
             </a:r>
           </a:p>
           <a:p>
             <a:pPr lvl="1"/>
             <a:r>
-              <a:rPr lang="en-US"/>
+              <a:rPr lang="en-US" smtClean="0"/>
               <a:t>Second level</a:t>
             </a:r>
           </a:p>
           <a:p>
             <a:pPr lvl="2"/>
             <a:r>
-              <a:rPr lang="en-US"/>
+              <a:rPr lang="en-US" smtClean="0"/>
               <a:t>Third level</a:t>
             </a:r>
           </a:p>
           <a:p>
             <a:pPr lvl="3"/>
             <a:r>
-              <a:rPr lang="en-US"/>
+              <a:rPr lang="en-US" smtClean="0"/>
               <a:t>Fourth level</a:t>
             </a:r>
           </a:p>
           <a:p>
             <a:pPr lvl="4"/>
             <a:r>
-              <a:rPr lang="en-US"/>
+              <a:rPr lang="en-US" smtClean="0"/>
               <a:t>Fifth level</a:t>
             </a:r>
+            <a:endParaRPr lang="en-US"/>
           </a:p>
         </p:txBody>
       </p:sp>
@@ -1580,7 +1790,7 @@
           <a:p>
             <a:fld id="{5BCAD085-E8A6-8845-BD4E-CB4CCA059FC4}" type="datetimeFigureOut">
               <a:rPr lang="en-US" smtClean="0"/>
-              <a:t>9/6/2026</a:t>
+              <a:t>1/27/13</a:t>
             </a:fld>
             <a:endParaRPr lang="en-US"/>
           </a:p>
@@ -1674,9 +1884,10 @@
           <a:lstStyle/>
           <a:p>
             <a:r>
-              <a:rPr lang="en-US"/>
+              <a:rPr lang="en-US" smtClean="0"/>
               <a:t>Click to edit Master title style</a:t>
             </a:r>
+            <a:endParaRPr lang="en-US"/>
           </a:p>
         </p:txBody>
       </p:sp>
@@ -1697,37 +1908,38 @@
           <a:p>
             <a:pPr lvl="0"/>
             <a:r>
-              <a:rPr lang="en-US"/>
+              <a:rPr lang="en-US" smtClean="0"/>
               <a:t>Click to edit Master text styles</a:t>
             </a:r>
           </a:p>
           <a:p>
             <a:pPr lvl="1"/>
             <a:r>
-              <a:rPr lang="en-US"/>
+              <a:rPr lang="en-US" smtClean="0"/>
               <a:t>Second level</a:t>
             </a:r>
           </a:p>
           <a:p>
             <a:pPr lvl="2"/>
             <a:r>
-              <a:rPr lang="en-US"/>
+              <a:rPr lang="en-US" smtClean="0"/>
               <a:t>Third level</a:t>
             </a:r>
           </a:p>
           <a:p>
             <a:pPr lvl="3"/>
             <a:r>
-              <a:rPr lang="en-US"/>
+              <a:rPr lang="en-US" smtClean="0"/>
               <a:t>Fourth level</a:t>
             </a:r>
           </a:p>
           <a:p>
             <a:pPr lvl="4"/>
             <a:r>
-              <a:rPr lang="en-US"/>
+              <a:rPr lang="en-US" smtClean="0"/>
               <a:t>Fifth level</a:t>
             </a:r>
+            <a:endParaRPr lang="en-US"/>
           </a:p>
         </p:txBody>
       </p:sp>
@@ -1748,7 +1960,7 @@
           <a:p>
             <a:fld id="{5BCAD085-E8A6-8845-BD4E-CB4CCA059FC4}" type="datetimeFigureOut">
               <a:rPr lang="en-US" smtClean="0"/>
-              <a:t>9/6/2026</a:t>
+              <a:t>1/27/13</a:t>
             </a:fld>
             <a:endParaRPr lang="en-US"/>
           </a:p>
@@ -1851,9 +2063,10 @@
           </a:lstStyle>
           <a:p>
             <a:r>
-              <a:rPr lang="en-US"/>
+              <a:rPr lang="en-US" smtClean="0"/>
               <a:t>Click to edit Master title style</a:t>
             </a:r>
+            <a:endParaRPr lang="en-US"/>
           </a:p>
         </p:txBody>
       </p:sp>
@@ -1970,7 +2183,7 @@
           <a:p>
             <a:pPr lvl="0"/>
             <a:r>
-              <a:rPr lang="en-US"/>
+              <a:rPr lang="en-US" smtClean="0"/>
               <a:t>Click to edit Master text styles</a:t>
             </a:r>
           </a:p>
@@ -1993,7 +2206,7 @@
           <a:p>
             <a:fld id="{5BCAD085-E8A6-8845-BD4E-CB4CCA059FC4}" type="datetimeFigureOut">
               <a:rPr lang="en-US" smtClean="0"/>
-              <a:t>9/6/2026</a:t>
+              <a:t>1/27/13</a:t>
             </a:fld>
             <a:endParaRPr lang="en-US"/>
           </a:p>
@@ -2087,9 +2300,10 @@
           <a:lstStyle/>
           <a:p>
             <a:r>
-              <a:rPr lang="en-US"/>
+              <a:rPr lang="en-US" smtClean="0"/>
               <a:t>Click to edit Master title style</a:t>
             </a:r>
+            <a:endParaRPr lang="en-US"/>
           </a:p>
         </p:txBody>
       </p:sp>
@@ -2143,37 +2357,38 @@
           <a:p>
             <a:pPr lvl="0"/>
             <a:r>
-              <a:rPr lang="en-US"/>
+              <a:rPr lang="en-US" smtClean="0"/>
               <a:t>Click to edit Master text styles</a:t>
             </a:r>
           </a:p>
           <a:p>
             <a:pPr lvl="1"/>
             <a:r>
-              <a:rPr lang="en-US"/>
+              <a:rPr lang="en-US" smtClean="0"/>
               <a:t>Second level</a:t>
             </a:r>
           </a:p>
           <a:p>
             <a:pPr lvl="2"/>
             <a:r>
-              <a:rPr lang="en-US"/>
+              <a:rPr lang="en-US" smtClean="0"/>
               <a:t>Third level</a:t>
             </a:r>
           </a:p>
           <a:p>
             <a:pPr lvl="3"/>
             <a:r>
-              <a:rPr lang="en-US"/>
+              <a:rPr lang="en-US" smtClean="0"/>
               <a:t>Fourth level</a:t>
             </a:r>
           </a:p>
           <a:p>
             <a:pPr lvl="4"/>
             <a:r>
-              <a:rPr lang="en-US"/>
+              <a:rPr lang="en-US" smtClean="0"/>
               <a:t>Fifth level</a:t>
             </a:r>
+            <a:endParaRPr lang="en-US"/>
           </a:p>
         </p:txBody>
       </p:sp>
@@ -2227,37 +2442,38 @@
           <a:p>
             <a:pPr lvl="0"/>
             <a:r>
-              <a:rPr lang="en-US"/>
+              <a:rPr lang="en-US" smtClean="0"/>
               <a:t>Click to edit Master text styles</a:t>
             </a:r>
           </a:p>
           <a:p>
             <a:pPr lvl="1"/>
             <a:r>
-              <a:rPr lang="en-US"/>
+              <a:rPr lang="en-US" smtClean="0"/>
               <a:t>Second level</a:t>
             </a:r>
           </a:p>
           <a:p>
             <a:pPr lvl="2"/>
             <a:r>
-              <a:rPr lang="en-US"/>
+              <a:rPr lang="en-US" smtClean="0"/>
               <a:t>Third level</a:t>
             </a:r>
           </a:p>
           <a:p>
             <a:pPr lvl="3"/>
             <a:r>
-              <a:rPr lang="en-US"/>
+              <a:rPr lang="en-US" smtClean="0"/>
               <a:t>Fourth level</a:t>
             </a:r>
           </a:p>
           <a:p>
             <a:pPr lvl="4"/>
             <a:r>
-              <a:rPr lang="en-US"/>
+              <a:rPr lang="en-US" smtClean="0"/>
               <a:t>Fifth level</a:t>
             </a:r>
+            <a:endParaRPr lang="en-US"/>
           </a:p>
         </p:txBody>
       </p:sp>
@@ -2278,7 +2494,7 @@
           <a:p>
             <a:fld id="{5BCAD085-E8A6-8845-BD4E-CB4CCA059FC4}" type="datetimeFigureOut">
               <a:rPr lang="en-US" smtClean="0"/>
-              <a:t>9/6/2026</a:t>
+              <a:t>1/27/13</a:t>
             </a:fld>
             <a:endParaRPr lang="en-US"/>
           </a:p>
@@ -2376,9 +2592,10 @@
           </a:lstStyle>
           <a:p>
             <a:r>
-              <a:rPr lang="en-US"/>
+              <a:rPr lang="en-US" smtClean="0"/>
               <a:t>Click to edit Master title style</a:t>
             </a:r>
+            <a:endParaRPr lang="en-US"/>
           </a:p>
         </p:txBody>
       </p:sp>
@@ -2441,7 +2658,7 @@
           <a:p>
             <a:pPr lvl="0"/>
             <a:r>
-              <a:rPr lang="en-US"/>
+              <a:rPr lang="en-US" smtClean="0"/>
               <a:t>Click to edit Master text styles</a:t>
             </a:r>
           </a:p>
@@ -2497,37 +2714,38 @@
           <a:p>
             <a:pPr lvl="0"/>
             <a:r>
-              <a:rPr lang="en-US"/>
+              <a:rPr lang="en-US" smtClean="0"/>
               <a:t>Click to edit Master text styles</a:t>
             </a:r>
           </a:p>
           <a:p>
             <a:pPr lvl="1"/>
             <a:r>
-              <a:rPr lang="en-US"/>
+              <a:rPr lang="en-US" smtClean="0"/>
               <a:t>Second level</a:t>
             </a:r>
           </a:p>
           <a:p>
             <a:pPr lvl="2"/>
             <a:r>
-              <a:rPr lang="en-US"/>
+              <a:rPr lang="en-US" smtClean="0"/>
               <a:t>Third level</a:t>
             </a:r>
           </a:p>
           <a:p>
             <a:pPr lvl="3"/>
             <a:r>
-              <a:rPr lang="en-US"/>
+              <a:rPr lang="en-US" smtClean="0"/>
               <a:t>Fourth level</a:t>
             </a:r>
           </a:p>
           <a:p>
             <a:pPr lvl="4"/>
             <a:r>
-              <a:rPr lang="en-US"/>
+              <a:rPr lang="en-US" smtClean="0"/>
               <a:t>Fifth level</a:t>
             </a:r>
+            <a:endParaRPr lang="en-US"/>
           </a:p>
         </p:txBody>
       </p:sp>
@@ -2590,7 +2808,7 @@
           <a:p>
             <a:pPr lvl="0"/>
             <a:r>
-              <a:rPr lang="en-US"/>
+              <a:rPr lang="en-US" smtClean="0"/>
               <a:t>Click to edit Master text styles</a:t>
             </a:r>
           </a:p>
@@ -2646,37 +2864,38 @@
           <a:p>
             <a:pPr lvl="0"/>
             <a:r>
-              <a:rPr lang="en-US"/>
+              <a:rPr lang="en-US" smtClean="0"/>
               <a:t>Click to edit Master text styles</a:t>
             </a:r>
           </a:p>
           <a:p>
             <a:pPr lvl="1"/>
             <a:r>
-              <a:rPr lang="en-US"/>
+              <a:rPr lang="en-US" smtClean="0"/>
               <a:t>Second level</a:t>
             </a:r>
           </a:p>
           <a:p>
             <a:pPr lvl="2"/>
             <a:r>
-              <a:rPr lang="en-US"/>
+              <a:rPr lang="en-US" smtClean="0"/>
               <a:t>Third level</a:t>
             </a:r>
           </a:p>
           <a:p>
             <a:pPr lvl="3"/>
             <a:r>
-              <a:rPr lang="en-US"/>
+              <a:rPr lang="en-US" smtClean="0"/>
               <a:t>Fourth level</a:t>
             </a:r>
           </a:p>
           <a:p>
             <a:pPr lvl="4"/>
             <a:r>
-              <a:rPr lang="en-US"/>
+              <a:rPr lang="en-US" smtClean="0"/>
               <a:t>Fifth level</a:t>
             </a:r>
+            <a:endParaRPr lang="en-US"/>
           </a:p>
         </p:txBody>
       </p:sp>
@@ -2697,7 +2916,7 @@
           <a:p>
             <a:fld id="{5BCAD085-E8A6-8845-BD4E-CB4CCA059FC4}" type="datetimeFigureOut">
               <a:rPr lang="en-US" smtClean="0"/>
-              <a:t>9/6/2026</a:t>
+              <a:t>1/27/13</a:t>
             </a:fld>
             <a:endParaRPr lang="en-US"/>
           </a:p>
@@ -2791,9 +3010,10 @@
           <a:lstStyle/>
           <a:p>
             <a:r>
-              <a:rPr lang="en-US"/>
+              <a:rPr lang="en-US" smtClean="0"/>
               <a:t>Click to edit Master title style</a:t>
             </a:r>
+            <a:endParaRPr lang="en-US"/>
           </a:p>
         </p:txBody>
       </p:sp>
@@ -2814,7 +3034,7 @@
           <a:p>
             <a:fld id="{5BCAD085-E8A6-8845-BD4E-CB4CCA059FC4}" type="datetimeFigureOut">
               <a:rPr lang="en-US" smtClean="0"/>
-              <a:t>9/6/2026</a:t>
+              <a:t>1/27/13</a:t>
             </a:fld>
             <a:endParaRPr lang="en-US"/>
           </a:p>
@@ -2909,7 +3129,7 @@
           <a:p>
             <a:fld id="{5BCAD085-E8A6-8845-BD4E-CB4CCA059FC4}" type="datetimeFigureOut">
               <a:rPr lang="en-US" smtClean="0"/>
-              <a:t>9/6/2026</a:t>
+              <a:t>1/27/13</a:t>
             </a:fld>
             <a:endParaRPr lang="en-US"/>
           </a:p>
@@ -3012,9 +3232,10 @@
           </a:lstStyle>
           <a:p>
             <a:r>
-              <a:rPr lang="en-US"/>
+              <a:rPr lang="en-US" smtClean="0"/>
               <a:t>Click to edit Master title style</a:t>
             </a:r>
+            <a:endParaRPr lang="en-US"/>
           </a:p>
         </p:txBody>
       </p:sp>
@@ -3068,37 +3289,38 @@
           <a:p>
             <a:pPr lvl="0"/>
             <a:r>
-              <a:rPr lang="en-US"/>
+              <a:rPr lang="en-US" smtClean="0"/>
               <a:t>Click to edit Master text styles</a:t>
             </a:r>
           </a:p>
           <a:p>
             <a:pPr lvl="1"/>
             <a:r>
-              <a:rPr lang="en-US"/>
+              <a:rPr lang="en-US" smtClean="0"/>
               <a:t>Second level</a:t>
             </a:r>
           </a:p>
           <a:p>
             <a:pPr lvl="2"/>
             <a:r>
-              <a:rPr lang="en-US"/>
+              <a:rPr lang="en-US" smtClean="0"/>
               <a:t>Third level</a:t>
             </a:r>
           </a:p>
           <a:p>
             <a:pPr lvl="3"/>
             <a:r>
-              <a:rPr lang="en-US"/>
+              <a:rPr lang="en-US" smtClean="0"/>
               <a:t>Fourth level</a:t>
             </a:r>
           </a:p>
           <a:p>
             <a:pPr lvl="4"/>
             <a:r>
-              <a:rPr lang="en-US"/>
+              <a:rPr lang="en-US" smtClean="0"/>
               <a:t>Fifth level</a:t>
             </a:r>
+            <a:endParaRPr lang="en-US"/>
           </a:p>
         </p:txBody>
       </p:sp>
@@ -3161,7 +3383,7 @@
           <a:p>
             <a:pPr lvl="0"/>
             <a:r>
-              <a:rPr lang="en-US"/>
+              <a:rPr lang="en-US" smtClean="0"/>
               <a:t>Click to edit Master text styles</a:t>
             </a:r>
           </a:p>
@@ -3184,7 +3406,7 @@
           <a:p>
             <a:fld id="{5BCAD085-E8A6-8845-BD4E-CB4CCA059FC4}" type="datetimeFigureOut">
               <a:rPr lang="en-US" smtClean="0"/>
-              <a:t>9/6/2026</a:t>
+              <a:t>1/27/13</a:t>
             </a:fld>
             <a:endParaRPr lang="en-US"/>
           </a:p>
@@ -3287,9 +3509,10 @@
           </a:lstStyle>
           <a:p>
             <a:r>
-              <a:rPr lang="en-US"/>
+              <a:rPr lang="en-US" smtClean="0"/>
               <a:t>Click to edit Master title style</a:t>
             </a:r>
+            <a:endParaRPr lang="en-US"/>
           </a:p>
         </p:txBody>
       </p:sp>
@@ -3413,7 +3636,7 @@
           <a:p>
             <a:pPr lvl="0"/>
             <a:r>
-              <a:rPr lang="en-US"/>
+              <a:rPr lang="en-US" smtClean="0"/>
               <a:t>Click to edit Master text styles</a:t>
             </a:r>
           </a:p>
@@ -3436,7 +3659,7 @@
           <a:p>
             <a:fld id="{5BCAD085-E8A6-8845-BD4E-CB4CCA059FC4}" type="datetimeFigureOut">
               <a:rPr lang="en-US" smtClean="0"/>
-              <a:t>9/6/2026</a:t>
+              <a:t>1/27/13</a:t>
             </a:fld>
             <a:endParaRPr lang="en-US"/>
           </a:p>
@@ -3545,9 +3768,10 @@
           <a:lstStyle/>
           <a:p>
             <a:r>
-              <a:rPr lang="en-US"/>
+              <a:rPr lang="en-US" smtClean="0"/>
               <a:t>Click to edit Master title style</a:t>
             </a:r>
+            <a:endParaRPr lang="en-US"/>
           </a:p>
         </p:txBody>
       </p:sp>
@@ -3578,37 +3802,38 @@
           <a:p>
             <a:pPr lvl="0"/>
             <a:r>
-              <a:rPr lang="en-US"/>
+              <a:rPr lang="en-US" smtClean="0"/>
               <a:t>Click to edit Master text styles</a:t>
             </a:r>
           </a:p>
           <a:p>
             <a:pPr lvl="1"/>
             <a:r>
-              <a:rPr lang="en-US"/>
+              <a:rPr lang="en-US" smtClean="0"/>
               <a:t>Second level</a:t>
             </a:r>
           </a:p>
           <a:p>
             <a:pPr lvl="2"/>
             <a:r>
-              <a:rPr lang="en-US"/>
+              <a:rPr lang="en-US" smtClean="0"/>
               <a:t>Third level</a:t>
             </a:r>
           </a:p>
           <a:p>
             <a:pPr lvl="3"/>
             <a:r>
-              <a:rPr lang="en-US"/>
+              <a:rPr lang="en-US" smtClean="0"/>
               <a:t>Fourth level</a:t>
             </a:r>
           </a:p>
           <a:p>
             <a:pPr lvl="4"/>
             <a:r>
-              <a:rPr lang="en-US"/>
+              <a:rPr lang="en-US" smtClean="0"/>
               <a:t>Fifth level</a:t>
             </a:r>
+            <a:endParaRPr lang="en-US"/>
           </a:p>
         </p:txBody>
       </p:sp>
@@ -3647,7 +3872,7 @@
           <a:p>
             <a:fld id="{5BCAD085-E8A6-8845-BD4E-CB4CCA059FC4}" type="datetimeFigureOut">
               <a:rPr lang="en-US" smtClean="0"/>
-              <a:t>9/6/2026</a:t>
+              <a:t>1/27/13</a:t>
             </a:fld>
             <a:endParaRPr lang="en-US"/>
           </a:p>
@@ -4006,7 +4231,7 @@
 </file>
 
 <file path=ppt/slides/slide1.xml><?xml version="1.0" encoding="utf-8"?>
-<p:sld xmlns:a="http://schemas.openxmlformats.org/drawingml/2006/main" xmlns:r="http://schemas.openxmlformats.org/officeDocument/2006/relationships" xmlns:p="http://schemas.openxmlformats.org/presentationml/2006/main">
+<p:sld xmlns:a="http://schemas.openxmlformats.org/drawingml/2006/main" xmlns:p="http://schemas.openxmlformats.org/presentationml/2006/main" xmlns:r="http://schemas.openxmlformats.org/officeDocument/2006/relationships">
   <p:cSld>
     <p:spTree>
       <p:nvGrpSpPr>
@@ -4014,14 +4239,7 @@
         <p:cNvGrpSpPr/>
         <p:nvPr/>
       </p:nvGrpSpPr>
-      <p:grpSpPr>
-        <a:xfrm>
-          <a:off x="0" y="0"/>
-          <a:ext cx="0" cy="0"/>
-          <a:chOff x="0" y="0"/>
-          <a:chExt cx="0" cy="0"/>
-        </a:xfrm>
-      </p:grpSpPr>
+      <p:grpSpPr/>
       <p:pic>
         <p:nvPicPr>
           <p:cNvPr id="2" name="Picture 1" descr="bg_hero.png"/>
@@ -4031,7 +4249,7 @@
           <p:nvPr/>
         </p:nvPicPr>
         <p:blipFill>
-          <a:blip r:embed="rId3"/>
+          <a:blip r:embed="rId2"/>
           <a:stretch>
             <a:fillRect/>
           </a:stretch>
@@ -4063,7 +4281,7 @@
           <a:noFill/>
         </p:spPr>
         <p:txBody>
-          <a:bodyPr wrap="square" lIns="0" tIns="0" rIns="0" bIns="0" anchor="t">
+          <a:bodyPr wrap="square" anchor="t" lIns="0" rIns="0" tIns="0" bIns="0">
             <a:spAutoFit/>
           </a:bodyPr>
           <a:lstStyle/>
@@ -4102,7 +4320,7 @@
           <a:noFill/>
         </p:spPr>
         <p:txBody>
-          <a:bodyPr wrap="square" lIns="0" tIns="0" rIns="0" bIns="0" anchor="t">
+          <a:bodyPr wrap="square" anchor="t" lIns="0" rIns="0" tIns="0" bIns="0">
             <a:spAutoFit/>
           </a:bodyPr>
           <a:lstStyle/>
@@ -4141,7 +4359,7 @@
           <a:noFill/>
         </p:spPr>
         <p:txBody>
-          <a:bodyPr wrap="square" lIns="0" tIns="0" rIns="0" bIns="0" anchor="t">
+          <a:bodyPr wrap="square" anchor="t" lIns="0" rIns="0" tIns="0" bIns="0">
             <a:spAutoFit/>
           </a:bodyPr>
           <a:lstStyle/>
@@ -4224,7 +4442,6 @@
           <a:lstStyle/>
           <a:p>
             <a:pPr algn="ctr"/>
-            <a:endParaRPr/>
           </a:p>
         </p:txBody>
       </p:sp>
@@ -4245,7 +4462,7 @@
           <a:noFill/>
         </p:spPr>
         <p:txBody>
-          <a:bodyPr wrap="square" lIns="0" tIns="0" rIns="0" bIns="0" anchor="t">
+          <a:bodyPr wrap="square" anchor="t" lIns="0" rIns="0" tIns="0" bIns="0">
             <a:spAutoFit/>
           </a:bodyPr>
           <a:lstStyle/>
@@ -4284,7 +4501,7 @@
           <a:noFill/>
         </p:spPr>
         <p:txBody>
-          <a:bodyPr wrap="square" lIns="0" tIns="0" rIns="0" bIns="0" anchor="t">
+          <a:bodyPr wrap="square" anchor="t" lIns="0" rIns="0" tIns="0" bIns="0">
             <a:spAutoFit/>
           </a:bodyPr>
           <a:lstStyle/>
@@ -4323,7 +4540,7 @@
           <a:noFill/>
         </p:spPr>
         <p:txBody>
-          <a:bodyPr wrap="square" lIns="0" tIns="0" rIns="0" bIns="0" anchor="t">
+          <a:bodyPr wrap="square" anchor="t" lIns="0" rIns="0" tIns="0" bIns="0">
             <a:spAutoFit/>
           </a:bodyPr>
           <a:lstStyle/>
@@ -4362,7 +4579,7 @@
           <a:noFill/>
         </p:spPr>
         <p:txBody>
-          <a:bodyPr wrap="square" lIns="0" tIns="0" rIns="0" bIns="0" anchor="t">
+          <a:bodyPr wrap="square" anchor="t" lIns="0" rIns="0" tIns="0" bIns="0">
             <a:spAutoFit/>
           </a:bodyPr>
           <a:lstStyle/>
@@ -4372,7 +4589,15 @@
                 <a:spcPct val="125000"/>
               </a:lnSpc>
             </a:pPr>
-            <a:endParaRPr/>
+            <a:r>
+              <a:rPr sz="900" b="1" i="0" spc="140">
+                <a:solidFill>
+                  <a:srgbClr val="22D3EE"/>
+                </a:solidFill>
+                <a:latin typeface="Segoe UI"/>
+              </a:rPr>
+              <a:t/>
+            </a:r>
           </a:p>
         </p:txBody>
       </p:sp>
@@ -4393,7 +4618,7 @@
           <a:noFill/>
         </p:spPr>
         <p:txBody>
-          <a:bodyPr wrap="square" lIns="0" tIns="0" rIns="0" bIns="0" anchor="t">
+          <a:bodyPr wrap="square" anchor="t" lIns="0" rIns="0" tIns="0" bIns="0">
             <a:spAutoFit/>
           </a:bodyPr>
           <a:lstStyle/>
@@ -4432,7 +4657,7 @@
           <a:noFill/>
         </p:spPr>
         <p:txBody>
-          <a:bodyPr wrap="square" lIns="0" tIns="0" rIns="0" bIns="0" anchor="t">
+          <a:bodyPr wrap="square" anchor="t" lIns="0" rIns="0" tIns="0" bIns="0">
             <a:spAutoFit/>
           </a:bodyPr>
           <a:lstStyle/>
@@ -4471,7 +4696,7 @@
           <a:noFill/>
         </p:spPr>
         <p:txBody>
-          <a:bodyPr wrap="square" lIns="0" tIns="0" rIns="0" bIns="0" anchor="t">
+          <a:bodyPr wrap="square" anchor="t" lIns="0" rIns="0" tIns="0" bIns="0">
             <a:spAutoFit/>
           </a:bodyPr>
           <a:lstStyle/>
@@ -4510,7 +4735,7 @@
           <a:noFill/>
         </p:spPr>
         <p:txBody>
-          <a:bodyPr wrap="square" lIns="0" tIns="0" rIns="0" bIns="0" anchor="t">
+          <a:bodyPr wrap="square" anchor="t" lIns="0" rIns="0" tIns="0" bIns="0">
             <a:spAutoFit/>
           </a:bodyPr>
           <a:lstStyle/>
@@ -4549,7 +4774,7 @@
           <a:noFill/>
         </p:spPr>
         <p:txBody>
-          <a:bodyPr wrap="square" lIns="0" tIns="0" rIns="0" bIns="0" anchor="t">
+          <a:bodyPr wrap="square" anchor="t" lIns="0" rIns="0" tIns="0" bIns="0">
             <a:spAutoFit/>
           </a:bodyPr>
           <a:lstStyle/>
@@ -4588,7 +4813,7 @@
           <a:noFill/>
         </p:spPr>
         <p:txBody>
-          <a:bodyPr wrap="square" lIns="0" tIns="0" rIns="0" bIns="0" anchor="t">
+          <a:bodyPr wrap="square" anchor="t" lIns="0" rIns="0" tIns="0" bIns="0">
             <a:spAutoFit/>
           </a:bodyPr>
           <a:lstStyle/>
@@ -4615,23 +4840,11 @@
   <p:clrMapOvr>
     <a:masterClrMapping/>
   </p:clrMapOvr>
-  <mc:AlternateContent xmlns:mc="http://schemas.openxmlformats.org/markup-compatibility/2006">
-    <mc:Choice xmlns:p14="http://schemas.microsoft.com/office/powerpoint/2010/main" Requires="p14">
-      <p:transition spd="med" p14:dur="700">
-        <p:fade thruBlk="1"/>
-      </p:transition>
-    </mc:Choice>
-    <mc:Fallback>
-      <p:transition spd="med">
-        <p:fade thruBlk="1"/>
-      </p:transition>
-    </mc:Fallback>
-  </mc:AlternateContent>
 </p:sld>
 </file>
 
 <file path=ppt/slides/slide10.xml><?xml version="1.0" encoding="utf-8"?>
-<p:sld xmlns:a="http://schemas.openxmlformats.org/drawingml/2006/main" xmlns:r="http://schemas.openxmlformats.org/officeDocument/2006/relationships" xmlns:p="http://schemas.openxmlformats.org/presentationml/2006/main">
+<p:sld xmlns:a="http://schemas.openxmlformats.org/drawingml/2006/main" xmlns:p="http://schemas.openxmlformats.org/presentationml/2006/main" xmlns:r="http://schemas.openxmlformats.org/officeDocument/2006/relationships">
   <p:cSld>
     <p:spTree>
       <p:nvGrpSpPr>
@@ -4639,14 +4852,7 @@
         <p:cNvGrpSpPr/>
         <p:nvPr/>
       </p:nvGrpSpPr>
-      <p:grpSpPr>
-        <a:xfrm>
-          <a:off x="0" y="0"/>
-          <a:ext cx="0" cy="0"/>
-          <a:chOff x="0" y="0"/>
-          <a:chExt cx="0" cy="0"/>
-        </a:xfrm>
-      </p:grpSpPr>
+      <p:grpSpPr/>
       <p:pic>
         <p:nvPicPr>
           <p:cNvPr id="2" name="Picture 1" descr="bg_deep.png"/>
@@ -4688,7 +4894,7 @@
           <a:noFill/>
         </p:spPr>
         <p:txBody>
-          <a:bodyPr wrap="square" lIns="0" tIns="0" rIns="0" bIns="0" anchor="t">
+          <a:bodyPr wrap="square" anchor="t" lIns="0" rIns="0" tIns="0" bIns="0">
             <a:spAutoFit/>
           </a:bodyPr>
           <a:lstStyle/>
@@ -4727,7 +4933,7 @@
           <a:noFill/>
         </p:spPr>
         <p:txBody>
-          <a:bodyPr wrap="square" lIns="0" tIns="0" rIns="0" bIns="0" anchor="t">
+          <a:bodyPr wrap="square" anchor="t" lIns="0" rIns="0" tIns="0" bIns="0">
             <a:spAutoFit/>
           </a:bodyPr>
           <a:lstStyle/>
@@ -4766,7 +4972,7 @@
           <a:noFill/>
         </p:spPr>
         <p:txBody>
-          <a:bodyPr wrap="square" lIns="0" tIns="0" rIns="0" bIns="0" anchor="t">
+          <a:bodyPr wrap="square" anchor="t" lIns="0" rIns="0" tIns="0" bIns="0">
             <a:spAutoFit/>
           </a:bodyPr>
           <a:lstStyle/>
@@ -4829,7 +5035,7 @@
           </a:fontRef>
         </p:style>
         <p:txBody>
-          <a:bodyPr wrap="square" lIns="73152" tIns="36576" rIns="73152" bIns="36576" rtlCol="0" anchor="ctr"/>
+          <a:bodyPr rtlCol="0" anchor="ctr" wrap="square" lIns="73152" rIns="73152" tIns="36576" bIns="36576"/>
           <a:lstStyle/>
           <a:p>
             <a:pPr algn="ctr"/>
@@ -4939,7 +5145,7 @@
           </a:fontRef>
         </p:style>
         <p:txBody>
-          <a:bodyPr wrap="square" lIns="73152" tIns="36576" rIns="73152" bIns="36576" rtlCol="0" anchor="ctr"/>
+          <a:bodyPr rtlCol="0" anchor="ctr" wrap="square" lIns="73152" rIns="73152" tIns="36576" bIns="36576"/>
           <a:lstStyle/>
           <a:p>
             <a:pPr algn="ctr"/>
@@ -5049,7 +5255,7 @@
           </a:fontRef>
         </p:style>
         <p:txBody>
-          <a:bodyPr wrap="square" lIns="73152" tIns="36576" rIns="73152" bIns="36576" rtlCol="0" anchor="ctr"/>
+          <a:bodyPr rtlCol="0" anchor="ctr" wrap="square" lIns="73152" rIns="73152" tIns="36576" bIns="36576"/>
           <a:lstStyle/>
           <a:p>
             <a:pPr algn="ctr"/>
@@ -5158,7 +5364,7 @@
           </a:fontRef>
         </p:style>
         <p:txBody>
-          <a:bodyPr wrap="square" lIns="73152" tIns="36576" rIns="73152" bIns="36576" rtlCol="0" anchor="ctr"/>
+          <a:bodyPr rtlCol="0" anchor="ctr" wrap="square" lIns="73152" rIns="73152" tIns="36576" bIns="36576"/>
           <a:lstStyle/>
           <a:p>
             <a:pPr algn="ctr"/>
@@ -5268,7 +5474,7 @@
           </a:fontRef>
         </p:style>
         <p:txBody>
-          <a:bodyPr wrap="square" lIns="73152" tIns="36576" rIns="73152" bIns="36576" rtlCol="0" anchor="ctr"/>
+          <a:bodyPr rtlCol="0" anchor="ctr" wrap="square" lIns="73152" rIns="73152" tIns="36576" bIns="36576"/>
           <a:lstStyle/>
           <a:p>
             <a:pPr algn="ctr"/>
@@ -5377,7 +5583,7 @@
           </a:fontRef>
         </p:style>
         <p:txBody>
-          <a:bodyPr wrap="square" lIns="73152" tIns="36576" rIns="73152" bIns="36576" rtlCol="0" anchor="ctr"/>
+          <a:bodyPr rtlCol="0" anchor="ctr" wrap="square" lIns="73152" rIns="73152" tIns="36576" bIns="36576"/>
           <a:lstStyle/>
           <a:p>
             <a:pPr algn="ctr"/>
@@ -5486,7 +5692,7 @@
           </a:fontRef>
         </p:style>
         <p:txBody>
-          <a:bodyPr wrap="square" lIns="73152" tIns="36576" rIns="73152" bIns="36576" rtlCol="0" anchor="ctr"/>
+          <a:bodyPr rtlCol="0" anchor="ctr" wrap="square" lIns="73152" rIns="73152" tIns="36576" bIns="36576"/>
           <a:lstStyle/>
           <a:p>
             <a:pPr algn="ctr"/>
@@ -5564,7 +5770,6 @@
           <a:lstStyle/>
           <a:p>
             <a:pPr algn="ctr"/>
-            <a:endParaRPr/>
           </a:p>
         </p:txBody>
       </p:sp>
@@ -5585,7 +5790,7 @@
           <a:noFill/>
         </p:spPr>
         <p:txBody>
-          <a:bodyPr wrap="square" lIns="0" tIns="0" rIns="0" bIns="0" anchor="t">
+          <a:bodyPr wrap="square" anchor="t" lIns="0" rIns="0" tIns="0" bIns="0">
             <a:spAutoFit/>
           </a:bodyPr>
           <a:lstStyle/>
@@ -5624,7 +5829,7 @@
           <a:noFill/>
         </p:spPr>
         <p:txBody>
-          <a:bodyPr wrap="square" lIns="0" tIns="0" rIns="0" bIns="0" anchor="t">
+          <a:bodyPr wrap="square" anchor="t" lIns="0" rIns="0" tIns="0" bIns="0">
             <a:spAutoFit/>
           </a:bodyPr>
           <a:lstStyle/>
@@ -5650,12 +5855,15 @@
                 <a:spcPct val="135000"/>
               </a:lnSpc>
             </a:pPr>
-            <a:endParaRPr sz="1050" b="0" i="0">
-              <a:solidFill>
-                <a:srgbClr val="F4F7FB"/>
-              </a:solidFill>
-              <a:latin typeface="Segoe UI"/>
-            </a:endParaRPr>
+            <a:r>
+              <a:rPr sz="1050" b="0" i="0">
+                <a:solidFill>
+                  <a:srgbClr val="F4F7FB"/>
+                </a:solidFill>
+                <a:latin typeface="Segoe UI"/>
+              </a:rPr>
+              <a:t/>
+            </a:r>
           </a:p>
           <a:p>
             <a:pPr algn="l">
@@ -5720,7 +5928,6 @@
           <a:lstStyle/>
           <a:p>
             <a:pPr algn="ctr"/>
-            <a:endParaRPr/>
           </a:p>
         </p:txBody>
       </p:sp>
@@ -5741,7 +5948,7 @@
           <a:noFill/>
         </p:spPr>
         <p:txBody>
-          <a:bodyPr wrap="square" lIns="0" tIns="0" rIns="0" bIns="0" anchor="t">
+          <a:bodyPr wrap="square" anchor="t" lIns="0" rIns="0" tIns="0" bIns="0">
             <a:spAutoFit/>
           </a:bodyPr>
           <a:lstStyle/>
@@ -5780,7 +5987,7 @@
           <a:noFill/>
         </p:spPr>
         <p:txBody>
-          <a:bodyPr wrap="square" lIns="0" tIns="0" rIns="0" bIns="0" anchor="t">
+          <a:bodyPr wrap="square" anchor="t" lIns="0" rIns="0" tIns="0" bIns="0">
             <a:spAutoFit/>
           </a:bodyPr>
           <a:lstStyle/>
@@ -5819,7 +6026,7 @@
           <a:noFill/>
         </p:spPr>
         <p:txBody>
-          <a:bodyPr wrap="square" lIns="0" tIns="0" rIns="0" bIns="0" anchor="t">
+          <a:bodyPr wrap="square" anchor="t" lIns="0" rIns="0" tIns="0" bIns="0">
             <a:spAutoFit/>
           </a:bodyPr>
           <a:lstStyle/>
@@ -5858,7 +6065,7 @@
           <a:noFill/>
         </p:spPr>
         <p:txBody>
-          <a:bodyPr wrap="square" lIns="0" tIns="0" rIns="0" bIns="0" anchor="t">
+          <a:bodyPr wrap="square" anchor="t" lIns="0" rIns="0" tIns="0" bIns="0">
             <a:spAutoFit/>
           </a:bodyPr>
           <a:lstStyle/>
@@ -5897,7 +6104,7 @@
           <a:noFill/>
         </p:spPr>
         <p:txBody>
-          <a:bodyPr wrap="square" lIns="0" tIns="0" rIns="0" bIns="0" anchor="t">
+          <a:bodyPr wrap="square" anchor="t" lIns="0" rIns="0" tIns="0" bIns="0">
             <a:spAutoFit/>
           </a:bodyPr>
           <a:lstStyle/>
@@ -5936,7 +6143,7 @@
           <a:noFill/>
         </p:spPr>
         <p:txBody>
-          <a:bodyPr wrap="square" lIns="0" tIns="0" rIns="0" bIns="0" anchor="t">
+          <a:bodyPr wrap="square" anchor="t" lIns="0" rIns="0" tIns="0" bIns="0">
             <a:spAutoFit/>
           </a:bodyPr>
           <a:lstStyle/>
@@ -5975,7 +6182,7 @@
           <a:noFill/>
         </p:spPr>
         <p:txBody>
-          <a:bodyPr wrap="square" lIns="0" tIns="0" rIns="0" bIns="0" anchor="t">
+          <a:bodyPr wrap="square" anchor="t" lIns="0" rIns="0" tIns="0" bIns="0">
             <a:spAutoFit/>
           </a:bodyPr>
           <a:lstStyle/>
@@ -6014,7 +6221,7 @@
           <a:noFill/>
         </p:spPr>
         <p:txBody>
-          <a:bodyPr wrap="square" lIns="0" tIns="0" rIns="0" bIns="0" anchor="t">
+          <a:bodyPr wrap="square" anchor="t" lIns="0" rIns="0" tIns="0" bIns="0">
             <a:spAutoFit/>
           </a:bodyPr>
           <a:lstStyle/>
@@ -6053,7 +6260,7 @@
           <a:noFill/>
         </p:spPr>
         <p:txBody>
-          <a:bodyPr wrap="square" lIns="0" tIns="0" rIns="0" bIns="0" anchor="t">
+          <a:bodyPr wrap="square" anchor="t" lIns="0" rIns="0" tIns="0" bIns="0">
             <a:spAutoFit/>
           </a:bodyPr>
           <a:lstStyle/>
@@ -6092,7 +6299,7 @@
           <a:noFill/>
         </p:spPr>
         <p:txBody>
-          <a:bodyPr wrap="square" lIns="0" tIns="0" rIns="0" bIns="0" anchor="t">
+          <a:bodyPr wrap="square" anchor="t" lIns="0" rIns="0" tIns="0" bIns="0">
             <a:spAutoFit/>
           </a:bodyPr>
           <a:lstStyle/>
@@ -6131,7 +6338,7 @@
           <a:noFill/>
         </p:spPr>
         <p:txBody>
-          <a:bodyPr wrap="square" lIns="0" tIns="0" rIns="0" bIns="0" anchor="t">
+          <a:bodyPr wrap="square" anchor="t" lIns="0" rIns="0" tIns="0" bIns="0">
             <a:spAutoFit/>
           </a:bodyPr>
           <a:lstStyle/>
@@ -6158,23 +6365,11 @@
   <p:clrMapOvr>
     <a:masterClrMapping/>
   </p:clrMapOvr>
-  <mc:AlternateContent xmlns:mc="http://schemas.openxmlformats.org/markup-compatibility/2006">
-    <mc:Choice xmlns:p14="http://schemas.microsoft.com/office/powerpoint/2010/main" Requires="p14">
-      <p:transition spd="med" p14:dur="700">
-        <p:fade thruBlk="1"/>
-      </p:transition>
-    </mc:Choice>
-    <mc:Fallback>
-      <p:transition spd="med">
-        <p:fade thruBlk="1"/>
-      </p:transition>
-    </mc:Fallback>
-  </mc:AlternateContent>
 </p:sld>
 </file>
 
 <file path=ppt/slides/slide11.xml><?xml version="1.0" encoding="utf-8"?>
-<p:sld xmlns:a="http://schemas.openxmlformats.org/drawingml/2006/main" xmlns:r="http://schemas.openxmlformats.org/officeDocument/2006/relationships" xmlns:p="http://schemas.openxmlformats.org/presentationml/2006/main">
+<p:sld xmlns:a="http://schemas.openxmlformats.org/drawingml/2006/main" xmlns:p="http://schemas.openxmlformats.org/presentationml/2006/main" xmlns:r="http://schemas.openxmlformats.org/officeDocument/2006/relationships">
   <p:cSld>
     <p:spTree>
       <p:nvGrpSpPr>
@@ -6182,14 +6377,7 @@
         <p:cNvGrpSpPr/>
         <p:nvPr/>
       </p:nvGrpSpPr>
-      <p:grpSpPr>
-        <a:xfrm>
-          <a:off x="0" y="0"/>
-          <a:ext cx="0" cy="0"/>
-          <a:chOff x="0" y="0"/>
-          <a:chExt cx="0" cy="0"/>
-        </a:xfrm>
-      </p:grpSpPr>
+      <p:grpSpPr/>
       <p:pic>
         <p:nvPicPr>
           <p:cNvPr id="2" name="Picture 1" descr="bg_deep.png"/>
@@ -6231,7 +6419,7 @@
           <a:noFill/>
         </p:spPr>
         <p:txBody>
-          <a:bodyPr wrap="square" lIns="0" tIns="0" rIns="0" bIns="0" anchor="t">
+          <a:bodyPr wrap="square" anchor="t" lIns="0" rIns="0" tIns="0" bIns="0">
             <a:spAutoFit/>
           </a:bodyPr>
           <a:lstStyle/>
@@ -6270,7 +6458,7 @@
           <a:noFill/>
         </p:spPr>
         <p:txBody>
-          <a:bodyPr wrap="square" lIns="0" tIns="0" rIns="0" bIns="0" anchor="t">
+          <a:bodyPr wrap="square" anchor="t" lIns="0" rIns="0" tIns="0" bIns="0">
             <a:spAutoFit/>
           </a:bodyPr>
           <a:lstStyle/>
@@ -6309,7 +6497,7 @@
           <a:noFill/>
         </p:spPr>
         <p:txBody>
-          <a:bodyPr wrap="square" lIns="0" tIns="0" rIns="0" bIns="0" anchor="t">
+          <a:bodyPr wrap="square" anchor="t" lIns="0" rIns="0" tIns="0" bIns="0">
             <a:spAutoFit/>
           </a:bodyPr>
           <a:lstStyle/>
@@ -6348,7 +6536,7 @@
           <a:noFill/>
         </p:spPr>
         <p:txBody>
-          <a:bodyPr wrap="square" lIns="0" tIns="0" rIns="0" bIns="0" anchor="t">
+          <a:bodyPr wrap="square" anchor="t" lIns="0" rIns="0" tIns="0" bIns="0">
             <a:spAutoFit/>
           </a:bodyPr>
           <a:lstStyle/>
@@ -6411,7 +6599,7 @@
           </a:fontRef>
         </p:style>
         <p:txBody>
-          <a:bodyPr wrap="square" lIns="73152" tIns="36576" rIns="73152" bIns="36576" rtlCol="0" anchor="ctr"/>
+          <a:bodyPr rtlCol="0" anchor="ctr" wrap="square" lIns="73152" rIns="73152" tIns="36576" bIns="36576"/>
           <a:lstStyle/>
           <a:p>
             <a:pPr algn="ctr"/>
@@ -6504,7 +6692,7 @@
           </a:fontRef>
         </p:style>
         <p:txBody>
-          <a:bodyPr wrap="square" lIns="73152" tIns="36576" rIns="73152" bIns="36576" rtlCol="0" anchor="ctr"/>
+          <a:bodyPr rtlCol="0" anchor="ctr" wrap="square" lIns="73152" rIns="73152" tIns="36576" bIns="36576"/>
           <a:lstStyle/>
           <a:p>
             <a:pPr algn="ctr"/>
@@ -6597,7 +6785,7 @@
           </a:fontRef>
         </p:style>
         <p:txBody>
-          <a:bodyPr wrap="square" lIns="73152" tIns="36576" rIns="73152" bIns="36576" rtlCol="0" anchor="ctr"/>
+          <a:bodyPr rtlCol="0" anchor="ctr" wrap="square" lIns="73152" rIns="73152" tIns="36576" bIns="36576"/>
           <a:lstStyle/>
           <a:p>
             <a:pPr algn="ctr"/>
@@ -6690,7 +6878,7 @@
           </a:fontRef>
         </p:style>
         <p:txBody>
-          <a:bodyPr wrap="square" lIns="73152" tIns="36576" rIns="73152" bIns="36576" rtlCol="0" anchor="ctr"/>
+          <a:bodyPr rtlCol="0" anchor="ctr" wrap="square" lIns="73152" rIns="73152" tIns="36576" bIns="36576"/>
           <a:lstStyle/>
           <a:p>
             <a:pPr algn="ctr"/>
@@ -6783,7 +6971,7 @@
           </a:fontRef>
         </p:style>
         <p:txBody>
-          <a:bodyPr wrap="square" lIns="73152" tIns="36576" rIns="73152" bIns="36576" rtlCol="0" anchor="ctr"/>
+          <a:bodyPr rtlCol="0" anchor="ctr" wrap="square" lIns="73152" rIns="73152" tIns="36576" bIns="36576"/>
           <a:lstStyle/>
           <a:p>
             <a:pPr algn="ctr"/>
@@ -6876,7 +7064,7 @@
           </a:fontRef>
         </p:style>
         <p:txBody>
-          <a:bodyPr wrap="square" lIns="73152" tIns="36576" rIns="73152" bIns="36576" rtlCol="0" anchor="ctr"/>
+          <a:bodyPr rtlCol="0" anchor="ctr" wrap="square" lIns="73152" rIns="73152" tIns="36576" bIns="36576"/>
           <a:lstStyle/>
           <a:p>
             <a:pPr algn="ctr"/>
@@ -6969,7 +7157,7 @@
           </a:fontRef>
         </p:style>
         <p:txBody>
-          <a:bodyPr wrap="square" lIns="73152" tIns="36576" rIns="73152" bIns="36576" rtlCol="0" anchor="ctr"/>
+          <a:bodyPr rtlCol="0" anchor="ctr" wrap="square" lIns="73152" rIns="73152" tIns="36576" bIns="36576"/>
           <a:lstStyle/>
           <a:p>
             <a:pPr algn="ctr"/>
@@ -7062,7 +7250,7 @@
           </a:fontRef>
         </p:style>
         <p:txBody>
-          <a:bodyPr wrap="square" lIns="73152" tIns="36576" rIns="73152" bIns="36576" rtlCol="0" anchor="ctr"/>
+          <a:bodyPr rtlCol="0" anchor="ctr" wrap="square" lIns="73152" rIns="73152" tIns="36576" bIns="36576"/>
           <a:lstStyle/>
           <a:p>
             <a:pPr algn="ctr"/>
@@ -7095,7 +7283,7 @@
           <a:noFill/>
         </p:spPr>
         <p:txBody>
-          <a:bodyPr wrap="square" lIns="0" tIns="0" rIns="0" bIns="0" anchor="t">
+          <a:bodyPr wrap="square" anchor="t" lIns="0" rIns="0" tIns="0" bIns="0">
             <a:spAutoFit/>
           </a:bodyPr>
           <a:lstStyle/>
@@ -7158,7 +7346,7 @@
           </a:fontRef>
         </p:style>
         <p:txBody>
-          <a:bodyPr wrap="square" lIns="73152" tIns="36576" rIns="73152" bIns="36576" rtlCol="0" anchor="ctr"/>
+          <a:bodyPr rtlCol="0" anchor="ctr" wrap="square" lIns="73152" rIns="73152" tIns="36576" bIns="36576"/>
           <a:lstStyle/>
           <a:p>
             <a:pPr algn="ctr"/>
@@ -7267,7 +7455,7 @@
           </a:fontRef>
         </p:style>
         <p:txBody>
-          <a:bodyPr wrap="square" lIns="73152" tIns="36576" rIns="73152" bIns="36576" rtlCol="0" anchor="ctr"/>
+          <a:bodyPr rtlCol="0" anchor="ctr" wrap="square" lIns="73152" rIns="73152" tIns="36576" bIns="36576"/>
           <a:lstStyle/>
           <a:p>
             <a:pPr algn="ctr"/>
@@ -7376,7 +7564,7 @@
           </a:fontRef>
         </p:style>
         <p:txBody>
-          <a:bodyPr wrap="square" lIns="73152" tIns="36576" rIns="73152" bIns="36576" rtlCol="0" anchor="ctr"/>
+          <a:bodyPr rtlCol="0" anchor="ctr" wrap="square" lIns="73152" rIns="73152" tIns="36576" bIns="36576"/>
           <a:lstStyle/>
           <a:p>
             <a:pPr algn="ctr"/>
@@ -7485,7 +7673,7 @@
           </a:fontRef>
         </p:style>
         <p:txBody>
-          <a:bodyPr wrap="square" lIns="73152" tIns="36576" rIns="73152" bIns="36576" rtlCol="0" anchor="ctr"/>
+          <a:bodyPr rtlCol="0" anchor="ctr" wrap="square" lIns="73152" rIns="73152" tIns="36576" bIns="36576"/>
           <a:lstStyle/>
           <a:p>
             <a:pPr algn="ctr"/>
@@ -7562,7 +7750,6 @@
           <a:lstStyle/>
           <a:p>
             <a:pPr algn="ctr"/>
-            <a:endParaRPr/>
           </a:p>
         </p:txBody>
       </p:sp>
@@ -7583,7 +7770,7 @@
           <a:noFill/>
         </p:spPr>
         <p:txBody>
-          <a:bodyPr wrap="square" lIns="0" tIns="0" rIns="0" bIns="0" anchor="t">
+          <a:bodyPr wrap="square" anchor="t" lIns="0" rIns="0" tIns="0" bIns="0">
             <a:spAutoFit/>
           </a:bodyPr>
           <a:lstStyle/>
@@ -7622,7 +7809,7 @@
           <a:noFill/>
         </p:spPr>
         <p:txBody>
-          <a:bodyPr wrap="square" lIns="0" tIns="0" rIns="0" bIns="0" anchor="t">
+          <a:bodyPr wrap="square" anchor="t" lIns="0" rIns="0" tIns="0" bIns="0">
             <a:spAutoFit/>
           </a:bodyPr>
           <a:lstStyle/>
@@ -7648,12 +7835,15 @@
                 <a:spcPct val="140000"/>
               </a:lnSpc>
             </a:pPr>
-            <a:endParaRPr sz="1050" b="0" i="0">
-              <a:solidFill>
-                <a:srgbClr val="F4F7FB"/>
-              </a:solidFill>
-              <a:latin typeface="Segoe UI"/>
-            </a:endParaRPr>
+            <a:r>
+              <a:rPr sz="1050" b="0" i="0">
+                <a:solidFill>
+                  <a:srgbClr val="F4F7FB"/>
+                </a:solidFill>
+                <a:latin typeface="Segoe UI"/>
+              </a:rPr>
+              <a:t/>
+            </a:r>
           </a:p>
           <a:p>
             <a:pPr algn="l">
@@ -7677,12 +7867,15 @@
                 <a:spcPct val="140000"/>
               </a:lnSpc>
             </a:pPr>
-            <a:endParaRPr sz="1050" b="0" i="0">
-              <a:solidFill>
-                <a:srgbClr val="F4F7FB"/>
-              </a:solidFill>
-              <a:latin typeface="Segoe UI"/>
-            </a:endParaRPr>
+            <a:r>
+              <a:rPr sz="1050" b="0" i="0">
+                <a:solidFill>
+                  <a:srgbClr val="F4F7FB"/>
+                </a:solidFill>
+                <a:latin typeface="Segoe UI"/>
+              </a:rPr>
+              <a:t/>
+            </a:r>
           </a:p>
           <a:p>
             <a:pPr algn="l">
@@ -7719,7 +7912,7 @@
           <a:noFill/>
         </p:spPr>
         <p:txBody>
-          <a:bodyPr wrap="square" lIns="0" tIns="0" rIns="0" bIns="0" anchor="t">
+          <a:bodyPr wrap="square" anchor="t" lIns="0" rIns="0" tIns="0" bIns="0">
             <a:spAutoFit/>
           </a:bodyPr>
           <a:lstStyle/>
@@ -7758,7 +7951,7 @@
           <a:noFill/>
         </p:spPr>
         <p:txBody>
-          <a:bodyPr wrap="square" lIns="0" tIns="0" rIns="0" bIns="0" anchor="t">
+          <a:bodyPr wrap="square" anchor="t" lIns="0" rIns="0" tIns="0" bIns="0">
             <a:spAutoFit/>
           </a:bodyPr>
           <a:lstStyle/>
@@ -7785,23 +7978,11 @@
   <p:clrMapOvr>
     <a:masterClrMapping/>
   </p:clrMapOvr>
-  <mc:AlternateContent xmlns:mc="http://schemas.openxmlformats.org/markup-compatibility/2006">
-    <mc:Choice xmlns:p14="http://schemas.microsoft.com/office/powerpoint/2010/main" Requires="p14">
-      <p:transition spd="med" p14:dur="700">
-        <p:fade thruBlk="1"/>
-      </p:transition>
-    </mc:Choice>
-    <mc:Fallback>
-      <p:transition spd="med">
-        <p:fade thruBlk="1"/>
-      </p:transition>
-    </mc:Fallback>
-  </mc:AlternateContent>
 </p:sld>
 </file>
 
 <file path=ppt/slides/slide12.xml><?xml version="1.0" encoding="utf-8"?>
-<p:sld xmlns:a="http://schemas.openxmlformats.org/drawingml/2006/main" xmlns:r="http://schemas.openxmlformats.org/officeDocument/2006/relationships" xmlns:p="http://schemas.openxmlformats.org/presentationml/2006/main">
+<p:sld xmlns:a="http://schemas.openxmlformats.org/drawingml/2006/main" xmlns:p="http://schemas.openxmlformats.org/presentationml/2006/main" xmlns:r="http://schemas.openxmlformats.org/officeDocument/2006/relationships">
   <p:cSld>
     <p:spTree>
       <p:nvGrpSpPr>
@@ -7809,14 +7990,7 @@
         <p:cNvGrpSpPr/>
         <p:nvPr/>
       </p:nvGrpSpPr>
-      <p:grpSpPr>
-        <a:xfrm>
-          <a:off x="0" y="0"/>
-          <a:ext cx="0" cy="0"/>
-          <a:chOff x="0" y="0"/>
-          <a:chExt cx="0" cy="0"/>
-        </a:xfrm>
-      </p:grpSpPr>
+      <p:grpSpPr/>
       <p:pic>
         <p:nvPicPr>
           <p:cNvPr id="2" name="Picture 1" descr="bg_deep.png"/>
@@ -7858,7 +8032,7 @@
           <a:noFill/>
         </p:spPr>
         <p:txBody>
-          <a:bodyPr wrap="square" lIns="0" tIns="0" rIns="0" bIns="0" anchor="t">
+          <a:bodyPr wrap="square" anchor="t" lIns="0" rIns="0" tIns="0" bIns="0">
             <a:spAutoFit/>
           </a:bodyPr>
           <a:lstStyle/>
@@ -7897,7 +8071,7 @@
           <a:noFill/>
         </p:spPr>
         <p:txBody>
-          <a:bodyPr wrap="square" lIns="0" tIns="0" rIns="0" bIns="0" anchor="t">
+          <a:bodyPr wrap="square" anchor="t" lIns="0" rIns="0" tIns="0" bIns="0">
             <a:spAutoFit/>
           </a:bodyPr>
           <a:lstStyle/>
@@ -7936,7 +8110,7 @@
           <a:noFill/>
         </p:spPr>
         <p:txBody>
-          <a:bodyPr wrap="square" lIns="0" tIns="0" rIns="0" bIns="0" anchor="t">
+          <a:bodyPr wrap="square" anchor="t" lIns="0" rIns="0" tIns="0" bIns="0">
             <a:spAutoFit/>
           </a:bodyPr>
           <a:lstStyle/>
@@ -7999,7 +8173,7 @@
           </a:fontRef>
         </p:style>
         <p:txBody>
-          <a:bodyPr wrap="square" lIns="73152" tIns="36576" rIns="73152" bIns="36576" rtlCol="0" anchor="ctr"/>
+          <a:bodyPr rtlCol="0" anchor="ctr" wrap="square" lIns="73152" rIns="73152" tIns="36576" bIns="36576"/>
           <a:lstStyle/>
           <a:p>
             <a:pPr algn="ctr"/>
@@ -8108,7 +8282,7 @@
           </a:fontRef>
         </p:style>
         <p:txBody>
-          <a:bodyPr wrap="square" lIns="73152" tIns="36576" rIns="73152" bIns="36576" rtlCol="0" anchor="ctr"/>
+          <a:bodyPr rtlCol="0" anchor="ctr" wrap="square" lIns="73152" rIns="73152" tIns="36576" bIns="36576"/>
           <a:lstStyle/>
           <a:p>
             <a:pPr algn="ctr"/>
@@ -8218,7 +8392,7 @@
           </a:fontRef>
         </p:style>
         <p:txBody>
-          <a:bodyPr wrap="square" lIns="73152" tIns="36576" rIns="73152" bIns="36576" rtlCol="0" anchor="ctr"/>
+          <a:bodyPr rtlCol="0" anchor="ctr" wrap="square" lIns="73152" rIns="73152" tIns="36576" bIns="36576"/>
           <a:lstStyle/>
           <a:p>
             <a:pPr algn="ctr"/>
@@ -8328,7 +8502,7 @@
           </a:fontRef>
         </p:style>
         <p:txBody>
-          <a:bodyPr wrap="square" lIns="73152" tIns="36576" rIns="73152" bIns="36576" rtlCol="0" anchor="ctr"/>
+          <a:bodyPr rtlCol="0" anchor="ctr" wrap="square" lIns="73152" rIns="73152" tIns="36576" bIns="36576"/>
           <a:lstStyle/>
           <a:p>
             <a:pPr algn="ctr"/>
@@ -8406,7 +8580,6 @@
           <a:lstStyle/>
           <a:p>
             <a:pPr algn="ctr"/>
-            <a:endParaRPr/>
           </a:p>
         </p:txBody>
       </p:sp>
@@ -8427,7 +8600,7 @@
           <a:noFill/>
         </p:spPr>
         <p:txBody>
-          <a:bodyPr wrap="square" lIns="0" tIns="0" rIns="0" bIns="0" anchor="t">
+          <a:bodyPr wrap="square" anchor="t" lIns="0" rIns="0" tIns="0" bIns="0">
             <a:spAutoFit/>
           </a:bodyPr>
           <a:lstStyle/>
@@ -8466,7 +8639,7 @@
           <a:noFill/>
         </p:spPr>
         <p:txBody>
-          <a:bodyPr wrap="square" lIns="0" tIns="0" rIns="0" bIns="0" anchor="t">
+          <a:bodyPr wrap="square" anchor="t" lIns="0" rIns="0" tIns="0" bIns="0">
             <a:spAutoFit/>
           </a:bodyPr>
           <a:lstStyle/>
@@ -8505,7 +8678,7 @@
           <a:noFill/>
         </p:spPr>
         <p:txBody>
-          <a:bodyPr wrap="square" lIns="0" tIns="0" rIns="0" bIns="0" anchor="t">
+          <a:bodyPr wrap="square" anchor="t" lIns="0" rIns="0" tIns="0" bIns="0">
             <a:spAutoFit/>
           </a:bodyPr>
           <a:lstStyle/>
@@ -8544,7 +8717,7 @@
           <a:noFill/>
         </p:spPr>
         <p:txBody>
-          <a:bodyPr wrap="square" lIns="0" tIns="0" rIns="0" bIns="0" anchor="t">
+          <a:bodyPr wrap="square" anchor="t" lIns="0" rIns="0" tIns="0" bIns="0">
             <a:spAutoFit/>
           </a:bodyPr>
           <a:lstStyle/>
@@ -8583,7 +8756,7 @@
           <a:noFill/>
         </p:spPr>
         <p:txBody>
-          <a:bodyPr wrap="square" lIns="0" tIns="0" rIns="0" bIns="0" anchor="t">
+          <a:bodyPr wrap="square" anchor="t" lIns="0" rIns="0" tIns="0" bIns="0">
             <a:spAutoFit/>
           </a:bodyPr>
           <a:lstStyle/>
@@ -8622,7 +8795,7 @@
           <a:noFill/>
         </p:spPr>
         <p:txBody>
-          <a:bodyPr wrap="square" lIns="0" tIns="0" rIns="0" bIns="0" anchor="t">
+          <a:bodyPr wrap="square" anchor="t" lIns="0" rIns="0" tIns="0" bIns="0">
             <a:spAutoFit/>
           </a:bodyPr>
           <a:lstStyle/>
@@ -8661,7 +8834,7 @@
           <a:noFill/>
         </p:spPr>
         <p:txBody>
-          <a:bodyPr wrap="square" lIns="0" tIns="0" rIns="0" bIns="0" anchor="t">
+          <a:bodyPr wrap="square" anchor="t" lIns="0" rIns="0" tIns="0" bIns="0">
             <a:spAutoFit/>
           </a:bodyPr>
           <a:lstStyle/>
@@ -8728,7 +8901,6 @@
           <a:lstStyle/>
           <a:p>
             <a:pPr algn="ctr"/>
-            <a:endParaRPr/>
           </a:p>
         </p:txBody>
       </p:sp>
@@ -8749,7 +8921,7 @@
           <a:noFill/>
         </p:spPr>
         <p:txBody>
-          <a:bodyPr wrap="square" lIns="0" tIns="0" rIns="0" bIns="0" anchor="t">
+          <a:bodyPr wrap="square" anchor="t" lIns="0" rIns="0" tIns="0" bIns="0">
             <a:spAutoFit/>
           </a:bodyPr>
           <a:lstStyle/>
@@ -8788,7 +8960,7 @@
           <a:noFill/>
         </p:spPr>
         <p:txBody>
-          <a:bodyPr wrap="square" lIns="0" tIns="0" rIns="0" bIns="0" anchor="t">
+          <a:bodyPr wrap="square" anchor="t" lIns="0" rIns="0" tIns="0" bIns="0">
             <a:spAutoFit/>
           </a:bodyPr>
           <a:lstStyle/>
@@ -8814,12 +8986,15 @@
                 <a:spcPct val="135000"/>
               </a:lnSpc>
             </a:pPr>
-            <a:endParaRPr sz="1050" b="0" i="0">
-              <a:solidFill>
-                <a:srgbClr val="F4F7FB"/>
-              </a:solidFill>
-              <a:latin typeface="Segoe UI"/>
-            </a:endParaRPr>
+            <a:r>
+              <a:rPr sz="1050" b="0" i="0">
+                <a:solidFill>
+                  <a:srgbClr val="F4F7FB"/>
+                </a:solidFill>
+                <a:latin typeface="Segoe UI"/>
+              </a:rPr>
+              <a:t/>
+            </a:r>
           </a:p>
           <a:p>
             <a:pPr algn="l">
@@ -8856,7 +9031,7 @@
           <a:noFill/>
         </p:spPr>
         <p:txBody>
-          <a:bodyPr wrap="square" lIns="0" tIns="0" rIns="0" bIns="0" anchor="t">
+          <a:bodyPr wrap="square" anchor="t" lIns="0" rIns="0" tIns="0" bIns="0">
             <a:spAutoFit/>
           </a:bodyPr>
           <a:lstStyle/>
@@ -8895,7 +9070,7 @@
           <a:noFill/>
         </p:spPr>
         <p:txBody>
-          <a:bodyPr wrap="square" lIns="0" tIns="0" rIns="0" bIns="0" anchor="t">
+          <a:bodyPr wrap="square" anchor="t" lIns="0" rIns="0" tIns="0" bIns="0">
             <a:spAutoFit/>
           </a:bodyPr>
           <a:lstStyle/>
@@ -8922,23 +9097,11 @@
   <p:clrMapOvr>
     <a:masterClrMapping/>
   </p:clrMapOvr>
-  <mc:AlternateContent xmlns:mc="http://schemas.openxmlformats.org/markup-compatibility/2006">
-    <mc:Choice xmlns:p14="http://schemas.microsoft.com/office/powerpoint/2010/main" Requires="p14">
-      <p:transition spd="med" p14:dur="700">
-        <p:fade thruBlk="1"/>
-      </p:transition>
-    </mc:Choice>
-    <mc:Fallback>
-      <p:transition spd="med">
-        <p:fade thruBlk="1"/>
-      </p:transition>
-    </mc:Fallback>
-  </mc:AlternateContent>
 </p:sld>
 </file>
 
 <file path=ppt/slides/slide13.xml><?xml version="1.0" encoding="utf-8"?>
-<p:sld xmlns:a="http://schemas.openxmlformats.org/drawingml/2006/main" xmlns:r="http://schemas.openxmlformats.org/officeDocument/2006/relationships" xmlns:p="http://schemas.openxmlformats.org/presentationml/2006/main">
+<p:sld xmlns:a="http://schemas.openxmlformats.org/drawingml/2006/main" xmlns:p="http://schemas.openxmlformats.org/presentationml/2006/main" xmlns:r="http://schemas.openxmlformats.org/officeDocument/2006/relationships">
   <p:cSld>
     <p:spTree>
       <p:nvGrpSpPr>
@@ -8946,14 +9109,7 @@
         <p:cNvGrpSpPr/>
         <p:nvPr/>
       </p:nvGrpSpPr>
-      <p:grpSpPr>
-        <a:xfrm>
-          <a:off x="0" y="0"/>
-          <a:ext cx="0" cy="0"/>
-          <a:chOff x="0" y="0"/>
-          <a:chExt cx="0" cy="0"/>
-        </a:xfrm>
-      </p:grpSpPr>
+      <p:grpSpPr/>
       <p:pic>
         <p:nvPicPr>
           <p:cNvPr id="2" name="Picture 1" descr="bg_deep.png"/>
@@ -8995,7 +9151,7 @@
           <a:noFill/>
         </p:spPr>
         <p:txBody>
-          <a:bodyPr wrap="square" lIns="0" tIns="0" rIns="0" bIns="0" anchor="t">
+          <a:bodyPr wrap="square" anchor="t" lIns="0" rIns="0" tIns="0" bIns="0">
             <a:spAutoFit/>
           </a:bodyPr>
           <a:lstStyle/>
@@ -9034,7 +9190,7 @@
           <a:noFill/>
         </p:spPr>
         <p:txBody>
-          <a:bodyPr wrap="square" lIns="0" tIns="0" rIns="0" bIns="0" anchor="t">
+          <a:bodyPr wrap="square" anchor="t" lIns="0" rIns="0" tIns="0" bIns="0">
             <a:spAutoFit/>
           </a:bodyPr>
           <a:lstStyle/>
@@ -9123,7 +9279,6 @@
           <a:lstStyle/>
           <a:p>
             <a:pPr algn="ctr"/>
-            <a:endParaRPr/>
           </a:p>
         </p:txBody>
       </p:sp>
@@ -9144,7 +9299,7 @@
           <a:noFill/>
         </p:spPr>
         <p:txBody>
-          <a:bodyPr wrap="square" lIns="0" tIns="0" rIns="0" bIns="0" anchor="t">
+          <a:bodyPr wrap="square" anchor="t" lIns="0" rIns="0" tIns="0" bIns="0">
             <a:spAutoFit/>
           </a:bodyPr>
           <a:lstStyle/>
@@ -9233,7 +9388,6 @@
           <a:lstStyle/>
           <a:p>
             <a:pPr algn="ctr"/>
-            <a:endParaRPr/>
           </a:p>
         </p:txBody>
       </p:sp>
@@ -9254,7 +9408,7 @@
           <a:noFill/>
         </p:spPr>
         <p:txBody>
-          <a:bodyPr wrap="square" lIns="0" tIns="0" rIns="0" bIns="0" anchor="t">
+          <a:bodyPr wrap="square" anchor="t" lIns="0" rIns="0" tIns="0" bIns="0">
             <a:spAutoFit/>
           </a:bodyPr>
           <a:lstStyle/>
@@ -9343,7 +9497,6 @@
           <a:lstStyle/>
           <a:p>
             <a:pPr algn="ctr"/>
-            <a:endParaRPr/>
           </a:p>
         </p:txBody>
       </p:sp>
@@ -9364,7 +9517,7 @@
           <a:noFill/>
         </p:spPr>
         <p:txBody>
-          <a:bodyPr wrap="square" lIns="0" tIns="0" rIns="0" bIns="0" anchor="t">
+          <a:bodyPr wrap="square" anchor="t" lIns="0" rIns="0" tIns="0" bIns="0">
             <a:spAutoFit/>
           </a:bodyPr>
           <a:lstStyle/>
@@ -9453,7 +9606,6 @@
           <a:lstStyle/>
           <a:p>
             <a:pPr algn="ctr"/>
-            <a:endParaRPr/>
           </a:p>
         </p:txBody>
       </p:sp>
@@ -9474,7 +9626,7 @@
           <a:noFill/>
         </p:spPr>
         <p:txBody>
-          <a:bodyPr wrap="square" lIns="0" tIns="0" rIns="0" bIns="0" anchor="t">
+          <a:bodyPr wrap="square" anchor="t" lIns="0" rIns="0" tIns="0" bIns="0">
             <a:spAutoFit/>
           </a:bodyPr>
           <a:lstStyle/>
@@ -9563,7 +9715,6 @@
           <a:lstStyle/>
           <a:p>
             <a:pPr algn="ctr"/>
-            <a:endParaRPr/>
           </a:p>
         </p:txBody>
       </p:sp>
@@ -9584,7 +9735,7 @@
           <a:noFill/>
         </p:spPr>
         <p:txBody>
-          <a:bodyPr wrap="square" lIns="0" tIns="0" rIns="0" bIns="0" anchor="t">
+          <a:bodyPr wrap="square" anchor="t" lIns="0" rIns="0" tIns="0" bIns="0">
             <a:spAutoFit/>
           </a:bodyPr>
           <a:lstStyle/>
@@ -9623,7 +9774,7 @@
           <a:noFill/>
         </p:spPr>
         <p:txBody>
-          <a:bodyPr wrap="square" lIns="0" tIns="0" rIns="0" bIns="0" anchor="t">
+          <a:bodyPr wrap="square" anchor="t" lIns="0" rIns="0" tIns="0" bIns="0">
             <a:spAutoFit/>
           </a:bodyPr>
           <a:lstStyle/>
@@ -9662,7 +9813,7 @@
           <a:noFill/>
         </p:spPr>
         <p:txBody>
-          <a:bodyPr wrap="square" lIns="0" tIns="0" rIns="0" bIns="0" anchor="t">
+          <a:bodyPr wrap="square" anchor="t" lIns="0" rIns="0" tIns="0" bIns="0">
             <a:spAutoFit/>
           </a:bodyPr>
           <a:lstStyle/>
@@ -9701,7 +9852,7 @@
           <a:noFill/>
         </p:spPr>
         <p:txBody>
-          <a:bodyPr wrap="square" lIns="0" tIns="0" rIns="0" bIns="0" anchor="t">
+          <a:bodyPr wrap="square" anchor="t" lIns="0" rIns="0" tIns="0" bIns="0">
             <a:spAutoFit/>
           </a:bodyPr>
           <a:lstStyle/>
@@ -9728,23 +9879,11 @@
   <p:clrMapOvr>
     <a:masterClrMapping/>
   </p:clrMapOvr>
-  <mc:AlternateContent xmlns:mc="http://schemas.openxmlformats.org/markup-compatibility/2006">
-    <mc:Choice xmlns:p14="http://schemas.microsoft.com/office/powerpoint/2010/main" Requires="p14">
-      <p:transition spd="med" p14:dur="700">
-        <p:fade thruBlk="1"/>
-      </p:transition>
-    </mc:Choice>
-    <mc:Fallback>
-      <p:transition spd="med">
-        <p:fade thruBlk="1"/>
-      </p:transition>
-    </mc:Fallback>
-  </mc:AlternateContent>
 </p:sld>
 </file>
 
 <file path=ppt/slides/slide14.xml><?xml version="1.0" encoding="utf-8"?>
-<p:sld xmlns:a="http://schemas.openxmlformats.org/drawingml/2006/main" xmlns:r="http://schemas.openxmlformats.org/officeDocument/2006/relationships" xmlns:p="http://schemas.openxmlformats.org/presentationml/2006/main">
+<p:sld xmlns:a="http://schemas.openxmlformats.org/drawingml/2006/main" xmlns:p="http://schemas.openxmlformats.org/presentationml/2006/main" xmlns:r="http://schemas.openxmlformats.org/officeDocument/2006/relationships">
   <p:cSld>
     <p:spTree>
       <p:nvGrpSpPr>
@@ -9752,14 +9891,7 @@
         <p:cNvGrpSpPr/>
         <p:nvPr/>
       </p:nvGrpSpPr>
-      <p:grpSpPr>
-        <a:xfrm>
-          <a:off x="0" y="0"/>
-          <a:ext cx="0" cy="0"/>
-          <a:chOff x="0" y="0"/>
-          <a:chExt cx="0" cy="0"/>
-        </a:xfrm>
-      </p:grpSpPr>
+      <p:grpSpPr/>
       <p:pic>
         <p:nvPicPr>
           <p:cNvPr id="2" name="Picture 1" descr="bg_deep.png"/>
@@ -9801,7 +9933,7 @@
           <a:noFill/>
         </p:spPr>
         <p:txBody>
-          <a:bodyPr wrap="square" lIns="0" tIns="0" rIns="0" bIns="0" anchor="t">
+          <a:bodyPr wrap="square" anchor="t" lIns="0" rIns="0" tIns="0" bIns="0">
             <a:spAutoFit/>
           </a:bodyPr>
           <a:lstStyle/>
@@ -9840,7 +9972,7 @@
           <a:noFill/>
         </p:spPr>
         <p:txBody>
-          <a:bodyPr wrap="square" lIns="0" tIns="0" rIns="0" bIns="0" anchor="t">
+          <a:bodyPr wrap="square" anchor="t" lIns="0" rIns="0" tIns="0" bIns="0">
             <a:spAutoFit/>
           </a:bodyPr>
           <a:lstStyle/>
@@ -9929,7 +10061,6 @@
           <a:lstStyle/>
           <a:p>
             <a:pPr algn="ctr"/>
-            <a:endParaRPr/>
           </a:p>
         </p:txBody>
       </p:sp>
@@ -9950,7 +10081,7 @@
           <a:noFill/>
         </p:spPr>
         <p:txBody>
-          <a:bodyPr wrap="square" lIns="0" tIns="0" rIns="0" bIns="0" anchor="t">
+          <a:bodyPr wrap="square" anchor="t" lIns="0" rIns="0" tIns="0" bIns="0">
             <a:spAutoFit/>
           </a:bodyPr>
           <a:lstStyle/>
@@ -10039,7 +10170,6 @@
           <a:lstStyle/>
           <a:p>
             <a:pPr algn="ctr"/>
-            <a:endParaRPr/>
           </a:p>
         </p:txBody>
       </p:sp>
@@ -10060,7 +10190,7 @@
           <a:noFill/>
         </p:spPr>
         <p:txBody>
-          <a:bodyPr wrap="square" lIns="0" tIns="0" rIns="0" bIns="0" anchor="t">
+          <a:bodyPr wrap="square" anchor="t" lIns="0" rIns="0" tIns="0" bIns="0">
             <a:spAutoFit/>
           </a:bodyPr>
           <a:lstStyle/>
@@ -10099,7 +10229,7 @@
           <a:noFill/>
         </p:spPr>
         <p:txBody>
-          <a:bodyPr wrap="square" lIns="0" tIns="0" rIns="0" bIns="0" anchor="t">
+          <a:bodyPr wrap="square" anchor="t" lIns="0" rIns="0" tIns="0" bIns="0">
             <a:spAutoFit/>
           </a:bodyPr>
           <a:lstStyle/>
@@ -10138,7 +10268,7 @@
           <a:noFill/>
         </p:spPr>
         <p:txBody>
-          <a:bodyPr wrap="square" lIns="0" tIns="0" rIns="0" bIns="0" anchor="t">
+          <a:bodyPr wrap="square" anchor="t" lIns="0" rIns="0" tIns="0" bIns="0">
             <a:spAutoFit/>
           </a:bodyPr>
           <a:lstStyle/>
@@ -10177,7 +10307,7 @@
           <a:noFill/>
         </p:spPr>
         <p:txBody>
-          <a:bodyPr wrap="square" lIns="0" tIns="0" rIns="0" bIns="0" anchor="t">
+          <a:bodyPr wrap="square" anchor="t" lIns="0" rIns="0" tIns="0" bIns="0">
             <a:spAutoFit/>
           </a:bodyPr>
           <a:lstStyle/>
@@ -10204,23 +10334,11 @@
   <p:clrMapOvr>
     <a:masterClrMapping/>
   </p:clrMapOvr>
-  <mc:AlternateContent xmlns:mc="http://schemas.openxmlformats.org/markup-compatibility/2006">
-    <mc:Choice xmlns:p14="http://schemas.microsoft.com/office/powerpoint/2010/main" Requires="p14">
-      <p:transition spd="med" p14:dur="700">
-        <p:fade thruBlk="1"/>
-      </p:transition>
-    </mc:Choice>
-    <mc:Fallback>
-      <p:transition spd="med">
-        <p:fade thruBlk="1"/>
-      </p:transition>
-    </mc:Fallback>
-  </mc:AlternateContent>
 </p:sld>
 </file>
 
 <file path=ppt/slides/slide15.xml><?xml version="1.0" encoding="utf-8"?>
-<p:sld xmlns:a="http://schemas.openxmlformats.org/drawingml/2006/main" xmlns:r="http://schemas.openxmlformats.org/officeDocument/2006/relationships" xmlns:p="http://schemas.openxmlformats.org/presentationml/2006/main">
+<p:sld xmlns:a="http://schemas.openxmlformats.org/drawingml/2006/main" xmlns:p="http://schemas.openxmlformats.org/presentationml/2006/main" xmlns:r="http://schemas.openxmlformats.org/officeDocument/2006/relationships">
   <p:cSld>
     <p:spTree>
       <p:nvGrpSpPr>
@@ -10228,14 +10346,7 @@
         <p:cNvGrpSpPr/>
         <p:nvPr/>
       </p:nvGrpSpPr>
-      <p:grpSpPr>
-        <a:xfrm>
-          <a:off x="0" y="0"/>
-          <a:ext cx="0" cy="0"/>
-          <a:chOff x="0" y="0"/>
-          <a:chExt cx="0" cy="0"/>
-        </a:xfrm>
-      </p:grpSpPr>
+      <p:grpSpPr/>
       <p:pic>
         <p:nvPicPr>
           <p:cNvPr id="2" name="Picture 1" descr="bg_red.png"/>
@@ -10277,7 +10388,7 @@
           <a:noFill/>
         </p:spPr>
         <p:txBody>
-          <a:bodyPr wrap="square" lIns="0" tIns="0" rIns="0" bIns="0" anchor="t">
+          <a:bodyPr wrap="square" anchor="t" lIns="0" rIns="0" tIns="0" bIns="0">
             <a:spAutoFit/>
           </a:bodyPr>
           <a:lstStyle/>
@@ -10316,7 +10427,7 @@
           <a:noFill/>
         </p:spPr>
         <p:txBody>
-          <a:bodyPr wrap="square" lIns="0" tIns="0" rIns="0" bIns="0" anchor="t">
+          <a:bodyPr wrap="square" anchor="t" lIns="0" rIns="0" tIns="0" bIns="0">
             <a:spAutoFit/>
           </a:bodyPr>
           <a:lstStyle/>
@@ -10383,7 +10494,6 @@
           <a:lstStyle/>
           <a:p>
             <a:pPr algn="ctr"/>
-            <a:endParaRPr/>
           </a:p>
         </p:txBody>
       </p:sp>
@@ -10404,7 +10514,7 @@
           <a:noFill/>
         </p:spPr>
         <p:txBody>
-          <a:bodyPr wrap="square" lIns="0" tIns="0" rIns="0" bIns="0" anchor="t">
+          <a:bodyPr wrap="square" anchor="t" lIns="0" rIns="0" tIns="0" bIns="0">
             <a:spAutoFit/>
           </a:bodyPr>
           <a:lstStyle/>
@@ -10443,7 +10553,7 @@
           <a:noFill/>
         </p:spPr>
         <p:txBody>
-          <a:bodyPr wrap="square" lIns="0" tIns="0" rIns="0" bIns="0" anchor="t">
+          <a:bodyPr wrap="square" anchor="t" lIns="0" rIns="0" tIns="0" bIns="0">
             <a:spAutoFit/>
           </a:bodyPr>
           <a:lstStyle/>
@@ -10482,7 +10592,7 @@
           <a:noFill/>
         </p:spPr>
         <p:txBody>
-          <a:bodyPr wrap="square" lIns="0" tIns="0" rIns="0" bIns="0" anchor="t">
+          <a:bodyPr wrap="square" anchor="t" lIns="0" rIns="0" tIns="0" bIns="0">
             <a:spAutoFit/>
           </a:bodyPr>
           <a:lstStyle/>
@@ -10521,7 +10631,7 @@
           <a:noFill/>
         </p:spPr>
         <p:txBody>
-          <a:bodyPr wrap="square" lIns="0" tIns="0" rIns="0" bIns="0" anchor="t">
+          <a:bodyPr wrap="square" anchor="t" lIns="0" rIns="0" tIns="0" bIns="0">
             <a:spAutoFit/>
           </a:bodyPr>
           <a:lstStyle/>
@@ -10560,7 +10670,7 @@
           <a:noFill/>
         </p:spPr>
         <p:txBody>
-          <a:bodyPr wrap="square" lIns="0" tIns="0" rIns="0" bIns="0" anchor="t">
+          <a:bodyPr wrap="square" anchor="t" lIns="0" rIns="0" tIns="0" bIns="0">
             <a:spAutoFit/>
           </a:bodyPr>
           <a:lstStyle/>
@@ -10627,7 +10737,6 @@
           <a:lstStyle/>
           <a:p>
             <a:pPr algn="ctr"/>
-            <a:endParaRPr/>
           </a:p>
         </p:txBody>
       </p:sp>
@@ -10648,7 +10757,7 @@
           <a:noFill/>
         </p:spPr>
         <p:txBody>
-          <a:bodyPr wrap="square" lIns="0" tIns="0" rIns="0" bIns="0" anchor="t">
+          <a:bodyPr wrap="square" anchor="t" lIns="0" rIns="0" tIns="0" bIns="0">
             <a:spAutoFit/>
           </a:bodyPr>
           <a:lstStyle/>
@@ -10687,7 +10796,7 @@
           <a:noFill/>
         </p:spPr>
         <p:txBody>
-          <a:bodyPr wrap="square" lIns="0" tIns="0" rIns="0" bIns="0" anchor="t">
+          <a:bodyPr wrap="square" anchor="t" lIns="0" rIns="0" tIns="0" bIns="0">
             <a:spAutoFit/>
           </a:bodyPr>
           <a:lstStyle/>
@@ -10726,7 +10835,7 @@
           <a:noFill/>
         </p:spPr>
         <p:txBody>
-          <a:bodyPr wrap="square" lIns="0" tIns="0" rIns="0" bIns="0" anchor="t">
+          <a:bodyPr wrap="square" anchor="t" lIns="0" rIns="0" tIns="0" bIns="0">
             <a:spAutoFit/>
           </a:bodyPr>
           <a:lstStyle/>
@@ -10765,7 +10874,7 @@
           <a:noFill/>
         </p:spPr>
         <p:txBody>
-          <a:bodyPr wrap="square" lIns="0" tIns="0" rIns="0" bIns="0" anchor="t">
+          <a:bodyPr wrap="square" anchor="t" lIns="0" rIns="0" tIns="0" bIns="0">
             <a:spAutoFit/>
           </a:bodyPr>
           <a:lstStyle/>
@@ -10804,7 +10913,7 @@
           <a:noFill/>
         </p:spPr>
         <p:txBody>
-          <a:bodyPr wrap="square" lIns="0" tIns="0" rIns="0" bIns="0" anchor="t">
+          <a:bodyPr wrap="square" anchor="t" lIns="0" rIns="0" tIns="0" bIns="0">
             <a:spAutoFit/>
           </a:bodyPr>
           <a:lstStyle/>
@@ -10871,7 +10980,6 @@
           <a:lstStyle/>
           <a:p>
             <a:pPr algn="ctr"/>
-            <a:endParaRPr/>
           </a:p>
         </p:txBody>
       </p:sp>
@@ -10892,7 +11000,7 @@
           <a:noFill/>
         </p:spPr>
         <p:txBody>
-          <a:bodyPr wrap="square" lIns="0" tIns="0" rIns="0" bIns="0" anchor="t">
+          <a:bodyPr wrap="square" anchor="t" lIns="0" rIns="0" tIns="0" bIns="0">
             <a:spAutoFit/>
           </a:bodyPr>
           <a:lstStyle/>
@@ -10931,7 +11039,7 @@
           <a:noFill/>
         </p:spPr>
         <p:txBody>
-          <a:bodyPr wrap="square" lIns="0" tIns="0" rIns="0" bIns="0" anchor="t">
+          <a:bodyPr wrap="square" anchor="t" lIns="0" rIns="0" tIns="0" bIns="0">
             <a:spAutoFit/>
           </a:bodyPr>
           <a:lstStyle/>
@@ -10970,7 +11078,7 @@
           <a:noFill/>
         </p:spPr>
         <p:txBody>
-          <a:bodyPr wrap="square" lIns="0" tIns="0" rIns="0" bIns="0" anchor="t">
+          <a:bodyPr wrap="square" anchor="t" lIns="0" rIns="0" tIns="0" bIns="0">
             <a:spAutoFit/>
           </a:bodyPr>
           <a:lstStyle/>
@@ -11009,7 +11117,7 @@
           <a:noFill/>
         </p:spPr>
         <p:txBody>
-          <a:bodyPr wrap="square" lIns="0" tIns="0" rIns="0" bIns="0" anchor="t">
+          <a:bodyPr wrap="square" anchor="t" lIns="0" rIns="0" tIns="0" bIns="0">
             <a:spAutoFit/>
           </a:bodyPr>
           <a:lstStyle/>
@@ -11048,7 +11156,7 @@
           <a:noFill/>
         </p:spPr>
         <p:txBody>
-          <a:bodyPr wrap="square" lIns="0" tIns="0" rIns="0" bIns="0" anchor="t">
+          <a:bodyPr wrap="square" anchor="t" lIns="0" rIns="0" tIns="0" bIns="0">
             <a:spAutoFit/>
           </a:bodyPr>
           <a:lstStyle/>
@@ -11087,7 +11195,7 @@
           <a:noFill/>
         </p:spPr>
         <p:txBody>
-          <a:bodyPr wrap="square" lIns="0" tIns="0" rIns="0" bIns="0" anchor="t">
+          <a:bodyPr wrap="square" anchor="t" lIns="0" rIns="0" tIns="0" bIns="0">
             <a:spAutoFit/>
           </a:bodyPr>
           <a:lstStyle/>
@@ -11142,7 +11250,7 @@
           <a:noFill/>
         </p:spPr>
         <p:txBody>
-          <a:bodyPr wrap="square" lIns="0" tIns="0" rIns="0" bIns="0" anchor="t">
+          <a:bodyPr wrap="square" anchor="t" lIns="0" rIns="0" tIns="0" bIns="0">
             <a:spAutoFit/>
           </a:bodyPr>
           <a:lstStyle/>
@@ -11181,7 +11289,7 @@
           <a:noFill/>
         </p:spPr>
         <p:txBody>
-          <a:bodyPr wrap="square" lIns="0" tIns="0" rIns="0" bIns="0" anchor="t">
+          <a:bodyPr wrap="square" anchor="t" lIns="0" rIns="0" tIns="0" bIns="0">
             <a:spAutoFit/>
           </a:bodyPr>
           <a:lstStyle/>
@@ -11208,23 +11316,11 @@
   <p:clrMapOvr>
     <a:masterClrMapping/>
   </p:clrMapOvr>
-  <mc:AlternateContent xmlns:mc="http://schemas.openxmlformats.org/markup-compatibility/2006">
-    <mc:Choice xmlns:p14="http://schemas.microsoft.com/office/powerpoint/2010/main" Requires="p14">
-      <p:transition spd="med" p14:dur="700">
-        <p:fade thruBlk="1"/>
-      </p:transition>
-    </mc:Choice>
-    <mc:Fallback>
-      <p:transition spd="med">
-        <p:fade thruBlk="1"/>
-      </p:transition>
-    </mc:Fallback>
-  </mc:AlternateContent>
 </p:sld>
 </file>
 
 <file path=ppt/slides/slide16.xml><?xml version="1.0" encoding="utf-8"?>
-<p:sld xmlns:a="http://schemas.openxmlformats.org/drawingml/2006/main" xmlns:r="http://schemas.openxmlformats.org/officeDocument/2006/relationships" xmlns:p="http://schemas.openxmlformats.org/presentationml/2006/main">
+<p:sld xmlns:a="http://schemas.openxmlformats.org/drawingml/2006/main" xmlns:p="http://schemas.openxmlformats.org/presentationml/2006/main" xmlns:r="http://schemas.openxmlformats.org/officeDocument/2006/relationships">
   <p:cSld>
     <p:spTree>
       <p:nvGrpSpPr>
@@ -11232,14 +11328,7 @@
         <p:cNvGrpSpPr/>
         <p:nvPr/>
       </p:nvGrpSpPr>
-      <p:grpSpPr>
-        <a:xfrm>
-          <a:off x="0" y="0"/>
-          <a:ext cx="0" cy="0"/>
-          <a:chOff x="0" y="0"/>
-          <a:chExt cx="0" cy="0"/>
-        </a:xfrm>
-      </p:grpSpPr>
+      <p:grpSpPr/>
       <p:pic>
         <p:nvPicPr>
           <p:cNvPr id="2" name="Picture 1" descr="bg_deep.png"/>
@@ -11281,7 +11370,7 @@
           <a:noFill/>
         </p:spPr>
         <p:txBody>
-          <a:bodyPr wrap="square" lIns="0" tIns="0" rIns="0" bIns="0" anchor="t">
+          <a:bodyPr wrap="square" anchor="t" lIns="0" rIns="0" tIns="0" bIns="0">
             <a:spAutoFit/>
           </a:bodyPr>
           <a:lstStyle/>
@@ -11320,7 +11409,7 @@
           <a:noFill/>
         </p:spPr>
         <p:txBody>
-          <a:bodyPr wrap="square" lIns="0" tIns="0" rIns="0" bIns="0" anchor="t">
+          <a:bodyPr wrap="square" anchor="t" lIns="0" rIns="0" tIns="0" bIns="0">
             <a:spAutoFit/>
           </a:bodyPr>
           <a:lstStyle/>
@@ -11383,7 +11472,7 @@
           </a:fontRef>
         </p:style>
         <p:txBody>
-          <a:bodyPr wrap="square" lIns="73152" tIns="36576" rIns="73152" bIns="36576" rtlCol="0" anchor="ctr"/>
+          <a:bodyPr rtlCol="0" anchor="ctr" wrap="square" lIns="73152" rIns="73152" tIns="36576" bIns="36576"/>
           <a:lstStyle/>
           <a:p>
             <a:pPr algn="ctr"/>
@@ -11493,7 +11582,7 @@
           </a:fontRef>
         </p:style>
         <p:txBody>
-          <a:bodyPr wrap="square" lIns="73152" tIns="36576" rIns="73152" bIns="36576" rtlCol="0" anchor="ctr"/>
+          <a:bodyPr rtlCol="0" anchor="ctr" wrap="square" lIns="73152" rIns="73152" tIns="36576" bIns="36576"/>
           <a:lstStyle/>
           <a:p>
             <a:pPr algn="ctr"/>
@@ -11603,7 +11692,7 @@
           </a:fontRef>
         </p:style>
         <p:txBody>
-          <a:bodyPr wrap="square" lIns="73152" tIns="36576" rIns="73152" bIns="36576" rtlCol="0" anchor="ctr"/>
+          <a:bodyPr rtlCol="0" anchor="ctr" wrap="square" lIns="73152" rIns="73152" tIns="36576" bIns="36576"/>
           <a:lstStyle/>
           <a:p>
             <a:pPr algn="ctr"/>
@@ -11713,7 +11802,7 @@
           </a:fontRef>
         </p:style>
         <p:txBody>
-          <a:bodyPr wrap="square" lIns="73152" tIns="36576" rIns="73152" bIns="36576" rtlCol="0" anchor="ctr"/>
+          <a:bodyPr rtlCol="0" anchor="ctr" wrap="square" lIns="73152" rIns="73152" tIns="36576" bIns="36576"/>
           <a:lstStyle/>
           <a:p>
             <a:pPr algn="ctr"/>
@@ -11823,7 +11912,7 @@
           </a:fontRef>
         </p:style>
         <p:txBody>
-          <a:bodyPr wrap="square" lIns="73152" tIns="36576" rIns="73152" bIns="36576" rtlCol="0" anchor="ctr"/>
+          <a:bodyPr rtlCol="0" anchor="ctr" wrap="square" lIns="73152" rIns="73152" tIns="36576" bIns="36576"/>
           <a:lstStyle/>
           <a:p>
             <a:pPr algn="ctr"/>
@@ -11933,7 +12022,7 @@
           </a:fontRef>
         </p:style>
         <p:txBody>
-          <a:bodyPr wrap="square" lIns="73152" tIns="36576" rIns="73152" bIns="36576" rtlCol="0" anchor="ctr"/>
+          <a:bodyPr rtlCol="0" anchor="ctr" wrap="square" lIns="73152" rIns="73152" tIns="36576" bIns="36576"/>
           <a:lstStyle/>
           <a:p>
             <a:pPr algn="ctr"/>
@@ -12043,7 +12132,7 @@
           </a:fontRef>
         </p:style>
         <p:txBody>
-          <a:bodyPr wrap="square" lIns="73152" tIns="36576" rIns="73152" bIns="36576" rtlCol="0" anchor="ctr"/>
+          <a:bodyPr rtlCol="0" anchor="ctr" wrap="square" lIns="73152" rIns="73152" tIns="36576" bIns="36576"/>
           <a:lstStyle/>
           <a:p>
             <a:pPr algn="ctr"/>
@@ -12092,7 +12181,7 @@
           <a:noFill/>
         </p:spPr>
         <p:txBody>
-          <a:bodyPr wrap="square" lIns="0" tIns="0" rIns="0" bIns="0" anchor="t">
+          <a:bodyPr wrap="square" anchor="t" lIns="0" rIns="0" tIns="0" bIns="0">
             <a:spAutoFit/>
           </a:bodyPr>
           <a:lstStyle/>
@@ -12131,7 +12220,7 @@
           <a:noFill/>
         </p:spPr>
         <p:txBody>
-          <a:bodyPr wrap="square" lIns="0" tIns="0" rIns="0" bIns="0" anchor="t">
+          <a:bodyPr wrap="square" anchor="t" lIns="0" rIns="0" tIns="0" bIns="0">
             <a:spAutoFit/>
           </a:bodyPr>
           <a:lstStyle/>
@@ -12170,7 +12259,7 @@
           <a:noFill/>
         </p:spPr>
         <p:txBody>
-          <a:bodyPr wrap="square" lIns="0" tIns="0" rIns="0" bIns="0" anchor="t">
+          <a:bodyPr wrap="square" anchor="t" lIns="0" rIns="0" tIns="0" bIns="0">
             <a:spAutoFit/>
           </a:bodyPr>
           <a:lstStyle/>
@@ -12209,7 +12298,7 @@
           <a:noFill/>
         </p:spPr>
         <p:txBody>
-          <a:bodyPr wrap="square" lIns="0" tIns="0" rIns="0" bIns="0" anchor="t">
+          <a:bodyPr wrap="square" anchor="t" lIns="0" rIns="0" tIns="0" bIns="0">
             <a:spAutoFit/>
           </a:bodyPr>
           <a:lstStyle/>
@@ -12248,7 +12337,7 @@
           <a:noFill/>
         </p:spPr>
         <p:txBody>
-          <a:bodyPr wrap="square" lIns="0" tIns="0" rIns="0" bIns="0" anchor="t">
+          <a:bodyPr wrap="square" anchor="t" lIns="0" rIns="0" tIns="0" bIns="0">
             <a:spAutoFit/>
           </a:bodyPr>
           <a:lstStyle/>
@@ -12287,7 +12376,7 @@
           <a:noFill/>
         </p:spPr>
         <p:txBody>
-          <a:bodyPr wrap="square" lIns="0" tIns="0" rIns="0" bIns="0" anchor="t">
+          <a:bodyPr wrap="square" anchor="t" lIns="0" rIns="0" tIns="0" bIns="0">
             <a:spAutoFit/>
           </a:bodyPr>
           <a:lstStyle/>
@@ -12326,7 +12415,7 @@
           <a:noFill/>
         </p:spPr>
         <p:txBody>
-          <a:bodyPr wrap="square" lIns="0" tIns="0" rIns="0" bIns="0" anchor="t">
+          <a:bodyPr wrap="square" anchor="t" lIns="0" rIns="0" tIns="0" bIns="0">
             <a:spAutoFit/>
           </a:bodyPr>
           <a:lstStyle/>
@@ -12365,7 +12454,7 @@
           <a:noFill/>
         </p:spPr>
         <p:txBody>
-          <a:bodyPr wrap="square" lIns="0" tIns="0" rIns="0" bIns="0" anchor="t">
+          <a:bodyPr wrap="square" anchor="t" lIns="0" rIns="0" tIns="0" bIns="0">
             <a:spAutoFit/>
           </a:bodyPr>
           <a:lstStyle/>
@@ -12404,7 +12493,7 @@
           <a:noFill/>
         </p:spPr>
         <p:txBody>
-          <a:bodyPr wrap="square" lIns="0" tIns="0" rIns="0" bIns="0" anchor="t">
+          <a:bodyPr wrap="square" anchor="t" lIns="0" rIns="0" tIns="0" bIns="0">
             <a:spAutoFit/>
           </a:bodyPr>
           <a:lstStyle/>
@@ -12443,7 +12532,7 @@
           <a:noFill/>
         </p:spPr>
         <p:txBody>
-          <a:bodyPr wrap="square" lIns="0" tIns="0" rIns="0" bIns="0" anchor="t">
+          <a:bodyPr wrap="square" anchor="t" lIns="0" rIns="0" tIns="0" bIns="0">
             <a:spAutoFit/>
           </a:bodyPr>
           <a:lstStyle/>
@@ -12482,7 +12571,7 @@
           <a:noFill/>
         </p:spPr>
         <p:txBody>
-          <a:bodyPr wrap="square" lIns="0" tIns="0" rIns="0" bIns="0" anchor="t">
+          <a:bodyPr wrap="square" anchor="t" lIns="0" rIns="0" tIns="0" bIns="0">
             <a:spAutoFit/>
           </a:bodyPr>
           <a:lstStyle/>
@@ -12521,7 +12610,7 @@
           <a:noFill/>
         </p:spPr>
         <p:txBody>
-          <a:bodyPr wrap="square" lIns="0" tIns="0" rIns="0" bIns="0" anchor="t">
+          <a:bodyPr wrap="square" anchor="t" lIns="0" rIns="0" tIns="0" bIns="0">
             <a:spAutoFit/>
           </a:bodyPr>
           <a:lstStyle/>
@@ -12548,23 +12637,11 @@
   <p:clrMapOvr>
     <a:masterClrMapping/>
   </p:clrMapOvr>
-  <mc:AlternateContent xmlns:mc="http://schemas.openxmlformats.org/markup-compatibility/2006">
-    <mc:Choice xmlns:p14="http://schemas.microsoft.com/office/powerpoint/2010/main" Requires="p14">
-      <p:transition spd="med" p14:dur="700">
-        <p:fade thruBlk="1"/>
-      </p:transition>
-    </mc:Choice>
-    <mc:Fallback>
-      <p:transition spd="med">
-        <p:fade thruBlk="1"/>
-      </p:transition>
-    </mc:Fallback>
-  </mc:AlternateContent>
 </p:sld>
 </file>
 
 <file path=ppt/slides/slide17.xml><?xml version="1.0" encoding="utf-8"?>
-<p:sld xmlns:a="http://schemas.openxmlformats.org/drawingml/2006/main" xmlns:r="http://schemas.openxmlformats.org/officeDocument/2006/relationships" xmlns:p="http://schemas.openxmlformats.org/presentationml/2006/main">
+<p:sld xmlns:a="http://schemas.openxmlformats.org/drawingml/2006/main" xmlns:p="http://schemas.openxmlformats.org/presentationml/2006/main" xmlns:r="http://schemas.openxmlformats.org/officeDocument/2006/relationships">
   <p:cSld>
     <p:spTree>
       <p:nvGrpSpPr>
@@ -12572,14 +12649,7 @@
         <p:cNvGrpSpPr/>
         <p:nvPr/>
       </p:nvGrpSpPr>
-      <p:grpSpPr>
-        <a:xfrm>
-          <a:off x="0" y="0"/>
-          <a:ext cx="0" cy="0"/>
-          <a:chOff x="0" y="0"/>
-          <a:chExt cx="0" cy="0"/>
-        </a:xfrm>
-      </p:grpSpPr>
+      <p:grpSpPr/>
       <p:pic>
         <p:nvPicPr>
           <p:cNvPr id="2" name="Picture 1" descr="bg_deep.png"/>
@@ -12621,7 +12691,7 @@
           <a:noFill/>
         </p:spPr>
         <p:txBody>
-          <a:bodyPr wrap="square" lIns="0" tIns="0" rIns="0" bIns="0" anchor="t">
+          <a:bodyPr wrap="square" anchor="t" lIns="0" rIns="0" tIns="0" bIns="0">
             <a:spAutoFit/>
           </a:bodyPr>
           <a:lstStyle/>
@@ -12660,7 +12730,7 @@
           <a:noFill/>
         </p:spPr>
         <p:txBody>
-          <a:bodyPr wrap="square" lIns="0" tIns="0" rIns="0" bIns="0" anchor="t">
+          <a:bodyPr wrap="square" anchor="t" lIns="0" rIns="0" tIns="0" bIns="0">
             <a:spAutoFit/>
           </a:bodyPr>
           <a:lstStyle/>
@@ -12699,7 +12769,7 @@
           <a:noFill/>
         </p:spPr>
         <p:txBody>
-          <a:bodyPr wrap="square" lIns="0" tIns="0" rIns="0" bIns="0" anchor="t">
+          <a:bodyPr wrap="square" anchor="t" lIns="0" rIns="0" tIns="0" bIns="0">
             <a:spAutoFit/>
           </a:bodyPr>
           <a:lstStyle/>
@@ -12762,7 +12832,7 @@
           </a:fontRef>
         </p:style>
         <p:txBody>
-          <a:bodyPr wrap="square" lIns="73152" tIns="36576" rIns="73152" bIns="36576" rtlCol="0" anchor="ctr"/>
+          <a:bodyPr rtlCol="0" anchor="ctr" wrap="square" lIns="73152" rIns="73152" tIns="36576" bIns="36576"/>
           <a:lstStyle/>
           <a:p>
             <a:pPr algn="ctr"/>
@@ -12836,7 +12906,7 @@
           </a:fontRef>
         </p:style>
         <p:txBody>
-          <a:bodyPr wrap="square" lIns="73152" tIns="36576" rIns="73152" bIns="36576" rtlCol="0" anchor="ctr"/>
+          <a:bodyPr rtlCol="0" anchor="ctr" wrap="square" lIns="73152" rIns="73152" tIns="36576" bIns="36576"/>
           <a:lstStyle/>
           <a:p>
             <a:pPr algn="ctr"/>
@@ -12910,7 +12980,7 @@
           </a:fontRef>
         </p:style>
         <p:txBody>
-          <a:bodyPr wrap="square" lIns="73152" tIns="36576" rIns="73152" bIns="36576" rtlCol="0" anchor="ctr"/>
+          <a:bodyPr rtlCol="0" anchor="ctr" wrap="square" lIns="73152" rIns="73152" tIns="36576" bIns="36576"/>
           <a:lstStyle/>
           <a:p>
             <a:pPr algn="ctr"/>
@@ -12984,7 +13054,7 @@
           </a:fontRef>
         </p:style>
         <p:txBody>
-          <a:bodyPr wrap="square" lIns="73152" tIns="36576" rIns="73152" bIns="36576" rtlCol="0" anchor="ctr"/>
+          <a:bodyPr rtlCol="0" anchor="ctr" wrap="square" lIns="73152" rIns="73152" tIns="36576" bIns="36576"/>
           <a:lstStyle/>
           <a:p>
             <a:pPr algn="ctr"/>
@@ -13058,7 +13128,7 @@
           </a:fontRef>
         </p:style>
         <p:txBody>
-          <a:bodyPr wrap="square" lIns="73152" tIns="36576" rIns="73152" bIns="36576" rtlCol="0" anchor="ctr"/>
+          <a:bodyPr rtlCol="0" anchor="ctr" wrap="square" lIns="73152" rIns="73152" tIns="36576" bIns="36576"/>
           <a:lstStyle/>
           <a:p>
             <a:pPr algn="ctr"/>
@@ -13132,7 +13202,7 @@
           </a:fontRef>
         </p:style>
         <p:txBody>
-          <a:bodyPr wrap="square" lIns="73152" tIns="36576" rIns="73152" bIns="36576" rtlCol="0" anchor="ctr"/>
+          <a:bodyPr rtlCol="0" anchor="ctr" wrap="square" lIns="73152" rIns="73152" tIns="36576" bIns="36576"/>
           <a:lstStyle/>
           <a:p>
             <a:pPr algn="ctr"/>
@@ -13206,7 +13276,7 @@
           </a:fontRef>
         </p:style>
         <p:txBody>
-          <a:bodyPr wrap="square" lIns="73152" tIns="36576" rIns="73152" bIns="36576" rtlCol="0" anchor="ctr"/>
+          <a:bodyPr rtlCol="0" anchor="ctr" wrap="square" lIns="73152" rIns="73152" tIns="36576" bIns="36576"/>
           <a:lstStyle/>
           <a:p>
             <a:pPr algn="ctr"/>
@@ -13284,7 +13354,6 @@
           <a:lstStyle/>
           <a:p>
             <a:pPr algn="ctr"/>
-            <a:endParaRPr/>
           </a:p>
         </p:txBody>
       </p:sp>
@@ -13305,7 +13374,7 @@
           <a:noFill/>
         </p:spPr>
         <p:txBody>
-          <a:bodyPr wrap="square" lIns="0" tIns="0" rIns="0" bIns="0" anchor="t">
+          <a:bodyPr wrap="square" anchor="t" lIns="0" rIns="0" tIns="0" bIns="0">
             <a:spAutoFit/>
           </a:bodyPr>
           <a:lstStyle/>
@@ -13360,7 +13429,7 @@
           <a:noFill/>
         </p:spPr>
         <p:txBody>
-          <a:bodyPr wrap="square" lIns="0" tIns="0" rIns="0" bIns="0" anchor="t">
+          <a:bodyPr wrap="square" anchor="t" lIns="0" rIns="0" tIns="0" bIns="0">
             <a:spAutoFit/>
           </a:bodyPr>
           <a:lstStyle/>
@@ -13431,7 +13500,7 @@
           <a:noFill/>
         </p:spPr>
         <p:txBody>
-          <a:bodyPr wrap="square" lIns="0" tIns="0" rIns="0" bIns="0" anchor="t">
+          <a:bodyPr wrap="square" anchor="t" lIns="0" rIns="0" tIns="0" bIns="0">
             <a:spAutoFit/>
           </a:bodyPr>
           <a:lstStyle/>
@@ -13470,7 +13539,7 @@
           <a:noFill/>
         </p:spPr>
         <p:txBody>
-          <a:bodyPr wrap="square" lIns="0" tIns="0" rIns="0" bIns="0" anchor="t">
+          <a:bodyPr wrap="square" anchor="t" lIns="0" rIns="0" tIns="0" bIns="0">
             <a:spAutoFit/>
           </a:bodyPr>
           <a:lstStyle/>
@@ -13497,23 +13566,11 @@
   <p:clrMapOvr>
     <a:masterClrMapping/>
   </p:clrMapOvr>
-  <mc:AlternateContent xmlns:mc="http://schemas.openxmlformats.org/markup-compatibility/2006">
-    <mc:Choice xmlns:p14="http://schemas.microsoft.com/office/powerpoint/2010/main" Requires="p14">
-      <p:transition spd="med" p14:dur="700">
-        <p:fade thruBlk="1"/>
-      </p:transition>
-    </mc:Choice>
-    <mc:Fallback>
-      <p:transition spd="med">
-        <p:fade thruBlk="1"/>
-      </p:transition>
-    </mc:Fallback>
-  </mc:AlternateContent>
 </p:sld>
 </file>
 
 <file path=ppt/slides/slide18.xml><?xml version="1.0" encoding="utf-8"?>
-<p:sld xmlns:a="http://schemas.openxmlformats.org/drawingml/2006/main" xmlns:r="http://schemas.openxmlformats.org/officeDocument/2006/relationships" xmlns:p="http://schemas.openxmlformats.org/presentationml/2006/main">
+<p:sld xmlns:a="http://schemas.openxmlformats.org/drawingml/2006/main" xmlns:p="http://schemas.openxmlformats.org/presentationml/2006/main" xmlns:r="http://schemas.openxmlformats.org/officeDocument/2006/relationships">
   <p:cSld>
     <p:spTree>
       <p:nvGrpSpPr>
@@ -13521,14 +13578,7 @@
         <p:cNvGrpSpPr/>
         <p:nvPr/>
       </p:nvGrpSpPr>
-      <p:grpSpPr>
-        <a:xfrm>
-          <a:off x="0" y="0"/>
-          <a:ext cx="0" cy="0"/>
-          <a:chOff x="0" y="0"/>
-          <a:chExt cx="0" cy="0"/>
-        </a:xfrm>
-      </p:grpSpPr>
+      <p:grpSpPr/>
       <p:pic>
         <p:nvPicPr>
           <p:cNvPr id="2" name="Picture 1" descr="bg_deep.png"/>
@@ -13570,7 +13620,7 @@
           <a:noFill/>
         </p:spPr>
         <p:txBody>
-          <a:bodyPr wrap="square" lIns="0" tIns="0" rIns="0" bIns="0" anchor="t">
+          <a:bodyPr wrap="square" anchor="t" lIns="0" rIns="0" tIns="0" bIns="0">
             <a:spAutoFit/>
           </a:bodyPr>
           <a:lstStyle/>
@@ -13609,7 +13659,7 @@
           <a:noFill/>
         </p:spPr>
         <p:txBody>
-          <a:bodyPr wrap="square" lIns="0" tIns="0" rIns="0" bIns="0" anchor="t">
+          <a:bodyPr wrap="square" anchor="t" lIns="0" rIns="0" tIns="0" bIns="0">
             <a:spAutoFit/>
           </a:bodyPr>
           <a:lstStyle/>
@@ -13648,7 +13698,7 @@
           <a:noFill/>
         </p:spPr>
         <p:txBody>
-          <a:bodyPr wrap="square" lIns="0" tIns="0" rIns="0" bIns="0" anchor="t">
+          <a:bodyPr wrap="square" anchor="t" lIns="0" rIns="0" tIns="0" bIns="0">
             <a:spAutoFit/>
           </a:bodyPr>
           <a:lstStyle/>
@@ -13715,7 +13765,6 @@
           <a:lstStyle/>
           <a:p>
             <a:pPr algn="ctr"/>
-            <a:endParaRPr/>
           </a:p>
         </p:txBody>
       </p:sp>
@@ -13736,7 +13785,7 @@
           <a:noFill/>
         </p:spPr>
         <p:txBody>
-          <a:bodyPr wrap="square" lIns="0" tIns="0" rIns="0" bIns="0" anchor="t">
+          <a:bodyPr wrap="square" anchor="t" lIns="0" rIns="0" tIns="0" bIns="0">
             <a:spAutoFit/>
           </a:bodyPr>
           <a:lstStyle/>
@@ -13753,7 +13802,7 @@
                 </a:solidFill>
                 <a:latin typeface="Segoe UI Semibold"/>
               </a:rPr>
-              <a:t>57</a:t>
+              <a:t>56</a:t>
             </a:r>
           </a:p>
         </p:txBody>
@@ -13775,7 +13824,7 @@
           <a:noFill/>
         </p:spPr>
         <p:txBody>
-          <a:bodyPr wrap="square" lIns="0" tIns="0" rIns="0" bIns="0" anchor="t">
+          <a:bodyPr wrap="square" anchor="t" lIns="0" rIns="0" tIns="0" bIns="0">
             <a:spAutoFit/>
           </a:bodyPr>
           <a:lstStyle/>
@@ -13842,7 +13891,6 @@
           <a:lstStyle/>
           <a:p>
             <a:pPr algn="ctr"/>
-            <a:endParaRPr/>
           </a:p>
         </p:txBody>
       </p:sp>
@@ -13863,7 +13911,7 @@
           <a:noFill/>
         </p:spPr>
         <p:txBody>
-          <a:bodyPr wrap="square" lIns="0" tIns="0" rIns="0" bIns="0" anchor="t">
+          <a:bodyPr wrap="square" anchor="t" lIns="0" rIns="0" tIns="0" bIns="0">
             <a:spAutoFit/>
           </a:bodyPr>
           <a:lstStyle/>
@@ -13902,7 +13950,7 @@
           <a:noFill/>
         </p:spPr>
         <p:txBody>
-          <a:bodyPr wrap="square" lIns="0" tIns="0" rIns="0" bIns="0" anchor="t">
+          <a:bodyPr wrap="square" anchor="t" lIns="0" rIns="0" tIns="0" bIns="0">
             <a:spAutoFit/>
           </a:bodyPr>
           <a:lstStyle/>
@@ -13969,7 +14017,6 @@
           <a:lstStyle/>
           <a:p>
             <a:pPr algn="ctr"/>
-            <a:endParaRPr/>
           </a:p>
         </p:txBody>
       </p:sp>
@@ -13990,7 +14037,7 @@
           <a:noFill/>
         </p:spPr>
         <p:txBody>
-          <a:bodyPr wrap="square" lIns="0" tIns="0" rIns="0" bIns="0" anchor="t">
+          <a:bodyPr wrap="square" anchor="t" lIns="0" rIns="0" tIns="0" bIns="0">
             <a:spAutoFit/>
           </a:bodyPr>
           <a:lstStyle/>
@@ -14007,7 +14054,7 @@
                 </a:solidFill>
                 <a:latin typeface="Segoe UI Semibold"/>
               </a:rPr>
-              <a:t>138</a:t>
+              <a:t>137</a:t>
             </a:r>
           </a:p>
         </p:txBody>
@@ -14029,7 +14076,7 @@
           <a:noFill/>
         </p:spPr>
         <p:txBody>
-          <a:bodyPr wrap="square" lIns="0" tIns="0" rIns="0" bIns="0" anchor="t">
+          <a:bodyPr wrap="square" anchor="t" lIns="0" rIns="0" tIns="0" bIns="0">
             <a:spAutoFit/>
           </a:bodyPr>
           <a:lstStyle/>
@@ -14096,7 +14143,6 @@
           <a:lstStyle/>
           <a:p>
             <a:pPr algn="ctr"/>
-            <a:endParaRPr/>
           </a:p>
         </p:txBody>
       </p:sp>
@@ -14117,7 +14163,7 @@
           <a:noFill/>
         </p:spPr>
         <p:txBody>
-          <a:bodyPr wrap="square" lIns="0" tIns="0" rIns="0" bIns="0" anchor="t">
+          <a:bodyPr wrap="square" anchor="t" lIns="0" rIns="0" tIns="0" bIns="0">
             <a:spAutoFit/>
           </a:bodyPr>
           <a:lstStyle/>
@@ -14156,7 +14202,7 @@
           <a:noFill/>
         </p:spPr>
         <p:txBody>
-          <a:bodyPr wrap="square" lIns="0" tIns="0" rIns="0" bIns="0" anchor="t">
+          <a:bodyPr wrap="square" anchor="t" lIns="0" rIns="0" tIns="0" bIns="0">
             <a:spAutoFit/>
           </a:bodyPr>
           <a:lstStyle/>
@@ -14223,7 +14269,6 @@
           <a:lstStyle/>
           <a:p>
             <a:pPr algn="ctr"/>
-            <a:endParaRPr/>
           </a:p>
         </p:txBody>
       </p:sp>
@@ -14244,7 +14289,7 @@
           <a:noFill/>
         </p:spPr>
         <p:txBody>
-          <a:bodyPr wrap="square" lIns="0" tIns="0" rIns="0" bIns="0" anchor="t">
+          <a:bodyPr wrap="square" anchor="t" lIns="0" rIns="0" tIns="0" bIns="0">
             <a:spAutoFit/>
           </a:bodyPr>
           <a:lstStyle/>
@@ -14261,7 +14306,7 @@
                 </a:solidFill>
                 <a:latin typeface="Segoe UI Semibold"/>
               </a:rPr>
-              <a:t>433</a:t>
+              <a:t>5</a:t>
             </a:r>
           </a:p>
         </p:txBody>
@@ -14283,7 +14328,7 @@
           <a:noFill/>
         </p:spPr>
         <p:txBody>
-          <a:bodyPr wrap="square" lIns="0" tIns="0" rIns="0" bIns="0" anchor="t">
+          <a:bodyPr wrap="square" anchor="t" lIns="0" rIns="0" tIns="0" bIns="0">
             <a:spAutoFit/>
           </a:bodyPr>
           <a:lstStyle/>
@@ -14350,7 +14395,6 @@
           <a:lstStyle/>
           <a:p>
             <a:pPr algn="ctr"/>
-            <a:endParaRPr/>
           </a:p>
         </p:txBody>
       </p:sp>
@@ -14371,7 +14415,7 @@
           <a:noFill/>
         </p:spPr>
         <p:txBody>
-          <a:bodyPr wrap="square" lIns="0" tIns="0" rIns="0" bIns="0" anchor="t">
+          <a:bodyPr wrap="square" anchor="t" lIns="0" rIns="0" tIns="0" bIns="0">
             <a:spAutoFit/>
           </a:bodyPr>
           <a:lstStyle/>
@@ -14410,7 +14454,7 @@
           <a:noFill/>
         </p:spPr>
         <p:txBody>
-          <a:bodyPr wrap="square" lIns="0" tIns="0" rIns="0" bIns="0" anchor="t">
+          <a:bodyPr wrap="square" anchor="t" lIns="0" rIns="0" tIns="0" bIns="0">
             <a:spAutoFit/>
           </a:bodyPr>
           <a:lstStyle/>
@@ -14449,7 +14493,7 @@
           <a:noFill/>
         </p:spPr>
         <p:txBody>
-          <a:bodyPr wrap="square" lIns="0" tIns="0" rIns="0" bIns="0" anchor="t">
+          <a:bodyPr wrap="square" anchor="t" lIns="0" rIns="0" tIns="0" bIns="0">
             <a:spAutoFit/>
           </a:bodyPr>
           <a:lstStyle/>
@@ -14488,7 +14532,7 @@
           <a:noFill/>
         </p:spPr>
         <p:txBody>
-          <a:bodyPr wrap="square" lIns="0" tIns="0" rIns="0" bIns="0" anchor="t">
+          <a:bodyPr wrap="square" anchor="t" lIns="0" rIns="0" tIns="0" bIns="0">
             <a:spAutoFit/>
           </a:bodyPr>
           <a:lstStyle/>
@@ -14527,7 +14571,7 @@
           <a:noFill/>
         </p:spPr>
         <p:txBody>
-          <a:bodyPr wrap="square" lIns="0" tIns="0" rIns="0" bIns="0" anchor="t">
+          <a:bodyPr wrap="square" anchor="t" lIns="0" rIns="0" tIns="0" bIns="0">
             <a:spAutoFit/>
           </a:bodyPr>
           <a:lstStyle/>
@@ -14566,7 +14610,7 @@
           <a:noFill/>
         </p:spPr>
         <p:txBody>
-          <a:bodyPr wrap="square" lIns="0" tIns="0" rIns="0" bIns="0" anchor="t">
+          <a:bodyPr wrap="square" anchor="t" lIns="0" rIns="0" tIns="0" bIns="0">
             <a:spAutoFit/>
           </a:bodyPr>
           <a:lstStyle/>
@@ -14605,7 +14649,7 @@
           <a:noFill/>
         </p:spPr>
         <p:txBody>
-          <a:bodyPr wrap="square" lIns="0" tIns="0" rIns="0" bIns="0" anchor="t">
+          <a:bodyPr wrap="square" anchor="t" lIns="0" rIns="0" tIns="0" bIns="0">
             <a:spAutoFit/>
           </a:bodyPr>
           <a:lstStyle/>
@@ -14644,7 +14688,7 @@
           <a:noFill/>
         </p:spPr>
         <p:txBody>
-          <a:bodyPr wrap="square" lIns="0" tIns="0" rIns="0" bIns="0" anchor="t">
+          <a:bodyPr wrap="square" anchor="t" lIns="0" rIns="0" tIns="0" bIns="0">
             <a:spAutoFit/>
           </a:bodyPr>
           <a:lstStyle/>
@@ -14683,7 +14727,7 @@
           <a:noFill/>
         </p:spPr>
         <p:txBody>
-          <a:bodyPr wrap="square" lIns="0" tIns="0" rIns="0" bIns="0" anchor="t">
+          <a:bodyPr wrap="square" anchor="t" lIns="0" rIns="0" tIns="0" bIns="0">
             <a:spAutoFit/>
           </a:bodyPr>
           <a:lstStyle/>
@@ -14722,7 +14766,7 @@
           <a:noFill/>
         </p:spPr>
         <p:txBody>
-          <a:bodyPr wrap="square" lIns="0" tIns="0" rIns="0" bIns="0" anchor="t">
+          <a:bodyPr wrap="square" anchor="t" lIns="0" rIns="0" tIns="0" bIns="0">
             <a:spAutoFit/>
           </a:bodyPr>
           <a:lstStyle/>
@@ -14761,7 +14805,7 @@
           <a:noFill/>
         </p:spPr>
         <p:txBody>
-          <a:bodyPr wrap="square" lIns="0" tIns="0" rIns="0" bIns="0" anchor="t">
+          <a:bodyPr wrap="square" anchor="t" lIns="0" rIns="0" tIns="0" bIns="0">
             <a:spAutoFit/>
           </a:bodyPr>
           <a:lstStyle/>
@@ -14800,7 +14844,7 @@
           <a:noFill/>
         </p:spPr>
         <p:txBody>
-          <a:bodyPr wrap="square" lIns="0" tIns="0" rIns="0" bIns="0" anchor="t">
+          <a:bodyPr wrap="square" anchor="t" lIns="0" rIns="0" tIns="0" bIns="0">
             <a:spAutoFit/>
           </a:bodyPr>
           <a:lstStyle/>
@@ -14839,7 +14883,7 @@
           <a:noFill/>
         </p:spPr>
         <p:txBody>
-          <a:bodyPr wrap="square" lIns="0" tIns="0" rIns="0" bIns="0" anchor="t">
+          <a:bodyPr wrap="square" anchor="t" lIns="0" rIns="0" tIns="0" bIns="0">
             <a:spAutoFit/>
           </a:bodyPr>
           <a:lstStyle/>
@@ -14878,7 +14922,7 @@
           <a:noFill/>
         </p:spPr>
         <p:txBody>
-          <a:bodyPr wrap="square" lIns="0" tIns="0" rIns="0" bIns="0" anchor="t">
+          <a:bodyPr wrap="square" anchor="t" lIns="0" rIns="0" tIns="0" bIns="0">
             <a:spAutoFit/>
           </a:bodyPr>
           <a:lstStyle/>
@@ -14905,23 +14949,11 @@
   <p:clrMapOvr>
     <a:masterClrMapping/>
   </p:clrMapOvr>
-  <mc:AlternateContent xmlns:mc="http://schemas.openxmlformats.org/markup-compatibility/2006">
-    <mc:Choice xmlns:p14="http://schemas.microsoft.com/office/powerpoint/2010/main" Requires="p14">
-      <p:transition spd="med" p14:dur="700">
-        <p:fade thruBlk="1"/>
-      </p:transition>
-    </mc:Choice>
-    <mc:Fallback>
-      <p:transition spd="med">
-        <p:fade thruBlk="1"/>
-      </p:transition>
-    </mc:Fallback>
-  </mc:AlternateContent>
 </p:sld>
 </file>
 
 <file path=ppt/slides/slide19.xml><?xml version="1.0" encoding="utf-8"?>
-<p:sld xmlns:a="http://schemas.openxmlformats.org/drawingml/2006/main" xmlns:r="http://schemas.openxmlformats.org/officeDocument/2006/relationships" xmlns:p="http://schemas.openxmlformats.org/presentationml/2006/main">
+<p:sld xmlns:a="http://schemas.openxmlformats.org/drawingml/2006/main" xmlns:p="http://schemas.openxmlformats.org/presentationml/2006/main" xmlns:r="http://schemas.openxmlformats.org/officeDocument/2006/relationships">
   <p:cSld>
     <p:spTree>
       <p:nvGrpSpPr>
@@ -14929,14 +14961,7 @@
         <p:cNvGrpSpPr/>
         <p:nvPr/>
       </p:nvGrpSpPr>
-      <p:grpSpPr>
-        <a:xfrm>
-          <a:off x="0" y="0"/>
-          <a:ext cx="0" cy="0"/>
-          <a:chOff x="0" y="0"/>
-          <a:chExt cx="0" cy="0"/>
-        </a:xfrm>
-      </p:grpSpPr>
+      <p:grpSpPr/>
       <p:pic>
         <p:nvPicPr>
           <p:cNvPr id="2" name="Picture 1" descr="bg_mod.png"/>
@@ -14978,7 +15003,7 @@
           <a:noFill/>
         </p:spPr>
         <p:txBody>
-          <a:bodyPr wrap="square" lIns="0" tIns="0" rIns="0" bIns="0" anchor="t">
+          <a:bodyPr wrap="square" anchor="t" lIns="0" rIns="0" tIns="0" bIns="0">
             <a:spAutoFit/>
           </a:bodyPr>
           <a:lstStyle/>
@@ -15017,7 +15042,7 @@
           <a:noFill/>
         </p:spPr>
         <p:txBody>
-          <a:bodyPr wrap="square" lIns="0" tIns="0" rIns="0" bIns="0" anchor="t">
+          <a:bodyPr wrap="square" anchor="t" lIns="0" rIns="0" tIns="0" bIns="0">
             <a:spAutoFit/>
           </a:bodyPr>
           <a:lstStyle/>
@@ -15056,7 +15081,7 @@
           <a:noFill/>
         </p:spPr>
         <p:txBody>
-          <a:bodyPr wrap="square" lIns="0" tIns="0" rIns="0" bIns="0" anchor="t">
+          <a:bodyPr wrap="square" anchor="t" lIns="0" rIns="0" tIns="0" bIns="0">
             <a:spAutoFit/>
           </a:bodyPr>
           <a:lstStyle/>
@@ -15119,7 +15144,7 @@
           </a:fontRef>
         </p:style>
         <p:txBody>
-          <a:bodyPr wrap="square" lIns="73152" tIns="36576" rIns="73152" bIns="36576" rtlCol="0" anchor="ctr"/>
+          <a:bodyPr rtlCol="0" anchor="ctr" wrap="square" lIns="73152" rIns="73152" tIns="36576" bIns="36576"/>
           <a:lstStyle/>
           <a:p>
             <a:pPr algn="ctr"/>
@@ -15193,7 +15218,7 @@
           </a:fontRef>
         </p:style>
         <p:txBody>
-          <a:bodyPr wrap="square" lIns="54864" tIns="0" rIns="54864" bIns="0" rtlCol="0" anchor="ctr"/>
+          <a:bodyPr rtlCol="0" anchor="ctr" wrap="square" lIns="54864" rIns="54864" tIns="0" bIns="0"/>
           <a:lstStyle/>
           <a:p>
             <a:pPr algn="ctr"/>
@@ -15250,7 +15275,7 @@
           </a:fontRef>
         </p:style>
         <p:txBody>
-          <a:bodyPr wrap="square" lIns="73152" tIns="36576" rIns="73152" bIns="36576" rtlCol="0" anchor="ctr"/>
+          <a:bodyPr rtlCol="0" anchor="ctr" wrap="square" lIns="73152" rIns="73152" tIns="36576" bIns="36576"/>
           <a:lstStyle/>
           <a:p>
             <a:pPr algn="ctr"/>
@@ -15324,7 +15349,7 @@
           </a:fontRef>
         </p:style>
         <p:txBody>
-          <a:bodyPr wrap="square" lIns="54864" tIns="0" rIns="54864" bIns="0" rtlCol="0" anchor="ctr"/>
+          <a:bodyPr rtlCol="0" anchor="ctr" wrap="square" lIns="54864" rIns="54864" tIns="0" bIns="0"/>
           <a:lstStyle/>
           <a:p>
             <a:pPr algn="ctr"/>
@@ -15381,7 +15406,7 @@
           </a:fontRef>
         </p:style>
         <p:txBody>
-          <a:bodyPr wrap="square" lIns="73152" tIns="36576" rIns="73152" bIns="36576" rtlCol="0" anchor="ctr"/>
+          <a:bodyPr rtlCol="0" anchor="ctr" wrap="square" lIns="73152" rIns="73152" tIns="36576" bIns="36576"/>
           <a:lstStyle/>
           <a:p>
             <a:pPr algn="ctr"/>
@@ -15455,7 +15480,7 @@
           </a:fontRef>
         </p:style>
         <p:txBody>
-          <a:bodyPr wrap="square" lIns="54864" tIns="0" rIns="54864" bIns="0" rtlCol="0" anchor="ctr"/>
+          <a:bodyPr rtlCol="0" anchor="ctr" wrap="square" lIns="54864" rIns="54864" tIns="0" bIns="0"/>
           <a:lstStyle/>
           <a:p>
             <a:pPr algn="ctr"/>
@@ -15516,7 +15541,6 @@
           <a:lstStyle/>
           <a:p>
             <a:pPr algn="ctr"/>
-            <a:endParaRPr/>
           </a:p>
         </p:txBody>
       </p:sp>
@@ -15537,7 +15561,7 @@
           <a:noFill/>
         </p:spPr>
         <p:txBody>
-          <a:bodyPr wrap="square" lIns="0" tIns="0" rIns="0" bIns="0" anchor="t">
+          <a:bodyPr wrap="square" anchor="t" lIns="0" rIns="0" tIns="0" bIns="0">
             <a:spAutoFit/>
           </a:bodyPr>
           <a:lstStyle/>
@@ -15576,7 +15600,7 @@
           <a:noFill/>
         </p:spPr>
         <p:txBody>
-          <a:bodyPr wrap="square" lIns="0" tIns="0" rIns="0" bIns="0" anchor="t">
+          <a:bodyPr wrap="square" anchor="t" lIns="0" rIns="0" tIns="0" bIns="0">
             <a:spAutoFit/>
           </a:bodyPr>
           <a:lstStyle/>
@@ -15659,7 +15683,6 @@
           <a:lstStyle/>
           <a:p>
             <a:pPr algn="ctr"/>
-            <a:endParaRPr/>
           </a:p>
         </p:txBody>
       </p:sp>
@@ -15680,7 +15703,7 @@
           <a:noFill/>
         </p:spPr>
         <p:txBody>
-          <a:bodyPr wrap="square" lIns="0" tIns="0" rIns="0" bIns="0" anchor="t">
+          <a:bodyPr wrap="square" anchor="t" lIns="0" rIns="0" tIns="0" bIns="0">
             <a:spAutoFit/>
           </a:bodyPr>
           <a:lstStyle/>
@@ -15719,7 +15742,7 @@
           <a:noFill/>
         </p:spPr>
         <p:txBody>
-          <a:bodyPr wrap="square" lIns="0" tIns="0" rIns="0" bIns="0" anchor="t">
+          <a:bodyPr wrap="square" anchor="t" lIns="0" rIns="0" tIns="0" bIns="0">
             <a:spAutoFit/>
           </a:bodyPr>
           <a:lstStyle/>
@@ -15774,7 +15797,7 @@
           <a:noFill/>
         </p:spPr>
         <p:txBody>
-          <a:bodyPr wrap="square" lIns="0" tIns="0" rIns="0" bIns="0" anchor="t">
+          <a:bodyPr wrap="square" anchor="t" lIns="0" rIns="0" tIns="0" bIns="0">
             <a:spAutoFit/>
           </a:bodyPr>
           <a:lstStyle/>
@@ -15813,7 +15836,7 @@
           <a:noFill/>
         </p:spPr>
         <p:txBody>
-          <a:bodyPr wrap="square" lIns="0" tIns="0" rIns="0" bIns="0" anchor="t">
+          <a:bodyPr wrap="square" anchor="t" lIns="0" rIns="0" tIns="0" bIns="0">
             <a:spAutoFit/>
           </a:bodyPr>
           <a:lstStyle/>
@@ -15840,23 +15863,11 @@
   <p:clrMapOvr>
     <a:masterClrMapping/>
   </p:clrMapOvr>
-  <mc:AlternateContent xmlns:mc="http://schemas.openxmlformats.org/markup-compatibility/2006">
-    <mc:Choice xmlns:p14="http://schemas.microsoft.com/office/powerpoint/2010/main" Requires="p14">
-      <p:transition spd="med" p14:dur="700">
-        <p:fade thruBlk="1"/>
-      </p:transition>
-    </mc:Choice>
-    <mc:Fallback>
-      <p:transition spd="med">
-        <p:fade thruBlk="1"/>
-      </p:transition>
-    </mc:Fallback>
-  </mc:AlternateContent>
 </p:sld>
 </file>
 
 <file path=ppt/slides/slide2.xml><?xml version="1.0" encoding="utf-8"?>
-<p:sld xmlns:a="http://schemas.openxmlformats.org/drawingml/2006/main" xmlns:r="http://schemas.openxmlformats.org/officeDocument/2006/relationships" xmlns:p="http://schemas.openxmlformats.org/presentationml/2006/main">
+<p:sld xmlns:a="http://schemas.openxmlformats.org/drawingml/2006/main" xmlns:p="http://schemas.openxmlformats.org/presentationml/2006/main" xmlns:r="http://schemas.openxmlformats.org/officeDocument/2006/relationships">
   <p:cSld>
     <p:spTree>
       <p:nvGrpSpPr>
@@ -15864,14 +15875,7 @@
         <p:cNvGrpSpPr/>
         <p:nvPr/>
       </p:nvGrpSpPr>
-      <p:grpSpPr>
-        <a:xfrm>
-          <a:off x="0" y="0"/>
-          <a:ext cx="0" cy="0"/>
-          <a:chOff x="0" y="0"/>
-          <a:chExt cx="0" cy="0"/>
-        </a:xfrm>
-      </p:grpSpPr>
+      <p:grpSpPr/>
       <p:pic>
         <p:nvPicPr>
           <p:cNvPr id="2" name="Picture 1" descr="bg_deep.png"/>
@@ -15881,7 +15885,7 @@
           <p:nvPr/>
         </p:nvPicPr>
         <p:blipFill>
-          <a:blip r:embed="rId3"/>
+          <a:blip r:embed="rId2"/>
           <a:stretch>
             <a:fillRect/>
           </a:stretch>
@@ -15913,7 +15917,7 @@
           <a:noFill/>
         </p:spPr>
         <p:txBody>
-          <a:bodyPr wrap="square" lIns="0" tIns="0" rIns="0" bIns="0" anchor="t">
+          <a:bodyPr wrap="square" anchor="t" lIns="0" rIns="0" tIns="0" bIns="0">
             <a:spAutoFit/>
           </a:bodyPr>
           <a:lstStyle/>
@@ -15952,7 +15956,7 @@
           <a:noFill/>
         </p:spPr>
         <p:txBody>
-          <a:bodyPr wrap="square" lIns="0" tIns="0" rIns="0" bIns="0" anchor="t">
+          <a:bodyPr wrap="square" anchor="t" lIns="0" rIns="0" tIns="0" bIns="0">
             <a:spAutoFit/>
           </a:bodyPr>
           <a:lstStyle/>
@@ -15991,7 +15995,7 @@
           <a:noFill/>
         </p:spPr>
         <p:txBody>
-          <a:bodyPr wrap="square" lIns="0" tIns="0" rIns="0" bIns="0" anchor="t">
+          <a:bodyPr wrap="square" anchor="t" lIns="0" rIns="0" tIns="0" bIns="0">
             <a:spAutoFit/>
           </a:bodyPr>
           <a:lstStyle/>
@@ -16054,7 +16058,7 @@
           </a:fontRef>
         </p:style>
         <p:txBody>
-          <a:bodyPr wrap="square" lIns="54864" tIns="0" rIns="54864" bIns="0" rtlCol="0" anchor="ctr"/>
+          <a:bodyPr rtlCol="0" anchor="ctr" wrap="square" lIns="54864" rIns="54864" tIns="0" bIns="0"/>
           <a:lstStyle/>
           <a:p>
             <a:pPr algn="ctr"/>
@@ -16087,7 +16091,7 @@
           <a:noFill/>
         </p:spPr>
         <p:txBody>
-          <a:bodyPr wrap="square" lIns="0" tIns="0" rIns="0" bIns="0" anchor="t">
+          <a:bodyPr wrap="square" anchor="t" lIns="0" rIns="0" tIns="0" bIns="0">
             <a:spAutoFit/>
           </a:bodyPr>
           <a:lstStyle/>
@@ -16150,7 +16154,7 @@
           </a:fontRef>
         </p:style>
         <p:txBody>
-          <a:bodyPr wrap="square" lIns="54864" tIns="0" rIns="54864" bIns="0" rtlCol="0" anchor="ctr"/>
+          <a:bodyPr rtlCol="0" anchor="ctr" wrap="square" lIns="54864" rIns="54864" tIns="0" bIns="0"/>
           <a:lstStyle/>
           <a:p>
             <a:pPr algn="ctr"/>
@@ -16183,7 +16187,7 @@
           <a:noFill/>
         </p:spPr>
         <p:txBody>
-          <a:bodyPr wrap="square" lIns="0" tIns="0" rIns="0" bIns="0" anchor="t">
+          <a:bodyPr wrap="square" anchor="t" lIns="0" rIns="0" tIns="0" bIns="0">
             <a:spAutoFit/>
           </a:bodyPr>
           <a:lstStyle/>
@@ -16246,7 +16250,7 @@
           </a:fontRef>
         </p:style>
         <p:txBody>
-          <a:bodyPr wrap="square" lIns="54864" tIns="0" rIns="54864" bIns="0" rtlCol="0" anchor="ctr"/>
+          <a:bodyPr rtlCol="0" anchor="ctr" wrap="square" lIns="54864" rIns="54864" tIns="0" bIns="0"/>
           <a:lstStyle/>
           <a:p>
             <a:pPr algn="ctr"/>
@@ -16279,7 +16283,7 @@
           <a:noFill/>
         </p:spPr>
         <p:txBody>
-          <a:bodyPr wrap="square" lIns="0" tIns="0" rIns="0" bIns="0" anchor="t">
+          <a:bodyPr wrap="square" anchor="t" lIns="0" rIns="0" tIns="0" bIns="0">
             <a:spAutoFit/>
           </a:bodyPr>
           <a:lstStyle/>
@@ -16342,7 +16346,7 @@
           </a:fontRef>
         </p:style>
         <p:txBody>
-          <a:bodyPr wrap="square" lIns="54864" tIns="0" rIns="54864" bIns="0" rtlCol="0" anchor="ctr"/>
+          <a:bodyPr rtlCol="0" anchor="ctr" wrap="square" lIns="54864" rIns="54864" tIns="0" bIns="0"/>
           <a:lstStyle/>
           <a:p>
             <a:pPr algn="ctr"/>
@@ -16375,7 +16379,7 @@
           <a:noFill/>
         </p:spPr>
         <p:txBody>
-          <a:bodyPr wrap="square" lIns="0" tIns="0" rIns="0" bIns="0" anchor="t">
+          <a:bodyPr wrap="square" anchor="t" lIns="0" rIns="0" tIns="0" bIns="0">
             <a:spAutoFit/>
           </a:bodyPr>
           <a:lstStyle/>
@@ -16442,7 +16446,6 @@
           <a:lstStyle/>
           <a:p>
             <a:pPr algn="ctr"/>
-            <a:endParaRPr/>
           </a:p>
         </p:txBody>
       </p:sp>
@@ -16463,7 +16466,7 @@
           <a:noFill/>
         </p:spPr>
         <p:txBody>
-          <a:bodyPr wrap="square" lIns="0" tIns="0" rIns="0" bIns="0" anchor="t">
+          <a:bodyPr wrap="square" anchor="t" lIns="0" rIns="0" tIns="0" bIns="0">
             <a:spAutoFit/>
           </a:bodyPr>
           <a:lstStyle/>
@@ -16502,7 +16505,7 @@
           <a:noFill/>
         </p:spPr>
         <p:txBody>
-          <a:bodyPr wrap="square" lIns="0" tIns="0" rIns="0" bIns="0" anchor="t">
+          <a:bodyPr wrap="square" anchor="t" lIns="0" rIns="0" tIns="0" bIns="0">
             <a:spAutoFit/>
           </a:bodyPr>
           <a:lstStyle/>
@@ -16557,7 +16560,7 @@
           <a:noFill/>
         </p:spPr>
         <p:txBody>
-          <a:bodyPr wrap="square" lIns="0" tIns="0" rIns="0" bIns="0" anchor="t">
+          <a:bodyPr wrap="square" anchor="t" lIns="0" rIns="0" tIns="0" bIns="0">
             <a:spAutoFit/>
           </a:bodyPr>
           <a:lstStyle/>
@@ -16596,7 +16599,7 @@
           <a:noFill/>
         </p:spPr>
         <p:txBody>
-          <a:bodyPr wrap="square" lIns="0" tIns="0" rIns="0" bIns="0" anchor="t">
+          <a:bodyPr wrap="square" anchor="t" lIns="0" rIns="0" tIns="0" bIns="0">
             <a:spAutoFit/>
           </a:bodyPr>
           <a:lstStyle/>
@@ -16635,7 +16638,7 @@
           <a:noFill/>
         </p:spPr>
         <p:txBody>
-          <a:bodyPr wrap="square" lIns="0" tIns="0" rIns="0" bIns="0" anchor="t">
+          <a:bodyPr wrap="square" anchor="t" lIns="0" rIns="0" tIns="0" bIns="0">
             <a:spAutoFit/>
           </a:bodyPr>
           <a:lstStyle/>
@@ -16690,7 +16693,7 @@
           <a:noFill/>
         </p:spPr>
         <p:txBody>
-          <a:bodyPr wrap="square" lIns="0" tIns="0" rIns="0" bIns="0" anchor="t">
+          <a:bodyPr wrap="square" anchor="t" lIns="0" rIns="0" tIns="0" bIns="0">
             <a:spAutoFit/>
           </a:bodyPr>
           <a:lstStyle/>
@@ -16729,7 +16732,7 @@
           <a:noFill/>
         </p:spPr>
         <p:txBody>
-          <a:bodyPr wrap="square" lIns="0" tIns="0" rIns="0" bIns="0" anchor="t">
+          <a:bodyPr wrap="square" anchor="t" lIns="0" rIns="0" tIns="0" bIns="0">
             <a:spAutoFit/>
           </a:bodyPr>
           <a:lstStyle/>
@@ -16756,23 +16759,11 @@
   <p:clrMapOvr>
     <a:masterClrMapping/>
   </p:clrMapOvr>
-  <mc:AlternateContent xmlns:mc="http://schemas.openxmlformats.org/markup-compatibility/2006">
-    <mc:Choice xmlns:p14="http://schemas.microsoft.com/office/powerpoint/2010/main" Requires="p14">
-      <p:transition spd="med" p14:dur="700">
-        <p:fade thruBlk="1"/>
-      </p:transition>
-    </mc:Choice>
-    <mc:Fallback>
-      <p:transition spd="med">
-        <p:fade thruBlk="1"/>
-      </p:transition>
-    </mc:Fallback>
-  </mc:AlternateContent>
 </p:sld>
 </file>
 
 <file path=ppt/slides/slide20.xml><?xml version="1.0" encoding="utf-8"?>
-<p:sld xmlns:a="http://schemas.openxmlformats.org/drawingml/2006/main" xmlns:r="http://schemas.openxmlformats.org/officeDocument/2006/relationships" xmlns:p="http://schemas.openxmlformats.org/presentationml/2006/main">
+<p:sld xmlns:a="http://schemas.openxmlformats.org/drawingml/2006/main" xmlns:p="http://schemas.openxmlformats.org/presentationml/2006/main" xmlns:r="http://schemas.openxmlformats.org/officeDocument/2006/relationships">
   <p:cSld>
     <p:spTree>
       <p:nvGrpSpPr>
@@ -16780,14 +16771,7 @@
         <p:cNvGrpSpPr/>
         <p:nvPr/>
       </p:nvGrpSpPr>
-      <p:grpSpPr>
-        <a:xfrm>
-          <a:off x="0" y="0"/>
-          <a:ext cx="0" cy="0"/>
-          <a:chOff x="0" y="0"/>
-          <a:chExt cx="0" cy="0"/>
-        </a:xfrm>
-      </p:grpSpPr>
+      <p:grpSpPr/>
       <p:pic>
         <p:nvPicPr>
           <p:cNvPr id="2" name="Picture 1" descr="bg_mod.png"/>
@@ -16829,7 +16813,7 @@
           <a:noFill/>
         </p:spPr>
         <p:txBody>
-          <a:bodyPr wrap="square" lIns="0" tIns="0" rIns="0" bIns="0" anchor="t">
+          <a:bodyPr wrap="square" anchor="t" lIns="0" rIns="0" tIns="0" bIns="0">
             <a:spAutoFit/>
           </a:bodyPr>
           <a:lstStyle/>
@@ -16868,7 +16852,7 @@
           <a:noFill/>
         </p:spPr>
         <p:txBody>
-          <a:bodyPr wrap="square" lIns="0" tIns="0" rIns="0" bIns="0" anchor="t">
+          <a:bodyPr wrap="square" anchor="t" lIns="0" rIns="0" tIns="0" bIns="0">
             <a:spAutoFit/>
           </a:bodyPr>
           <a:lstStyle/>
@@ -16907,7 +16891,7 @@
           <a:noFill/>
         </p:spPr>
         <p:txBody>
-          <a:bodyPr wrap="square" lIns="0" tIns="0" rIns="0" bIns="0" anchor="t">
+          <a:bodyPr wrap="square" anchor="t" lIns="0" rIns="0" tIns="0" bIns="0">
             <a:spAutoFit/>
           </a:bodyPr>
           <a:lstStyle/>
@@ -16974,7 +16958,6 @@
           <a:lstStyle/>
           <a:p>
             <a:pPr algn="ctr"/>
-            <a:endParaRPr/>
           </a:p>
         </p:txBody>
       </p:sp>
@@ -16995,7 +16978,7 @@
           <a:noFill/>
         </p:spPr>
         <p:txBody>
-          <a:bodyPr wrap="square" lIns="0" tIns="0" rIns="0" bIns="0" anchor="t">
+          <a:bodyPr wrap="square" anchor="t" lIns="0" rIns="0" tIns="0" bIns="0">
             <a:spAutoFit/>
           </a:bodyPr>
           <a:lstStyle/>
@@ -17034,7 +17017,7 @@
           <a:noFill/>
         </p:spPr>
         <p:txBody>
-          <a:bodyPr wrap="square" lIns="0" tIns="0" rIns="0" bIns="0" anchor="t">
+          <a:bodyPr wrap="square" anchor="t" lIns="0" rIns="0" tIns="0" bIns="0">
             <a:spAutoFit/>
           </a:bodyPr>
           <a:lstStyle/>
@@ -17097,7 +17080,7 @@
           </a:fontRef>
         </p:style>
         <p:txBody>
-          <a:bodyPr wrap="square" lIns="54864" tIns="0" rIns="54864" bIns="0" rtlCol="0" anchor="ctr"/>
+          <a:bodyPr rtlCol="0" anchor="ctr" wrap="square" lIns="54864" rIns="54864" tIns="0" bIns="0"/>
           <a:lstStyle/>
           <a:p>
             <a:pPr algn="ctr"/>
@@ -17158,7 +17141,6 @@
           <a:lstStyle/>
           <a:p>
             <a:pPr algn="ctr"/>
-            <a:endParaRPr/>
           </a:p>
         </p:txBody>
       </p:sp>
@@ -17179,7 +17161,7 @@
           <a:noFill/>
         </p:spPr>
         <p:txBody>
-          <a:bodyPr wrap="square" lIns="0" tIns="0" rIns="0" bIns="0" anchor="t">
+          <a:bodyPr wrap="square" anchor="t" lIns="0" rIns="0" tIns="0" bIns="0">
             <a:spAutoFit/>
           </a:bodyPr>
           <a:lstStyle/>
@@ -17218,7 +17200,7 @@
           <a:noFill/>
         </p:spPr>
         <p:txBody>
-          <a:bodyPr wrap="square" lIns="0" tIns="0" rIns="0" bIns="0" anchor="t">
+          <a:bodyPr wrap="square" anchor="t" lIns="0" rIns="0" tIns="0" bIns="0">
             <a:spAutoFit/>
           </a:bodyPr>
           <a:lstStyle/>
@@ -17281,7 +17263,7 @@
           </a:fontRef>
         </p:style>
         <p:txBody>
-          <a:bodyPr wrap="square" lIns="54864" tIns="0" rIns="54864" bIns="0" rtlCol="0" anchor="ctr"/>
+          <a:bodyPr rtlCol="0" anchor="ctr" wrap="square" lIns="54864" rIns="54864" tIns="0" bIns="0"/>
           <a:lstStyle/>
           <a:p>
             <a:pPr algn="ctr"/>
@@ -17342,7 +17324,6 @@
           <a:lstStyle/>
           <a:p>
             <a:pPr algn="ctr"/>
-            <a:endParaRPr/>
           </a:p>
         </p:txBody>
       </p:sp>
@@ -17363,7 +17344,7 @@
           <a:noFill/>
         </p:spPr>
         <p:txBody>
-          <a:bodyPr wrap="square" lIns="0" tIns="0" rIns="0" bIns="0" anchor="t">
+          <a:bodyPr wrap="square" anchor="t" lIns="0" rIns="0" tIns="0" bIns="0">
             <a:spAutoFit/>
           </a:bodyPr>
           <a:lstStyle/>
@@ -17402,7 +17383,7 @@
           <a:noFill/>
         </p:spPr>
         <p:txBody>
-          <a:bodyPr wrap="square" lIns="0" tIns="0" rIns="0" bIns="0" anchor="t">
+          <a:bodyPr wrap="square" anchor="t" lIns="0" rIns="0" tIns="0" bIns="0">
             <a:spAutoFit/>
           </a:bodyPr>
           <a:lstStyle/>
@@ -17465,7 +17446,7 @@
           </a:fontRef>
         </p:style>
         <p:txBody>
-          <a:bodyPr wrap="square" lIns="54864" tIns="0" rIns="54864" bIns="0" rtlCol="0" anchor="ctr"/>
+          <a:bodyPr rtlCol="0" anchor="ctr" wrap="square" lIns="54864" rIns="54864" tIns="0" bIns="0"/>
           <a:lstStyle/>
           <a:p>
             <a:pPr algn="ctr"/>
@@ -17526,7 +17507,6 @@
           <a:lstStyle/>
           <a:p>
             <a:pPr algn="ctr"/>
-            <a:endParaRPr/>
           </a:p>
         </p:txBody>
       </p:sp>
@@ -17547,7 +17527,7 @@
           <a:noFill/>
         </p:spPr>
         <p:txBody>
-          <a:bodyPr wrap="square" lIns="0" tIns="0" rIns="0" bIns="0" anchor="t">
+          <a:bodyPr wrap="square" anchor="t" lIns="0" rIns="0" tIns="0" bIns="0">
             <a:spAutoFit/>
           </a:bodyPr>
           <a:lstStyle/>
@@ -17586,7 +17566,7 @@
           <a:noFill/>
         </p:spPr>
         <p:txBody>
-          <a:bodyPr wrap="square" lIns="0" tIns="0" rIns="0" bIns="0" anchor="t">
+          <a:bodyPr wrap="square" anchor="t" lIns="0" rIns="0" tIns="0" bIns="0">
             <a:spAutoFit/>
           </a:bodyPr>
           <a:lstStyle/>
@@ -17649,7 +17629,7 @@
           </a:fontRef>
         </p:style>
         <p:txBody>
-          <a:bodyPr wrap="square" lIns="54864" tIns="0" rIns="54864" bIns="0" rtlCol="0" anchor="ctr"/>
+          <a:bodyPr rtlCol="0" anchor="ctr" wrap="square" lIns="54864" rIns="54864" tIns="0" bIns="0"/>
           <a:lstStyle/>
           <a:p>
             <a:pPr algn="ctr"/>
@@ -17710,7 +17690,6 @@
           <a:lstStyle/>
           <a:p>
             <a:pPr algn="ctr"/>
-            <a:endParaRPr/>
           </a:p>
         </p:txBody>
       </p:sp>
@@ -17731,7 +17710,7 @@
           <a:noFill/>
         </p:spPr>
         <p:txBody>
-          <a:bodyPr wrap="square" lIns="0" tIns="0" rIns="0" bIns="0" anchor="t">
+          <a:bodyPr wrap="square" anchor="t" lIns="0" rIns="0" tIns="0" bIns="0">
             <a:spAutoFit/>
           </a:bodyPr>
           <a:lstStyle/>
@@ -17770,7 +17749,7 @@
           <a:noFill/>
         </p:spPr>
         <p:txBody>
-          <a:bodyPr wrap="square" lIns="0" tIns="0" rIns="0" bIns="0" anchor="t">
+          <a:bodyPr wrap="square" anchor="t" lIns="0" rIns="0" tIns="0" bIns="0">
             <a:spAutoFit/>
           </a:bodyPr>
           <a:lstStyle/>
@@ -17833,7 +17812,7 @@
           </a:fontRef>
         </p:style>
         <p:txBody>
-          <a:bodyPr wrap="square" lIns="54864" tIns="0" rIns="54864" bIns="0" rtlCol="0" anchor="ctr"/>
+          <a:bodyPr rtlCol="0" anchor="ctr" wrap="square" lIns="54864" rIns="54864" tIns="0" bIns="0"/>
           <a:lstStyle/>
           <a:p>
             <a:pPr algn="ctr"/>
@@ -17866,7 +17845,7 @@
           <a:noFill/>
         </p:spPr>
         <p:txBody>
-          <a:bodyPr wrap="square" lIns="0" tIns="0" rIns="0" bIns="0" anchor="t">
+          <a:bodyPr wrap="square" anchor="t" lIns="0" rIns="0" tIns="0" bIns="0">
             <a:spAutoFit/>
           </a:bodyPr>
           <a:lstStyle/>
@@ -17905,7 +17884,7 @@
           <a:noFill/>
         </p:spPr>
         <p:txBody>
-          <a:bodyPr wrap="square" lIns="0" tIns="0" rIns="0" bIns="0" anchor="t">
+          <a:bodyPr wrap="square" anchor="t" lIns="0" rIns="0" tIns="0" bIns="0">
             <a:spAutoFit/>
           </a:bodyPr>
           <a:lstStyle/>
@@ -17932,23 +17911,11 @@
   <p:clrMapOvr>
     <a:masterClrMapping/>
   </p:clrMapOvr>
-  <mc:AlternateContent xmlns:mc="http://schemas.openxmlformats.org/markup-compatibility/2006">
-    <mc:Choice xmlns:p14="http://schemas.microsoft.com/office/powerpoint/2010/main" Requires="p14">
-      <p:transition spd="med" p14:dur="700">
-        <p:fade thruBlk="1"/>
-      </p:transition>
-    </mc:Choice>
-    <mc:Fallback>
-      <p:transition spd="med">
-        <p:fade thruBlk="1"/>
-      </p:transition>
-    </mc:Fallback>
-  </mc:AlternateContent>
 </p:sld>
 </file>
 
 <file path=ppt/slides/slide21.xml><?xml version="1.0" encoding="utf-8"?>
-<p:sld xmlns:a="http://schemas.openxmlformats.org/drawingml/2006/main" xmlns:r="http://schemas.openxmlformats.org/officeDocument/2006/relationships" xmlns:p="http://schemas.openxmlformats.org/presentationml/2006/main">
+<p:sld xmlns:a="http://schemas.openxmlformats.org/drawingml/2006/main" xmlns:p="http://schemas.openxmlformats.org/presentationml/2006/main" xmlns:r="http://schemas.openxmlformats.org/officeDocument/2006/relationships">
   <p:cSld>
     <p:spTree>
       <p:nvGrpSpPr>
@@ -17956,14 +17923,7 @@
         <p:cNvGrpSpPr/>
         <p:nvPr/>
       </p:nvGrpSpPr>
-      <p:grpSpPr>
-        <a:xfrm>
-          <a:off x="0" y="0"/>
-          <a:ext cx="0" cy="0"/>
-          <a:chOff x="0" y="0"/>
-          <a:chExt cx="0" cy="0"/>
-        </a:xfrm>
-      </p:grpSpPr>
+      <p:grpSpPr/>
       <p:pic>
         <p:nvPicPr>
           <p:cNvPr id="2" name="Picture 1" descr="bg_mod.png"/>
@@ -18005,7 +17965,7 @@
           <a:noFill/>
         </p:spPr>
         <p:txBody>
-          <a:bodyPr wrap="square" lIns="0" tIns="0" rIns="0" bIns="0" anchor="t">
+          <a:bodyPr wrap="square" anchor="t" lIns="0" rIns="0" tIns="0" bIns="0">
             <a:spAutoFit/>
           </a:bodyPr>
           <a:lstStyle/>
@@ -18044,7 +18004,7 @@
           <a:noFill/>
         </p:spPr>
         <p:txBody>
-          <a:bodyPr wrap="square" lIns="0" tIns="0" rIns="0" bIns="0" anchor="t">
+          <a:bodyPr wrap="square" anchor="t" lIns="0" rIns="0" tIns="0" bIns="0">
             <a:spAutoFit/>
           </a:bodyPr>
           <a:lstStyle/>
@@ -18111,7 +18071,6 @@
           <a:lstStyle/>
           <a:p>
             <a:pPr algn="ctr"/>
-            <a:endParaRPr/>
           </a:p>
         </p:txBody>
       </p:sp>
@@ -18132,7 +18091,7 @@
           <a:noFill/>
         </p:spPr>
         <p:txBody>
-          <a:bodyPr wrap="square" lIns="0" tIns="0" rIns="0" bIns="0" anchor="t">
+          <a:bodyPr wrap="square" anchor="t" lIns="0" rIns="0" tIns="0" bIns="0">
             <a:spAutoFit/>
           </a:bodyPr>
           <a:lstStyle/>
@@ -18171,7 +18130,7 @@
           <a:noFill/>
         </p:spPr>
         <p:txBody>
-          <a:bodyPr wrap="square" lIns="0" tIns="0" rIns="0" bIns="0" anchor="t">
+          <a:bodyPr wrap="square" anchor="t" lIns="0" rIns="0" tIns="0" bIns="0">
             <a:spAutoFit/>
           </a:bodyPr>
           <a:lstStyle/>
@@ -18234,7 +18193,7 @@
           </a:fontRef>
         </p:style>
         <p:txBody>
-          <a:bodyPr wrap="square" lIns="54864" tIns="0" rIns="54864" bIns="0" rtlCol="0" anchor="ctr"/>
+          <a:bodyPr rtlCol="0" anchor="ctr" wrap="square" lIns="54864" rIns="54864" tIns="0" bIns="0"/>
           <a:lstStyle/>
           <a:p>
             <a:pPr algn="ctr"/>
@@ -18295,7 +18254,6 @@
           <a:lstStyle/>
           <a:p>
             <a:pPr algn="ctr"/>
-            <a:endParaRPr/>
           </a:p>
         </p:txBody>
       </p:sp>
@@ -18316,7 +18274,7 @@
           <a:noFill/>
         </p:spPr>
         <p:txBody>
-          <a:bodyPr wrap="square" lIns="0" tIns="0" rIns="0" bIns="0" anchor="t">
+          <a:bodyPr wrap="square" anchor="t" lIns="0" rIns="0" tIns="0" bIns="0">
             <a:spAutoFit/>
           </a:bodyPr>
           <a:lstStyle/>
@@ -18355,7 +18313,7 @@
           <a:noFill/>
         </p:spPr>
         <p:txBody>
-          <a:bodyPr wrap="square" lIns="0" tIns="0" rIns="0" bIns="0" anchor="t">
+          <a:bodyPr wrap="square" anchor="t" lIns="0" rIns="0" tIns="0" bIns="0">
             <a:spAutoFit/>
           </a:bodyPr>
           <a:lstStyle/>
@@ -18418,7 +18376,7 @@
           </a:fontRef>
         </p:style>
         <p:txBody>
-          <a:bodyPr wrap="square" lIns="54864" tIns="0" rIns="54864" bIns="0" rtlCol="0" anchor="ctr"/>
+          <a:bodyPr rtlCol="0" anchor="ctr" wrap="square" lIns="54864" rIns="54864" tIns="0" bIns="0"/>
           <a:lstStyle/>
           <a:p>
             <a:pPr algn="ctr"/>
@@ -18479,7 +18437,6 @@
           <a:lstStyle/>
           <a:p>
             <a:pPr algn="ctr"/>
-            <a:endParaRPr/>
           </a:p>
         </p:txBody>
       </p:sp>
@@ -18500,7 +18457,7 @@
           <a:noFill/>
         </p:spPr>
         <p:txBody>
-          <a:bodyPr wrap="square" lIns="0" tIns="0" rIns="0" bIns="0" anchor="t">
+          <a:bodyPr wrap="square" anchor="t" lIns="0" rIns="0" tIns="0" bIns="0">
             <a:spAutoFit/>
           </a:bodyPr>
           <a:lstStyle/>
@@ -18539,7 +18496,7 @@
           <a:noFill/>
         </p:spPr>
         <p:txBody>
-          <a:bodyPr wrap="square" lIns="0" tIns="0" rIns="0" bIns="0" anchor="t">
+          <a:bodyPr wrap="square" anchor="t" lIns="0" rIns="0" tIns="0" bIns="0">
             <a:spAutoFit/>
           </a:bodyPr>
           <a:lstStyle/>
@@ -18602,7 +18559,7 @@
           </a:fontRef>
         </p:style>
         <p:txBody>
-          <a:bodyPr wrap="square" lIns="54864" tIns="0" rIns="54864" bIns="0" rtlCol="0" anchor="ctr"/>
+          <a:bodyPr rtlCol="0" anchor="ctr" wrap="square" lIns="54864" rIns="54864" tIns="0" bIns="0"/>
           <a:lstStyle/>
           <a:p>
             <a:pPr algn="ctr"/>
@@ -18663,7 +18620,6 @@
           <a:lstStyle/>
           <a:p>
             <a:pPr algn="ctr"/>
-            <a:endParaRPr/>
           </a:p>
         </p:txBody>
       </p:sp>
@@ -18684,7 +18640,7 @@
           <a:noFill/>
         </p:spPr>
         <p:txBody>
-          <a:bodyPr wrap="square" lIns="0" tIns="0" rIns="0" bIns="0" anchor="t">
+          <a:bodyPr wrap="square" anchor="t" lIns="0" rIns="0" tIns="0" bIns="0">
             <a:spAutoFit/>
           </a:bodyPr>
           <a:lstStyle/>
@@ -18723,7 +18679,7 @@
           <a:noFill/>
         </p:spPr>
         <p:txBody>
-          <a:bodyPr wrap="square" lIns="0" tIns="0" rIns="0" bIns="0" anchor="t">
+          <a:bodyPr wrap="square" anchor="t" lIns="0" rIns="0" tIns="0" bIns="0">
             <a:spAutoFit/>
           </a:bodyPr>
           <a:lstStyle/>
@@ -18786,7 +18742,7 @@
           </a:fontRef>
         </p:style>
         <p:txBody>
-          <a:bodyPr wrap="square" lIns="54864" tIns="0" rIns="54864" bIns="0" rtlCol="0" anchor="ctr"/>
+          <a:bodyPr rtlCol="0" anchor="ctr" wrap="square" lIns="54864" rIns="54864" tIns="0" bIns="0"/>
           <a:lstStyle/>
           <a:p>
             <a:pPr algn="ctr"/>
@@ -18847,7 +18803,6 @@
           <a:lstStyle/>
           <a:p>
             <a:pPr algn="ctr"/>
-            <a:endParaRPr/>
           </a:p>
         </p:txBody>
       </p:sp>
@@ -18868,7 +18823,7 @@
           <a:noFill/>
         </p:spPr>
         <p:txBody>
-          <a:bodyPr wrap="square" lIns="0" tIns="0" rIns="0" bIns="0" anchor="t">
+          <a:bodyPr wrap="square" anchor="t" lIns="0" rIns="0" tIns="0" bIns="0">
             <a:spAutoFit/>
           </a:bodyPr>
           <a:lstStyle/>
@@ -18907,7 +18862,7 @@
           <a:noFill/>
         </p:spPr>
         <p:txBody>
-          <a:bodyPr wrap="square" lIns="0" tIns="0" rIns="0" bIns="0" anchor="t">
+          <a:bodyPr wrap="square" anchor="t" lIns="0" rIns="0" tIns="0" bIns="0">
             <a:spAutoFit/>
           </a:bodyPr>
           <a:lstStyle/>
@@ -18970,7 +18925,7 @@
           </a:fontRef>
         </p:style>
         <p:txBody>
-          <a:bodyPr wrap="square" lIns="54864" tIns="0" rIns="54864" bIns="0" rtlCol="0" anchor="ctr"/>
+          <a:bodyPr rtlCol="0" anchor="ctr" wrap="square" lIns="54864" rIns="54864" tIns="0" bIns="0"/>
           <a:lstStyle/>
           <a:p>
             <a:pPr algn="ctr"/>
@@ -19031,7 +18986,6 @@
           <a:lstStyle/>
           <a:p>
             <a:pPr algn="ctr"/>
-            <a:endParaRPr/>
           </a:p>
         </p:txBody>
       </p:sp>
@@ -19052,7 +19006,7 @@
           <a:noFill/>
         </p:spPr>
         <p:txBody>
-          <a:bodyPr wrap="square" lIns="0" tIns="0" rIns="0" bIns="0" anchor="t">
+          <a:bodyPr wrap="square" anchor="t" lIns="0" rIns="0" tIns="0" bIns="0">
             <a:spAutoFit/>
           </a:bodyPr>
           <a:lstStyle/>
@@ -19091,7 +19045,7 @@
           <a:noFill/>
         </p:spPr>
         <p:txBody>
-          <a:bodyPr wrap="square" lIns="0" tIns="0" rIns="0" bIns="0" anchor="t">
+          <a:bodyPr wrap="square" anchor="t" lIns="0" rIns="0" tIns="0" bIns="0">
             <a:spAutoFit/>
           </a:bodyPr>
           <a:lstStyle/>
@@ -19154,7 +19108,7 @@
           </a:fontRef>
         </p:style>
         <p:txBody>
-          <a:bodyPr wrap="square" lIns="54864" tIns="0" rIns="54864" bIns="0" rtlCol="0" anchor="ctr"/>
+          <a:bodyPr rtlCol="0" anchor="ctr" wrap="square" lIns="54864" rIns="54864" tIns="0" bIns="0"/>
           <a:lstStyle/>
           <a:p>
             <a:pPr algn="ctr"/>
@@ -19187,7 +19141,7 @@
           <a:noFill/>
         </p:spPr>
         <p:txBody>
-          <a:bodyPr wrap="square" lIns="0" tIns="0" rIns="0" bIns="0" anchor="t">
+          <a:bodyPr wrap="square" anchor="t" lIns="0" rIns="0" tIns="0" bIns="0">
             <a:spAutoFit/>
           </a:bodyPr>
           <a:lstStyle/>
@@ -19226,7 +19180,7 @@
           <a:noFill/>
         </p:spPr>
         <p:txBody>
-          <a:bodyPr wrap="square" lIns="0" tIns="0" rIns="0" bIns="0" anchor="t">
+          <a:bodyPr wrap="square" anchor="t" lIns="0" rIns="0" tIns="0" bIns="0">
             <a:spAutoFit/>
           </a:bodyPr>
           <a:lstStyle/>
@@ -19253,23 +19207,11 @@
   <p:clrMapOvr>
     <a:masterClrMapping/>
   </p:clrMapOvr>
-  <mc:AlternateContent xmlns:mc="http://schemas.openxmlformats.org/markup-compatibility/2006">
-    <mc:Choice xmlns:p14="http://schemas.microsoft.com/office/powerpoint/2010/main" Requires="p14">
-      <p:transition spd="med" p14:dur="700">
-        <p:fade thruBlk="1"/>
-      </p:transition>
-    </mc:Choice>
-    <mc:Fallback>
-      <p:transition spd="med">
-        <p:fade thruBlk="1"/>
-      </p:transition>
-    </mc:Fallback>
-  </mc:AlternateContent>
 </p:sld>
 </file>
 
 <file path=ppt/slides/slide22.xml><?xml version="1.0" encoding="utf-8"?>
-<p:sld xmlns:a="http://schemas.openxmlformats.org/drawingml/2006/main" xmlns:r="http://schemas.openxmlformats.org/officeDocument/2006/relationships" xmlns:p="http://schemas.openxmlformats.org/presentationml/2006/main">
+<p:sld xmlns:a="http://schemas.openxmlformats.org/drawingml/2006/main" xmlns:p="http://schemas.openxmlformats.org/presentationml/2006/main" xmlns:r="http://schemas.openxmlformats.org/officeDocument/2006/relationships">
   <p:cSld>
     <p:spTree>
       <p:nvGrpSpPr>
@@ -19277,14 +19219,7 @@
         <p:cNvGrpSpPr/>
         <p:nvPr/>
       </p:nvGrpSpPr>
-      <p:grpSpPr>
-        <a:xfrm>
-          <a:off x="0" y="0"/>
-          <a:ext cx="0" cy="0"/>
-          <a:chOff x="0" y="0"/>
-          <a:chExt cx="0" cy="0"/>
-        </a:xfrm>
-      </p:grpSpPr>
+      <p:grpSpPr/>
       <p:pic>
         <p:nvPicPr>
           <p:cNvPr id="2" name="Picture 1" descr="bg_mod.png"/>
@@ -19326,7 +19261,7 @@
           <a:noFill/>
         </p:spPr>
         <p:txBody>
-          <a:bodyPr wrap="square" lIns="0" tIns="0" rIns="0" bIns="0" anchor="t">
+          <a:bodyPr wrap="square" anchor="t" lIns="0" rIns="0" tIns="0" bIns="0">
             <a:spAutoFit/>
           </a:bodyPr>
           <a:lstStyle/>
@@ -19365,7 +19300,7 @@
           <a:noFill/>
         </p:spPr>
         <p:txBody>
-          <a:bodyPr wrap="square" lIns="0" tIns="0" rIns="0" bIns="0" anchor="t">
+          <a:bodyPr wrap="square" anchor="t" lIns="0" rIns="0" tIns="0" bIns="0">
             <a:spAutoFit/>
           </a:bodyPr>
           <a:lstStyle/>
@@ -19404,7 +19339,7 @@
           <a:noFill/>
         </p:spPr>
         <p:txBody>
-          <a:bodyPr wrap="square" lIns="0" tIns="0" rIns="0" bIns="0" anchor="t">
+          <a:bodyPr wrap="square" anchor="t" lIns="0" rIns="0" tIns="0" bIns="0">
             <a:spAutoFit/>
           </a:bodyPr>
           <a:lstStyle/>
@@ -19471,7 +19406,6 @@
           <a:lstStyle/>
           <a:p>
             <a:pPr algn="ctr"/>
-            <a:endParaRPr/>
           </a:p>
         </p:txBody>
       </p:sp>
@@ -19492,7 +19426,7 @@
           <a:noFill/>
         </p:spPr>
         <p:txBody>
-          <a:bodyPr wrap="square" lIns="0" tIns="0" rIns="0" bIns="0" anchor="t">
+          <a:bodyPr wrap="square" anchor="t" lIns="0" rIns="0" tIns="0" bIns="0">
             <a:spAutoFit/>
           </a:bodyPr>
           <a:lstStyle/>
@@ -19531,7 +19465,7 @@
           <a:noFill/>
         </p:spPr>
         <p:txBody>
-          <a:bodyPr wrap="square" lIns="0" tIns="0" rIns="0" bIns="0" anchor="t">
+          <a:bodyPr wrap="square" anchor="t" lIns="0" rIns="0" tIns="0" bIns="0">
             <a:spAutoFit/>
           </a:bodyPr>
           <a:lstStyle/>
@@ -19594,7 +19528,7 @@
           </a:fontRef>
         </p:style>
         <p:txBody>
-          <a:bodyPr wrap="square" lIns="54864" tIns="0" rIns="54864" bIns="0" rtlCol="0" anchor="ctr"/>
+          <a:bodyPr rtlCol="0" anchor="ctr" wrap="square" lIns="54864" rIns="54864" tIns="0" bIns="0"/>
           <a:lstStyle/>
           <a:p>
             <a:pPr algn="ctr"/>
@@ -19655,7 +19589,6 @@
           <a:lstStyle/>
           <a:p>
             <a:pPr algn="ctr"/>
-            <a:endParaRPr/>
           </a:p>
         </p:txBody>
       </p:sp>
@@ -19676,7 +19609,7 @@
           <a:noFill/>
         </p:spPr>
         <p:txBody>
-          <a:bodyPr wrap="square" lIns="0" tIns="0" rIns="0" bIns="0" anchor="t">
+          <a:bodyPr wrap="square" anchor="t" lIns="0" rIns="0" tIns="0" bIns="0">
             <a:spAutoFit/>
           </a:bodyPr>
           <a:lstStyle/>
@@ -19715,7 +19648,7 @@
           <a:noFill/>
         </p:spPr>
         <p:txBody>
-          <a:bodyPr wrap="square" lIns="0" tIns="0" rIns="0" bIns="0" anchor="t">
+          <a:bodyPr wrap="square" anchor="t" lIns="0" rIns="0" tIns="0" bIns="0">
             <a:spAutoFit/>
           </a:bodyPr>
           <a:lstStyle/>
@@ -19778,7 +19711,7 @@
           </a:fontRef>
         </p:style>
         <p:txBody>
-          <a:bodyPr wrap="square" lIns="54864" tIns="0" rIns="54864" bIns="0" rtlCol="0" anchor="ctr"/>
+          <a:bodyPr rtlCol="0" anchor="ctr" wrap="square" lIns="54864" rIns="54864" tIns="0" bIns="0"/>
           <a:lstStyle/>
           <a:p>
             <a:pPr algn="ctr"/>
@@ -19839,7 +19772,6 @@
           <a:lstStyle/>
           <a:p>
             <a:pPr algn="ctr"/>
-            <a:endParaRPr/>
           </a:p>
         </p:txBody>
       </p:sp>
@@ -19860,7 +19792,7 @@
           <a:noFill/>
         </p:spPr>
         <p:txBody>
-          <a:bodyPr wrap="square" lIns="0" tIns="0" rIns="0" bIns="0" anchor="t">
+          <a:bodyPr wrap="square" anchor="t" lIns="0" rIns="0" tIns="0" bIns="0">
             <a:spAutoFit/>
           </a:bodyPr>
           <a:lstStyle/>
@@ -19899,7 +19831,7 @@
           <a:noFill/>
         </p:spPr>
         <p:txBody>
-          <a:bodyPr wrap="square" lIns="0" tIns="0" rIns="0" bIns="0" anchor="t">
+          <a:bodyPr wrap="square" anchor="t" lIns="0" rIns="0" tIns="0" bIns="0">
             <a:spAutoFit/>
           </a:bodyPr>
           <a:lstStyle/>
@@ -19962,7 +19894,7 @@
           </a:fontRef>
         </p:style>
         <p:txBody>
-          <a:bodyPr wrap="square" lIns="54864" tIns="0" rIns="54864" bIns="0" rtlCol="0" anchor="ctr"/>
+          <a:bodyPr rtlCol="0" anchor="ctr" wrap="square" lIns="54864" rIns="54864" tIns="0" bIns="0"/>
           <a:lstStyle/>
           <a:p>
             <a:pPr algn="ctr"/>
@@ -20023,7 +19955,6 @@
           <a:lstStyle/>
           <a:p>
             <a:pPr algn="ctr"/>
-            <a:endParaRPr/>
           </a:p>
         </p:txBody>
       </p:sp>
@@ -20044,7 +19975,7 @@
           <a:noFill/>
         </p:spPr>
         <p:txBody>
-          <a:bodyPr wrap="square" lIns="0" tIns="0" rIns="0" bIns="0" anchor="t">
+          <a:bodyPr wrap="square" anchor="t" lIns="0" rIns="0" tIns="0" bIns="0">
             <a:spAutoFit/>
           </a:bodyPr>
           <a:lstStyle/>
@@ -20083,7 +20014,7 @@
           <a:noFill/>
         </p:spPr>
         <p:txBody>
-          <a:bodyPr wrap="square" lIns="0" tIns="0" rIns="0" bIns="0" anchor="t">
+          <a:bodyPr wrap="square" anchor="t" lIns="0" rIns="0" tIns="0" bIns="0">
             <a:spAutoFit/>
           </a:bodyPr>
           <a:lstStyle/>
@@ -20146,7 +20077,7 @@
           </a:fontRef>
         </p:style>
         <p:txBody>
-          <a:bodyPr wrap="square" lIns="54864" tIns="0" rIns="54864" bIns="0" rtlCol="0" anchor="ctr"/>
+          <a:bodyPr rtlCol="0" anchor="ctr" wrap="square" lIns="54864" rIns="54864" tIns="0" bIns="0"/>
           <a:lstStyle/>
           <a:p>
             <a:pPr algn="ctr"/>
@@ -20207,7 +20138,6 @@
           <a:lstStyle/>
           <a:p>
             <a:pPr algn="ctr"/>
-            <a:endParaRPr/>
           </a:p>
         </p:txBody>
       </p:sp>
@@ -20228,7 +20158,7 @@
           <a:noFill/>
         </p:spPr>
         <p:txBody>
-          <a:bodyPr wrap="square" lIns="0" tIns="0" rIns="0" bIns="0" anchor="t">
+          <a:bodyPr wrap="square" anchor="t" lIns="0" rIns="0" tIns="0" bIns="0">
             <a:spAutoFit/>
           </a:bodyPr>
           <a:lstStyle/>
@@ -20267,7 +20197,7 @@
           <a:noFill/>
         </p:spPr>
         <p:txBody>
-          <a:bodyPr wrap="square" lIns="0" tIns="0" rIns="0" bIns="0" anchor="t">
+          <a:bodyPr wrap="square" anchor="t" lIns="0" rIns="0" tIns="0" bIns="0">
             <a:spAutoFit/>
           </a:bodyPr>
           <a:lstStyle/>
@@ -20330,7 +20260,7 @@
           </a:fontRef>
         </p:style>
         <p:txBody>
-          <a:bodyPr wrap="square" lIns="54864" tIns="0" rIns="54864" bIns="0" rtlCol="0" anchor="ctr"/>
+          <a:bodyPr rtlCol="0" anchor="ctr" wrap="square" lIns="54864" rIns="54864" tIns="0" bIns="0"/>
           <a:lstStyle/>
           <a:p>
             <a:pPr algn="ctr"/>
@@ -20391,7 +20321,6 @@
           <a:lstStyle/>
           <a:p>
             <a:pPr algn="ctr"/>
-            <a:endParaRPr/>
           </a:p>
         </p:txBody>
       </p:sp>
@@ -20412,7 +20341,7 @@
           <a:noFill/>
         </p:spPr>
         <p:txBody>
-          <a:bodyPr wrap="square" lIns="0" tIns="0" rIns="0" bIns="0" anchor="t">
+          <a:bodyPr wrap="square" anchor="t" lIns="0" rIns="0" tIns="0" bIns="0">
             <a:spAutoFit/>
           </a:bodyPr>
           <a:lstStyle/>
@@ -20451,7 +20380,7 @@
           <a:noFill/>
         </p:spPr>
         <p:txBody>
-          <a:bodyPr wrap="square" lIns="0" tIns="0" rIns="0" bIns="0" anchor="t">
+          <a:bodyPr wrap="square" anchor="t" lIns="0" rIns="0" tIns="0" bIns="0">
             <a:spAutoFit/>
           </a:bodyPr>
           <a:lstStyle/>
@@ -20514,7 +20443,7 @@
           </a:fontRef>
         </p:style>
         <p:txBody>
-          <a:bodyPr wrap="square" lIns="54864" tIns="0" rIns="54864" bIns="0" rtlCol="0" anchor="ctr"/>
+          <a:bodyPr rtlCol="0" anchor="ctr" wrap="square" lIns="54864" rIns="54864" tIns="0" bIns="0"/>
           <a:lstStyle/>
           <a:p>
             <a:pPr algn="ctr"/>
@@ -20575,7 +20504,6 @@
           <a:lstStyle/>
           <a:p>
             <a:pPr algn="ctr"/>
-            <a:endParaRPr/>
           </a:p>
         </p:txBody>
       </p:sp>
@@ -20596,7 +20524,7 @@
           <a:noFill/>
         </p:spPr>
         <p:txBody>
-          <a:bodyPr wrap="square" lIns="0" tIns="0" rIns="0" bIns="0" anchor="t">
+          <a:bodyPr wrap="square" anchor="t" lIns="0" rIns="0" tIns="0" bIns="0">
             <a:spAutoFit/>
           </a:bodyPr>
           <a:lstStyle/>
@@ -20635,7 +20563,7 @@
           <a:noFill/>
         </p:spPr>
         <p:txBody>
-          <a:bodyPr wrap="square" lIns="0" tIns="0" rIns="0" bIns="0" anchor="t">
+          <a:bodyPr wrap="square" anchor="t" lIns="0" rIns="0" tIns="0" bIns="0">
             <a:spAutoFit/>
           </a:bodyPr>
           <a:lstStyle/>
@@ -20698,7 +20626,7 @@
           </a:fontRef>
         </p:style>
         <p:txBody>
-          <a:bodyPr wrap="square" lIns="54864" tIns="0" rIns="54864" bIns="0" rtlCol="0" anchor="ctr"/>
+          <a:bodyPr rtlCol="0" anchor="ctr" wrap="square" lIns="54864" rIns="54864" tIns="0" bIns="0"/>
           <a:lstStyle/>
           <a:p>
             <a:pPr algn="ctr"/>
@@ -20759,7 +20687,6 @@
           <a:lstStyle/>
           <a:p>
             <a:pPr algn="ctr"/>
-            <a:endParaRPr/>
           </a:p>
         </p:txBody>
       </p:sp>
@@ -20780,7 +20707,7 @@
           <a:noFill/>
         </p:spPr>
         <p:txBody>
-          <a:bodyPr wrap="square" lIns="0" tIns="0" rIns="0" bIns="0" anchor="t">
+          <a:bodyPr wrap="square" anchor="t" lIns="0" rIns="0" tIns="0" bIns="0">
             <a:spAutoFit/>
           </a:bodyPr>
           <a:lstStyle/>
@@ -20819,7 +20746,7 @@
           <a:noFill/>
         </p:spPr>
         <p:txBody>
-          <a:bodyPr wrap="square" lIns="0" tIns="0" rIns="0" bIns="0" anchor="t">
+          <a:bodyPr wrap="square" anchor="t" lIns="0" rIns="0" tIns="0" bIns="0">
             <a:spAutoFit/>
           </a:bodyPr>
           <a:lstStyle/>
@@ -20882,7 +20809,7 @@
           </a:fontRef>
         </p:style>
         <p:txBody>
-          <a:bodyPr wrap="square" lIns="54864" tIns="0" rIns="54864" bIns="0" rtlCol="0" anchor="ctr"/>
+          <a:bodyPr rtlCol="0" anchor="ctr" wrap="square" lIns="54864" rIns="54864" tIns="0" bIns="0"/>
           <a:lstStyle/>
           <a:p>
             <a:pPr algn="ctr"/>
@@ -20943,7 +20870,6 @@
           <a:lstStyle/>
           <a:p>
             <a:pPr algn="ctr"/>
-            <a:endParaRPr/>
           </a:p>
         </p:txBody>
       </p:sp>
@@ -20964,7 +20890,7 @@
           <a:noFill/>
         </p:spPr>
         <p:txBody>
-          <a:bodyPr wrap="square" lIns="0" tIns="0" rIns="0" bIns="0" anchor="t">
+          <a:bodyPr wrap="square" anchor="t" lIns="0" rIns="0" tIns="0" bIns="0">
             <a:spAutoFit/>
           </a:bodyPr>
           <a:lstStyle/>
@@ -21019,7 +20945,7 @@
           <a:noFill/>
         </p:spPr>
         <p:txBody>
-          <a:bodyPr wrap="square" lIns="0" tIns="0" rIns="0" bIns="0" anchor="t">
+          <a:bodyPr wrap="square" anchor="t" lIns="0" rIns="0" tIns="0" bIns="0">
             <a:spAutoFit/>
           </a:bodyPr>
           <a:lstStyle/>
@@ -21058,7 +20984,7 @@
           <a:noFill/>
         </p:spPr>
         <p:txBody>
-          <a:bodyPr wrap="square" lIns="0" tIns="0" rIns="0" bIns="0" anchor="t">
+          <a:bodyPr wrap="square" anchor="t" lIns="0" rIns="0" tIns="0" bIns="0">
             <a:spAutoFit/>
           </a:bodyPr>
           <a:lstStyle/>
@@ -21085,23 +21011,11 @@
   <p:clrMapOvr>
     <a:masterClrMapping/>
   </p:clrMapOvr>
-  <mc:AlternateContent xmlns:mc="http://schemas.openxmlformats.org/markup-compatibility/2006">
-    <mc:Choice xmlns:p14="http://schemas.microsoft.com/office/powerpoint/2010/main" Requires="p14">
-      <p:transition spd="med" p14:dur="700">
-        <p:fade thruBlk="1"/>
-      </p:transition>
-    </mc:Choice>
-    <mc:Fallback>
-      <p:transition spd="med">
-        <p:fade thruBlk="1"/>
-      </p:transition>
-    </mc:Fallback>
-  </mc:AlternateContent>
 </p:sld>
 </file>
 
 <file path=ppt/slides/slide23.xml><?xml version="1.0" encoding="utf-8"?>
-<p:sld xmlns:a="http://schemas.openxmlformats.org/drawingml/2006/main" xmlns:r="http://schemas.openxmlformats.org/officeDocument/2006/relationships" xmlns:p="http://schemas.openxmlformats.org/presentationml/2006/main">
+<p:sld xmlns:a="http://schemas.openxmlformats.org/drawingml/2006/main" xmlns:p="http://schemas.openxmlformats.org/presentationml/2006/main" xmlns:r="http://schemas.openxmlformats.org/officeDocument/2006/relationships">
   <p:cSld>
     <p:spTree>
       <p:nvGrpSpPr>
@@ -21109,14 +21023,7 @@
         <p:cNvGrpSpPr/>
         <p:nvPr/>
       </p:nvGrpSpPr>
-      <p:grpSpPr>
-        <a:xfrm>
-          <a:off x="0" y="0"/>
-          <a:ext cx="0" cy="0"/>
-          <a:chOff x="0" y="0"/>
-          <a:chExt cx="0" cy="0"/>
-        </a:xfrm>
-      </p:grpSpPr>
+      <p:grpSpPr/>
       <p:pic>
         <p:nvPicPr>
           <p:cNvPr id="2" name="Picture 1" descr="bg_mod.png"/>
@@ -21158,7 +21065,7 @@
           <a:noFill/>
         </p:spPr>
         <p:txBody>
-          <a:bodyPr wrap="square" lIns="0" tIns="0" rIns="0" bIns="0" anchor="t">
+          <a:bodyPr wrap="square" anchor="t" lIns="0" rIns="0" tIns="0" bIns="0">
             <a:spAutoFit/>
           </a:bodyPr>
           <a:lstStyle/>
@@ -21197,7 +21104,7 @@
           <a:noFill/>
         </p:spPr>
         <p:txBody>
-          <a:bodyPr wrap="square" lIns="0" tIns="0" rIns="0" bIns="0" anchor="t">
+          <a:bodyPr wrap="square" anchor="t" lIns="0" rIns="0" tIns="0" bIns="0">
             <a:spAutoFit/>
           </a:bodyPr>
           <a:lstStyle/>
@@ -21264,7 +21171,6 @@
           <a:lstStyle/>
           <a:p>
             <a:pPr algn="ctr"/>
-            <a:endParaRPr/>
           </a:p>
         </p:txBody>
       </p:sp>
@@ -21285,7 +21191,7 @@
           <a:noFill/>
         </p:spPr>
         <p:txBody>
-          <a:bodyPr wrap="square" lIns="0" tIns="0" rIns="0" bIns="0" anchor="t">
+          <a:bodyPr wrap="square" anchor="t" lIns="0" rIns="0" tIns="0" bIns="0">
             <a:spAutoFit/>
           </a:bodyPr>
           <a:lstStyle/>
@@ -21324,7 +21230,7 @@
           <a:noFill/>
         </p:spPr>
         <p:txBody>
-          <a:bodyPr wrap="square" lIns="0" tIns="0" rIns="0" bIns="0" anchor="t">
+          <a:bodyPr wrap="square" anchor="t" lIns="0" rIns="0" tIns="0" bIns="0">
             <a:spAutoFit/>
           </a:bodyPr>
           <a:lstStyle/>
@@ -21363,7 +21269,7 @@
           <a:noFill/>
         </p:spPr>
         <p:txBody>
-          <a:bodyPr wrap="square" lIns="0" tIns="0" rIns="0" bIns="0" anchor="t">
+          <a:bodyPr wrap="square" anchor="t" lIns="0" rIns="0" tIns="0" bIns="0">
             <a:spAutoFit/>
           </a:bodyPr>
           <a:lstStyle/>
@@ -21402,7 +21308,7 @@
           <a:noFill/>
         </p:spPr>
         <p:txBody>
-          <a:bodyPr wrap="square" lIns="0" tIns="0" rIns="0" bIns="0" anchor="t">
+          <a:bodyPr wrap="square" anchor="t" lIns="0" rIns="0" tIns="0" bIns="0">
             <a:spAutoFit/>
           </a:bodyPr>
           <a:lstStyle/>
@@ -21441,7 +21347,7 @@
           <a:noFill/>
         </p:spPr>
         <p:txBody>
-          <a:bodyPr wrap="square" lIns="0" tIns="0" rIns="0" bIns="0" anchor="t">
+          <a:bodyPr wrap="square" anchor="t" lIns="0" rIns="0" tIns="0" bIns="0">
             <a:spAutoFit/>
           </a:bodyPr>
           <a:lstStyle/>
@@ -21480,7 +21386,7 @@
           <a:noFill/>
         </p:spPr>
         <p:txBody>
-          <a:bodyPr wrap="square" lIns="0" tIns="0" rIns="0" bIns="0" anchor="t">
+          <a:bodyPr wrap="square" anchor="t" lIns="0" rIns="0" tIns="0" bIns="0">
             <a:spAutoFit/>
           </a:bodyPr>
           <a:lstStyle/>
@@ -21547,7 +21453,6 @@
           <a:lstStyle/>
           <a:p>
             <a:pPr algn="ctr"/>
-            <a:endParaRPr/>
           </a:p>
         </p:txBody>
       </p:sp>
@@ -21568,7 +21473,7 @@
           <a:noFill/>
         </p:spPr>
         <p:txBody>
-          <a:bodyPr wrap="square" lIns="0" tIns="0" rIns="0" bIns="0" anchor="t">
+          <a:bodyPr wrap="square" anchor="t" lIns="0" rIns="0" tIns="0" bIns="0">
             <a:spAutoFit/>
           </a:bodyPr>
           <a:lstStyle/>
@@ -21607,7 +21512,7 @@
           <a:noFill/>
         </p:spPr>
         <p:txBody>
-          <a:bodyPr wrap="square" lIns="0" tIns="0" rIns="0" bIns="0" anchor="t">
+          <a:bodyPr wrap="square" anchor="t" lIns="0" rIns="0" tIns="0" bIns="0">
             <a:spAutoFit/>
           </a:bodyPr>
           <a:lstStyle/>
@@ -21646,7 +21551,7 @@
           <a:noFill/>
         </p:spPr>
         <p:txBody>
-          <a:bodyPr wrap="square" lIns="0" tIns="0" rIns="0" bIns="0" anchor="t">
+          <a:bodyPr wrap="square" anchor="t" lIns="0" rIns="0" tIns="0" bIns="0">
             <a:spAutoFit/>
           </a:bodyPr>
           <a:lstStyle/>
@@ -21685,7 +21590,7 @@
           <a:noFill/>
         </p:spPr>
         <p:txBody>
-          <a:bodyPr wrap="square" lIns="0" tIns="0" rIns="0" bIns="0" anchor="t">
+          <a:bodyPr wrap="square" anchor="t" lIns="0" rIns="0" tIns="0" bIns="0">
             <a:spAutoFit/>
           </a:bodyPr>
           <a:lstStyle/>
@@ -21724,7 +21629,7 @@
           <a:noFill/>
         </p:spPr>
         <p:txBody>
-          <a:bodyPr wrap="square" lIns="0" tIns="0" rIns="0" bIns="0" anchor="t">
+          <a:bodyPr wrap="square" anchor="t" lIns="0" rIns="0" tIns="0" bIns="0">
             <a:spAutoFit/>
           </a:bodyPr>
           <a:lstStyle/>
@@ -21763,7 +21668,7 @@
           <a:noFill/>
         </p:spPr>
         <p:txBody>
-          <a:bodyPr wrap="square" lIns="0" tIns="0" rIns="0" bIns="0" anchor="t">
+          <a:bodyPr wrap="square" anchor="t" lIns="0" rIns="0" tIns="0" bIns="0">
             <a:spAutoFit/>
           </a:bodyPr>
           <a:lstStyle/>
@@ -21802,7 +21707,7 @@
           <a:noFill/>
         </p:spPr>
         <p:txBody>
-          <a:bodyPr wrap="square" lIns="0" tIns="0" rIns="0" bIns="0" anchor="t">
+          <a:bodyPr wrap="square" anchor="t" lIns="0" rIns="0" tIns="0" bIns="0">
             <a:spAutoFit/>
           </a:bodyPr>
           <a:lstStyle/>
@@ -21841,7 +21746,7 @@
           <a:noFill/>
         </p:spPr>
         <p:txBody>
-          <a:bodyPr wrap="square" lIns="0" tIns="0" rIns="0" bIns="0" anchor="t">
+          <a:bodyPr wrap="square" anchor="t" lIns="0" rIns="0" tIns="0" bIns="0">
             <a:spAutoFit/>
           </a:bodyPr>
           <a:lstStyle/>
@@ -21880,7 +21785,7 @@
           <a:noFill/>
         </p:spPr>
         <p:txBody>
-          <a:bodyPr wrap="square" lIns="0" tIns="0" rIns="0" bIns="0" anchor="t">
+          <a:bodyPr wrap="square" anchor="t" lIns="0" rIns="0" tIns="0" bIns="0">
             <a:spAutoFit/>
           </a:bodyPr>
           <a:lstStyle/>
@@ -21919,7 +21824,7 @@
           <a:noFill/>
         </p:spPr>
         <p:txBody>
-          <a:bodyPr wrap="square" lIns="0" tIns="0" rIns="0" bIns="0" anchor="t">
+          <a:bodyPr wrap="square" anchor="t" lIns="0" rIns="0" tIns="0" bIns="0">
             <a:spAutoFit/>
           </a:bodyPr>
           <a:lstStyle/>
@@ -21946,23 +21851,11 @@
   <p:clrMapOvr>
     <a:masterClrMapping/>
   </p:clrMapOvr>
-  <mc:AlternateContent xmlns:mc="http://schemas.openxmlformats.org/markup-compatibility/2006">
-    <mc:Choice xmlns:p14="http://schemas.microsoft.com/office/powerpoint/2010/main" Requires="p14">
-      <p:transition spd="med" p14:dur="700">
-        <p:fade thruBlk="1"/>
-      </p:transition>
-    </mc:Choice>
-    <mc:Fallback>
-      <p:transition spd="med">
-        <p:fade thruBlk="1"/>
-      </p:transition>
-    </mc:Fallback>
-  </mc:AlternateContent>
 </p:sld>
 </file>
 
 <file path=ppt/slides/slide24.xml><?xml version="1.0" encoding="utf-8"?>
-<p:sld xmlns:a="http://schemas.openxmlformats.org/drawingml/2006/main" xmlns:r="http://schemas.openxmlformats.org/officeDocument/2006/relationships" xmlns:p="http://schemas.openxmlformats.org/presentationml/2006/main">
+<p:sld xmlns:a="http://schemas.openxmlformats.org/drawingml/2006/main" xmlns:p="http://schemas.openxmlformats.org/presentationml/2006/main" xmlns:r="http://schemas.openxmlformats.org/officeDocument/2006/relationships">
   <p:cSld>
     <p:spTree>
       <p:nvGrpSpPr>
@@ -21970,14 +21863,7 @@
         <p:cNvGrpSpPr/>
         <p:nvPr/>
       </p:nvGrpSpPr>
-      <p:grpSpPr>
-        <a:xfrm>
-          <a:off x="0" y="0"/>
-          <a:ext cx="0" cy="0"/>
-          <a:chOff x="0" y="0"/>
-          <a:chExt cx="0" cy="0"/>
-        </a:xfrm>
-      </p:grpSpPr>
+      <p:grpSpPr/>
       <p:pic>
         <p:nvPicPr>
           <p:cNvPr id="2" name="Picture 1" descr="bg_deep.png"/>
@@ -22019,7 +21905,7 @@
           <a:noFill/>
         </p:spPr>
         <p:txBody>
-          <a:bodyPr wrap="square" lIns="0" tIns="0" rIns="0" bIns="0" anchor="t">
+          <a:bodyPr wrap="square" anchor="t" lIns="0" rIns="0" tIns="0" bIns="0">
             <a:spAutoFit/>
           </a:bodyPr>
           <a:lstStyle/>
@@ -22058,7 +21944,7 @@
           <a:noFill/>
         </p:spPr>
         <p:txBody>
-          <a:bodyPr wrap="square" lIns="0" tIns="0" rIns="0" bIns="0" anchor="t">
+          <a:bodyPr wrap="square" anchor="t" lIns="0" rIns="0" tIns="0" bIns="0">
             <a:spAutoFit/>
           </a:bodyPr>
           <a:lstStyle/>
@@ -22097,7 +21983,7 @@
           <a:noFill/>
         </p:spPr>
         <p:txBody>
-          <a:bodyPr wrap="square" lIns="0" tIns="0" rIns="0" bIns="0" anchor="t">
+          <a:bodyPr wrap="square" anchor="t" lIns="0" rIns="0" tIns="0" bIns="0">
             <a:spAutoFit/>
           </a:bodyPr>
           <a:lstStyle/>
@@ -22164,7 +22050,6 @@
           <a:lstStyle/>
           <a:p>
             <a:pPr algn="ctr"/>
-            <a:endParaRPr/>
           </a:p>
         </p:txBody>
       </p:sp>
@@ -22185,7 +22070,7 @@
           <a:noFill/>
         </p:spPr>
         <p:txBody>
-          <a:bodyPr wrap="square" lIns="0" tIns="0" rIns="0" bIns="0" anchor="t">
+          <a:bodyPr wrap="square" anchor="t" lIns="0" rIns="0" tIns="0" bIns="0">
             <a:spAutoFit/>
           </a:bodyPr>
           <a:lstStyle/>
@@ -22224,7 +22109,7 @@
           <a:noFill/>
         </p:spPr>
         <p:txBody>
-          <a:bodyPr wrap="square" lIns="0" tIns="0" rIns="0" bIns="0" anchor="t">
+          <a:bodyPr wrap="square" anchor="t" lIns="0" rIns="0" tIns="0" bIns="0">
             <a:spAutoFit/>
           </a:bodyPr>
           <a:lstStyle/>
@@ -22263,7 +22148,7 @@
           <a:noFill/>
         </p:spPr>
         <p:txBody>
-          <a:bodyPr wrap="square" lIns="0" tIns="0" rIns="0" bIns="0" anchor="t">
+          <a:bodyPr wrap="square" anchor="t" lIns="0" rIns="0" tIns="0" bIns="0">
             <a:spAutoFit/>
           </a:bodyPr>
           <a:lstStyle/>
@@ -22330,7 +22215,6 @@
           <a:lstStyle/>
           <a:p>
             <a:pPr algn="ctr"/>
-            <a:endParaRPr/>
           </a:p>
         </p:txBody>
       </p:sp>
@@ -22351,7 +22235,7 @@
           <a:noFill/>
         </p:spPr>
         <p:txBody>
-          <a:bodyPr wrap="square" lIns="0" tIns="0" rIns="0" bIns="0" anchor="t">
+          <a:bodyPr wrap="square" anchor="t" lIns="0" rIns="0" tIns="0" bIns="0">
             <a:spAutoFit/>
           </a:bodyPr>
           <a:lstStyle/>
@@ -22390,7 +22274,7 @@
           <a:noFill/>
         </p:spPr>
         <p:txBody>
-          <a:bodyPr wrap="square" lIns="0" tIns="0" rIns="0" bIns="0" anchor="t">
+          <a:bodyPr wrap="square" anchor="t" lIns="0" rIns="0" tIns="0" bIns="0">
             <a:spAutoFit/>
           </a:bodyPr>
           <a:lstStyle/>
@@ -22429,7 +22313,7 @@
           <a:noFill/>
         </p:spPr>
         <p:txBody>
-          <a:bodyPr wrap="square" lIns="0" tIns="0" rIns="0" bIns="0" anchor="t">
+          <a:bodyPr wrap="square" anchor="t" lIns="0" rIns="0" tIns="0" bIns="0">
             <a:spAutoFit/>
           </a:bodyPr>
           <a:lstStyle/>
@@ -22496,7 +22380,6 @@
           <a:lstStyle/>
           <a:p>
             <a:pPr algn="ctr"/>
-            <a:endParaRPr/>
           </a:p>
         </p:txBody>
       </p:sp>
@@ -22517,7 +22400,7 @@
           <a:noFill/>
         </p:spPr>
         <p:txBody>
-          <a:bodyPr wrap="square" lIns="0" tIns="0" rIns="0" bIns="0" anchor="t">
+          <a:bodyPr wrap="square" anchor="t" lIns="0" rIns="0" tIns="0" bIns="0">
             <a:spAutoFit/>
           </a:bodyPr>
           <a:lstStyle/>
@@ -22556,7 +22439,7 @@
           <a:noFill/>
         </p:spPr>
         <p:txBody>
-          <a:bodyPr wrap="square" lIns="0" tIns="0" rIns="0" bIns="0" anchor="t">
+          <a:bodyPr wrap="square" anchor="t" lIns="0" rIns="0" tIns="0" bIns="0">
             <a:spAutoFit/>
           </a:bodyPr>
           <a:lstStyle/>
@@ -22595,7 +22478,7 @@
           <a:noFill/>
         </p:spPr>
         <p:txBody>
-          <a:bodyPr wrap="square" lIns="0" tIns="0" rIns="0" bIns="0" anchor="t">
+          <a:bodyPr wrap="square" anchor="t" lIns="0" rIns="0" tIns="0" bIns="0">
             <a:spAutoFit/>
           </a:bodyPr>
           <a:lstStyle/>
@@ -22662,7 +22545,6 @@
           <a:lstStyle/>
           <a:p>
             <a:pPr algn="ctr"/>
-            <a:endParaRPr/>
           </a:p>
         </p:txBody>
       </p:sp>
@@ -22683,7 +22565,7 @@
           <a:noFill/>
         </p:spPr>
         <p:txBody>
-          <a:bodyPr wrap="square" lIns="0" tIns="0" rIns="0" bIns="0" anchor="t">
+          <a:bodyPr wrap="square" anchor="t" lIns="0" rIns="0" tIns="0" bIns="0">
             <a:spAutoFit/>
           </a:bodyPr>
           <a:lstStyle/>
@@ -22722,7 +22604,7 @@
           <a:noFill/>
         </p:spPr>
         <p:txBody>
-          <a:bodyPr wrap="square" lIns="0" tIns="0" rIns="0" bIns="0" anchor="t">
+          <a:bodyPr wrap="square" anchor="t" lIns="0" rIns="0" tIns="0" bIns="0">
             <a:spAutoFit/>
           </a:bodyPr>
           <a:lstStyle/>
@@ -22761,7 +22643,7 @@
           <a:noFill/>
         </p:spPr>
         <p:txBody>
-          <a:bodyPr wrap="square" lIns="0" tIns="0" rIns="0" bIns="0" anchor="t">
+          <a:bodyPr wrap="square" anchor="t" lIns="0" rIns="0" tIns="0" bIns="0">
             <a:spAutoFit/>
           </a:bodyPr>
           <a:lstStyle/>
@@ -22828,7 +22710,6 @@
           <a:lstStyle/>
           <a:p>
             <a:pPr algn="ctr"/>
-            <a:endParaRPr/>
           </a:p>
         </p:txBody>
       </p:sp>
@@ -22849,7 +22730,7 @@
           <a:noFill/>
         </p:spPr>
         <p:txBody>
-          <a:bodyPr wrap="square" lIns="0" tIns="0" rIns="0" bIns="0" anchor="t">
+          <a:bodyPr wrap="square" anchor="t" lIns="0" rIns="0" tIns="0" bIns="0">
             <a:spAutoFit/>
           </a:bodyPr>
           <a:lstStyle/>
@@ -22888,7 +22769,7 @@
           <a:noFill/>
         </p:spPr>
         <p:txBody>
-          <a:bodyPr wrap="square" lIns="0" tIns="0" rIns="0" bIns="0" anchor="t">
+          <a:bodyPr wrap="square" anchor="t" lIns="0" rIns="0" tIns="0" bIns="0">
             <a:spAutoFit/>
           </a:bodyPr>
           <a:lstStyle/>
@@ -22927,7 +22808,7 @@
           <a:noFill/>
         </p:spPr>
         <p:txBody>
-          <a:bodyPr wrap="square" lIns="0" tIns="0" rIns="0" bIns="0" anchor="t">
+          <a:bodyPr wrap="square" anchor="t" lIns="0" rIns="0" tIns="0" bIns="0">
             <a:spAutoFit/>
           </a:bodyPr>
           <a:lstStyle/>
@@ -22994,7 +22875,6 @@
           <a:lstStyle/>
           <a:p>
             <a:pPr algn="ctr"/>
-            <a:endParaRPr/>
           </a:p>
         </p:txBody>
       </p:sp>
@@ -23015,7 +22895,7 @@
           <a:noFill/>
         </p:spPr>
         <p:txBody>
-          <a:bodyPr wrap="square" lIns="0" tIns="0" rIns="0" bIns="0" anchor="t">
+          <a:bodyPr wrap="square" anchor="t" lIns="0" rIns="0" tIns="0" bIns="0">
             <a:spAutoFit/>
           </a:bodyPr>
           <a:lstStyle/>
@@ -23054,7 +22934,7 @@
           <a:noFill/>
         </p:spPr>
         <p:txBody>
-          <a:bodyPr wrap="square" lIns="0" tIns="0" rIns="0" bIns="0" anchor="t">
+          <a:bodyPr wrap="square" anchor="t" lIns="0" rIns="0" tIns="0" bIns="0">
             <a:spAutoFit/>
           </a:bodyPr>
           <a:lstStyle/>
@@ -23093,7 +22973,7 @@
           <a:noFill/>
         </p:spPr>
         <p:txBody>
-          <a:bodyPr wrap="square" lIns="0" tIns="0" rIns="0" bIns="0" anchor="t">
+          <a:bodyPr wrap="square" anchor="t" lIns="0" rIns="0" tIns="0" bIns="0">
             <a:spAutoFit/>
           </a:bodyPr>
           <a:lstStyle/>
@@ -23160,7 +23040,6 @@
           <a:lstStyle/>
           <a:p>
             <a:pPr algn="ctr"/>
-            <a:endParaRPr/>
           </a:p>
         </p:txBody>
       </p:sp>
@@ -23181,7 +23060,7 @@
           <a:noFill/>
         </p:spPr>
         <p:txBody>
-          <a:bodyPr wrap="square" lIns="0" tIns="0" rIns="0" bIns="0" anchor="t">
+          <a:bodyPr wrap="square" anchor="t" lIns="0" rIns="0" tIns="0" bIns="0">
             <a:spAutoFit/>
           </a:bodyPr>
           <a:lstStyle/>
@@ -23220,7 +23099,7 @@
           <a:noFill/>
         </p:spPr>
         <p:txBody>
-          <a:bodyPr wrap="square" lIns="0" tIns="0" rIns="0" bIns="0" anchor="t">
+          <a:bodyPr wrap="square" anchor="t" lIns="0" rIns="0" tIns="0" bIns="0">
             <a:spAutoFit/>
           </a:bodyPr>
           <a:lstStyle/>
@@ -23259,7 +23138,7 @@
           <a:noFill/>
         </p:spPr>
         <p:txBody>
-          <a:bodyPr wrap="square" lIns="0" tIns="0" rIns="0" bIns="0" anchor="t">
+          <a:bodyPr wrap="square" anchor="t" lIns="0" rIns="0" tIns="0" bIns="0">
             <a:spAutoFit/>
           </a:bodyPr>
           <a:lstStyle/>
@@ -23324,7 +23203,6 @@
           <a:lstStyle/>
           <a:p>
             <a:pPr algn="ctr"/>
-            <a:endParaRPr/>
           </a:p>
         </p:txBody>
       </p:sp>
@@ -23345,7 +23223,7 @@
           <a:noFill/>
         </p:spPr>
         <p:txBody>
-          <a:bodyPr wrap="square" lIns="0" tIns="0" rIns="0" bIns="0" anchor="t">
+          <a:bodyPr wrap="square" anchor="t" lIns="0" rIns="0" tIns="0" bIns="0">
             <a:spAutoFit/>
           </a:bodyPr>
           <a:lstStyle/>
@@ -23384,7 +23262,7 @@
           <a:noFill/>
         </p:spPr>
         <p:txBody>
-          <a:bodyPr wrap="square" lIns="0" tIns="0" rIns="0" bIns="0" anchor="t">
+          <a:bodyPr wrap="square" anchor="t" lIns="0" rIns="0" tIns="0" bIns="0">
             <a:spAutoFit/>
           </a:bodyPr>
           <a:lstStyle/>
@@ -23423,7 +23301,7 @@
           <a:noFill/>
         </p:spPr>
         <p:txBody>
-          <a:bodyPr wrap="square" lIns="0" tIns="0" rIns="0" bIns="0" anchor="t">
+          <a:bodyPr wrap="square" anchor="t" lIns="0" rIns="0" tIns="0" bIns="0">
             <a:spAutoFit/>
           </a:bodyPr>
           <a:lstStyle/>
@@ -23450,23 +23328,11 @@
   <p:clrMapOvr>
     <a:masterClrMapping/>
   </p:clrMapOvr>
-  <mc:AlternateContent xmlns:mc="http://schemas.openxmlformats.org/markup-compatibility/2006">
-    <mc:Choice xmlns:p14="http://schemas.microsoft.com/office/powerpoint/2010/main" Requires="p14">
-      <p:transition spd="med" p14:dur="700">
-        <p:fade thruBlk="1"/>
-      </p:transition>
-    </mc:Choice>
-    <mc:Fallback>
-      <p:transition spd="med">
-        <p:fade thruBlk="1"/>
-      </p:transition>
-    </mc:Fallback>
-  </mc:AlternateContent>
 </p:sld>
 </file>
 
 <file path=ppt/slides/slide25.xml><?xml version="1.0" encoding="utf-8"?>
-<p:sld xmlns:a="http://schemas.openxmlformats.org/drawingml/2006/main" xmlns:r="http://schemas.openxmlformats.org/officeDocument/2006/relationships" xmlns:p="http://schemas.openxmlformats.org/presentationml/2006/main">
+<p:sld xmlns:a="http://schemas.openxmlformats.org/drawingml/2006/main" xmlns:p="http://schemas.openxmlformats.org/presentationml/2006/main" xmlns:r="http://schemas.openxmlformats.org/officeDocument/2006/relationships">
   <p:cSld>
     <p:spTree>
       <p:nvGrpSpPr>
@@ -23474,14 +23340,7 @@
         <p:cNvGrpSpPr/>
         <p:nvPr/>
       </p:nvGrpSpPr>
-      <p:grpSpPr>
-        <a:xfrm>
-          <a:off x="0" y="0"/>
-          <a:ext cx="0" cy="0"/>
-          <a:chOff x="0" y="0"/>
-          <a:chExt cx="0" cy="0"/>
-        </a:xfrm>
-      </p:grpSpPr>
+      <p:grpSpPr/>
       <p:pic>
         <p:nvPicPr>
           <p:cNvPr id="2" name="Picture 1" descr="bg_deep.png"/>
@@ -23523,7 +23382,7 @@
           <a:noFill/>
         </p:spPr>
         <p:txBody>
-          <a:bodyPr wrap="square" lIns="0" tIns="0" rIns="0" bIns="0" anchor="t">
+          <a:bodyPr wrap="square" anchor="t" lIns="0" rIns="0" tIns="0" bIns="0">
             <a:spAutoFit/>
           </a:bodyPr>
           <a:lstStyle/>
@@ -23562,7 +23421,7 @@
           <a:noFill/>
         </p:spPr>
         <p:txBody>
-          <a:bodyPr wrap="square" lIns="0" tIns="0" rIns="0" bIns="0" anchor="t">
+          <a:bodyPr wrap="square" anchor="t" lIns="0" rIns="0" tIns="0" bIns="0">
             <a:spAutoFit/>
           </a:bodyPr>
           <a:lstStyle/>
@@ -23601,7 +23460,7 @@
           <a:noFill/>
         </p:spPr>
         <p:txBody>
-          <a:bodyPr wrap="square" lIns="0" tIns="0" rIns="0" bIns="0" anchor="t">
+          <a:bodyPr wrap="square" anchor="t" lIns="0" rIns="0" tIns="0" bIns="0">
             <a:spAutoFit/>
           </a:bodyPr>
           <a:lstStyle/>
@@ -23640,7 +23499,7 @@
           <a:noFill/>
         </p:spPr>
         <p:txBody>
-          <a:bodyPr wrap="square" lIns="0" tIns="0" rIns="0" bIns="0" anchor="t">
+          <a:bodyPr wrap="square" anchor="t" lIns="0" rIns="0" tIns="0" bIns="0">
             <a:spAutoFit/>
           </a:bodyPr>
           <a:lstStyle/>
@@ -23679,7 +23538,7 @@
           <a:noFill/>
         </p:spPr>
         <p:txBody>
-          <a:bodyPr wrap="square" lIns="0" tIns="0" rIns="0" bIns="0" anchor="t">
+          <a:bodyPr wrap="square" anchor="t" lIns="0" rIns="0" tIns="0" bIns="0">
             <a:spAutoFit/>
           </a:bodyPr>
           <a:lstStyle/>
@@ -23718,7 +23577,7 @@
           <a:noFill/>
         </p:spPr>
         <p:txBody>
-          <a:bodyPr wrap="square" lIns="0" tIns="0" rIns="0" bIns="0" anchor="t">
+          <a:bodyPr wrap="square" anchor="t" lIns="0" rIns="0" tIns="0" bIns="0">
             <a:spAutoFit/>
           </a:bodyPr>
           <a:lstStyle/>
@@ -23757,7 +23616,7 @@
           <a:noFill/>
         </p:spPr>
         <p:txBody>
-          <a:bodyPr wrap="square" lIns="0" tIns="0" rIns="0" bIns="0" anchor="t">
+          <a:bodyPr wrap="square" anchor="t" lIns="0" rIns="0" tIns="0" bIns="0">
             <a:spAutoFit/>
           </a:bodyPr>
           <a:lstStyle/>
@@ -23824,7 +23683,6 @@
           <a:lstStyle/>
           <a:p>
             <a:pPr algn="ctr"/>
-            <a:endParaRPr/>
           </a:p>
         </p:txBody>
       </p:sp>
@@ -23845,7 +23703,7 @@
           <a:noFill/>
         </p:spPr>
         <p:txBody>
-          <a:bodyPr wrap="square" lIns="0" tIns="0" rIns="0" bIns="0" anchor="t">
+          <a:bodyPr wrap="square" anchor="t" lIns="0" rIns="0" tIns="0" bIns="0">
             <a:spAutoFit/>
           </a:bodyPr>
           <a:lstStyle/>
@@ -23884,7 +23742,7 @@
           <a:noFill/>
         </p:spPr>
         <p:txBody>
-          <a:bodyPr wrap="square" lIns="0" tIns="0" rIns="0" bIns="0" anchor="t">
+          <a:bodyPr wrap="square" anchor="t" lIns="0" rIns="0" tIns="0" bIns="0">
             <a:spAutoFit/>
           </a:bodyPr>
           <a:lstStyle/>
@@ -23923,7 +23781,7 @@
           <a:noFill/>
         </p:spPr>
         <p:txBody>
-          <a:bodyPr wrap="square" lIns="0" tIns="0" rIns="0" bIns="0" anchor="t">
+          <a:bodyPr wrap="square" anchor="t" lIns="0" rIns="0" tIns="0" bIns="0">
             <a:spAutoFit/>
           </a:bodyPr>
           <a:lstStyle/>
@@ -23962,7 +23820,7 @@
           <a:noFill/>
         </p:spPr>
         <p:txBody>
-          <a:bodyPr wrap="square" lIns="0" tIns="0" rIns="0" bIns="0" anchor="t">
+          <a:bodyPr wrap="square" anchor="t" lIns="0" rIns="0" tIns="0" bIns="0">
             <a:spAutoFit/>
           </a:bodyPr>
           <a:lstStyle/>
@@ -24029,7 +23887,6 @@
           <a:lstStyle/>
           <a:p>
             <a:pPr algn="ctr"/>
-            <a:endParaRPr/>
           </a:p>
         </p:txBody>
       </p:sp>
@@ -24050,7 +23907,7 @@
           <a:noFill/>
         </p:spPr>
         <p:txBody>
-          <a:bodyPr wrap="square" lIns="0" tIns="0" rIns="0" bIns="0" anchor="t">
+          <a:bodyPr wrap="square" anchor="t" lIns="0" rIns="0" tIns="0" bIns="0">
             <a:spAutoFit/>
           </a:bodyPr>
           <a:lstStyle/>
@@ -24089,7 +23946,7 @@
           <a:noFill/>
         </p:spPr>
         <p:txBody>
-          <a:bodyPr wrap="square" lIns="0" tIns="0" rIns="0" bIns="0" anchor="t">
+          <a:bodyPr wrap="square" anchor="t" lIns="0" rIns="0" tIns="0" bIns="0">
             <a:spAutoFit/>
           </a:bodyPr>
           <a:lstStyle/>
@@ -24128,7 +23985,7 @@
           <a:noFill/>
         </p:spPr>
         <p:txBody>
-          <a:bodyPr wrap="square" lIns="0" tIns="0" rIns="0" bIns="0" anchor="t">
+          <a:bodyPr wrap="square" anchor="t" lIns="0" rIns="0" tIns="0" bIns="0">
             <a:spAutoFit/>
           </a:bodyPr>
           <a:lstStyle/>
@@ -24167,7 +24024,7 @@
           <a:noFill/>
         </p:spPr>
         <p:txBody>
-          <a:bodyPr wrap="square" lIns="0" tIns="0" rIns="0" bIns="0" anchor="t">
+          <a:bodyPr wrap="square" anchor="t" lIns="0" rIns="0" tIns="0" bIns="0">
             <a:spAutoFit/>
           </a:bodyPr>
           <a:lstStyle/>
@@ -24234,7 +24091,6 @@
           <a:lstStyle/>
           <a:p>
             <a:pPr algn="ctr"/>
-            <a:endParaRPr/>
           </a:p>
         </p:txBody>
       </p:sp>
@@ -24255,7 +24111,7 @@
           <a:noFill/>
         </p:spPr>
         <p:txBody>
-          <a:bodyPr wrap="square" lIns="0" tIns="0" rIns="0" bIns="0" anchor="t">
+          <a:bodyPr wrap="square" anchor="t" lIns="0" rIns="0" tIns="0" bIns="0">
             <a:spAutoFit/>
           </a:bodyPr>
           <a:lstStyle/>
@@ -24294,7 +24150,7 @@
           <a:noFill/>
         </p:spPr>
         <p:txBody>
-          <a:bodyPr wrap="square" lIns="0" tIns="0" rIns="0" bIns="0" anchor="t">
+          <a:bodyPr wrap="square" anchor="t" lIns="0" rIns="0" tIns="0" bIns="0">
             <a:spAutoFit/>
           </a:bodyPr>
           <a:lstStyle/>
@@ -24333,7 +24189,7 @@
           <a:noFill/>
         </p:spPr>
         <p:txBody>
-          <a:bodyPr wrap="square" lIns="0" tIns="0" rIns="0" bIns="0" anchor="t">
+          <a:bodyPr wrap="square" anchor="t" lIns="0" rIns="0" tIns="0" bIns="0">
             <a:spAutoFit/>
           </a:bodyPr>
           <a:lstStyle/>
@@ -24372,7 +24228,7 @@
           <a:noFill/>
         </p:spPr>
         <p:txBody>
-          <a:bodyPr wrap="square" lIns="0" tIns="0" rIns="0" bIns="0" anchor="t">
+          <a:bodyPr wrap="square" anchor="t" lIns="0" rIns="0" tIns="0" bIns="0">
             <a:spAutoFit/>
           </a:bodyPr>
           <a:lstStyle/>
@@ -24439,7 +24295,6 @@
           <a:lstStyle/>
           <a:p>
             <a:pPr algn="ctr"/>
-            <a:endParaRPr/>
           </a:p>
         </p:txBody>
       </p:sp>
@@ -24460,7 +24315,7 @@
           <a:noFill/>
         </p:spPr>
         <p:txBody>
-          <a:bodyPr wrap="square" lIns="0" tIns="0" rIns="0" bIns="0" anchor="t">
+          <a:bodyPr wrap="square" anchor="t" lIns="0" rIns="0" tIns="0" bIns="0">
             <a:spAutoFit/>
           </a:bodyPr>
           <a:lstStyle/>
@@ -24499,7 +24354,7 @@
           <a:noFill/>
         </p:spPr>
         <p:txBody>
-          <a:bodyPr wrap="square" lIns="0" tIns="0" rIns="0" bIns="0" anchor="t">
+          <a:bodyPr wrap="square" anchor="t" lIns="0" rIns="0" tIns="0" bIns="0">
             <a:spAutoFit/>
           </a:bodyPr>
           <a:lstStyle/>
@@ -24538,7 +24393,7 @@
           <a:noFill/>
         </p:spPr>
         <p:txBody>
-          <a:bodyPr wrap="square" lIns="0" tIns="0" rIns="0" bIns="0" anchor="t">
+          <a:bodyPr wrap="square" anchor="t" lIns="0" rIns="0" tIns="0" bIns="0">
             <a:spAutoFit/>
           </a:bodyPr>
           <a:lstStyle/>
@@ -24577,7 +24432,7 @@
           <a:noFill/>
         </p:spPr>
         <p:txBody>
-          <a:bodyPr wrap="square" lIns="0" tIns="0" rIns="0" bIns="0" anchor="t">
+          <a:bodyPr wrap="square" anchor="t" lIns="0" rIns="0" tIns="0" bIns="0">
             <a:spAutoFit/>
           </a:bodyPr>
           <a:lstStyle/>
@@ -24644,7 +24499,6 @@
           <a:lstStyle/>
           <a:p>
             <a:pPr algn="ctr"/>
-            <a:endParaRPr/>
           </a:p>
         </p:txBody>
       </p:sp>
@@ -24665,7 +24519,7 @@
           <a:noFill/>
         </p:spPr>
         <p:txBody>
-          <a:bodyPr wrap="square" lIns="0" tIns="0" rIns="0" bIns="0" anchor="t">
+          <a:bodyPr wrap="square" anchor="t" lIns="0" rIns="0" tIns="0" bIns="0">
             <a:spAutoFit/>
           </a:bodyPr>
           <a:lstStyle/>
@@ -24704,7 +24558,7 @@
           <a:noFill/>
         </p:spPr>
         <p:txBody>
-          <a:bodyPr wrap="square" lIns="0" tIns="0" rIns="0" bIns="0" anchor="t">
+          <a:bodyPr wrap="square" anchor="t" lIns="0" rIns="0" tIns="0" bIns="0">
             <a:spAutoFit/>
           </a:bodyPr>
           <a:lstStyle/>
@@ -24743,7 +24597,7 @@
           <a:noFill/>
         </p:spPr>
         <p:txBody>
-          <a:bodyPr wrap="square" lIns="0" tIns="0" rIns="0" bIns="0" anchor="t">
+          <a:bodyPr wrap="square" anchor="t" lIns="0" rIns="0" tIns="0" bIns="0">
             <a:spAutoFit/>
           </a:bodyPr>
           <a:lstStyle/>
@@ -24782,7 +24636,7 @@
           <a:noFill/>
         </p:spPr>
         <p:txBody>
-          <a:bodyPr wrap="square" lIns="0" tIns="0" rIns="0" bIns="0" anchor="t">
+          <a:bodyPr wrap="square" anchor="t" lIns="0" rIns="0" tIns="0" bIns="0">
             <a:spAutoFit/>
           </a:bodyPr>
           <a:lstStyle/>
@@ -24849,7 +24703,6 @@
           <a:lstStyle/>
           <a:p>
             <a:pPr algn="ctr"/>
-            <a:endParaRPr/>
           </a:p>
         </p:txBody>
       </p:sp>
@@ -24870,7 +24723,7 @@
           <a:noFill/>
         </p:spPr>
         <p:txBody>
-          <a:bodyPr wrap="square" lIns="0" tIns="0" rIns="0" bIns="0" anchor="t">
+          <a:bodyPr wrap="square" anchor="t" lIns="0" rIns="0" tIns="0" bIns="0">
             <a:spAutoFit/>
           </a:bodyPr>
           <a:lstStyle/>
@@ -24909,7 +24762,7 @@
           <a:noFill/>
         </p:spPr>
         <p:txBody>
-          <a:bodyPr wrap="square" lIns="0" tIns="0" rIns="0" bIns="0" anchor="t">
+          <a:bodyPr wrap="square" anchor="t" lIns="0" rIns="0" tIns="0" bIns="0">
             <a:spAutoFit/>
           </a:bodyPr>
           <a:lstStyle/>
@@ -24948,7 +24801,7 @@
           <a:noFill/>
         </p:spPr>
         <p:txBody>
-          <a:bodyPr wrap="square" lIns="0" tIns="0" rIns="0" bIns="0" anchor="t">
+          <a:bodyPr wrap="square" anchor="t" lIns="0" rIns="0" tIns="0" bIns="0">
             <a:spAutoFit/>
           </a:bodyPr>
           <a:lstStyle/>
@@ -24987,7 +24840,7 @@
           <a:noFill/>
         </p:spPr>
         <p:txBody>
-          <a:bodyPr wrap="square" lIns="0" tIns="0" rIns="0" bIns="0" anchor="t">
+          <a:bodyPr wrap="square" anchor="t" lIns="0" rIns="0" tIns="0" bIns="0">
             <a:spAutoFit/>
           </a:bodyPr>
           <a:lstStyle/>
@@ -25054,7 +24907,6 @@
           <a:lstStyle/>
           <a:p>
             <a:pPr algn="ctr"/>
-            <a:endParaRPr/>
           </a:p>
         </p:txBody>
       </p:sp>
@@ -25075,7 +24927,7 @@
           <a:noFill/>
         </p:spPr>
         <p:txBody>
-          <a:bodyPr wrap="square" lIns="0" tIns="0" rIns="0" bIns="0" anchor="t">
+          <a:bodyPr wrap="square" anchor="t" lIns="0" rIns="0" tIns="0" bIns="0">
             <a:spAutoFit/>
           </a:bodyPr>
           <a:lstStyle/>
@@ -25114,7 +24966,7 @@
           <a:noFill/>
         </p:spPr>
         <p:txBody>
-          <a:bodyPr wrap="square" lIns="0" tIns="0" rIns="0" bIns="0" anchor="t">
+          <a:bodyPr wrap="square" anchor="t" lIns="0" rIns="0" tIns="0" bIns="0">
             <a:spAutoFit/>
           </a:bodyPr>
           <a:lstStyle/>
@@ -25153,7 +25005,7 @@
           <a:noFill/>
         </p:spPr>
         <p:txBody>
-          <a:bodyPr wrap="square" lIns="0" tIns="0" rIns="0" bIns="0" anchor="t">
+          <a:bodyPr wrap="square" anchor="t" lIns="0" rIns="0" tIns="0" bIns="0">
             <a:spAutoFit/>
           </a:bodyPr>
           <a:lstStyle/>
@@ -25192,7 +25044,7 @@
           <a:noFill/>
         </p:spPr>
         <p:txBody>
-          <a:bodyPr wrap="square" lIns="0" tIns="0" rIns="0" bIns="0" anchor="t">
+          <a:bodyPr wrap="square" anchor="t" lIns="0" rIns="0" tIns="0" bIns="0">
             <a:spAutoFit/>
           </a:bodyPr>
           <a:lstStyle/>
@@ -25231,7 +25083,7 @@
           <a:noFill/>
         </p:spPr>
         <p:txBody>
-          <a:bodyPr wrap="square" lIns="0" tIns="0" rIns="0" bIns="0" anchor="t">
+          <a:bodyPr wrap="square" anchor="t" lIns="0" rIns="0" tIns="0" bIns="0">
             <a:spAutoFit/>
           </a:bodyPr>
           <a:lstStyle/>
@@ -25270,7 +25122,7 @@
           <a:noFill/>
         </p:spPr>
         <p:txBody>
-          <a:bodyPr wrap="square" lIns="0" tIns="0" rIns="0" bIns="0" anchor="t">
+          <a:bodyPr wrap="square" anchor="t" lIns="0" rIns="0" tIns="0" bIns="0">
             <a:spAutoFit/>
           </a:bodyPr>
           <a:lstStyle/>
@@ -25309,7 +25161,7 @@
           <a:noFill/>
         </p:spPr>
         <p:txBody>
-          <a:bodyPr wrap="square" lIns="0" tIns="0" rIns="0" bIns="0" anchor="t">
+          <a:bodyPr wrap="square" anchor="t" lIns="0" rIns="0" tIns="0" bIns="0">
             <a:spAutoFit/>
           </a:bodyPr>
           <a:lstStyle/>
@@ -25336,23 +25188,11 @@
   <p:clrMapOvr>
     <a:masterClrMapping/>
   </p:clrMapOvr>
-  <mc:AlternateContent xmlns:mc="http://schemas.openxmlformats.org/markup-compatibility/2006">
-    <mc:Choice xmlns:p14="http://schemas.microsoft.com/office/powerpoint/2010/main" Requires="p14">
-      <p:transition spd="med" p14:dur="700">
-        <p:fade thruBlk="1"/>
-      </p:transition>
-    </mc:Choice>
-    <mc:Fallback>
-      <p:transition spd="med">
-        <p:fade thruBlk="1"/>
-      </p:transition>
-    </mc:Fallback>
-  </mc:AlternateContent>
 </p:sld>
 </file>
 
 <file path=ppt/slides/slide26.xml><?xml version="1.0" encoding="utf-8"?>
-<p:sld xmlns:a="http://schemas.openxmlformats.org/drawingml/2006/main" xmlns:r="http://schemas.openxmlformats.org/officeDocument/2006/relationships" xmlns:p="http://schemas.openxmlformats.org/presentationml/2006/main">
+<p:sld xmlns:a="http://schemas.openxmlformats.org/drawingml/2006/main" xmlns:p="http://schemas.openxmlformats.org/presentationml/2006/main" xmlns:r="http://schemas.openxmlformats.org/officeDocument/2006/relationships">
   <p:cSld>
     <p:spTree>
       <p:nvGrpSpPr>
@@ -25360,14 +25200,7 @@
         <p:cNvGrpSpPr/>
         <p:nvPr/>
       </p:nvGrpSpPr>
-      <p:grpSpPr>
-        <a:xfrm>
-          <a:off x="0" y="0"/>
-          <a:ext cx="0" cy="0"/>
-          <a:chOff x="0" y="0"/>
-          <a:chExt cx="0" cy="0"/>
-        </a:xfrm>
-      </p:grpSpPr>
+      <p:grpSpPr/>
       <p:pic>
         <p:nvPicPr>
           <p:cNvPr id="2" name="Picture 1" descr="bg_deep.png"/>
@@ -25409,7 +25242,7 @@
           <a:noFill/>
         </p:spPr>
         <p:txBody>
-          <a:bodyPr wrap="square" lIns="0" tIns="0" rIns="0" bIns="0" anchor="t">
+          <a:bodyPr wrap="square" anchor="t" lIns="0" rIns="0" tIns="0" bIns="0">
             <a:spAutoFit/>
           </a:bodyPr>
           <a:lstStyle/>
@@ -25448,7 +25281,7 @@
           <a:noFill/>
         </p:spPr>
         <p:txBody>
-          <a:bodyPr wrap="square" lIns="0" tIns="0" rIns="0" bIns="0" anchor="t">
+          <a:bodyPr wrap="square" anchor="t" lIns="0" rIns="0" tIns="0" bIns="0">
             <a:spAutoFit/>
           </a:bodyPr>
           <a:lstStyle/>
@@ -25487,7 +25320,7 @@
           <a:noFill/>
         </p:spPr>
         <p:txBody>
-          <a:bodyPr wrap="square" lIns="0" tIns="0" rIns="0" bIns="0" anchor="t">
+          <a:bodyPr wrap="square" anchor="t" lIns="0" rIns="0" tIns="0" bIns="0">
             <a:spAutoFit/>
           </a:bodyPr>
           <a:lstStyle/>
@@ -25554,7 +25387,6 @@
           <a:lstStyle/>
           <a:p>
             <a:pPr algn="ctr"/>
-            <a:endParaRPr/>
           </a:p>
         </p:txBody>
       </p:sp>
@@ -25575,7 +25407,7 @@
           <a:noFill/>
         </p:spPr>
         <p:txBody>
-          <a:bodyPr wrap="square" lIns="0" tIns="0" rIns="0" bIns="0" anchor="t">
+          <a:bodyPr wrap="square" anchor="t" lIns="0" rIns="0" tIns="0" bIns="0">
             <a:spAutoFit/>
           </a:bodyPr>
           <a:lstStyle/>
@@ -25614,7 +25446,7 @@
           <a:noFill/>
         </p:spPr>
         <p:txBody>
-          <a:bodyPr wrap="square" lIns="0" tIns="0" rIns="0" bIns="0" anchor="t">
+          <a:bodyPr wrap="square" anchor="t" lIns="0" rIns="0" tIns="0" bIns="0">
             <a:spAutoFit/>
           </a:bodyPr>
           <a:lstStyle/>
@@ -25677,7 +25509,7 @@
           </a:fontRef>
         </p:style>
         <p:txBody>
-          <a:bodyPr wrap="square" lIns="54864" tIns="0" rIns="54864" bIns="0" rtlCol="0" anchor="ctr"/>
+          <a:bodyPr rtlCol="0" anchor="ctr" wrap="square" lIns="54864" rIns="54864" tIns="0" bIns="0"/>
           <a:lstStyle/>
           <a:p>
             <a:pPr algn="ctr"/>
@@ -25738,7 +25570,6 @@
           <a:lstStyle/>
           <a:p>
             <a:pPr algn="ctr"/>
-            <a:endParaRPr/>
           </a:p>
         </p:txBody>
       </p:sp>
@@ -25759,7 +25590,7 @@
           <a:noFill/>
         </p:spPr>
         <p:txBody>
-          <a:bodyPr wrap="square" lIns="0" tIns="0" rIns="0" bIns="0" anchor="t">
+          <a:bodyPr wrap="square" anchor="t" lIns="0" rIns="0" tIns="0" bIns="0">
             <a:spAutoFit/>
           </a:bodyPr>
           <a:lstStyle/>
@@ -25798,7 +25629,7 @@
           <a:noFill/>
         </p:spPr>
         <p:txBody>
-          <a:bodyPr wrap="square" lIns="0" tIns="0" rIns="0" bIns="0" anchor="t">
+          <a:bodyPr wrap="square" anchor="t" lIns="0" rIns="0" tIns="0" bIns="0">
             <a:spAutoFit/>
           </a:bodyPr>
           <a:lstStyle/>
@@ -25861,7 +25692,7 @@
           </a:fontRef>
         </p:style>
         <p:txBody>
-          <a:bodyPr wrap="square" lIns="54864" tIns="0" rIns="54864" bIns="0" rtlCol="0" anchor="ctr"/>
+          <a:bodyPr rtlCol="0" anchor="ctr" wrap="square" lIns="54864" rIns="54864" tIns="0" bIns="0"/>
           <a:lstStyle/>
           <a:p>
             <a:pPr algn="ctr"/>
@@ -25922,7 +25753,6 @@
           <a:lstStyle/>
           <a:p>
             <a:pPr algn="ctr"/>
-            <a:endParaRPr/>
           </a:p>
         </p:txBody>
       </p:sp>
@@ -25943,7 +25773,7 @@
           <a:noFill/>
         </p:spPr>
         <p:txBody>
-          <a:bodyPr wrap="square" lIns="0" tIns="0" rIns="0" bIns="0" anchor="t">
+          <a:bodyPr wrap="square" anchor="t" lIns="0" rIns="0" tIns="0" bIns="0">
             <a:spAutoFit/>
           </a:bodyPr>
           <a:lstStyle/>
@@ -25982,7 +25812,7 @@
           <a:noFill/>
         </p:spPr>
         <p:txBody>
-          <a:bodyPr wrap="square" lIns="0" tIns="0" rIns="0" bIns="0" anchor="t">
+          <a:bodyPr wrap="square" anchor="t" lIns="0" rIns="0" tIns="0" bIns="0">
             <a:spAutoFit/>
           </a:bodyPr>
           <a:lstStyle/>
@@ -26045,7 +25875,7 @@
           </a:fontRef>
         </p:style>
         <p:txBody>
-          <a:bodyPr wrap="square" lIns="54864" tIns="0" rIns="54864" bIns="0" rtlCol="0" anchor="ctr"/>
+          <a:bodyPr rtlCol="0" anchor="ctr" wrap="square" lIns="54864" rIns="54864" tIns="0" bIns="0"/>
           <a:lstStyle/>
           <a:p>
             <a:pPr algn="ctr"/>
@@ -26106,7 +25936,6 @@
           <a:lstStyle/>
           <a:p>
             <a:pPr algn="ctr"/>
-            <a:endParaRPr/>
           </a:p>
         </p:txBody>
       </p:sp>
@@ -26127,7 +25956,7 @@
           <a:noFill/>
         </p:spPr>
         <p:txBody>
-          <a:bodyPr wrap="square" lIns="0" tIns="0" rIns="0" bIns="0" anchor="t">
+          <a:bodyPr wrap="square" anchor="t" lIns="0" rIns="0" tIns="0" bIns="0">
             <a:spAutoFit/>
           </a:bodyPr>
           <a:lstStyle/>
@@ -26166,7 +25995,7 @@
           <a:noFill/>
         </p:spPr>
         <p:txBody>
-          <a:bodyPr wrap="square" lIns="0" tIns="0" rIns="0" bIns="0" anchor="t">
+          <a:bodyPr wrap="square" anchor="t" lIns="0" rIns="0" tIns="0" bIns="0">
             <a:spAutoFit/>
           </a:bodyPr>
           <a:lstStyle/>
@@ -26229,7 +26058,7 @@
           </a:fontRef>
         </p:style>
         <p:txBody>
-          <a:bodyPr wrap="square" lIns="54864" tIns="0" rIns="54864" bIns="0" rtlCol="0" anchor="ctr"/>
+          <a:bodyPr rtlCol="0" anchor="ctr" wrap="square" lIns="54864" rIns="54864" tIns="0" bIns="0"/>
           <a:lstStyle/>
           <a:p>
             <a:pPr algn="ctr"/>
@@ -26290,7 +26119,6 @@
           <a:lstStyle/>
           <a:p>
             <a:pPr algn="ctr"/>
-            <a:endParaRPr/>
           </a:p>
         </p:txBody>
       </p:sp>
@@ -26311,7 +26139,7 @@
           <a:noFill/>
         </p:spPr>
         <p:txBody>
-          <a:bodyPr wrap="square" lIns="0" tIns="0" rIns="0" bIns="0" anchor="t">
+          <a:bodyPr wrap="square" anchor="t" lIns="0" rIns="0" tIns="0" bIns="0">
             <a:spAutoFit/>
           </a:bodyPr>
           <a:lstStyle/>
@@ -26350,7 +26178,7 @@
           <a:noFill/>
         </p:spPr>
         <p:txBody>
-          <a:bodyPr wrap="square" lIns="0" tIns="0" rIns="0" bIns="0" anchor="t">
+          <a:bodyPr wrap="square" anchor="t" lIns="0" rIns="0" tIns="0" bIns="0">
             <a:spAutoFit/>
           </a:bodyPr>
           <a:lstStyle/>
@@ -26413,7 +26241,7 @@
           </a:fontRef>
         </p:style>
         <p:txBody>
-          <a:bodyPr wrap="square" lIns="54864" tIns="0" rIns="54864" bIns="0" rtlCol="0" anchor="ctr"/>
+          <a:bodyPr rtlCol="0" anchor="ctr" wrap="square" lIns="54864" rIns="54864" tIns="0" bIns="0"/>
           <a:lstStyle/>
           <a:p>
             <a:pPr algn="ctr"/>
@@ -26474,7 +26302,6 @@
           <a:lstStyle/>
           <a:p>
             <a:pPr algn="ctr"/>
-            <a:endParaRPr/>
           </a:p>
         </p:txBody>
       </p:sp>
@@ -26495,7 +26322,7 @@
           <a:noFill/>
         </p:spPr>
         <p:txBody>
-          <a:bodyPr wrap="square" lIns="0" tIns="0" rIns="0" bIns="0" anchor="t">
+          <a:bodyPr wrap="square" anchor="t" lIns="0" rIns="0" tIns="0" bIns="0">
             <a:spAutoFit/>
           </a:bodyPr>
           <a:lstStyle/>
@@ -26534,7 +26361,7 @@
           <a:noFill/>
         </p:spPr>
         <p:txBody>
-          <a:bodyPr wrap="square" lIns="0" tIns="0" rIns="0" bIns="0" anchor="t">
+          <a:bodyPr wrap="square" anchor="t" lIns="0" rIns="0" tIns="0" bIns="0">
             <a:spAutoFit/>
           </a:bodyPr>
           <a:lstStyle/>
@@ -26597,7 +26424,7 @@
           </a:fontRef>
         </p:style>
         <p:txBody>
-          <a:bodyPr wrap="square" lIns="54864" tIns="0" rIns="54864" bIns="0" rtlCol="0" anchor="ctr"/>
+          <a:bodyPr rtlCol="0" anchor="ctr" wrap="square" lIns="54864" rIns="54864" tIns="0" bIns="0"/>
           <a:lstStyle/>
           <a:p>
             <a:pPr algn="ctr"/>
@@ -26658,7 +26485,6 @@
           <a:lstStyle/>
           <a:p>
             <a:pPr algn="ctr"/>
-            <a:endParaRPr/>
           </a:p>
         </p:txBody>
       </p:sp>
@@ -26679,7 +26505,7 @@
           <a:noFill/>
         </p:spPr>
         <p:txBody>
-          <a:bodyPr wrap="square" lIns="0" tIns="0" rIns="0" bIns="0" anchor="t">
+          <a:bodyPr wrap="square" anchor="t" lIns="0" rIns="0" tIns="0" bIns="0">
             <a:spAutoFit/>
           </a:bodyPr>
           <a:lstStyle/>
@@ -26718,7 +26544,7 @@
           <a:noFill/>
         </p:spPr>
         <p:txBody>
-          <a:bodyPr wrap="square" lIns="0" tIns="0" rIns="0" bIns="0" anchor="t">
+          <a:bodyPr wrap="square" anchor="t" lIns="0" rIns="0" tIns="0" bIns="0">
             <a:spAutoFit/>
           </a:bodyPr>
           <a:lstStyle/>
@@ -26781,7 +26607,7 @@
           </a:fontRef>
         </p:style>
         <p:txBody>
-          <a:bodyPr wrap="square" lIns="54864" tIns="0" rIns="54864" bIns="0" rtlCol="0" anchor="ctr"/>
+          <a:bodyPr rtlCol="0" anchor="ctr" wrap="square" lIns="54864" rIns="54864" tIns="0" bIns="0"/>
           <a:lstStyle/>
           <a:p>
             <a:pPr algn="ctr"/>
@@ -26842,7 +26668,6 @@
           <a:lstStyle/>
           <a:p>
             <a:pPr algn="ctr"/>
-            <a:endParaRPr/>
           </a:p>
         </p:txBody>
       </p:sp>
@@ -26863,7 +26688,7 @@
           <a:noFill/>
         </p:spPr>
         <p:txBody>
-          <a:bodyPr wrap="square" lIns="0" tIns="0" rIns="0" bIns="0" anchor="t">
+          <a:bodyPr wrap="square" anchor="t" lIns="0" rIns="0" tIns="0" bIns="0">
             <a:spAutoFit/>
           </a:bodyPr>
           <a:lstStyle/>
@@ -26902,7 +26727,7 @@
           <a:noFill/>
         </p:spPr>
         <p:txBody>
-          <a:bodyPr wrap="square" lIns="0" tIns="0" rIns="0" bIns="0" anchor="t">
+          <a:bodyPr wrap="square" anchor="t" lIns="0" rIns="0" tIns="0" bIns="0">
             <a:spAutoFit/>
           </a:bodyPr>
           <a:lstStyle/>
@@ -26965,7 +26790,7 @@
           </a:fontRef>
         </p:style>
         <p:txBody>
-          <a:bodyPr wrap="square" lIns="54864" tIns="0" rIns="54864" bIns="0" rtlCol="0" anchor="ctr"/>
+          <a:bodyPr rtlCol="0" anchor="ctr" wrap="square" lIns="54864" rIns="54864" tIns="0" bIns="0"/>
           <a:lstStyle/>
           <a:p>
             <a:pPr algn="ctr"/>
@@ -27026,7 +26851,6 @@
           <a:lstStyle/>
           <a:p>
             <a:pPr algn="ctr"/>
-            <a:endParaRPr/>
           </a:p>
         </p:txBody>
       </p:sp>
@@ -27047,7 +26871,7 @@
           <a:noFill/>
         </p:spPr>
         <p:txBody>
-          <a:bodyPr wrap="square" lIns="0" tIns="0" rIns="0" bIns="0" anchor="t">
+          <a:bodyPr wrap="square" anchor="t" lIns="0" rIns="0" tIns="0" bIns="0">
             <a:spAutoFit/>
           </a:bodyPr>
           <a:lstStyle/>
@@ -27086,7 +26910,7 @@
           <a:noFill/>
         </p:spPr>
         <p:txBody>
-          <a:bodyPr wrap="square" lIns="0" tIns="0" rIns="0" bIns="0" anchor="t">
+          <a:bodyPr wrap="square" anchor="t" lIns="0" rIns="0" tIns="0" bIns="0">
             <a:spAutoFit/>
           </a:bodyPr>
           <a:lstStyle/>
@@ -27149,7 +26973,7 @@
           </a:fontRef>
         </p:style>
         <p:txBody>
-          <a:bodyPr wrap="square" lIns="54864" tIns="0" rIns="54864" bIns="0" rtlCol="0" anchor="ctr"/>
+          <a:bodyPr rtlCol="0" anchor="ctr" wrap="square" lIns="54864" rIns="54864" tIns="0" bIns="0"/>
           <a:lstStyle/>
           <a:p>
             <a:pPr algn="ctr"/>
@@ -27210,7 +27034,6 @@
           <a:lstStyle/>
           <a:p>
             <a:pPr algn="ctr"/>
-            <a:endParaRPr/>
           </a:p>
         </p:txBody>
       </p:sp>
@@ -27231,7 +27054,7 @@
           <a:noFill/>
         </p:spPr>
         <p:txBody>
-          <a:bodyPr wrap="square" lIns="0" tIns="0" rIns="0" bIns="0" anchor="t">
+          <a:bodyPr wrap="square" anchor="t" lIns="0" rIns="0" tIns="0" bIns="0">
             <a:spAutoFit/>
           </a:bodyPr>
           <a:lstStyle/>
@@ -27270,7 +27093,7 @@
           <a:noFill/>
         </p:spPr>
         <p:txBody>
-          <a:bodyPr wrap="square" lIns="0" tIns="0" rIns="0" bIns="0" anchor="t">
+          <a:bodyPr wrap="square" anchor="t" lIns="0" rIns="0" tIns="0" bIns="0">
             <a:spAutoFit/>
           </a:bodyPr>
           <a:lstStyle/>
@@ -27333,7 +27156,7 @@
           </a:fontRef>
         </p:style>
         <p:txBody>
-          <a:bodyPr wrap="square" lIns="54864" tIns="0" rIns="54864" bIns="0" rtlCol="0" anchor="ctr"/>
+          <a:bodyPr rtlCol="0" anchor="ctr" wrap="square" lIns="54864" rIns="54864" tIns="0" bIns="0"/>
           <a:lstStyle/>
           <a:p>
             <a:pPr algn="ctr"/>
@@ -27394,7 +27217,6 @@
           <a:lstStyle/>
           <a:p>
             <a:pPr algn="ctr"/>
-            <a:endParaRPr/>
           </a:p>
         </p:txBody>
       </p:sp>
@@ -27415,7 +27237,7 @@
           <a:noFill/>
         </p:spPr>
         <p:txBody>
-          <a:bodyPr wrap="square" lIns="0" tIns="0" rIns="0" bIns="0" anchor="t">
+          <a:bodyPr wrap="square" anchor="t" lIns="0" rIns="0" tIns="0" bIns="0">
             <a:spAutoFit/>
           </a:bodyPr>
           <a:lstStyle/>
@@ -27454,7 +27276,7 @@
           <a:noFill/>
         </p:spPr>
         <p:txBody>
-          <a:bodyPr wrap="square" lIns="0" tIns="0" rIns="0" bIns="0" anchor="t">
+          <a:bodyPr wrap="square" anchor="t" lIns="0" rIns="0" tIns="0" bIns="0">
             <a:spAutoFit/>
           </a:bodyPr>
           <a:lstStyle/>
@@ -27517,7 +27339,7 @@
           </a:fontRef>
         </p:style>
         <p:txBody>
-          <a:bodyPr wrap="square" lIns="54864" tIns="0" rIns="54864" bIns="0" rtlCol="0" anchor="ctr"/>
+          <a:bodyPr rtlCol="0" anchor="ctr" wrap="square" lIns="54864" rIns="54864" tIns="0" bIns="0"/>
           <a:lstStyle/>
           <a:p>
             <a:pPr algn="ctr"/>
@@ -27578,7 +27400,6 @@
           <a:lstStyle/>
           <a:p>
             <a:pPr algn="ctr"/>
-            <a:endParaRPr/>
           </a:p>
         </p:txBody>
       </p:sp>
@@ -27599,7 +27420,7 @@
           <a:noFill/>
         </p:spPr>
         <p:txBody>
-          <a:bodyPr wrap="square" lIns="0" tIns="0" rIns="0" bIns="0" anchor="t">
+          <a:bodyPr wrap="square" anchor="t" lIns="0" rIns="0" tIns="0" bIns="0">
             <a:spAutoFit/>
           </a:bodyPr>
           <a:lstStyle/>
@@ -27638,7 +27459,7 @@
           <a:noFill/>
         </p:spPr>
         <p:txBody>
-          <a:bodyPr wrap="square" lIns="0" tIns="0" rIns="0" bIns="0" anchor="t">
+          <a:bodyPr wrap="square" anchor="t" lIns="0" rIns="0" tIns="0" bIns="0">
             <a:spAutoFit/>
           </a:bodyPr>
           <a:lstStyle/>
@@ -27701,7 +27522,7 @@
           </a:fontRef>
         </p:style>
         <p:txBody>
-          <a:bodyPr wrap="square" lIns="54864" tIns="0" rIns="54864" bIns="0" rtlCol="0" anchor="ctr"/>
+          <a:bodyPr rtlCol="0" anchor="ctr" wrap="square" lIns="54864" rIns="54864" tIns="0" bIns="0"/>
           <a:lstStyle/>
           <a:p>
             <a:pPr algn="ctr"/>
@@ -27734,7 +27555,7 @@
           <a:noFill/>
         </p:spPr>
         <p:txBody>
-          <a:bodyPr wrap="square" lIns="0" tIns="0" rIns="0" bIns="0" anchor="t">
+          <a:bodyPr wrap="square" anchor="t" lIns="0" rIns="0" tIns="0" bIns="0">
             <a:spAutoFit/>
           </a:bodyPr>
           <a:lstStyle/>
@@ -27773,7 +27594,7 @@
           <a:noFill/>
         </p:spPr>
         <p:txBody>
-          <a:bodyPr wrap="square" lIns="0" tIns="0" rIns="0" bIns="0" anchor="t">
+          <a:bodyPr wrap="square" anchor="t" lIns="0" rIns="0" tIns="0" bIns="0">
             <a:spAutoFit/>
           </a:bodyPr>
           <a:lstStyle/>
@@ -27812,7 +27633,7 @@
           <a:noFill/>
         </p:spPr>
         <p:txBody>
-          <a:bodyPr wrap="square" lIns="0" tIns="0" rIns="0" bIns="0" anchor="t">
+          <a:bodyPr wrap="square" anchor="t" lIns="0" rIns="0" tIns="0" bIns="0">
             <a:spAutoFit/>
           </a:bodyPr>
           <a:lstStyle/>
@@ -27839,23 +27660,11 @@
   <p:clrMapOvr>
     <a:masterClrMapping/>
   </p:clrMapOvr>
-  <mc:AlternateContent xmlns:mc="http://schemas.openxmlformats.org/markup-compatibility/2006">
-    <mc:Choice xmlns:p14="http://schemas.microsoft.com/office/powerpoint/2010/main" Requires="p14">
-      <p:transition spd="med" p14:dur="700">
-        <p:fade thruBlk="1"/>
-      </p:transition>
-    </mc:Choice>
-    <mc:Fallback>
-      <p:transition spd="med">
-        <p:fade thruBlk="1"/>
-      </p:transition>
-    </mc:Fallback>
-  </mc:AlternateContent>
 </p:sld>
 </file>
 
 <file path=ppt/slides/slide27.xml><?xml version="1.0" encoding="utf-8"?>
-<p:sld xmlns:a="http://schemas.openxmlformats.org/drawingml/2006/main" xmlns:r="http://schemas.openxmlformats.org/officeDocument/2006/relationships" xmlns:p="http://schemas.openxmlformats.org/presentationml/2006/main">
+<p:sld xmlns:a="http://schemas.openxmlformats.org/drawingml/2006/main" xmlns:p="http://schemas.openxmlformats.org/presentationml/2006/main" xmlns:r="http://schemas.openxmlformats.org/officeDocument/2006/relationships">
   <p:cSld>
     <p:spTree>
       <p:nvGrpSpPr>
@@ -27863,14 +27672,7 @@
         <p:cNvGrpSpPr/>
         <p:nvPr/>
       </p:nvGrpSpPr>
-      <p:grpSpPr>
-        <a:xfrm>
-          <a:off x="0" y="0"/>
-          <a:ext cx="0" cy="0"/>
-          <a:chOff x="0" y="0"/>
-          <a:chExt cx="0" cy="0"/>
-        </a:xfrm>
-      </p:grpSpPr>
+      <p:grpSpPr/>
       <p:pic>
         <p:nvPicPr>
           <p:cNvPr id="2" name="Picture 1" descr="bg_deep.png"/>
@@ -27880,7 +27682,7 @@
           <p:nvPr/>
         </p:nvPicPr>
         <p:blipFill>
-          <a:blip r:embed="rId3"/>
+          <a:blip r:embed="rId2"/>
           <a:stretch>
             <a:fillRect/>
           </a:stretch>
@@ -27912,7 +27714,7 @@
           <a:noFill/>
         </p:spPr>
         <p:txBody>
-          <a:bodyPr wrap="square" lIns="0" tIns="0" rIns="0" bIns="0" anchor="t">
+          <a:bodyPr wrap="square" anchor="t" lIns="0" rIns="0" tIns="0" bIns="0">
             <a:spAutoFit/>
           </a:bodyPr>
           <a:lstStyle/>
@@ -27951,7 +27753,7 @@
           <a:noFill/>
         </p:spPr>
         <p:txBody>
-          <a:bodyPr wrap="square" lIns="0" tIns="0" rIns="0" bIns="0" anchor="t">
+          <a:bodyPr wrap="square" anchor="t" lIns="0" rIns="0" tIns="0" bIns="0">
             <a:spAutoFit/>
           </a:bodyPr>
           <a:lstStyle/>
@@ -27990,7 +27792,7 @@
           <a:noFill/>
         </p:spPr>
         <p:txBody>
-          <a:bodyPr wrap="square" lIns="0" tIns="0" rIns="0" bIns="0" anchor="t">
+          <a:bodyPr wrap="square" anchor="t" lIns="0" rIns="0" tIns="0" bIns="0">
             <a:spAutoFit/>
           </a:bodyPr>
           <a:lstStyle/>
@@ -28053,7 +27855,7 @@
           </a:fontRef>
         </p:style>
         <p:txBody>
-          <a:bodyPr wrap="square" lIns="54864" tIns="0" rIns="54864" bIns="0" rtlCol="0" anchor="ctr"/>
+          <a:bodyPr rtlCol="0" anchor="ctr" wrap="square" lIns="54864" rIns="54864" tIns="0" bIns="0"/>
           <a:lstStyle/>
           <a:p>
             <a:pPr algn="ctr"/>
@@ -28086,7 +27888,7 @@
           <a:noFill/>
         </p:spPr>
         <p:txBody>
-          <a:bodyPr wrap="square" lIns="0" tIns="0" rIns="0" bIns="0" anchor="t">
+          <a:bodyPr wrap="square" anchor="t" lIns="0" rIns="0" tIns="0" bIns="0">
             <a:spAutoFit/>
           </a:bodyPr>
           <a:lstStyle/>
@@ -28149,7 +27951,7 @@
           </a:fontRef>
         </p:style>
         <p:txBody>
-          <a:bodyPr wrap="square" lIns="54864" tIns="0" rIns="54864" bIns="0" rtlCol="0" anchor="ctr"/>
+          <a:bodyPr rtlCol="0" anchor="ctr" wrap="square" lIns="54864" rIns="54864" tIns="0" bIns="0"/>
           <a:lstStyle/>
           <a:p>
             <a:pPr algn="ctr"/>
@@ -28182,7 +27984,7 @@
           <a:noFill/>
         </p:spPr>
         <p:txBody>
-          <a:bodyPr wrap="square" lIns="0" tIns="0" rIns="0" bIns="0" anchor="t">
+          <a:bodyPr wrap="square" anchor="t" lIns="0" rIns="0" tIns="0" bIns="0">
             <a:spAutoFit/>
           </a:bodyPr>
           <a:lstStyle/>
@@ -28245,7 +28047,7 @@
           </a:fontRef>
         </p:style>
         <p:txBody>
-          <a:bodyPr wrap="square" lIns="54864" tIns="0" rIns="54864" bIns="0" rtlCol="0" anchor="ctr"/>
+          <a:bodyPr rtlCol="0" anchor="ctr" wrap="square" lIns="54864" rIns="54864" tIns="0" bIns="0"/>
           <a:lstStyle/>
           <a:p>
             <a:pPr algn="ctr"/>
@@ -28278,7 +28080,7 @@
           <a:noFill/>
         </p:spPr>
         <p:txBody>
-          <a:bodyPr wrap="square" lIns="0" tIns="0" rIns="0" bIns="0" anchor="t">
+          <a:bodyPr wrap="square" anchor="t" lIns="0" rIns="0" tIns="0" bIns="0">
             <a:spAutoFit/>
           </a:bodyPr>
           <a:lstStyle/>
@@ -28341,7 +28143,7 @@
           </a:fontRef>
         </p:style>
         <p:txBody>
-          <a:bodyPr wrap="square" lIns="54864" tIns="0" rIns="54864" bIns="0" rtlCol="0" anchor="ctr"/>
+          <a:bodyPr rtlCol="0" anchor="ctr" wrap="square" lIns="54864" rIns="54864" tIns="0" bIns="0"/>
           <a:lstStyle/>
           <a:p>
             <a:pPr algn="ctr"/>
@@ -28374,7 +28176,7 @@
           <a:noFill/>
         </p:spPr>
         <p:txBody>
-          <a:bodyPr wrap="square" lIns="0" tIns="0" rIns="0" bIns="0" anchor="t">
+          <a:bodyPr wrap="square" anchor="t" lIns="0" rIns="0" tIns="0" bIns="0">
             <a:spAutoFit/>
           </a:bodyPr>
           <a:lstStyle/>
@@ -28437,7 +28239,7 @@
           </a:fontRef>
         </p:style>
         <p:txBody>
-          <a:bodyPr wrap="square" lIns="54864" tIns="0" rIns="54864" bIns="0" rtlCol="0" anchor="ctr"/>
+          <a:bodyPr rtlCol="0" anchor="ctr" wrap="square" lIns="54864" rIns="54864" tIns="0" bIns="0"/>
           <a:lstStyle/>
           <a:p>
             <a:pPr algn="ctr"/>
@@ -28470,7 +28272,7 @@
           <a:noFill/>
         </p:spPr>
         <p:txBody>
-          <a:bodyPr wrap="square" lIns="0" tIns="0" rIns="0" bIns="0" anchor="t">
+          <a:bodyPr wrap="square" anchor="t" lIns="0" rIns="0" tIns="0" bIns="0">
             <a:spAutoFit/>
           </a:bodyPr>
           <a:lstStyle/>
@@ -28533,7 +28335,7 @@
           </a:fontRef>
         </p:style>
         <p:txBody>
-          <a:bodyPr wrap="square" lIns="54864" tIns="0" rIns="54864" bIns="0" rtlCol="0" anchor="ctr"/>
+          <a:bodyPr rtlCol="0" anchor="ctr" wrap="square" lIns="54864" rIns="54864" tIns="0" bIns="0"/>
           <a:lstStyle/>
           <a:p>
             <a:pPr algn="ctr"/>
@@ -28566,7 +28368,7 @@
           <a:noFill/>
         </p:spPr>
         <p:txBody>
-          <a:bodyPr wrap="square" lIns="0" tIns="0" rIns="0" bIns="0" anchor="t">
+          <a:bodyPr wrap="square" anchor="t" lIns="0" rIns="0" tIns="0" bIns="0">
             <a:spAutoFit/>
           </a:bodyPr>
           <a:lstStyle/>
@@ -28629,7 +28431,7 @@
           </a:fontRef>
         </p:style>
         <p:txBody>
-          <a:bodyPr wrap="square" lIns="54864" tIns="0" rIns="54864" bIns="0" rtlCol="0" anchor="ctr"/>
+          <a:bodyPr rtlCol="0" anchor="ctr" wrap="square" lIns="54864" rIns="54864" tIns="0" bIns="0"/>
           <a:lstStyle/>
           <a:p>
             <a:pPr algn="ctr"/>
@@ -28662,7 +28464,7 @@
           <a:noFill/>
         </p:spPr>
         <p:txBody>
-          <a:bodyPr wrap="square" lIns="0" tIns="0" rIns="0" bIns="0" anchor="t">
+          <a:bodyPr wrap="square" anchor="t" lIns="0" rIns="0" tIns="0" bIns="0">
             <a:spAutoFit/>
           </a:bodyPr>
           <a:lstStyle/>
@@ -28725,7 +28527,7 @@
           </a:fontRef>
         </p:style>
         <p:txBody>
-          <a:bodyPr wrap="square" lIns="54864" tIns="0" rIns="54864" bIns="0" rtlCol="0" anchor="ctr"/>
+          <a:bodyPr rtlCol="0" anchor="ctr" wrap="square" lIns="54864" rIns="54864" tIns="0" bIns="0"/>
           <a:lstStyle/>
           <a:p>
             <a:pPr algn="ctr"/>
@@ -28758,7 +28560,7 @@
           <a:noFill/>
         </p:spPr>
         <p:txBody>
-          <a:bodyPr wrap="square" lIns="0" tIns="0" rIns="0" bIns="0" anchor="t">
+          <a:bodyPr wrap="square" anchor="t" lIns="0" rIns="0" tIns="0" bIns="0">
             <a:spAutoFit/>
           </a:bodyPr>
           <a:lstStyle/>
@@ -28821,7 +28623,7 @@
           </a:fontRef>
         </p:style>
         <p:txBody>
-          <a:bodyPr wrap="square" lIns="54864" tIns="0" rIns="54864" bIns="0" rtlCol="0" anchor="ctr"/>
+          <a:bodyPr rtlCol="0" anchor="ctr" wrap="square" lIns="54864" rIns="54864" tIns="0" bIns="0"/>
           <a:lstStyle/>
           <a:p>
             <a:pPr algn="ctr"/>
@@ -28854,7 +28656,7 @@
           <a:noFill/>
         </p:spPr>
         <p:txBody>
-          <a:bodyPr wrap="square" lIns="0" tIns="0" rIns="0" bIns="0" anchor="t">
+          <a:bodyPr wrap="square" anchor="t" lIns="0" rIns="0" tIns="0" bIns="0">
             <a:spAutoFit/>
           </a:bodyPr>
           <a:lstStyle/>
@@ -28893,7 +28695,7 @@
           <a:noFill/>
         </p:spPr>
         <p:txBody>
-          <a:bodyPr wrap="square" lIns="0" tIns="0" rIns="0" bIns="0" anchor="t">
+          <a:bodyPr wrap="square" anchor="t" lIns="0" rIns="0" tIns="0" bIns="0">
             <a:spAutoFit/>
           </a:bodyPr>
           <a:lstStyle/>
@@ -28932,7 +28734,7 @@
           <a:noFill/>
         </p:spPr>
         <p:txBody>
-          <a:bodyPr wrap="square" lIns="0" tIns="0" rIns="0" bIns="0" anchor="t">
+          <a:bodyPr wrap="square" anchor="t" lIns="0" rIns="0" tIns="0" bIns="0">
             <a:spAutoFit/>
           </a:bodyPr>
           <a:lstStyle/>
@@ -28959,23 +28761,11 @@
   <p:clrMapOvr>
     <a:masterClrMapping/>
   </p:clrMapOvr>
-  <mc:AlternateContent xmlns:mc="http://schemas.openxmlformats.org/markup-compatibility/2006">
-    <mc:Choice xmlns:p14="http://schemas.microsoft.com/office/powerpoint/2010/main" Requires="p14">
-      <p:transition spd="med" p14:dur="700">
-        <p:fade thruBlk="1"/>
-      </p:transition>
-    </mc:Choice>
-    <mc:Fallback>
-      <p:transition spd="med">
-        <p:fade thruBlk="1"/>
-      </p:transition>
-    </mc:Fallback>
-  </mc:AlternateContent>
 </p:sld>
 </file>
 
 <file path=ppt/slides/slide28.xml><?xml version="1.0" encoding="utf-8"?>
-<p:sld xmlns:a="http://schemas.openxmlformats.org/drawingml/2006/main" xmlns:r="http://schemas.openxmlformats.org/officeDocument/2006/relationships" xmlns:p="http://schemas.openxmlformats.org/presentationml/2006/main">
+<p:sld xmlns:a="http://schemas.openxmlformats.org/drawingml/2006/main" xmlns:p="http://schemas.openxmlformats.org/presentationml/2006/main" xmlns:r="http://schemas.openxmlformats.org/officeDocument/2006/relationships">
   <p:cSld>
     <p:spTree>
       <p:nvGrpSpPr>
@@ -28983,14 +28773,7 @@
         <p:cNvGrpSpPr/>
         <p:nvPr/>
       </p:nvGrpSpPr>
-      <p:grpSpPr>
-        <a:xfrm>
-          <a:off x="0" y="0"/>
-          <a:ext cx="0" cy="0"/>
-          <a:chOff x="0" y="0"/>
-          <a:chExt cx="0" cy="0"/>
-        </a:xfrm>
-      </p:grpSpPr>
+      <p:grpSpPr/>
       <p:pic>
         <p:nvPicPr>
           <p:cNvPr id="2" name="Picture 1" descr="bg_deep.png"/>
@@ -29032,7 +28815,7 @@
           <a:noFill/>
         </p:spPr>
         <p:txBody>
-          <a:bodyPr wrap="square" lIns="0" tIns="0" rIns="0" bIns="0" anchor="t">
+          <a:bodyPr wrap="square" anchor="t" lIns="0" rIns="0" tIns="0" bIns="0">
             <a:spAutoFit/>
           </a:bodyPr>
           <a:lstStyle/>
@@ -29071,7 +28854,7 @@
           <a:noFill/>
         </p:spPr>
         <p:txBody>
-          <a:bodyPr wrap="square" lIns="0" tIns="0" rIns="0" bIns="0" anchor="t">
+          <a:bodyPr wrap="square" anchor="t" lIns="0" rIns="0" tIns="0" bIns="0">
             <a:spAutoFit/>
           </a:bodyPr>
           <a:lstStyle/>
@@ -29138,7 +28921,6 @@
           <a:lstStyle/>
           <a:p>
             <a:pPr algn="ctr"/>
-            <a:endParaRPr/>
           </a:p>
         </p:txBody>
       </p:sp>
@@ -29159,7 +28941,7 @@
           <a:noFill/>
         </p:spPr>
         <p:txBody>
-          <a:bodyPr wrap="square" lIns="0" tIns="0" rIns="0" bIns="0" anchor="t">
+          <a:bodyPr wrap="square" anchor="t" lIns="0" rIns="0" tIns="0" bIns="0">
             <a:spAutoFit/>
           </a:bodyPr>
           <a:lstStyle/>
@@ -29198,7 +28980,7 @@
           <a:noFill/>
         </p:spPr>
         <p:txBody>
-          <a:bodyPr wrap="square" lIns="0" tIns="0" rIns="0" bIns="0" anchor="t">
+          <a:bodyPr wrap="square" anchor="t" lIns="0" rIns="0" tIns="0" bIns="0">
             <a:spAutoFit/>
           </a:bodyPr>
           <a:lstStyle/>
@@ -29237,7 +29019,7 @@
           <a:noFill/>
         </p:spPr>
         <p:txBody>
-          <a:bodyPr wrap="square" lIns="0" tIns="0" rIns="0" bIns="0" anchor="t">
+          <a:bodyPr wrap="square" anchor="t" lIns="0" rIns="0" tIns="0" bIns="0">
             <a:spAutoFit/>
           </a:bodyPr>
           <a:lstStyle/>
@@ -29276,7 +29058,7 @@
           <a:noFill/>
         </p:spPr>
         <p:txBody>
-          <a:bodyPr wrap="square" lIns="0" tIns="0" rIns="0" bIns="0" anchor="t">
+          <a:bodyPr wrap="square" anchor="t" lIns="0" rIns="0" tIns="0" bIns="0">
             <a:spAutoFit/>
           </a:bodyPr>
           <a:lstStyle/>
@@ -29315,7 +29097,7 @@
           <a:noFill/>
         </p:spPr>
         <p:txBody>
-          <a:bodyPr wrap="square" lIns="0" tIns="0" rIns="0" bIns="0" anchor="t">
+          <a:bodyPr wrap="square" anchor="t" lIns="0" rIns="0" tIns="0" bIns="0">
             <a:spAutoFit/>
           </a:bodyPr>
           <a:lstStyle/>
@@ -29382,7 +29164,6 @@
           <a:lstStyle/>
           <a:p>
             <a:pPr algn="ctr"/>
-            <a:endParaRPr/>
           </a:p>
         </p:txBody>
       </p:sp>
@@ -29403,7 +29184,7 @@
           <a:noFill/>
         </p:spPr>
         <p:txBody>
-          <a:bodyPr wrap="square" lIns="0" tIns="0" rIns="0" bIns="0" anchor="t">
+          <a:bodyPr wrap="square" anchor="t" lIns="0" rIns="0" tIns="0" bIns="0">
             <a:spAutoFit/>
           </a:bodyPr>
           <a:lstStyle/>
@@ -29442,7 +29223,7 @@
           <a:noFill/>
         </p:spPr>
         <p:txBody>
-          <a:bodyPr wrap="square" lIns="0" tIns="0" rIns="0" bIns="0" anchor="t">
+          <a:bodyPr wrap="square" anchor="t" lIns="0" rIns="0" tIns="0" bIns="0">
             <a:spAutoFit/>
           </a:bodyPr>
           <a:lstStyle/>
@@ -29481,7 +29262,7 @@
           <a:noFill/>
         </p:spPr>
         <p:txBody>
-          <a:bodyPr wrap="square" lIns="0" tIns="0" rIns="0" bIns="0" anchor="t">
+          <a:bodyPr wrap="square" anchor="t" lIns="0" rIns="0" tIns="0" bIns="0">
             <a:spAutoFit/>
           </a:bodyPr>
           <a:lstStyle/>
@@ -29520,7 +29301,7 @@
           <a:noFill/>
         </p:spPr>
         <p:txBody>
-          <a:bodyPr wrap="square" lIns="0" tIns="0" rIns="0" bIns="0" anchor="t">
+          <a:bodyPr wrap="square" anchor="t" lIns="0" rIns="0" tIns="0" bIns="0">
             <a:spAutoFit/>
           </a:bodyPr>
           <a:lstStyle/>
@@ -29559,7 +29340,7 @@
           <a:noFill/>
         </p:spPr>
         <p:txBody>
-          <a:bodyPr wrap="square" lIns="0" tIns="0" rIns="0" bIns="0" anchor="t">
+          <a:bodyPr wrap="square" anchor="t" lIns="0" rIns="0" tIns="0" bIns="0">
             <a:spAutoFit/>
           </a:bodyPr>
           <a:lstStyle/>
@@ -29626,7 +29407,6 @@
           <a:lstStyle/>
           <a:p>
             <a:pPr algn="ctr"/>
-            <a:endParaRPr/>
           </a:p>
         </p:txBody>
       </p:sp>
@@ -29647,7 +29427,7 @@
           <a:noFill/>
         </p:spPr>
         <p:txBody>
-          <a:bodyPr wrap="square" lIns="0" tIns="0" rIns="0" bIns="0" anchor="t">
+          <a:bodyPr wrap="square" anchor="t" lIns="0" rIns="0" tIns="0" bIns="0">
             <a:spAutoFit/>
           </a:bodyPr>
           <a:lstStyle/>
@@ -29686,7 +29466,7 @@
           <a:noFill/>
         </p:spPr>
         <p:txBody>
-          <a:bodyPr wrap="square" lIns="0" tIns="0" rIns="0" bIns="0" anchor="t">
+          <a:bodyPr wrap="square" anchor="t" lIns="0" rIns="0" tIns="0" bIns="0">
             <a:spAutoFit/>
           </a:bodyPr>
           <a:lstStyle/>
@@ -29725,7 +29505,7 @@
           <a:noFill/>
         </p:spPr>
         <p:txBody>
-          <a:bodyPr wrap="square" lIns="0" tIns="0" rIns="0" bIns="0" anchor="t">
+          <a:bodyPr wrap="square" anchor="t" lIns="0" rIns="0" tIns="0" bIns="0">
             <a:spAutoFit/>
           </a:bodyPr>
           <a:lstStyle/>
@@ -29764,7 +29544,7 @@
           <a:noFill/>
         </p:spPr>
         <p:txBody>
-          <a:bodyPr wrap="square" lIns="0" tIns="0" rIns="0" bIns="0" anchor="t">
+          <a:bodyPr wrap="square" anchor="t" lIns="0" rIns="0" tIns="0" bIns="0">
             <a:spAutoFit/>
           </a:bodyPr>
           <a:lstStyle/>
@@ -29803,7 +29583,7 @@
           <a:noFill/>
         </p:spPr>
         <p:txBody>
-          <a:bodyPr wrap="square" lIns="0" tIns="0" rIns="0" bIns="0" anchor="t">
+          <a:bodyPr wrap="square" anchor="t" lIns="0" rIns="0" tIns="0" bIns="0">
             <a:spAutoFit/>
           </a:bodyPr>
           <a:lstStyle/>
@@ -29842,7 +29622,7 @@
           <a:noFill/>
         </p:spPr>
         <p:txBody>
-          <a:bodyPr wrap="square" lIns="0" tIns="0" rIns="0" bIns="0" anchor="t">
+          <a:bodyPr wrap="square" anchor="t" lIns="0" rIns="0" tIns="0" bIns="0">
             <a:spAutoFit/>
           </a:bodyPr>
           <a:lstStyle/>
@@ -29881,7 +29661,7 @@
           <a:noFill/>
         </p:spPr>
         <p:txBody>
-          <a:bodyPr wrap="square" lIns="0" tIns="0" rIns="0" bIns="0" anchor="t">
+          <a:bodyPr wrap="square" anchor="t" lIns="0" rIns="0" tIns="0" bIns="0">
             <a:spAutoFit/>
           </a:bodyPr>
           <a:lstStyle/>
@@ -29920,7 +29700,7 @@
           <a:noFill/>
         </p:spPr>
         <p:txBody>
-          <a:bodyPr wrap="square" lIns="0" tIns="0" rIns="0" bIns="0" anchor="t">
+          <a:bodyPr wrap="square" anchor="t" lIns="0" rIns="0" tIns="0" bIns="0">
             <a:spAutoFit/>
           </a:bodyPr>
           <a:lstStyle/>
@@ -29959,7 +29739,7 @@
           <a:noFill/>
         </p:spPr>
         <p:txBody>
-          <a:bodyPr wrap="square" lIns="0" tIns="0" rIns="0" bIns="0" anchor="t">
+          <a:bodyPr wrap="square" anchor="t" lIns="0" rIns="0" tIns="0" bIns="0">
             <a:spAutoFit/>
           </a:bodyPr>
           <a:lstStyle/>
@@ -29986,23 +29766,11 @@
   <p:clrMapOvr>
     <a:masterClrMapping/>
   </p:clrMapOvr>
-  <mc:AlternateContent xmlns:mc="http://schemas.openxmlformats.org/markup-compatibility/2006">
-    <mc:Choice xmlns:p14="http://schemas.microsoft.com/office/powerpoint/2010/main" Requires="p14">
-      <p:transition spd="med" p14:dur="700">
-        <p:fade thruBlk="1"/>
-      </p:transition>
-    </mc:Choice>
-    <mc:Fallback>
-      <p:transition spd="med">
-        <p:fade thruBlk="1"/>
-      </p:transition>
-    </mc:Fallback>
-  </mc:AlternateContent>
 </p:sld>
 </file>
 
 <file path=ppt/slides/slide29.xml><?xml version="1.0" encoding="utf-8"?>
-<p:sld xmlns:a="http://schemas.openxmlformats.org/drawingml/2006/main" xmlns:r="http://schemas.openxmlformats.org/officeDocument/2006/relationships" xmlns:p="http://schemas.openxmlformats.org/presentationml/2006/main">
+<p:sld xmlns:a="http://schemas.openxmlformats.org/drawingml/2006/main" xmlns:p="http://schemas.openxmlformats.org/presentationml/2006/main" xmlns:r="http://schemas.openxmlformats.org/officeDocument/2006/relationships">
   <p:cSld>
     <p:spTree>
       <p:nvGrpSpPr>
@@ -30010,14 +29778,7 @@
         <p:cNvGrpSpPr/>
         <p:nvPr/>
       </p:nvGrpSpPr>
-      <p:grpSpPr>
-        <a:xfrm>
-          <a:off x="0" y="0"/>
-          <a:ext cx="0" cy="0"/>
-          <a:chOff x="0" y="0"/>
-          <a:chExt cx="0" cy="0"/>
-        </a:xfrm>
-      </p:grpSpPr>
+      <p:grpSpPr/>
       <p:pic>
         <p:nvPicPr>
           <p:cNvPr id="2" name="Picture 1" descr="bg_deep.png"/>
@@ -30059,7 +29820,7 @@
           <a:noFill/>
         </p:spPr>
         <p:txBody>
-          <a:bodyPr wrap="square" lIns="0" tIns="0" rIns="0" bIns="0" anchor="t">
+          <a:bodyPr wrap="square" anchor="t" lIns="0" rIns="0" tIns="0" bIns="0">
             <a:spAutoFit/>
           </a:bodyPr>
           <a:lstStyle/>
@@ -30098,7 +29859,7 @@
           <a:noFill/>
         </p:spPr>
         <p:txBody>
-          <a:bodyPr wrap="square" lIns="0" tIns="0" rIns="0" bIns="0" anchor="t">
+          <a:bodyPr wrap="square" anchor="t" lIns="0" rIns="0" tIns="0" bIns="0">
             <a:spAutoFit/>
           </a:bodyPr>
           <a:lstStyle/>
@@ -30137,7 +29898,7 @@
           <a:noFill/>
         </p:spPr>
         <p:txBody>
-          <a:bodyPr wrap="square" lIns="0" tIns="0" rIns="0" bIns="0" anchor="t">
+          <a:bodyPr wrap="square" anchor="t" lIns="0" rIns="0" tIns="0" bIns="0">
             <a:spAutoFit/>
           </a:bodyPr>
           <a:lstStyle/>
@@ -30200,7 +29961,7 @@
           </a:fontRef>
         </p:style>
         <p:txBody>
-          <a:bodyPr wrap="square" lIns="73152" tIns="36576" rIns="73152" bIns="36576" rtlCol="0" anchor="ctr"/>
+          <a:bodyPr rtlCol="0" anchor="ctr" wrap="square" lIns="73152" rIns="73152" tIns="36576" bIns="36576"/>
           <a:lstStyle/>
           <a:p>
             <a:pPr algn="ctr"/>
@@ -30273,7 +30034,7 @@
           </a:fontRef>
         </p:style>
         <p:txBody>
-          <a:bodyPr wrap="square" lIns="73152" tIns="36576" rIns="73152" bIns="36576" rtlCol="0" anchor="ctr"/>
+          <a:bodyPr rtlCol="0" anchor="ctr" wrap="square" lIns="73152" rIns="73152" tIns="36576" bIns="36576"/>
           <a:lstStyle/>
           <a:p>
             <a:pPr algn="ctr"/>
@@ -30346,7 +30107,7 @@
           </a:fontRef>
         </p:style>
         <p:txBody>
-          <a:bodyPr wrap="square" lIns="73152" tIns="36576" rIns="73152" bIns="36576" rtlCol="0" anchor="ctr"/>
+          <a:bodyPr rtlCol="0" anchor="ctr" wrap="square" lIns="73152" rIns="73152" tIns="36576" bIns="36576"/>
           <a:lstStyle/>
           <a:p>
             <a:pPr algn="ctr"/>
@@ -30419,7 +30180,7 @@
           </a:fontRef>
         </p:style>
         <p:txBody>
-          <a:bodyPr wrap="square" lIns="73152" tIns="36576" rIns="73152" bIns="36576" rtlCol="0" anchor="ctr"/>
+          <a:bodyPr rtlCol="0" anchor="ctr" wrap="square" lIns="73152" rIns="73152" tIns="36576" bIns="36576"/>
           <a:lstStyle/>
           <a:p>
             <a:pPr algn="ctr"/>
@@ -30496,7 +30257,6 @@
           <a:lstStyle/>
           <a:p>
             <a:pPr algn="ctr"/>
-            <a:endParaRPr/>
           </a:p>
         </p:txBody>
       </p:sp>
@@ -30517,7 +30277,7 @@
           <a:noFill/>
         </p:spPr>
         <p:txBody>
-          <a:bodyPr wrap="square" lIns="0" tIns="0" rIns="0" bIns="0" anchor="t">
+          <a:bodyPr wrap="square" anchor="t" lIns="0" rIns="0" tIns="0" bIns="0">
             <a:spAutoFit/>
           </a:bodyPr>
           <a:lstStyle/>
@@ -30572,7 +30332,7 @@
           <a:noFill/>
         </p:spPr>
         <p:txBody>
-          <a:bodyPr wrap="square" lIns="0" tIns="0" rIns="0" bIns="0" anchor="t">
+          <a:bodyPr wrap="square" anchor="t" lIns="0" rIns="0" tIns="0" bIns="0">
             <a:spAutoFit/>
           </a:bodyPr>
           <a:lstStyle/>
@@ -30611,7 +30371,7 @@
           <a:noFill/>
         </p:spPr>
         <p:txBody>
-          <a:bodyPr wrap="square" lIns="0" tIns="0" rIns="0" bIns="0" anchor="t">
+          <a:bodyPr wrap="square" anchor="t" lIns="0" rIns="0" tIns="0" bIns="0">
             <a:spAutoFit/>
           </a:bodyPr>
           <a:lstStyle/>
@@ -30650,7 +30410,7 @@
           <a:noFill/>
         </p:spPr>
         <p:txBody>
-          <a:bodyPr wrap="square" lIns="0" tIns="0" rIns="0" bIns="0" anchor="t">
+          <a:bodyPr wrap="square" anchor="t" lIns="0" rIns="0" tIns="0" bIns="0">
             <a:spAutoFit/>
           </a:bodyPr>
           <a:lstStyle/>
@@ -30677,23 +30437,11 @@
   <p:clrMapOvr>
     <a:masterClrMapping/>
   </p:clrMapOvr>
-  <mc:AlternateContent xmlns:mc="http://schemas.openxmlformats.org/markup-compatibility/2006">
-    <mc:Choice xmlns:p14="http://schemas.microsoft.com/office/powerpoint/2010/main" Requires="p14">
-      <p:transition spd="med" p14:dur="700">
-        <p:fade thruBlk="1"/>
-      </p:transition>
-    </mc:Choice>
-    <mc:Fallback>
-      <p:transition spd="med">
-        <p:fade thruBlk="1"/>
-      </p:transition>
-    </mc:Fallback>
-  </mc:AlternateContent>
 </p:sld>
 </file>
 
 <file path=ppt/slides/slide3.xml><?xml version="1.0" encoding="utf-8"?>
-<p:sld xmlns:a="http://schemas.openxmlformats.org/drawingml/2006/main" xmlns:r="http://schemas.openxmlformats.org/officeDocument/2006/relationships" xmlns:p="http://schemas.openxmlformats.org/presentationml/2006/main">
+<p:sld xmlns:a="http://schemas.openxmlformats.org/drawingml/2006/main" xmlns:p="http://schemas.openxmlformats.org/presentationml/2006/main" xmlns:r="http://schemas.openxmlformats.org/officeDocument/2006/relationships">
   <p:cSld>
     <p:spTree>
       <p:nvGrpSpPr>
@@ -30701,14 +30449,7 @@
         <p:cNvGrpSpPr/>
         <p:nvPr/>
       </p:nvGrpSpPr>
-      <p:grpSpPr>
-        <a:xfrm>
-          <a:off x="0" y="0"/>
-          <a:ext cx="0" cy="0"/>
-          <a:chOff x="0" y="0"/>
-          <a:chExt cx="0" cy="0"/>
-        </a:xfrm>
-      </p:grpSpPr>
+      <p:grpSpPr/>
       <p:pic>
         <p:nvPicPr>
           <p:cNvPr id="2" name="Picture 1" descr="bg_deep.png"/>
@@ -30718,7 +30459,7 @@
           <p:nvPr/>
         </p:nvPicPr>
         <p:blipFill>
-          <a:blip r:embed="rId3"/>
+          <a:blip r:embed="rId2"/>
           <a:stretch>
             <a:fillRect/>
           </a:stretch>
@@ -30750,7 +30491,7 @@
           <a:noFill/>
         </p:spPr>
         <p:txBody>
-          <a:bodyPr wrap="square" lIns="0" tIns="0" rIns="0" bIns="0" anchor="t">
+          <a:bodyPr wrap="square" anchor="t" lIns="0" rIns="0" tIns="0" bIns="0">
             <a:spAutoFit/>
           </a:bodyPr>
           <a:lstStyle/>
@@ -30789,7 +30530,7 @@
           <a:noFill/>
         </p:spPr>
         <p:txBody>
-          <a:bodyPr wrap="square" lIns="0" tIns="0" rIns="0" bIns="0" anchor="t">
+          <a:bodyPr wrap="square" anchor="t" lIns="0" rIns="0" tIns="0" bIns="0">
             <a:spAutoFit/>
           </a:bodyPr>
           <a:lstStyle/>
@@ -30852,7 +30593,7 @@
           </a:fontRef>
         </p:style>
         <p:txBody>
-          <a:bodyPr wrap="square" lIns="73152" tIns="36576" rIns="73152" bIns="36576" rtlCol="0" anchor="ctr"/>
+          <a:bodyPr rtlCol="0" anchor="ctr" wrap="square" lIns="73152" rIns="73152" tIns="36576" bIns="36576"/>
           <a:lstStyle/>
           <a:p>
             <a:pPr algn="ctr"/>
@@ -30961,7 +30702,7 @@
           </a:fontRef>
         </p:style>
         <p:txBody>
-          <a:bodyPr wrap="square" lIns="73152" tIns="36576" rIns="73152" bIns="36576" rtlCol="0" anchor="ctr"/>
+          <a:bodyPr rtlCol="0" anchor="ctr" wrap="square" lIns="73152" rIns="73152" tIns="36576" bIns="36576"/>
           <a:lstStyle/>
           <a:p>
             <a:pPr algn="ctr"/>
@@ -31070,7 +30811,7 @@
           </a:fontRef>
         </p:style>
         <p:txBody>
-          <a:bodyPr wrap="square" lIns="73152" tIns="36576" rIns="73152" bIns="36576" rtlCol="0" anchor="ctr"/>
+          <a:bodyPr rtlCol="0" anchor="ctr" wrap="square" lIns="73152" rIns="73152" tIns="36576" bIns="36576"/>
           <a:lstStyle/>
           <a:p>
             <a:pPr algn="ctr"/>
@@ -31181,7 +30922,7 @@
           </a:fontRef>
         </p:style>
         <p:txBody>
-          <a:bodyPr wrap="square" lIns="73152" tIns="36576" rIns="73152" bIns="36576" rtlCol="0" anchor="ctr"/>
+          <a:bodyPr rtlCol="0" anchor="ctr" wrap="square" lIns="73152" rIns="73152" tIns="36576" bIns="36576"/>
           <a:lstStyle/>
           <a:p>
             <a:pPr algn="ctr"/>
@@ -31291,7 +31032,7 @@
           </a:fontRef>
         </p:style>
         <p:txBody>
-          <a:bodyPr wrap="square" lIns="73152" tIns="36576" rIns="73152" bIns="36576" rtlCol="0" anchor="ctr"/>
+          <a:bodyPr rtlCol="0" anchor="ctr" wrap="square" lIns="73152" rIns="73152" tIns="36576" bIns="36576"/>
           <a:lstStyle/>
           <a:p>
             <a:pPr algn="ctr"/>
@@ -31401,7 +31142,7 @@
           </a:fontRef>
         </p:style>
         <p:txBody>
-          <a:bodyPr wrap="square" lIns="73152" tIns="36576" rIns="73152" bIns="36576" rtlCol="0" anchor="ctr"/>
+          <a:bodyPr rtlCol="0" anchor="ctr" wrap="square" lIns="73152" rIns="73152" tIns="36576" bIns="36576"/>
           <a:lstStyle/>
           <a:p>
             <a:pPr algn="ctr"/>
@@ -31479,7 +31220,6 @@
           <a:lstStyle/>
           <a:p>
             <a:pPr algn="ctr"/>
-            <a:endParaRPr/>
           </a:p>
         </p:txBody>
       </p:sp>
@@ -31500,7 +31240,7 @@
           <a:noFill/>
         </p:spPr>
         <p:txBody>
-          <a:bodyPr wrap="square" lIns="0" tIns="0" rIns="0" bIns="0" anchor="t">
+          <a:bodyPr wrap="square" anchor="t" lIns="0" rIns="0" tIns="0" bIns="0">
             <a:spAutoFit/>
           </a:bodyPr>
           <a:lstStyle/>
@@ -31539,7 +31279,7 @@
           <a:noFill/>
         </p:spPr>
         <p:txBody>
-          <a:bodyPr wrap="square" lIns="0" tIns="0" rIns="0" bIns="0" anchor="t">
+          <a:bodyPr wrap="square" anchor="t" lIns="0" rIns="0" tIns="0" bIns="0">
             <a:spAutoFit/>
           </a:bodyPr>
           <a:lstStyle/>
@@ -31578,7 +31318,7 @@
           <a:noFill/>
         </p:spPr>
         <p:txBody>
-          <a:bodyPr wrap="square" lIns="0" tIns="0" rIns="0" bIns="0" anchor="t">
+          <a:bodyPr wrap="square" anchor="t" lIns="0" rIns="0" tIns="0" bIns="0">
             <a:spAutoFit/>
           </a:bodyPr>
           <a:lstStyle/>
@@ -31605,23 +31345,11 @@
   <p:clrMapOvr>
     <a:masterClrMapping/>
   </p:clrMapOvr>
-  <mc:AlternateContent xmlns:mc="http://schemas.openxmlformats.org/markup-compatibility/2006">
-    <mc:Choice xmlns:p14="http://schemas.microsoft.com/office/powerpoint/2010/main" Requires="p14">
-      <p:transition spd="med" p14:dur="700">
-        <p:fade thruBlk="1"/>
-      </p:transition>
-    </mc:Choice>
-    <mc:Fallback>
-      <p:transition spd="med">
-        <p:fade thruBlk="1"/>
-      </p:transition>
-    </mc:Fallback>
-  </mc:AlternateContent>
 </p:sld>
 </file>
 
 <file path=ppt/slides/slide30.xml><?xml version="1.0" encoding="utf-8"?>
-<p:sld xmlns:a="http://schemas.openxmlformats.org/drawingml/2006/main" xmlns:r="http://schemas.openxmlformats.org/officeDocument/2006/relationships" xmlns:p="http://schemas.openxmlformats.org/presentationml/2006/main">
+<p:sld xmlns:a="http://schemas.openxmlformats.org/drawingml/2006/main" xmlns:p="http://schemas.openxmlformats.org/presentationml/2006/main" xmlns:r="http://schemas.openxmlformats.org/officeDocument/2006/relationships">
   <p:cSld>
     <p:spTree>
       <p:nvGrpSpPr>
@@ -31629,14 +31357,7 @@
         <p:cNvGrpSpPr/>
         <p:nvPr/>
       </p:nvGrpSpPr>
-      <p:grpSpPr>
-        <a:xfrm>
-          <a:off x="0" y="0"/>
-          <a:ext cx="0" cy="0"/>
-          <a:chOff x="0" y="0"/>
-          <a:chExt cx="0" cy="0"/>
-        </a:xfrm>
-      </p:grpSpPr>
+      <p:grpSpPr/>
       <p:pic>
         <p:nvPicPr>
           <p:cNvPr id="2" name="Picture 1" descr="bg_deep.png"/>
@@ -31678,7 +31399,7 @@
           <a:noFill/>
         </p:spPr>
         <p:txBody>
-          <a:bodyPr wrap="square" lIns="0" tIns="0" rIns="0" bIns="0" anchor="t">
+          <a:bodyPr wrap="square" anchor="t" lIns="0" rIns="0" tIns="0" bIns="0">
             <a:spAutoFit/>
           </a:bodyPr>
           <a:lstStyle/>
@@ -31717,7 +31438,7 @@
           <a:noFill/>
         </p:spPr>
         <p:txBody>
-          <a:bodyPr wrap="square" lIns="0" tIns="0" rIns="0" bIns="0" anchor="t">
+          <a:bodyPr wrap="square" anchor="t" lIns="0" rIns="0" tIns="0" bIns="0">
             <a:spAutoFit/>
           </a:bodyPr>
           <a:lstStyle/>
@@ -31756,7 +31477,7 @@
           <a:noFill/>
         </p:spPr>
         <p:txBody>
-          <a:bodyPr wrap="square" lIns="0" tIns="0" rIns="0" bIns="0" anchor="t">
+          <a:bodyPr wrap="square" anchor="t" lIns="0" rIns="0" tIns="0" bIns="0">
             <a:spAutoFit/>
           </a:bodyPr>
           <a:lstStyle/>
@@ -31823,7 +31544,6 @@
           <a:lstStyle/>
           <a:p>
             <a:pPr algn="ctr"/>
-            <a:endParaRPr/>
           </a:p>
         </p:txBody>
       </p:sp>
@@ -31844,7 +31564,7 @@
           <a:noFill/>
         </p:spPr>
         <p:txBody>
-          <a:bodyPr wrap="square" lIns="0" tIns="0" rIns="0" bIns="0" anchor="t">
+          <a:bodyPr wrap="square" anchor="t" lIns="0" rIns="0" tIns="0" bIns="0">
             <a:spAutoFit/>
           </a:bodyPr>
           <a:lstStyle/>
@@ -31883,7 +31603,7 @@
           <a:noFill/>
         </p:spPr>
         <p:txBody>
-          <a:bodyPr wrap="square" lIns="0" tIns="0" rIns="0" bIns="0" anchor="t">
+          <a:bodyPr wrap="square" anchor="t" lIns="0" rIns="0" tIns="0" bIns="0">
             <a:spAutoFit/>
           </a:bodyPr>
           <a:lstStyle/>
@@ -31950,7 +31670,6 @@
           <a:lstStyle/>
           <a:p>
             <a:pPr algn="ctr"/>
-            <a:endParaRPr/>
           </a:p>
         </p:txBody>
       </p:sp>
@@ -31971,7 +31690,7 @@
           <a:noFill/>
         </p:spPr>
         <p:txBody>
-          <a:bodyPr wrap="square" lIns="0" tIns="0" rIns="0" bIns="0" anchor="t">
+          <a:bodyPr wrap="square" anchor="t" lIns="0" rIns="0" tIns="0" bIns="0">
             <a:spAutoFit/>
           </a:bodyPr>
           <a:lstStyle/>
@@ -32010,7 +31729,7 @@
           <a:noFill/>
         </p:spPr>
         <p:txBody>
-          <a:bodyPr wrap="square" lIns="0" tIns="0" rIns="0" bIns="0" anchor="t">
+          <a:bodyPr wrap="square" anchor="t" lIns="0" rIns="0" tIns="0" bIns="0">
             <a:spAutoFit/>
           </a:bodyPr>
           <a:lstStyle/>
@@ -32077,7 +31796,6 @@
           <a:lstStyle/>
           <a:p>
             <a:pPr algn="ctr"/>
-            <a:endParaRPr/>
           </a:p>
         </p:txBody>
       </p:sp>
@@ -32098,7 +31816,7 @@
           <a:noFill/>
         </p:spPr>
         <p:txBody>
-          <a:bodyPr wrap="square" lIns="0" tIns="0" rIns="0" bIns="0" anchor="t">
+          <a:bodyPr wrap="square" anchor="t" lIns="0" rIns="0" tIns="0" bIns="0">
             <a:spAutoFit/>
           </a:bodyPr>
           <a:lstStyle/>
@@ -32137,7 +31855,7 @@
           <a:noFill/>
         </p:spPr>
         <p:txBody>
-          <a:bodyPr wrap="square" lIns="0" tIns="0" rIns="0" bIns="0" anchor="t">
+          <a:bodyPr wrap="square" anchor="t" lIns="0" rIns="0" tIns="0" bIns="0">
             <a:spAutoFit/>
           </a:bodyPr>
           <a:lstStyle/>
@@ -32204,7 +31922,6 @@
           <a:lstStyle/>
           <a:p>
             <a:pPr algn="ctr"/>
-            <a:endParaRPr/>
           </a:p>
         </p:txBody>
       </p:sp>
@@ -32225,7 +31942,7 @@
           <a:noFill/>
         </p:spPr>
         <p:txBody>
-          <a:bodyPr wrap="square" lIns="0" tIns="0" rIns="0" bIns="0" anchor="t">
+          <a:bodyPr wrap="square" anchor="t" lIns="0" rIns="0" tIns="0" bIns="0">
             <a:spAutoFit/>
           </a:bodyPr>
           <a:lstStyle/>
@@ -32264,7 +31981,7 @@
           <a:noFill/>
         </p:spPr>
         <p:txBody>
-          <a:bodyPr wrap="square" lIns="0" tIns="0" rIns="0" bIns="0" anchor="t">
+          <a:bodyPr wrap="square" anchor="t" lIns="0" rIns="0" tIns="0" bIns="0">
             <a:spAutoFit/>
           </a:bodyPr>
           <a:lstStyle/>
@@ -32331,7 +32048,6 @@
           <a:lstStyle/>
           <a:p>
             <a:pPr algn="ctr"/>
-            <a:endParaRPr/>
           </a:p>
         </p:txBody>
       </p:sp>
@@ -32352,7 +32068,7 @@
           <a:noFill/>
         </p:spPr>
         <p:txBody>
-          <a:bodyPr wrap="square" lIns="0" tIns="0" rIns="0" bIns="0" anchor="t">
+          <a:bodyPr wrap="square" anchor="t" lIns="0" rIns="0" tIns="0" bIns="0">
             <a:spAutoFit/>
           </a:bodyPr>
           <a:lstStyle/>
@@ -32391,7 +32107,7 @@
           <a:noFill/>
         </p:spPr>
         <p:txBody>
-          <a:bodyPr wrap="square" lIns="0" tIns="0" rIns="0" bIns="0" anchor="t">
+          <a:bodyPr wrap="square" anchor="t" lIns="0" rIns="0" tIns="0" bIns="0">
             <a:spAutoFit/>
           </a:bodyPr>
           <a:lstStyle/>
@@ -32430,7 +32146,7 @@
           <a:noFill/>
         </p:spPr>
         <p:txBody>
-          <a:bodyPr wrap="square" lIns="0" tIns="0" rIns="0" bIns="0" anchor="t">
+          <a:bodyPr wrap="square" anchor="t" lIns="0" rIns="0" tIns="0" bIns="0">
             <a:spAutoFit/>
           </a:bodyPr>
           <a:lstStyle/>
@@ -32469,7 +32185,7 @@
           <a:noFill/>
         </p:spPr>
         <p:txBody>
-          <a:bodyPr wrap="square" lIns="0" tIns="0" rIns="0" bIns="0" anchor="t">
+          <a:bodyPr wrap="square" anchor="t" lIns="0" rIns="0" tIns="0" bIns="0">
             <a:spAutoFit/>
           </a:bodyPr>
           <a:lstStyle/>
@@ -32496,23 +32212,11 @@
   <p:clrMapOvr>
     <a:masterClrMapping/>
   </p:clrMapOvr>
-  <mc:AlternateContent xmlns:mc="http://schemas.openxmlformats.org/markup-compatibility/2006">
-    <mc:Choice xmlns:p14="http://schemas.microsoft.com/office/powerpoint/2010/main" Requires="p14">
-      <p:transition spd="med" p14:dur="700">
-        <p:fade thruBlk="1"/>
-      </p:transition>
-    </mc:Choice>
-    <mc:Fallback>
-      <p:transition spd="med">
-        <p:fade thruBlk="1"/>
-      </p:transition>
-    </mc:Fallback>
-  </mc:AlternateContent>
 </p:sld>
 </file>
 
 <file path=ppt/slides/slide31.xml><?xml version="1.0" encoding="utf-8"?>
-<p:sld xmlns:a="http://schemas.openxmlformats.org/drawingml/2006/main" xmlns:r="http://schemas.openxmlformats.org/officeDocument/2006/relationships" xmlns:p="http://schemas.openxmlformats.org/presentationml/2006/main">
+<p:sld xmlns:a="http://schemas.openxmlformats.org/drawingml/2006/main" xmlns:p="http://schemas.openxmlformats.org/presentationml/2006/main" xmlns:r="http://schemas.openxmlformats.org/officeDocument/2006/relationships">
   <p:cSld>
     <p:spTree>
       <p:nvGrpSpPr>
@@ -32520,14 +32224,7 @@
         <p:cNvGrpSpPr/>
         <p:nvPr/>
       </p:nvGrpSpPr>
-      <p:grpSpPr>
-        <a:xfrm>
-          <a:off x="0" y="0"/>
-          <a:ext cx="0" cy="0"/>
-          <a:chOff x="0" y="0"/>
-          <a:chExt cx="0" cy="0"/>
-        </a:xfrm>
-      </p:grpSpPr>
+      <p:grpSpPr/>
       <p:pic>
         <p:nvPicPr>
           <p:cNvPr id="2" name="Picture 1" descr="bg_red.png"/>
@@ -32569,7 +32266,7 @@
           <a:noFill/>
         </p:spPr>
         <p:txBody>
-          <a:bodyPr wrap="square" lIns="0" tIns="0" rIns="0" bIns="0" anchor="t">
+          <a:bodyPr wrap="square" anchor="t" lIns="0" rIns="0" tIns="0" bIns="0">
             <a:spAutoFit/>
           </a:bodyPr>
           <a:lstStyle/>
@@ -32608,7 +32305,7 @@
           <a:noFill/>
         </p:spPr>
         <p:txBody>
-          <a:bodyPr wrap="square" lIns="0" tIns="0" rIns="0" bIns="0" anchor="t">
+          <a:bodyPr wrap="square" anchor="t" lIns="0" rIns="0" tIns="0" bIns="0">
             <a:spAutoFit/>
           </a:bodyPr>
           <a:lstStyle/>
@@ -32647,7 +32344,7 @@
           <a:noFill/>
         </p:spPr>
         <p:txBody>
-          <a:bodyPr wrap="square" lIns="0" tIns="0" rIns="0" bIns="0" anchor="t">
+          <a:bodyPr wrap="square" anchor="t" lIns="0" rIns="0" tIns="0" bIns="0">
             <a:spAutoFit/>
           </a:bodyPr>
           <a:lstStyle/>
@@ -32686,7 +32383,7 @@
           <a:noFill/>
         </p:spPr>
         <p:txBody>
-          <a:bodyPr wrap="square" lIns="0" tIns="0" rIns="0" bIns="0" anchor="t">
+          <a:bodyPr wrap="square" anchor="t" lIns="0" rIns="0" tIns="0" bIns="0">
             <a:spAutoFit/>
           </a:bodyPr>
           <a:lstStyle/>
@@ -32725,7 +32422,7 @@
           <a:noFill/>
         </p:spPr>
         <p:txBody>
-          <a:bodyPr wrap="square" lIns="0" tIns="0" rIns="0" bIns="0" anchor="t">
+          <a:bodyPr wrap="square" anchor="t" lIns="0" rIns="0" tIns="0" bIns="0">
             <a:spAutoFit/>
           </a:bodyPr>
           <a:lstStyle/>
@@ -32764,7 +32461,7 @@
           <a:noFill/>
         </p:spPr>
         <p:txBody>
-          <a:bodyPr wrap="square" lIns="0" tIns="0" rIns="0" bIns="0" anchor="t">
+          <a:bodyPr wrap="square" anchor="t" lIns="0" rIns="0" tIns="0" bIns="0">
             <a:spAutoFit/>
           </a:bodyPr>
           <a:lstStyle/>
@@ -32803,7 +32500,7 @@
           <a:noFill/>
         </p:spPr>
         <p:txBody>
-          <a:bodyPr wrap="square" lIns="0" tIns="0" rIns="0" bIns="0" anchor="t">
+          <a:bodyPr wrap="square" anchor="t" lIns="0" rIns="0" tIns="0" bIns="0">
             <a:spAutoFit/>
           </a:bodyPr>
           <a:lstStyle/>
@@ -32842,7 +32539,7 @@
           <a:noFill/>
         </p:spPr>
         <p:txBody>
-          <a:bodyPr wrap="square" lIns="0" tIns="0" rIns="0" bIns="0" anchor="t">
+          <a:bodyPr wrap="square" anchor="t" lIns="0" rIns="0" tIns="0" bIns="0">
             <a:spAutoFit/>
           </a:bodyPr>
           <a:lstStyle/>
@@ -32881,7 +32578,7 @@
           <a:noFill/>
         </p:spPr>
         <p:txBody>
-          <a:bodyPr wrap="square" lIns="0" tIns="0" rIns="0" bIns="0" anchor="t">
+          <a:bodyPr wrap="square" anchor="t" lIns="0" rIns="0" tIns="0" bIns="0">
             <a:spAutoFit/>
           </a:bodyPr>
           <a:lstStyle/>
@@ -32920,7 +32617,7 @@
           <a:noFill/>
         </p:spPr>
         <p:txBody>
-          <a:bodyPr wrap="square" lIns="0" tIns="0" rIns="0" bIns="0" anchor="t">
+          <a:bodyPr wrap="square" anchor="t" lIns="0" rIns="0" tIns="0" bIns="0">
             <a:spAutoFit/>
           </a:bodyPr>
           <a:lstStyle/>
@@ -32959,7 +32656,7 @@
           <a:noFill/>
         </p:spPr>
         <p:txBody>
-          <a:bodyPr wrap="square" lIns="0" tIns="0" rIns="0" bIns="0" anchor="t">
+          <a:bodyPr wrap="square" anchor="t" lIns="0" rIns="0" tIns="0" bIns="0">
             <a:spAutoFit/>
           </a:bodyPr>
           <a:lstStyle/>
@@ -32998,7 +32695,7 @@
           <a:noFill/>
         </p:spPr>
         <p:txBody>
-          <a:bodyPr wrap="square" lIns="0" tIns="0" rIns="0" bIns="0" anchor="t">
+          <a:bodyPr wrap="square" anchor="t" lIns="0" rIns="0" tIns="0" bIns="0">
             <a:spAutoFit/>
           </a:bodyPr>
           <a:lstStyle/>
@@ -33037,7 +32734,7 @@
           <a:noFill/>
         </p:spPr>
         <p:txBody>
-          <a:bodyPr wrap="square" lIns="0" tIns="0" rIns="0" bIns="0" anchor="t">
+          <a:bodyPr wrap="square" anchor="t" lIns="0" rIns="0" tIns="0" bIns="0">
             <a:spAutoFit/>
           </a:bodyPr>
           <a:lstStyle/>
@@ -33076,7 +32773,7 @@
           <a:noFill/>
         </p:spPr>
         <p:txBody>
-          <a:bodyPr wrap="square" lIns="0" tIns="0" rIns="0" bIns="0" anchor="t">
+          <a:bodyPr wrap="square" anchor="t" lIns="0" rIns="0" tIns="0" bIns="0">
             <a:spAutoFit/>
           </a:bodyPr>
           <a:lstStyle/>
@@ -33115,7 +32812,7 @@
           <a:noFill/>
         </p:spPr>
         <p:txBody>
-          <a:bodyPr wrap="square" lIns="0" tIns="0" rIns="0" bIns="0" anchor="t">
+          <a:bodyPr wrap="square" anchor="t" lIns="0" rIns="0" tIns="0" bIns="0">
             <a:spAutoFit/>
           </a:bodyPr>
           <a:lstStyle/>
@@ -33154,7 +32851,7 @@
           <a:noFill/>
         </p:spPr>
         <p:txBody>
-          <a:bodyPr wrap="square" lIns="0" tIns="0" rIns="0" bIns="0" anchor="t">
+          <a:bodyPr wrap="square" anchor="t" lIns="0" rIns="0" tIns="0" bIns="0">
             <a:spAutoFit/>
           </a:bodyPr>
           <a:lstStyle/>
@@ -33193,7 +32890,7 @@
           <a:noFill/>
         </p:spPr>
         <p:txBody>
-          <a:bodyPr wrap="square" lIns="0" tIns="0" rIns="0" bIns="0" anchor="t">
+          <a:bodyPr wrap="square" anchor="t" lIns="0" rIns="0" tIns="0" bIns="0">
             <a:spAutoFit/>
           </a:bodyPr>
           <a:lstStyle/>
@@ -33232,7 +32929,7 @@
           <a:noFill/>
         </p:spPr>
         <p:txBody>
-          <a:bodyPr wrap="square" lIns="0" tIns="0" rIns="0" bIns="0" anchor="t">
+          <a:bodyPr wrap="square" anchor="t" lIns="0" rIns="0" tIns="0" bIns="0">
             <a:spAutoFit/>
           </a:bodyPr>
           <a:lstStyle/>
@@ -33271,7 +32968,7 @@
           <a:noFill/>
         </p:spPr>
         <p:txBody>
-          <a:bodyPr wrap="square" lIns="0" tIns="0" rIns="0" bIns="0" anchor="t">
+          <a:bodyPr wrap="square" anchor="t" lIns="0" rIns="0" tIns="0" bIns="0">
             <a:spAutoFit/>
           </a:bodyPr>
           <a:lstStyle/>
@@ -33310,7 +33007,7 @@
           <a:noFill/>
         </p:spPr>
         <p:txBody>
-          <a:bodyPr wrap="square" lIns="0" tIns="0" rIns="0" bIns="0" anchor="t">
+          <a:bodyPr wrap="square" anchor="t" lIns="0" rIns="0" tIns="0" bIns="0">
             <a:spAutoFit/>
           </a:bodyPr>
           <a:lstStyle/>
@@ -33349,7 +33046,7 @@
           <a:noFill/>
         </p:spPr>
         <p:txBody>
-          <a:bodyPr wrap="square" lIns="0" tIns="0" rIns="0" bIns="0" anchor="t">
+          <a:bodyPr wrap="square" anchor="t" lIns="0" rIns="0" tIns="0" bIns="0">
             <a:spAutoFit/>
           </a:bodyPr>
           <a:lstStyle/>
@@ -33388,7 +33085,7 @@
           <a:noFill/>
         </p:spPr>
         <p:txBody>
-          <a:bodyPr wrap="square" lIns="0" tIns="0" rIns="0" bIns="0" anchor="t">
+          <a:bodyPr wrap="square" anchor="t" lIns="0" rIns="0" tIns="0" bIns="0">
             <a:spAutoFit/>
           </a:bodyPr>
           <a:lstStyle/>
@@ -33455,7 +33152,6 @@
           <a:lstStyle/>
           <a:p>
             <a:pPr algn="ctr"/>
-            <a:endParaRPr/>
           </a:p>
         </p:txBody>
       </p:sp>
@@ -33476,7 +33172,7 @@
           <a:noFill/>
         </p:spPr>
         <p:txBody>
-          <a:bodyPr wrap="square" lIns="0" tIns="0" rIns="0" bIns="0" anchor="t">
+          <a:bodyPr wrap="square" anchor="t" lIns="0" rIns="0" tIns="0" bIns="0">
             <a:spAutoFit/>
           </a:bodyPr>
           <a:lstStyle/>
@@ -33515,7 +33211,7 @@
           <a:noFill/>
         </p:spPr>
         <p:txBody>
-          <a:bodyPr wrap="square" lIns="0" tIns="0" rIns="0" bIns="0" anchor="t">
+          <a:bodyPr wrap="square" anchor="t" lIns="0" rIns="0" tIns="0" bIns="0">
             <a:spAutoFit/>
           </a:bodyPr>
           <a:lstStyle/>
@@ -33554,7 +33250,7 @@
           <a:noFill/>
         </p:spPr>
         <p:txBody>
-          <a:bodyPr wrap="square" lIns="0" tIns="0" rIns="0" bIns="0" anchor="t">
+          <a:bodyPr wrap="square" anchor="t" lIns="0" rIns="0" tIns="0" bIns="0">
             <a:spAutoFit/>
           </a:bodyPr>
           <a:lstStyle/>
@@ -33581,23 +33277,11 @@
   <p:clrMapOvr>
     <a:masterClrMapping/>
   </p:clrMapOvr>
-  <mc:AlternateContent xmlns:mc="http://schemas.openxmlformats.org/markup-compatibility/2006">
-    <mc:Choice xmlns:p14="http://schemas.microsoft.com/office/powerpoint/2010/main" Requires="p14">
-      <p:transition spd="med" p14:dur="700">
-        <p:fade thruBlk="1"/>
-      </p:transition>
-    </mc:Choice>
-    <mc:Fallback>
-      <p:transition spd="med">
-        <p:fade thruBlk="1"/>
-      </p:transition>
-    </mc:Fallback>
-  </mc:AlternateContent>
 </p:sld>
 </file>
 
 <file path=ppt/slides/slide32.xml><?xml version="1.0" encoding="utf-8"?>
-<p:sld xmlns:a="http://schemas.openxmlformats.org/drawingml/2006/main" xmlns:r="http://schemas.openxmlformats.org/officeDocument/2006/relationships" xmlns:p="http://schemas.openxmlformats.org/presentationml/2006/main">
+<p:sld xmlns:a="http://schemas.openxmlformats.org/drawingml/2006/main" xmlns:p="http://schemas.openxmlformats.org/presentationml/2006/main" xmlns:r="http://schemas.openxmlformats.org/officeDocument/2006/relationships">
   <p:cSld>
     <p:spTree>
       <p:nvGrpSpPr>
@@ -33605,14 +33289,7 @@
         <p:cNvGrpSpPr/>
         <p:nvPr/>
       </p:nvGrpSpPr>
-      <p:grpSpPr>
-        <a:xfrm>
-          <a:off x="0" y="0"/>
-          <a:ext cx="0" cy="0"/>
-          <a:chOff x="0" y="0"/>
-          <a:chExt cx="0" cy="0"/>
-        </a:xfrm>
-      </p:grpSpPr>
+      <p:grpSpPr/>
       <p:pic>
         <p:nvPicPr>
           <p:cNvPr id="2" name="Picture 1" descr="bg_hero.png"/>
@@ -33622,7 +33299,7 @@
           <p:nvPr/>
         </p:nvPicPr>
         <p:blipFill>
-          <a:blip r:embed="rId3"/>
+          <a:blip r:embed="rId2"/>
           <a:stretch>
             <a:fillRect/>
           </a:stretch>
@@ -33654,7 +33331,7 @@
           <a:noFill/>
         </p:spPr>
         <p:txBody>
-          <a:bodyPr wrap="square" lIns="0" tIns="0" rIns="0" bIns="0" anchor="t">
+          <a:bodyPr wrap="square" anchor="t" lIns="0" rIns="0" tIns="0" bIns="0">
             <a:spAutoFit/>
           </a:bodyPr>
           <a:lstStyle/>
@@ -33693,7 +33370,7 @@
           <a:noFill/>
         </p:spPr>
         <p:txBody>
-          <a:bodyPr wrap="square" lIns="0" tIns="0" rIns="0" bIns="0" anchor="t">
+          <a:bodyPr wrap="square" anchor="t" lIns="0" rIns="0" tIns="0" bIns="0">
             <a:spAutoFit/>
           </a:bodyPr>
           <a:lstStyle/>
@@ -33756,7 +33433,7 @@
           </a:fontRef>
         </p:style>
         <p:txBody>
-          <a:bodyPr wrap="square" lIns="73152" tIns="36576" rIns="73152" bIns="36576" rtlCol="0" anchor="ctr"/>
+          <a:bodyPr rtlCol="0" anchor="ctr" wrap="square" lIns="73152" rIns="73152" tIns="36576" bIns="36576"/>
           <a:lstStyle/>
           <a:p>
             <a:pPr algn="ctr"/>
@@ -33830,7 +33507,7 @@
           </a:fontRef>
         </p:style>
         <p:txBody>
-          <a:bodyPr wrap="square" lIns="73152" tIns="36576" rIns="73152" bIns="36576" rtlCol="0" anchor="ctr"/>
+          <a:bodyPr rtlCol="0" anchor="ctr" wrap="square" lIns="73152" rIns="73152" tIns="36576" bIns="36576"/>
           <a:lstStyle/>
           <a:p>
             <a:pPr algn="ctr"/>
@@ -33904,7 +33581,7 @@
           </a:fontRef>
         </p:style>
         <p:txBody>
-          <a:bodyPr wrap="square" lIns="73152" tIns="36576" rIns="73152" bIns="36576" rtlCol="0" anchor="ctr"/>
+          <a:bodyPr rtlCol="0" anchor="ctr" wrap="square" lIns="73152" rIns="73152" tIns="36576" bIns="36576"/>
           <a:lstStyle/>
           <a:p>
             <a:pPr algn="ctr"/>
@@ -33978,7 +33655,7 @@
           </a:fontRef>
         </p:style>
         <p:txBody>
-          <a:bodyPr wrap="square" lIns="73152" tIns="36576" rIns="73152" bIns="36576" rtlCol="0" anchor="ctr"/>
+          <a:bodyPr rtlCol="0" anchor="ctr" wrap="square" lIns="73152" rIns="73152" tIns="36576" bIns="36576"/>
           <a:lstStyle/>
           <a:p>
             <a:pPr algn="ctr"/>
@@ -34052,7 +33729,7 @@
           </a:fontRef>
         </p:style>
         <p:txBody>
-          <a:bodyPr wrap="square" lIns="73152" tIns="36576" rIns="73152" bIns="36576" rtlCol="0" anchor="ctr"/>
+          <a:bodyPr rtlCol="0" anchor="ctr" wrap="square" lIns="73152" rIns="73152" tIns="36576" bIns="36576"/>
           <a:lstStyle/>
           <a:p>
             <a:pPr algn="ctr"/>
@@ -34126,7 +33803,7 @@
           </a:fontRef>
         </p:style>
         <p:txBody>
-          <a:bodyPr wrap="square" lIns="73152" tIns="36576" rIns="73152" bIns="36576" rtlCol="0" anchor="ctr"/>
+          <a:bodyPr rtlCol="0" anchor="ctr" wrap="square" lIns="73152" rIns="73152" tIns="36576" bIns="36576"/>
           <a:lstStyle/>
           <a:p>
             <a:pPr algn="ctr"/>
@@ -34204,7 +33881,6 @@
           <a:lstStyle/>
           <a:p>
             <a:pPr algn="ctr"/>
-            <a:endParaRPr/>
           </a:p>
         </p:txBody>
       </p:sp>
@@ -34225,7 +33901,7 @@
           <a:noFill/>
         </p:spPr>
         <p:txBody>
-          <a:bodyPr wrap="square" lIns="0" tIns="0" rIns="0" bIns="0" anchor="t">
+          <a:bodyPr wrap="square" anchor="t" lIns="0" rIns="0" tIns="0" bIns="0">
             <a:spAutoFit/>
           </a:bodyPr>
           <a:lstStyle/>
@@ -34264,7 +33940,7 @@
           <a:noFill/>
         </p:spPr>
         <p:txBody>
-          <a:bodyPr wrap="square" lIns="0" tIns="0" rIns="0" bIns="0" anchor="t">
+          <a:bodyPr wrap="square" anchor="t" lIns="0" rIns="0" tIns="0" bIns="0">
             <a:spAutoFit/>
           </a:bodyPr>
           <a:lstStyle/>
@@ -34281,7 +33957,7 @@
                 </a:solidFill>
                 <a:latin typeface="Segoe UI"/>
               </a:rPr>
-              <a:t>578 assertions · 6 suites · 0 failures  •  57 tables · 64 routes · 10 ADRs  •  every claim on these slides is testable</a:t>
+              <a:t>578 assertions · 6 suites · 0 failures  •  56 tables · 64 routes · 10 ADRs  •  every claim on these slides is testable</a:t>
             </a:r>
           </a:p>
         </p:txBody>
@@ -34303,7 +33979,7 @@
           <a:noFill/>
         </p:spPr>
         <p:txBody>
-          <a:bodyPr wrap="square" lIns="0" tIns="0" rIns="0" bIns="0" anchor="t">
+          <a:bodyPr wrap="square" anchor="t" lIns="0" rIns="0" tIns="0" bIns="0">
             <a:spAutoFit/>
           </a:bodyPr>
           <a:lstStyle/>
@@ -34330,23 +34006,11 @@
   <p:clrMapOvr>
     <a:masterClrMapping/>
   </p:clrMapOvr>
-  <mc:AlternateContent xmlns:mc="http://schemas.openxmlformats.org/markup-compatibility/2006">
-    <mc:Choice xmlns:p14="http://schemas.microsoft.com/office/powerpoint/2010/main" Requires="p14">
-      <p:transition spd="med" p14:dur="700">
-        <p:fade thruBlk="1"/>
-      </p:transition>
-    </mc:Choice>
-    <mc:Fallback>
-      <p:transition spd="med">
-        <p:fade thruBlk="1"/>
-      </p:transition>
-    </mc:Fallback>
-  </mc:AlternateContent>
 </p:sld>
 </file>
 
 <file path=ppt/slides/slide4.xml><?xml version="1.0" encoding="utf-8"?>
-<p:sld xmlns:a="http://schemas.openxmlformats.org/drawingml/2006/main" xmlns:r="http://schemas.openxmlformats.org/officeDocument/2006/relationships" xmlns:p="http://schemas.openxmlformats.org/presentationml/2006/main">
+<p:sld xmlns:a="http://schemas.openxmlformats.org/drawingml/2006/main" xmlns:p="http://schemas.openxmlformats.org/presentationml/2006/main" xmlns:r="http://schemas.openxmlformats.org/officeDocument/2006/relationships">
   <p:cSld>
     <p:spTree>
       <p:nvGrpSpPr>
@@ -34354,14 +34018,7 @@
         <p:cNvGrpSpPr/>
         <p:nvPr/>
       </p:nvGrpSpPr>
-      <p:grpSpPr>
-        <a:xfrm>
-          <a:off x="0" y="0"/>
-          <a:ext cx="0" cy="0"/>
-          <a:chOff x="0" y="0"/>
-          <a:chExt cx="0" cy="0"/>
-        </a:xfrm>
-      </p:grpSpPr>
+      <p:grpSpPr/>
       <p:pic>
         <p:nvPicPr>
           <p:cNvPr id="2" name="Picture 1" descr="bg_deep.png"/>
@@ -34371,7 +34028,7 @@
           <p:nvPr/>
         </p:nvPicPr>
         <p:blipFill>
-          <a:blip r:embed="rId3"/>
+          <a:blip r:embed="rId2"/>
           <a:stretch>
             <a:fillRect/>
           </a:stretch>
@@ -34403,7 +34060,7 @@
           <a:noFill/>
         </p:spPr>
         <p:txBody>
-          <a:bodyPr wrap="square" lIns="0" tIns="0" rIns="0" bIns="0" anchor="t">
+          <a:bodyPr wrap="square" anchor="t" lIns="0" rIns="0" tIns="0" bIns="0">
             <a:spAutoFit/>
           </a:bodyPr>
           <a:lstStyle/>
@@ -34442,7 +34099,7 @@
           <a:noFill/>
         </p:spPr>
         <p:txBody>
-          <a:bodyPr wrap="square" lIns="0" tIns="0" rIns="0" bIns="0" anchor="t">
+          <a:bodyPr wrap="square" anchor="t" lIns="0" rIns="0" tIns="0" bIns="0">
             <a:spAutoFit/>
           </a:bodyPr>
           <a:lstStyle/>
@@ -34505,7 +34162,7 @@
           </a:fontRef>
         </p:style>
         <p:txBody>
-          <a:bodyPr wrap="square" lIns="73152" tIns="36576" rIns="73152" bIns="36576" rtlCol="0" anchor="ctr"/>
+          <a:bodyPr rtlCol="0" anchor="ctr" wrap="square" lIns="73152" rIns="73152" tIns="36576" bIns="36576"/>
           <a:lstStyle/>
           <a:p>
             <a:pPr algn="ctr"/>
@@ -34580,7 +34237,7 @@
           </a:fontRef>
         </p:style>
         <p:txBody>
-          <a:bodyPr wrap="square" lIns="73152" tIns="36576" rIns="73152" bIns="36576" rtlCol="0" anchor="ctr"/>
+          <a:bodyPr rtlCol="0" anchor="ctr" wrap="square" lIns="73152" rIns="73152" tIns="36576" bIns="36576"/>
           <a:lstStyle/>
           <a:p>
             <a:pPr algn="ctr"/>
@@ -34655,7 +34312,7 @@
           </a:fontRef>
         </p:style>
         <p:txBody>
-          <a:bodyPr wrap="square" lIns="73152" tIns="36576" rIns="73152" bIns="36576" rtlCol="0" anchor="ctr"/>
+          <a:bodyPr rtlCol="0" anchor="ctr" wrap="square" lIns="73152" rIns="73152" tIns="36576" bIns="36576"/>
           <a:lstStyle/>
           <a:p>
             <a:pPr algn="ctr"/>
@@ -34730,7 +34387,7 @@
           </a:fontRef>
         </p:style>
         <p:txBody>
-          <a:bodyPr wrap="square" lIns="73152" tIns="36576" rIns="73152" bIns="36576" rtlCol="0" anchor="ctr"/>
+          <a:bodyPr rtlCol="0" anchor="ctr" wrap="square" lIns="73152" rIns="73152" tIns="36576" bIns="36576"/>
           <a:lstStyle/>
           <a:p>
             <a:pPr algn="ctr"/>
@@ -34805,7 +34462,7 @@
           </a:fontRef>
         </p:style>
         <p:txBody>
-          <a:bodyPr wrap="square" lIns="73152" tIns="36576" rIns="73152" bIns="36576" rtlCol="0" anchor="ctr"/>
+          <a:bodyPr rtlCol="0" anchor="ctr" wrap="square" lIns="73152" rIns="73152" tIns="36576" bIns="36576"/>
           <a:lstStyle/>
           <a:p>
             <a:pPr algn="ctr"/>
@@ -34880,7 +34537,7 @@
           </a:fontRef>
         </p:style>
         <p:txBody>
-          <a:bodyPr wrap="square" lIns="73152" tIns="36576" rIns="73152" bIns="36576" rtlCol="0" anchor="ctr"/>
+          <a:bodyPr rtlCol="0" anchor="ctr" wrap="square" lIns="73152" rIns="73152" tIns="36576" bIns="36576"/>
           <a:lstStyle/>
           <a:p>
             <a:pPr algn="ctr"/>
@@ -34959,7 +34616,6 @@
           <a:lstStyle/>
           <a:p>
             <a:pPr algn="ctr"/>
-            <a:endParaRPr/>
           </a:p>
         </p:txBody>
       </p:sp>
@@ -34980,7 +34636,7 @@
           <a:noFill/>
         </p:spPr>
         <p:txBody>
-          <a:bodyPr wrap="square" lIns="0" tIns="0" rIns="0" bIns="0" anchor="t">
+          <a:bodyPr wrap="square" anchor="t" lIns="0" rIns="0" tIns="0" bIns="0">
             <a:spAutoFit/>
           </a:bodyPr>
           <a:lstStyle/>
@@ -35019,7 +34675,7 @@
           <a:noFill/>
         </p:spPr>
         <p:txBody>
-          <a:bodyPr wrap="square" lIns="0" tIns="0" rIns="0" bIns="0" anchor="t">
+          <a:bodyPr wrap="square" anchor="t" lIns="0" rIns="0" tIns="0" bIns="0">
             <a:spAutoFit/>
           </a:bodyPr>
           <a:lstStyle/>
@@ -35058,7 +34714,7 @@
           <a:noFill/>
         </p:spPr>
         <p:txBody>
-          <a:bodyPr wrap="square" lIns="0" tIns="0" rIns="0" bIns="0" anchor="t">
+          <a:bodyPr wrap="square" anchor="t" lIns="0" rIns="0" tIns="0" bIns="0">
             <a:spAutoFit/>
           </a:bodyPr>
           <a:lstStyle/>
@@ -35085,23 +34741,11 @@
   <p:clrMapOvr>
     <a:masterClrMapping/>
   </p:clrMapOvr>
-  <mc:AlternateContent xmlns:mc="http://schemas.openxmlformats.org/markup-compatibility/2006">
-    <mc:Choice xmlns:p14="http://schemas.microsoft.com/office/powerpoint/2010/main" Requires="p14">
-      <p:transition spd="med" p14:dur="700">
-        <p:fade thruBlk="1"/>
-      </p:transition>
-    </mc:Choice>
-    <mc:Fallback>
-      <p:transition spd="med">
-        <p:fade thruBlk="1"/>
-      </p:transition>
-    </mc:Fallback>
-  </mc:AlternateContent>
 </p:sld>
 </file>
 
 <file path=ppt/slides/slide5.xml><?xml version="1.0" encoding="utf-8"?>
-<p:sld xmlns:a="http://schemas.openxmlformats.org/drawingml/2006/main" xmlns:r="http://schemas.openxmlformats.org/officeDocument/2006/relationships" xmlns:p="http://schemas.openxmlformats.org/presentationml/2006/main">
+<p:sld xmlns:a="http://schemas.openxmlformats.org/drawingml/2006/main" xmlns:p="http://schemas.openxmlformats.org/presentationml/2006/main" xmlns:r="http://schemas.openxmlformats.org/officeDocument/2006/relationships">
   <p:cSld>
     <p:spTree>
       <p:nvGrpSpPr>
@@ -35109,14 +34753,7 @@
         <p:cNvGrpSpPr/>
         <p:nvPr/>
       </p:nvGrpSpPr>
-      <p:grpSpPr>
-        <a:xfrm>
-          <a:off x="0" y="0"/>
-          <a:ext cx="0" cy="0"/>
-          <a:chOff x="0" y="0"/>
-          <a:chExt cx="0" cy="0"/>
-        </a:xfrm>
-      </p:grpSpPr>
+      <p:grpSpPr/>
       <p:pic>
         <p:nvPicPr>
           <p:cNvPr id="2" name="Picture 1" descr="bg_deep.png"/>
@@ -35126,7 +34763,7 @@
           <p:nvPr/>
         </p:nvPicPr>
         <p:blipFill>
-          <a:blip r:embed="rId3"/>
+          <a:blip r:embed="rId2"/>
           <a:stretch>
             <a:fillRect/>
           </a:stretch>
@@ -35158,7 +34795,7 @@
           <a:noFill/>
         </p:spPr>
         <p:txBody>
-          <a:bodyPr wrap="square" lIns="0" tIns="0" rIns="0" bIns="0" anchor="t">
+          <a:bodyPr wrap="square" anchor="t" lIns="0" rIns="0" tIns="0" bIns="0">
             <a:spAutoFit/>
           </a:bodyPr>
           <a:lstStyle/>
@@ -35197,7 +34834,7 @@
           <a:noFill/>
         </p:spPr>
         <p:txBody>
-          <a:bodyPr wrap="square" lIns="0" tIns="0" rIns="0" bIns="0" anchor="t">
+          <a:bodyPr wrap="square" anchor="t" lIns="0" rIns="0" tIns="0" bIns="0">
             <a:spAutoFit/>
           </a:bodyPr>
           <a:lstStyle/>
@@ -35236,7 +34873,7 @@
           <a:noFill/>
         </p:spPr>
         <p:txBody>
-          <a:bodyPr wrap="square" lIns="0" tIns="0" rIns="0" bIns="0" anchor="t">
+          <a:bodyPr wrap="square" anchor="t" lIns="0" rIns="0" tIns="0" bIns="0">
             <a:spAutoFit/>
           </a:bodyPr>
           <a:lstStyle/>
@@ -35299,7 +34936,7 @@
           </a:fontRef>
         </p:style>
         <p:txBody>
-          <a:bodyPr wrap="square" lIns="73152" tIns="36576" rIns="73152" bIns="36576" rtlCol="0" anchor="ctr"/>
+          <a:bodyPr rtlCol="0" anchor="ctr" wrap="square" lIns="73152" rIns="73152" tIns="36576" bIns="36576"/>
           <a:lstStyle/>
           <a:p>
             <a:pPr algn="ctr"/>
@@ -35408,7 +35045,7 @@
           </a:fontRef>
         </p:style>
         <p:txBody>
-          <a:bodyPr wrap="square" lIns="73152" tIns="36576" rIns="73152" bIns="36576" rtlCol="0" anchor="ctr"/>
+          <a:bodyPr rtlCol="0" anchor="ctr" wrap="square" lIns="73152" rIns="73152" tIns="36576" bIns="36576"/>
           <a:lstStyle/>
           <a:p>
             <a:pPr algn="ctr"/>
@@ -35517,7 +35154,7 @@
           </a:fontRef>
         </p:style>
         <p:txBody>
-          <a:bodyPr wrap="square" lIns="73152" tIns="36576" rIns="73152" bIns="36576" rtlCol="0" anchor="ctr"/>
+          <a:bodyPr rtlCol="0" anchor="ctr" wrap="square" lIns="73152" rIns="73152" tIns="36576" bIns="36576"/>
           <a:lstStyle/>
           <a:p>
             <a:pPr algn="ctr"/>
@@ -35626,7 +35263,7 @@
           </a:fontRef>
         </p:style>
         <p:txBody>
-          <a:bodyPr wrap="square" lIns="73152" tIns="36576" rIns="73152" bIns="36576" rtlCol="0" anchor="ctr"/>
+          <a:bodyPr rtlCol="0" anchor="ctr" wrap="square" lIns="73152" rIns="73152" tIns="36576" bIns="36576"/>
           <a:lstStyle/>
           <a:p>
             <a:pPr algn="ctr"/>
@@ -35719,7 +35356,7 @@
           </a:fontRef>
         </p:style>
         <p:txBody>
-          <a:bodyPr wrap="square" lIns="73152" tIns="36576" rIns="73152" bIns="36576" rtlCol="0" anchor="ctr"/>
+          <a:bodyPr rtlCol="0" anchor="ctr" wrap="square" lIns="73152" rIns="73152" tIns="36576" bIns="36576"/>
           <a:lstStyle/>
           <a:p>
             <a:pPr algn="ctr"/>
@@ -35812,7 +35449,7 @@
           </a:fontRef>
         </p:style>
         <p:txBody>
-          <a:bodyPr wrap="square" lIns="73152" tIns="36576" rIns="73152" bIns="36576" rtlCol="0" anchor="ctr"/>
+          <a:bodyPr rtlCol="0" anchor="ctr" wrap="square" lIns="73152" rIns="73152" tIns="36576" bIns="36576"/>
           <a:lstStyle/>
           <a:p>
             <a:pPr algn="ctr"/>
@@ -35885,7 +35522,7 @@
           </a:fontRef>
         </p:style>
         <p:txBody>
-          <a:bodyPr wrap="square" lIns="73152" tIns="36576" rIns="73152" bIns="36576" rtlCol="0" anchor="ctr"/>
+          <a:bodyPr rtlCol="0" anchor="ctr" wrap="square" lIns="73152" rIns="73152" tIns="36576" bIns="36576"/>
           <a:lstStyle/>
           <a:p>
             <a:pPr algn="ctr"/>
@@ -35958,7 +35595,7 @@
           </a:fontRef>
         </p:style>
         <p:txBody>
-          <a:bodyPr wrap="square" lIns="73152" tIns="36576" rIns="73152" bIns="36576" rtlCol="0" anchor="ctr"/>
+          <a:bodyPr rtlCol="0" anchor="ctr" wrap="square" lIns="73152" rIns="73152" tIns="36576" bIns="36576"/>
           <a:lstStyle/>
           <a:p>
             <a:pPr algn="ctr"/>
@@ -36031,7 +35668,7 @@
           </a:fontRef>
         </p:style>
         <p:txBody>
-          <a:bodyPr wrap="square" lIns="73152" tIns="36576" rIns="73152" bIns="36576" rtlCol="0" anchor="ctr"/>
+          <a:bodyPr rtlCol="0" anchor="ctr" wrap="square" lIns="73152" rIns="73152" tIns="36576" bIns="36576"/>
           <a:lstStyle/>
           <a:p>
             <a:pPr algn="ctr"/>
@@ -36104,7 +35741,7 @@
           </a:fontRef>
         </p:style>
         <p:txBody>
-          <a:bodyPr wrap="square" lIns="73152" tIns="36576" rIns="73152" bIns="36576" rtlCol="0" anchor="ctr"/>
+          <a:bodyPr rtlCol="0" anchor="ctr" wrap="square" lIns="73152" rIns="73152" tIns="36576" bIns="36576"/>
           <a:lstStyle/>
           <a:p>
             <a:pPr algn="ctr"/>
@@ -36213,7 +35850,7 @@
           </a:fontRef>
         </p:style>
         <p:txBody>
-          <a:bodyPr wrap="square" lIns="73152" tIns="36576" rIns="73152" bIns="36576" rtlCol="0" anchor="ctr"/>
+          <a:bodyPr rtlCol="0" anchor="ctr" wrap="square" lIns="73152" rIns="73152" tIns="36576" bIns="36576"/>
           <a:lstStyle/>
           <a:p>
             <a:pPr algn="ctr"/>
@@ -36224,7 +35861,7 @@
                 </a:solidFill>
                 <a:latin typeface="Segoe UI Semibold"/>
               </a:rPr>
-              <a:t>PostgreSQL 16 + PostGIS  ·  57 tables  ·  62 FKs  ·  5 GiST indexes</a:t>
+              <a:t>PostgreSQL 16 + PostGIS  ·  56 tables  ·  62 FKs  ·  5 GiST indexes</a:t>
             </a:r>
           </a:p>
         </p:txBody>
@@ -36246,7 +35883,7 @@
           <a:noFill/>
         </p:spPr>
         <p:txBody>
-          <a:bodyPr wrap="square" lIns="0" tIns="0" rIns="0" bIns="0" anchor="t">
+          <a:bodyPr wrap="square" anchor="t" lIns="0" rIns="0" tIns="0" bIns="0">
             <a:spAutoFit/>
           </a:bodyPr>
           <a:lstStyle/>
@@ -36285,7 +35922,7 @@
           <a:noFill/>
         </p:spPr>
         <p:txBody>
-          <a:bodyPr wrap="square" lIns="0" tIns="0" rIns="0" bIns="0" anchor="t">
+          <a:bodyPr wrap="square" anchor="t" lIns="0" rIns="0" tIns="0" bIns="0">
             <a:spAutoFit/>
           </a:bodyPr>
           <a:lstStyle/>
@@ -36312,23 +35949,11 @@
   <p:clrMapOvr>
     <a:masterClrMapping/>
   </p:clrMapOvr>
-  <mc:AlternateContent xmlns:mc="http://schemas.openxmlformats.org/markup-compatibility/2006">
-    <mc:Choice xmlns:p14="http://schemas.microsoft.com/office/powerpoint/2010/main" Requires="p14">
-      <p:transition spd="med" p14:dur="700">
-        <p:fade thruBlk="1"/>
-      </p:transition>
-    </mc:Choice>
-    <mc:Fallback>
-      <p:transition spd="med">
-        <p:fade thruBlk="1"/>
-      </p:transition>
-    </mc:Fallback>
-  </mc:AlternateContent>
 </p:sld>
 </file>
 
 <file path=ppt/slides/slide6.xml><?xml version="1.0" encoding="utf-8"?>
-<p:sld xmlns:a="http://schemas.openxmlformats.org/drawingml/2006/main" xmlns:r="http://schemas.openxmlformats.org/officeDocument/2006/relationships" xmlns:p="http://schemas.openxmlformats.org/presentationml/2006/main">
+<p:sld xmlns:a="http://schemas.openxmlformats.org/drawingml/2006/main" xmlns:p="http://schemas.openxmlformats.org/presentationml/2006/main" xmlns:r="http://schemas.openxmlformats.org/officeDocument/2006/relationships">
   <p:cSld>
     <p:spTree>
       <p:nvGrpSpPr>
@@ -36336,14 +35961,7 @@
         <p:cNvGrpSpPr/>
         <p:nvPr/>
       </p:nvGrpSpPr>
-      <p:grpSpPr>
-        <a:xfrm>
-          <a:off x="0" y="0"/>
-          <a:ext cx="0" cy="0"/>
-          <a:chOff x="0" y="0"/>
-          <a:chExt cx="0" cy="0"/>
-        </a:xfrm>
-      </p:grpSpPr>
+      <p:grpSpPr/>
       <p:pic>
         <p:nvPicPr>
           <p:cNvPr id="2" name="Picture 1" descr="bg_red.png"/>
@@ -36353,7 +35971,7 @@
           <p:nvPr/>
         </p:nvPicPr>
         <p:blipFill>
-          <a:blip r:embed="rId3"/>
+          <a:blip r:embed="rId2"/>
           <a:stretch>
             <a:fillRect/>
           </a:stretch>
@@ -36385,7 +36003,7 @@
           <a:noFill/>
         </p:spPr>
         <p:txBody>
-          <a:bodyPr wrap="square" lIns="0" tIns="0" rIns="0" bIns="0" anchor="t">
+          <a:bodyPr wrap="square" anchor="t" lIns="0" rIns="0" tIns="0" bIns="0">
             <a:spAutoFit/>
           </a:bodyPr>
           <a:lstStyle/>
@@ -36424,7 +36042,7 @@
           <a:noFill/>
         </p:spPr>
         <p:txBody>
-          <a:bodyPr wrap="square" lIns="0" tIns="0" rIns="0" bIns="0" anchor="t">
+          <a:bodyPr wrap="square" anchor="t" lIns="0" rIns="0" tIns="0" bIns="0">
             <a:spAutoFit/>
           </a:bodyPr>
           <a:lstStyle/>
@@ -36491,7 +36109,6 @@
           <a:lstStyle/>
           <a:p>
             <a:pPr algn="ctr"/>
-            <a:endParaRPr/>
           </a:p>
         </p:txBody>
       </p:sp>
@@ -36512,7 +36129,7 @@
           <a:noFill/>
         </p:spPr>
         <p:txBody>
-          <a:bodyPr wrap="square" lIns="0" tIns="0" rIns="0" bIns="0" anchor="t">
+          <a:bodyPr wrap="square" anchor="t" lIns="0" rIns="0" tIns="0" bIns="0">
             <a:spAutoFit/>
           </a:bodyPr>
           <a:lstStyle/>
@@ -36575,7 +36192,7 @@
           </a:fontRef>
         </p:style>
         <p:txBody>
-          <a:bodyPr wrap="square" lIns="73152" tIns="36576" rIns="73152" bIns="36576" rtlCol="0" anchor="ctr"/>
+          <a:bodyPr rtlCol="0" anchor="ctr" wrap="square" lIns="73152" rIns="73152" tIns="36576" bIns="36576"/>
           <a:lstStyle/>
           <a:p>
             <a:pPr algn="ctr"/>
@@ -36668,7 +36285,7 @@
           </a:fontRef>
         </p:style>
         <p:txBody>
-          <a:bodyPr wrap="square" lIns="73152" tIns="36576" rIns="73152" bIns="36576" rtlCol="0" anchor="ctr"/>
+          <a:bodyPr rtlCol="0" anchor="ctr" wrap="square" lIns="73152" rIns="73152" tIns="36576" bIns="36576"/>
           <a:lstStyle/>
           <a:p>
             <a:pPr algn="ctr"/>
@@ -36761,7 +36378,7 @@
           </a:fontRef>
         </p:style>
         <p:txBody>
-          <a:bodyPr wrap="square" lIns="73152" tIns="36576" rIns="73152" bIns="36576" rtlCol="0" anchor="ctr"/>
+          <a:bodyPr rtlCol="0" anchor="ctr" wrap="square" lIns="73152" rIns="73152" tIns="36576" bIns="36576"/>
           <a:lstStyle/>
           <a:p>
             <a:pPr algn="ctr"/>
@@ -36854,7 +36471,7 @@
           </a:fontRef>
         </p:style>
         <p:txBody>
-          <a:bodyPr wrap="square" lIns="73152" tIns="36576" rIns="73152" bIns="36576" rtlCol="0" anchor="ctr"/>
+          <a:bodyPr rtlCol="0" anchor="ctr" wrap="square" lIns="73152" rIns="73152" tIns="36576" bIns="36576"/>
           <a:lstStyle/>
           <a:p>
             <a:pPr algn="ctr"/>
@@ -36915,7 +36532,6 @@
           <a:lstStyle/>
           <a:p>
             <a:pPr algn="ctr"/>
-            <a:endParaRPr/>
           </a:p>
         </p:txBody>
       </p:sp>
@@ -36936,7 +36552,7 @@
           <a:noFill/>
         </p:spPr>
         <p:txBody>
-          <a:bodyPr wrap="square" lIns="0" tIns="0" rIns="0" bIns="0" anchor="t">
+          <a:bodyPr wrap="square" anchor="t" lIns="0" rIns="0" tIns="0" bIns="0">
             <a:spAutoFit/>
           </a:bodyPr>
           <a:lstStyle/>
@@ -36999,7 +36615,7 @@
           </a:fontRef>
         </p:style>
         <p:txBody>
-          <a:bodyPr wrap="square" lIns="73152" tIns="36576" rIns="73152" bIns="36576" rtlCol="0" anchor="ctr"/>
+          <a:bodyPr rtlCol="0" anchor="ctr" wrap="square" lIns="73152" rIns="73152" tIns="36576" bIns="36576"/>
           <a:lstStyle/>
           <a:p>
             <a:pPr algn="ctr"/>
@@ -37092,7 +36708,7 @@
           </a:fontRef>
         </p:style>
         <p:txBody>
-          <a:bodyPr wrap="square" lIns="73152" tIns="36576" rIns="73152" bIns="36576" rtlCol="0" anchor="ctr"/>
+          <a:bodyPr rtlCol="0" anchor="ctr" wrap="square" lIns="73152" rIns="73152" tIns="36576" bIns="36576"/>
           <a:lstStyle/>
           <a:p>
             <a:pPr algn="ctr"/>
@@ -37185,7 +36801,7 @@
           </a:fontRef>
         </p:style>
         <p:txBody>
-          <a:bodyPr wrap="square" lIns="73152" tIns="36576" rIns="73152" bIns="36576" rtlCol="0" anchor="ctr"/>
+          <a:bodyPr rtlCol="0" anchor="ctr" wrap="square" lIns="73152" rIns="73152" tIns="36576" bIns="36576"/>
           <a:lstStyle/>
           <a:p>
             <a:pPr algn="ctr"/>
@@ -37278,7 +36894,7 @@
           </a:fontRef>
         </p:style>
         <p:txBody>
-          <a:bodyPr wrap="square" lIns="73152" tIns="36576" rIns="73152" bIns="36576" rtlCol="0" anchor="ctr"/>
+          <a:bodyPr rtlCol="0" anchor="ctr" wrap="square" lIns="73152" rIns="73152" tIns="36576" bIns="36576"/>
           <a:lstStyle/>
           <a:p>
             <a:pPr algn="ctr"/>
@@ -37311,7 +36927,7 @@
           <a:noFill/>
         </p:spPr>
         <p:txBody>
-          <a:bodyPr wrap="square" lIns="0" tIns="0" rIns="0" bIns="0" anchor="t">
+          <a:bodyPr wrap="square" anchor="t" lIns="0" rIns="0" tIns="0" bIns="0">
             <a:spAutoFit/>
           </a:bodyPr>
           <a:lstStyle/>
@@ -37350,7 +36966,7 @@
           <a:noFill/>
         </p:spPr>
         <p:txBody>
-          <a:bodyPr wrap="square" lIns="0" tIns="0" rIns="0" bIns="0" anchor="t">
+          <a:bodyPr wrap="square" anchor="t" lIns="0" rIns="0" tIns="0" bIns="0">
             <a:spAutoFit/>
           </a:bodyPr>
           <a:lstStyle/>
@@ -37389,7 +37005,7 @@
           <a:noFill/>
         </p:spPr>
         <p:txBody>
-          <a:bodyPr wrap="square" lIns="0" tIns="0" rIns="0" bIns="0" anchor="t">
+          <a:bodyPr wrap="square" anchor="t" lIns="0" rIns="0" tIns="0" bIns="0">
             <a:spAutoFit/>
           </a:bodyPr>
           <a:lstStyle/>
@@ -37416,23 +37032,11 @@
   <p:clrMapOvr>
     <a:masterClrMapping/>
   </p:clrMapOvr>
-  <mc:AlternateContent xmlns:mc="http://schemas.openxmlformats.org/markup-compatibility/2006">
-    <mc:Choice xmlns:p14="http://schemas.microsoft.com/office/powerpoint/2010/main" Requires="p14">
-      <p:transition spd="med" p14:dur="700">
-        <p:fade thruBlk="1"/>
-      </p:transition>
-    </mc:Choice>
-    <mc:Fallback>
-      <p:transition spd="med">
-        <p:fade thruBlk="1"/>
-      </p:transition>
-    </mc:Fallback>
-  </mc:AlternateContent>
 </p:sld>
 </file>
 
 <file path=ppt/slides/slide7.xml><?xml version="1.0" encoding="utf-8"?>
-<p:sld xmlns:a="http://schemas.openxmlformats.org/drawingml/2006/main" xmlns:r="http://schemas.openxmlformats.org/officeDocument/2006/relationships" xmlns:p="http://schemas.openxmlformats.org/presentationml/2006/main">
+<p:sld xmlns:a="http://schemas.openxmlformats.org/drawingml/2006/main" xmlns:p="http://schemas.openxmlformats.org/presentationml/2006/main" xmlns:r="http://schemas.openxmlformats.org/officeDocument/2006/relationships">
   <p:cSld>
     <p:spTree>
       <p:nvGrpSpPr>
@@ -37440,14 +37044,7 @@
         <p:cNvGrpSpPr/>
         <p:nvPr/>
       </p:nvGrpSpPr>
-      <p:grpSpPr>
-        <a:xfrm>
-          <a:off x="0" y="0"/>
-          <a:ext cx="0" cy="0"/>
-          <a:chOff x="0" y="0"/>
-          <a:chExt cx="0" cy="0"/>
-        </a:xfrm>
-      </p:grpSpPr>
+      <p:grpSpPr/>
       <p:pic>
         <p:nvPicPr>
           <p:cNvPr id="2" name="Picture 1" descr="bg_red.png"/>
@@ -37457,7 +37054,7 @@
           <p:nvPr/>
         </p:nvPicPr>
         <p:blipFill>
-          <a:blip r:embed="rId3"/>
+          <a:blip r:embed="rId2"/>
           <a:stretch>
             <a:fillRect/>
           </a:stretch>
@@ -37489,7 +37086,7 @@
           <a:noFill/>
         </p:spPr>
         <p:txBody>
-          <a:bodyPr wrap="square" lIns="0" tIns="0" rIns="0" bIns="0" anchor="t">
+          <a:bodyPr wrap="square" anchor="t" lIns="0" rIns="0" tIns="0" bIns="0">
             <a:spAutoFit/>
           </a:bodyPr>
           <a:lstStyle/>
@@ -37528,7 +37125,7 @@
           <a:noFill/>
         </p:spPr>
         <p:txBody>
-          <a:bodyPr wrap="square" lIns="0" tIns="0" rIns="0" bIns="0" anchor="t">
+          <a:bodyPr wrap="square" anchor="t" lIns="0" rIns="0" tIns="0" bIns="0">
             <a:spAutoFit/>
           </a:bodyPr>
           <a:lstStyle/>
@@ -37567,7 +37164,7 @@
           <a:noFill/>
         </p:spPr>
         <p:txBody>
-          <a:bodyPr wrap="square" lIns="0" tIns="0" rIns="0" bIns="0" anchor="t">
+          <a:bodyPr wrap="square" anchor="t" lIns="0" rIns="0" tIns="0" bIns="0">
             <a:spAutoFit/>
           </a:bodyPr>
           <a:lstStyle/>
@@ -37630,7 +37227,7 @@
           </a:fontRef>
         </p:style>
         <p:txBody>
-          <a:bodyPr wrap="square" lIns="73152" tIns="36576" rIns="73152" bIns="36576" rtlCol="0" anchor="ctr"/>
+          <a:bodyPr rtlCol="0" anchor="ctr" wrap="square" lIns="73152" rIns="73152" tIns="36576" bIns="36576"/>
           <a:lstStyle/>
           <a:p>
             <a:pPr algn="ctr"/>
@@ -37723,7 +37320,7 @@
           </a:fontRef>
         </p:style>
         <p:txBody>
-          <a:bodyPr wrap="square" lIns="73152" tIns="36576" rIns="73152" bIns="36576" rtlCol="0" anchor="ctr"/>
+          <a:bodyPr rtlCol="0" anchor="ctr" wrap="square" lIns="73152" rIns="73152" tIns="36576" bIns="36576"/>
           <a:lstStyle/>
           <a:p>
             <a:pPr algn="ctr"/>
@@ -37853,7 +37450,7 @@
           </a:fontRef>
         </p:style>
         <p:txBody>
-          <a:bodyPr wrap="square" lIns="73152" tIns="36576" rIns="73152" bIns="36576" rtlCol="0" anchor="ctr"/>
+          <a:bodyPr rtlCol="0" anchor="ctr" wrap="square" lIns="73152" rIns="73152" tIns="36576" bIns="36576"/>
           <a:lstStyle/>
           <a:p>
             <a:pPr algn="ctr"/>
@@ -37910,7 +37507,7 @@
           </a:fontRef>
         </p:style>
         <p:txBody>
-          <a:bodyPr wrap="square" lIns="73152" tIns="36576" rIns="73152" bIns="36576" rtlCol="0" anchor="ctr"/>
+          <a:bodyPr rtlCol="0" anchor="ctr" wrap="square" lIns="73152" rIns="73152" tIns="36576" bIns="36576"/>
           <a:lstStyle/>
           <a:p>
             <a:pPr algn="ctr"/>
@@ -37967,7 +37564,7 @@
           </a:fontRef>
         </p:style>
         <p:txBody>
-          <a:bodyPr wrap="square" lIns="73152" tIns="36576" rIns="73152" bIns="36576" rtlCol="0" anchor="ctr"/>
+          <a:bodyPr rtlCol="0" anchor="ctr" wrap="square" lIns="73152" rIns="73152" tIns="36576" bIns="36576"/>
           <a:lstStyle/>
           <a:p>
             <a:pPr algn="ctr"/>
@@ -38060,7 +37657,7 @@
           </a:fontRef>
         </p:style>
         <p:txBody>
-          <a:bodyPr wrap="square" lIns="73152" tIns="36576" rIns="73152" bIns="36576" rtlCol="0" anchor="ctr"/>
+          <a:bodyPr rtlCol="0" anchor="ctr" wrap="square" lIns="73152" rIns="73152" tIns="36576" bIns="36576"/>
           <a:lstStyle/>
           <a:p>
             <a:pPr algn="ctr"/>
@@ -38153,7 +37750,7 @@
           </a:fontRef>
         </p:style>
         <p:txBody>
-          <a:bodyPr wrap="square" lIns="73152" tIns="36576" rIns="73152" bIns="36576" rtlCol="0" anchor="ctr"/>
+          <a:bodyPr rtlCol="0" anchor="ctr" wrap="square" lIns="73152" rIns="73152" tIns="36576" bIns="36576"/>
           <a:lstStyle/>
           <a:p>
             <a:pPr algn="ctr"/>
@@ -38246,7 +37843,7 @@
           </a:fontRef>
         </p:style>
         <p:txBody>
-          <a:bodyPr wrap="square" lIns="73152" tIns="36576" rIns="73152" bIns="36576" rtlCol="0" anchor="ctr"/>
+          <a:bodyPr rtlCol="0" anchor="ctr" wrap="square" lIns="73152" rIns="73152" tIns="36576" bIns="36576"/>
           <a:lstStyle/>
           <a:p>
             <a:pPr algn="ctr"/>
@@ -38339,7 +37936,7 @@
           </a:fontRef>
         </p:style>
         <p:txBody>
-          <a:bodyPr wrap="square" lIns="73152" tIns="36576" rIns="73152" bIns="36576" rtlCol="0" anchor="ctr"/>
+          <a:bodyPr rtlCol="0" anchor="ctr" wrap="square" lIns="73152" rIns="73152" tIns="36576" bIns="36576"/>
           <a:lstStyle/>
           <a:p>
             <a:pPr algn="ctr"/>
@@ -38400,7 +37997,6 @@
           <a:lstStyle/>
           <a:p>
             <a:pPr algn="ctr"/>
-            <a:endParaRPr/>
           </a:p>
         </p:txBody>
       </p:sp>
@@ -38421,7 +38017,7 @@
           <a:noFill/>
         </p:spPr>
         <p:txBody>
-          <a:bodyPr wrap="square" lIns="0" tIns="0" rIns="0" bIns="0" anchor="t">
+          <a:bodyPr wrap="square" anchor="t" lIns="0" rIns="0" tIns="0" bIns="0">
             <a:spAutoFit/>
           </a:bodyPr>
           <a:lstStyle/>
@@ -38460,7 +38056,7 @@
           <a:noFill/>
         </p:spPr>
         <p:txBody>
-          <a:bodyPr wrap="square" lIns="0" tIns="0" rIns="0" bIns="0" anchor="t">
+          <a:bodyPr wrap="square" anchor="t" lIns="0" rIns="0" tIns="0" bIns="0">
             <a:spAutoFit/>
           </a:bodyPr>
           <a:lstStyle/>
@@ -38486,12 +38082,15 @@
                 <a:spcPct val="135000"/>
               </a:lnSpc>
             </a:pPr>
-            <a:endParaRPr sz="1000" b="0" i="0">
-              <a:solidFill>
-                <a:srgbClr val="F4F7FB"/>
-              </a:solidFill>
-              <a:latin typeface="Segoe UI"/>
-            </a:endParaRPr>
+            <a:r>
+              <a:rPr sz="1000" b="0" i="0">
+                <a:solidFill>
+                  <a:srgbClr val="F4F7FB"/>
+                </a:solidFill>
+                <a:latin typeface="Segoe UI"/>
+              </a:rPr>
+              <a:t/>
+            </a:r>
           </a:p>
           <a:p>
             <a:pPr algn="l">
@@ -38515,12 +38114,15 @@
                 <a:spcPct val="135000"/>
               </a:lnSpc>
             </a:pPr>
-            <a:endParaRPr sz="1000" b="0" i="0">
-              <a:solidFill>
-                <a:srgbClr val="F4F7FB"/>
-              </a:solidFill>
-              <a:latin typeface="Segoe UI"/>
-            </a:endParaRPr>
+            <a:r>
+              <a:rPr sz="1000" b="0" i="0">
+                <a:solidFill>
+                  <a:srgbClr val="F4F7FB"/>
+                </a:solidFill>
+                <a:latin typeface="Segoe UI"/>
+              </a:rPr>
+              <a:t/>
+            </a:r>
           </a:p>
           <a:p>
             <a:pPr algn="l">
@@ -38585,7 +38187,6 @@
           <a:lstStyle/>
           <a:p>
             <a:pPr algn="ctr"/>
-            <a:endParaRPr/>
           </a:p>
         </p:txBody>
       </p:sp>
@@ -38606,7 +38207,7 @@
           <a:noFill/>
         </p:spPr>
         <p:txBody>
-          <a:bodyPr wrap="square" lIns="0" tIns="0" rIns="0" bIns="0" anchor="t">
+          <a:bodyPr wrap="square" anchor="t" lIns="0" rIns="0" tIns="0" bIns="0">
             <a:spAutoFit/>
           </a:bodyPr>
           <a:lstStyle/>
@@ -38661,7 +38262,7 @@
           <a:noFill/>
         </p:spPr>
         <p:txBody>
-          <a:bodyPr wrap="square" lIns="0" tIns="0" rIns="0" bIns="0" anchor="t">
+          <a:bodyPr wrap="square" anchor="t" lIns="0" rIns="0" tIns="0" bIns="0">
             <a:spAutoFit/>
           </a:bodyPr>
           <a:lstStyle/>
@@ -38700,7 +38301,7 @@
           <a:noFill/>
         </p:spPr>
         <p:txBody>
-          <a:bodyPr wrap="square" lIns="0" tIns="0" rIns="0" bIns="0" anchor="t">
+          <a:bodyPr wrap="square" anchor="t" lIns="0" rIns="0" tIns="0" bIns="0">
             <a:spAutoFit/>
           </a:bodyPr>
           <a:lstStyle/>
@@ -38727,23 +38328,11 @@
   <p:clrMapOvr>
     <a:masterClrMapping/>
   </p:clrMapOvr>
-  <mc:AlternateContent xmlns:mc="http://schemas.openxmlformats.org/markup-compatibility/2006">
-    <mc:Choice xmlns:p14="http://schemas.microsoft.com/office/powerpoint/2010/main" Requires="p14">
-      <p:transition spd="med" p14:dur="700">
-        <p:fade thruBlk="1"/>
-      </p:transition>
-    </mc:Choice>
-    <mc:Fallback>
-      <p:transition spd="med">
-        <p:fade thruBlk="1"/>
-      </p:transition>
-    </mc:Fallback>
-  </mc:AlternateContent>
 </p:sld>
 </file>
 
 <file path=ppt/slides/slide8.xml><?xml version="1.0" encoding="utf-8"?>
-<p:sld xmlns:a="http://schemas.openxmlformats.org/drawingml/2006/main" xmlns:r="http://schemas.openxmlformats.org/officeDocument/2006/relationships" xmlns:p="http://schemas.openxmlformats.org/presentationml/2006/main">
+<p:sld xmlns:a="http://schemas.openxmlformats.org/drawingml/2006/main" xmlns:p="http://schemas.openxmlformats.org/presentationml/2006/main" xmlns:r="http://schemas.openxmlformats.org/officeDocument/2006/relationships">
   <p:cSld>
     <p:spTree>
       <p:nvGrpSpPr>
@@ -38751,14 +38340,7 @@
         <p:cNvGrpSpPr/>
         <p:nvPr/>
       </p:nvGrpSpPr>
-      <p:grpSpPr>
-        <a:xfrm>
-          <a:off x="0" y="0"/>
-          <a:ext cx="0" cy="0"/>
-          <a:chOff x="0" y="0"/>
-          <a:chExt cx="0" cy="0"/>
-        </a:xfrm>
-      </p:grpSpPr>
+      <p:grpSpPr/>
       <p:pic>
         <p:nvPicPr>
           <p:cNvPr id="2" name="Picture 1" descr="bg_deep.png"/>
@@ -38768,7 +38350,7 @@
           <p:nvPr/>
         </p:nvPicPr>
         <p:blipFill>
-          <a:blip r:embed="rId3"/>
+          <a:blip r:embed="rId2"/>
           <a:stretch>
             <a:fillRect/>
           </a:stretch>
@@ -38800,7 +38382,7 @@
           <a:noFill/>
         </p:spPr>
         <p:txBody>
-          <a:bodyPr wrap="square" lIns="0" tIns="0" rIns="0" bIns="0" anchor="t">
+          <a:bodyPr wrap="square" anchor="t" lIns="0" rIns="0" tIns="0" bIns="0">
             <a:spAutoFit/>
           </a:bodyPr>
           <a:lstStyle/>
@@ -38839,7 +38421,7 @@
           <a:noFill/>
         </p:spPr>
         <p:txBody>
-          <a:bodyPr wrap="square" lIns="0" tIns="0" rIns="0" bIns="0" anchor="t">
+          <a:bodyPr wrap="square" anchor="t" lIns="0" rIns="0" tIns="0" bIns="0">
             <a:spAutoFit/>
           </a:bodyPr>
           <a:lstStyle/>
@@ -38902,7 +38484,7 @@
           </a:fontRef>
         </p:style>
         <p:txBody>
-          <a:bodyPr wrap="square" lIns="73152" tIns="36576" rIns="73152" bIns="36576" rtlCol="0" anchor="ctr"/>
+          <a:bodyPr rtlCol="0" anchor="ctr" wrap="square" lIns="73152" rIns="73152" tIns="36576" bIns="36576"/>
           <a:lstStyle/>
           <a:p>
             <a:pPr algn="ctr"/>
@@ -39013,7 +38595,7 @@
           </a:fontRef>
         </p:style>
         <p:txBody>
-          <a:bodyPr wrap="square" lIns="73152" tIns="36576" rIns="73152" bIns="36576" rtlCol="0" anchor="ctr"/>
+          <a:bodyPr rtlCol="0" anchor="ctr" wrap="square" lIns="73152" rIns="73152" tIns="36576" bIns="36576"/>
           <a:lstStyle/>
           <a:p>
             <a:pPr algn="ctr"/>
@@ -39123,7 +38705,7 @@
           </a:fontRef>
         </p:style>
         <p:txBody>
-          <a:bodyPr wrap="square" lIns="73152" tIns="36576" rIns="73152" bIns="36576" rtlCol="0" anchor="ctr"/>
+          <a:bodyPr rtlCol="0" anchor="ctr" wrap="square" lIns="73152" rIns="73152" tIns="36576" bIns="36576"/>
           <a:lstStyle/>
           <a:p>
             <a:pPr algn="ctr"/>
@@ -39233,7 +38815,7 @@
           </a:fontRef>
         </p:style>
         <p:txBody>
-          <a:bodyPr wrap="square" lIns="73152" tIns="36576" rIns="73152" bIns="36576" rtlCol="0" anchor="ctr"/>
+          <a:bodyPr rtlCol="0" anchor="ctr" wrap="square" lIns="73152" rIns="73152" tIns="36576" bIns="36576"/>
           <a:lstStyle/>
           <a:p>
             <a:pPr algn="ctr"/>
@@ -39343,7 +38925,7 @@
           </a:fontRef>
         </p:style>
         <p:txBody>
-          <a:bodyPr wrap="square" lIns="73152" tIns="36576" rIns="73152" bIns="36576" rtlCol="0" anchor="ctr"/>
+          <a:bodyPr rtlCol="0" anchor="ctr" wrap="square" lIns="73152" rIns="73152" tIns="36576" bIns="36576"/>
           <a:lstStyle/>
           <a:p>
             <a:pPr algn="ctr"/>
@@ -39421,7 +39003,6 @@
           <a:lstStyle/>
           <a:p>
             <a:pPr algn="ctr"/>
-            <a:endParaRPr/>
           </a:p>
         </p:txBody>
       </p:sp>
@@ -39442,7 +39023,7 @@
           <a:noFill/>
         </p:spPr>
         <p:txBody>
-          <a:bodyPr wrap="square" lIns="0" tIns="0" rIns="0" bIns="0" anchor="t">
+          <a:bodyPr wrap="square" anchor="t" lIns="0" rIns="0" tIns="0" bIns="0">
             <a:spAutoFit/>
           </a:bodyPr>
           <a:lstStyle/>
@@ -39481,7 +39062,7 @@
           <a:noFill/>
         </p:spPr>
         <p:txBody>
-          <a:bodyPr wrap="square" lIns="0" tIns="0" rIns="0" bIns="0" anchor="t">
+          <a:bodyPr wrap="square" anchor="t" lIns="0" rIns="0" tIns="0" bIns="0">
             <a:spAutoFit/>
           </a:bodyPr>
           <a:lstStyle/>
@@ -39507,12 +39088,15 @@
                 <a:spcPct val="140000"/>
               </a:lnSpc>
             </a:pPr>
-            <a:endParaRPr sz="1100" b="0" i="0">
-              <a:solidFill>
-                <a:srgbClr val="F4F7FB"/>
-              </a:solidFill>
-              <a:latin typeface="Segoe UI"/>
-            </a:endParaRPr>
+            <a:r>
+              <a:rPr sz="1100" b="0" i="0">
+                <a:solidFill>
+                  <a:srgbClr val="F4F7FB"/>
+                </a:solidFill>
+                <a:latin typeface="Segoe UI"/>
+              </a:rPr>
+              <a:t/>
+            </a:r>
           </a:p>
           <a:p>
             <a:pPr algn="l">
@@ -39577,7 +39161,6 @@
           <a:lstStyle/>
           <a:p>
             <a:pPr algn="ctr"/>
-            <a:endParaRPr/>
           </a:p>
         </p:txBody>
       </p:sp>
@@ -39598,7 +39181,7 @@
           <a:noFill/>
         </p:spPr>
         <p:txBody>
-          <a:bodyPr wrap="square" lIns="0" tIns="0" rIns="0" bIns="0" anchor="t">
+          <a:bodyPr wrap="square" anchor="t" lIns="0" rIns="0" tIns="0" bIns="0">
             <a:spAutoFit/>
           </a:bodyPr>
           <a:lstStyle/>
@@ -39637,7 +39220,7 @@
           <a:noFill/>
         </p:spPr>
         <p:txBody>
-          <a:bodyPr wrap="square" lIns="0" tIns="0" rIns="0" bIns="0" anchor="t">
+          <a:bodyPr wrap="square" anchor="t" lIns="0" rIns="0" tIns="0" bIns="0">
             <a:spAutoFit/>
           </a:bodyPr>
           <a:lstStyle/>
@@ -39663,12 +39246,15 @@
                 <a:spcPct val="140000"/>
               </a:lnSpc>
             </a:pPr>
-            <a:endParaRPr sz="1100" b="0" i="0">
-              <a:solidFill>
-                <a:srgbClr val="F4F7FB"/>
-              </a:solidFill>
-              <a:latin typeface="Segoe UI"/>
-            </a:endParaRPr>
+            <a:r>
+              <a:rPr sz="1100" b="0" i="0">
+                <a:solidFill>
+                  <a:srgbClr val="F4F7FB"/>
+                </a:solidFill>
+                <a:latin typeface="Segoe UI"/>
+              </a:rPr>
+              <a:t/>
+            </a:r>
           </a:p>
           <a:p>
             <a:pPr algn="l">
@@ -39705,7 +39291,7 @@
           <a:noFill/>
         </p:spPr>
         <p:txBody>
-          <a:bodyPr wrap="square" lIns="0" tIns="0" rIns="0" bIns="0" anchor="t">
+          <a:bodyPr wrap="square" anchor="t" lIns="0" rIns="0" tIns="0" bIns="0">
             <a:spAutoFit/>
           </a:bodyPr>
           <a:lstStyle/>
@@ -39744,7 +39330,7 @@
           <a:noFill/>
         </p:spPr>
         <p:txBody>
-          <a:bodyPr wrap="square" lIns="0" tIns="0" rIns="0" bIns="0" anchor="t">
+          <a:bodyPr wrap="square" anchor="t" lIns="0" rIns="0" tIns="0" bIns="0">
             <a:spAutoFit/>
           </a:bodyPr>
           <a:lstStyle/>
@@ -39771,23 +39357,11 @@
   <p:clrMapOvr>
     <a:masterClrMapping/>
   </p:clrMapOvr>
-  <mc:AlternateContent xmlns:mc="http://schemas.openxmlformats.org/markup-compatibility/2006">
-    <mc:Choice xmlns:p14="http://schemas.microsoft.com/office/powerpoint/2010/main" Requires="p14">
-      <p:transition spd="med" p14:dur="700">
-        <p:fade thruBlk="1"/>
-      </p:transition>
-    </mc:Choice>
-    <mc:Fallback>
-      <p:transition spd="med">
-        <p:fade thruBlk="1"/>
-      </p:transition>
-    </mc:Fallback>
-  </mc:AlternateContent>
 </p:sld>
 </file>
 
 <file path=ppt/slides/slide9.xml><?xml version="1.0" encoding="utf-8"?>
-<p:sld xmlns:a="http://schemas.openxmlformats.org/drawingml/2006/main" xmlns:r="http://schemas.openxmlformats.org/officeDocument/2006/relationships" xmlns:p="http://schemas.openxmlformats.org/presentationml/2006/main">
+<p:sld xmlns:a="http://schemas.openxmlformats.org/drawingml/2006/main" xmlns:p="http://schemas.openxmlformats.org/presentationml/2006/main" xmlns:r="http://schemas.openxmlformats.org/officeDocument/2006/relationships">
   <p:cSld>
     <p:spTree>
       <p:nvGrpSpPr>
@@ -39795,14 +39369,7 @@
         <p:cNvGrpSpPr/>
         <p:nvPr/>
       </p:nvGrpSpPr>
-      <p:grpSpPr>
-        <a:xfrm>
-          <a:off x="0" y="0"/>
-          <a:ext cx="0" cy="0"/>
-          <a:chOff x="0" y="0"/>
-          <a:chExt cx="0" cy="0"/>
-        </a:xfrm>
-      </p:grpSpPr>
+      <p:grpSpPr/>
       <p:pic>
         <p:nvPicPr>
           <p:cNvPr id="2" name="Picture 1" descr="bg_deep.png"/>
@@ -39844,7 +39411,7 @@
           <a:noFill/>
         </p:spPr>
         <p:txBody>
-          <a:bodyPr wrap="square" lIns="0" tIns="0" rIns="0" bIns="0" anchor="t">
+          <a:bodyPr wrap="square" anchor="t" lIns="0" rIns="0" tIns="0" bIns="0">
             <a:spAutoFit/>
           </a:bodyPr>
           <a:lstStyle/>
@@ -39883,7 +39450,7 @@
           <a:noFill/>
         </p:spPr>
         <p:txBody>
-          <a:bodyPr wrap="square" lIns="0" tIns="0" rIns="0" bIns="0" anchor="t">
+          <a:bodyPr wrap="square" anchor="t" lIns="0" rIns="0" tIns="0" bIns="0">
             <a:spAutoFit/>
           </a:bodyPr>
           <a:lstStyle/>
@@ -39922,7 +39489,7 @@
           <a:noFill/>
         </p:spPr>
         <p:txBody>
-          <a:bodyPr wrap="square" lIns="0" tIns="0" rIns="0" bIns="0" anchor="t">
+          <a:bodyPr wrap="square" anchor="t" lIns="0" rIns="0" tIns="0" bIns="0">
             <a:spAutoFit/>
           </a:bodyPr>
           <a:lstStyle/>
@@ -39985,7 +39552,7 @@
           </a:fontRef>
         </p:style>
         <p:txBody>
-          <a:bodyPr wrap="square" lIns="73152" tIns="36576" rIns="73152" bIns="36576" rtlCol="0" anchor="ctr"/>
+          <a:bodyPr rtlCol="0" anchor="ctr" wrap="square" lIns="73152" rIns="73152" tIns="36576" bIns="36576"/>
           <a:lstStyle/>
           <a:p>
             <a:pPr algn="ctr"/>
@@ -40095,7 +39662,7 @@
           </a:fontRef>
         </p:style>
         <p:txBody>
-          <a:bodyPr wrap="square" lIns="73152" tIns="36576" rIns="73152" bIns="36576" rtlCol="0" anchor="ctr"/>
+          <a:bodyPr rtlCol="0" anchor="ctr" wrap="square" lIns="73152" rIns="73152" tIns="36576" bIns="36576"/>
           <a:lstStyle/>
           <a:p>
             <a:pPr algn="ctr"/>
@@ -40205,7 +39772,7 @@
           </a:fontRef>
         </p:style>
         <p:txBody>
-          <a:bodyPr wrap="square" lIns="73152" tIns="36576" rIns="73152" bIns="36576" rtlCol="0" anchor="ctr"/>
+          <a:bodyPr rtlCol="0" anchor="ctr" wrap="square" lIns="73152" rIns="73152" tIns="36576" bIns="36576"/>
           <a:lstStyle/>
           <a:p>
             <a:pPr algn="ctr"/>
@@ -40315,7 +39882,7 @@
           </a:fontRef>
         </p:style>
         <p:txBody>
-          <a:bodyPr wrap="square" lIns="73152" tIns="36576" rIns="73152" bIns="36576" rtlCol="0" anchor="ctr"/>
+          <a:bodyPr rtlCol="0" anchor="ctr" wrap="square" lIns="73152" rIns="73152" tIns="36576" bIns="36576"/>
           <a:lstStyle/>
           <a:p>
             <a:pPr algn="ctr"/>
@@ -40426,7 +39993,7 @@
           </a:fontRef>
         </p:style>
         <p:txBody>
-          <a:bodyPr wrap="square" lIns="73152" tIns="36576" rIns="73152" bIns="36576" rtlCol="0" anchor="ctr"/>
+          <a:bodyPr rtlCol="0" anchor="ctr" wrap="square" lIns="73152" rIns="73152" tIns="36576" bIns="36576"/>
           <a:lstStyle/>
           <a:p>
             <a:pPr algn="ctr"/>
@@ -40477,7 +40044,7 @@
           <a:noFill/>
         </p:spPr>
         <p:txBody>
-          <a:bodyPr wrap="square" lIns="0" tIns="0" rIns="0" bIns="0" anchor="t">
+          <a:bodyPr wrap="square" anchor="t" lIns="0" rIns="0" tIns="0" bIns="0">
             <a:spAutoFit/>
           </a:bodyPr>
           <a:lstStyle/>
@@ -40516,7 +40083,7 @@
           <a:noFill/>
         </p:spPr>
         <p:txBody>
-          <a:bodyPr wrap="square" lIns="0" tIns="0" rIns="0" bIns="0" anchor="t">
+          <a:bodyPr wrap="square" anchor="t" lIns="0" rIns="0" tIns="0" bIns="0">
             <a:spAutoFit/>
           </a:bodyPr>
           <a:lstStyle/>
@@ -40555,7 +40122,7 @@
           <a:noFill/>
         </p:spPr>
         <p:txBody>
-          <a:bodyPr wrap="square" lIns="0" tIns="0" rIns="0" bIns="0" anchor="t">
+          <a:bodyPr wrap="square" anchor="t" lIns="0" rIns="0" tIns="0" bIns="0">
             <a:spAutoFit/>
           </a:bodyPr>
           <a:lstStyle/>
@@ -40594,7 +40161,7 @@
           <a:noFill/>
         </p:spPr>
         <p:txBody>
-          <a:bodyPr wrap="square" lIns="0" tIns="0" rIns="0" bIns="0" anchor="t">
+          <a:bodyPr wrap="square" anchor="t" lIns="0" rIns="0" tIns="0" bIns="0">
             <a:spAutoFit/>
           </a:bodyPr>
           <a:lstStyle/>
@@ -40633,7 +40200,7 @@
           <a:noFill/>
         </p:spPr>
         <p:txBody>
-          <a:bodyPr wrap="square" lIns="0" tIns="0" rIns="0" bIns="0" anchor="t">
+          <a:bodyPr wrap="square" anchor="t" lIns="0" rIns="0" tIns="0" bIns="0">
             <a:spAutoFit/>
           </a:bodyPr>
           <a:lstStyle/>
@@ -40672,7 +40239,7 @@
           <a:noFill/>
         </p:spPr>
         <p:txBody>
-          <a:bodyPr wrap="square" lIns="0" tIns="0" rIns="0" bIns="0" anchor="t">
+          <a:bodyPr wrap="square" anchor="t" lIns="0" rIns="0" tIns="0" bIns="0">
             <a:spAutoFit/>
           </a:bodyPr>
           <a:lstStyle/>
@@ -40711,7 +40278,7 @@
           <a:noFill/>
         </p:spPr>
         <p:txBody>
-          <a:bodyPr wrap="square" lIns="0" tIns="0" rIns="0" bIns="0" anchor="t">
+          <a:bodyPr wrap="square" anchor="t" lIns="0" rIns="0" tIns="0" bIns="0">
             <a:spAutoFit/>
           </a:bodyPr>
           <a:lstStyle/>
@@ -40750,7 +40317,7 @@
           <a:noFill/>
         </p:spPr>
         <p:txBody>
-          <a:bodyPr wrap="square" lIns="0" tIns="0" rIns="0" bIns="0" anchor="t">
+          <a:bodyPr wrap="square" anchor="t" lIns="0" rIns="0" tIns="0" bIns="0">
             <a:spAutoFit/>
           </a:bodyPr>
           <a:lstStyle/>
@@ -40789,7 +40356,7 @@
           <a:noFill/>
         </p:spPr>
         <p:txBody>
-          <a:bodyPr wrap="square" lIns="0" tIns="0" rIns="0" bIns="0" anchor="t">
+          <a:bodyPr wrap="square" anchor="t" lIns="0" rIns="0" tIns="0" bIns="0">
             <a:spAutoFit/>
           </a:bodyPr>
           <a:lstStyle/>
@@ -40828,7 +40395,7 @@
           <a:noFill/>
         </p:spPr>
         <p:txBody>
-          <a:bodyPr wrap="square" lIns="0" tIns="0" rIns="0" bIns="0" anchor="t">
+          <a:bodyPr wrap="square" anchor="t" lIns="0" rIns="0" tIns="0" bIns="0">
             <a:spAutoFit/>
           </a:bodyPr>
           <a:lstStyle/>
@@ -40855,18 +40422,6 @@
   <p:clrMapOvr>
     <a:masterClrMapping/>
   </p:clrMapOvr>
-  <mc:AlternateContent xmlns:mc="http://schemas.openxmlformats.org/markup-compatibility/2006">
-    <mc:Choice xmlns:p14="http://schemas.microsoft.com/office/powerpoint/2010/main" Requires="p14">
-      <p:transition spd="med" p14:dur="700">
-        <p:fade thruBlk="1"/>
-      </p:transition>
-    </mc:Choice>
-    <mc:Fallback>
-      <p:transition spd="med">
-        <p:fade thruBlk="1"/>
-      </p:transition>
-    </mc:Fallback>
-  </mc:AlternateContent>
 </p:sld>
 </file>
 
@@ -41201,44 +40756,44 @@
         <a:sysClr val="window" lastClr="FFFFFF"/>
       </a:lt1>
       <a:dk2>
-        <a:srgbClr val="44546A"/>
+        <a:srgbClr val="1F497D"/>
       </a:dk2>
       <a:lt2>
-        <a:srgbClr val="E7E6E6"/>
+        <a:srgbClr val="EEECE1"/>
       </a:lt2>
       <a:accent1>
-        <a:srgbClr val="4472C4"/>
+        <a:srgbClr val="4F81BD"/>
       </a:accent1>
       <a:accent2>
-        <a:srgbClr val="ED7D31"/>
+        <a:srgbClr val="C0504D"/>
       </a:accent2>
       <a:accent3>
-        <a:srgbClr val="A5A5A5"/>
+        <a:srgbClr val="9BBB59"/>
       </a:accent3>
       <a:accent4>
-        <a:srgbClr val="FFC000"/>
+        <a:srgbClr val="8064A2"/>
       </a:accent4>
       <a:accent5>
-        <a:srgbClr val="5B9BD5"/>
+        <a:srgbClr val="4BACC6"/>
       </a:accent5>
       <a:accent6>
-        <a:srgbClr val="70AD47"/>
+        <a:srgbClr val="F79646"/>
       </a:accent6>
       <a:hlink>
-        <a:srgbClr val="0563C1"/>
+        <a:srgbClr val="0000FF"/>
       </a:hlink>
       <a:folHlink>
-        <a:srgbClr val="954F72"/>
+        <a:srgbClr val="800080"/>
       </a:folHlink>
     </a:clrScheme>
     <a:fontScheme name="Office">
       <a:majorFont>
-        <a:latin typeface="Calibri Light" panose="020F0302020204030204"/>
+        <a:latin typeface="Calibri"/>
         <a:ea typeface=""/>
         <a:cs typeface=""/>
-        <a:font script="Jpan" typeface="游ゴシック Light"/>
+        <a:font script="Jpan" typeface="ＭＳ Ｐゴシック"/>
         <a:font script="Hang" typeface="맑은 고딕"/>
-        <a:font script="Hans" typeface="等线 Light"/>
+        <a:font script="Hans" typeface="宋体"/>
         <a:font script="Hant" typeface="新細明體"/>
         <a:font script="Arab" typeface="Times New Roman"/>
         <a:font script="Hebr" typeface="Times New Roman"/>
@@ -41266,31 +40821,14 @@
         <a:font script="Viet" typeface="Times New Roman"/>
         <a:font script="Uigh" typeface="Microsoft Uighur"/>
         <a:font script="Geor" typeface="Sylfaen"/>
-        <a:font script="Armn" typeface="Arial"/>
-        <a:font script="Bugi" typeface="Leelawadee UI"/>
-        <a:font script="Bopo" typeface="Microsoft JhengHei"/>
-        <a:font script="Java" typeface="Javanese Text"/>
-        <a:font script="Lisu" typeface="Segoe UI"/>
-        <a:font script="Mymr" typeface="Myanmar Text"/>
-        <a:font script="Nkoo" typeface="Ebrima"/>
-        <a:font script="Olck" typeface="Nirmala UI"/>
-        <a:font script="Osma" typeface="Ebrima"/>
-        <a:font script="Phag" typeface="Phagspa"/>
-        <a:font script="Syrn" typeface="Estrangelo Edessa"/>
-        <a:font script="Syrj" typeface="Estrangelo Edessa"/>
-        <a:font script="Syre" typeface="Estrangelo Edessa"/>
-        <a:font script="Sora" typeface="Nirmala UI"/>
-        <a:font script="Tale" typeface="Microsoft Tai Le"/>
-        <a:font script="Talu" typeface="Microsoft New Tai Lue"/>
-        <a:font script="Tfng" typeface="Ebrima"/>
       </a:majorFont>
       <a:minorFont>
-        <a:latin typeface="Calibri" panose="020F0502020204030204"/>
+        <a:latin typeface="Calibri"/>
         <a:ea typeface=""/>
         <a:cs typeface=""/>
-        <a:font script="Jpan" typeface="游ゴシック"/>
+        <a:font script="Jpan" typeface="ＭＳ Ｐゴシック"/>
         <a:font script="Hang" typeface="맑은 고딕"/>
-        <a:font script="Hans" typeface="等线"/>
+        <a:font script="Hans" typeface="宋体"/>
         <a:font script="Hant" typeface="新細明體"/>
         <a:font script="Arab" typeface="Arial"/>
         <a:font script="Hebr" typeface="Arial"/>
@@ -41318,23 +40856,6 @@
         <a:font script="Viet" typeface="Arial"/>
         <a:font script="Uigh" typeface="Microsoft Uighur"/>
         <a:font script="Geor" typeface="Sylfaen"/>
-        <a:font script="Armn" typeface="Arial"/>
-        <a:font script="Bugi" typeface="Leelawadee UI"/>
-        <a:font script="Bopo" typeface="Microsoft JhengHei"/>
-        <a:font script="Java" typeface="Javanese Text"/>
-        <a:font script="Lisu" typeface="Segoe UI"/>
-        <a:font script="Mymr" typeface="Myanmar Text"/>
-        <a:font script="Nkoo" typeface="Ebrima"/>
-        <a:font script="Olck" typeface="Nirmala UI"/>
-        <a:font script="Osma" typeface="Ebrima"/>
-        <a:font script="Phag" typeface="Phagspa"/>
-        <a:font script="Syrn" typeface="Estrangelo Edessa"/>
-        <a:font script="Syrj" typeface="Estrangelo Edessa"/>
-        <a:font script="Syre" typeface="Estrangelo Edessa"/>
-        <a:font script="Sora" typeface="Nirmala UI"/>
-        <a:font script="Tale" typeface="Microsoft Tai Le"/>
-        <a:font script="Talu" typeface="Microsoft New Tai Lue"/>
-        <a:font script="Tfng" typeface="Ebrima"/>
       </a:minorFont>
     </a:fontScheme>
     <a:fmtScheme name="Office">
@@ -41346,141 +40867,200 @@
           <a:gsLst>
             <a:gs pos="0">
               <a:schemeClr val="phClr">
-                <a:lumMod val="110000"/>
-                <a:satMod val="105000"/>
-                <a:tint val="67000"/>
+                <a:tint val="50000"/>
+                <a:satMod val="300000"/>
               </a:schemeClr>
             </a:gs>
-            <a:gs pos="50000">
+            <a:gs pos="35000">
               <a:schemeClr val="phClr">
-                <a:lumMod val="105000"/>
-                <a:satMod val="103000"/>
-                <a:tint val="73000"/>
+                <a:tint val="37000"/>
+                <a:satMod val="300000"/>
               </a:schemeClr>
             </a:gs>
             <a:gs pos="100000">
               <a:schemeClr val="phClr">
-                <a:lumMod val="105000"/>
-                <a:satMod val="109000"/>
-                <a:tint val="81000"/>
+                <a:tint val="15000"/>
+                <a:satMod val="350000"/>
               </a:schemeClr>
             </a:gs>
           </a:gsLst>
-          <a:lin ang="5400000" scaled="0"/>
+          <a:lin ang="16200000" scaled="1"/>
         </a:gradFill>
         <a:gradFill rotWithShape="1">
           <a:gsLst>
             <a:gs pos="0">
               <a:schemeClr val="phClr">
-                <a:satMod val="103000"/>
-                <a:lumMod val="102000"/>
-                <a:tint val="94000"/>
-              </a:schemeClr>
-            </a:gs>
-            <a:gs pos="50000">
-              <a:schemeClr val="phClr">
-                <a:satMod val="110000"/>
-                <a:lumMod val="100000"/>
+                <a:tint val="100000"/>
                 <a:shade val="100000"/>
+                <a:satMod val="130000"/>
               </a:schemeClr>
             </a:gs>
             <a:gs pos="100000">
               <a:schemeClr val="phClr">
-                <a:lumMod val="99000"/>
-                <a:satMod val="120000"/>
-                <a:shade val="78000"/>
+                <a:tint val="50000"/>
+                <a:shade val="100000"/>
+                <a:satMod val="350000"/>
               </a:schemeClr>
             </a:gs>
           </a:gsLst>
-          <a:lin ang="5400000" scaled="0"/>
+          <a:lin ang="16200000" scaled="0"/>
         </a:gradFill>
       </a:fillStyleLst>
       <a:lnStyleLst>
-        <a:ln w="6350" cap="flat" cmpd="sng" algn="ctr">
+        <a:ln w="9525" cap="flat" cmpd="sng" algn="ctr">
+          <a:solidFill>
+            <a:schemeClr val="phClr">
+              <a:shade val="95000"/>
+              <a:satMod val="105000"/>
+            </a:schemeClr>
+          </a:solidFill>
+          <a:prstDash val="solid"/>
+        </a:ln>
+        <a:ln w="25400" cap="flat" cmpd="sng" algn="ctr">
           <a:solidFill>
             <a:schemeClr val="phClr"/>
           </a:solidFill>
           <a:prstDash val="solid"/>
-          <a:miter lim="800000"/>
         </a:ln>
-        <a:ln w="12700" cap="flat" cmpd="sng" algn="ctr">
+        <a:ln w="38100" cap="flat" cmpd="sng" algn="ctr">
           <a:solidFill>
             <a:schemeClr val="phClr"/>
           </a:solidFill>
           <a:prstDash val="solid"/>
-          <a:miter lim="800000"/>
-        </a:ln>
-        <a:ln w="19050" cap="flat" cmpd="sng" algn="ctr">
-          <a:solidFill>
-            <a:schemeClr val="phClr"/>
-          </a:solidFill>
-          <a:prstDash val="solid"/>
-          <a:miter lim="800000"/>
         </a:ln>
       </a:lnStyleLst>
       <a:effectStyleLst>
         <a:effectStyle>
-          <a:effectLst/>
-        </a:effectStyle>
-        <a:effectStyle>
-          <a:effectLst/>
+          <a:effectLst>
+            <a:outerShdw blurRad="40000" dist="20000" dir="5400000" rotWithShape="0">
+              <a:srgbClr val="000000">
+                <a:alpha val="38000"/>
+              </a:srgbClr>
+            </a:outerShdw>
+          </a:effectLst>
         </a:effectStyle>
         <a:effectStyle>
           <a:effectLst>
-            <a:outerShdw blurRad="57150" dist="19050" dir="5400000" algn="ctr" rotWithShape="0">
+            <a:outerShdw blurRad="40000" dist="23000" dir="5400000" rotWithShape="0">
               <a:srgbClr val="000000">
-                <a:alpha val="63000"/>
+                <a:alpha val="35000"/>
               </a:srgbClr>
             </a:outerShdw>
           </a:effectLst>
+        </a:effectStyle>
+        <a:effectStyle>
+          <a:effectLst>
+            <a:outerShdw blurRad="40000" dist="23000" dir="5400000" rotWithShape="0">
+              <a:srgbClr val="000000">
+                <a:alpha val="35000"/>
+              </a:srgbClr>
+            </a:outerShdw>
+          </a:effectLst>
+          <a:scene3d>
+            <a:camera prst="orthographicFront">
+              <a:rot lat="0" lon="0" rev="0"/>
+            </a:camera>
+            <a:lightRig rig="threePt" dir="t">
+              <a:rot lat="0" lon="0" rev="1200000"/>
+            </a:lightRig>
+          </a:scene3d>
+          <a:sp3d>
+            <a:bevelT w="63500" h="25400"/>
+          </a:sp3d>
         </a:effectStyle>
       </a:effectStyleLst>
       <a:bgFillStyleLst>
         <a:solidFill>
           <a:schemeClr val="phClr"/>
         </a:solidFill>
-        <a:solidFill>
-          <a:schemeClr val="phClr">
-            <a:tint val="95000"/>
-            <a:satMod val="170000"/>
-          </a:schemeClr>
-        </a:solidFill>
         <a:gradFill rotWithShape="1">
           <a:gsLst>
             <a:gs pos="0">
               <a:schemeClr val="phClr">
-                <a:tint val="93000"/>
-                <a:satMod val="150000"/>
-                <a:shade val="98000"/>
-                <a:lumMod val="102000"/>
+                <a:tint val="40000"/>
+                <a:satMod val="350000"/>
               </a:schemeClr>
             </a:gs>
-            <a:gs pos="50000">
+            <a:gs pos="40000">
               <a:schemeClr val="phClr">
-                <a:tint val="98000"/>
-                <a:satMod val="130000"/>
-                <a:shade val="90000"/>
-                <a:lumMod val="103000"/>
+                <a:tint val="45000"/>
+                <a:shade val="99000"/>
+                <a:satMod val="350000"/>
               </a:schemeClr>
             </a:gs>
             <a:gs pos="100000">
               <a:schemeClr val="phClr">
-                <a:shade val="63000"/>
-                <a:satMod val="120000"/>
+                <a:shade val="20000"/>
+                <a:satMod val="255000"/>
               </a:schemeClr>
             </a:gs>
           </a:gsLst>
-          <a:lin ang="5400000" scaled="0"/>
+          <a:path path="circle">
+            <a:fillToRect l="50000" t="-80000" r="50000" b="180000"/>
+          </a:path>
+        </a:gradFill>
+        <a:gradFill rotWithShape="1">
+          <a:gsLst>
+            <a:gs pos="0">
+              <a:schemeClr val="phClr">
+                <a:tint val="80000"/>
+                <a:satMod val="300000"/>
+              </a:schemeClr>
+            </a:gs>
+            <a:gs pos="100000">
+              <a:schemeClr val="phClr">
+                <a:shade val="30000"/>
+                <a:satMod val="200000"/>
+              </a:schemeClr>
+            </a:gs>
+          </a:gsLst>
+          <a:path path="circle">
+            <a:fillToRect l="50000" t="50000" r="50000" b="50000"/>
+          </a:path>
         </a:gradFill>
       </a:bgFillStyleLst>
     </a:fmtScheme>
   </a:themeElements>
-  <a:objectDefaults/>
+  <a:objectDefaults>
+    <a:spDef>
+      <a:spPr/>
+      <a:bodyPr/>
+      <a:lstStyle/>
+      <a:style>
+        <a:lnRef idx="1">
+          <a:schemeClr val="accent1"/>
+        </a:lnRef>
+        <a:fillRef idx="3">
+          <a:schemeClr val="accent1"/>
+        </a:fillRef>
+        <a:effectRef idx="2">
+          <a:schemeClr val="accent1"/>
+        </a:effectRef>
+        <a:fontRef idx="minor">
+          <a:schemeClr val="lt1"/>
+        </a:fontRef>
+      </a:style>
+    </a:spDef>
+    <a:lnDef>
+      <a:spPr/>
+      <a:bodyPr/>
+      <a:lstStyle/>
+      <a:style>
+        <a:lnRef idx="2">
+          <a:schemeClr val="accent1"/>
+        </a:lnRef>
+        <a:fillRef idx="0">
+          <a:schemeClr val="accent1"/>
+        </a:fillRef>
+        <a:effectRef idx="1">
+          <a:schemeClr val="accent1"/>
+        </a:effectRef>
+        <a:fontRef idx="minor">
+          <a:schemeClr val="tx1"/>
+        </a:fontRef>
+      </a:style>
+    </a:lnDef>
+  </a:objectDefaults>
   <a:extraClrSchemeLst/>
-  <a:extLst>
-    <a:ext uri="{05A4C25C-085E-4340-85A3-A5531E510DB2}">
-      <thm15:themeFamily xmlns:thm15="http://schemas.microsoft.com/office/thememl/2012/main" name="Office Theme" id="{62F939B6-93AF-4DB8-9C6B-D6C7DFDC589F}" vid="{4A3C46E8-61CC-4603-A589-7422A47A8E4A}"/>
-    </a:ext>
-  </a:extLst>
 </a:theme>
 </file>
--- a/ppt/RoadAssist-Bharat-FINAL.pptx
+++ b/ppt/RoadAssist-Bharat-FINAL.pptx
@@ -21961,7 +21961,7 @@
                 </a:solidFill>
                 <a:latin typeface="Segoe UI Semibold"/>
               </a:rPr>
-              <a:t>578 assertions, all executed</a:t>
+              <a:t>618 assertions, all executed</a:t>
             </a:r>
           </a:p>
         </p:txBody>
@@ -22126,7 +22126,7 @@
                 </a:solidFill>
                 <a:latin typeface="Segoe UI Semibold"/>
               </a:rPr>
-              <a:t>61</a:t>
+              <a:t>101</a:t>
             </a:r>
           </a:p>
         </p:txBody>
@@ -22165,7 +22165,7 @@
                 </a:solidFill>
                 <a:latin typeface="Segoe UI"/>
               </a:rPr>
-              <a:t>state machines, rules, redaction, device/cloud divergence guard</a:t>
+              <a:t>state machines, rules, redaction, SMS coordinates, i18n segment budget</a:t>
             </a:r>
           </a:p>
         </p:txBody>
@@ -33957,7 +33957,7 @@
                 </a:solidFill>
                 <a:latin typeface="Segoe UI"/>
               </a:rPr>
-              <a:t>578 assertions · 6 suites · 0 failures  •  56 tables · 64 routes · 10 ADRs  •  every claim on these slides is testable</a:t>
+              <a:t>618 assertions · 6 suites · 0 failures  •  56 tables · 64 routes · 10 ADRs  •  every claim on these slides is testable</a:t>
             </a:r>
           </a:p>
         </p:txBody>

--- a/ppt/RoadAssist-Bharat-FINAL.pptx
+++ b/ppt/RoadAssist-Bharat-FINAL.pptx
@@ -21961,7 +21961,7 @@
                 </a:solidFill>
                 <a:latin typeface="Segoe UI Semibold"/>
               </a:rPr>
-              <a:t>618 assertions, all executed</a:t>
+              <a:t>631 assertions, all executed</a:t>
             </a:r>
           </a:p>
         </p:txBody>
@@ -33957,7 +33957,7 @@
                 </a:solidFill>
                 <a:latin typeface="Segoe UI"/>
               </a:rPr>
-              <a:t>618 assertions · 6 suites · 0 failures  •  56 tables · 64 routes · 10 ADRs  •  every claim on these slides is testable</a:t>
+              <a:t>631 assertions · 6 suites · 0 failures  •  56 tables · 64 routes · 10 ADRs  •  every claim on these slides is testable</a:t>
             </a:r>
           </a:p>
         </p:txBody>

--- a/ppt/RoadAssist-Bharat-FINAL.pptx
+++ b/ppt/RoadAssist-Bharat-FINAL.pptx
@@ -14054,7 +14054,7 @@
                 </a:solidFill>
                 <a:latin typeface="Segoe UI Semibold"/>
               </a:rPr>
-              <a:t>137</a:t>
+              <a:t>138</a:t>
             </a:r>
           </a:p>
         </p:txBody>
@@ -21961,7 +21961,7 @@
                 </a:solidFill>
                 <a:latin typeface="Segoe UI Semibold"/>
               </a:rPr>
-              <a:t>631 assertions, all executed</a:t>
+              <a:t>636 assertions, all executed</a:t>
             </a:r>
           </a:p>
         </p:txBody>
@@ -33957,7 +33957,7 @@
                 </a:solidFill>
                 <a:latin typeface="Segoe UI"/>
               </a:rPr>
-              <a:t>631 assertions · 6 suites · 0 failures  •  56 tables · 64 routes · 10 ADRs  •  every claim on these slides is testable</a:t>
+              <a:t>636 assertions · 6 suites · 0 failures  •  56 tables · 64 routes · 10 ADRs  •  every claim on these slides is testable</a:t>
             </a:r>
           </a:p>
         </p:txBody>

--- a/ppt/RoadAssist-Bharat-FINAL.pptx
+++ b/ppt/RoadAssist-Bharat-FINAL.pptx
@@ -4484,9 +4484,79 @@
           </a:p>
         </p:txBody>
       </p:sp>
-      <p:sp>
-        <p:nvSpPr>
-          <p:cNvPr id="8" name="TextBox 7"/>
+      <p:pic>
+        <p:nvPicPr>
+          <p:cNvPr id="8" name="Picture 7" descr="_fit_final_hero.png"/>
+          <p:cNvPicPr>
+            <a:picLocks noChangeAspect="1"/>
+          </p:cNvPicPr>
+          <p:nvPr/>
+        </p:nvPicPr>
+        <p:blipFill>
+          <a:blip r:embed="rId3"/>
+          <a:stretch>
+            <a:fillRect/>
+          </a:stretch>
+        </p:blipFill>
+        <p:spPr>
+          <a:xfrm>
+            <a:off x="6446520" y="1234440"/>
+            <a:ext cx="4937760" cy="2514600"/>
+          </a:xfrm>
+          <a:prstGeom prst="rect">
+            <a:avLst/>
+          </a:prstGeom>
+        </p:spPr>
+      </p:pic>
+      <p:sp>
+        <p:nvSpPr>
+          <p:cNvPr id="9" name="Rounded Rectangle 8"/>
+          <p:cNvSpPr/>
+          <p:nvPr/>
+        </p:nvSpPr>
+        <p:spPr>
+          <a:xfrm>
+            <a:off x="6446520" y="1234440"/>
+            <a:ext cx="4937760" cy="2514600"/>
+          </a:xfrm>
+          <a:prstGeom prst="roundRect">
+            <a:avLst>
+              <a:gd name="adj" fmla="val 2000"/>
+            </a:avLst>
+          </a:prstGeom>
+          <a:noFill/>
+          <a:ln w="12700">
+            <a:solidFill>
+              <a:srgbClr val="1E2C45"/>
+            </a:solidFill>
+          </a:ln>
+          <a:effectLst/>
+        </p:spPr>
+        <p:style>
+          <a:lnRef idx="1">
+            <a:schemeClr val="accent1"/>
+          </a:lnRef>
+          <a:fillRef idx="3">
+            <a:schemeClr val="accent1"/>
+          </a:fillRef>
+          <a:effectRef idx="2">
+            <a:schemeClr val="accent1"/>
+          </a:effectRef>
+          <a:fontRef idx="minor">
+            <a:schemeClr val="lt1"/>
+          </a:fontRef>
+        </p:style>
+        <p:txBody>
+          <a:bodyPr rtlCol="0" anchor="ctr"/>
+          <a:lstStyle/>
+          <a:p>
+            <a:pPr algn="ctr"/>
+          </a:p>
+        </p:txBody>
+      </p:sp>
+      <p:sp>
+        <p:nvSpPr>
+          <p:cNvPr id="10" name="TextBox 9"/>
           <p:cNvSpPr txBox="1"/>
           <p:nvPr/>
         </p:nvSpPr>
@@ -4525,7 +4595,7 @@
       </p:sp>
       <p:sp>
         <p:nvSpPr>
-          <p:cNvPr id="9" name="TextBox 8"/>
+          <p:cNvPr id="11" name="TextBox 10"/>
           <p:cNvSpPr txBox="1"/>
           <p:nvPr/>
         </p:nvSpPr>
@@ -4557,14 +4627,14 @@
                 </a:solidFill>
                 <a:latin typeface="Segoe UI"/>
               </a:rPr>
-              <a:t>V Saatwik Sairaam · P Sai Nirisha Chowdary</a:t>
-            </a:r>
-          </a:p>
-        </p:txBody>
-      </p:sp>
-      <p:sp>
-        <p:nvSpPr>
-          <p:cNvPr id="10" name="TextBox 9"/>
+              <a:t>V. Saatwik Sairaam · P. Nirisha Chowdary</a:t>
+            </a:r>
+          </a:p>
+        </p:txBody>
+      </p:sp>
+      <p:sp>
+        <p:nvSpPr>
+          <p:cNvPr id="12" name="TextBox 11"/>
           <p:cNvSpPr txBox="1"/>
           <p:nvPr/>
         </p:nvSpPr>
@@ -4603,7 +4673,7 @@
       </p:sp>
       <p:sp>
         <p:nvSpPr>
-          <p:cNvPr id="11" name="TextBox 10"/>
+          <p:cNvPr id="13" name="TextBox 12"/>
           <p:cNvSpPr txBox="1"/>
           <p:nvPr/>
         </p:nvSpPr>
@@ -4635,14 +4705,14 @@
                 </a:solidFill>
                 <a:latin typeface="Segoe UI"/>
               </a:rPr>
-              <a:t>T V S Jignesh · G Parthavi</a:t>
-            </a:r>
-          </a:p>
-        </p:txBody>
-      </p:sp>
-      <p:sp>
-        <p:nvSpPr>
-          <p:cNvPr id="12" name="TextBox 11"/>
+              <a:t>T. V. S. Jignesh · G. Parthavi</a:t>
+            </a:r>
+          </a:p>
+        </p:txBody>
+      </p:sp>
+      <p:sp>
+        <p:nvSpPr>
+          <p:cNvPr id="14" name="TextBox 13"/>
           <p:cNvSpPr txBox="1"/>
           <p:nvPr/>
         </p:nvSpPr>
@@ -4681,7 +4751,7 @@
       </p:sp>
       <p:sp>
         <p:nvSpPr>
-          <p:cNvPr id="13" name="TextBox 12"/>
+          <p:cNvPr id="15" name="TextBox 14"/>
           <p:cNvSpPr txBox="1"/>
           <p:nvPr/>
         </p:nvSpPr>
@@ -4720,7 +4790,7 @@
       </p:sp>
       <p:sp>
         <p:nvSpPr>
-          <p:cNvPr id="14" name="TextBox 13"/>
+          <p:cNvPr id="16" name="TextBox 15"/>
           <p:cNvSpPr txBox="1"/>
           <p:nvPr/>
         </p:nvSpPr>
@@ -4759,7 +4829,7 @@
       </p:sp>
       <p:sp>
         <p:nvSpPr>
-          <p:cNvPr id="15" name="TextBox 14"/>
+          <p:cNvPr id="17" name="TextBox 16"/>
           <p:cNvSpPr txBox="1"/>
           <p:nvPr/>
         </p:nvSpPr>
@@ -4798,7 +4868,7 @@
       </p:sp>
       <p:sp>
         <p:nvSpPr>
-          <p:cNvPr id="16" name="TextBox 15"/>
+          <p:cNvPr id="18" name="TextBox 17"/>
           <p:cNvSpPr txBox="1"/>
           <p:nvPr/>
         </p:nvSpPr>
@@ -17766,7 +17836,7 @@
                 </a:solidFill>
                 <a:latin typeface="Segoe UI"/>
               </a:rPr>
-              <a:t>Versioned /v1, 64 endpoints, zod validation, stable error codes, idempotency keys</a:t>
+              <a:t>Versioned /v1, 65 endpoints, zod validation, stable error codes, idempotency keys</a:t>
             </a:r>
           </a:p>
         </p:txBody>
@@ -21961,7 +22031,7 @@
                 </a:solidFill>
                 <a:latin typeface="Segoe UI Semibold"/>
               </a:rPr>
-              <a:t>636 assertions, all executed</a:t>
+              <a:t>650 assertions, all executed</a:t>
             </a:r>
           </a:p>
         </p:txBody>
@@ -33957,7 +34027,7 @@
                 </a:solidFill>
                 <a:latin typeface="Segoe UI"/>
               </a:rPr>
-              <a:t>636 assertions · 6 suites · 0 failures  •  56 tables · 64 routes · 10 ADRs  •  every claim on these slides is testable</a:t>
+              <a:t>650 assertions · 6 suites · 0 failures  •  56 tables · 65 routes · 10 ADRs  •  every claim on these slides is testable</a:t>
             </a:r>
           </a:p>
         </p:txBody>
@@ -35367,7 +35437,7 @@
                 </a:solidFill>
                 <a:latin typeface="Segoe UI Semibold"/>
               </a:rPr>
-              <a:t>FASTIFY API  ·  /v1  ·  64 endpoints  ·  zod validation  ·  SSE stream</a:t>
+              <a:t>FASTIFY API  ·  /v1  ·  65 endpoints  ·  zod validation  ·  SSE stream</a:t>
             </a:r>
           </a:p>
         </p:txBody>

--- a/ppt/RoadAssist-Bharat-FINAL.pptx
+++ b/ppt/RoadAssist-Bharat-FINAL.pptx
@@ -4,44 +4,41 @@
   <p:sldMasterIdLst>
     <p:sldMasterId id="2147483648" r:id="rId1"/>
   </p:sldMasterIdLst>
-  <p:notesMasterIdLst>
-    <p:notesMasterId r:id="rId34"/>
-  </p:notesMasterIdLst>
   <p:sldIdLst>
-    <p:sldId id="256" r:id="rId2"/>
-    <p:sldId id="257" r:id="rId3"/>
-    <p:sldId id="258" r:id="rId4"/>
-    <p:sldId id="259" r:id="rId5"/>
-    <p:sldId id="260" r:id="rId6"/>
-    <p:sldId id="261" r:id="rId7"/>
-    <p:sldId id="262" r:id="rId8"/>
-    <p:sldId id="263" r:id="rId9"/>
-    <p:sldId id="264" r:id="rId10"/>
-    <p:sldId id="265" r:id="rId11"/>
-    <p:sldId id="266" r:id="rId12"/>
-    <p:sldId id="267" r:id="rId13"/>
-    <p:sldId id="268" r:id="rId14"/>
-    <p:sldId id="269" r:id="rId15"/>
-    <p:sldId id="270" r:id="rId16"/>
-    <p:sldId id="271" r:id="rId17"/>
-    <p:sldId id="272" r:id="rId18"/>
-    <p:sldId id="273" r:id="rId19"/>
-    <p:sldId id="274" r:id="rId20"/>
-    <p:sldId id="275" r:id="rId21"/>
-    <p:sldId id="276" r:id="rId22"/>
-    <p:sldId id="277" r:id="rId23"/>
-    <p:sldId id="278" r:id="rId24"/>
-    <p:sldId id="279" r:id="rId25"/>
-    <p:sldId id="280" r:id="rId26"/>
-    <p:sldId id="281" r:id="rId27"/>
-    <p:sldId id="282" r:id="rId28"/>
-    <p:sldId id="283" r:id="rId29"/>
-    <p:sldId id="284" r:id="rId30"/>
-    <p:sldId id="285" r:id="rId31"/>
-    <p:sldId id="286" r:id="rId32"/>
-    <p:sldId id="287" r:id="rId33"/>
+    <p:sldId id="256" r:id="rId7"/>
+    <p:sldId id="257" r:id="rId9"/>
+    <p:sldId id="258" r:id="rId10"/>
+    <p:sldId id="259" r:id="rId11"/>
+    <p:sldId id="260" r:id="rId12"/>
+    <p:sldId id="261" r:id="rId13"/>
+    <p:sldId id="262" r:id="rId14"/>
+    <p:sldId id="263" r:id="rId15"/>
+    <p:sldId id="264" r:id="rId16"/>
+    <p:sldId id="265" r:id="rId17"/>
+    <p:sldId id="266" r:id="rId18"/>
+    <p:sldId id="267" r:id="rId19"/>
+    <p:sldId id="268" r:id="rId20"/>
+    <p:sldId id="269" r:id="rId21"/>
+    <p:sldId id="270" r:id="rId22"/>
+    <p:sldId id="271" r:id="rId23"/>
+    <p:sldId id="272" r:id="rId24"/>
+    <p:sldId id="273" r:id="rId25"/>
+    <p:sldId id="274" r:id="rId26"/>
+    <p:sldId id="275" r:id="rId27"/>
+    <p:sldId id="276" r:id="rId28"/>
+    <p:sldId id="277" r:id="rId29"/>
+    <p:sldId id="278" r:id="rId30"/>
+    <p:sldId id="279" r:id="rId31"/>
+    <p:sldId id="280" r:id="rId32"/>
+    <p:sldId id="281" r:id="rId33"/>
+    <p:sldId id="282" r:id="rId34"/>
+    <p:sldId id="283" r:id="rId35"/>
+    <p:sldId id="284" r:id="rId36"/>
+    <p:sldId id="285" r:id="rId37"/>
+    <p:sldId id="286" r:id="rId38"/>
+    <p:sldId id="287" r:id="rId39"/>
   </p:sldIdLst>
-  <p:sldSz cx="12192000" cy="6858000"/>
+  <p:sldSz cx="12191695" cy="6858000" type="screen4x3"/>
   <p:notesSz cx="6858000" cy="9144000"/>
   <p:defaultTextStyle>
     <a:defPPr>
@@ -138,27 +135,11 @@
       </a:defRPr>
     </a:lvl9pPr>
   </p:defaultTextStyle>
-  <p:extLst>
-    <p:ext uri="{EFAFB233-063F-42B5-8137-9DF3F51BA10A}">
-      <p15:sldGuideLst xmlns:p15="http://schemas.microsoft.com/office/powerpoint/2012/main">
-        <p15:guide id="1" orient="horz" pos="2160">
-          <p15:clr>
-            <a:srgbClr val="A4A3A4"/>
-          </p15:clr>
-        </p15:guide>
-        <p15:guide id="2" pos="2880">
-          <p15:clr>
-            <a:srgbClr val="A4A3A4"/>
-          </p15:clr>
-        </p15:guide>
-      </p15:sldGuideLst>
-    </p:ext>
-  </p:extLst>
 </p:presentation>
 </file>
 
 <file path=ppt/notesMasters/notesMaster1.xml><?xml version="1.0" encoding="utf-8"?>
-<p:notesMaster xmlns:a="http://schemas.openxmlformats.org/drawingml/2006/main" xmlns:r="http://schemas.openxmlformats.org/officeDocument/2006/relationships" xmlns:p="http://schemas.openxmlformats.org/presentationml/2006/main">
+<p:notesMaster xmlns:a="http://schemas.openxmlformats.org/drawingml/2006/main" xmlns:p="http://schemas.openxmlformats.org/presentationml/2006/main" xmlns:r="http://schemas.openxmlformats.org/officeDocument/2006/relationships">
   <p:cSld>
     <p:bg>
       <p:bgRef idx="1001">
@@ -179,16 +160,241 @@
           <a:chExt cx="0" cy="0"/>
         </a:xfrm>
       </p:grpSpPr>
+      <p:sp>
+        <p:nvSpPr>
+          <p:cNvPr id="2" name="Header Placeholder 1"/>
+          <p:cNvSpPr>
+            <a:spLocks noGrp="1"/>
+          </p:cNvSpPr>
+          <p:nvPr>
+            <p:ph type="hdr" sz="quarter"/>
+          </p:nvPr>
+        </p:nvSpPr>
+        <p:spPr>
+          <a:xfrm>
+            <a:off x="0" y="0"/>
+            <a:ext cx="2971800" cy="457200"/>
+          </a:xfrm>
+          <a:prstGeom prst="rect">
+            <a:avLst/>
+          </a:prstGeom>
+        </p:spPr>
+        <p:txBody>
+          <a:bodyPr vert="horz" lIns="91440" tIns="45720" rIns="91440" bIns="45720" rtlCol="0"/>
+          <a:lstStyle>
+            <a:lvl1pPr algn="l">
+              <a:defRPr sz="1200"/>
+            </a:lvl1pPr>
+          </a:lstStyle>
+          <a:p>
+            <a:endParaRPr lang="en-US"/>
+          </a:p>
+        </p:txBody>
+      </p:sp>
+      <p:sp>
+        <p:nvSpPr>
+          <p:cNvPr id="3" name="Date Placeholder 2"/>
+          <p:cNvSpPr>
+            <a:spLocks noGrp="1"/>
+          </p:cNvSpPr>
+          <p:nvPr>
+            <p:ph type="dt" idx="1"/>
+          </p:nvPr>
+        </p:nvSpPr>
+        <p:spPr>
+          <a:xfrm>
+            <a:off x="3884613" y="0"/>
+            <a:ext cx="2971800" cy="457200"/>
+          </a:xfrm>
+          <a:prstGeom prst="rect">
+            <a:avLst/>
+          </a:prstGeom>
+        </p:spPr>
+        <p:txBody>
+          <a:bodyPr vert="horz" lIns="91440" tIns="45720" rIns="91440" bIns="45720" rtlCol="0"/>
+          <a:lstStyle>
+            <a:lvl1pPr algn="r">
+              <a:defRPr sz="1200"/>
+            </a:lvl1pPr>
+          </a:lstStyle>
+          <a:p>
+            <a:fld id="{0F89C1C7-3DCD-1040-A9CF-14679D8B5DDD}" type="datetimeFigureOut">
+              <a:rPr lang="en-US" smtClean="0"/>
+              <a:t>10/17/16</a:t>
+            </a:fld>
+            <a:endParaRPr lang="en-US"/>
+          </a:p>
+        </p:txBody>
+      </p:sp>
+      <p:sp>
+        <p:nvSpPr>
+          <p:cNvPr id="4" name="Slide Image Placeholder 3"/>
+          <p:cNvSpPr>
+            <a:spLocks noGrp="1" noRot="1" noChangeAspect="1"/>
+          </p:cNvSpPr>
+          <p:nvPr>
+            <p:ph type="sldImg" idx="2"/>
+          </p:nvPr>
+        </p:nvSpPr>
+        <p:spPr>
+          <a:xfrm>
+            <a:off x="1143000" y="685800"/>
+            <a:ext cx="4572000" cy="3429000"/>
+          </a:xfrm>
+          <a:prstGeom prst="rect">
+            <a:avLst/>
+          </a:prstGeom>
+          <a:noFill/>
+          <a:ln w="12700">
+            <a:solidFill>
+              <a:prstClr val="black"/>
+            </a:solidFill>
+          </a:ln>
+        </p:spPr>
+        <p:txBody>
+          <a:bodyPr vert="horz" lIns="91440" tIns="45720" rIns="91440" bIns="45720" rtlCol="0" anchor="ctr"/>
+          <a:lstStyle/>
+          <a:p>
+            <a:endParaRPr lang="en-US"/>
+          </a:p>
+        </p:txBody>
+      </p:sp>
+      <p:sp>
+        <p:nvSpPr>
+          <p:cNvPr id="5" name="Notes Placeholder 4"/>
+          <p:cNvSpPr>
+            <a:spLocks noGrp="1"/>
+          </p:cNvSpPr>
+          <p:nvPr>
+            <p:ph type="body" sz="quarter" idx="3"/>
+          </p:nvPr>
+        </p:nvSpPr>
+        <p:spPr>
+          <a:xfrm>
+            <a:off x="685800" y="4343400"/>
+            <a:ext cx="5486400" cy="4114800"/>
+          </a:xfrm>
+          <a:prstGeom prst="rect">
+            <a:avLst/>
+          </a:prstGeom>
+        </p:spPr>
+        <p:txBody>
+          <a:bodyPr vert="horz" lIns="91440" tIns="45720" rIns="91440" bIns="45720" rtlCol="0"/>
+          <a:lstStyle/>
+          <a:p>
+            <a:pPr lvl="0"/>
+            <a:r>
+              <a:rPr lang="en-US" smtClean="0"/>
+              <a:t>Click to edit Master text styles</a:t>
+            </a:r>
+          </a:p>
+          <a:p>
+            <a:pPr lvl="1"/>
+            <a:r>
+              <a:rPr lang="en-US" smtClean="0"/>
+              <a:t>Second level</a:t>
+            </a:r>
+          </a:p>
+          <a:p>
+            <a:pPr lvl="2"/>
+            <a:r>
+              <a:rPr lang="en-US" smtClean="0"/>
+              <a:t>Third level</a:t>
+            </a:r>
+          </a:p>
+          <a:p>
+            <a:pPr lvl="3"/>
+            <a:r>
+              <a:rPr lang="en-US" smtClean="0"/>
+              <a:t>Fourth level</a:t>
+            </a:r>
+          </a:p>
+          <a:p>
+            <a:pPr lvl="4"/>
+            <a:r>
+              <a:rPr lang="en-US" smtClean="0"/>
+              <a:t>Fifth level</a:t>
+            </a:r>
+            <a:endParaRPr lang="en-US"/>
+          </a:p>
+        </p:txBody>
+      </p:sp>
+      <p:sp>
+        <p:nvSpPr>
+          <p:cNvPr id="6" name="Footer Placeholder 5"/>
+          <p:cNvSpPr>
+            <a:spLocks noGrp="1"/>
+          </p:cNvSpPr>
+          <p:nvPr>
+            <p:ph type="ftr" sz="quarter" idx="4"/>
+          </p:nvPr>
+        </p:nvSpPr>
+        <p:spPr>
+          <a:xfrm>
+            <a:off x="0" y="8685213"/>
+            <a:ext cx="2971800" cy="457200"/>
+          </a:xfrm>
+          <a:prstGeom prst="rect">
+            <a:avLst/>
+          </a:prstGeom>
+        </p:spPr>
+        <p:txBody>
+          <a:bodyPr vert="horz" lIns="91440" tIns="45720" rIns="91440" bIns="45720" rtlCol="0" anchor="b"/>
+          <a:lstStyle>
+            <a:lvl1pPr algn="l">
+              <a:defRPr sz="1200"/>
+            </a:lvl1pPr>
+          </a:lstStyle>
+          <a:p>
+            <a:endParaRPr lang="en-US"/>
+          </a:p>
+        </p:txBody>
+      </p:sp>
+      <p:sp>
+        <p:nvSpPr>
+          <p:cNvPr id="7" name="Slide Number Placeholder 6"/>
+          <p:cNvSpPr>
+            <a:spLocks noGrp="1"/>
+          </p:cNvSpPr>
+          <p:nvPr>
+            <p:ph type="sldNum" sz="quarter" idx="5"/>
+          </p:nvPr>
+        </p:nvSpPr>
+        <p:spPr>
+          <a:xfrm>
+            <a:off x="3884613" y="8685213"/>
+            <a:ext cx="2971800" cy="457200"/>
+          </a:xfrm>
+          <a:prstGeom prst="rect">
+            <a:avLst/>
+          </a:prstGeom>
+        </p:spPr>
+        <p:txBody>
+          <a:bodyPr vert="horz" lIns="91440" tIns="45720" rIns="91440" bIns="45720" rtlCol="0" anchor="b"/>
+          <a:lstStyle>
+            <a:lvl1pPr algn="r">
+              <a:defRPr sz="1200"/>
+            </a:lvl1pPr>
+          </a:lstStyle>
+          <a:p>
+            <a:fld id="{BB5E49A5-4136-284D-997B-48E1D791AD67}" type="slidenum">
+              <a:rPr lang="en-US" smtClean="0"/>
+              <a:t>‹#›</a:t>
+            </a:fld>
+            <a:endParaRPr lang="en-US"/>
+          </a:p>
+        </p:txBody>
+      </p:sp>
     </p:spTree>
     <p:extLst>
       <p:ext uri="{BB962C8B-B14F-4D97-AF65-F5344CB8AC3E}">
-        <p14:creationId xmlns:p14="http://schemas.microsoft.com/office/powerpoint/2010/main" val="3436632234"/>
+        <p14:creationId xmlns:p14="http://schemas.microsoft.com/office/powerpoint/2010/main" val="2623252185"/>
       </p:ext>
     </p:extLst>
   </p:cSld>
   <p:clrMap bg1="lt1" tx1="dk1" bg2="lt2" tx2="dk2" accent1="accent1" accent2="accent2" accent3="accent3" accent4="accent4" accent5="accent5" accent6="accent6" hlink="hlink" folHlink="folHlink"/>
   <p:notesStyle>
-    <a:lvl1pPr marL="0" algn="l" defTabSz="914400" rtl="0" eaLnBrk="1" latinLnBrk="0" hangingPunct="1">
+    <a:lvl1pPr marL="0" algn="l" defTabSz="457200" rtl="0" eaLnBrk="1" latinLnBrk="0" hangingPunct="1">
       <a:defRPr sz="1200" kern="1200">
         <a:solidFill>
           <a:schemeClr val="tx1"/>
@@ -198,7 +404,7 @@
         <a:cs typeface="+mn-cs"/>
       </a:defRPr>
     </a:lvl1pPr>
-    <a:lvl2pPr marL="457200" algn="l" defTabSz="914400" rtl="0" eaLnBrk="1" latinLnBrk="0" hangingPunct="1">
+    <a:lvl2pPr marL="457200" algn="l" defTabSz="457200" rtl="0" eaLnBrk="1" latinLnBrk="0" hangingPunct="1">
       <a:defRPr sz="1200" kern="1200">
         <a:solidFill>
           <a:schemeClr val="tx1"/>
@@ -208,7 +414,7 @@
         <a:cs typeface="+mn-cs"/>
       </a:defRPr>
     </a:lvl2pPr>
-    <a:lvl3pPr marL="914400" algn="l" defTabSz="914400" rtl="0" eaLnBrk="1" latinLnBrk="0" hangingPunct="1">
+    <a:lvl3pPr marL="914400" algn="l" defTabSz="457200" rtl="0" eaLnBrk="1" latinLnBrk="0" hangingPunct="1">
       <a:defRPr sz="1200" kern="1200">
         <a:solidFill>
           <a:schemeClr val="tx1"/>
@@ -218,7 +424,7 @@
         <a:cs typeface="+mn-cs"/>
       </a:defRPr>
     </a:lvl3pPr>
-    <a:lvl4pPr marL="1371600" algn="l" defTabSz="914400" rtl="0" eaLnBrk="1" latinLnBrk="0" hangingPunct="1">
+    <a:lvl4pPr marL="1371600" algn="l" defTabSz="457200" rtl="0" eaLnBrk="1" latinLnBrk="0" hangingPunct="1">
       <a:defRPr sz="1200" kern="1200">
         <a:solidFill>
           <a:schemeClr val="tx1"/>
@@ -228,7 +434,7 @@
         <a:cs typeface="+mn-cs"/>
       </a:defRPr>
     </a:lvl4pPr>
-    <a:lvl5pPr marL="1828800" algn="l" defTabSz="914400" rtl="0" eaLnBrk="1" latinLnBrk="0" hangingPunct="1">
+    <a:lvl5pPr marL="1828800" algn="l" defTabSz="457200" rtl="0" eaLnBrk="1" latinLnBrk="0" hangingPunct="1">
       <a:defRPr sz="1200" kern="1200">
         <a:solidFill>
           <a:schemeClr val="tx1"/>
@@ -238,7 +444,7 @@
         <a:cs typeface="+mn-cs"/>
       </a:defRPr>
     </a:lvl5pPr>
-    <a:lvl6pPr marL="2286000" algn="l" defTabSz="914400" rtl="0" eaLnBrk="1" latinLnBrk="0" hangingPunct="1">
+    <a:lvl6pPr marL="2286000" algn="l" defTabSz="457200" rtl="0" eaLnBrk="1" latinLnBrk="0" hangingPunct="1">
       <a:defRPr sz="1200" kern="1200">
         <a:solidFill>
           <a:schemeClr val="tx1"/>
@@ -248,7 +454,7 @@
         <a:cs typeface="+mn-cs"/>
       </a:defRPr>
     </a:lvl6pPr>
-    <a:lvl7pPr marL="2743200" algn="l" defTabSz="914400" rtl="0" eaLnBrk="1" latinLnBrk="0" hangingPunct="1">
+    <a:lvl7pPr marL="2743200" algn="l" defTabSz="457200" rtl="0" eaLnBrk="1" latinLnBrk="0" hangingPunct="1">
       <a:defRPr sz="1200" kern="1200">
         <a:solidFill>
           <a:schemeClr val="tx1"/>
@@ -258,7 +464,7 @@
         <a:cs typeface="+mn-cs"/>
       </a:defRPr>
     </a:lvl7pPr>
-    <a:lvl8pPr marL="3200400" algn="l" defTabSz="914400" rtl="0" eaLnBrk="1" latinLnBrk="0" hangingPunct="1">
+    <a:lvl8pPr marL="3200400" algn="l" defTabSz="457200" rtl="0" eaLnBrk="1" latinLnBrk="0" hangingPunct="1">
       <a:defRPr sz="1200" kern="1200">
         <a:solidFill>
           <a:schemeClr val="tx1"/>
@@ -268,7 +474,7 @@
         <a:cs typeface="+mn-cs"/>
       </a:defRPr>
     </a:lvl8pPr>
-    <a:lvl9pPr marL="3657600" algn="l" defTabSz="914400" rtl="0" eaLnBrk="1" latinLnBrk="0" hangingPunct="1">
+    <a:lvl9pPr marL="3657600" algn="l" defTabSz="457200" rtl="0" eaLnBrk="1" latinLnBrk="0" hangingPunct="1">
       <a:defRPr sz="1200" kern="1200">
         <a:solidFill>
           <a:schemeClr val="tx1"/>
@@ -283,7 +489,7 @@
 </file>
 
 <file path=ppt/notesSlides/notesSlide1.xml><?xml version="1.0" encoding="utf-8"?>
-<p:notes xmlns:a="http://schemas.openxmlformats.org/drawingml/2006/main" xmlns:r="http://schemas.openxmlformats.org/officeDocument/2006/relationships" xmlns:p="http://schemas.openxmlformats.org/presentationml/2006/main">
+<p:notes xmlns:a="http://schemas.openxmlformats.org/drawingml/2006/main" xmlns:p="http://schemas.openxmlformats.org/presentationml/2006/main" xmlns:r="http://schemas.openxmlformats.org/officeDocument/2006/relationships">
   <p:cSld>
     <p:spTree>
       <p:nvGrpSpPr>
@@ -303,7 +509,7 @@
         <p:nvSpPr>
           <p:cNvPr id="2" name="Slide Image Placeholder 1"/>
           <p:cNvSpPr>
-            <a:spLocks noGrp="1" noRot="1" noChangeAspect="1"/>
+            <a:spLocks noGrp="1"/>
           </p:cNvSpPr>
           <p:nvPr>
             <p:ph type="sldImg" idx="2"/>
@@ -318,7 +524,7 @@
             <a:spLocks noGrp="1"/>
           </p:cNvSpPr>
           <p:nvPr>
-            <p:ph type="body" sz="quarter" idx="3"/>
+            <p:ph type="body" idx="3" sz="quarter"/>
           </p:nvPr>
         </p:nvSpPr>
         <p:spPr/>
@@ -335,9 +541,7 @@
               <a:t>evidence is in the next thirty slides.</a:t>
             </a:r>
           </a:p>
-          <a:p>
-            <a:endParaRPr/>
-          </a:p>
+          <a:p/>
           <a:p>
             <a:r>
               <a:t>The three adjectives are ordered deliberately: AI is the least novel, cloud is</a:t>
@@ -357,7 +561,7 @@
             <a:spLocks noGrp="1"/>
           </p:cNvSpPr>
           <p:nvPr>
-            <p:ph type="sldNum" sz="quarter" idx="5"/>
+            <p:ph type="sldNum" idx="5" sz="quarter"/>
           </p:nvPr>
         </p:nvSpPr>
         <p:spPr/>
@@ -371,7 +575,7 @@
 </file>
 
 <file path=ppt/notesSlides/notesSlide10.xml><?xml version="1.0" encoding="utf-8"?>
-<p:notes xmlns:a="http://schemas.openxmlformats.org/drawingml/2006/main" xmlns:r="http://schemas.openxmlformats.org/officeDocument/2006/relationships" xmlns:p="http://schemas.openxmlformats.org/presentationml/2006/main">
+<p:notes xmlns:a="http://schemas.openxmlformats.org/drawingml/2006/main" xmlns:p="http://schemas.openxmlformats.org/presentationml/2006/main" xmlns:r="http://schemas.openxmlformats.org/officeDocument/2006/relationships">
   <p:cSld>
     <p:spTree>
       <p:nvGrpSpPr>
@@ -391,7 +595,7 @@
         <p:nvSpPr>
           <p:cNvPr id="2" name="Slide Image Placeholder 1"/>
           <p:cNvSpPr>
-            <a:spLocks noGrp="1" noRot="1" noChangeAspect="1"/>
+            <a:spLocks noGrp="1"/>
           </p:cNvSpPr>
           <p:nvPr>
             <p:ph type="sldImg" idx="2"/>
@@ -406,7 +610,7 @@
             <a:spLocks noGrp="1"/>
           </p:cNvSpPr>
           <p:nvPr>
-            <p:ph type="body" sz="quarter" idx="3"/>
+            <p:ph type="body" idx="3" sz="quarter"/>
           </p:nvPr>
         </p:nvSpPr>
         <p:spPr/>
@@ -437,7 +641,7 @@
             <a:spLocks noGrp="1"/>
           </p:cNvSpPr>
           <p:nvPr>
-            <p:ph type="sldNum" sz="quarter" idx="5"/>
+            <p:ph type="sldNum" idx="5" sz="quarter"/>
           </p:nvPr>
         </p:nvSpPr>
         <p:spPr/>
@@ -451,7 +655,7 @@
 </file>
 
 <file path=ppt/notesSlides/notesSlide2.xml><?xml version="1.0" encoding="utf-8"?>
-<p:notes xmlns:a="http://schemas.openxmlformats.org/drawingml/2006/main" xmlns:r="http://schemas.openxmlformats.org/officeDocument/2006/relationships" xmlns:p="http://schemas.openxmlformats.org/presentationml/2006/main">
+<p:notes xmlns:a="http://schemas.openxmlformats.org/drawingml/2006/main" xmlns:p="http://schemas.openxmlformats.org/presentationml/2006/main" xmlns:r="http://schemas.openxmlformats.org/officeDocument/2006/relationships">
   <p:cSld>
     <p:spTree>
       <p:nvGrpSpPr>
@@ -471,7 +675,7 @@
         <p:nvSpPr>
           <p:cNvPr id="2" name="Slide Image Placeholder 1"/>
           <p:cNvSpPr>
-            <a:spLocks noGrp="1" noRot="1" noChangeAspect="1"/>
+            <a:spLocks noGrp="1"/>
           </p:cNvSpPr>
           <p:nvPr>
             <p:ph type="sldImg" idx="2"/>
@@ -486,7 +690,7 @@
             <a:spLocks noGrp="1"/>
           </p:cNvSpPr>
           <p:nvPr>
-            <p:ph type="body" sz="quarter" idx="3"/>
+            <p:ph type="body" idx="3" sz="quarter"/>
           </p:nvPr>
         </p:nvSpPr>
         <p:spPr/>
@@ -512,7 +716,7 @@
             <a:spLocks noGrp="1"/>
           </p:cNvSpPr>
           <p:nvPr>
-            <p:ph type="sldNum" sz="quarter" idx="5"/>
+            <p:ph type="sldNum" idx="5" sz="quarter"/>
           </p:nvPr>
         </p:nvSpPr>
         <p:spPr/>
@@ -526,7 +730,7 @@
 </file>
 
 <file path=ppt/notesSlides/notesSlide3.xml><?xml version="1.0" encoding="utf-8"?>
-<p:notes xmlns:a="http://schemas.openxmlformats.org/drawingml/2006/main" xmlns:r="http://schemas.openxmlformats.org/officeDocument/2006/relationships" xmlns:p="http://schemas.openxmlformats.org/presentationml/2006/main">
+<p:notes xmlns:a="http://schemas.openxmlformats.org/drawingml/2006/main" xmlns:p="http://schemas.openxmlformats.org/presentationml/2006/main" xmlns:r="http://schemas.openxmlformats.org/officeDocument/2006/relationships">
   <p:cSld>
     <p:spTree>
       <p:nvGrpSpPr>
@@ -546,7 +750,7 @@
         <p:nvSpPr>
           <p:cNvPr id="2" name="Slide Image Placeholder 1"/>
           <p:cNvSpPr>
-            <a:spLocks noGrp="1" noRot="1" noChangeAspect="1"/>
+            <a:spLocks noGrp="1"/>
           </p:cNvSpPr>
           <p:nvPr>
             <p:ph type="sldImg" idx="2"/>
@@ -561,7 +765,7 @@
             <a:spLocks noGrp="1"/>
           </p:cNvSpPr>
           <p:nvPr>
-            <p:ph type="body" sz="quarter" idx="3"/>
+            <p:ph type="body" idx="3" sz="quarter"/>
           </p:nvPr>
         </p:nvSpPr>
         <p:spPr/>
@@ -587,7 +791,7 @@
             <a:spLocks noGrp="1"/>
           </p:cNvSpPr>
           <p:nvPr>
-            <p:ph type="sldNum" sz="quarter" idx="5"/>
+            <p:ph type="sldNum" idx="5" sz="quarter"/>
           </p:nvPr>
         </p:nvSpPr>
         <p:spPr/>
@@ -601,7 +805,7 @@
 </file>
 
 <file path=ppt/notesSlides/notesSlide4.xml><?xml version="1.0" encoding="utf-8"?>
-<p:notes xmlns:a="http://schemas.openxmlformats.org/drawingml/2006/main" xmlns:r="http://schemas.openxmlformats.org/officeDocument/2006/relationships" xmlns:p="http://schemas.openxmlformats.org/presentationml/2006/main">
+<p:notes xmlns:a="http://schemas.openxmlformats.org/drawingml/2006/main" xmlns:p="http://schemas.openxmlformats.org/presentationml/2006/main" xmlns:r="http://schemas.openxmlformats.org/officeDocument/2006/relationships">
   <p:cSld>
     <p:spTree>
       <p:nvGrpSpPr>
@@ -621,7 +825,7 @@
         <p:nvSpPr>
           <p:cNvPr id="2" name="Slide Image Placeholder 1"/>
           <p:cNvSpPr>
-            <a:spLocks noGrp="1" noRot="1" noChangeAspect="1"/>
+            <a:spLocks noGrp="1"/>
           </p:cNvSpPr>
           <p:nvPr>
             <p:ph type="sldImg" idx="2"/>
@@ -636,7 +840,7 @@
             <a:spLocks noGrp="1"/>
           </p:cNvSpPr>
           <p:nvPr>
-            <p:ph type="body" sz="quarter" idx="3"/>
+            <p:ph type="body" idx="3" sz="quarter"/>
           </p:nvPr>
         </p:nvSpPr>
         <p:spPr/>
@@ -662,7 +866,7 @@
             <a:spLocks noGrp="1"/>
           </p:cNvSpPr>
           <p:nvPr>
-            <p:ph type="sldNum" sz="quarter" idx="5"/>
+            <p:ph type="sldNum" idx="5" sz="quarter"/>
           </p:nvPr>
         </p:nvSpPr>
         <p:spPr/>
@@ -676,7 +880,7 @@
 </file>
 
 <file path=ppt/notesSlides/notesSlide5.xml><?xml version="1.0" encoding="utf-8"?>
-<p:notes xmlns:a="http://schemas.openxmlformats.org/drawingml/2006/main" xmlns:r="http://schemas.openxmlformats.org/officeDocument/2006/relationships" xmlns:p="http://schemas.openxmlformats.org/presentationml/2006/main">
+<p:notes xmlns:a="http://schemas.openxmlformats.org/drawingml/2006/main" xmlns:p="http://schemas.openxmlformats.org/presentationml/2006/main" xmlns:r="http://schemas.openxmlformats.org/officeDocument/2006/relationships">
   <p:cSld>
     <p:spTree>
       <p:nvGrpSpPr>
@@ -696,7 +900,7 @@
         <p:nvSpPr>
           <p:cNvPr id="2" name="Slide Image Placeholder 1"/>
           <p:cNvSpPr>
-            <a:spLocks noGrp="1" noRot="1" noChangeAspect="1"/>
+            <a:spLocks noGrp="1"/>
           </p:cNvSpPr>
           <p:nvPr>
             <p:ph type="sldImg" idx="2"/>
@@ -711,7 +915,7 @@
             <a:spLocks noGrp="1"/>
           </p:cNvSpPr>
           <p:nvPr>
-            <p:ph type="body" sz="quarter" idx="3"/>
+            <p:ph type="body" idx="3" sz="quarter"/>
           </p:nvPr>
         </p:nvSpPr>
         <p:spPr/>
@@ -742,7 +946,7 @@
             <a:spLocks noGrp="1"/>
           </p:cNvSpPr>
           <p:nvPr>
-            <p:ph type="sldNum" sz="quarter" idx="5"/>
+            <p:ph type="sldNum" idx="5" sz="quarter"/>
           </p:nvPr>
         </p:nvSpPr>
         <p:spPr/>
@@ -756,7 +960,7 @@
 </file>
 
 <file path=ppt/notesSlides/notesSlide6.xml><?xml version="1.0" encoding="utf-8"?>
-<p:notes xmlns:a="http://schemas.openxmlformats.org/drawingml/2006/main" xmlns:r="http://schemas.openxmlformats.org/officeDocument/2006/relationships" xmlns:p="http://schemas.openxmlformats.org/presentationml/2006/main">
+<p:notes xmlns:a="http://schemas.openxmlformats.org/drawingml/2006/main" xmlns:p="http://schemas.openxmlformats.org/presentationml/2006/main" xmlns:r="http://schemas.openxmlformats.org/officeDocument/2006/relationships">
   <p:cSld>
     <p:spTree>
       <p:nvGrpSpPr>
@@ -776,7 +980,7 @@
         <p:nvSpPr>
           <p:cNvPr id="2" name="Slide Image Placeholder 1"/>
           <p:cNvSpPr>
-            <a:spLocks noGrp="1" noRot="1" noChangeAspect="1"/>
+            <a:spLocks noGrp="1"/>
           </p:cNvSpPr>
           <p:nvPr>
             <p:ph type="sldImg" idx="2"/>
@@ -791,7 +995,7 @@
             <a:spLocks noGrp="1"/>
           </p:cNvSpPr>
           <p:nvPr>
-            <p:ph type="body" sz="quarter" idx="3"/>
+            <p:ph type="body" idx="3" sz="quarter"/>
           </p:nvPr>
         </p:nvSpPr>
         <p:spPr/>
@@ -817,7 +1021,7 @@
             <a:spLocks noGrp="1"/>
           </p:cNvSpPr>
           <p:nvPr>
-            <p:ph type="sldNum" sz="quarter" idx="5"/>
+            <p:ph type="sldNum" idx="5" sz="quarter"/>
           </p:nvPr>
         </p:nvSpPr>
         <p:spPr/>
@@ -831,7 +1035,7 @@
 </file>
 
 <file path=ppt/notesSlides/notesSlide7.xml><?xml version="1.0" encoding="utf-8"?>
-<p:notes xmlns:a="http://schemas.openxmlformats.org/drawingml/2006/main" xmlns:r="http://schemas.openxmlformats.org/officeDocument/2006/relationships" xmlns:p="http://schemas.openxmlformats.org/presentationml/2006/main">
+<p:notes xmlns:a="http://schemas.openxmlformats.org/drawingml/2006/main" xmlns:p="http://schemas.openxmlformats.org/presentationml/2006/main" xmlns:r="http://schemas.openxmlformats.org/officeDocument/2006/relationships">
   <p:cSld>
     <p:spTree>
       <p:nvGrpSpPr>
@@ -851,7 +1055,7 @@
         <p:nvSpPr>
           <p:cNvPr id="2" name="Slide Image Placeholder 1"/>
           <p:cNvSpPr>
-            <a:spLocks noGrp="1" noRot="1" noChangeAspect="1"/>
+            <a:spLocks noGrp="1"/>
           </p:cNvSpPr>
           <p:nvPr>
             <p:ph type="sldImg" idx="2"/>
@@ -866,7 +1070,7 @@
             <a:spLocks noGrp="1"/>
           </p:cNvSpPr>
           <p:nvPr>
-            <p:ph type="body" sz="quarter" idx="3"/>
+            <p:ph type="body" idx="3" sz="quarter"/>
           </p:nvPr>
         </p:nvSpPr>
         <p:spPr/>
@@ -892,7 +1096,7 @@
             <a:spLocks noGrp="1"/>
           </p:cNvSpPr>
           <p:nvPr>
-            <p:ph type="sldNum" sz="quarter" idx="5"/>
+            <p:ph type="sldNum" idx="5" sz="quarter"/>
           </p:nvPr>
         </p:nvSpPr>
         <p:spPr/>
@@ -906,7 +1110,7 @@
 </file>
 
 <file path=ppt/notesSlides/notesSlide8.xml><?xml version="1.0" encoding="utf-8"?>
-<p:notes xmlns:a="http://schemas.openxmlformats.org/drawingml/2006/main" xmlns:r="http://schemas.openxmlformats.org/officeDocument/2006/relationships" xmlns:p="http://schemas.openxmlformats.org/presentationml/2006/main">
+<p:notes xmlns:a="http://schemas.openxmlformats.org/drawingml/2006/main" xmlns:p="http://schemas.openxmlformats.org/presentationml/2006/main" xmlns:r="http://schemas.openxmlformats.org/officeDocument/2006/relationships">
   <p:cSld>
     <p:spTree>
       <p:nvGrpSpPr>
@@ -926,7 +1130,7 @@
         <p:nvSpPr>
           <p:cNvPr id="2" name="Slide Image Placeholder 1"/>
           <p:cNvSpPr>
-            <a:spLocks noGrp="1" noRot="1" noChangeAspect="1"/>
+            <a:spLocks noGrp="1"/>
           </p:cNvSpPr>
           <p:nvPr>
             <p:ph type="sldImg" idx="2"/>
@@ -941,7 +1145,7 @@
             <a:spLocks noGrp="1"/>
           </p:cNvSpPr>
           <p:nvPr>
-            <p:ph type="body" sz="quarter" idx="3"/>
+            <p:ph type="body" idx="3" sz="quarter"/>
           </p:nvPr>
         </p:nvSpPr>
         <p:spPr/>
@@ -967,7 +1171,7 @@
             <a:spLocks noGrp="1"/>
           </p:cNvSpPr>
           <p:nvPr>
-            <p:ph type="sldNum" sz="quarter" idx="5"/>
+            <p:ph type="sldNum" idx="5" sz="quarter"/>
           </p:nvPr>
         </p:nvSpPr>
         <p:spPr/>
@@ -981,7 +1185,7 @@
 </file>
 
 <file path=ppt/notesSlides/notesSlide9.xml><?xml version="1.0" encoding="utf-8"?>
-<p:notes xmlns:a="http://schemas.openxmlformats.org/drawingml/2006/main" xmlns:r="http://schemas.openxmlformats.org/officeDocument/2006/relationships" xmlns:p="http://schemas.openxmlformats.org/presentationml/2006/main">
+<p:notes xmlns:a="http://schemas.openxmlformats.org/drawingml/2006/main" xmlns:p="http://schemas.openxmlformats.org/presentationml/2006/main" xmlns:r="http://schemas.openxmlformats.org/officeDocument/2006/relationships">
   <p:cSld>
     <p:spTree>
       <p:nvGrpSpPr>
@@ -1001,7 +1205,7 @@
         <p:nvSpPr>
           <p:cNvPr id="2" name="Slide Image Placeholder 1"/>
           <p:cNvSpPr>
-            <a:spLocks noGrp="1" noRot="1" noChangeAspect="1"/>
+            <a:spLocks noGrp="1"/>
           </p:cNvSpPr>
           <p:nvPr>
             <p:ph type="sldImg" idx="2"/>
@@ -1016,7 +1220,7 @@
             <a:spLocks noGrp="1"/>
           </p:cNvSpPr>
           <p:nvPr>
-            <p:ph type="body" sz="quarter" idx="3"/>
+            <p:ph type="body" idx="3" sz="quarter"/>
           </p:nvPr>
         </p:nvSpPr>
         <p:spPr/>
@@ -1042,7 +1246,7 @@
             <a:spLocks noGrp="1"/>
           </p:cNvSpPr>
           <p:nvPr>
-            <p:ph type="sldNum" sz="quarter" idx="5"/>
+            <p:ph type="sldNum" idx="5" sz="quarter"/>
           </p:nvPr>
         </p:nvSpPr>
         <p:spPr/>
@@ -1093,9 +1297,10 @@
           <a:lstStyle/>
           <a:p>
             <a:r>
-              <a:rPr lang="en-US"/>
+              <a:rPr lang="en-US" smtClean="0"/>
               <a:t>Click to edit Master title style</a:t>
             </a:r>
+            <a:endParaRPr lang="en-US"/>
           </a:p>
         </p:txBody>
       </p:sp>
@@ -1211,9 +1416,10 @@
           </a:lstStyle>
           <a:p>
             <a:r>
-              <a:rPr lang="en-US"/>
+              <a:rPr lang="en-US" smtClean="0"/>
               <a:t>Click to edit Master subtitle style</a:t>
             </a:r>
+            <a:endParaRPr lang="en-US"/>
           </a:p>
         </p:txBody>
       </p:sp>
@@ -1234,7 +1440,7 @@
           <a:p>
             <a:fld id="{5BCAD085-E8A6-8845-BD4E-CB4CCA059FC4}" type="datetimeFigureOut">
               <a:rPr lang="en-US" smtClean="0"/>
-              <a:t>9/25/2026</a:t>
+              <a:t>1/27/13</a:t>
             </a:fld>
             <a:endParaRPr lang="en-US"/>
           </a:p>
@@ -1328,9 +1534,10 @@
           <a:lstStyle/>
           <a:p>
             <a:r>
-              <a:rPr lang="en-US"/>
+              <a:rPr lang="en-US" smtClean="0"/>
               <a:t>Click to edit Master title style</a:t>
             </a:r>
+            <a:endParaRPr lang="en-US"/>
           </a:p>
         </p:txBody>
       </p:sp>
@@ -1351,37 +1558,38 @@
           <a:p>
             <a:pPr lvl="0"/>
             <a:r>
-              <a:rPr lang="en-US"/>
+              <a:rPr lang="en-US" smtClean="0"/>
               <a:t>Click to edit Master text styles</a:t>
             </a:r>
           </a:p>
           <a:p>
             <a:pPr lvl="1"/>
             <a:r>
-              <a:rPr lang="en-US"/>
+              <a:rPr lang="en-US" smtClean="0"/>
               <a:t>Second level</a:t>
             </a:r>
           </a:p>
           <a:p>
             <a:pPr lvl="2"/>
             <a:r>
-              <a:rPr lang="en-US"/>
+              <a:rPr lang="en-US" smtClean="0"/>
               <a:t>Third level</a:t>
             </a:r>
           </a:p>
           <a:p>
             <a:pPr lvl="3"/>
             <a:r>
-              <a:rPr lang="en-US"/>
+              <a:rPr lang="en-US" smtClean="0"/>
               <a:t>Fourth level</a:t>
             </a:r>
           </a:p>
           <a:p>
             <a:pPr lvl="4"/>
             <a:r>
-              <a:rPr lang="en-US"/>
+              <a:rPr lang="en-US" smtClean="0"/>
               <a:t>Fifth level</a:t>
             </a:r>
+            <a:endParaRPr lang="en-US"/>
           </a:p>
         </p:txBody>
       </p:sp>
@@ -1402,7 +1610,7 @@
           <a:p>
             <a:fld id="{5BCAD085-E8A6-8845-BD4E-CB4CCA059FC4}" type="datetimeFigureOut">
               <a:rPr lang="en-US" smtClean="0"/>
-              <a:t>9/25/2026</a:t>
+              <a:t>1/27/13</a:t>
             </a:fld>
             <a:endParaRPr lang="en-US"/>
           </a:p>
@@ -1501,9 +1709,10 @@
           <a:lstStyle/>
           <a:p>
             <a:r>
-              <a:rPr lang="en-US"/>
+              <a:rPr lang="en-US" smtClean="0"/>
               <a:t>Click to edit Master title style</a:t>
             </a:r>
+            <a:endParaRPr lang="en-US"/>
           </a:p>
         </p:txBody>
       </p:sp>
@@ -1529,37 +1738,38 @@
           <a:p>
             <a:pPr lvl="0"/>
             <a:r>
-              <a:rPr lang="en-US"/>
+              <a:rPr lang="en-US" smtClean="0"/>
               <a:t>Click to edit Master text styles</a:t>
             </a:r>
           </a:p>
           <a:p>
             <a:pPr lvl="1"/>
             <a:r>
-              <a:rPr lang="en-US"/>
+              <a:rPr lang="en-US" smtClean="0"/>
               <a:t>Second level</a:t>
             </a:r>
           </a:p>
           <a:p>
             <a:pPr lvl="2"/>
             <a:r>
-              <a:rPr lang="en-US"/>
+              <a:rPr lang="en-US" smtClean="0"/>
               <a:t>Third level</a:t>
             </a:r>
           </a:p>
           <a:p>
             <a:pPr lvl="3"/>
             <a:r>
-              <a:rPr lang="en-US"/>
+              <a:rPr lang="en-US" smtClean="0"/>
               <a:t>Fourth level</a:t>
             </a:r>
           </a:p>
           <a:p>
             <a:pPr lvl="4"/>
             <a:r>
-              <a:rPr lang="en-US"/>
+              <a:rPr lang="en-US" smtClean="0"/>
               <a:t>Fifth level</a:t>
             </a:r>
+            <a:endParaRPr lang="en-US"/>
           </a:p>
         </p:txBody>
       </p:sp>
@@ -1580,7 +1790,7 @@
           <a:p>
             <a:fld id="{5BCAD085-E8A6-8845-BD4E-CB4CCA059FC4}" type="datetimeFigureOut">
               <a:rPr lang="en-US" smtClean="0"/>
-              <a:t>9/25/2026</a:t>
+              <a:t>1/27/13</a:t>
             </a:fld>
             <a:endParaRPr lang="en-US"/>
           </a:p>
@@ -1674,9 +1884,10 @@
           <a:lstStyle/>
           <a:p>
             <a:r>
-              <a:rPr lang="en-US"/>
+              <a:rPr lang="en-US" smtClean="0"/>
               <a:t>Click to edit Master title style</a:t>
             </a:r>
+            <a:endParaRPr lang="en-US"/>
           </a:p>
         </p:txBody>
       </p:sp>
@@ -1697,37 +1908,38 @@
           <a:p>
             <a:pPr lvl="0"/>
             <a:r>
-              <a:rPr lang="en-US"/>
+              <a:rPr lang="en-US" smtClean="0"/>
               <a:t>Click to edit Master text styles</a:t>
             </a:r>
           </a:p>
           <a:p>
             <a:pPr lvl="1"/>
             <a:r>
-              <a:rPr lang="en-US"/>
+              <a:rPr lang="en-US" smtClean="0"/>
               <a:t>Second level</a:t>
             </a:r>
           </a:p>
           <a:p>
             <a:pPr lvl="2"/>
             <a:r>
-              <a:rPr lang="en-US"/>
+              <a:rPr lang="en-US" smtClean="0"/>
               <a:t>Third level</a:t>
             </a:r>
           </a:p>
           <a:p>
             <a:pPr lvl="3"/>
             <a:r>
-              <a:rPr lang="en-US"/>
+              <a:rPr lang="en-US" smtClean="0"/>
               <a:t>Fourth level</a:t>
             </a:r>
           </a:p>
           <a:p>
             <a:pPr lvl="4"/>
             <a:r>
-              <a:rPr lang="en-US"/>
+              <a:rPr lang="en-US" smtClean="0"/>
               <a:t>Fifth level</a:t>
             </a:r>
+            <a:endParaRPr lang="en-US"/>
           </a:p>
         </p:txBody>
       </p:sp>
@@ -1748,7 +1960,7 @@
           <a:p>
             <a:fld id="{5BCAD085-E8A6-8845-BD4E-CB4CCA059FC4}" type="datetimeFigureOut">
               <a:rPr lang="en-US" smtClean="0"/>
-              <a:t>9/25/2026</a:t>
+              <a:t>1/27/13</a:t>
             </a:fld>
             <a:endParaRPr lang="en-US"/>
           </a:p>
@@ -1851,9 +2063,10 @@
           </a:lstStyle>
           <a:p>
             <a:r>
-              <a:rPr lang="en-US"/>
+              <a:rPr lang="en-US" smtClean="0"/>
               <a:t>Click to edit Master title style</a:t>
             </a:r>
+            <a:endParaRPr lang="en-US"/>
           </a:p>
         </p:txBody>
       </p:sp>
@@ -1970,7 +2183,7 @@
           <a:p>
             <a:pPr lvl="0"/>
             <a:r>
-              <a:rPr lang="en-US"/>
+              <a:rPr lang="en-US" smtClean="0"/>
               <a:t>Click to edit Master text styles</a:t>
             </a:r>
           </a:p>
@@ -1993,7 +2206,7 @@
           <a:p>
             <a:fld id="{5BCAD085-E8A6-8845-BD4E-CB4CCA059FC4}" type="datetimeFigureOut">
               <a:rPr lang="en-US" smtClean="0"/>
-              <a:t>9/25/2026</a:t>
+              <a:t>1/27/13</a:t>
             </a:fld>
             <a:endParaRPr lang="en-US"/>
           </a:p>
@@ -2087,9 +2300,10 @@
           <a:lstStyle/>
           <a:p>
             <a:r>
-              <a:rPr lang="en-US"/>
+              <a:rPr lang="en-US" smtClean="0"/>
               <a:t>Click to edit Master title style</a:t>
             </a:r>
+            <a:endParaRPr lang="en-US"/>
           </a:p>
         </p:txBody>
       </p:sp>
@@ -2143,37 +2357,38 @@
           <a:p>
             <a:pPr lvl="0"/>
             <a:r>
-              <a:rPr lang="en-US"/>
+              <a:rPr lang="en-US" smtClean="0"/>
               <a:t>Click to edit Master text styles</a:t>
             </a:r>
           </a:p>
           <a:p>
             <a:pPr lvl="1"/>
             <a:r>
-              <a:rPr lang="en-US"/>
+              <a:rPr lang="en-US" smtClean="0"/>
               <a:t>Second level</a:t>
             </a:r>
           </a:p>
           <a:p>
             <a:pPr lvl="2"/>
             <a:r>
-              <a:rPr lang="en-US"/>
+              <a:rPr lang="en-US" smtClean="0"/>
               <a:t>Third level</a:t>
             </a:r>
           </a:p>
           <a:p>
             <a:pPr lvl="3"/>
             <a:r>
-              <a:rPr lang="en-US"/>
+              <a:rPr lang="en-US" smtClean="0"/>
               <a:t>Fourth level</a:t>
             </a:r>
           </a:p>
           <a:p>
             <a:pPr lvl="4"/>
             <a:r>
-              <a:rPr lang="en-US"/>
+              <a:rPr lang="en-US" smtClean="0"/>
               <a:t>Fifth level</a:t>
             </a:r>
+            <a:endParaRPr lang="en-US"/>
           </a:p>
         </p:txBody>
       </p:sp>
@@ -2227,37 +2442,38 @@
           <a:p>
             <a:pPr lvl="0"/>
             <a:r>
-              <a:rPr lang="en-US"/>
+              <a:rPr lang="en-US" smtClean="0"/>
               <a:t>Click to edit Master text styles</a:t>
             </a:r>
           </a:p>
           <a:p>
             <a:pPr lvl="1"/>
             <a:r>
-              <a:rPr lang="en-US"/>
+              <a:rPr lang="en-US" smtClean="0"/>
               <a:t>Second level</a:t>
             </a:r>
           </a:p>
           <a:p>
             <a:pPr lvl="2"/>
             <a:r>
-              <a:rPr lang="en-US"/>
+              <a:rPr lang="en-US" smtClean="0"/>
               <a:t>Third level</a:t>
             </a:r>
           </a:p>
           <a:p>
             <a:pPr lvl="3"/>
             <a:r>
-              <a:rPr lang="en-US"/>
+              <a:rPr lang="en-US" smtClean="0"/>
               <a:t>Fourth level</a:t>
             </a:r>
           </a:p>
           <a:p>
             <a:pPr lvl="4"/>
             <a:r>
-              <a:rPr lang="en-US"/>
+              <a:rPr lang="en-US" smtClean="0"/>
               <a:t>Fifth level</a:t>
             </a:r>
+            <a:endParaRPr lang="en-US"/>
           </a:p>
         </p:txBody>
       </p:sp>
@@ -2278,7 +2494,7 @@
           <a:p>
             <a:fld id="{5BCAD085-E8A6-8845-BD4E-CB4CCA059FC4}" type="datetimeFigureOut">
               <a:rPr lang="en-US" smtClean="0"/>
-              <a:t>9/25/2026</a:t>
+              <a:t>1/27/13</a:t>
             </a:fld>
             <a:endParaRPr lang="en-US"/>
           </a:p>
@@ -2376,9 +2592,10 @@
           </a:lstStyle>
           <a:p>
             <a:r>
-              <a:rPr lang="en-US"/>
+              <a:rPr lang="en-US" smtClean="0"/>
               <a:t>Click to edit Master title style</a:t>
             </a:r>
+            <a:endParaRPr lang="en-US"/>
           </a:p>
         </p:txBody>
       </p:sp>
@@ -2441,7 +2658,7 @@
           <a:p>
             <a:pPr lvl="0"/>
             <a:r>
-              <a:rPr lang="en-US"/>
+              <a:rPr lang="en-US" smtClean="0"/>
               <a:t>Click to edit Master text styles</a:t>
             </a:r>
           </a:p>
@@ -2497,37 +2714,38 @@
           <a:p>
             <a:pPr lvl="0"/>
             <a:r>
-              <a:rPr lang="en-US"/>
+              <a:rPr lang="en-US" smtClean="0"/>
               <a:t>Click to edit Master text styles</a:t>
             </a:r>
           </a:p>
           <a:p>
             <a:pPr lvl="1"/>
             <a:r>
-              <a:rPr lang="en-US"/>
+              <a:rPr lang="en-US" smtClean="0"/>
               <a:t>Second level</a:t>
             </a:r>
           </a:p>
           <a:p>
             <a:pPr lvl="2"/>
             <a:r>
-              <a:rPr lang="en-US"/>
+              <a:rPr lang="en-US" smtClean="0"/>
               <a:t>Third level</a:t>
             </a:r>
           </a:p>
           <a:p>
             <a:pPr lvl="3"/>
             <a:r>
-              <a:rPr lang="en-US"/>
+              <a:rPr lang="en-US" smtClean="0"/>
               <a:t>Fourth level</a:t>
             </a:r>
           </a:p>
           <a:p>
             <a:pPr lvl="4"/>
             <a:r>
-              <a:rPr lang="en-US"/>
+              <a:rPr lang="en-US" smtClean="0"/>
               <a:t>Fifth level</a:t>
             </a:r>
+            <a:endParaRPr lang="en-US"/>
           </a:p>
         </p:txBody>
       </p:sp>
@@ -2590,7 +2808,7 @@
           <a:p>
             <a:pPr lvl="0"/>
             <a:r>
-              <a:rPr lang="en-US"/>
+              <a:rPr lang="en-US" smtClean="0"/>
               <a:t>Click to edit Master text styles</a:t>
             </a:r>
           </a:p>
@@ -2646,37 +2864,38 @@
           <a:p>
             <a:pPr lvl="0"/>
             <a:r>
-              <a:rPr lang="en-US"/>
+              <a:rPr lang="en-US" smtClean="0"/>
               <a:t>Click to edit Master text styles</a:t>
             </a:r>
           </a:p>
           <a:p>
             <a:pPr lvl="1"/>
             <a:r>
-              <a:rPr lang="en-US"/>
+              <a:rPr lang="en-US" smtClean="0"/>
               <a:t>Second level</a:t>
             </a:r>
           </a:p>
           <a:p>
             <a:pPr lvl="2"/>
             <a:r>
-              <a:rPr lang="en-US"/>
+              <a:rPr lang="en-US" smtClean="0"/>
               <a:t>Third level</a:t>
             </a:r>
           </a:p>
           <a:p>
             <a:pPr lvl="3"/>
             <a:r>
-              <a:rPr lang="en-US"/>
+              <a:rPr lang="en-US" smtClean="0"/>
               <a:t>Fourth level</a:t>
             </a:r>
           </a:p>
           <a:p>
             <a:pPr lvl="4"/>
             <a:r>
-              <a:rPr lang="en-US"/>
+              <a:rPr lang="en-US" smtClean="0"/>
               <a:t>Fifth level</a:t>
             </a:r>
+            <a:endParaRPr lang="en-US"/>
           </a:p>
         </p:txBody>
       </p:sp>
@@ -2697,7 +2916,7 @@
           <a:p>
             <a:fld id="{5BCAD085-E8A6-8845-BD4E-CB4CCA059FC4}" type="datetimeFigureOut">
               <a:rPr lang="en-US" smtClean="0"/>
-              <a:t>9/25/2026</a:t>
+              <a:t>1/27/13</a:t>
             </a:fld>
             <a:endParaRPr lang="en-US"/>
           </a:p>
@@ -2791,9 +3010,10 @@
           <a:lstStyle/>
           <a:p>
             <a:r>
-              <a:rPr lang="en-US"/>
+              <a:rPr lang="en-US" smtClean="0"/>
               <a:t>Click to edit Master title style</a:t>
             </a:r>
+            <a:endParaRPr lang="en-US"/>
           </a:p>
         </p:txBody>
       </p:sp>
@@ -2814,7 +3034,7 @@
           <a:p>
             <a:fld id="{5BCAD085-E8A6-8845-BD4E-CB4CCA059FC4}" type="datetimeFigureOut">
               <a:rPr lang="en-US" smtClean="0"/>
-              <a:t>9/25/2026</a:t>
+              <a:t>1/27/13</a:t>
             </a:fld>
             <a:endParaRPr lang="en-US"/>
           </a:p>
@@ -2909,7 +3129,7 @@
           <a:p>
             <a:fld id="{5BCAD085-E8A6-8845-BD4E-CB4CCA059FC4}" type="datetimeFigureOut">
               <a:rPr lang="en-US" smtClean="0"/>
-              <a:t>9/25/2026</a:t>
+              <a:t>1/27/13</a:t>
             </a:fld>
             <a:endParaRPr lang="en-US"/>
           </a:p>
@@ -3012,9 +3232,10 @@
           </a:lstStyle>
           <a:p>
             <a:r>
-              <a:rPr lang="en-US"/>
+              <a:rPr lang="en-US" smtClean="0"/>
               <a:t>Click to edit Master title style</a:t>
             </a:r>
+            <a:endParaRPr lang="en-US"/>
           </a:p>
         </p:txBody>
       </p:sp>
@@ -3068,37 +3289,38 @@
           <a:p>
             <a:pPr lvl="0"/>
             <a:r>
-              <a:rPr lang="en-US"/>
+              <a:rPr lang="en-US" smtClean="0"/>
               <a:t>Click to edit Master text styles</a:t>
             </a:r>
           </a:p>
           <a:p>
             <a:pPr lvl="1"/>
             <a:r>
-              <a:rPr lang="en-US"/>
+              <a:rPr lang="en-US" smtClean="0"/>
               <a:t>Second level</a:t>
             </a:r>
           </a:p>
           <a:p>
             <a:pPr lvl="2"/>
             <a:r>
-              <a:rPr lang="en-US"/>
+              <a:rPr lang="en-US" smtClean="0"/>
               <a:t>Third level</a:t>
             </a:r>
           </a:p>
           <a:p>
             <a:pPr lvl="3"/>
             <a:r>
-              <a:rPr lang="en-US"/>
+              <a:rPr lang="en-US" smtClean="0"/>
               <a:t>Fourth level</a:t>
             </a:r>
           </a:p>
           <a:p>
             <a:pPr lvl="4"/>
             <a:r>
-              <a:rPr lang="en-US"/>
+              <a:rPr lang="en-US" smtClean="0"/>
               <a:t>Fifth level</a:t>
             </a:r>
+            <a:endParaRPr lang="en-US"/>
           </a:p>
         </p:txBody>
       </p:sp>
@@ -3161,7 +3383,7 @@
           <a:p>
             <a:pPr lvl="0"/>
             <a:r>
-              <a:rPr lang="en-US"/>
+              <a:rPr lang="en-US" smtClean="0"/>
               <a:t>Click to edit Master text styles</a:t>
             </a:r>
           </a:p>
@@ -3184,7 +3406,7 @@
           <a:p>
             <a:fld id="{5BCAD085-E8A6-8845-BD4E-CB4CCA059FC4}" type="datetimeFigureOut">
               <a:rPr lang="en-US" smtClean="0"/>
-              <a:t>9/25/2026</a:t>
+              <a:t>1/27/13</a:t>
             </a:fld>
             <a:endParaRPr lang="en-US"/>
           </a:p>
@@ -3287,9 +3509,10 @@
           </a:lstStyle>
           <a:p>
             <a:r>
-              <a:rPr lang="en-US"/>
+              <a:rPr lang="en-US" smtClean="0"/>
               <a:t>Click to edit Master title style</a:t>
             </a:r>
+            <a:endParaRPr lang="en-US"/>
           </a:p>
         </p:txBody>
       </p:sp>
@@ -3413,7 +3636,7 @@
           <a:p>
             <a:pPr lvl="0"/>
             <a:r>
-              <a:rPr lang="en-US"/>
+              <a:rPr lang="en-US" smtClean="0"/>
               <a:t>Click to edit Master text styles</a:t>
             </a:r>
           </a:p>
@@ -3436,7 +3659,7 @@
           <a:p>
             <a:fld id="{5BCAD085-E8A6-8845-BD4E-CB4CCA059FC4}" type="datetimeFigureOut">
               <a:rPr lang="en-US" smtClean="0"/>
-              <a:t>9/25/2026</a:t>
+              <a:t>1/27/13</a:t>
             </a:fld>
             <a:endParaRPr lang="en-US"/>
           </a:p>
@@ -3545,9 +3768,10 @@
           <a:lstStyle/>
           <a:p>
             <a:r>
-              <a:rPr lang="en-US"/>
+              <a:rPr lang="en-US" smtClean="0"/>
               <a:t>Click to edit Master title style</a:t>
             </a:r>
+            <a:endParaRPr lang="en-US"/>
           </a:p>
         </p:txBody>
       </p:sp>
@@ -3578,37 +3802,38 @@
           <a:p>
             <a:pPr lvl="0"/>
             <a:r>
-              <a:rPr lang="en-US"/>
+              <a:rPr lang="en-US" smtClean="0"/>
               <a:t>Click to edit Master text styles</a:t>
             </a:r>
           </a:p>
           <a:p>
             <a:pPr lvl="1"/>
             <a:r>
-              <a:rPr lang="en-US"/>
+              <a:rPr lang="en-US" smtClean="0"/>
               <a:t>Second level</a:t>
             </a:r>
           </a:p>
           <a:p>
             <a:pPr lvl="2"/>
             <a:r>
-              <a:rPr lang="en-US"/>
+              <a:rPr lang="en-US" smtClean="0"/>
               <a:t>Third level</a:t>
             </a:r>
           </a:p>
           <a:p>
             <a:pPr lvl="3"/>
             <a:r>
-              <a:rPr lang="en-US"/>
+              <a:rPr lang="en-US" smtClean="0"/>
               <a:t>Fourth level</a:t>
             </a:r>
           </a:p>
           <a:p>
             <a:pPr lvl="4"/>
             <a:r>
-              <a:rPr lang="en-US"/>
+              <a:rPr lang="en-US" smtClean="0"/>
               <a:t>Fifth level</a:t>
             </a:r>
+            <a:endParaRPr lang="en-US"/>
           </a:p>
         </p:txBody>
       </p:sp>
@@ -3647,7 +3872,7 @@
           <a:p>
             <a:fld id="{5BCAD085-E8A6-8845-BD4E-CB4CCA059FC4}" type="datetimeFigureOut">
               <a:rPr lang="en-US" smtClean="0"/>
-              <a:t>9/25/2026</a:t>
+              <a:t>1/27/13</a:t>
             </a:fld>
             <a:endParaRPr lang="en-US"/>
           </a:p>
@@ -4006,7 +4231,7 @@
 </file>
 
 <file path=ppt/slides/slide1.xml><?xml version="1.0" encoding="utf-8"?>
-<p:sld xmlns:a="http://schemas.openxmlformats.org/drawingml/2006/main" xmlns:r="http://schemas.openxmlformats.org/officeDocument/2006/relationships" xmlns:p="http://schemas.openxmlformats.org/presentationml/2006/main">
+<p:sld xmlns:a="http://schemas.openxmlformats.org/drawingml/2006/main" xmlns:p="http://schemas.openxmlformats.org/presentationml/2006/main" xmlns:r="http://schemas.openxmlformats.org/officeDocument/2006/relationships">
   <p:cSld>
     <p:spTree>
       <p:nvGrpSpPr>
@@ -4014,14 +4239,7 @@
         <p:cNvGrpSpPr/>
         <p:nvPr/>
       </p:nvGrpSpPr>
-      <p:grpSpPr>
-        <a:xfrm>
-          <a:off x="0" y="0"/>
-          <a:ext cx="0" cy="0"/>
-          <a:chOff x="0" y="0"/>
-          <a:chExt cx="0" cy="0"/>
-        </a:xfrm>
-      </p:grpSpPr>
+      <p:grpSpPr/>
       <p:pic>
         <p:nvPicPr>
           <p:cNvPr id="2" name="Picture 1" descr="bg_hero.png"/>
@@ -4031,7 +4249,7 @@
           <p:nvPr/>
         </p:nvPicPr>
         <p:blipFill>
-          <a:blip r:embed="rId3"/>
+          <a:blip r:embed="rId2"/>
           <a:stretch>
             <a:fillRect/>
           </a:stretch>
@@ -4063,7 +4281,7 @@
           <a:noFill/>
         </p:spPr>
         <p:txBody>
-          <a:bodyPr wrap="square" lIns="0" tIns="0" rIns="0" bIns="0" anchor="t">
+          <a:bodyPr wrap="square" anchor="t" lIns="0" rIns="0" tIns="0" bIns="0">
             <a:spAutoFit/>
           </a:bodyPr>
           <a:lstStyle/>
@@ -4102,7 +4320,7 @@
           <a:noFill/>
         </p:spPr>
         <p:txBody>
-          <a:bodyPr wrap="square" lIns="0" tIns="0" rIns="0" bIns="0" anchor="t">
+          <a:bodyPr wrap="square" anchor="t" lIns="0" rIns="0" tIns="0" bIns="0">
             <a:spAutoFit/>
           </a:bodyPr>
           <a:lstStyle/>
@@ -4141,7 +4359,7 @@
           <a:noFill/>
         </p:spPr>
         <p:txBody>
-          <a:bodyPr wrap="square" lIns="0" tIns="0" rIns="0" bIns="0" anchor="t">
+          <a:bodyPr wrap="square" anchor="t" lIns="0" rIns="0" tIns="0" bIns="0">
             <a:spAutoFit/>
           </a:bodyPr>
           <a:lstStyle/>
@@ -4224,7 +4442,6 @@
           <a:lstStyle/>
           <a:p>
             <a:pPr algn="ctr"/>
-            <a:endParaRPr/>
           </a:p>
         </p:txBody>
       </p:sp>
@@ -4245,7 +4462,7 @@
           <a:noFill/>
         </p:spPr>
         <p:txBody>
-          <a:bodyPr wrap="square" lIns="0" tIns="0" rIns="0" bIns="0" anchor="t">
+          <a:bodyPr wrap="square" anchor="t" lIns="0" rIns="0" tIns="0" bIns="0">
             <a:spAutoFit/>
           </a:bodyPr>
           <a:lstStyle/>
@@ -4276,7 +4493,7 @@
           <p:nvPr/>
         </p:nvPicPr>
         <p:blipFill>
-          <a:blip r:embed="rId4"/>
+          <a:blip r:embed="rId3"/>
           <a:stretch>
             <a:fillRect/>
           </a:stretch>
@@ -4334,7 +4551,6 @@
           <a:lstStyle/>
           <a:p>
             <a:pPr algn="ctr"/>
-            <a:endParaRPr/>
           </a:p>
         </p:txBody>
       </p:sp>
@@ -4355,7 +4571,7 @@
           <a:noFill/>
         </p:spPr>
         <p:txBody>
-          <a:bodyPr wrap="square" lIns="0" tIns="0" rIns="0" bIns="0" anchor="t">
+          <a:bodyPr wrap="square" anchor="t" lIns="0" rIns="0" tIns="0" bIns="0">
             <a:spAutoFit/>
           </a:bodyPr>
           <a:lstStyle/>
@@ -4394,7 +4610,7 @@
           <a:noFill/>
         </p:spPr>
         <p:txBody>
-          <a:bodyPr wrap="square" lIns="0" tIns="0" rIns="0" bIns="0" anchor="t">
+          <a:bodyPr wrap="square" anchor="t" lIns="0" rIns="0" tIns="0" bIns="0">
             <a:spAutoFit/>
           </a:bodyPr>
           <a:lstStyle/>
@@ -4433,7 +4649,7 @@
           <a:noFill/>
         </p:spPr>
         <p:txBody>
-          <a:bodyPr wrap="square" lIns="0" tIns="0" rIns="0" bIns="0" anchor="t">
+          <a:bodyPr wrap="square" anchor="t" lIns="0" rIns="0" tIns="0" bIns="0">
             <a:spAutoFit/>
           </a:bodyPr>
           <a:lstStyle/>
@@ -4443,7 +4659,15 @@
                 <a:spcPct val="125000"/>
               </a:lnSpc>
             </a:pPr>
-            <a:endParaRPr/>
+            <a:r>
+              <a:rPr sz="900" b="1" i="0" spc="140">
+                <a:solidFill>
+                  <a:srgbClr val="22D3EE"/>
+                </a:solidFill>
+                <a:latin typeface="Segoe UI"/>
+              </a:rPr>
+              <a:t/>
+            </a:r>
           </a:p>
         </p:txBody>
       </p:sp>
@@ -4464,7 +4688,7 @@
           <a:noFill/>
         </p:spPr>
         <p:txBody>
-          <a:bodyPr wrap="square" lIns="0" tIns="0" rIns="0" bIns="0" anchor="t">
+          <a:bodyPr wrap="square" anchor="t" lIns="0" rIns="0" tIns="0" bIns="0">
             <a:spAutoFit/>
           </a:bodyPr>
           <a:lstStyle/>
@@ -4503,7 +4727,7 @@
           <a:noFill/>
         </p:spPr>
         <p:txBody>
-          <a:bodyPr wrap="square" lIns="0" tIns="0" rIns="0" bIns="0" anchor="t">
+          <a:bodyPr wrap="square" anchor="t" lIns="0" rIns="0" tIns="0" bIns="0">
             <a:spAutoFit/>
           </a:bodyPr>
           <a:lstStyle/>
@@ -4542,7 +4766,7 @@
           <a:noFill/>
         </p:spPr>
         <p:txBody>
-          <a:bodyPr wrap="square" lIns="0" tIns="0" rIns="0" bIns="0" anchor="t">
+          <a:bodyPr wrap="square" anchor="t" lIns="0" rIns="0" tIns="0" bIns="0">
             <a:spAutoFit/>
           </a:bodyPr>
           <a:lstStyle/>
@@ -4581,7 +4805,7 @@
           <a:noFill/>
         </p:spPr>
         <p:txBody>
-          <a:bodyPr wrap="square" lIns="0" tIns="0" rIns="0" bIns="0" anchor="t">
+          <a:bodyPr wrap="square" anchor="t" lIns="0" rIns="0" tIns="0" bIns="0">
             <a:spAutoFit/>
           </a:bodyPr>
           <a:lstStyle/>
@@ -4620,7 +4844,7 @@
           <a:noFill/>
         </p:spPr>
         <p:txBody>
-          <a:bodyPr wrap="square" lIns="0" tIns="0" rIns="0" bIns="0" anchor="t">
+          <a:bodyPr wrap="square" anchor="t" lIns="0" rIns="0" tIns="0" bIns="0">
             <a:spAutoFit/>
           </a:bodyPr>
           <a:lstStyle/>
@@ -4659,7 +4883,7 @@
           <a:noFill/>
         </p:spPr>
         <p:txBody>
-          <a:bodyPr wrap="square" lIns="0" tIns="0" rIns="0" bIns="0" anchor="t">
+          <a:bodyPr wrap="square" anchor="t" lIns="0" rIns="0" tIns="0" bIns="0">
             <a:spAutoFit/>
           </a:bodyPr>
           <a:lstStyle/>
@@ -4686,23 +4910,11 @@
   <p:clrMapOvr>
     <a:masterClrMapping/>
   </p:clrMapOvr>
-  <mc:AlternateContent xmlns:mc="http://schemas.openxmlformats.org/markup-compatibility/2006">
-    <mc:Choice xmlns:p14="http://schemas.microsoft.com/office/powerpoint/2010/main" Requires="p14">
-      <p:transition spd="med" p14:dur="700">
-        <p:fade thruBlk="1"/>
-      </p:transition>
-    </mc:Choice>
-    <mc:Fallback>
-      <p:transition spd="med">
-        <p:fade thruBlk="1"/>
-      </p:transition>
-    </mc:Fallback>
-  </mc:AlternateContent>
 </p:sld>
 </file>
 
 <file path=ppt/slides/slide10.xml><?xml version="1.0" encoding="utf-8"?>
-<p:sld xmlns:a="http://schemas.openxmlformats.org/drawingml/2006/main" xmlns:r="http://schemas.openxmlformats.org/officeDocument/2006/relationships" xmlns:p="http://schemas.openxmlformats.org/presentationml/2006/main">
+<p:sld xmlns:a="http://schemas.openxmlformats.org/drawingml/2006/main" xmlns:p="http://schemas.openxmlformats.org/presentationml/2006/main" xmlns:r="http://schemas.openxmlformats.org/officeDocument/2006/relationships">
   <p:cSld>
     <p:spTree>
       <p:nvGrpSpPr>
@@ -4710,14 +4922,7 @@
         <p:cNvGrpSpPr/>
         <p:nvPr/>
       </p:nvGrpSpPr>
-      <p:grpSpPr>
-        <a:xfrm>
-          <a:off x="0" y="0"/>
-          <a:ext cx="0" cy="0"/>
-          <a:chOff x="0" y="0"/>
-          <a:chExt cx="0" cy="0"/>
-        </a:xfrm>
-      </p:grpSpPr>
+      <p:grpSpPr/>
       <p:pic>
         <p:nvPicPr>
           <p:cNvPr id="2" name="Picture 1" descr="bg_deep.png"/>
@@ -4759,7 +4964,7 @@
           <a:noFill/>
         </p:spPr>
         <p:txBody>
-          <a:bodyPr wrap="square" lIns="0" tIns="0" rIns="0" bIns="0" anchor="t">
+          <a:bodyPr wrap="square" anchor="t" lIns="0" rIns="0" tIns="0" bIns="0">
             <a:spAutoFit/>
           </a:bodyPr>
           <a:lstStyle/>
@@ -4798,7 +5003,7 @@
           <a:noFill/>
         </p:spPr>
         <p:txBody>
-          <a:bodyPr wrap="square" lIns="0" tIns="0" rIns="0" bIns="0" anchor="t">
+          <a:bodyPr wrap="square" anchor="t" lIns="0" rIns="0" tIns="0" bIns="0">
             <a:spAutoFit/>
           </a:bodyPr>
           <a:lstStyle/>
@@ -4837,7 +5042,7 @@
           <a:noFill/>
         </p:spPr>
         <p:txBody>
-          <a:bodyPr wrap="square" lIns="0" tIns="0" rIns="0" bIns="0" anchor="t">
+          <a:bodyPr wrap="square" anchor="t" lIns="0" rIns="0" tIns="0" bIns="0">
             <a:spAutoFit/>
           </a:bodyPr>
           <a:lstStyle/>
@@ -4900,7 +5105,7 @@
           </a:fontRef>
         </p:style>
         <p:txBody>
-          <a:bodyPr wrap="square" lIns="73152" tIns="36576" rIns="73152" bIns="36576" rtlCol="0" anchor="ctr"/>
+          <a:bodyPr rtlCol="0" anchor="ctr" wrap="square" lIns="73152" rIns="73152" tIns="36576" bIns="36576"/>
           <a:lstStyle/>
           <a:p>
             <a:pPr algn="ctr"/>
@@ -5010,7 +5215,7 @@
           </a:fontRef>
         </p:style>
         <p:txBody>
-          <a:bodyPr wrap="square" lIns="73152" tIns="36576" rIns="73152" bIns="36576" rtlCol="0" anchor="ctr"/>
+          <a:bodyPr rtlCol="0" anchor="ctr" wrap="square" lIns="73152" rIns="73152" tIns="36576" bIns="36576"/>
           <a:lstStyle/>
           <a:p>
             <a:pPr algn="ctr"/>
@@ -5120,7 +5325,7 @@
           </a:fontRef>
         </p:style>
         <p:txBody>
-          <a:bodyPr wrap="square" lIns="73152" tIns="36576" rIns="73152" bIns="36576" rtlCol="0" anchor="ctr"/>
+          <a:bodyPr rtlCol="0" anchor="ctr" wrap="square" lIns="73152" rIns="73152" tIns="36576" bIns="36576"/>
           <a:lstStyle/>
           <a:p>
             <a:pPr algn="ctr"/>
@@ -5229,7 +5434,7 @@
           </a:fontRef>
         </p:style>
         <p:txBody>
-          <a:bodyPr wrap="square" lIns="73152" tIns="36576" rIns="73152" bIns="36576" rtlCol="0" anchor="ctr"/>
+          <a:bodyPr rtlCol="0" anchor="ctr" wrap="square" lIns="73152" rIns="73152" tIns="36576" bIns="36576"/>
           <a:lstStyle/>
           <a:p>
             <a:pPr algn="ctr"/>
@@ -5339,7 +5544,7 @@
           </a:fontRef>
         </p:style>
         <p:txBody>
-          <a:bodyPr wrap="square" lIns="73152" tIns="36576" rIns="73152" bIns="36576" rtlCol="0" anchor="ctr"/>
+          <a:bodyPr rtlCol="0" anchor="ctr" wrap="square" lIns="73152" rIns="73152" tIns="36576" bIns="36576"/>
           <a:lstStyle/>
           <a:p>
             <a:pPr algn="ctr"/>
@@ -5448,7 +5653,7 @@
           </a:fontRef>
         </p:style>
         <p:txBody>
-          <a:bodyPr wrap="square" lIns="73152" tIns="36576" rIns="73152" bIns="36576" rtlCol="0" anchor="ctr"/>
+          <a:bodyPr rtlCol="0" anchor="ctr" wrap="square" lIns="73152" rIns="73152" tIns="36576" bIns="36576"/>
           <a:lstStyle/>
           <a:p>
             <a:pPr algn="ctr"/>
@@ -5557,7 +5762,7 @@
           </a:fontRef>
         </p:style>
         <p:txBody>
-          <a:bodyPr wrap="square" lIns="73152" tIns="36576" rIns="73152" bIns="36576" rtlCol="0" anchor="ctr"/>
+          <a:bodyPr rtlCol="0" anchor="ctr" wrap="square" lIns="73152" rIns="73152" tIns="36576" bIns="36576"/>
           <a:lstStyle/>
           <a:p>
             <a:pPr algn="ctr"/>
@@ -5635,7 +5840,6 @@
           <a:lstStyle/>
           <a:p>
             <a:pPr algn="ctr"/>
-            <a:endParaRPr/>
           </a:p>
         </p:txBody>
       </p:sp>
@@ -5656,7 +5860,7 @@
           <a:noFill/>
         </p:spPr>
         <p:txBody>
-          <a:bodyPr wrap="square" lIns="0" tIns="0" rIns="0" bIns="0" anchor="t">
+          <a:bodyPr wrap="square" anchor="t" lIns="0" rIns="0" tIns="0" bIns="0">
             <a:spAutoFit/>
           </a:bodyPr>
           <a:lstStyle/>
@@ -5695,7 +5899,7 @@
           <a:noFill/>
         </p:spPr>
         <p:txBody>
-          <a:bodyPr wrap="square" lIns="0" tIns="0" rIns="0" bIns="0" anchor="t">
+          <a:bodyPr wrap="square" anchor="t" lIns="0" rIns="0" tIns="0" bIns="0">
             <a:spAutoFit/>
           </a:bodyPr>
           <a:lstStyle/>
@@ -5721,12 +5925,15 @@
                 <a:spcPct val="135000"/>
               </a:lnSpc>
             </a:pPr>
-            <a:endParaRPr sz="1050" b="0" i="0">
-              <a:solidFill>
-                <a:srgbClr val="F4F7FB"/>
-              </a:solidFill>
-              <a:latin typeface="Segoe UI"/>
-            </a:endParaRPr>
+            <a:r>
+              <a:rPr sz="1050" b="0" i="0">
+                <a:solidFill>
+                  <a:srgbClr val="F4F7FB"/>
+                </a:solidFill>
+                <a:latin typeface="Segoe UI"/>
+              </a:rPr>
+              <a:t/>
+            </a:r>
           </a:p>
           <a:p>
             <a:pPr algn="l">
@@ -5791,7 +5998,6 @@
           <a:lstStyle/>
           <a:p>
             <a:pPr algn="ctr"/>
-            <a:endParaRPr/>
           </a:p>
         </p:txBody>
       </p:sp>
@@ -5812,7 +6018,7 @@
           <a:noFill/>
         </p:spPr>
         <p:txBody>
-          <a:bodyPr wrap="square" lIns="0" tIns="0" rIns="0" bIns="0" anchor="t">
+          <a:bodyPr wrap="square" anchor="t" lIns="0" rIns="0" tIns="0" bIns="0">
             <a:spAutoFit/>
           </a:bodyPr>
           <a:lstStyle/>
@@ -5851,7 +6057,7 @@
           <a:noFill/>
         </p:spPr>
         <p:txBody>
-          <a:bodyPr wrap="square" lIns="0" tIns="0" rIns="0" bIns="0" anchor="t">
+          <a:bodyPr wrap="square" anchor="t" lIns="0" rIns="0" tIns="0" bIns="0">
             <a:spAutoFit/>
           </a:bodyPr>
           <a:lstStyle/>
@@ -5890,7 +6096,7 @@
           <a:noFill/>
         </p:spPr>
         <p:txBody>
-          <a:bodyPr wrap="square" lIns="0" tIns="0" rIns="0" bIns="0" anchor="t">
+          <a:bodyPr wrap="square" anchor="t" lIns="0" rIns="0" tIns="0" bIns="0">
             <a:spAutoFit/>
           </a:bodyPr>
           <a:lstStyle/>
@@ -5929,7 +6135,7 @@
           <a:noFill/>
         </p:spPr>
         <p:txBody>
-          <a:bodyPr wrap="square" lIns="0" tIns="0" rIns="0" bIns="0" anchor="t">
+          <a:bodyPr wrap="square" anchor="t" lIns="0" rIns="0" tIns="0" bIns="0">
             <a:spAutoFit/>
           </a:bodyPr>
           <a:lstStyle/>
@@ -5968,7 +6174,7 @@
           <a:noFill/>
         </p:spPr>
         <p:txBody>
-          <a:bodyPr wrap="square" lIns="0" tIns="0" rIns="0" bIns="0" anchor="t">
+          <a:bodyPr wrap="square" anchor="t" lIns="0" rIns="0" tIns="0" bIns="0">
             <a:spAutoFit/>
           </a:bodyPr>
           <a:lstStyle/>
@@ -6007,7 +6213,7 @@
           <a:noFill/>
         </p:spPr>
         <p:txBody>
-          <a:bodyPr wrap="square" lIns="0" tIns="0" rIns="0" bIns="0" anchor="t">
+          <a:bodyPr wrap="square" anchor="t" lIns="0" rIns="0" tIns="0" bIns="0">
             <a:spAutoFit/>
           </a:bodyPr>
           <a:lstStyle/>
@@ -6046,7 +6252,7 @@
           <a:noFill/>
         </p:spPr>
         <p:txBody>
-          <a:bodyPr wrap="square" lIns="0" tIns="0" rIns="0" bIns="0" anchor="t">
+          <a:bodyPr wrap="square" anchor="t" lIns="0" rIns="0" tIns="0" bIns="0">
             <a:spAutoFit/>
           </a:bodyPr>
           <a:lstStyle/>
@@ -6085,7 +6291,7 @@
           <a:noFill/>
         </p:spPr>
         <p:txBody>
-          <a:bodyPr wrap="square" lIns="0" tIns="0" rIns="0" bIns="0" anchor="t">
+          <a:bodyPr wrap="square" anchor="t" lIns="0" rIns="0" tIns="0" bIns="0">
             <a:spAutoFit/>
           </a:bodyPr>
           <a:lstStyle/>
@@ -6124,7 +6330,7 @@
           <a:noFill/>
         </p:spPr>
         <p:txBody>
-          <a:bodyPr wrap="square" lIns="0" tIns="0" rIns="0" bIns="0" anchor="t">
+          <a:bodyPr wrap="square" anchor="t" lIns="0" rIns="0" tIns="0" bIns="0">
             <a:spAutoFit/>
           </a:bodyPr>
           <a:lstStyle/>
@@ -6163,7 +6369,7 @@
           <a:noFill/>
         </p:spPr>
         <p:txBody>
-          <a:bodyPr wrap="square" lIns="0" tIns="0" rIns="0" bIns="0" anchor="t">
+          <a:bodyPr wrap="square" anchor="t" lIns="0" rIns="0" tIns="0" bIns="0">
             <a:spAutoFit/>
           </a:bodyPr>
           <a:lstStyle/>
@@ -6202,7 +6408,7 @@
           <a:noFill/>
         </p:spPr>
         <p:txBody>
-          <a:bodyPr wrap="square" lIns="0" tIns="0" rIns="0" bIns="0" anchor="t">
+          <a:bodyPr wrap="square" anchor="t" lIns="0" rIns="0" tIns="0" bIns="0">
             <a:spAutoFit/>
           </a:bodyPr>
           <a:lstStyle/>
@@ -6229,23 +6435,11 @@
   <p:clrMapOvr>
     <a:masterClrMapping/>
   </p:clrMapOvr>
-  <mc:AlternateContent xmlns:mc="http://schemas.openxmlformats.org/markup-compatibility/2006">
-    <mc:Choice xmlns:p14="http://schemas.microsoft.com/office/powerpoint/2010/main" Requires="p14">
-      <p:transition spd="med" p14:dur="700">
-        <p:fade thruBlk="1"/>
-      </p:transition>
-    </mc:Choice>
-    <mc:Fallback>
-      <p:transition spd="med">
-        <p:fade thruBlk="1"/>
-      </p:transition>
-    </mc:Fallback>
-  </mc:AlternateContent>
 </p:sld>
 </file>
 
 <file path=ppt/slides/slide11.xml><?xml version="1.0" encoding="utf-8"?>
-<p:sld xmlns:a="http://schemas.openxmlformats.org/drawingml/2006/main" xmlns:r="http://schemas.openxmlformats.org/officeDocument/2006/relationships" xmlns:p="http://schemas.openxmlformats.org/presentationml/2006/main">
+<p:sld xmlns:a="http://schemas.openxmlformats.org/drawingml/2006/main" xmlns:p="http://schemas.openxmlformats.org/presentationml/2006/main" xmlns:r="http://schemas.openxmlformats.org/officeDocument/2006/relationships">
   <p:cSld>
     <p:spTree>
       <p:nvGrpSpPr>
@@ -6253,14 +6447,7 @@
         <p:cNvGrpSpPr/>
         <p:nvPr/>
       </p:nvGrpSpPr>
-      <p:grpSpPr>
-        <a:xfrm>
-          <a:off x="0" y="0"/>
-          <a:ext cx="0" cy="0"/>
-          <a:chOff x="0" y="0"/>
-          <a:chExt cx="0" cy="0"/>
-        </a:xfrm>
-      </p:grpSpPr>
+      <p:grpSpPr/>
       <p:pic>
         <p:nvPicPr>
           <p:cNvPr id="2" name="Picture 1" descr="bg_deep.png"/>
@@ -6302,7 +6489,7 @@
           <a:noFill/>
         </p:spPr>
         <p:txBody>
-          <a:bodyPr wrap="square" lIns="0" tIns="0" rIns="0" bIns="0" anchor="t">
+          <a:bodyPr wrap="square" anchor="t" lIns="0" rIns="0" tIns="0" bIns="0">
             <a:spAutoFit/>
           </a:bodyPr>
           <a:lstStyle/>
@@ -6341,7 +6528,7 @@
           <a:noFill/>
         </p:spPr>
         <p:txBody>
-          <a:bodyPr wrap="square" lIns="0" tIns="0" rIns="0" bIns="0" anchor="t">
+          <a:bodyPr wrap="square" anchor="t" lIns="0" rIns="0" tIns="0" bIns="0">
             <a:spAutoFit/>
           </a:bodyPr>
           <a:lstStyle/>
@@ -6380,7 +6567,7 @@
           <a:noFill/>
         </p:spPr>
         <p:txBody>
-          <a:bodyPr wrap="square" lIns="0" tIns="0" rIns="0" bIns="0" anchor="t">
+          <a:bodyPr wrap="square" anchor="t" lIns="0" rIns="0" tIns="0" bIns="0">
             <a:spAutoFit/>
           </a:bodyPr>
           <a:lstStyle/>
@@ -6419,7 +6606,7 @@
           <a:noFill/>
         </p:spPr>
         <p:txBody>
-          <a:bodyPr wrap="square" lIns="0" tIns="0" rIns="0" bIns="0" anchor="t">
+          <a:bodyPr wrap="square" anchor="t" lIns="0" rIns="0" tIns="0" bIns="0">
             <a:spAutoFit/>
           </a:bodyPr>
           <a:lstStyle/>
@@ -6482,7 +6669,7 @@
           </a:fontRef>
         </p:style>
         <p:txBody>
-          <a:bodyPr wrap="square" lIns="73152" tIns="36576" rIns="73152" bIns="36576" rtlCol="0" anchor="ctr"/>
+          <a:bodyPr rtlCol="0" anchor="ctr" wrap="square" lIns="73152" rIns="73152" tIns="36576" bIns="36576"/>
           <a:lstStyle/>
           <a:p>
             <a:pPr algn="ctr"/>
@@ -6575,7 +6762,7 @@
           </a:fontRef>
         </p:style>
         <p:txBody>
-          <a:bodyPr wrap="square" lIns="73152" tIns="36576" rIns="73152" bIns="36576" rtlCol="0" anchor="ctr"/>
+          <a:bodyPr rtlCol="0" anchor="ctr" wrap="square" lIns="73152" rIns="73152" tIns="36576" bIns="36576"/>
           <a:lstStyle/>
           <a:p>
             <a:pPr algn="ctr"/>
@@ -6668,7 +6855,7 @@
           </a:fontRef>
         </p:style>
         <p:txBody>
-          <a:bodyPr wrap="square" lIns="73152" tIns="36576" rIns="73152" bIns="36576" rtlCol="0" anchor="ctr"/>
+          <a:bodyPr rtlCol="0" anchor="ctr" wrap="square" lIns="73152" rIns="73152" tIns="36576" bIns="36576"/>
           <a:lstStyle/>
           <a:p>
             <a:pPr algn="ctr"/>
@@ -6761,7 +6948,7 @@
           </a:fontRef>
         </p:style>
         <p:txBody>
-          <a:bodyPr wrap="square" lIns="73152" tIns="36576" rIns="73152" bIns="36576" rtlCol="0" anchor="ctr"/>
+          <a:bodyPr rtlCol="0" anchor="ctr" wrap="square" lIns="73152" rIns="73152" tIns="36576" bIns="36576"/>
           <a:lstStyle/>
           <a:p>
             <a:pPr algn="ctr"/>
@@ -6854,7 +7041,7 @@
           </a:fontRef>
         </p:style>
         <p:txBody>
-          <a:bodyPr wrap="square" lIns="73152" tIns="36576" rIns="73152" bIns="36576" rtlCol="0" anchor="ctr"/>
+          <a:bodyPr rtlCol="0" anchor="ctr" wrap="square" lIns="73152" rIns="73152" tIns="36576" bIns="36576"/>
           <a:lstStyle/>
           <a:p>
             <a:pPr algn="ctr"/>
@@ -6947,7 +7134,7 @@
           </a:fontRef>
         </p:style>
         <p:txBody>
-          <a:bodyPr wrap="square" lIns="73152" tIns="36576" rIns="73152" bIns="36576" rtlCol="0" anchor="ctr"/>
+          <a:bodyPr rtlCol="0" anchor="ctr" wrap="square" lIns="73152" rIns="73152" tIns="36576" bIns="36576"/>
           <a:lstStyle/>
           <a:p>
             <a:pPr algn="ctr"/>
@@ -7040,7 +7227,7 @@
           </a:fontRef>
         </p:style>
         <p:txBody>
-          <a:bodyPr wrap="square" lIns="73152" tIns="36576" rIns="73152" bIns="36576" rtlCol="0" anchor="ctr"/>
+          <a:bodyPr rtlCol="0" anchor="ctr" wrap="square" lIns="73152" rIns="73152" tIns="36576" bIns="36576"/>
           <a:lstStyle/>
           <a:p>
             <a:pPr algn="ctr"/>
@@ -7133,7 +7320,7 @@
           </a:fontRef>
         </p:style>
         <p:txBody>
-          <a:bodyPr wrap="square" lIns="73152" tIns="36576" rIns="73152" bIns="36576" rtlCol="0" anchor="ctr"/>
+          <a:bodyPr rtlCol="0" anchor="ctr" wrap="square" lIns="73152" rIns="73152" tIns="36576" bIns="36576"/>
           <a:lstStyle/>
           <a:p>
             <a:pPr algn="ctr"/>
@@ -7166,7 +7353,7 @@
           <a:noFill/>
         </p:spPr>
         <p:txBody>
-          <a:bodyPr wrap="square" lIns="0" tIns="0" rIns="0" bIns="0" anchor="t">
+          <a:bodyPr wrap="square" anchor="t" lIns="0" rIns="0" tIns="0" bIns="0">
             <a:spAutoFit/>
           </a:bodyPr>
           <a:lstStyle/>
@@ -7229,7 +7416,7 @@
           </a:fontRef>
         </p:style>
         <p:txBody>
-          <a:bodyPr wrap="square" lIns="73152" tIns="36576" rIns="73152" bIns="36576" rtlCol="0" anchor="ctr"/>
+          <a:bodyPr rtlCol="0" anchor="ctr" wrap="square" lIns="73152" rIns="73152" tIns="36576" bIns="36576"/>
           <a:lstStyle/>
           <a:p>
             <a:pPr algn="ctr"/>
@@ -7338,7 +7525,7 @@
           </a:fontRef>
         </p:style>
         <p:txBody>
-          <a:bodyPr wrap="square" lIns="73152" tIns="36576" rIns="73152" bIns="36576" rtlCol="0" anchor="ctr"/>
+          <a:bodyPr rtlCol="0" anchor="ctr" wrap="square" lIns="73152" rIns="73152" tIns="36576" bIns="36576"/>
           <a:lstStyle/>
           <a:p>
             <a:pPr algn="ctr"/>
@@ -7447,7 +7634,7 @@
           </a:fontRef>
         </p:style>
         <p:txBody>
-          <a:bodyPr wrap="square" lIns="73152" tIns="36576" rIns="73152" bIns="36576" rtlCol="0" anchor="ctr"/>
+          <a:bodyPr rtlCol="0" anchor="ctr" wrap="square" lIns="73152" rIns="73152" tIns="36576" bIns="36576"/>
           <a:lstStyle/>
           <a:p>
             <a:pPr algn="ctr"/>
@@ -7556,7 +7743,7 @@
           </a:fontRef>
         </p:style>
         <p:txBody>
-          <a:bodyPr wrap="square" lIns="73152" tIns="36576" rIns="73152" bIns="36576" rtlCol="0" anchor="ctr"/>
+          <a:bodyPr rtlCol="0" anchor="ctr" wrap="square" lIns="73152" rIns="73152" tIns="36576" bIns="36576"/>
           <a:lstStyle/>
           <a:p>
             <a:pPr algn="ctr"/>
@@ -7633,7 +7820,6 @@
           <a:lstStyle/>
           <a:p>
             <a:pPr algn="ctr"/>
-            <a:endParaRPr/>
           </a:p>
         </p:txBody>
       </p:sp>
@@ -7654,7 +7840,7 @@
           <a:noFill/>
         </p:spPr>
         <p:txBody>
-          <a:bodyPr wrap="square" lIns="0" tIns="0" rIns="0" bIns="0" anchor="t">
+          <a:bodyPr wrap="square" anchor="t" lIns="0" rIns="0" tIns="0" bIns="0">
             <a:spAutoFit/>
           </a:bodyPr>
           <a:lstStyle/>
@@ -7693,7 +7879,7 @@
           <a:noFill/>
         </p:spPr>
         <p:txBody>
-          <a:bodyPr wrap="square" lIns="0" tIns="0" rIns="0" bIns="0" anchor="t">
+          <a:bodyPr wrap="square" anchor="t" lIns="0" rIns="0" tIns="0" bIns="0">
             <a:spAutoFit/>
           </a:bodyPr>
           <a:lstStyle/>
@@ -7719,12 +7905,15 @@
                 <a:spcPct val="140000"/>
               </a:lnSpc>
             </a:pPr>
-            <a:endParaRPr sz="1050" b="0" i="0">
-              <a:solidFill>
-                <a:srgbClr val="F4F7FB"/>
-              </a:solidFill>
-              <a:latin typeface="Segoe UI"/>
-            </a:endParaRPr>
+            <a:r>
+              <a:rPr sz="1050" b="0" i="0">
+                <a:solidFill>
+                  <a:srgbClr val="F4F7FB"/>
+                </a:solidFill>
+                <a:latin typeface="Segoe UI"/>
+              </a:rPr>
+              <a:t/>
+            </a:r>
           </a:p>
           <a:p>
             <a:pPr algn="l">
@@ -7748,12 +7937,15 @@
                 <a:spcPct val="140000"/>
               </a:lnSpc>
             </a:pPr>
-            <a:endParaRPr sz="1050" b="0" i="0">
-              <a:solidFill>
-                <a:srgbClr val="F4F7FB"/>
-              </a:solidFill>
-              <a:latin typeface="Segoe UI"/>
-            </a:endParaRPr>
+            <a:r>
+              <a:rPr sz="1050" b="0" i="0">
+                <a:solidFill>
+                  <a:srgbClr val="F4F7FB"/>
+                </a:solidFill>
+                <a:latin typeface="Segoe UI"/>
+              </a:rPr>
+              <a:t/>
+            </a:r>
           </a:p>
           <a:p>
             <a:pPr algn="l">
@@ -7790,7 +7982,7 @@
           <a:noFill/>
         </p:spPr>
         <p:txBody>
-          <a:bodyPr wrap="square" lIns="0" tIns="0" rIns="0" bIns="0" anchor="t">
+          <a:bodyPr wrap="square" anchor="t" lIns="0" rIns="0" tIns="0" bIns="0">
             <a:spAutoFit/>
           </a:bodyPr>
           <a:lstStyle/>
@@ -7829,7 +8021,7 @@
           <a:noFill/>
         </p:spPr>
         <p:txBody>
-          <a:bodyPr wrap="square" lIns="0" tIns="0" rIns="0" bIns="0" anchor="t">
+          <a:bodyPr wrap="square" anchor="t" lIns="0" rIns="0" tIns="0" bIns="0">
             <a:spAutoFit/>
           </a:bodyPr>
           <a:lstStyle/>
@@ -7856,23 +8048,11 @@
   <p:clrMapOvr>
     <a:masterClrMapping/>
   </p:clrMapOvr>
-  <mc:AlternateContent xmlns:mc="http://schemas.openxmlformats.org/markup-compatibility/2006">
-    <mc:Choice xmlns:p14="http://schemas.microsoft.com/office/powerpoint/2010/main" Requires="p14">
-      <p:transition spd="med" p14:dur="700">
-        <p:fade thruBlk="1"/>
-      </p:transition>
-    </mc:Choice>
-    <mc:Fallback>
-      <p:transition spd="med">
-        <p:fade thruBlk="1"/>
-      </p:transition>
-    </mc:Fallback>
-  </mc:AlternateContent>
 </p:sld>
 </file>
 
 <file path=ppt/slides/slide12.xml><?xml version="1.0" encoding="utf-8"?>
-<p:sld xmlns:a="http://schemas.openxmlformats.org/drawingml/2006/main" xmlns:r="http://schemas.openxmlformats.org/officeDocument/2006/relationships" xmlns:p="http://schemas.openxmlformats.org/presentationml/2006/main">
+<p:sld xmlns:a="http://schemas.openxmlformats.org/drawingml/2006/main" xmlns:p="http://schemas.openxmlformats.org/presentationml/2006/main" xmlns:r="http://schemas.openxmlformats.org/officeDocument/2006/relationships">
   <p:cSld>
     <p:spTree>
       <p:nvGrpSpPr>
@@ -7880,14 +8060,7 @@
         <p:cNvGrpSpPr/>
         <p:nvPr/>
       </p:nvGrpSpPr>
-      <p:grpSpPr>
-        <a:xfrm>
-          <a:off x="0" y="0"/>
-          <a:ext cx="0" cy="0"/>
-          <a:chOff x="0" y="0"/>
-          <a:chExt cx="0" cy="0"/>
-        </a:xfrm>
-      </p:grpSpPr>
+      <p:grpSpPr/>
       <p:pic>
         <p:nvPicPr>
           <p:cNvPr id="2" name="Picture 1" descr="bg_deep.png"/>
@@ -7929,7 +8102,7 @@
           <a:noFill/>
         </p:spPr>
         <p:txBody>
-          <a:bodyPr wrap="square" lIns="0" tIns="0" rIns="0" bIns="0" anchor="t">
+          <a:bodyPr wrap="square" anchor="t" lIns="0" rIns="0" tIns="0" bIns="0">
             <a:spAutoFit/>
           </a:bodyPr>
           <a:lstStyle/>
@@ -7968,7 +8141,7 @@
           <a:noFill/>
         </p:spPr>
         <p:txBody>
-          <a:bodyPr wrap="square" lIns="0" tIns="0" rIns="0" bIns="0" anchor="t">
+          <a:bodyPr wrap="square" anchor="t" lIns="0" rIns="0" tIns="0" bIns="0">
             <a:spAutoFit/>
           </a:bodyPr>
           <a:lstStyle/>
@@ -8007,7 +8180,7 @@
           <a:noFill/>
         </p:spPr>
         <p:txBody>
-          <a:bodyPr wrap="square" lIns="0" tIns="0" rIns="0" bIns="0" anchor="t">
+          <a:bodyPr wrap="square" anchor="t" lIns="0" rIns="0" tIns="0" bIns="0">
             <a:spAutoFit/>
           </a:bodyPr>
           <a:lstStyle/>
@@ -8070,7 +8243,7 @@
           </a:fontRef>
         </p:style>
         <p:txBody>
-          <a:bodyPr wrap="square" lIns="73152" tIns="36576" rIns="73152" bIns="36576" rtlCol="0" anchor="ctr"/>
+          <a:bodyPr rtlCol="0" anchor="ctr" wrap="square" lIns="73152" rIns="73152" tIns="36576" bIns="36576"/>
           <a:lstStyle/>
           <a:p>
             <a:pPr algn="ctr"/>
@@ -8179,7 +8352,7 @@
           </a:fontRef>
         </p:style>
         <p:txBody>
-          <a:bodyPr wrap="square" lIns="73152" tIns="36576" rIns="73152" bIns="36576" rtlCol="0" anchor="ctr"/>
+          <a:bodyPr rtlCol="0" anchor="ctr" wrap="square" lIns="73152" rIns="73152" tIns="36576" bIns="36576"/>
           <a:lstStyle/>
           <a:p>
             <a:pPr algn="ctr"/>
@@ -8289,7 +8462,7 @@
           </a:fontRef>
         </p:style>
         <p:txBody>
-          <a:bodyPr wrap="square" lIns="73152" tIns="36576" rIns="73152" bIns="36576" rtlCol="0" anchor="ctr"/>
+          <a:bodyPr rtlCol="0" anchor="ctr" wrap="square" lIns="73152" rIns="73152" tIns="36576" bIns="36576"/>
           <a:lstStyle/>
           <a:p>
             <a:pPr algn="ctr"/>
@@ -8399,7 +8572,7 @@
           </a:fontRef>
         </p:style>
         <p:txBody>
-          <a:bodyPr wrap="square" lIns="73152" tIns="36576" rIns="73152" bIns="36576" rtlCol="0" anchor="ctr"/>
+          <a:bodyPr rtlCol="0" anchor="ctr" wrap="square" lIns="73152" rIns="73152" tIns="36576" bIns="36576"/>
           <a:lstStyle/>
           <a:p>
             <a:pPr algn="ctr"/>
@@ -8477,7 +8650,6 @@
           <a:lstStyle/>
           <a:p>
             <a:pPr algn="ctr"/>
-            <a:endParaRPr/>
           </a:p>
         </p:txBody>
       </p:sp>
@@ -8498,7 +8670,7 @@
           <a:noFill/>
         </p:spPr>
         <p:txBody>
-          <a:bodyPr wrap="square" lIns="0" tIns="0" rIns="0" bIns="0" anchor="t">
+          <a:bodyPr wrap="square" anchor="t" lIns="0" rIns="0" tIns="0" bIns="0">
             <a:spAutoFit/>
           </a:bodyPr>
           <a:lstStyle/>
@@ -8537,7 +8709,7 @@
           <a:noFill/>
         </p:spPr>
         <p:txBody>
-          <a:bodyPr wrap="square" lIns="0" tIns="0" rIns="0" bIns="0" anchor="t">
+          <a:bodyPr wrap="square" anchor="t" lIns="0" rIns="0" tIns="0" bIns="0">
             <a:spAutoFit/>
           </a:bodyPr>
           <a:lstStyle/>
@@ -8576,7 +8748,7 @@
           <a:noFill/>
         </p:spPr>
         <p:txBody>
-          <a:bodyPr wrap="square" lIns="0" tIns="0" rIns="0" bIns="0" anchor="t">
+          <a:bodyPr wrap="square" anchor="t" lIns="0" rIns="0" tIns="0" bIns="0">
             <a:spAutoFit/>
           </a:bodyPr>
           <a:lstStyle/>
@@ -8615,7 +8787,7 @@
           <a:noFill/>
         </p:spPr>
         <p:txBody>
-          <a:bodyPr wrap="square" lIns="0" tIns="0" rIns="0" bIns="0" anchor="t">
+          <a:bodyPr wrap="square" anchor="t" lIns="0" rIns="0" tIns="0" bIns="0">
             <a:spAutoFit/>
           </a:bodyPr>
           <a:lstStyle/>
@@ -8654,7 +8826,7 @@
           <a:noFill/>
         </p:spPr>
         <p:txBody>
-          <a:bodyPr wrap="square" lIns="0" tIns="0" rIns="0" bIns="0" anchor="t">
+          <a:bodyPr wrap="square" anchor="t" lIns="0" rIns="0" tIns="0" bIns="0">
             <a:spAutoFit/>
           </a:bodyPr>
           <a:lstStyle/>
@@ -8693,7 +8865,7 @@
           <a:noFill/>
         </p:spPr>
         <p:txBody>
-          <a:bodyPr wrap="square" lIns="0" tIns="0" rIns="0" bIns="0" anchor="t">
+          <a:bodyPr wrap="square" anchor="t" lIns="0" rIns="0" tIns="0" bIns="0">
             <a:spAutoFit/>
           </a:bodyPr>
           <a:lstStyle/>
@@ -8732,7 +8904,7 @@
           <a:noFill/>
         </p:spPr>
         <p:txBody>
-          <a:bodyPr wrap="square" lIns="0" tIns="0" rIns="0" bIns="0" anchor="t">
+          <a:bodyPr wrap="square" anchor="t" lIns="0" rIns="0" tIns="0" bIns="0">
             <a:spAutoFit/>
           </a:bodyPr>
           <a:lstStyle/>
@@ -8799,7 +8971,6 @@
           <a:lstStyle/>
           <a:p>
             <a:pPr algn="ctr"/>
-            <a:endParaRPr/>
           </a:p>
         </p:txBody>
       </p:sp>
@@ -8820,7 +8991,7 @@
           <a:noFill/>
         </p:spPr>
         <p:txBody>
-          <a:bodyPr wrap="square" lIns="0" tIns="0" rIns="0" bIns="0" anchor="t">
+          <a:bodyPr wrap="square" anchor="t" lIns="0" rIns="0" tIns="0" bIns="0">
             <a:spAutoFit/>
           </a:bodyPr>
           <a:lstStyle/>
@@ -8859,7 +9030,7 @@
           <a:noFill/>
         </p:spPr>
         <p:txBody>
-          <a:bodyPr wrap="square" lIns="0" tIns="0" rIns="0" bIns="0" anchor="t">
+          <a:bodyPr wrap="square" anchor="t" lIns="0" rIns="0" tIns="0" bIns="0">
             <a:spAutoFit/>
           </a:bodyPr>
           <a:lstStyle/>
@@ -8885,12 +9056,15 @@
                 <a:spcPct val="135000"/>
               </a:lnSpc>
             </a:pPr>
-            <a:endParaRPr sz="1050" b="0" i="0">
-              <a:solidFill>
-                <a:srgbClr val="F4F7FB"/>
-              </a:solidFill>
-              <a:latin typeface="Segoe UI"/>
-            </a:endParaRPr>
+            <a:r>
+              <a:rPr sz="1050" b="0" i="0">
+                <a:solidFill>
+                  <a:srgbClr val="F4F7FB"/>
+                </a:solidFill>
+                <a:latin typeface="Segoe UI"/>
+              </a:rPr>
+              <a:t/>
+            </a:r>
           </a:p>
           <a:p>
             <a:pPr algn="l">
@@ -8927,7 +9101,7 @@
           <a:noFill/>
         </p:spPr>
         <p:txBody>
-          <a:bodyPr wrap="square" lIns="0" tIns="0" rIns="0" bIns="0" anchor="t">
+          <a:bodyPr wrap="square" anchor="t" lIns="0" rIns="0" tIns="0" bIns="0">
             <a:spAutoFit/>
           </a:bodyPr>
           <a:lstStyle/>
@@ -8966,7 +9140,7 @@
           <a:noFill/>
         </p:spPr>
         <p:txBody>
-          <a:bodyPr wrap="square" lIns="0" tIns="0" rIns="0" bIns="0" anchor="t">
+          <a:bodyPr wrap="square" anchor="t" lIns="0" rIns="0" tIns="0" bIns="0">
             <a:spAutoFit/>
           </a:bodyPr>
           <a:lstStyle/>
@@ -8993,23 +9167,11 @@
   <p:clrMapOvr>
     <a:masterClrMapping/>
   </p:clrMapOvr>
-  <mc:AlternateContent xmlns:mc="http://schemas.openxmlformats.org/markup-compatibility/2006">
-    <mc:Choice xmlns:p14="http://schemas.microsoft.com/office/powerpoint/2010/main" Requires="p14">
-      <p:transition spd="med" p14:dur="700">
-        <p:fade thruBlk="1"/>
-      </p:transition>
-    </mc:Choice>
-    <mc:Fallback>
-      <p:transition spd="med">
-        <p:fade thruBlk="1"/>
-      </p:transition>
-    </mc:Fallback>
-  </mc:AlternateContent>
 </p:sld>
 </file>
 
 <file path=ppt/slides/slide13.xml><?xml version="1.0" encoding="utf-8"?>
-<p:sld xmlns:a="http://schemas.openxmlformats.org/drawingml/2006/main" xmlns:r="http://schemas.openxmlformats.org/officeDocument/2006/relationships" xmlns:p="http://schemas.openxmlformats.org/presentationml/2006/main">
+<p:sld xmlns:a="http://schemas.openxmlformats.org/drawingml/2006/main" xmlns:p="http://schemas.openxmlformats.org/presentationml/2006/main" xmlns:r="http://schemas.openxmlformats.org/officeDocument/2006/relationships">
   <p:cSld>
     <p:spTree>
       <p:nvGrpSpPr>
@@ -9017,14 +9179,7 @@
         <p:cNvGrpSpPr/>
         <p:nvPr/>
       </p:nvGrpSpPr>
-      <p:grpSpPr>
-        <a:xfrm>
-          <a:off x="0" y="0"/>
-          <a:ext cx="0" cy="0"/>
-          <a:chOff x="0" y="0"/>
-          <a:chExt cx="0" cy="0"/>
-        </a:xfrm>
-      </p:grpSpPr>
+      <p:grpSpPr/>
       <p:pic>
         <p:nvPicPr>
           <p:cNvPr id="2" name="Picture 1" descr="bg_deep.png"/>
@@ -9066,7 +9221,7 @@
           <a:noFill/>
         </p:spPr>
         <p:txBody>
-          <a:bodyPr wrap="square" lIns="0" tIns="0" rIns="0" bIns="0" anchor="t">
+          <a:bodyPr wrap="square" anchor="t" lIns="0" rIns="0" tIns="0" bIns="0">
             <a:spAutoFit/>
           </a:bodyPr>
           <a:lstStyle/>
@@ -9105,7 +9260,7 @@
           <a:noFill/>
         </p:spPr>
         <p:txBody>
-          <a:bodyPr wrap="square" lIns="0" tIns="0" rIns="0" bIns="0" anchor="t">
+          <a:bodyPr wrap="square" anchor="t" lIns="0" rIns="0" tIns="0" bIns="0">
             <a:spAutoFit/>
           </a:bodyPr>
           <a:lstStyle/>
@@ -9194,7 +9349,6 @@
           <a:lstStyle/>
           <a:p>
             <a:pPr algn="ctr"/>
-            <a:endParaRPr/>
           </a:p>
         </p:txBody>
       </p:sp>
@@ -9215,7 +9369,7 @@
           <a:noFill/>
         </p:spPr>
         <p:txBody>
-          <a:bodyPr wrap="square" lIns="0" tIns="0" rIns="0" bIns="0" anchor="t">
+          <a:bodyPr wrap="square" anchor="t" lIns="0" rIns="0" tIns="0" bIns="0">
             <a:spAutoFit/>
           </a:bodyPr>
           <a:lstStyle/>
@@ -9304,7 +9458,6 @@
           <a:lstStyle/>
           <a:p>
             <a:pPr algn="ctr"/>
-            <a:endParaRPr/>
           </a:p>
         </p:txBody>
       </p:sp>
@@ -9325,7 +9478,7 @@
           <a:noFill/>
         </p:spPr>
         <p:txBody>
-          <a:bodyPr wrap="square" lIns="0" tIns="0" rIns="0" bIns="0" anchor="t">
+          <a:bodyPr wrap="square" anchor="t" lIns="0" rIns="0" tIns="0" bIns="0">
             <a:spAutoFit/>
           </a:bodyPr>
           <a:lstStyle/>
@@ -9414,7 +9567,6 @@
           <a:lstStyle/>
           <a:p>
             <a:pPr algn="ctr"/>
-            <a:endParaRPr/>
           </a:p>
         </p:txBody>
       </p:sp>
@@ -9435,7 +9587,7 @@
           <a:noFill/>
         </p:spPr>
         <p:txBody>
-          <a:bodyPr wrap="square" lIns="0" tIns="0" rIns="0" bIns="0" anchor="t">
+          <a:bodyPr wrap="square" anchor="t" lIns="0" rIns="0" tIns="0" bIns="0">
             <a:spAutoFit/>
           </a:bodyPr>
           <a:lstStyle/>
@@ -9524,7 +9676,6 @@
           <a:lstStyle/>
           <a:p>
             <a:pPr algn="ctr"/>
-            <a:endParaRPr/>
           </a:p>
         </p:txBody>
       </p:sp>
@@ -9545,7 +9696,7 @@
           <a:noFill/>
         </p:spPr>
         <p:txBody>
-          <a:bodyPr wrap="square" lIns="0" tIns="0" rIns="0" bIns="0" anchor="t">
+          <a:bodyPr wrap="square" anchor="t" lIns="0" rIns="0" tIns="0" bIns="0">
             <a:spAutoFit/>
           </a:bodyPr>
           <a:lstStyle/>
@@ -9634,7 +9785,6 @@
           <a:lstStyle/>
           <a:p>
             <a:pPr algn="ctr"/>
-            <a:endParaRPr/>
           </a:p>
         </p:txBody>
       </p:sp>
@@ -9655,7 +9805,7 @@
           <a:noFill/>
         </p:spPr>
         <p:txBody>
-          <a:bodyPr wrap="square" lIns="0" tIns="0" rIns="0" bIns="0" anchor="t">
+          <a:bodyPr wrap="square" anchor="t" lIns="0" rIns="0" tIns="0" bIns="0">
             <a:spAutoFit/>
           </a:bodyPr>
           <a:lstStyle/>
@@ -9694,7 +9844,7 @@
           <a:noFill/>
         </p:spPr>
         <p:txBody>
-          <a:bodyPr wrap="square" lIns="0" tIns="0" rIns="0" bIns="0" anchor="t">
+          <a:bodyPr wrap="square" anchor="t" lIns="0" rIns="0" tIns="0" bIns="0">
             <a:spAutoFit/>
           </a:bodyPr>
           <a:lstStyle/>
@@ -9733,7 +9883,7 @@
           <a:noFill/>
         </p:spPr>
         <p:txBody>
-          <a:bodyPr wrap="square" lIns="0" tIns="0" rIns="0" bIns="0" anchor="t">
+          <a:bodyPr wrap="square" anchor="t" lIns="0" rIns="0" tIns="0" bIns="0">
             <a:spAutoFit/>
           </a:bodyPr>
           <a:lstStyle/>
@@ -9772,7 +9922,7 @@
           <a:noFill/>
         </p:spPr>
         <p:txBody>
-          <a:bodyPr wrap="square" lIns="0" tIns="0" rIns="0" bIns="0" anchor="t">
+          <a:bodyPr wrap="square" anchor="t" lIns="0" rIns="0" tIns="0" bIns="0">
             <a:spAutoFit/>
           </a:bodyPr>
           <a:lstStyle/>
@@ -9799,23 +9949,11 @@
   <p:clrMapOvr>
     <a:masterClrMapping/>
   </p:clrMapOvr>
-  <mc:AlternateContent xmlns:mc="http://schemas.openxmlformats.org/markup-compatibility/2006">
-    <mc:Choice xmlns:p14="http://schemas.microsoft.com/office/powerpoint/2010/main" Requires="p14">
-      <p:transition spd="med" p14:dur="700">
-        <p:fade thruBlk="1"/>
-      </p:transition>
-    </mc:Choice>
-    <mc:Fallback>
-      <p:transition spd="med">
-        <p:fade thruBlk="1"/>
-      </p:transition>
-    </mc:Fallback>
-  </mc:AlternateContent>
 </p:sld>
 </file>
 
 <file path=ppt/slides/slide14.xml><?xml version="1.0" encoding="utf-8"?>
-<p:sld xmlns:a="http://schemas.openxmlformats.org/drawingml/2006/main" xmlns:r="http://schemas.openxmlformats.org/officeDocument/2006/relationships" xmlns:p="http://schemas.openxmlformats.org/presentationml/2006/main">
+<p:sld xmlns:a="http://schemas.openxmlformats.org/drawingml/2006/main" xmlns:p="http://schemas.openxmlformats.org/presentationml/2006/main" xmlns:r="http://schemas.openxmlformats.org/officeDocument/2006/relationships">
   <p:cSld>
     <p:spTree>
       <p:nvGrpSpPr>
@@ -9823,14 +9961,7 @@
         <p:cNvGrpSpPr/>
         <p:nvPr/>
       </p:nvGrpSpPr>
-      <p:grpSpPr>
-        <a:xfrm>
-          <a:off x="0" y="0"/>
-          <a:ext cx="0" cy="0"/>
-          <a:chOff x="0" y="0"/>
-          <a:chExt cx="0" cy="0"/>
-        </a:xfrm>
-      </p:grpSpPr>
+      <p:grpSpPr/>
       <p:pic>
         <p:nvPicPr>
           <p:cNvPr id="2" name="Picture 1" descr="bg_deep.png"/>
@@ -9872,7 +10003,7 @@
           <a:noFill/>
         </p:spPr>
         <p:txBody>
-          <a:bodyPr wrap="square" lIns="0" tIns="0" rIns="0" bIns="0" anchor="t">
+          <a:bodyPr wrap="square" anchor="t" lIns="0" rIns="0" tIns="0" bIns="0">
             <a:spAutoFit/>
           </a:bodyPr>
           <a:lstStyle/>
@@ -9911,7 +10042,7 @@
           <a:noFill/>
         </p:spPr>
         <p:txBody>
-          <a:bodyPr wrap="square" lIns="0" tIns="0" rIns="0" bIns="0" anchor="t">
+          <a:bodyPr wrap="square" anchor="t" lIns="0" rIns="0" tIns="0" bIns="0">
             <a:spAutoFit/>
           </a:bodyPr>
           <a:lstStyle/>
@@ -10000,7 +10131,6 @@
           <a:lstStyle/>
           <a:p>
             <a:pPr algn="ctr"/>
-            <a:endParaRPr/>
           </a:p>
         </p:txBody>
       </p:sp>
@@ -10021,7 +10151,7 @@
           <a:noFill/>
         </p:spPr>
         <p:txBody>
-          <a:bodyPr wrap="square" lIns="0" tIns="0" rIns="0" bIns="0" anchor="t">
+          <a:bodyPr wrap="square" anchor="t" lIns="0" rIns="0" tIns="0" bIns="0">
             <a:spAutoFit/>
           </a:bodyPr>
           <a:lstStyle/>
@@ -10110,7 +10240,6 @@
           <a:lstStyle/>
           <a:p>
             <a:pPr algn="ctr"/>
-            <a:endParaRPr/>
           </a:p>
         </p:txBody>
       </p:sp>
@@ -10131,7 +10260,7 @@
           <a:noFill/>
         </p:spPr>
         <p:txBody>
-          <a:bodyPr wrap="square" lIns="0" tIns="0" rIns="0" bIns="0" anchor="t">
+          <a:bodyPr wrap="square" anchor="t" lIns="0" rIns="0" tIns="0" bIns="0">
             <a:spAutoFit/>
           </a:bodyPr>
           <a:lstStyle/>
@@ -10170,7 +10299,7 @@
           <a:noFill/>
         </p:spPr>
         <p:txBody>
-          <a:bodyPr wrap="square" lIns="0" tIns="0" rIns="0" bIns="0" anchor="t">
+          <a:bodyPr wrap="square" anchor="t" lIns="0" rIns="0" tIns="0" bIns="0">
             <a:spAutoFit/>
           </a:bodyPr>
           <a:lstStyle/>
@@ -10209,7 +10338,7 @@
           <a:noFill/>
         </p:spPr>
         <p:txBody>
-          <a:bodyPr wrap="square" lIns="0" tIns="0" rIns="0" bIns="0" anchor="t">
+          <a:bodyPr wrap="square" anchor="t" lIns="0" rIns="0" tIns="0" bIns="0">
             <a:spAutoFit/>
           </a:bodyPr>
           <a:lstStyle/>
@@ -10248,7 +10377,7 @@
           <a:noFill/>
         </p:spPr>
         <p:txBody>
-          <a:bodyPr wrap="square" lIns="0" tIns="0" rIns="0" bIns="0" anchor="t">
+          <a:bodyPr wrap="square" anchor="t" lIns="0" rIns="0" tIns="0" bIns="0">
             <a:spAutoFit/>
           </a:bodyPr>
           <a:lstStyle/>
@@ -10275,23 +10404,11 @@
   <p:clrMapOvr>
     <a:masterClrMapping/>
   </p:clrMapOvr>
-  <mc:AlternateContent xmlns:mc="http://schemas.openxmlformats.org/markup-compatibility/2006">
-    <mc:Choice xmlns:p14="http://schemas.microsoft.com/office/powerpoint/2010/main" Requires="p14">
-      <p:transition spd="med" p14:dur="700">
-        <p:fade thruBlk="1"/>
-      </p:transition>
-    </mc:Choice>
-    <mc:Fallback>
-      <p:transition spd="med">
-        <p:fade thruBlk="1"/>
-      </p:transition>
-    </mc:Fallback>
-  </mc:AlternateContent>
 </p:sld>
 </file>
 
 <file path=ppt/slides/slide15.xml><?xml version="1.0" encoding="utf-8"?>
-<p:sld xmlns:a="http://schemas.openxmlformats.org/drawingml/2006/main" xmlns:r="http://schemas.openxmlformats.org/officeDocument/2006/relationships" xmlns:p="http://schemas.openxmlformats.org/presentationml/2006/main">
+<p:sld xmlns:a="http://schemas.openxmlformats.org/drawingml/2006/main" xmlns:p="http://schemas.openxmlformats.org/presentationml/2006/main" xmlns:r="http://schemas.openxmlformats.org/officeDocument/2006/relationships">
   <p:cSld>
     <p:spTree>
       <p:nvGrpSpPr>
@@ -10299,14 +10416,7 @@
         <p:cNvGrpSpPr/>
         <p:nvPr/>
       </p:nvGrpSpPr>
-      <p:grpSpPr>
-        <a:xfrm>
-          <a:off x="0" y="0"/>
-          <a:ext cx="0" cy="0"/>
-          <a:chOff x="0" y="0"/>
-          <a:chExt cx="0" cy="0"/>
-        </a:xfrm>
-      </p:grpSpPr>
+      <p:grpSpPr/>
       <p:pic>
         <p:nvPicPr>
           <p:cNvPr id="2" name="Picture 1" descr="bg_red.png"/>
@@ -10348,7 +10458,7 @@
           <a:noFill/>
         </p:spPr>
         <p:txBody>
-          <a:bodyPr wrap="square" lIns="0" tIns="0" rIns="0" bIns="0" anchor="t">
+          <a:bodyPr wrap="square" anchor="t" lIns="0" rIns="0" tIns="0" bIns="0">
             <a:spAutoFit/>
           </a:bodyPr>
           <a:lstStyle/>
@@ -10387,7 +10497,7 @@
           <a:noFill/>
         </p:spPr>
         <p:txBody>
-          <a:bodyPr wrap="square" lIns="0" tIns="0" rIns="0" bIns="0" anchor="t">
+          <a:bodyPr wrap="square" anchor="t" lIns="0" rIns="0" tIns="0" bIns="0">
             <a:spAutoFit/>
           </a:bodyPr>
           <a:lstStyle/>
@@ -10454,7 +10564,6 @@
           <a:lstStyle/>
           <a:p>
             <a:pPr algn="ctr"/>
-            <a:endParaRPr/>
           </a:p>
         </p:txBody>
       </p:sp>
@@ -10475,7 +10584,7 @@
           <a:noFill/>
         </p:spPr>
         <p:txBody>
-          <a:bodyPr wrap="square" lIns="0" tIns="0" rIns="0" bIns="0" anchor="t">
+          <a:bodyPr wrap="square" anchor="t" lIns="0" rIns="0" tIns="0" bIns="0">
             <a:spAutoFit/>
           </a:bodyPr>
           <a:lstStyle/>
@@ -10514,7 +10623,7 @@
           <a:noFill/>
         </p:spPr>
         <p:txBody>
-          <a:bodyPr wrap="square" lIns="0" tIns="0" rIns="0" bIns="0" anchor="t">
+          <a:bodyPr wrap="square" anchor="t" lIns="0" rIns="0" tIns="0" bIns="0">
             <a:spAutoFit/>
           </a:bodyPr>
           <a:lstStyle/>
@@ -10553,7 +10662,7 @@
           <a:noFill/>
         </p:spPr>
         <p:txBody>
-          <a:bodyPr wrap="square" lIns="0" tIns="0" rIns="0" bIns="0" anchor="t">
+          <a:bodyPr wrap="square" anchor="t" lIns="0" rIns="0" tIns="0" bIns="0">
             <a:spAutoFit/>
           </a:bodyPr>
           <a:lstStyle/>
@@ -10592,7 +10701,7 @@
           <a:noFill/>
         </p:spPr>
         <p:txBody>
-          <a:bodyPr wrap="square" lIns="0" tIns="0" rIns="0" bIns="0" anchor="t">
+          <a:bodyPr wrap="square" anchor="t" lIns="0" rIns="0" tIns="0" bIns="0">
             <a:spAutoFit/>
           </a:bodyPr>
           <a:lstStyle/>
@@ -10631,7 +10740,7 @@
           <a:noFill/>
         </p:spPr>
         <p:txBody>
-          <a:bodyPr wrap="square" lIns="0" tIns="0" rIns="0" bIns="0" anchor="t">
+          <a:bodyPr wrap="square" anchor="t" lIns="0" rIns="0" tIns="0" bIns="0">
             <a:spAutoFit/>
           </a:bodyPr>
           <a:lstStyle/>
@@ -10698,7 +10807,6 @@
           <a:lstStyle/>
           <a:p>
             <a:pPr algn="ctr"/>
-            <a:endParaRPr/>
           </a:p>
         </p:txBody>
       </p:sp>
@@ -10719,7 +10827,7 @@
           <a:noFill/>
         </p:spPr>
         <p:txBody>
-          <a:bodyPr wrap="square" lIns="0" tIns="0" rIns="0" bIns="0" anchor="t">
+          <a:bodyPr wrap="square" anchor="t" lIns="0" rIns="0" tIns="0" bIns="0">
             <a:spAutoFit/>
           </a:bodyPr>
           <a:lstStyle/>
@@ -10758,7 +10866,7 @@
           <a:noFill/>
         </p:spPr>
         <p:txBody>
-          <a:bodyPr wrap="square" lIns="0" tIns="0" rIns="0" bIns="0" anchor="t">
+          <a:bodyPr wrap="square" anchor="t" lIns="0" rIns="0" tIns="0" bIns="0">
             <a:spAutoFit/>
           </a:bodyPr>
           <a:lstStyle/>
@@ -10797,7 +10905,7 @@
           <a:noFill/>
         </p:spPr>
         <p:txBody>
-          <a:bodyPr wrap="square" lIns="0" tIns="0" rIns="0" bIns="0" anchor="t">
+          <a:bodyPr wrap="square" anchor="t" lIns="0" rIns="0" tIns="0" bIns="0">
             <a:spAutoFit/>
           </a:bodyPr>
           <a:lstStyle/>
@@ -10836,7 +10944,7 @@
           <a:noFill/>
         </p:spPr>
         <p:txBody>
-          <a:bodyPr wrap="square" lIns="0" tIns="0" rIns="0" bIns="0" anchor="t">
+          <a:bodyPr wrap="square" anchor="t" lIns="0" rIns="0" tIns="0" bIns="0">
             <a:spAutoFit/>
           </a:bodyPr>
           <a:lstStyle/>
@@ -10875,7 +10983,7 @@
           <a:noFill/>
         </p:spPr>
         <p:txBody>
-          <a:bodyPr wrap="square" lIns="0" tIns="0" rIns="0" bIns="0" anchor="t">
+          <a:bodyPr wrap="square" anchor="t" lIns="0" rIns="0" tIns="0" bIns="0">
             <a:spAutoFit/>
           </a:bodyPr>
           <a:lstStyle/>
@@ -10942,7 +11050,6 @@
           <a:lstStyle/>
           <a:p>
             <a:pPr algn="ctr"/>
-            <a:endParaRPr/>
           </a:p>
         </p:txBody>
       </p:sp>
@@ -10963,7 +11070,7 @@
           <a:noFill/>
         </p:spPr>
         <p:txBody>
-          <a:bodyPr wrap="square" lIns="0" tIns="0" rIns="0" bIns="0" anchor="t">
+          <a:bodyPr wrap="square" anchor="t" lIns="0" rIns="0" tIns="0" bIns="0">
             <a:spAutoFit/>
           </a:bodyPr>
           <a:lstStyle/>
@@ -11002,7 +11109,7 @@
           <a:noFill/>
         </p:spPr>
         <p:txBody>
-          <a:bodyPr wrap="square" lIns="0" tIns="0" rIns="0" bIns="0" anchor="t">
+          <a:bodyPr wrap="square" anchor="t" lIns="0" rIns="0" tIns="0" bIns="0">
             <a:spAutoFit/>
           </a:bodyPr>
           <a:lstStyle/>
@@ -11041,7 +11148,7 @@
           <a:noFill/>
         </p:spPr>
         <p:txBody>
-          <a:bodyPr wrap="square" lIns="0" tIns="0" rIns="0" bIns="0" anchor="t">
+          <a:bodyPr wrap="square" anchor="t" lIns="0" rIns="0" tIns="0" bIns="0">
             <a:spAutoFit/>
           </a:bodyPr>
           <a:lstStyle/>
@@ -11080,7 +11187,7 @@
           <a:noFill/>
         </p:spPr>
         <p:txBody>
-          <a:bodyPr wrap="square" lIns="0" tIns="0" rIns="0" bIns="0" anchor="t">
+          <a:bodyPr wrap="square" anchor="t" lIns="0" rIns="0" tIns="0" bIns="0">
             <a:spAutoFit/>
           </a:bodyPr>
           <a:lstStyle/>
@@ -11119,7 +11226,7 @@
           <a:noFill/>
         </p:spPr>
         <p:txBody>
-          <a:bodyPr wrap="square" lIns="0" tIns="0" rIns="0" bIns="0" anchor="t">
+          <a:bodyPr wrap="square" anchor="t" lIns="0" rIns="0" tIns="0" bIns="0">
             <a:spAutoFit/>
           </a:bodyPr>
           <a:lstStyle/>
@@ -11158,7 +11265,7 @@
           <a:noFill/>
         </p:spPr>
         <p:txBody>
-          <a:bodyPr wrap="square" lIns="0" tIns="0" rIns="0" bIns="0" anchor="t">
+          <a:bodyPr wrap="square" anchor="t" lIns="0" rIns="0" tIns="0" bIns="0">
             <a:spAutoFit/>
           </a:bodyPr>
           <a:lstStyle/>
@@ -11213,7 +11320,7 @@
           <a:noFill/>
         </p:spPr>
         <p:txBody>
-          <a:bodyPr wrap="square" lIns="0" tIns="0" rIns="0" bIns="0" anchor="t">
+          <a:bodyPr wrap="square" anchor="t" lIns="0" rIns="0" tIns="0" bIns="0">
             <a:spAutoFit/>
           </a:bodyPr>
           <a:lstStyle/>
@@ -11252,7 +11359,7 @@
           <a:noFill/>
         </p:spPr>
         <p:txBody>
-          <a:bodyPr wrap="square" lIns="0" tIns="0" rIns="0" bIns="0" anchor="t">
+          <a:bodyPr wrap="square" anchor="t" lIns="0" rIns="0" tIns="0" bIns="0">
             <a:spAutoFit/>
           </a:bodyPr>
           <a:lstStyle/>
@@ -11279,23 +11386,11 @@
   <p:clrMapOvr>
     <a:masterClrMapping/>
   </p:clrMapOvr>
-  <mc:AlternateContent xmlns:mc="http://schemas.openxmlformats.org/markup-compatibility/2006">
-    <mc:Choice xmlns:p14="http://schemas.microsoft.com/office/powerpoint/2010/main" Requires="p14">
-      <p:transition spd="med" p14:dur="700">
-        <p:fade thruBlk="1"/>
-      </p:transition>
-    </mc:Choice>
-    <mc:Fallback>
-      <p:transition spd="med">
-        <p:fade thruBlk="1"/>
-      </p:transition>
-    </mc:Fallback>
-  </mc:AlternateContent>
 </p:sld>
 </file>
 
 <file path=ppt/slides/slide16.xml><?xml version="1.0" encoding="utf-8"?>
-<p:sld xmlns:a="http://schemas.openxmlformats.org/drawingml/2006/main" xmlns:r="http://schemas.openxmlformats.org/officeDocument/2006/relationships" xmlns:p="http://schemas.openxmlformats.org/presentationml/2006/main">
+<p:sld xmlns:a="http://schemas.openxmlformats.org/drawingml/2006/main" xmlns:p="http://schemas.openxmlformats.org/presentationml/2006/main" xmlns:r="http://schemas.openxmlformats.org/officeDocument/2006/relationships">
   <p:cSld>
     <p:spTree>
       <p:nvGrpSpPr>
@@ -11303,14 +11398,7 @@
         <p:cNvGrpSpPr/>
         <p:nvPr/>
       </p:nvGrpSpPr>
-      <p:grpSpPr>
-        <a:xfrm>
-          <a:off x="0" y="0"/>
-          <a:ext cx="0" cy="0"/>
-          <a:chOff x="0" y="0"/>
-          <a:chExt cx="0" cy="0"/>
-        </a:xfrm>
-      </p:grpSpPr>
+      <p:grpSpPr/>
       <p:pic>
         <p:nvPicPr>
           <p:cNvPr id="2" name="Picture 1" descr="bg_deep.png"/>
@@ -11352,7 +11440,7 @@
           <a:noFill/>
         </p:spPr>
         <p:txBody>
-          <a:bodyPr wrap="square" lIns="0" tIns="0" rIns="0" bIns="0" anchor="t">
+          <a:bodyPr wrap="square" anchor="t" lIns="0" rIns="0" tIns="0" bIns="0">
             <a:spAutoFit/>
           </a:bodyPr>
           <a:lstStyle/>
@@ -11391,7 +11479,7 @@
           <a:noFill/>
         </p:spPr>
         <p:txBody>
-          <a:bodyPr wrap="square" lIns="0" tIns="0" rIns="0" bIns="0" anchor="t">
+          <a:bodyPr wrap="square" anchor="t" lIns="0" rIns="0" tIns="0" bIns="0">
             <a:spAutoFit/>
           </a:bodyPr>
           <a:lstStyle/>
@@ -11454,7 +11542,7 @@
           </a:fontRef>
         </p:style>
         <p:txBody>
-          <a:bodyPr wrap="square" lIns="73152" tIns="36576" rIns="73152" bIns="36576" rtlCol="0" anchor="ctr"/>
+          <a:bodyPr rtlCol="0" anchor="ctr" wrap="square" lIns="73152" rIns="73152" tIns="36576" bIns="36576"/>
           <a:lstStyle/>
           <a:p>
             <a:pPr algn="ctr"/>
@@ -11564,7 +11652,7 @@
           </a:fontRef>
         </p:style>
         <p:txBody>
-          <a:bodyPr wrap="square" lIns="73152" tIns="36576" rIns="73152" bIns="36576" rtlCol="0" anchor="ctr"/>
+          <a:bodyPr rtlCol="0" anchor="ctr" wrap="square" lIns="73152" rIns="73152" tIns="36576" bIns="36576"/>
           <a:lstStyle/>
           <a:p>
             <a:pPr algn="ctr"/>
@@ -11674,7 +11762,7 @@
           </a:fontRef>
         </p:style>
         <p:txBody>
-          <a:bodyPr wrap="square" lIns="73152" tIns="36576" rIns="73152" bIns="36576" rtlCol="0" anchor="ctr"/>
+          <a:bodyPr rtlCol="0" anchor="ctr" wrap="square" lIns="73152" rIns="73152" tIns="36576" bIns="36576"/>
           <a:lstStyle/>
           <a:p>
             <a:pPr algn="ctr"/>
@@ -11784,7 +11872,7 @@
           </a:fontRef>
         </p:style>
         <p:txBody>
-          <a:bodyPr wrap="square" lIns="73152" tIns="36576" rIns="73152" bIns="36576" rtlCol="0" anchor="ctr"/>
+          <a:bodyPr rtlCol="0" anchor="ctr" wrap="square" lIns="73152" rIns="73152" tIns="36576" bIns="36576"/>
           <a:lstStyle/>
           <a:p>
             <a:pPr algn="ctr"/>
@@ -11894,7 +11982,7 @@
           </a:fontRef>
         </p:style>
         <p:txBody>
-          <a:bodyPr wrap="square" lIns="73152" tIns="36576" rIns="73152" bIns="36576" rtlCol="0" anchor="ctr"/>
+          <a:bodyPr rtlCol="0" anchor="ctr" wrap="square" lIns="73152" rIns="73152" tIns="36576" bIns="36576"/>
           <a:lstStyle/>
           <a:p>
             <a:pPr algn="ctr"/>
@@ -12004,7 +12092,7 @@
           </a:fontRef>
         </p:style>
         <p:txBody>
-          <a:bodyPr wrap="square" lIns="73152" tIns="36576" rIns="73152" bIns="36576" rtlCol="0" anchor="ctr"/>
+          <a:bodyPr rtlCol="0" anchor="ctr" wrap="square" lIns="73152" rIns="73152" tIns="36576" bIns="36576"/>
           <a:lstStyle/>
           <a:p>
             <a:pPr algn="ctr"/>
@@ -12114,7 +12202,7 @@
           </a:fontRef>
         </p:style>
         <p:txBody>
-          <a:bodyPr wrap="square" lIns="73152" tIns="36576" rIns="73152" bIns="36576" rtlCol="0" anchor="ctr"/>
+          <a:bodyPr rtlCol="0" anchor="ctr" wrap="square" lIns="73152" rIns="73152" tIns="36576" bIns="36576"/>
           <a:lstStyle/>
           <a:p>
             <a:pPr algn="ctr"/>
@@ -12163,7 +12251,7 @@
           <a:noFill/>
         </p:spPr>
         <p:txBody>
-          <a:bodyPr wrap="square" lIns="0" tIns="0" rIns="0" bIns="0" anchor="t">
+          <a:bodyPr wrap="square" anchor="t" lIns="0" rIns="0" tIns="0" bIns="0">
             <a:spAutoFit/>
           </a:bodyPr>
           <a:lstStyle/>
@@ -12202,7 +12290,7 @@
           <a:noFill/>
         </p:spPr>
         <p:txBody>
-          <a:bodyPr wrap="square" lIns="0" tIns="0" rIns="0" bIns="0" anchor="t">
+          <a:bodyPr wrap="square" anchor="t" lIns="0" rIns="0" tIns="0" bIns="0">
             <a:spAutoFit/>
           </a:bodyPr>
           <a:lstStyle/>
@@ -12241,7 +12329,7 @@
           <a:noFill/>
         </p:spPr>
         <p:txBody>
-          <a:bodyPr wrap="square" lIns="0" tIns="0" rIns="0" bIns="0" anchor="t">
+          <a:bodyPr wrap="square" anchor="t" lIns="0" rIns="0" tIns="0" bIns="0">
             <a:spAutoFit/>
           </a:bodyPr>
           <a:lstStyle/>
@@ -12280,7 +12368,7 @@
           <a:noFill/>
         </p:spPr>
         <p:txBody>
-          <a:bodyPr wrap="square" lIns="0" tIns="0" rIns="0" bIns="0" anchor="t">
+          <a:bodyPr wrap="square" anchor="t" lIns="0" rIns="0" tIns="0" bIns="0">
             <a:spAutoFit/>
           </a:bodyPr>
           <a:lstStyle/>
@@ -12319,7 +12407,7 @@
           <a:noFill/>
         </p:spPr>
         <p:txBody>
-          <a:bodyPr wrap="square" lIns="0" tIns="0" rIns="0" bIns="0" anchor="t">
+          <a:bodyPr wrap="square" anchor="t" lIns="0" rIns="0" tIns="0" bIns="0">
             <a:spAutoFit/>
           </a:bodyPr>
           <a:lstStyle/>
@@ -12358,7 +12446,7 @@
           <a:noFill/>
         </p:spPr>
         <p:txBody>
-          <a:bodyPr wrap="square" lIns="0" tIns="0" rIns="0" bIns="0" anchor="t">
+          <a:bodyPr wrap="square" anchor="t" lIns="0" rIns="0" tIns="0" bIns="0">
             <a:spAutoFit/>
           </a:bodyPr>
           <a:lstStyle/>
@@ -12397,7 +12485,7 @@
           <a:noFill/>
         </p:spPr>
         <p:txBody>
-          <a:bodyPr wrap="square" lIns="0" tIns="0" rIns="0" bIns="0" anchor="t">
+          <a:bodyPr wrap="square" anchor="t" lIns="0" rIns="0" tIns="0" bIns="0">
             <a:spAutoFit/>
           </a:bodyPr>
           <a:lstStyle/>
@@ -12436,7 +12524,7 @@
           <a:noFill/>
         </p:spPr>
         <p:txBody>
-          <a:bodyPr wrap="square" lIns="0" tIns="0" rIns="0" bIns="0" anchor="t">
+          <a:bodyPr wrap="square" anchor="t" lIns="0" rIns="0" tIns="0" bIns="0">
             <a:spAutoFit/>
           </a:bodyPr>
           <a:lstStyle/>
@@ -12475,7 +12563,7 @@
           <a:noFill/>
         </p:spPr>
         <p:txBody>
-          <a:bodyPr wrap="square" lIns="0" tIns="0" rIns="0" bIns="0" anchor="t">
+          <a:bodyPr wrap="square" anchor="t" lIns="0" rIns="0" tIns="0" bIns="0">
             <a:spAutoFit/>
           </a:bodyPr>
           <a:lstStyle/>
@@ -12514,7 +12602,7 @@
           <a:noFill/>
         </p:spPr>
         <p:txBody>
-          <a:bodyPr wrap="square" lIns="0" tIns="0" rIns="0" bIns="0" anchor="t">
+          <a:bodyPr wrap="square" anchor="t" lIns="0" rIns="0" tIns="0" bIns="0">
             <a:spAutoFit/>
           </a:bodyPr>
           <a:lstStyle/>
@@ -12531,7 +12619,7 @@
                 </a:solidFill>
                 <a:latin typeface="Segoe UI"/>
               </a:rPr>
-              <a:t>22 checks against a local stub of Razorpay's API, no account: forged signature, replay, wrong amount — outside the 757</a:t>
+              <a:t>22 checks against a local stub of Razorpay's API, no account: forged signature, replay, wrong amount — outside the 760</a:t>
             </a:r>
           </a:p>
         </p:txBody>
@@ -12553,7 +12641,7 @@
           <a:noFill/>
         </p:spPr>
         <p:txBody>
-          <a:bodyPr wrap="square" lIns="0" tIns="0" rIns="0" bIns="0" anchor="t">
+          <a:bodyPr wrap="square" anchor="t" lIns="0" rIns="0" tIns="0" bIns="0">
             <a:spAutoFit/>
           </a:bodyPr>
           <a:lstStyle/>
@@ -12592,7 +12680,7 @@
           <a:noFill/>
         </p:spPr>
         <p:txBody>
-          <a:bodyPr wrap="square" lIns="0" tIns="0" rIns="0" bIns="0" anchor="t">
+          <a:bodyPr wrap="square" anchor="t" lIns="0" rIns="0" tIns="0" bIns="0">
             <a:spAutoFit/>
           </a:bodyPr>
           <a:lstStyle/>
@@ -12619,23 +12707,11 @@
   <p:clrMapOvr>
     <a:masterClrMapping/>
   </p:clrMapOvr>
-  <mc:AlternateContent xmlns:mc="http://schemas.openxmlformats.org/markup-compatibility/2006">
-    <mc:Choice xmlns:p14="http://schemas.microsoft.com/office/powerpoint/2010/main" Requires="p14">
-      <p:transition spd="med" p14:dur="700">
-        <p:fade thruBlk="1"/>
-      </p:transition>
-    </mc:Choice>
-    <mc:Fallback>
-      <p:transition spd="med">
-        <p:fade thruBlk="1"/>
-      </p:transition>
-    </mc:Fallback>
-  </mc:AlternateContent>
 </p:sld>
 </file>
 
 <file path=ppt/slides/slide17.xml><?xml version="1.0" encoding="utf-8"?>
-<p:sld xmlns:a="http://schemas.openxmlformats.org/drawingml/2006/main" xmlns:r="http://schemas.openxmlformats.org/officeDocument/2006/relationships" xmlns:p="http://schemas.openxmlformats.org/presentationml/2006/main">
+<p:sld xmlns:a="http://schemas.openxmlformats.org/drawingml/2006/main" xmlns:p="http://schemas.openxmlformats.org/presentationml/2006/main" xmlns:r="http://schemas.openxmlformats.org/officeDocument/2006/relationships">
   <p:cSld>
     <p:spTree>
       <p:nvGrpSpPr>
@@ -12643,14 +12719,7 @@
         <p:cNvGrpSpPr/>
         <p:nvPr/>
       </p:nvGrpSpPr>
-      <p:grpSpPr>
-        <a:xfrm>
-          <a:off x="0" y="0"/>
-          <a:ext cx="0" cy="0"/>
-          <a:chOff x="0" y="0"/>
-          <a:chExt cx="0" cy="0"/>
-        </a:xfrm>
-      </p:grpSpPr>
+      <p:grpSpPr/>
       <p:pic>
         <p:nvPicPr>
           <p:cNvPr id="2" name="Picture 1" descr="bg_deep.png"/>
@@ -12692,7 +12761,7 @@
           <a:noFill/>
         </p:spPr>
         <p:txBody>
-          <a:bodyPr wrap="square" lIns="0" tIns="0" rIns="0" bIns="0" anchor="t">
+          <a:bodyPr wrap="square" anchor="t" lIns="0" rIns="0" tIns="0" bIns="0">
             <a:spAutoFit/>
           </a:bodyPr>
           <a:lstStyle/>
@@ -12731,7 +12800,7 @@
           <a:noFill/>
         </p:spPr>
         <p:txBody>
-          <a:bodyPr wrap="square" lIns="0" tIns="0" rIns="0" bIns="0" anchor="t">
+          <a:bodyPr wrap="square" anchor="t" lIns="0" rIns="0" tIns="0" bIns="0">
             <a:spAutoFit/>
           </a:bodyPr>
           <a:lstStyle/>
@@ -12770,7 +12839,7 @@
           <a:noFill/>
         </p:spPr>
         <p:txBody>
-          <a:bodyPr wrap="square" lIns="0" tIns="0" rIns="0" bIns="0" anchor="t">
+          <a:bodyPr wrap="square" anchor="t" lIns="0" rIns="0" tIns="0" bIns="0">
             <a:spAutoFit/>
           </a:bodyPr>
           <a:lstStyle/>
@@ -12833,7 +12902,7 @@
           </a:fontRef>
         </p:style>
         <p:txBody>
-          <a:bodyPr wrap="square" lIns="73152" tIns="36576" rIns="73152" bIns="36576" rtlCol="0" anchor="ctr"/>
+          <a:bodyPr rtlCol="0" anchor="ctr" wrap="square" lIns="73152" rIns="73152" tIns="36576" bIns="36576"/>
           <a:lstStyle/>
           <a:p>
             <a:pPr algn="ctr"/>
@@ -12907,7 +12976,7 @@
           </a:fontRef>
         </p:style>
         <p:txBody>
-          <a:bodyPr wrap="square" lIns="73152" tIns="36576" rIns="73152" bIns="36576" rtlCol="0" anchor="ctr"/>
+          <a:bodyPr rtlCol="0" anchor="ctr" wrap="square" lIns="73152" rIns="73152" tIns="36576" bIns="36576"/>
           <a:lstStyle/>
           <a:p>
             <a:pPr algn="ctr"/>
@@ -12981,7 +13050,7 @@
           </a:fontRef>
         </p:style>
         <p:txBody>
-          <a:bodyPr wrap="square" lIns="73152" tIns="36576" rIns="73152" bIns="36576" rtlCol="0" anchor="ctr"/>
+          <a:bodyPr rtlCol="0" anchor="ctr" wrap="square" lIns="73152" rIns="73152" tIns="36576" bIns="36576"/>
           <a:lstStyle/>
           <a:p>
             <a:pPr algn="ctr"/>
@@ -13055,7 +13124,7 @@
           </a:fontRef>
         </p:style>
         <p:txBody>
-          <a:bodyPr wrap="square" lIns="73152" tIns="36576" rIns="73152" bIns="36576" rtlCol="0" anchor="ctr"/>
+          <a:bodyPr rtlCol="0" anchor="ctr" wrap="square" lIns="73152" rIns="73152" tIns="36576" bIns="36576"/>
           <a:lstStyle/>
           <a:p>
             <a:pPr algn="ctr"/>
@@ -13129,7 +13198,7 @@
           </a:fontRef>
         </p:style>
         <p:txBody>
-          <a:bodyPr wrap="square" lIns="73152" tIns="36576" rIns="73152" bIns="36576" rtlCol="0" anchor="ctr"/>
+          <a:bodyPr rtlCol="0" anchor="ctr" wrap="square" lIns="73152" rIns="73152" tIns="36576" bIns="36576"/>
           <a:lstStyle/>
           <a:p>
             <a:pPr algn="ctr"/>
@@ -13203,7 +13272,7 @@
           </a:fontRef>
         </p:style>
         <p:txBody>
-          <a:bodyPr wrap="square" lIns="73152" tIns="36576" rIns="73152" bIns="36576" rtlCol="0" anchor="ctr"/>
+          <a:bodyPr rtlCol="0" anchor="ctr" wrap="square" lIns="73152" rIns="73152" tIns="36576" bIns="36576"/>
           <a:lstStyle/>
           <a:p>
             <a:pPr algn="ctr"/>
@@ -13277,7 +13346,7 @@
           </a:fontRef>
         </p:style>
         <p:txBody>
-          <a:bodyPr wrap="square" lIns="73152" tIns="36576" rIns="73152" bIns="36576" rtlCol="0" anchor="ctr"/>
+          <a:bodyPr rtlCol="0" anchor="ctr" wrap="square" lIns="73152" rIns="73152" tIns="36576" bIns="36576"/>
           <a:lstStyle/>
           <a:p>
             <a:pPr algn="ctr"/>
@@ -13355,7 +13424,6 @@
           <a:lstStyle/>
           <a:p>
             <a:pPr algn="ctr"/>
-            <a:endParaRPr/>
           </a:p>
         </p:txBody>
       </p:sp>
@@ -13376,7 +13444,7 @@
           <a:noFill/>
         </p:spPr>
         <p:txBody>
-          <a:bodyPr wrap="square" lIns="0" tIns="0" rIns="0" bIns="0" anchor="t">
+          <a:bodyPr wrap="square" anchor="t" lIns="0" rIns="0" tIns="0" bIns="0">
             <a:spAutoFit/>
           </a:bodyPr>
           <a:lstStyle/>
@@ -13431,7 +13499,7 @@
           <a:noFill/>
         </p:spPr>
         <p:txBody>
-          <a:bodyPr wrap="square" lIns="0" tIns="0" rIns="0" bIns="0" anchor="t">
+          <a:bodyPr wrap="square" anchor="t" lIns="0" rIns="0" tIns="0" bIns="0">
             <a:spAutoFit/>
           </a:bodyPr>
           <a:lstStyle/>
@@ -13502,7 +13570,7 @@
           <a:noFill/>
         </p:spPr>
         <p:txBody>
-          <a:bodyPr wrap="square" lIns="0" tIns="0" rIns="0" bIns="0" anchor="t">
+          <a:bodyPr wrap="square" anchor="t" lIns="0" rIns="0" tIns="0" bIns="0">
             <a:spAutoFit/>
           </a:bodyPr>
           <a:lstStyle/>
@@ -13541,7 +13609,7 @@
           <a:noFill/>
         </p:spPr>
         <p:txBody>
-          <a:bodyPr wrap="square" lIns="0" tIns="0" rIns="0" bIns="0" anchor="t">
+          <a:bodyPr wrap="square" anchor="t" lIns="0" rIns="0" tIns="0" bIns="0">
             <a:spAutoFit/>
           </a:bodyPr>
           <a:lstStyle/>
@@ -13568,23 +13636,11 @@
   <p:clrMapOvr>
     <a:masterClrMapping/>
   </p:clrMapOvr>
-  <mc:AlternateContent xmlns:mc="http://schemas.openxmlformats.org/markup-compatibility/2006">
-    <mc:Choice xmlns:p14="http://schemas.microsoft.com/office/powerpoint/2010/main" Requires="p14">
-      <p:transition spd="med" p14:dur="700">
-        <p:fade thruBlk="1"/>
-      </p:transition>
-    </mc:Choice>
-    <mc:Fallback>
-      <p:transition spd="med">
-        <p:fade thruBlk="1"/>
-      </p:transition>
-    </mc:Fallback>
-  </mc:AlternateContent>
 </p:sld>
 </file>
 
 <file path=ppt/slides/slide18.xml><?xml version="1.0" encoding="utf-8"?>
-<p:sld xmlns:a="http://schemas.openxmlformats.org/drawingml/2006/main" xmlns:r="http://schemas.openxmlformats.org/officeDocument/2006/relationships" xmlns:p="http://schemas.openxmlformats.org/presentationml/2006/main">
+<p:sld xmlns:a="http://schemas.openxmlformats.org/drawingml/2006/main" xmlns:p="http://schemas.openxmlformats.org/presentationml/2006/main" xmlns:r="http://schemas.openxmlformats.org/officeDocument/2006/relationships">
   <p:cSld>
     <p:spTree>
       <p:nvGrpSpPr>
@@ -13592,14 +13648,7 @@
         <p:cNvGrpSpPr/>
         <p:nvPr/>
       </p:nvGrpSpPr>
-      <p:grpSpPr>
-        <a:xfrm>
-          <a:off x="0" y="0"/>
-          <a:ext cx="0" cy="0"/>
-          <a:chOff x="0" y="0"/>
-          <a:chExt cx="0" cy="0"/>
-        </a:xfrm>
-      </p:grpSpPr>
+      <p:grpSpPr/>
       <p:pic>
         <p:nvPicPr>
           <p:cNvPr id="2" name="Picture 1" descr="bg_deep.png"/>
@@ -13641,7 +13690,7 @@
           <a:noFill/>
         </p:spPr>
         <p:txBody>
-          <a:bodyPr wrap="square" lIns="0" tIns="0" rIns="0" bIns="0" anchor="t">
+          <a:bodyPr wrap="square" anchor="t" lIns="0" rIns="0" tIns="0" bIns="0">
             <a:spAutoFit/>
           </a:bodyPr>
           <a:lstStyle/>
@@ -13680,7 +13729,7 @@
           <a:noFill/>
         </p:spPr>
         <p:txBody>
-          <a:bodyPr wrap="square" lIns="0" tIns="0" rIns="0" bIns="0" anchor="t">
+          <a:bodyPr wrap="square" anchor="t" lIns="0" rIns="0" tIns="0" bIns="0">
             <a:spAutoFit/>
           </a:bodyPr>
           <a:lstStyle/>
@@ -13719,7 +13768,7 @@
           <a:noFill/>
         </p:spPr>
         <p:txBody>
-          <a:bodyPr wrap="square" lIns="0" tIns="0" rIns="0" bIns="0" anchor="t">
+          <a:bodyPr wrap="square" anchor="t" lIns="0" rIns="0" tIns="0" bIns="0">
             <a:spAutoFit/>
           </a:bodyPr>
           <a:lstStyle/>
@@ -13786,7 +13835,6 @@
           <a:lstStyle/>
           <a:p>
             <a:pPr algn="ctr"/>
-            <a:endParaRPr/>
           </a:p>
         </p:txBody>
       </p:sp>
@@ -13807,7 +13855,7 @@
           <a:noFill/>
         </p:spPr>
         <p:txBody>
-          <a:bodyPr wrap="square" lIns="0" tIns="0" rIns="0" bIns="0" anchor="t">
+          <a:bodyPr wrap="square" anchor="t" lIns="0" rIns="0" tIns="0" bIns="0">
             <a:spAutoFit/>
           </a:bodyPr>
           <a:lstStyle/>
@@ -13846,7 +13894,7 @@
           <a:noFill/>
         </p:spPr>
         <p:txBody>
-          <a:bodyPr wrap="square" lIns="0" tIns="0" rIns="0" bIns="0" anchor="t">
+          <a:bodyPr wrap="square" anchor="t" lIns="0" rIns="0" tIns="0" bIns="0">
             <a:spAutoFit/>
           </a:bodyPr>
           <a:lstStyle/>
@@ -13913,7 +13961,6 @@
           <a:lstStyle/>
           <a:p>
             <a:pPr algn="ctr"/>
-            <a:endParaRPr/>
           </a:p>
         </p:txBody>
       </p:sp>
@@ -13934,7 +13981,7 @@
           <a:noFill/>
         </p:spPr>
         <p:txBody>
-          <a:bodyPr wrap="square" lIns="0" tIns="0" rIns="0" bIns="0" anchor="t">
+          <a:bodyPr wrap="square" anchor="t" lIns="0" rIns="0" tIns="0" bIns="0">
             <a:spAutoFit/>
           </a:bodyPr>
           <a:lstStyle/>
@@ -13973,7 +14020,7 @@
           <a:noFill/>
         </p:spPr>
         <p:txBody>
-          <a:bodyPr wrap="square" lIns="0" tIns="0" rIns="0" bIns="0" anchor="t">
+          <a:bodyPr wrap="square" anchor="t" lIns="0" rIns="0" tIns="0" bIns="0">
             <a:spAutoFit/>
           </a:bodyPr>
           <a:lstStyle/>
@@ -14040,7 +14087,6 @@
           <a:lstStyle/>
           <a:p>
             <a:pPr algn="ctr"/>
-            <a:endParaRPr/>
           </a:p>
         </p:txBody>
       </p:sp>
@@ -14061,7 +14107,7 @@
           <a:noFill/>
         </p:spPr>
         <p:txBody>
-          <a:bodyPr wrap="square" lIns="0" tIns="0" rIns="0" bIns="0" anchor="t">
+          <a:bodyPr wrap="square" anchor="t" lIns="0" rIns="0" tIns="0" bIns="0">
             <a:spAutoFit/>
           </a:bodyPr>
           <a:lstStyle/>
@@ -14100,7 +14146,7 @@
           <a:noFill/>
         </p:spPr>
         <p:txBody>
-          <a:bodyPr wrap="square" lIns="0" tIns="0" rIns="0" bIns="0" anchor="t">
+          <a:bodyPr wrap="square" anchor="t" lIns="0" rIns="0" tIns="0" bIns="0">
             <a:spAutoFit/>
           </a:bodyPr>
           <a:lstStyle/>
@@ -14167,7 +14213,6 @@
           <a:lstStyle/>
           <a:p>
             <a:pPr algn="ctr"/>
-            <a:endParaRPr/>
           </a:p>
         </p:txBody>
       </p:sp>
@@ -14188,7 +14233,7 @@
           <a:noFill/>
         </p:spPr>
         <p:txBody>
-          <a:bodyPr wrap="square" lIns="0" tIns="0" rIns="0" bIns="0" anchor="t">
+          <a:bodyPr wrap="square" anchor="t" lIns="0" rIns="0" tIns="0" bIns="0">
             <a:spAutoFit/>
           </a:bodyPr>
           <a:lstStyle/>
@@ -14227,7 +14272,7 @@
           <a:noFill/>
         </p:spPr>
         <p:txBody>
-          <a:bodyPr wrap="square" lIns="0" tIns="0" rIns="0" bIns="0" anchor="t">
+          <a:bodyPr wrap="square" anchor="t" lIns="0" rIns="0" tIns="0" bIns="0">
             <a:spAutoFit/>
           </a:bodyPr>
           <a:lstStyle/>
@@ -14294,7 +14339,6 @@
           <a:lstStyle/>
           <a:p>
             <a:pPr algn="ctr"/>
-            <a:endParaRPr/>
           </a:p>
         </p:txBody>
       </p:sp>
@@ -14315,7 +14359,7 @@
           <a:noFill/>
         </p:spPr>
         <p:txBody>
-          <a:bodyPr wrap="square" lIns="0" tIns="0" rIns="0" bIns="0" anchor="t">
+          <a:bodyPr wrap="square" anchor="t" lIns="0" rIns="0" tIns="0" bIns="0">
             <a:spAutoFit/>
           </a:bodyPr>
           <a:lstStyle/>
@@ -14354,7 +14398,7 @@
           <a:noFill/>
         </p:spPr>
         <p:txBody>
-          <a:bodyPr wrap="square" lIns="0" tIns="0" rIns="0" bIns="0" anchor="t">
+          <a:bodyPr wrap="square" anchor="t" lIns="0" rIns="0" tIns="0" bIns="0">
             <a:spAutoFit/>
           </a:bodyPr>
           <a:lstStyle/>
@@ -14421,7 +14465,6 @@
           <a:lstStyle/>
           <a:p>
             <a:pPr algn="ctr"/>
-            <a:endParaRPr/>
           </a:p>
         </p:txBody>
       </p:sp>
@@ -14442,7 +14485,7 @@
           <a:noFill/>
         </p:spPr>
         <p:txBody>
-          <a:bodyPr wrap="square" lIns="0" tIns="0" rIns="0" bIns="0" anchor="t">
+          <a:bodyPr wrap="square" anchor="t" lIns="0" rIns="0" tIns="0" bIns="0">
             <a:spAutoFit/>
           </a:bodyPr>
           <a:lstStyle/>
@@ -14481,7 +14524,7 @@
           <a:noFill/>
         </p:spPr>
         <p:txBody>
-          <a:bodyPr wrap="square" lIns="0" tIns="0" rIns="0" bIns="0" anchor="t">
+          <a:bodyPr wrap="square" anchor="t" lIns="0" rIns="0" tIns="0" bIns="0">
             <a:spAutoFit/>
           </a:bodyPr>
           <a:lstStyle/>
@@ -14520,7 +14563,7 @@
           <a:noFill/>
         </p:spPr>
         <p:txBody>
-          <a:bodyPr wrap="square" lIns="0" tIns="0" rIns="0" bIns="0" anchor="t">
+          <a:bodyPr wrap="square" anchor="t" lIns="0" rIns="0" tIns="0" bIns="0">
             <a:spAutoFit/>
           </a:bodyPr>
           <a:lstStyle/>
@@ -14559,7 +14602,7 @@
           <a:noFill/>
         </p:spPr>
         <p:txBody>
-          <a:bodyPr wrap="square" lIns="0" tIns="0" rIns="0" bIns="0" anchor="t">
+          <a:bodyPr wrap="square" anchor="t" lIns="0" rIns="0" tIns="0" bIns="0">
             <a:spAutoFit/>
           </a:bodyPr>
           <a:lstStyle/>
@@ -14598,7 +14641,7 @@
           <a:noFill/>
         </p:spPr>
         <p:txBody>
-          <a:bodyPr wrap="square" lIns="0" tIns="0" rIns="0" bIns="0" anchor="t">
+          <a:bodyPr wrap="square" anchor="t" lIns="0" rIns="0" tIns="0" bIns="0">
             <a:spAutoFit/>
           </a:bodyPr>
           <a:lstStyle/>
@@ -14637,7 +14680,7 @@
           <a:noFill/>
         </p:spPr>
         <p:txBody>
-          <a:bodyPr wrap="square" lIns="0" tIns="0" rIns="0" bIns="0" anchor="t">
+          <a:bodyPr wrap="square" anchor="t" lIns="0" rIns="0" tIns="0" bIns="0">
             <a:spAutoFit/>
           </a:bodyPr>
           <a:lstStyle/>
@@ -14676,7 +14719,7 @@
           <a:noFill/>
         </p:spPr>
         <p:txBody>
-          <a:bodyPr wrap="square" lIns="0" tIns="0" rIns="0" bIns="0" anchor="t">
+          <a:bodyPr wrap="square" anchor="t" lIns="0" rIns="0" tIns="0" bIns="0">
             <a:spAutoFit/>
           </a:bodyPr>
           <a:lstStyle/>
@@ -14715,7 +14758,7 @@
           <a:noFill/>
         </p:spPr>
         <p:txBody>
-          <a:bodyPr wrap="square" lIns="0" tIns="0" rIns="0" bIns="0" anchor="t">
+          <a:bodyPr wrap="square" anchor="t" lIns="0" rIns="0" tIns="0" bIns="0">
             <a:spAutoFit/>
           </a:bodyPr>
           <a:lstStyle/>
@@ -14754,7 +14797,7 @@
           <a:noFill/>
         </p:spPr>
         <p:txBody>
-          <a:bodyPr wrap="square" lIns="0" tIns="0" rIns="0" bIns="0" anchor="t">
+          <a:bodyPr wrap="square" anchor="t" lIns="0" rIns="0" tIns="0" bIns="0">
             <a:spAutoFit/>
           </a:bodyPr>
           <a:lstStyle/>
@@ -14793,7 +14836,7 @@
           <a:noFill/>
         </p:spPr>
         <p:txBody>
-          <a:bodyPr wrap="square" lIns="0" tIns="0" rIns="0" bIns="0" anchor="t">
+          <a:bodyPr wrap="square" anchor="t" lIns="0" rIns="0" tIns="0" bIns="0">
             <a:spAutoFit/>
           </a:bodyPr>
           <a:lstStyle/>
@@ -14832,7 +14875,7 @@
           <a:noFill/>
         </p:spPr>
         <p:txBody>
-          <a:bodyPr wrap="square" lIns="0" tIns="0" rIns="0" bIns="0" anchor="t">
+          <a:bodyPr wrap="square" anchor="t" lIns="0" rIns="0" tIns="0" bIns="0">
             <a:spAutoFit/>
           </a:bodyPr>
           <a:lstStyle/>
@@ -14871,7 +14914,7 @@
           <a:noFill/>
         </p:spPr>
         <p:txBody>
-          <a:bodyPr wrap="square" lIns="0" tIns="0" rIns="0" bIns="0" anchor="t">
+          <a:bodyPr wrap="square" anchor="t" lIns="0" rIns="0" tIns="0" bIns="0">
             <a:spAutoFit/>
           </a:bodyPr>
           <a:lstStyle/>
@@ -14910,7 +14953,7 @@
           <a:noFill/>
         </p:spPr>
         <p:txBody>
-          <a:bodyPr wrap="square" lIns="0" tIns="0" rIns="0" bIns="0" anchor="t">
+          <a:bodyPr wrap="square" anchor="t" lIns="0" rIns="0" tIns="0" bIns="0">
             <a:spAutoFit/>
           </a:bodyPr>
           <a:lstStyle/>
@@ -14949,7 +14992,7 @@
           <a:noFill/>
         </p:spPr>
         <p:txBody>
-          <a:bodyPr wrap="square" lIns="0" tIns="0" rIns="0" bIns="0" anchor="t">
+          <a:bodyPr wrap="square" anchor="t" lIns="0" rIns="0" tIns="0" bIns="0">
             <a:spAutoFit/>
           </a:bodyPr>
           <a:lstStyle/>
@@ -14976,23 +15019,11 @@
   <p:clrMapOvr>
     <a:masterClrMapping/>
   </p:clrMapOvr>
-  <mc:AlternateContent xmlns:mc="http://schemas.openxmlformats.org/markup-compatibility/2006">
-    <mc:Choice xmlns:p14="http://schemas.microsoft.com/office/powerpoint/2010/main" Requires="p14">
-      <p:transition spd="med" p14:dur="700">
-        <p:fade thruBlk="1"/>
-      </p:transition>
-    </mc:Choice>
-    <mc:Fallback>
-      <p:transition spd="med">
-        <p:fade thruBlk="1"/>
-      </p:transition>
-    </mc:Fallback>
-  </mc:AlternateContent>
 </p:sld>
 </file>
 
 <file path=ppt/slides/slide19.xml><?xml version="1.0" encoding="utf-8"?>
-<p:sld xmlns:a="http://schemas.openxmlformats.org/drawingml/2006/main" xmlns:r="http://schemas.openxmlformats.org/officeDocument/2006/relationships" xmlns:p="http://schemas.openxmlformats.org/presentationml/2006/main">
+<p:sld xmlns:a="http://schemas.openxmlformats.org/drawingml/2006/main" xmlns:p="http://schemas.openxmlformats.org/presentationml/2006/main" xmlns:r="http://schemas.openxmlformats.org/officeDocument/2006/relationships">
   <p:cSld>
     <p:spTree>
       <p:nvGrpSpPr>
@@ -15000,14 +15031,7 @@
         <p:cNvGrpSpPr/>
         <p:nvPr/>
       </p:nvGrpSpPr>
-      <p:grpSpPr>
-        <a:xfrm>
-          <a:off x="0" y="0"/>
-          <a:ext cx="0" cy="0"/>
-          <a:chOff x="0" y="0"/>
-          <a:chExt cx="0" cy="0"/>
-        </a:xfrm>
-      </p:grpSpPr>
+      <p:grpSpPr/>
       <p:pic>
         <p:nvPicPr>
           <p:cNvPr id="2" name="Picture 1" descr="bg_mod.png"/>
@@ -15049,7 +15073,7 @@
           <a:noFill/>
         </p:spPr>
         <p:txBody>
-          <a:bodyPr wrap="square" lIns="0" tIns="0" rIns="0" bIns="0" anchor="t">
+          <a:bodyPr wrap="square" anchor="t" lIns="0" rIns="0" tIns="0" bIns="0">
             <a:spAutoFit/>
           </a:bodyPr>
           <a:lstStyle/>
@@ -15088,7 +15112,7 @@
           <a:noFill/>
         </p:spPr>
         <p:txBody>
-          <a:bodyPr wrap="square" lIns="0" tIns="0" rIns="0" bIns="0" anchor="t">
+          <a:bodyPr wrap="square" anchor="t" lIns="0" rIns="0" tIns="0" bIns="0">
             <a:spAutoFit/>
           </a:bodyPr>
           <a:lstStyle/>
@@ -15127,7 +15151,7 @@
           <a:noFill/>
         </p:spPr>
         <p:txBody>
-          <a:bodyPr wrap="square" lIns="0" tIns="0" rIns="0" bIns="0" anchor="t">
+          <a:bodyPr wrap="square" anchor="t" lIns="0" rIns="0" tIns="0" bIns="0">
             <a:spAutoFit/>
           </a:bodyPr>
           <a:lstStyle/>
@@ -15190,7 +15214,7 @@
           </a:fontRef>
         </p:style>
         <p:txBody>
-          <a:bodyPr wrap="square" lIns="73152" tIns="36576" rIns="73152" bIns="36576" rtlCol="0" anchor="ctr"/>
+          <a:bodyPr rtlCol="0" anchor="ctr" wrap="square" lIns="73152" rIns="73152" tIns="36576" bIns="36576"/>
           <a:lstStyle/>
           <a:p>
             <a:pPr algn="ctr"/>
@@ -15264,7 +15288,7 @@
           </a:fontRef>
         </p:style>
         <p:txBody>
-          <a:bodyPr wrap="square" lIns="54864" tIns="0" rIns="54864" bIns="0" rtlCol="0" anchor="ctr"/>
+          <a:bodyPr rtlCol="0" anchor="ctr" wrap="square" lIns="54864" rIns="54864" tIns="0" bIns="0"/>
           <a:lstStyle/>
           <a:p>
             <a:pPr algn="ctr"/>
@@ -15321,7 +15345,7 @@
           </a:fontRef>
         </p:style>
         <p:txBody>
-          <a:bodyPr wrap="square" lIns="73152" tIns="36576" rIns="73152" bIns="36576" rtlCol="0" anchor="ctr"/>
+          <a:bodyPr rtlCol="0" anchor="ctr" wrap="square" lIns="73152" rIns="73152" tIns="36576" bIns="36576"/>
           <a:lstStyle/>
           <a:p>
             <a:pPr algn="ctr"/>
@@ -15395,7 +15419,7 @@
           </a:fontRef>
         </p:style>
         <p:txBody>
-          <a:bodyPr wrap="square" lIns="54864" tIns="0" rIns="54864" bIns="0" rtlCol="0" anchor="ctr"/>
+          <a:bodyPr rtlCol="0" anchor="ctr" wrap="square" lIns="54864" rIns="54864" tIns="0" bIns="0"/>
           <a:lstStyle/>
           <a:p>
             <a:pPr algn="ctr"/>
@@ -15452,7 +15476,7 @@
           </a:fontRef>
         </p:style>
         <p:txBody>
-          <a:bodyPr wrap="square" lIns="73152" tIns="36576" rIns="73152" bIns="36576" rtlCol="0" anchor="ctr"/>
+          <a:bodyPr rtlCol="0" anchor="ctr" wrap="square" lIns="73152" rIns="73152" tIns="36576" bIns="36576"/>
           <a:lstStyle/>
           <a:p>
             <a:pPr algn="ctr"/>
@@ -15526,7 +15550,7 @@
           </a:fontRef>
         </p:style>
         <p:txBody>
-          <a:bodyPr wrap="square" lIns="54864" tIns="0" rIns="54864" bIns="0" rtlCol="0" anchor="ctr"/>
+          <a:bodyPr rtlCol="0" anchor="ctr" wrap="square" lIns="54864" rIns="54864" tIns="0" bIns="0"/>
           <a:lstStyle/>
           <a:p>
             <a:pPr algn="ctr"/>
@@ -15587,7 +15611,6 @@
           <a:lstStyle/>
           <a:p>
             <a:pPr algn="ctr"/>
-            <a:endParaRPr/>
           </a:p>
         </p:txBody>
       </p:sp>
@@ -15608,7 +15631,7 @@
           <a:noFill/>
         </p:spPr>
         <p:txBody>
-          <a:bodyPr wrap="square" lIns="0" tIns="0" rIns="0" bIns="0" anchor="t">
+          <a:bodyPr wrap="square" anchor="t" lIns="0" rIns="0" tIns="0" bIns="0">
             <a:spAutoFit/>
           </a:bodyPr>
           <a:lstStyle/>
@@ -15647,7 +15670,7 @@
           <a:noFill/>
         </p:spPr>
         <p:txBody>
-          <a:bodyPr wrap="square" lIns="0" tIns="0" rIns="0" bIns="0" anchor="t">
+          <a:bodyPr wrap="square" anchor="t" lIns="0" rIns="0" tIns="0" bIns="0">
             <a:spAutoFit/>
           </a:bodyPr>
           <a:lstStyle/>
@@ -15730,7 +15753,6 @@
           <a:lstStyle/>
           <a:p>
             <a:pPr algn="ctr"/>
-            <a:endParaRPr/>
           </a:p>
         </p:txBody>
       </p:sp>
@@ -15751,7 +15773,7 @@
           <a:noFill/>
         </p:spPr>
         <p:txBody>
-          <a:bodyPr wrap="square" lIns="0" tIns="0" rIns="0" bIns="0" anchor="t">
+          <a:bodyPr wrap="square" anchor="t" lIns="0" rIns="0" tIns="0" bIns="0">
             <a:spAutoFit/>
           </a:bodyPr>
           <a:lstStyle/>
@@ -15790,7 +15812,7 @@
           <a:noFill/>
         </p:spPr>
         <p:txBody>
-          <a:bodyPr wrap="square" lIns="0" tIns="0" rIns="0" bIns="0" anchor="t">
+          <a:bodyPr wrap="square" anchor="t" lIns="0" rIns="0" tIns="0" bIns="0">
             <a:spAutoFit/>
           </a:bodyPr>
           <a:lstStyle/>
@@ -15829,7 +15851,7 @@
           <a:noFill/>
         </p:spPr>
         <p:txBody>
-          <a:bodyPr wrap="square" lIns="0" tIns="0" rIns="0" bIns="0" anchor="t">
+          <a:bodyPr wrap="square" anchor="t" lIns="0" rIns="0" tIns="0" bIns="0">
             <a:spAutoFit/>
           </a:bodyPr>
           <a:lstStyle/>
@@ -15868,7 +15890,7 @@
           <a:noFill/>
         </p:spPr>
         <p:txBody>
-          <a:bodyPr wrap="square" lIns="0" tIns="0" rIns="0" bIns="0" anchor="t">
+          <a:bodyPr wrap="square" anchor="t" lIns="0" rIns="0" tIns="0" bIns="0">
             <a:spAutoFit/>
           </a:bodyPr>
           <a:lstStyle/>
@@ -15895,23 +15917,11 @@
   <p:clrMapOvr>
     <a:masterClrMapping/>
   </p:clrMapOvr>
-  <mc:AlternateContent xmlns:mc="http://schemas.openxmlformats.org/markup-compatibility/2006">
-    <mc:Choice xmlns:p14="http://schemas.microsoft.com/office/powerpoint/2010/main" Requires="p14">
-      <p:transition spd="med" p14:dur="700">
-        <p:fade thruBlk="1"/>
-      </p:transition>
-    </mc:Choice>
-    <mc:Fallback>
-      <p:transition spd="med">
-        <p:fade thruBlk="1"/>
-      </p:transition>
-    </mc:Fallback>
-  </mc:AlternateContent>
 </p:sld>
 </file>
 
 <file path=ppt/slides/slide2.xml><?xml version="1.0" encoding="utf-8"?>
-<p:sld xmlns:a="http://schemas.openxmlformats.org/drawingml/2006/main" xmlns:r="http://schemas.openxmlformats.org/officeDocument/2006/relationships" xmlns:p="http://schemas.openxmlformats.org/presentationml/2006/main">
+<p:sld xmlns:a="http://schemas.openxmlformats.org/drawingml/2006/main" xmlns:p="http://schemas.openxmlformats.org/presentationml/2006/main" xmlns:r="http://schemas.openxmlformats.org/officeDocument/2006/relationships">
   <p:cSld>
     <p:spTree>
       <p:nvGrpSpPr>
@@ -15919,14 +15929,7 @@
         <p:cNvGrpSpPr/>
         <p:nvPr/>
       </p:nvGrpSpPr>
-      <p:grpSpPr>
-        <a:xfrm>
-          <a:off x="0" y="0"/>
-          <a:ext cx="0" cy="0"/>
-          <a:chOff x="0" y="0"/>
-          <a:chExt cx="0" cy="0"/>
-        </a:xfrm>
-      </p:grpSpPr>
+      <p:grpSpPr/>
       <p:pic>
         <p:nvPicPr>
           <p:cNvPr id="2" name="Picture 1" descr="bg_deep.png"/>
@@ -15936,7 +15939,7 @@
           <p:nvPr/>
         </p:nvPicPr>
         <p:blipFill>
-          <a:blip r:embed="rId3"/>
+          <a:blip r:embed="rId2"/>
           <a:stretch>
             <a:fillRect/>
           </a:stretch>
@@ -15968,7 +15971,7 @@
           <a:noFill/>
         </p:spPr>
         <p:txBody>
-          <a:bodyPr wrap="square" lIns="0" tIns="0" rIns="0" bIns="0" anchor="t">
+          <a:bodyPr wrap="square" anchor="t" lIns="0" rIns="0" tIns="0" bIns="0">
             <a:spAutoFit/>
           </a:bodyPr>
           <a:lstStyle/>
@@ -16007,7 +16010,7 @@
           <a:noFill/>
         </p:spPr>
         <p:txBody>
-          <a:bodyPr wrap="square" lIns="0" tIns="0" rIns="0" bIns="0" anchor="t">
+          <a:bodyPr wrap="square" anchor="t" lIns="0" rIns="0" tIns="0" bIns="0">
             <a:spAutoFit/>
           </a:bodyPr>
           <a:lstStyle/>
@@ -16046,7 +16049,7 @@
           <a:noFill/>
         </p:spPr>
         <p:txBody>
-          <a:bodyPr wrap="square" lIns="0" tIns="0" rIns="0" bIns="0" anchor="t">
+          <a:bodyPr wrap="square" anchor="t" lIns="0" rIns="0" tIns="0" bIns="0">
             <a:spAutoFit/>
           </a:bodyPr>
           <a:lstStyle/>
@@ -16109,7 +16112,7 @@
           </a:fontRef>
         </p:style>
         <p:txBody>
-          <a:bodyPr wrap="square" lIns="54864" tIns="0" rIns="54864" bIns="0" rtlCol="0" anchor="ctr"/>
+          <a:bodyPr rtlCol="0" anchor="ctr" wrap="square" lIns="54864" rIns="54864" tIns="0" bIns="0"/>
           <a:lstStyle/>
           <a:p>
             <a:pPr algn="ctr"/>
@@ -16142,7 +16145,7 @@
           <a:noFill/>
         </p:spPr>
         <p:txBody>
-          <a:bodyPr wrap="square" lIns="0" tIns="0" rIns="0" bIns="0" anchor="t">
+          <a:bodyPr wrap="square" anchor="t" lIns="0" rIns="0" tIns="0" bIns="0">
             <a:spAutoFit/>
           </a:bodyPr>
           <a:lstStyle/>
@@ -16205,7 +16208,7 @@
           </a:fontRef>
         </p:style>
         <p:txBody>
-          <a:bodyPr wrap="square" lIns="54864" tIns="0" rIns="54864" bIns="0" rtlCol="0" anchor="ctr"/>
+          <a:bodyPr rtlCol="0" anchor="ctr" wrap="square" lIns="54864" rIns="54864" tIns="0" bIns="0"/>
           <a:lstStyle/>
           <a:p>
             <a:pPr algn="ctr"/>
@@ -16238,7 +16241,7 @@
           <a:noFill/>
         </p:spPr>
         <p:txBody>
-          <a:bodyPr wrap="square" lIns="0" tIns="0" rIns="0" bIns="0" anchor="t">
+          <a:bodyPr wrap="square" anchor="t" lIns="0" rIns="0" tIns="0" bIns="0">
             <a:spAutoFit/>
           </a:bodyPr>
           <a:lstStyle/>
@@ -16301,7 +16304,7 @@
           </a:fontRef>
         </p:style>
         <p:txBody>
-          <a:bodyPr wrap="square" lIns="54864" tIns="0" rIns="54864" bIns="0" rtlCol="0" anchor="ctr"/>
+          <a:bodyPr rtlCol="0" anchor="ctr" wrap="square" lIns="54864" rIns="54864" tIns="0" bIns="0"/>
           <a:lstStyle/>
           <a:p>
             <a:pPr algn="ctr"/>
@@ -16334,7 +16337,7 @@
           <a:noFill/>
         </p:spPr>
         <p:txBody>
-          <a:bodyPr wrap="square" lIns="0" tIns="0" rIns="0" bIns="0" anchor="t">
+          <a:bodyPr wrap="square" anchor="t" lIns="0" rIns="0" tIns="0" bIns="0">
             <a:spAutoFit/>
           </a:bodyPr>
           <a:lstStyle/>
@@ -16397,7 +16400,7 @@
           </a:fontRef>
         </p:style>
         <p:txBody>
-          <a:bodyPr wrap="square" lIns="54864" tIns="0" rIns="54864" bIns="0" rtlCol="0" anchor="ctr"/>
+          <a:bodyPr rtlCol="0" anchor="ctr" wrap="square" lIns="54864" rIns="54864" tIns="0" bIns="0"/>
           <a:lstStyle/>
           <a:p>
             <a:pPr algn="ctr"/>
@@ -16430,7 +16433,7 @@
           <a:noFill/>
         </p:spPr>
         <p:txBody>
-          <a:bodyPr wrap="square" lIns="0" tIns="0" rIns="0" bIns="0" anchor="t">
+          <a:bodyPr wrap="square" anchor="t" lIns="0" rIns="0" tIns="0" bIns="0">
             <a:spAutoFit/>
           </a:bodyPr>
           <a:lstStyle/>
@@ -16497,7 +16500,6 @@
           <a:lstStyle/>
           <a:p>
             <a:pPr algn="ctr"/>
-            <a:endParaRPr/>
           </a:p>
         </p:txBody>
       </p:sp>
@@ -16518,7 +16520,7 @@
           <a:noFill/>
         </p:spPr>
         <p:txBody>
-          <a:bodyPr wrap="square" lIns="0" tIns="0" rIns="0" bIns="0" anchor="t">
+          <a:bodyPr wrap="square" anchor="t" lIns="0" rIns="0" tIns="0" bIns="0">
             <a:spAutoFit/>
           </a:bodyPr>
           <a:lstStyle/>
@@ -16557,7 +16559,7 @@
           <a:noFill/>
         </p:spPr>
         <p:txBody>
-          <a:bodyPr wrap="square" lIns="0" tIns="0" rIns="0" bIns="0" anchor="t">
+          <a:bodyPr wrap="square" anchor="t" lIns="0" rIns="0" tIns="0" bIns="0">
             <a:spAutoFit/>
           </a:bodyPr>
           <a:lstStyle/>
@@ -16612,7 +16614,7 @@
           <a:noFill/>
         </p:spPr>
         <p:txBody>
-          <a:bodyPr wrap="square" lIns="0" tIns="0" rIns="0" bIns="0" anchor="t">
+          <a:bodyPr wrap="square" anchor="t" lIns="0" rIns="0" tIns="0" bIns="0">
             <a:spAutoFit/>
           </a:bodyPr>
           <a:lstStyle/>
@@ -16651,7 +16653,7 @@
           <a:noFill/>
         </p:spPr>
         <p:txBody>
-          <a:bodyPr wrap="square" lIns="0" tIns="0" rIns="0" bIns="0" anchor="t">
+          <a:bodyPr wrap="square" anchor="t" lIns="0" rIns="0" tIns="0" bIns="0">
             <a:spAutoFit/>
           </a:bodyPr>
           <a:lstStyle/>
@@ -16690,7 +16692,7 @@
           <a:noFill/>
         </p:spPr>
         <p:txBody>
-          <a:bodyPr wrap="square" lIns="0" tIns="0" rIns="0" bIns="0" anchor="t">
+          <a:bodyPr wrap="square" anchor="t" lIns="0" rIns="0" tIns="0" bIns="0">
             <a:spAutoFit/>
           </a:bodyPr>
           <a:lstStyle/>
@@ -16745,7 +16747,7 @@
           <a:noFill/>
         </p:spPr>
         <p:txBody>
-          <a:bodyPr wrap="square" lIns="0" tIns="0" rIns="0" bIns="0" anchor="t">
+          <a:bodyPr wrap="square" anchor="t" lIns="0" rIns="0" tIns="0" bIns="0">
             <a:spAutoFit/>
           </a:bodyPr>
           <a:lstStyle/>
@@ -16784,7 +16786,7 @@
           <a:noFill/>
         </p:spPr>
         <p:txBody>
-          <a:bodyPr wrap="square" lIns="0" tIns="0" rIns="0" bIns="0" anchor="t">
+          <a:bodyPr wrap="square" anchor="t" lIns="0" rIns="0" tIns="0" bIns="0">
             <a:spAutoFit/>
           </a:bodyPr>
           <a:lstStyle/>
@@ -16811,23 +16813,11 @@
   <p:clrMapOvr>
     <a:masterClrMapping/>
   </p:clrMapOvr>
-  <mc:AlternateContent xmlns:mc="http://schemas.openxmlformats.org/markup-compatibility/2006">
-    <mc:Choice xmlns:p14="http://schemas.microsoft.com/office/powerpoint/2010/main" Requires="p14">
-      <p:transition spd="med" p14:dur="700">
-        <p:fade thruBlk="1"/>
-      </p:transition>
-    </mc:Choice>
-    <mc:Fallback>
-      <p:transition spd="med">
-        <p:fade thruBlk="1"/>
-      </p:transition>
-    </mc:Fallback>
-  </mc:AlternateContent>
 </p:sld>
 </file>
 
 <file path=ppt/slides/slide20.xml><?xml version="1.0" encoding="utf-8"?>
-<p:sld xmlns:a="http://schemas.openxmlformats.org/drawingml/2006/main" xmlns:r="http://schemas.openxmlformats.org/officeDocument/2006/relationships" xmlns:p="http://schemas.openxmlformats.org/presentationml/2006/main">
+<p:sld xmlns:a="http://schemas.openxmlformats.org/drawingml/2006/main" xmlns:p="http://schemas.openxmlformats.org/presentationml/2006/main" xmlns:r="http://schemas.openxmlformats.org/officeDocument/2006/relationships">
   <p:cSld>
     <p:spTree>
       <p:nvGrpSpPr>
@@ -16835,14 +16825,7 @@
         <p:cNvGrpSpPr/>
         <p:nvPr/>
       </p:nvGrpSpPr>
-      <p:grpSpPr>
-        <a:xfrm>
-          <a:off x="0" y="0"/>
-          <a:ext cx="0" cy="0"/>
-          <a:chOff x="0" y="0"/>
-          <a:chExt cx="0" cy="0"/>
-        </a:xfrm>
-      </p:grpSpPr>
+      <p:grpSpPr/>
       <p:pic>
         <p:nvPicPr>
           <p:cNvPr id="2" name="Picture 1" descr="bg_mod.png"/>
@@ -16884,7 +16867,7 @@
           <a:noFill/>
         </p:spPr>
         <p:txBody>
-          <a:bodyPr wrap="square" lIns="0" tIns="0" rIns="0" bIns="0" anchor="t">
+          <a:bodyPr wrap="square" anchor="t" lIns="0" rIns="0" tIns="0" bIns="0">
             <a:spAutoFit/>
           </a:bodyPr>
           <a:lstStyle/>
@@ -16923,7 +16906,7 @@
           <a:noFill/>
         </p:spPr>
         <p:txBody>
-          <a:bodyPr wrap="square" lIns="0" tIns="0" rIns="0" bIns="0" anchor="t">
+          <a:bodyPr wrap="square" anchor="t" lIns="0" rIns="0" tIns="0" bIns="0">
             <a:spAutoFit/>
           </a:bodyPr>
           <a:lstStyle/>
@@ -16962,7 +16945,7 @@
           <a:noFill/>
         </p:spPr>
         <p:txBody>
-          <a:bodyPr wrap="square" lIns="0" tIns="0" rIns="0" bIns="0" anchor="t">
+          <a:bodyPr wrap="square" anchor="t" lIns="0" rIns="0" tIns="0" bIns="0">
             <a:spAutoFit/>
           </a:bodyPr>
           <a:lstStyle/>
@@ -17029,7 +17012,6 @@
           <a:lstStyle/>
           <a:p>
             <a:pPr algn="ctr"/>
-            <a:endParaRPr/>
           </a:p>
         </p:txBody>
       </p:sp>
@@ -17050,7 +17032,7 @@
           <a:noFill/>
         </p:spPr>
         <p:txBody>
-          <a:bodyPr wrap="square" lIns="0" tIns="0" rIns="0" bIns="0" anchor="t">
+          <a:bodyPr wrap="square" anchor="t" lIns="0" rIns="0" tIns="0" bIns="0">
             <a:spAutoFit/>
           </a:bodyPr>
           <a:lstStyle/>
@@ -17089,7 +17071,7 @@
           <a:noFill/>
         </p:spPr>
         <p:txBody>
-          <a:bodyPr wrap="square" lIns="0" tIns="0" rIns="0" bIns="0" anchor="t">
+          <a:bodyPr wrap="square" anchor="t" lIns="0" rIns="0" tIns="0" bIns="0">
             <a:spAutoFit/>
           </a:bodyPr>
           <a:lstStyle/>
@@ -17152,7 +17134,7 @@
           </a:fontRef>
         </p:style>
         <p:txBody>
-          <a:bodyPr wrap="square" lIns="54864" tIns="0" rIns="54864" bIns="0" rtlCol="0" anchor="ctr"/>
+          <a:bodyPr rtlCol="0" anchor="ctr" wrap="square" lIns="54864" rIns="54864" tIns="0" bIns="0"/>
           <a:lstStyle/>
           <a:p>
             <a:pPr algn="ctr"/>
@@ -17213,7 +17195,6 @@
           <a:lstStyle/>
           <a:p>
             <a:pPr algn="ctr"/>
-            <a:endParaRPr/>
           </a:p>
         </p:txBody>
       </p:sp>
@@ -17234,7 +17215,7 @@
           <a:noFill/>
         </p:spPr>
         <p:txBody>
-          <a:bodyPr wrap="square" lIns="0" tIns="0" rIns="0" bIns="0" anchor="t">
+          <a:bodyPr wrap="square" anchor="t" lIns="0" rIns="0" tIns="0" bIns="0">
             <a:spAutoFit/>
           </a:bodyPr>
           <a:lstStyle/>
@@ -17273,7 +17254,7 @@
           <a:noFill/>
         </p:spPr>
         <p:txBody>
-          <a:bodyPr wrap="square" lIns="0" tIns="0" rIns="0" bIns="0" anchor="t">
+          <a:bodyPr wrap="square" anchor="t" lIns="0" rIns="0" tIns="0" bIns="0">
             <a:spAutoFit/>
           </a:bodyPr>
           <a:lstStyle/>
@@ -17336,7 +17317,7 @@
           </a:fontRef>
         </p:style>
         <p:txBody>
-          <a:bodyPr wrap="square" lIns="54864" tIns="0" rIns="54864" bIns="0" rtlCol="0" anchor="ctr"/>
+          <a:bodyPr rtlCol="0" anchor="ctr" wrap="square" lIns="54864" rIns="54864" tIns="0" bIns="0"/>
           <a:lstStyle/>
           <a:p>
             <a:pPr algn="ctr"/>
@@ -17397,7 +17378,6 @@
           <a:lstStyle/>
           <a:p>
             <a:pPr algn="ctr"/>
-            <a:endParaRPr/>
           </a:p>
         </p:txBody>
       </p:sp>
@@ -17418,7 +17398,7 @@
           <a:noFill/>
         </p:spPr>
         <p:txBody>
-          <a:bodyPr wrap="square" lIns="0" tIns="0" rIns="0" bIns="0" anchor="t">
+          <a:bodyPr wrap="square" anchor="t" lIns="0" rIns="0" tIns="0" bIns="0">
             <a:spAutoFit/>
           </a:bodyPr>
           <a:lstStyle/>
@@ -17457,7 +17437,7 @@
           <a:noFill/>
         </p:spPr>
         <p:txBody>
-          <a:bodyPr wrap="square" lIns="0" tIns="0" rIns="0" bIns="0" anchor="t">
+          <a:bodyPr wrap="square" anchor="t" lIns="0" rIns="0" tIns="0" bIns="0">
             <a:spAutoFit/>
           </a:bodyPr>
           <a:lstStyle/>
@@ -17520,7 +17500,7 @@
           </a:fontRef>
         </p:style>
         <p:txBody>
-          <a:bodyPr wrap="square" lIns="54864" tIns="0" rIns="54864" bIns="0" rtlCol="0" anchor="ctr"/>
+          <a:bodyPr rtlCol="0" anchor="ctr" wrap="square" lIns="54864" rIns="54864" tIns="0" bIns="0"/>
           <a:lstStyle/>
           <a:p>
             <a:pPr algn="ctr"/>
@@ -17581,7 +17561,6 @@
           <a:lstStyle/>
           <a:p>
             <a:pPr algn="ctr"/>
-            <a:endParaRPr/>
           </a:p>
         </p:txBody>
       </p:sp>
@@ -17602,7 +17581,7 @@
           <a:noFill/>
         </p:spPr>
         <p:txBody>
-          <a:bodyPr wrap="square" lIns="0" tIns="0" rIns="0" bIns="0" anchor="t">
+          <a:bodyPr wrap="square" anchor="t" lIns="0" rIns="0" tIns="0" bIns="0">
             <a:spAutoFit/>
           </a:bodyPr>
           <a:lstStyle/>
@@ -17641,7 +17620,7 @@
           <a:noFill/>
         </p:spPr>
         <p:txBody>
-          <a:bodyPr wrap="square" lIns="0" tIns="0" rIns="0" bIns="0" anchor="t">
+          <a:bodyPr wrap="square" anchor="t" lIns="0" rIns="0" tIns="0" bIns="0">
             <a:spAutoFit/>
           </a:bodyPr>
           <a:lstStyle/>
@@ -17704,7 +17683,7 @@
           </a:fontRef>
         </p:style>
         <p:txBody>
-          <a:bodyPr wrap="square" lIns="54864" tIns="0" rIns="54864" bIns="0" rtlCol="0" anchor="ctr"/>
+          <a:bodyPr rtlCol="0" anchor="ctr" wrap="square" lIns="54864" rIns="54864" tIns="0" bIns="0"/>
           <a:lstStyle/>
           <a:p>
             <a:pPr algn="ctr"/>
@@ -17765,7 +17744,6 @@
           <a:lstStyle/>
           <a:p>
             <a:pPr algn="ctr"/>
-            <a:endParaRPr/>
           </a:p>
         </p:txBody>
       </p:sp>
@@ -17786,7 +17764,7 @@
           <a:noFill/>
         </p:spPr>
         <p:txBody>
-          <a:bodyPr wrap="square" lIns="0" tIns="0" rIns="0" bIns="0" anchor="t">
+          <a:bodyPr wrap="square" anchor="t" lIns="0" rIns="0" tIns="0" bIns="0">
             <a:spAutoFit/>
           </a:bodyPr>
           <a:lstStyle/>
@@ -17825,7 +17803,7 @@
           <a:noFill/>
         </p:spPr>
         <p:txBody>
-          <a:bodyPr wrap="square" lIns="0" tIns="0" rIns="0" bIns="0" anchor="t">
+          <a:bodyPr wrap="square" anchor="t" lIns="0" rIns="0" tIns="0" bIns="0">
             <a:spAutoFit/>
           </a:bodyPr>
           <a:lstStyle/>
@@ -17842,7 +17820,7 @@
                 </a:solidFill>
                 <a:latin typeface="Segoe UI"/>
               </a:rPr>
-              <a:t>Versioned /v1, 67 routes (64 under /v1), zod validation, stable error codes, idempotency keys</a:t>
+              <a:t>Versioned /v1, 68 routes (65 under /v1), zod validation, stable error codes, idempotency keys</a:t>
             </a:r>
           </a:p>
         </p:txBody>
@@ -17888,7 +17866,7 @@
           </a:fontRef>
         </p:style>
         <p:txBody>
-          <a:bodyPr wrap="square" lIns="54864" tIns="0" rIns="54864" bIns="0" rtlCol="0" anchor="ctr"/>
+          <a:bodyPr rtlCol="0" anchor="ctr" wrap="square" lIns="54864" rIns="54864" tIns="0" bIns="0"/>
           <a:lstStyle/>
           <a:p>
             <a:pPr algn="ctr"/>
@@ -17921,7 +17899,7 @@
           <a:noFill/>
         </p:spPr>
         <p:txBody>
-          <a:bodyPr wrap="square" lIns="0" tIns="0" rIns="0" bIns="0" anchor="t">
+          <a:bodyPr wrap="square" anchor="t" lIns="0" rIns="0" tIns="0" bIns="0">
             <a:spAutoFit/>
           </a:bodyPr>
           <a:lstStyle/>
@@ -17960,7 +17938,7 @@
           <a:noFill/>
         </p:spPr>
         <p:txBody>
-          <a:bodyPr wrap="square" lIns="0" tIns="0" rIns="0" bIns="0" anchor="t">
+          <a:bodyPr wrap="square" anchor="t" lIns="0" rIns="0" tIns="0" bIns="0">
             <a:spAutoFit/>
           </a:bodyPr>
           <a:lstStyle/>
@@ -17987,23 +17965,11 @@
   <p:clrMapOvr>
     <a:masterClrMapping/>
   </p:clrMapOvr>
-  <mc:AlternateContent xmlns:mc="http://schemas.openxmlformats.org/markup-compatibility/2006">
-    <mc:Choice xmlns:p14="http://schemas.microsoft.com/office/powerpoint/2010/main" Requires="p14">
-      <p:transition spd="med" p14:dur="700">
-        <p:fade thruBlk="1"/>
-      </p:transition>
-    </mc:Choice>
-    <mc:Fallback>
-      <p:transition spd="med">
-        <p:fade thruBlk="1"/>
-      </p:transition>
-    </mc:Fallback>
-  </mc:AlternateContent>
 </p:sld>
 </file>
 
 <file path=ppt/slides/slide21.xml><?xml version="1.0" encoding="utf-8"?>
-<p:sld xmlns:a="http://schemas.openxmlformats.org/drawingml/2006/main" xmlns:r="http://schemas.openxmlformats.org/officeDocument/2006/relationships" xmlns:p="http://schemas.openxmlformats.org/presentationml/2006/main">
+<p:sld xmlns:a="http://schemas.openxmlformats.org/drawingml/2006/main" xmlns:p="http://schemas.openxmlformats.org/presentationml/2006/main" xmlns:r="http://schemas.openxmlformats.org/officeDocument/2006/relationships">
   <p:cSld>
     <p:spTree>
       <p:nvGrpSpPr>
@@ -18011,14 +17977,7 @@
         <p:cNvGrpSpPr/>
         <p:nvPr/>
       </p:nvGrpSpPr>
-      <p:grpSpPr>
-        <a:xfrm>
-          <a:off x="0" y="0"/>
-          <a:ext cx="0" cy="0"/>
-          <a:chOff x="0" y="0"/>
-          <a:chExt cx="0" cy="0"/>
-        </a:xfrm>
-      </p:grpSpPr>
+      <p:grpSpPr/>
       <p:pic>
         <p:nvPicPr>
           <p:cNvPr id="2" name="Picture 1" descr="bg_mod.png"/>
@@ -18060,7 +18019,7 @@
           <a:noFill/>
         </p:spPr>
         <p:txBody>
-          <a:bodyPr wrap="square" lIns="0" tIns="0" rIns="0" bIns="0" anchor="t">
+          <a:bodyPr wrap="square" anchor="t" lIns="0" rIns="0" tIns="0" bIns="0">
             <a:spAutoFit/>
           </a:bodyPr>
           <a:lstStyle/>
@@ -18099,7 +18058,7 @@
           <a:noFill/>
         </p:spPr>
         <p:txBody>
-          <a:bodyPr wrap="square" lIns="0" tIns="0" rIns="0" bIns="0" anchor="t">
+          <a:bodyPr wrap="square" anchor="t" lIns="0" rIns="0" tIns="0" bIns="0">
             <a:spAutoFit/>
           </a:bodyPr>
           <a:lstStyle/>
@@ -18166,7 +18125,6 @@
           <a:lstStyle/>
           <a:p>
             <a:pPr algn="ctr"/>
-            <a:endParaRPr/>
           </a:p>
         </p:txBody>
       </p:sp>
@@ -18187,7 +18145,7 @@
           <a:noFill/>
         </p:spPr>
         <p:txBody>
-          <a:bodyPr wrap="square" lIns="0" tIns="0" rIns="0" bIns="0" anchor="t">
+          <a:bodyPr wrap="square" anchor="t" lIns="0" rIns="0" tIns="0" bIns="0">
             <a:spAutoFit/>
           </a:bodyPr>
           <a:lstStyle/>
@@ -18226,7 +18184,7 @@
           <a:noFill/>
         </p:spPr>
         <p:txBody>
-          <a:bodyPr wrap="square" lIns="0" tIns="0" rIns="0" bIns="0" anchor="t">
+          <a:bodyPr wrap="square" anchor="t" lIns="0" rIns="0" tIns="0" bIns="0">
             <a:spAutoFit/>
           </a:bodyPr>
           <a:lstStyle/>
@@ -18289,7 +18247,7 @@
           </a:fontRef>
         </p:style>
         <p:txBody>
-          <a:bodyPr wrap="square" lIns="54864" tIns="0" rIns="54864" bIns="0" rtlCol="0" anchor="ctr"/>
+          <a:bodyPr rtlCol="0" anchor="ctr" wrap="square" lIns="54864" rIns="54864" tIns="0" bIns="0"/>
           <a:lstStyle/>
           <a:p>
             <a:pPr algn="ctr"/>
@@ -18350,7 +18308,6 @@
           <a:lstStyle/>
           <a:p>
             <a:pPr algn="ctr"/>
-            <a:endParaRPr/>
           </a:p>
         </p:txBody>
       </p:sp>
@@ -18371,7 +18328,7 @@
           <a:noFill/>
         </p:spPr>
         <p:txBody>
-          <a:bodyPr wrap="square" lIns="0" tIns="0" rIns="0" bIns="0" anchor="t">
+          <a:bodyPr wrap="square" anchor="t" lIns="0" rIns="0" tIns="0" bIns="0">
             <a:spAutoFit/>
           </a:bodyPr>
           <a:lstStyle/>
@@ -18410,7 +18367,7 @@
           <a:noFill/>
         </p:spPr>
         <p:txBody>
-          <a:bodyPr wrap="square" lIns="0" tIns="0" rIns="0" bIns="0" anchor="t">
+          <a:bodyPr wrap="square" anchor="t" lIns="0" rIns="0" tIns="0" bIns="0">
             <a:spAutoFit/>
           </a:bodyPr>
           <a:lstStyle/>
@@ -18473,7 +18430,7 @@
           </a:fontRef>
         </p:style>
         <p:txBody>
-          <a:bodyPr wrap="square" lIns="54864" tIns="0" rIns="54864" bIns="0" rtlCol="0" anchor="ctr"/>
+          <a:bodyPr rtlCol="0" anchor="ctr" wrap="square" lIns="54864" rIns="54864" tIns="0" bIns="0"/>
           <a:lstStyle/>
           <a:p>
             <a:pPr algn="ctr"/>
@@ -18534,7 +18491,6 @@
           <a:lstStyle/>
           <a:p>
             <a:pPr algn="ctr"/>
-            <a:endParaRPr/>
           </a:p>
         </p:txBody>
       </p:sp>
@@ -18555,7 +18511,7 @@
           <a:noFill/>
         </p:spPr>
         <p:txBody>
-          <a:bodyPr wrap="square" lIns="0" tIns="0" rIns="0" bIns="0" anchor="t">
+          <a:bodyPr wrap="square" anchor="t" lIns="0" rIns="0" tIns="0" bIns="0">
             <a:spAutoFit/>
           </a:bodyPr>
           <a:lstStyle/>
@@ -18594,7 +18550,7 @@
           <a:noFill/>
         </p:spPr>
         <p:txBody>
-          <a:bodyPr wrap="square" lIns="0" tIns="0" rIns="0" bIns="0" anchor="t">
+          <a:bodyPr wrap="square" anchor="t" lIns="0" rIns="0" tIns="0" bIns="0">
             <a:spAutoFit/>
           </a:bodyPr>
           <a:lstStyle/>
@@ -18657,7 +18613,7 @@
           </a:fontRef>
         </p:style>
         <p:txBody>
-          <a:bodyPr wrap="square" lIns="54864" tIns="0" rIns="54864" bIns="0" rtlCol="0" anchor="ctr"/>
+          <a:bodyPr rtlCol="0" anchor="ctr" wrap="square" lIns="54864" rIns="54864" tIns="0" bIns="0"/>
           <a:lstStyle/>
           <a:p>
             <a:pPr algn="ctr"/>
@@ -18718,7 +18674,6 @@
           <a:lstStyle/>
           <a:p>
             <a:pPr algn="ctr"/>
-            <a:endParaRPr/>
           </a:p>
         </p:txBody>
       </p:sp>
@@ -18739,7 +18694,7 @@
           <a:noFill/>
         </p:spPr>
         <p:txBody>
-          <a:bodyPr wrap="square" lIns="0" tIns="0" rIns="0" bIns="0" anchor="t">
+          <a:bodyPr wrap="square" anchor="t" lIns="0" rIns="0" tIns="0" bIns="0">
             <a:spAutoFit/>
           </a:bodyPr>
           <a:lstStyle/>
@@ -18778,7 +18733,7 @@
           <a:noFill/>
         </p:spPr>
         <p:txBody>
-          <a:bodyPr wrap="square" lIns="0" tIns="0" rIns="0" bIns="0" anchor="t">
+          <a:bodyPr wrap="square" anchor="t" lIns="0" rIns="0" tIns="0" bIns="0">
             <a:spAutoFit/>
           </a:bodyPr>
           <a:lstStyle/>
@@ -18841,7 +18796,7 @@
           </a:fontRef>
         </p:style>
         <p:txBody>
-          <a:bodyPr wrap="square" lIns="54864" tIns="0" rIns="54864" bIns="0" rtlCol="0" anchor="ctr"/>
+          <a:bodyPr rtlCol="0" anchor="ctr" wrap="square" lIns="54864" rIns="54864" tIns="0" bIns="0"/>
           <a:lstStyle/>
           <a:p>
             <a:pPr algn="ctr"/>
@@ -18902,7 +18857,6 @@
           <a:lstStyle/>
           <a:p>
             <a:pPr algn="ctr"/>
-            <a:endParaRPr/>
           </a:p>
         </p:txBody>
       </p:sp>
@@ -18923,7 +18877,7 @@
           <a:noFill/>
         </p:spPr>
         <p:txBody>
-          <a:bodyPr wrap="square" lIns="0" tIns="0" rIns="0" bIns="0" anchor="t">
+          <a:bodyPr wrap="square" anchor="t" lIns="0" rIns="0" tIns="0" bIns="0">
             <a:spAutoFit/>
           </a:bodyPr>
           <a:lstStyle/>
@@ -18962,7 +18916,7 @@
           <a:noFill/>
         </p:spPr>
         <p:txBody>
-          <a:bodyPr wrap="square" lIns="0" tIns="0" rIns="0" bIns="0" anchor="t">
+          <a:bodyPr wrap="square" anchor="t" lIns="0" rIns="0" tIns="0" bIns="0">
             <a:spAutoFit/>
           </a:bodyPr>
           <a:lstStyle/>
@@ -19025,7 +18979,7 @@
           </a:fontRef>
         </p:style>
         <p:txBody>
-          <a:bodyPr wrap="square" lIns="54864" tIns="0" rIns="54864" bIns="0" rtlCol="0" anchor="ctr"/>
+          <a:bodyPr rtlCol="0" anchor="ctr" wrap="square" lIns="54864" rIns="54864" tIns="0" bIns="0"/>
           <a:lstStyle/>
           <a:p>
             <a:pPr algn="ctr"/>
@@ -19086,7 +19040,6 @@
           <a:lstStyle/>
           <a:p>
             <a:pPr algn="ctr"/>
-            <a:endParaRPr/>
           </a:p>
         </p:txBody>
       </p:sp>
@@ -19107,7 +19060,7 @@
           <a:noFill/>
         </p:spPr>
         <p:txBody>
-          <a:bodyPr wrap="square" lIns="0" tIns="0" rIns="0" bIns="0" anchor="t">
+          <a:bodyPr wrap="square" anchor="t" lIns="0" rIns="0" tIns="0" bIns="0">
             <a:spAutoFit/>
           </a:bodyPr>
           <a:lstStyle/>
@@ -19146,7 +19099,7 @@
           <a:noFill/>
         </p:spPr>
         <p:txBody>
-          <a:bodyPr wrap="square" lIns="0" tIns="0" rIns="0" bIns="0" anchor="t">
+          <a:bodyPr wrap="square" anchor="t" lIns="0" rIns="0" tIns="0" bIns="0">
             <a:spAutoFit/>
           </a:bodyPr>
           <a:lstStyle/>
@@ -19209,7 +19162,7 @@
           </a:fontRef>
         </p:style>
         <p:txBody>
-          <a:bodyPr wrap="square" lIns="54864" tIns="0" rIns="54864" bIns="0" rtlCol="0" anchor="ctr"/>
+          <a:bodyPr rtlCol="0" anchor="ctr" wrap="square" lIns="54864" rIns="54864" tIns="0" bIns="0"/>
           <a:lstStyle/>
           <a:p>
             <a:pPr algn="ctr"/>
@@ -19242,7 +19195,7 @@
           <a:noFill/>
         </p:spPr>
         <p:txBody>
-          <a:bodyPr wrap="square" lIns="0" tIns="0" rIns="0" bIns="0" anchor="t">
+          <a:bodyPr wrap="square" anchor="t" lIns="0" rIns="0" tIns="0" bIns="0">
             <a:spAutoFit/>
           </a:bodyPr>
           <a:lstStyle/>
@@ -19281,7 +19234,7 @@
           <a:noFill/>
         </p:spPr>
         <p:txBody>
-          <a:bodyPr wrap="square" lIns="0" tIns="0" rIns="0" bIns="0" anchor="t">
+          <a:bodyPr wrap="square" anchor="t" lIns="0" rIns="0" tIns="0" bIns="0">
             <a:spAutoFit/>
           </a:bodyPr>
           <a:lstStyle/>
@@ -19308,23 +19261,11 @@
   <p:clrMapOvr>
     <a:masterClrMapping/>
   </p:clrMapOvr>
-  <mc:AlternateContent xmlns:mc="http://schemas.openxmlformats.org/markup-compatibility/2006">
-    <mc:Choice xmlns:p14="http://schemas.microsoft.com/office/powerpoint/2010/main" Requires="p14">
-      <p:transition spd="med" p14:dur="700">
-        <p:fade thruBlk="1"/>
-      </p:transition>
-    </mc:Choice>
-    <mc:Fallback>
-      <p:transition spd="med">
-        <p:fade thruBlk="1"/>
-      </p:transition>
-    </mc:Fallback>
-  </mc:AlternateContent>
 </p:sld>
 </file>
 
 <file path=ppt/slides/slide22.xml><?xml version="1.0" encoding="utf-8"?>
-<p:sld xmlns:a="http://schemas.openxmlformats.org/drawingml/2006/main" xmlns:r="http://schemas.openxmlformats.org/officeDocument/2006/relationships" xmlns:p="http://schemas.openxmlformats.org/presentationml/2006/main">
+<p:sld xmlns:a="http://schemas.openxmlformats.org/drawingml/2006/main" xmlns:p="http://schemas.openxmlformats.org/presentationml/2006/main" xmlns:r="http://schemas.openxmlformats.org/officeDocument/2006/relationships">
   <p:cSld>
     <p:spTree>
       <p:nvGrpSpPr>
@@ -19332,14 +19273,7 @@
         <p:cNvGrpSpPr/>
         <p:nvPr/>
       </p:nvGrpSpPr>
-      <p:grpSpPr>
-        <a:xfrm>
-          <a:off x="0" y="0"/>
-          <a:ext cx="0" cy="0"/>
-          <a:chOff x="0" y="0"/>
-          <a:chExt cx="0" cy="0"/>
-        </a:xfrm>
-      </p:grpSpPr>
+      <p:grpSpPr/>
       <p:pic>
         <p:nvPicPr>
           <p:cNvPr id="2" name="Picture 1" descr="bg_mod.png"/>
@@ -19381,7 +19315,7 @@
           <a:noFill/>
         </p:spPr>
         <p:txBody>
-          <a:bodyPr wrap="square" lIns="0" tIns="0" rIns="0" bIns="0" anchor="t">
+          <a:bodyPr wrap="square" anchor="t" lIns="0" rIns="0" tIns="0" bIns="0">
             <a:spAutoFit/>
           </a:bodyPr>
           <a:lstStyle/>
@@ -19420,7 +19354,7 @@
           <a:noFill/>
         </p:spPr>
         <p:txBody>
-          <a:bodyPr wrap="square" lIns="0" tIns="0" rIns="0" bIns="0" anchor="t">
+          <a:bodyPr wrap="square" anchor="t" lIns="0" rIns="0" tIns="0" bIns="0">
             <a:spAutoFit/>
           </a:bodyPr>
           <a:lstStyle/>
@@ -19459,7 +19393,7 @@
           <a:noFill/>
         </p:spPr>
         <p:txBody>
-          <a:bodyPr wrap="square" lIns="0" tIns="0" rIns="0" bIns="0" anchor="t">
+          <a:bodyPr wrap="square" anchor="t" lIns="0" rIns="0" tIns="0" bIns="0">
             <a:spAutoFit/>
           </a:bodyPr>
           <a:lstStyle/>
@@ -19526,7 +19460,6 @@
           <a:lstStyle/>
           <a:p>
             <a:pPr algn="ctr"/>
-            <a:endParaRPr/>
           </a:p>
         </p:txBody>
       </p:sp>
@@ -19547,7 +19480,7 @@
           <a:noFill/>
         </p:spPr>
         <p:txBody>
-          <a:bodyPr wrap="square" lIns="0" tIns="0" rIns="0" bIns="0" anchor="t">
+          <a:bodyPr wrap="square" anchor="t" lIns="0" rIns="0" tIns="0" bIns="0">
             <a:spAutoFit/>
           </a:bodyPr>
           <a:lstStyle/>
@@ -19586,7 +19519,7 @@
           <a:noFill/>
         </p:spPr>
         <p:txBody>
-          <a:bodyPr wrap="square" lIns="0" tIns="0" rIns="0" bIns="0" anchor="t">
+          <a:bodyPr wrap="square" anchor="t" lIns="0" rIns="0" tIns="0" bIns="0">
             <a:spAutoFit/>
           </a:bodyPr>
           <a:lstStyle/>
@@ -19649,7 +19582,7 @@
           </a:fontRef>
         </p:style>
         <p:txBody>
-          <a:bodyPr wrap="square" lIns="54864" tIns="0" rIns="54864" bIns="0" rtlCol="0" anchor="ctr"/>
+          <a:bodyPr rtlCol="0" anchor="ctr" wrap="square" lIns="54864" rIns="54864" tIns="0" bIns="0"/>
           <a:lstStyle/>
           <a:p>
             <a:pPr algn="ctr"/>
@@ -19710,7 +19643,6 @@
           <a:lstStyle/>
           <a:p>
             <a:pPr algn="ctr"/>
-            <a:endParaRPr/>
           </a:p>
         </p:txBody>
       </p:sp>
@@ -19731,7 +19663,7 @@
           <a:noFill/>
         </p:spPr>
         <p:txBody>
-          <a:bodyPr wrap="square" lIns="0" tIns="0" rIns="0" bIns="0" anchor="t">
+          <a:bodyPr wrap="square" anchor="t" lIns="0" rIns="0" tIns="0" bIns="0">
             <a:spAutoFit/>
           </a:bodyPr>
           <a:lstStyle/>
@@ -19770,7 +19702,7 @@
           <a:noFill/>
         </p:spPr>
         <p:txBody>
-          <a:bodyPr wrap="square" lIns="0" tIns="0" rIns="0" bIns="0" anchor="t">
+          <a:bodyPr wrap="square" anchor="t" lIns="0" rIns="0" tIns="0" bIns="0">
             <a:spAutoFit/>
           </a:bodyPr>
           <a:lstStyle/>
@@ -19833,7 +19765,7 @@
           </a:fontRef>
         </p:style>
         <p:txBody>
-          <a:bodyPr wrap="square" lIns="54864" tIns="0" rIns="54864" bIns="0" rtlCol="0" anchor="ctr"/>
+          <a:bodyPr rtlCol="0" anchor="ctr" wrap="square" lIns="54864" rIns="54864" tIns="0" bIns="0"/>
           <a:lstStyle/>
           <a:p>
             <a:pPr algn="ctr"/>
@@ -19894,7 +19826,6 @@
           <a:lstStyle/>
           <a:p>
             <a:pPr algn="ctr"/>
-            <a:endParaRPr/>
           </a:p>
         </p:txBody>
       </p:sp>
@@ -19915,7 +19846,7 @@
           <a:noFill/>
         </p:spPr>
         <p:txBody>
-          <a:bodyPr wrap="square" lIns="0" tIns="0" rIns="0" bIns="0" anchor="t">
+          <a:bodyPr wrap="square" anchor="t" lIns="0" rIns="0" tIns="0" bIns="0">
             <a:spAutoFit/>
           </a:bodyPr>
           <a:lstStyle/>
@@ -19954,7 +19885,7 @@
           <a:noFill/>
         </p:spPr>
         <p:txBody>
-          <a:bodyPr wrap="square" lIns="0" tIns="0" rIns="0" bIns="0" anchor="t">
+          <a:bodyPr wrap="square" anchor="t" lIns="0" rIns="0" tIns="0" bIns="0">
             <a:spAutoFit/>
           </a:bodyPr>
           <a:lstStyle/>
@@ -20017,7 +19948,7 @@
           </a:fontRef>
         </p:style>
         <p:txBody>
-          <a:bodyPr wrap="square" lIns="54864" tIns="0" rIns="54864" bIns="0" rtlCol="0" anchor="ctr"/>
+          <a:bodyPr rtlCol="0" anchor="ctr" wrap="square" lIns="54864" rIns="54864" tIns="0" bIns="0"/>
           <a:lstStyle/>
           <a:p>
             <a:pPr algn="ctr"/>
@@ -20078,7 +20009,6 @@
           <a:lstStyle/>
           <a:p>
             <a:pPr algn="ctr"/>
-            <a:endParaRPr/>
           </a:p>
         </p:txBody>
       </p:sp>
@@ -20099,7 +20029,7 @@
           <a:noFill/>
         </p:spPr>
         <p:txBody>
-          <a:bodyPr wrap="square" lIns="0" tIns="0" rIns="0" bIns="0" anchor="t">
+          <a:bodyPr wrap="square" anchor="t" lIns="0" rIns="0" tIns="0" bIns="0">
             <a:spAutoFit/>
           </a:bodyPr>
           <a:lstStyle/>
@@ -20138,7 +20068,7 @@
           <a:noFill/>
         </p:spPr>
         <p:txBody>
-          <a:bodyPr wrap="square" lIns="0" tIns="0" rIns="0" bIns="0" anchor="t">
+          <a:bodyPr wrap="square" anchor="t" lIns="0" rIns="0" tIns="0" bIns="0">
             <a:spAutoFit/>
           </a:bodyPr>
           <a:lstStyle/>
@@ -20201,7 +20131,7 @@
           </a:fontRef>
         </p:style>
         <p:txBody>
-          <a:bodyPr wrap="square" lIns="54864" tIns="0" rIns="54864" bIns="0" rtlCol="0" anchor="ctr"/>
+          <a:bodyPr rtlCol="0" anchor="ctr" wrap="square" lIns="54864" rIns="54864" tIns="0" bIns="0"/>
           <a:lstStyle/>
           <a:p>
             <a:pPr algn="ctr"/>
@@ -20262,7 +20192,6 @@
           <a:lstStyle/>
           <a:p>
             <a:pPr algn="ctr"/>
-            <a:endParaRPr/>
           </a:p>
         </p:txBody>
       </p:sp>
@@ -20283,7 +20212,7 @@
           <a:noFill/>
         </p:spPr>
         <p:txBody>
-          <a:bodyPr wrap="square" lIns="0" tIns="0" rIns="0" bIns="0" anchor="t">
+          <a:bodyPr wrap="square" anchor="t" lIns="0" rIns="0" tIns="0" bIns="0">
             <a:spAutoFit/>
           </a:bodyPr>
           <a:lstStyle/>
@@ -20322,7 +20251,7 @@
           <a:noFill/>
         </p:spPr>
         <p:txBody>
-          <a:bodyPr wrap="square" lIns="0" tIns="0" rIns="0" bIns="0" anchor="t">
+          <a:bodyPr wrap="square" anchor="t" lIns="0" rIns="0" tIns="0" bIns="0">
             <a:spAutoFit/>
           </a:bodyPr>
           <a:lstStyle/>
@@ -20385,7 +20314,7 @@
           </a:fontRef>
         </p:style>
         <p:txBody>
-          <a:bodyPr wrap="square" lIns="54864" tIns="0" rIns="54864" bIns="0" rtlCol="0" anchor="ctr"/>
+          <a:bodyPr rtlCol="0" anchor="ctr" wrap="square" lIns="54864" rIns="54864" tIns="0" bIns="0"/>
           <a:lstStyle/>
           <a:p>
             <a:pPr algn="ctr"/>
@@ -20446,7 +20375,6 @@
           <a:lstStyle/>
           <a:p>
             <a:pPr algn="ctr"/>
-            <a:endParaRPr/>
           </a:p>
         </p:txBody>
       </p:sp>
@@ -20467,7 +20395,7 @@
           <a:noFill/>
         </p:spPr>
         <p:txBody>
-          <a:bodyPr wrap="square" lIns="0" tIns="0" rIns="0" bIns="0" anchor="t">
+          <a:bodyPr wrap="square" anchor="t" lIns="0" rIns="0" tIns="0" bIns="0">
             <a:spAutoFit/>
           </a:bodyPr>
           <a:lstStyle/>
@@ -20506,7 +20434,7 @@
           <a:noFill/>
         </p:spPr>
         <p:txBody>
-          <a:bodyPr wrap="square" lIns="0" tIns="0" rIns="0" bIns="0" anchor="t">
+          <a:bodyPr wrap="square" anchor="t" lIns="0" rIns="0" tIns="0" bIns="0">
             <a:spAutoFit/>
           </a:bodyPr>
           <a:lstStyle/>
@@ -20569,7 +20497,7 @@
           </a:fontRef>
         </p:style>
         <p:txBody>
-          <a:bodyPr wrap="square" lIns="54864" tIns="0" rIns="54864" bIns="0" rtlCol="0" anchor="ctr"/>
+          <a:bodyPr rtlCol="0" anchor="ctr" wrap="square" lIns="54864" rIns="54864" tIns="0" bIns="0"/>
           <a:lstStyle/>
           <a:p>
             <a:pPr algn="ctr"/>
@@ -20630,7 +20558,6 @@
           <a:lstStyle/>
           <a:p>
             <a:pPr algn="ctr"/>
-            <a:endParaRPr/>
           </a:p>
         </p:txBody>
       </p:sp>
@@ -20651,7 +20578,7 @@
           <a:noFill/>
         </p:spPr>
         <p:txBody>
-          <a:bodyPr wrap="square" lIns="0" tIns="0" rIns="0" bIns="0" anchor="t">
+          <a:bodyPr wrap="square" anchor="t" lIns="0" rIns="0" tIns="0" bIns="0">
             <a:spAutoFit/>
           </a:bodyPr>
           <a:lstStyle/>
@@ -20690,7 +20617,7 @@
           <a:noFill/>
         </p:spPr>
         <p:txBody>
-          <a:bodyPr wrap="square" lIns="0" tIns="0" rIns="0" bIns="0" anchor="t">
+          <a:bodyPr wrap="square" anchor="t" lIns="0" rIns="0" tIns="0" bIns="0">
             <a:spAutoFit/>
           </a:bodyPr>
           <a:lstStyle/>
@@ -20753,7 +20680,7 @@
           </a:fontRef>
         </p:style>
         <p:txBody>
-          <a:bodyPr wrap="square" lIns="54864" tIns="0" rIns="54864" bIns="0" rtlCol="0" anchor="ctr"/>
+          <a:bodyPr rtlCol="0" anchor="ctr" wrap="square" lIns="54864" rIns="54864" tIns="0" bIns="0"/>
           <a:lstStyle/>
           <a:p>
             <a:pPr algn="ctr"/>
@@ -20814,7 +20741,6 @@
           <a:lstStyle/>
           <a:p>
             <a:pPr algn="ctr"/>
-            <a:endParaRPr/>
           </a:p>
         </p:txBody>
       </p:sp>
@@ -20835,7 +20761,7 @@
           <a:noFill/>
         </p:spPr>
         <p:txBody>
-          <a:bodyPr wrap="square" lIns="0" tIns="0" rIns="0" bIns="0" anchor="t">
+          <a:bodyPr wrap="square" anchor="t" lIns="0" rIns="0" tIns="0" bIns="0">
             <a:spAutoFit/>
           </a:bodyPr>
           <a:lstStyle/>
@@ -20874,7 +20800,7 @@
           <a:noFill/>
         </p:spPr>
         <p:txBody>
-          <a:bodyPr wrap="square" lIns="0" tIns="0" rIns="0" bIns="0" anchor="t">
+          <a:bodyPr wrap="square" anchor="t" lIns="0" rIns="0" tIns="0" bIns="0">
             <a:spAutoFit/>
           </a:bodyPr>
           <a:lstStyle/>
@@ -20937,7 +20863,7 @@
           </a:fontRef>
         </p:style>
         <p:txBody>
-          <a:bodyPr wrap="square" lIns="54864" tIns="0" rIns="54864" bIns="0" rtlCol="0" anchor="ctr"/>
+          <a:bodyPr rtlCol="0" anchor="ctr" wrap="square" lIns="54864" rIns="54864" tIns="0" bIns="0"/>
           <a:lstStyle/>
           <a:p>
             <a:pPr algn="ctr"/>
@@ -20998,7 +20924,6 @@
           <a:lstStyle/>
           <a:p>
             <a:pPr algn="ctr"/>
-            <a:endParaRPr/>
           </a:p>
         </p:txBody>
       </p:sp>
@@ -21019,7 +20944,7 @@
           <a:noFill/>
         </p:spPr>
         <p:txBody>
-          <a:bodyPr wrap="square" lIns="0" tIns="0" rIns="0" bIns="0" anchor="t">
+          <a:bodyPr wrap="square" anchor="t" lIns="0" rIns="0" tIns="0" bIns="0">
             <a:spAutoFit/>
           </a:bodyPr>
           <a:lstStyle/>
@@ -21074,7 +20999,7 @@
           <a:noFill/>
         </p:spPr>
         <p:txBody>
-          <a:bodyPr wrap="square" lIns="0" tIns="0" rIns="0" bIns="0" anchor="t">
+          <a:bodyPr wrap="square" anchor="t" lIns="0" rIns="0" tIns="0" bIns="0">
             <a:spAutoFit/>
           </a:bodyPr>
           <a:lstStyle/>
@@ -21113,7 +21038,7 @@
           <a:noFill/>
         </p:spPr>
         <p:txBody>
-          <a:bodyPr wrap="square" lIns="0" tIns="0" rIns="0" bIns="0" anchor="t">
+          <a:bodyPr wrap="square" anchor="t" lIns="0" rIns="0" tIns="0" bIns="0">
             <a:spAutoFit/>
           </a:bodyPr>
           <a:lstStyle/>
@@ -21140,23 +21065,11 @@
   <p:clrMapOvr>
     <a:masterClrMapping/>
   </p:clrMapOvr>
-  <mc:AlternateContent xmlns:mc="http://schemas.openxmlformats.org/markup-compatibility/2006">
-    <mc:Choice xmlns:p14="http://schemas.microsoft.com/office/powerpoint/2010/main" Requires="p14">
-      <p:transition spd="med" p14:dur="700">
-        <p:fade thruBlk="1"/>
-      </p:transition>
-    </mc:Choice>
-    <mc:Fallback>
-      <p:transition spd="med">
-        <p:fade thruBlk="1"/>
-      </p:transition>
-    </mc:Fallback>
-  </mc:AlternateContent>
 </p:sld>
 </file>
 
 <file path=ppt/slides/slide23.xml><?xml version="1.0" encoding="utf-8"?>
-<p:sld xmlns:a="http://schemas.openxmlformats.org/drawingml/2006/main" xmlns:r="http://schemas.openxmlformats.org/officeDocument/2006/relationships" xmlns:p="http://schemas.openxmlformats.org/presentationml/2006/main">
+<p:sld xmlns:a="http://schemas.openxmlformats.org/drawingml/2006/main" xmlns:p="http://schemas.openxmlformats.org/presentationml/2006/main" xmlns:r="http://schemas.openxmlformats.org/officeDocument/2006/relationships">
   <p:cSld>
     <p:spTree>
       <p:nvGrpSpPr>
@@ -21164,14 +21077,7 @@
         <p:cNvGrpSpPr/>
         <p:nvPr/>
       </p:nvGrpSpPr>
-      <p:grpSpPr>
-        <a:xfrm>
-          <a:off x="0" y="0"/>
-          <a:ext cx="0" cy="0"/>
-          <a:chOff x="0" y="0"/>
-          <a:chExt cx="0" cy="0"/>
-        </a:xfrm>
-      </p:grpSpPr>
+      <p:grpSpPr/>
       <p:pic>
         <p:nvPicPr>
           <p:cNvPr id="2" name="Picture 1" descr="bg_mod.png"/>
@@ -21213,7 +21119,7 @@
           <a:noFill/>
         </p:spPr>
         <p:txBody>
-          <a:bodyPr wrap="square" lIns="0" tIns="0" rIns="0" bIns="0" anchor="t">
+          <a:bodyPr wrap="square" anchor="t" lIns="0" rIns="0" tIns="0" bIns="0">
             <a:spAutoFit/>
           </a:bodyPr>
           <a:lstStyle/>
@@ -21252,7 +21158,7 @@
           <a:noFill/>
         </p:spPr>
         <p:txBody>
-          <a:bodyPr wrap="square" lIns="0" tIns="0" rIns="0" bIns="0" anchor="t">
+          <a:bodyPr wrap="square" anchor="t" lIns="0" rIns="0" tIns="0" bIns="0">
             <a:spAutoFit/>
           </a:bodyPr>
           <a:lstStyle/>
@@ -21319,7 +21225,6 @@
           <a:lstStyle/>
           <a:p>
             <a:pPr algn="ctr"/>
-            <a:endParaRPr/>
           </a:p>
         </p:txBody>
       </p:sp>
@@ -21340,7 +21245,7 @@
           <a:noFill/>
         </p:spPr>
         <p:txBody>
-          <a:bodyPr wrap="square" lIns="0" tIns="0" rIns="0" bIns="0" anchor="t">
+          <a:bodyPr wrap="square" anchor="t" lIns="0" rIns="0" tIns="0" bIns="0">
             <a:spAutoFit/>
           </a:bodyPr>
           <a:lstStyle/>
@@ -21379,7 +21284,7 @@
           <a:noFill/>
         </p:spPr>
         <p:txBody>
-          <a:bodyPr wrap="square" lIns="0" tIns="0" rIns="0" bIns="0" anchor="t">
+          <a:bodyPr wrap="square" anchor="t" lIns="0" rIns="0" tIns="0" bIns="0">
             <a:spAutoFit/>
           </a:bodyPr>
           <a:lstStyle/>
@@ -21418,7 +21323,7 @@
           <a:noFill/>
         </p:spPr>
         <p:txBody>
-          <a:bodyPr wrap="square" lIns="0" tIns="0" rIns="0" bIns="0" anchor="t">
+          <a:bodyPr wrap="square" anchor="t" lIns="0" rIns="0" tIns="0" bIns="0">
             <a:spAutoFit/>
           </a:bodyPr>
           <a:lstStyle/>
@@ -21457,7 +21362,7 @@
           <a:noFill/>
         </p:spPr>
         <p:txBody>
-          <a:bodyPr wrap="square" lIns="0" tIns="0" rIns="0" bIns="0" anchor="t">
+          <a:bodyPr wrap="square" anchor="t" lIns="0" rIns="0" tIns="0" bIns="0">
             <a:spAutoFit/>
           </a:bodyPr>
           <a:lstStyle/>
@@ -21496,7 +21401,7 @@
           <a:noFill/>
         </p:spPr>
         <p:txBody>
-          <a:bodyPr wrap="square" lIns="0" tIns="0" rIns="0" bIns="0" anchor="t">
+          <a:bodyPr wrap="square" anchor="t" lIns="0" rIns="0" tIns="0" bIns="0">
             <a:spAutoFit/>
           </a:bodyPr>
           <a:lstStyle/>
@@ -21535,7 +21440,7 @@
           <a:noFill/>
         </p:spPr>
         <p:txBody>
-          <a:bodyPr wrap="square" lIns="0" tIns="0" rIns="0" bIns="0" anchor="t">
+          <a:bodyPr wrap="square" anchor="t" lIns="0" rIns="0" tIns="0" bIns="0">
             <a:spAutoFit/>
           </a:bodyPr>
           <a:lstStyle/>
@@ -21602,7 +21507,6 @@
           <a:lstStyle/>
           <a:p>
             <a:pPr algn="ctr"/>
-            <a:endParaRPr/>
           </a:p>
         </p:txBody>
       </p:sp>
@@ -21623,7 +21527,7 @@
           <a:noFill/>
         </p:spPr>
         <p:txBody>
-          <a:bodyPr wrap="square" lIns="0" tIns="0" rIns="0" bIns="0" anchor="t">
+          <a:bodyPr wrap="square" anchor="t" lIns="0" rIns="0" tIns="0" bIns="0">
             <a:spAutoFit/>
           </a:bodyPr>
           <a:lstStyle/>
@@ -21662,7 +21566,7 @@
           <a:noFill/>
         </p:spPr>
         <p:txBody>
-          <a:bodyPr wrap="square" lIns="0" tIns="0" rIns="0" bIns="0" anchor="t">
+          <a:bodyPr wrap="square" anchor="t" lIns="0" rIns="0" tIns="0" bIns="0">
             <a:spAutoFit/>
           </a:bodyPr>
           <a:lstStyle/>
@@ -21701,7 +21605,7 @@
           <a:noFill/>
         </p:spPr>
         <p:txBody>
-          <a:bodyPr wrap="square" lIns="0" tIns="0" rIns="0" bIns="0" anchor="t">
+          <a:bodyPr wrap="square" anchor="t" lIns="0" rIns="0" tIns="0" bIns="0">
             <a:spAutoFit/>
           </a:bodyPr>
           <a:lstStyle/>
@@ -21740,7 +21644,7 @@
           <a:noFill/>
         </p:spPr>
         <p:txBody>
-          <a:bodyPr wrap="square" lIns="0" tIns="0" rIns="0" bIns="0" anchor="t">
+          <a:bodyPr wrap="square" anchor="t" lIns="0" rIns="0" tIns="0" bIns="0">
             <a:spAutoFit/>
           </a:bodyPr>
           <a:lstStyle/>
@@ -21779,7 +21683,7 @@
           <a:noFill/>
         </p:spPr>
         <p:txBody>
-          <a:bodyPr wrap="square" lIns="0" tIns="0" rIns="0" bIns="0" anchor="t">
+          <a:bodyPr wrap="square" anchor="t" lIns="0" rIns="0" tIns="0" bIns="0">
             <a:spAutoFit/>
           </a:bodyPr>
           <a:lstStyle/>
@@ -21818,7 +21722,7 @@
           <a:noFill/>
         </p:spPr>
         <p:txBody>
-          <a:bodyPr wrap="square" lIns="0" tIns="0" rIns="0" bIns="0" anchor="t">
+          <a:bodyPr wrap="square" anchor="t" lIns="0" rIns="0" tIns="0" bIns="0">
             <a:spAutoFit/>
           </a:bodyPr>
           <a:lstStyle/>
@@ -21857,7 +21761,7 @@
           <a:noFill/>
         </p:spPr>
         <p:txBody>
-          <a:bodyPr wrap="square" lIns="0" tIns="0" rIns="0" bIns="0" anchor="t">
+          <a:bodyPr wrap="square" anchor="t" lIns="0" rIns="0" tIns="0" bIns="0">
             <a:spAutoFit/>
           </a:bodyPr>
           <a:lstStyle/>
@@ -21896,7 +21800,7 @@
           <a:noFill/>
         </p:spPr>
         <p:txBody>
-          <a:bodyPr wrap="square" lIns="0" tIns="0" rIns="0" bIns="0" anchor="t">
+          <a:bodyPr wrap="square" anchor="t" lIns="0" rIns="0" tIns="0" bIns="0">
             <a:spAutoFit/>
           </a:bodyPr>
           <a:lstStyle/>
@@ -21935,7 +21839,7 @@
           <a:noFill/>
         </p:spPr>
         <p:txBody>
-          <a:bodyPr wrap="square" lIns="0" tIns="0" rIns="0" bIns="0" anchor="t">
+          <a:bodyPr wrap="square" anchor="t" lIns="0" rIns="0" tIns="0" bIns="0">
             <a:spAutoFit/>
           </a:bodyPr>
           <a:lstStyle/>
@@ -21974,7 +21878,7 @@
           <a:noFill/>
         </p:spPr>
         <p:txBody>
-          <a:bodyPr wrap="square" lIns="0" tIns="0" rIns="0" bIns="0" anchor="t">
+          <a:bodyPr wrap="square" anchor="t" lIns="0" rIns="0" tIns="0" bIns="0">
             <a:spAutoFit/>
           </a:bodyPr>
           <a:lstStyle/>
@@ -22001,23 +21905,11 @@
   <p:clrMapOvr>
     <a:masterClrMapping/>
   </p:clrMapOvr>
-  <mc:AlternateContent xmlns:mc="http://schemas.openxmlformats.org/markup-compatibility/2006">
-    <mc:Choice xmlns:p14="http://schemas.microsoft.com/office/powerpoint/2010/main" Requires="p14">
-      <p:transition spd="med" p14:dur="700">
-        <p:fade thruBlk="1"/>
-      </p:transition>
-    </mc:Choice>
-    <mc:Fallback>
-      <p:transition spd="med">
-        <p:fade thruBlk="1"/>
-      </p:transition>
-    </mc:Fallback>
-  </mc:AlternateContent>
 </p:sld>
 </file>
 
 <file path=ppt/slides/slide24.xml><?xml version="1.0" encoding="utf-8"?>
-<p:sld xmlns:a="http://schemas.openxmlformats.org/drawingml/2006/main" xmlns:r="http://schemas.openxmlformats.org/officeDocument/2006/relationships" xmlns:p="http://schemas.openxmlformats.org/presentationml/2006/main">
+<p:sld xmlns:a="http://schemas.openxmlformats.org/drawingml/2006/main" xmlns:p="http://schemas.openxmlformats.org/presentationml/2006/main" xmlns:r="http://schemas.openxmlformats.org/officeDocument/2006/relationships">
   <p:cSld>
     <p:spTree>
       <p:nvGrpSpPr>
@@ -22025,14 +21917,7 @@
         <p:cNvGrpSpPr/>
         <p:nvPr/>
       </p:nvGrpSpPr>
-      <p:grpSpPr>
-        <a:xfrm>
-          <a:off x="0" y="0"/>
-          <a:ext cx="0" cy="0"/>
-          <a:chOff x="0" y="0"/>
-          <a:chExt cx="0" cy="0"/>
-        </a:xfrm>
-      </p:grpSpPr>
+      <p:grpSpPr/>
       <p:pic>
         <p:nvPicPr>
           <p:cNvPr id="2" name="Picture 1" descr="bg_deep.png"/>
@@ -22074,7 +21959,7 @@
           <a:noFill/>
         </p:spPr>
         <p:txBody>
-          <a:bodyPr wrap="square" lIns="0" tIns="0" rIns="0" bIns="0" anchor="t">
+          <a:bodyPr wrap="square" anchor="t" lIns="0" rIns="0" tIns="0" bIns="0">
             <a:spAutoFit/>
           </a:bodyPr>
           <a:lstStyle/>
@@ -22113,7 +21998,7 @@
           <a:noFill/>
         </p:spPr>
         <p:txBody>
-          <a:bodyPr wrap="square" lIns="0" tIns="0" rIns="0" bIns="0" anchor="t">
+          <a:bodyPr wrap="square" anchor="t" lIns="0" rIns="0" tIns="0" bIns="0">
             <a:spAutoFit/>
           </a:bodyPr>
           <a:lstStyle/>
@@ -22130,7 +22015,7 @@
                 </a:solidFill>
                 <a:latin typeface="Segoe UI Semibold"/>
               </a:rPr>
-              <a:t>757 assertions, all executed</a:t>
+              <a:t>760 assertions, all executed</a:t>
             </a:r>
           </a:p>
         </p:txBody>
@@ -22152,7 +22037,7 @@
           <a:noFill/>
         </p:spPr>
         <p:txBody>
-          <a:bodyPr wrap="square" lIns="0" tIns="0" rIns="0" bIns="0" anchor="t">
+          <a:bodyPr wrap="square" anchor="t" lIns="0" rIns="0" tIns="0" bIns="0">
             <a:spAutoFit/>
           </a:bodyPr>
           <a:lstStyle/>
@@ -22219,7 +22104,6 @@
           <a:lstStyle/>
           <a:p>
             <a:pPr algn="ctr"/>
-            <a:endParaRPr/>
           </a:p>
         </p:txBody>
       </p:sp>
@@ -22240,7 +22124,7 @@
           <a:noFill/>
         </p:spPr>
         <p:txBody>
-          <a:bodyPr wrap="square" lIns="0" tIns="0" rIns="0" bIns="0" anchor="t">
+          <a:bodyPr wrap="square" anchor="t" lIns="0" rIns="0" tIns="0" bIns="0">
             <a:spAutoFit/>
           </a:bodyPr>
           <a:lstStyle/>
@@ -22279,7 +22163,7 @@
           <a:noFill/>
         </p:spPr>
         <p:txBody>
-          <a:bodyPr wrap="square" lIns="0" tIns="0" rIns="0" bIns="0" anchor="t">
+          <a:bodyPr wrap="square" anchor="t" lIns="0" rIns="0" tIns="0" bIns="0">
             <a:spAutoFit/>
           </a:bodyPr>
           <a:lstStyle/>
@@ -22318,7 +22202,7 @@
           <a:noFill/>
         </p:spPr>
         <p:txBody>
-          <a:bodyPr wrap="square" lIns="0" tIns="0" rIns="0" bIns="0" anchor="t">
+          <a:bodyPr wrap="square" anchor="t" lIns="0" rIns="0" tIns="0" bIns="0">
             <a:spAutoFit/>
           </a:bodyPr>
           <a:lstStyle/>
@@ -22385,7 +22269,6 @@
           <a:lstStyle/>
           <a:p>
             <a:pPr algn="ctr"/>
-            <a:endParaRPr/>
           </a:p>
         </p:txBody>
       </p:sp>
@@ -22406,7 +22289,7 @@
           <a:noFill/>
         </p:spPr>
         <p:txBody>
-          <a:bodyPr wrap="square" lIns="0" tIns="0" rIns="0" bIns="0" anchor="t">
+          <a:bodyPr wrap="square" anchor="t" lIns="0" rIns="0" tIns="0" bIns="0">
             <a:spAutoFit/>
           </a:bodyPr>
           <a:lstStyle/>
@@ -22445,7 +22328,7 @@
           <a:noFill/>
         </p:spPr>
         <p:txBody>
-          <a:bodyPr wrap="square" lIns="0" tIns="0" rIns="0" bIns="0" anchor="t">
+          <a:bodyPr wrap="square" anchor="t" lIns="0" rIns="0" tIns="0" bIns="0">
             <a:spAutoFit/>
           </a:bodyPr>
           <a:lstStyle/>
@@ -22462,7 +22345,7 @@
                 </a:solidFill>
                 <a:latin typeface="Segoe UI Semibold"/>
               </a:rPr>
-              <a:t>191</a:t>
+              <a:t>194</a:t>
             </a:r>
           </a:p>
         </p:txBody>
@@ -22484,7 +22367,7 @@
           <a:noFill/>
         </p:spPr>
         <p:txBody>
-          <a:bodyPr wrap="square" lIns="0" tIns="0" rIns="0" bIns="0" anchor="t">
+          <a:bodyPr wrap="square" anchor="t" lIns="0" rIns="0" tIns="0" bIns="0">
             <a:spAutoFit/>
           </a:bodyPr>
           <a:lstStyle/>
@@ -22551,7 +22434,6 @@
           <a:lstStyle/>
           <a:p>
             <a:pPr algn="ctr"/>
-            <a:endParaRPr/>
           </a:p>
         </p:txBody>
       </p:sp>
@@ -22572,7 +22454,7 @@
           <a:noFill/>
         </p:spPr>
         <p:txBody>
-          <a:bodyPr wrap="square" lIns="0" tIns="0" rIns="0" bIns="0" anchor="t">
+          <a:bodyPr wrap="square" anchor="t" lIns="0" rIns="0" tIns="0" bIns="0">
             <a:spAutoFit/>
           </a:bodyPr>
           <a:lstStyle/>
@@ -22611,7 +22493,7 @@
           <a:noFill/>
         </p:spPr>
         <p:txBody>
-          <a:bodyPr wrap="square" lIns="0" tIns="0" rIns="0" bIns="0" anchor="t">
+          <a:bodyPr wrap="square" anchor="t" lIns="0" rIns="0" tIns="0" bIns="0">
             <a:spAutoFit/>
           </a:bodyPr>
           <a:lstStyle/>
@@ -22650,7 +22532,7 @@
           <a:noFill/>
         </p:spPr>
         <p:txBody>
-          <a:bodyPr wrap="square" lIns="0" tIns="0" rIns="0" bIns="0" anchor="t">
+          <a:bodyPr wrap="square" anchor="t" lIns="0" rIns="0" tIns="0" bIns="0">
             <a:spAutoFit/>
           </a:bodyPr>
           <a:lstStyle/>
@@ -22717,7 +22599,6 @@
           <a:lstStyle/>
           <a:p>
             <a:pPr algn="ctr"/>
-            <a:endParaRPr/>
           </a:p>
         </p:txBody>
       </p:sp>
@@ -22738,7 +22619,7 @@
           <a:noFill/>
         </p:spPr>
         <p:txBody>
-          <a:bodyPr wrap="square" lIns="0" tIns="0" rIns="0" bIns="0" anchor="t">
+          <a:bodyPr wrap="square" anchor="t" lIns="0" rIns="0" tIns="0" bIns="0">
             <a:spAutoFit/>
           </a:bodyPr>
           <a:lstStyle/>
@@ -22777,7 +22658,7 @@
           <a:noFill/>
         </p:spPr>
         <p:txBody>
-          <a:bodyPr wrap="square" lIns="0" tIns="0" rIns="0" bIns="0" anchor="t">
+          <a:bodyPr wrap="square" anchor="t" lIns="0" rIns="0" tIns="0" bIns="0">
             <a:spAutoFit/>
           </a:bodyPr>
           <a:lstStyle/>
@@ -22816,7 +22697,7 @@
           <a:noFill/>
         </p:spPr>
         <p:txBody>
-          <a:bodyPr wrap="square" lIns="0" tIns="0" rIns="0" bIns="0" anchor="t">
+          <a:bodyPr wrap="square" anchor="t" lIns="0" rIns="0" tIns="0" bIns="0">
             <a:spAutoFit/>
           </a:bodyPr>
           <a:lstStyle/>
@@ -22883,7 +22764,6 @@
           <a:lstStyle/>
           <a:p>
             <a:pPr algn="ctr"/>
-            <a:endParaRPr/>
           </a:p>
         </p:txBody>
       </p:sp>
@@ -22904,7 +22784,7 @@
           <a:noFill/>
         </p:spPr>
         <p:txBody>
-          <a:bodyPr wrap="square" lIns="0" tIns="0" rIns="0" bIns="0" anchor="t">
+          <a:bodyPr wrap="square" anchor="t" lIns="0" rIns="0" tIns="0" bIns="0">
             <a:spAutoFit/>
           </a:bodyPr>
           <a:lstStyle/>
@@ -22943,7 +22823,7 @@
           <a:noFill/>
         </p:spPr>
         <p:txBody>
-          <a:bodyPr wrap="square" lIns="0" tIns="0" rIns="0" bIns="0" anchor="t">
+          <a:bodyPr wrap="square" anchor="t" lIns="0" rIns="0" tIns="0" bIns="0">
             <a:spAutoFit/>
           </a:bodyPr>
           <a:lstStyle/>
@@ -22982,7 +22862,7 @@
           <a:noFill/>
         </p:spPr>
         <p:txBody>
-          <a:bodyPr wrap="square" lIns="0" tIns="0" rIns="0" bIns="0" anchor="t">
+          <a:bodyPr wrap="square" anchor="t" lIns="0" rIns="0" tIns="0" bIns="0">
             <a:spAutoFit/>
           </a:bodyPr>
           <a:lstStyle/>
@@ -23049,7 +22929,6 @@
           <a:lstStyle/>
           <a:p>
             <a:pPr algn="ctr"/>
-            <a:endParaRPr/>
           </a:p>
         </p:txBody>
       </p:sp>
@@ -23070,7 +22949,7 @@
           <a:noFill/>
         </p:spPr>
         <p:txBody>
-          <a:bodyPr wrap="square" lIns="0" tIns="0" rIns="0" bIns="0" anchor="t">
+          <a:bodyPr wrap="square" anchor="t" lIns="0" rIns="0" tIns="0" bIns="0">
             <a:spAutoFit/>
           </a:bodyPr>
           <a:lstStyle/>
@@ -23109,7 +22988,7 @@
           <a:noFill/>
         </p:spPr>
         <p:txBody>
-          <a:bodyPr wrap="square" lIns="0" tIns="0" rIns="0" bIns="0" anchor="t">
+          <a:bodyPr wrap="square" anchor="t" lIns="0" rIns="0" tIns="0" bIns="0">
             <a:spAutoFit/>
           </a:bodyPr>
           <a:lstStyle/>
@@ -23148,7 +23027,7 @@
           <a:noFill/>
         </p:spPr>
         <p:txBody>
-          <a:bodyPr wrap="square" lIns="0" tIns="0" rIns="0" bIns="0" anchor="t">
+          <a:bodyPr wrap="square" anchor="t" lIns="0" rIns="0" tIns="0" bIns="0">
             <a:spAutoFit/>
           </a:bodyPr>
           <a:lstStyle/>
@@ -23213,7 +23092,6 @@
           <a:lstStyle/>
           <a:p>
             <a:pPr algn="ctr"/>
-            <a:endParaRPr/>
           </a:p>
         </p:txBody>
       </p:sp>
@@ -23234,7 +23112,7 @@
           <a:noFill/>
         </p:spPr>
         <p:txBody>
-          <a:bodyPr wrap="square" lIns="0" tIns="0" rIns="0" bIns="0" anchor="t">
+          <a:bodyPr wrap="square" anchor="t" lIns="0" rIns="0" tIns="0" bIns="0">
             <a:spAutoFit/>
           </a:bodyPr>
           <a:lstStyle/>
@@ -23251,7 +23129,7 @@
                 </a:solidFill>
                 <a:latin typeface="Segoe UI"/>
               </a:rPr>
-              <a:t>757 passed · 0 failed · 0 skipped   •   coverage 95.68% lines on the pure domain modules   •   0 server errors across the sweep</a:t>
+              <a:t>760 passed · 0 failed · 0 skipped   •   coverage 95.68% lines on the pure domain modules   •   0 server errors across the sweep</a:t>
             </a:r>
           </a:p>
         </p:txBody>
@@ -23273,7 +23151,7 @@
           <a:noFill/>
         </p:spPr>
         <p:txBody>
-          <a:bodyPr wrap="square" lIns="0" tIns="0" rIns="0" bIns="0" anchor="t">
+          <a:bodyPr wrap="square" anchor="t" lIns="0" rIns="0" tIns="0" bIns="0">
             <a:spAutoFit/>
           </a:bodyPr>
           <a:lstStyle/>
@@ -23312,7 +23190,7 @@
           <a:noFill/>
         </p:spPr>
         <p:txBody>
-          <a:bodyPr wrap="square" lIns="0" tIns="0" rIns="0" bIns="0" anchor="t">
+          <a:bodyPr wrap="square" anchor="t" lIns="0" rIns="0" tIns="0" bIns="0">
             <a:spAutoFit/>
           </a:bodyPr>
           <a:lstStyle/>
@@ -23339,23 +23217,11 @@
   <p:clrMapOvr>
     <a:masterClrMapping/>
   </p:clrMapOvr>
-  <mc:AlternateContent xmlns:mc="http://schemas.openxmlformats.org/markup-compatibility/2006">
-    <mc:Choice xmlns:p14="http://schemas.microsoft.com/office/powerpoint/2010/main" Requires="p14">
-      <p:transition spd="med" p14:dur="700">
-        <p:fade thruBlk="1"/>
-      </p:transition>
-    </mc:Choice>
-    <mc:Fallback>
-      <p:transition spd="med">
-        <p:fade thruBlk="1"/>
-      </p:transition>
-    </mc:Fallback>
-  </mc:AlternateContent>
 </p:sld>
 </file>
 
 <file path=ppt/slides/slide25.xml><?xml version="1.0" encoding="utf-8"?>
-<p:sld xmlns:a="http://schemas.openxmlformats.org/drawingml/2006/main" xmlns:r="http://schemas.openxmlformats.org/officeDocument/2006/relationships" xmlns:p="http://schemas.openxmlformats.org/presentationml/2006/main">
+<p:sld xmlns:a="http://schemas.openxmlformats.org/drawingml/2006/main" xmlns:p="http://schemas.openxmlformats.org/presentationml/2006/main" xmlns:r="http://schemas.openxmlformats.org/officeDocument/2006/relationships">
   <p:cSld>
     <p:spTree>
       <p:nvGrpSpPr>
@@ -23363,14 +23229,7 @@
         <p:cNvGrpSpPr/>
         <p:nvPr/>
       </p:nvGrpSpPr>
-      <p:grpSpPr>
-        <a:xfrm>
-          <a:off x="0" y="0"/>
-          <a:ext cx="0" cy="0"/>
-          <a:chOff x="0" y="0"/>
-          <a:chExt cx="0" cy="0"/>
-        </a:xfrm>
-      </p:grpSpPr>
+      <p:grpSpPr/>
       <p:pic>
         <p:nvPicPr>
           <p:cNvPr id="2" name="Picture 1" descr="bg_deep.png"/>
@@ -23412,7 +23271,7 @@
           <a:noFill/>
         </p:spPr>
         <p:txBody>
-          <a:bodyPr wrap="square" lIns="0" tIns="0" rIns="0" bIns="0" anchor="t">
+          <a:bodyPr wrap="square" anchor="t" lIns="0" rIns="0" tIns="0" bIns="0">
             <a:spAutoFit/>
           </a:bodyPr>
           <a:lstStyle/>
@@ -23451,7 +23310,7 @@
           <a:noFill/>
         </p:spPr>
         <p:txBody>
-          <a:bodyPr wrap="square" lIns="0" tIns="0" rIns="0" bIns="0" anchor="t">
+          <a:bodyPr wrap="square" anchor="t" lIns="0" rIns="0" tIns="0" bIns="0">
             <a:spAutoFit/>
           </a:bodyPr>
           <a:lstStyle/>
@@ -23490,7 +23349,7 @@
           <a:noFill/>
         </p:spPr>
         <p:txBody>
-          <a:bodyPr wrap="square" lIns="0" tIns="0" rIns="0" bIns="0" anchor="t">
+          <a:bodyPr wrap="square" anchor="t" lIns="0" rIns="0" tIns="0" bIns="0">
             <a:spAutoFit/>
           </a:bodyPr>
           <a:lstStyle/>
@@ -23529,7 +23388,7 @@
           <a:noFill/>
         </p:spPr>
         <p:txBody>
-          <a:bodyPr wrap="square" lIns="0" tIns="0" rIns="0" bIns="0" anchor="t">
+          <a:bodyPr wrap="square" anchor="t" lIns="0" rIns="0" tIns="0" bIns="0">
             <a:spAutoFit/>
           </a:bodyPr>
           <a:lstStyle/>
@@ -23568,7 +23427,7 @@
           <a:noFill/>
         </p:spPr>
         <p:txBody>
-          <a:bodyPr wrap="square" lIns="0" tIns="0" rIns="0" bIns="0" anchor="t">
+          <a:bodyPr wrap="square" anchor="t" lIns="0" rIns="0" tIns="0" bIns="0">
             <a:spAutoFit/>
           </a:bodyPr>
           <a:lstStyle/>
@@ -23607,7 +23466,7 @@
           <a:noFill/>
         </p:spPr>
         <p:txBody>
-          <a:bodyPr wrap="square" lIns="0" tIns="0" rIns="0" bIns="0" anchor="t">
+          <a:bodyPr wrap="square" anchor="t" lIns="0" rIns="0" tIns="0" bIns="0">
             <a:spAutoFit/>
           </a:bodyPr>
           <a:lstStyle/>
@@ -23646,7 +23505,7 @@
           <a:noFill/>
         </p:spPr>
         <p:txBody>
-          <a:bodyPr wrap="square" lIns="0" tIns="0" rIns="0" bIns="0" anchor="t">
+          <a:bodyPr wrap="square" anchor="t" lIns="0" rIns="0" tIns="0" bIns="0">
             <a:spAutoFit/>
           </a:bodyPr>
           <a:lstStyle/>
@@ -23713,7 +23572,6 @@
           <a:lstStyle/>
           <a:p>
             <a:pPr algn="ctr"/>
-            <a:endParaRPr/>
           </a:p>
         </p:txBody>
       </p:sp>
@@ -23734,7 +23592,7 @@
           <a:noFill/>
         </p:spPr>
         <p:txBody>
-          <a:bodyPr wrap="square" lIns="0" tIns="0" rIns="0" bIns="0" anchor="t">
+          <a:bodyPr wrap="square" anchor="t" lIns="0" rIns="0" tIns="0" bIns="0">
             <a:spAutoFit/>
           </a:bodyPr>
           <a:lstStyle/>
@@ -23773,7 +23631,7 @@
           <a:noFill/>
         </p:spPr>
         <p:txBody>
-          <a:bodyPr wrap="square" lIns="0" tIns="0" rIns="0" bIns="0" anchor="t">
+          <a:bodyPr wrap="square" anchor="t" lIns="0" rIns="0" tIns="0" bIns="0">
             <a:spAutoFit/>
           </a:bodyPr>
           <a:lstStyle/>
@@ -23812,7 +23670,7 @@
           <a:noFill/>
         </p:spPr>
         <p:txBody>
-          <a:bodyPr wrap="square" lIns="0" tIns="0" rIns="0" bIns="0" anchor="t">
+          <a:bodyPr wrap="square" anchor="t" lIns="0" rIns="0" tIns="0" bIns="0">
             <a:spAutoFit/>
           </a:bodyPr>
           <a:lstStyle/>
@@ -23851,7 +23709,7 @@
           <a:noFill/>
         </p:spPr>
         <p:txBody>
-          <a:bodyPr wrap="square" lIns="0" tIns="0" rIns="0" bIns="0" anchor="t">
+          <a:bodyPr wrap="square" anchor="t" lIns="0" rIns="0" tIns="0" bIns="0">
             <a:spAutoFit/>
           </a:bodyPr>
           <a:lstStyle/>
@@ -23918,7 +23776,6 @@
           <a:lstStyle/>
           <a:p>
             <a:pPr algn="ctr"/>
-            <a:endParaRPr/>
           </a:p>
         </p:txBody>
       </p:sp>
@@ -23939,7 +23796,7 @@
           <a:noFill/>
         </p:spPr>
         <p:txBody>
-          <a:bodyPr wrap="square" lIns="0" tIns="0" rIns="0" bIns="0" anchor="t">
+          <a:bodyPr wrap="square" anchor="t" lIns="0" rIns="0" tIns="0" bIns="0">
             <a:spAutoFit/>
           </a:bodyPr>
           <a:lstStyle/>
@@ -23978,7 +23835,7 @@
           <a:noFill/>
         </p:spPr>
         <p:txBody>
-          <a:bodyPr wrap="square" lIns="0" tIns="0" rIns="0" bIns="0" anchor="t">
+          <a:bodyPr wrap="square" anchor="t" lIns="0" rIns="0" tIns="0" bIns="0">
             <a:spAutoFit/>
           </a:bodyPr>
           <a:lstStyle/>
@@ -24017,7 +23874,7 @@
           <a:noFill/>
         </p:spPr>
         <p:txBody>
-          <a:bodyPr wrap="square" lIns="0" tIns="0" rIns="0" bIns="0" anchor="t">
+          <a:bodyPr wrap="square" anchor="t" lIns="0" rIns="0" tIns="0" bIns="0">
             <a:spAutoFit/>
           </a:bodyPr>
           <a:lstStyle/>
@@ -24056,7 +23913,7 @@
           <a:noFill/>
         </p:spPr>
         <p:txBody>
-          <a:bodyPr wrap="square" lIns="0" tIns="0" rIns="0" bIns="0" anchor="t">
+          <a:bodyPr wrap="square" anchor="t" lIns="0" rIns="0" tIns="0" bIns="0">
             <a:spAutoFit/>
           </a:bodyPr>
           <a:lstStyle/>
@@ -24123,7 +23980,6 @@
           <a:lstStyle/>
           <a:p>
             <a:pPr algn="ctr"/>
-            <a:endParaRPr/>
           </a:p>
         </p:txBody>
       </p:sp>
@@ -24144,7 +24000,7 @@
           <a:noFill/>
         </p:spPr>
         <p:txBody>
-          <a:bodyPr wrap="square" lIns="0" tIns="0" rIns="0" bIns="0" anchor="t">
+          <a:bodyPr wrap="square" anchor="t" lIns="0" rIns="0" tIns="0" bIns="0">
             <a:spAutoFit/>
           </a:bodyPr>
           <a:lstStyle/>
@@ -24183,7 +24039,7 @@
           <a:noFill/>
         </p:spPr>
         <p:txBody>
-          <a:bodyPr wrap="square" lIns="0" tIns="0" rIns="0" bIns="0" anchor="t">
+          <a:bodyPr wrap="square" anchor="t" lIns="0" rIns="0" tIns="0" bIns="0">
             <a:spAutoFit/>
           </a:bodyPr>
           <a:lstStyle/>
@@ -24222,7 +24078,7 @@
           <a:noFill/>
         </p:spPr>
         <p:txBody>
-          <a:bodyPr wrap="square" lIns="0" tIns="0" rIns="0" bIns="0" anchor="t">
+          <a:bodyPr wrap="square" anchor="t" lIns="0" rIns="0" tIns="0" bIns="0">
             <a:spAutoFit/>
           </a:bodyPr>
           <a:lstStyle/>
@@ -24261,7 +24117,7 @@
           <a:noFill/>
         </p:spPr>
         <p:txBody>
-          <a:bodyPr wrap="square" lIns="0" tIns="0" rIns="0" bIns="0" anchor="t">
+          <a:bodyPr wrap="square" anchor="t" lIns="0" rIns="0" tIns="0" bIns="0">
             <a:spAutoFit/>
           </a:bodyPr>
           <a:lstStyle/>
@@ -24328,7 +24184,6 @@
           <a:lstStyle/>
           <a:p>
             <a:pPr algn="ctr"/>
-            <a:endParaRPr/>
           </a:p>
         </p:txBody>
       </p:sp>
@@ -24349,7 +24204,7 @@
           <a:noFill/>
         </p:spPr>
         <p:txBody>
-          <a:bodyPr wrap="square" lIns="0" tIns="0" rIns="0" bIns="0" anchor="t">
+          <a:bodyPr wrap="square" anchor="t" lIns="0" rIns="0" tIns="0" bIns="0">
             <a:spAutoFit/>
           </a:bodyPr>
           <a:lstStyle/>
@@ -24388,7 +24243,7 @@
           <a:noFill/>
         </p:spPr>
         <p:txBody>
-          <a:bodyPr wrap="square" lIns="0" tIns="0" rIns="0" bIns="0" anchor="t">
+          <a:bodyPr wrap="square" anchor="t" lIns="0" rIns="0" tIns="0" bIns="0">
             <a:spAutoFit/>
           </a:bodyPr>
           <a:lstStyle/>
@@ -24427,7 +24282,7 @@
           <a:noFill/>
         </p:spPr>
         <p:txBody>
-          <a:bodyPr wrap="square" lIns="0" tIns="0" rIns="0" bIns="0" anchor="t">
+          <a:bodyPr wrap="square" anchor="t" lIns="0" rIns="0" tIns="0" bIns="0">
             <a:spAutoFit/>
           </a:bodyPr>
           <a:lstStyle/>
@@ -24466,7 +24321,7 @@
           <a:noFill/>
         </p:spPr>
         <p:txBody>
-          <a:bodyPr wrap="square" lIns="0" tIns="0" rIns="0" bIns="0" anchor="t">
+          <a:bodyPr wrap="square" anchor="t" lIns="0" rIns="0" tIns="0" bIns="0">
             <a:spAutoFit/>
           </a:bodyPr>
           <a:lstStyle/>
@@ -24533,7 +24388,6 @@
           <a:lstStyle/>
           <a:p>
             <a:pPr algn="ctr"/>
-            <a:endParaRPr/>
           </a:p>
         </p:txBody>
       </p:sp>
@@ -24554,7 +24408,7 @@
           <a:noFill/>
         </p:spPr>
         <p:txBody>
-          <a:bodyPr wrap="square" lIns="0" tIns="0" rIns="0" bIns="0" anchor="t">
+          <a:bodyPr wrap="square" anchor="t" lIns="0" rIns="0" tIns="0" bIns="0">
             <a:spAutoFit/>
           </a:bodyPr>
           <a:lstStyle/>
@@ -24593,7 +24447,7 @@
           <a:noFill/>
         </p:spPr>
         <p:txBody>
-          <a:bodyPr wrap="square" lIns="0" tIns="0" rIns="0" bIns="0" anchor="t">
+          <a:bodyPr wrap="square" anchor="t" lIns="0" rIns="0" tIns="0" bIns="0">
             <a:spAutoFit/>
           </a:bodyPr>
           <a:lstStyle/>
@@ -24632,7 +24486,7 @@
           <a:noFill/>
         </p:spPr>
         <p:txBody>
-          <a:bodyPr wrap="square" lIns="0" tIns="0" rIns="0" bIns="0" anchor="t">
+          <a:bodyPr wrap="square" anchor="t" lIns="0" rIns="0" tIns="0" bIns="0">
             <a:spAutoFit/>
           </a:bodyPr>
           <a:lstStyle/>
@@ -24671,7 +24525,7 @@
           <a:noFill/>
         </p:spPr>
         <p:txBody>
-          <a:bodyPr wrap="square" lIns="0" tIns="0" rIns="0" bIns="0" anchor="t">
+          <a:bodyPr wrap="square" anchor="t" lIns="0" rIns="0" tIns="0" bIns="0">
             <a:spAutoFit/>
           </a:bodyPr>
           <a:lstStyle/>
@@ -24738,7 +24592,6 @@
           <a:lstStyle/>
           <a:p>
             <a:pPr algn="ctr"/>
-            <a:endParaRPr/>
           </a:p>
         </p:txBody>
       </p:sp>
@@ -24759,7 +24612,7 @@
           <a:noFill/>
         </p:spPr>
         <p:txBody>
-          <a:bodyPr wrap="square" lIns="0" tIns="0" rIns="0" bIns="0" anchor="t">
+          <a:bodyPr wrap="square" anchor="t" lIns="0" rIns="0" tIns="0" bIns="0">
             <a:spAutoFit/>
           </a:bodyPr>
           <a:lstStyle/>
@@ -24798,7 +24651,7 @@
           <a:noFill/>
         </p:spPr>
         <p:txBody>
-          <a:bodyPr wrap="square" lIns="0" tIns="0" rIns="0" bIns="0" anchor="t">
+          <a:bodyPr wrap="square" anchor="t" lIns="0" rIns="0" tIns="0" bIns="0">
             <a:spAutoFit/>
           </a:bodyPr>
           <a:lstStyle/>
@@ -24837,7 +24690,7 @@
           <a:noFill/>
         </p:spPr>
         <p:txBody>
-          <a:bodyPr wrap="square" lIns="0" tIns="0" rIns="0" bIns="0" anchor="t">
+          <a:bodyPr wrap="square" anchor="t" lIns="0" rIns="0" tIns="0" bIns="0">
             <a:spAutoFit/>
           </a:bodyPr>
           <a:lstStyle/>
@@ -24876,7 +24729,7 @@
           <a:noFill/>
         </p:spPr>
         <p:txBody>
-          <a:bodyPr wrap="square" lIns="0" tIns="0" rIns="0" bIns="0" anchor="t">
+          <a:bodyPr wrap="square" anchor="t" lIns="0" rIns="0" tIns="0" bIns="0">
             <a:spAutoFit/>
           </a:bodyPr>
           <a:lstStyle/>
@@ -24943,7 +24796,6 @@
           <a:lstStyle/>
           <a:p>
             <a:pPr algn="ctr"/>
-            <a:endParaRPr/>
           </a:p>
         </p:txBody>
       </p:sp>
@@ -24964,7 +24816,7 @@
           <a:noFill/>
         </p:spPr>
         <p:txBody>
-          <a:bodyPr wrap="square" lIns="0" tIns="0" rIns="0" bIns="0" anchor="t">
+          <a:bodyPr wrap="square" anchor="t" lIns="0" rIns="0" tIns="0" bIns="0">
             <a:spAutoFit/>
           </a:bodyPr>
           <a:lstStyle/>
@@ -25003,7 +24855,7 @@
           <a:noFill/>
         </p:spPr>
         <p:txBody>
-          <a:bodyPr wrap="square" lIns="0" tIns="0" rIns="0" bIns="0" anchor="t">
+          <a:bodyPr wrap="square" anchor="t" lIns="0" rIns="0" tIns="0" bIns="0">
             <a:spAutoFit/>
           </a:bodyPr>
           <a:lstStyle/>
@@ -25042,7 +24894,7 @@
           <a:noFill/>
         </p:spPr>
         <p:txBody>
-          <a:bodyPr wrap="square" lIns="0" tIns="0" rIns="0" bIns="0" anchor="t">
+          <a:bodyPr wrap="square" anchor="t" lIns="0" rIns="0" tIns="0" bIns="0">
             <a:spAutoFit/>
           </a:bodyPr>
           <a:lstStyle/>
@@ -25081,7 +24933,7 @@
           <a:noFill/>
         </p:spPr>
         <p:txBody>
-          <a:bodyPr wrap="square" lIns="0" tIns="0" rIns="0" bIns="0" anchor="t">
+          <a:bodyPr wrap="square" anchor="t" lIns="0" rIns="0" tIns="0" bIns="0">
             <a:spAutoFit/>
           </a:bodyPr>
           <a:lstStyle/>
@@ -25120,7 +24972,7 @@
           <a:noFill/>
         </p:spPr>
         <p:txBody>
-          <a:bodyPr wrap="square" lIns="0" tIns="0" rIns="0" bIns="0" anchor="t">
+          <a:bodyPr wrap="square" anchor="t" lIns="0" rIns="0" tIns="0" bIns="0">
             <a:spAutoFit/>
           </a:bodyPr>
           <a:lstStyle/>
@@ -25159,7 +25011,7 @@
           <a:noFill/>
         </p:spPr>
         <p:txBody>
-          <a:bodyPr wrap="square" lIns="0" tIns="0" rIns="0" bIns="0" anchor="t">
+          <a:bodyPr wrap="square" anchor="t" lIns="0" rIns="0" tIns="0" bIns="0">
             <a:spAutoFit/>
           </a:bodyPr>
           <a:lstStyle/>
@@ -25198,7 +25050,7 @@
           <a:noFill/>
         </p:spPr>
         <p:txBody>
-          <a:bodyPr wrap="square" lIns="0" tIns="0" rIns="0" bIns="0" anchor="t">
+          <a:bodyPr wrap="square" anchor="t" lIns="0" rIns="0" tIns="0" bIns="0">
             <a:spAutoFit/>
           </a:bodyPr>
           <a:lstStyle/>
@@ -25225,23 +25077,11 @@
   <p:clrMapOvr>
     <a:masterClrMapping/>
   </p:clrMapOvr>
-  <mc:AlternateContent xmlns:mc="http://schemas.openxmlformats.org/markup-compatibility/2006">
-    <mc:Choice xmlns:p14="http://schemas.microsoft.com/office/powerpoint/2010/main" Requires="p14">
-      <p:transition spd="med" p14:dur="700">
-        <p:fade thruBlk="1"/>
-      </p:transition>
-    </mc:Choice>
-    <mc:Fallback>
-      <p:transition spd="med">
-        <p:fade thruBlk="1"/>
-      </p:transition>
-    </mc:Fallback>
-  </mc:AlternateContent>
 </p:sld>
 </file>
 
 <file path=ppt/slides/slide26.xml><?xml version="1.0" encoding="utf-8"?>
-<p:sld xmlns:a="http://schemas.openxmlformats.org/drawingml/2006/main" xmlns:r="http://schemas.openxmlformats.org/officeDocument/2006/relationships" xmlns:p="http://schemas.openxmlformats.org/presentationml/2006/main">
+<p:sld xmlns:a="http://schemas.openxmlformats.org/drawingml/2006/main" xmlns:p="http://schemas.openxmlformats.org/presentationml/2006/main" xmlns:r="http://schemas.openxmlformats.org/officeDocument/2006/relationships">
   <p:cSld>
     <p:spTree>
       <p:nvGrpSpPr>
@@ -25249,14 +25089,7 @@
         <p:cNvGrpSpPr/>
         <p:nvPr/>
       </p:nvGrpSpPr>
-      <p:grpSpPr>
-        <a:xfrm>
-          <a:off x="0" y="0"/>
-          <a:ext cx="0" cy="0"/>
-          <a:chOff x="0" y="0"/>
-          <a:chExt cx="0" cy="0"/>
-        </a:xfrm>
-      </p:grpSpPr>
+      <p:grpSpPr/>
       <p:pic>
         <p:nvPicPr>
           <p:cNvPr id="2" name="Picture 1" descr="bg_deep.png"/>
@@ -25298,7 +25131,7 @@
           <a:noFill/>
         </p:spPr>
         <p:txBody>
-          <a:bodyPr wrap="square" lIns="0" tIns="0" rIns="0" bIns="0" anchor="t">
+          <a:bodyPr wrap="square" anchor="t" lIns="0" rIns="0" tIns="0" bIns="0">
             <a:spAutoFit/>
           </a:bodyPr>
           <a:lstStyle/>
@@ -25337,7 +25170,7 @@
           <a:noFill/>
         </p:spPr>
         <p:txBody>
-          <a:bodyPr wrap="square" lIns="0" tIns="0" rIns="0" bIns="0" anchor="t">
+          <a:bodyPr wrap="square" anchor="t" lIns="0" rIns="0" tIns="0" bIns="0">
             <a:spAutoFit/>
           </a:bodyPr>
           <a:lstStyle/>
@@ -25376,7 +25209,7 @@
           <a:noFill/>
         </p:spPr>
         <p:txBody>
-          <a:bodyPr wrap="square" lIns="0" tIns="0" rIns="0" bIns="0" anchor="t">
+          <a:bodyPr wrap="square" anchor="t" lIns="0" rIns="0" tIns="0" bIns="0">
             <a:spAutoFit/>
           </a:bodyPr>
           <a:lstStyle/>
@@ -25443,7 +25276,6 @@
           <a:lstStyle/>
           <a:p>
             <a:pPr algn="ctr"/>
-            <a:endParaRPr/>
           </a:p>
         </p:txBody>
       </p:sp>
@@ -25464,7 +25296,7 @@
           <a:noFill/>
         </p:spPr>
         <p:txBody>
-          <a:bodyPr wrap="square" lIns="0" tIns="0" rIns="0" bIns="0" anchor="t">
+          <a:bodyPr wrap="square" anchor="t" lIns="0" rIns="0" tIns="0" bIns="0">
             <a:spAutoFit/>
           </a:bodyPr>
           <a:lstStyle/>
@@ -25503,7 +25335,7 @@
           <a:noFill/>
         </p:spPr>
         <p:txBody>
-          <a:bodyPr wrap="square" lIns="0" tIns="0" rIns="0" bIns="0" anchor="t">
+          <a:bodyPr wrap="square" anchor="t" lIns="0" rIns="0" tIns="0" bIns="0">
             <a:spAutoFit/>
           </a:bodyPr>
           <a:lstStyle/>
@@ -25566,7 +25398,7 @@
           </a:fontRef>
         </p:style>
         <p:txBody>
-          <a:bodyPr wrap="square" lIns="54864" tIns="0" rIns="54864" bIns="0" rtlCol="0" anchor="ctr"/>
+          <a:bodyPr rtlCol="0" anchor="ctr" wrap="square" lIns="54864" rIns="54864" tIns="0" bIns="0"/>
           <a:lstStyle/>
           <a:p>
             <a:pPr algn="ctr"/>
@@ -25627,7 +25459,6 @@
           <a:lstStyle/>
           <a:p>
             <a:pPr algn="ctr"/>
-            <a:endParaRPr/>
           </a:p>
         </p:txBody>
       </p:sp>
@@ -25648,7 +25479,7 @@
           <a:noFill/>
         </p:spPr>
         <p:txBody>
-          <a:bodyPr wrap="square" lIns="0" tIns="0" rIns="0" bIns="0" anchor="t">
+          <a:bodyPr wrap="square" anchor="t" lIns="0" rIns="0" tIns="0" bIns="0">
             <a:spAutoFit/>
           </a:bodyPr>
           <a:lstStyle/>
@@ -25687,7 +25518,7 @@
           <a:noFill/>
         </p:spPr>
         <p:txBody>
-          <a:bodyPr wrap="square" lIns="0" tIns="0" rIns="0" bIns="0" anchor="t">
+          <a:bodyPr wrap="square" anchor="t" lIns="0" rIns="0" tIns="0" bIns="0">
             <a:spAutoFit/>
           </a:bodyPr>
           <a:lstStyle/>
@@ -25750,7 +25581,7 @@
           </a:fontRef>
         </p:style>
         <p:txBody>
-          <a:bodyPr wrap="square" lIns="54864" tIns="0" rIns="54864" bIns="0" rtlCol="0" anchor="ctr"/>
+          <a:bodyPr rtlCol="0" anchor="ctr" wrap="square" lIns="54864" rIns="54864" tIns="0" bIns="0"/>
           <a:lstStyle/>
           <a:p>
             <a:pPr algn="ctr"/>
@@ -25811,7 +25642,6 @@
           <a:lstStyle/>
           <a:p>
             <a:pPr algn="ctr"/>
-            <a:endParaRPr/>
           </a:p>
         </p:txBody>
       </p:sp>
@@ -25832,7 +25662,7 @@
           <a:noFill/>
         </p:spPr>
         <p:txBody>
-          <a:bodyPr wrap="square" lIns="0" tIns="0" rIns="0" bIns="0" anchor="t">
+          <a:bodyPr wrap="square" anchor="t" lIns="0" rIns="0" tIns="0" bIns="0">
             <a:spAutoFit/>
           </a:bodyPr>
           <a:lstStyle/>
@@ -25871,7 +25701,7 @@
           <a:noFill/>
         </p:spPr>
         <p:txBody>
-          <a:bodyPr wrap="square" lIns="0" tIns="0" rIns="0" bIns="0" anchor="t">
+          <a:bodyPr wrap="square" anchor="t" lIns="0" rIns="0" tIns="0" bIns="0">
             <a:spAutoFit/>
           </a:bodyPr>
           <a:lstStyle/>
@@ -25934,7 +25764,7 @@
           </a:fontRef>
         </p:style>
         <p:txBody>
-          <a:bodyPr wrap="square" lIns="54864" tIns="0" rIns="54864" bIns="0" rtlCol="0" anchor="ctr"/>
+          <a:bodyPr rtlCol="0" anchor="ctr" wrap="square" lIns="54864" rIns="54864" tIns="0" bIns="0"/>
           <a:lstStyle/>
           <a:p>
             <a:pPr algn="ctr"/>
@@ -25995,7 +25825,6 @@
           <a:lstStyle/>
           <a:p>
             <a:pPr algn="ctr"/>
-            <a:endParaRPr/>
           </a:p>
         </p:txBody>
       </p:sp>
@@ -26016,7 +25845,7 @@
           <a:noFill/>
         </p:spPr>
         <p:txBody>
-          <a:bodyPr wrap="square" lIns="0" tIns="0" rIns="0" bIns="0" anchor="t">
+          <a:bodyPr wrap="square" anchor="t" lIns="0" rIns="0" tIns="0" bIns="0">
             <a:spAutoFit/>
           </a:bodyPr>
           <a:lstStyle/>
@@ -26055,7 +25884,7 @@
           <a:noFill/>
         </p:spPr>
         <p:txBody>
-          <a:bodyPr wrap="square" lIns="0" tIns="0" rIns="0" bIns="0" anchor="t">
+          <a:bodyPr wrap="square" anchor="t" lIns="0" rIns="0" tIns="0" bIns="0">
             <a:spAutoFit/>
           </a:bodyPr>
           <a:lstStyle/>
@@ -26118,7 +25947,7 @@
           </a:fontRef>
         </p:style>
         <p:txBody>
-          <a:bodyPr wrap="square" lIns="54864" tIns="0" rIns="54864" bIns="0" rtlCol="0" anchor="ctr"/>
+          <a:bodyPr rtlCol="0" anchor="ctr" wrap="square" lIns="54864" rIns="54864" tIns="0" bIns="0"/>
           <a:lstStyle/>
           <a:p>
             <a:pPr algn="ctr"/>
@@ -26179,7 +26008,6 @@
           <a:lstStyle/>
           <a:p>
             <a:pPr algn="ctr"/>
-            <a:endParaRPr/>
           </a:p>
         </p:txBody>
       </p:sp>
@@ -26200,7 +26028,7 @@
           <a:noFill/>
         </p:spPr>
         <p:txBody>
-          <a:bodyPr wrap="square" lIns="0" tIns="0" rIns="0" bIns="0" anchor="t">
+          <a:bodyPr wrap="square" anchor="t" lIns="0" rIns="0" tIns="0" bIns="0">
             <a:spAutoFit/>
           </a:bodyPr>
           <a:lstStyle/>
@@ -26239,7 +26067,7 @@
           <a:noFill/>
         </p:spPr>
         <p:txBody>
-          <a:bodyPr wrap="square" lIns="0" tIns="0" rIns="0" bIns="0" anchor="t">
+          <a:bodyPr wrap="square" anchor="t" lIns="0" rIns="0" tIns="0" bIns="0">
             <a:spAutoFit/>
           </a:bodyPr>
           <a:lstStyle/>
@@ -26302,7 +26130,7 @@
           </a:fontRef>
         </p:style>
         <p:txBody>
-          <a:bodyPr wrap="square" lIns="54864" tIns="0" rIns="54864" bIns="0" rtlCol="0" anchor="ctr"/>
+          <a:bodyPr rtlCol="0" anchor="ctr" wrap="square" lIns="54864" rIns="54864" tIns="0" bIns="0"/>
           <a:lstStyle/>
           <a:p>
             <a:pPr algn="ctr"/>
@@ -26363,7 +26191,6 @@
           <a:lstStyle/>
           <a:p>
             <a:pPr algn="ctr"/>
-            <a:endParaRPr/>
           </a:p>
         </p:txBody>
       </p:sp>
@@ -26384,7 +26211,7 @@
           <a:noFill/>
         </p:spPr>
         <p:txBody>
-          <a:bodyPr wrap="square" lIns="0" tIns="0" rIns="0" bIns="0" anchor="t">
+          <a:bodyPr wrap="square" anchor="t" lIns="0" rIns="0" tIns="0" bIns="0">
             <a:spAutoFit/>
           </a:bodyPr>
           <a:lstStyle/>
@@ -26423,7 +26250,7 @@
           <a:noFill/>
         </p:spPr>
         <p:txBody>
-          <a:bodyPr wrap="square" lIns="0" tIns="0" rIns="0" bIns="0" anchor="t">
+          <a:bodyPr wrap="square" anchor="t" lIns="0" rIns="0" tIns="0" bIns="0">
             <a:spAutoFit/>
           </a:bodyPr>
           <a:lstStyle/>
@@ -26486,7 +26313,7 @@
           </a:fontRef>
         </p:style>
         <p:txBody>
-          <a:bodyPr wrap="square" lIns="54864" tIns="0" rIns="54864" bIns="0" rtlCol="0" anchor="ctr"/>
+          <a:bodyPr rtlCol="0" anchor="ctr" wrap="square" lIns="54864" rIns="54864" tIns="0" bIns="0"/>
           <a:lstStyle/>
           <a:p>
             <a:pPr algn="ctr"/>
@@ -26547,7 +26374,6 @@
           <a:lstStyle/>
           <a:p>
             <a:pPr algn="ctr"/>
-            <a:endParaRPr/>
           </a:p>
         </p:txBody>
       </p:sp>
@@ -26568,7 +26394,7 @@
           <a:noFill/>
         </p:spPr>
         <p:txBody>
-          <a:bodyPr wrap="square" lIns="0" tIns="0" rIns="0" bIns="0" anchor="t">
+          <a:bodyPr wrap="square" anchor="t" lIns="0" rIns="0" tIns="0" bIns="0">
             <a:spAutoFit/>
           </a:bodyPr>
           <a:lstStyle/>
@@ -26607,7 +26433,7 @@
           <a:noFill/>
         </p:spPr>
         <p:txBody>
-          <a:bodyPr wrap="square" lIns="0" tIns="0" rIns="0" bIns="0" anchor="t">
+          <a:bodyPr wrap="square" anchor="t" lIns="0" rIns="0" tIns="0" bIns="0">
             <a:spAutoFit/>
           </a:bodyPr>
           <a:lstStyle/>
@@ -26670,7 +26496,7 @@
           </a:fontRef>
         </p:style>
         <p:txBody>
-          <a:bodyPr wrap="square" lIns="54864" tIns="0" rIns="54864" bIns="0" rtlCol="0" anchor="ctr"/>
+          <a:bodyPr rtlCol="0" anchor="ctr" wrap="square" lIns="54864" rIns="54864" tIns="0" bIns="0"/>
           <a:lstStyle/>
           <a:p>
             <a:pPr algn="ctr"/>
@@ -26731,7 +26557,6 @@
           <a:lstStyle/>
           <a:p>
             <a:pPr algn="ctr"/>
-            <a:endParaRPr/>
           </a:p>
         </p:txBody>
       </p:sp>
@@ -26752,7 +26577,7 @@
           <a:noFill/>
         </p:spPr>
         <p:txBody>
-          <a:bodyPr wrap="square" lIns="0" tIns="0" rIns="0" bIns="0" anchor="t">
+          <a:bodyPr wrap="square" anchor="t" lIns="0" rIns="0" tIns="0" bIns="0">
             <a:spAutoFit/>
           </a:bodyPr>
           <a:lstStyle/>
@@ -26791,7 +26616,7 @@
           <a:noFill/>
         </p:spPr>
         <p:txBody>
-          <a:bodyPr wrap="square" lIns="0" tIns="0" rIns="0" bIns="0" anchor="t">
+          <a:bodyPr wrap="square" anchor="t" lIns="0" rIns="0" tIns="0" bIns="0">
             <a:spAutoFit/>
           </a:bodyPr>
           <a:lstStyle/>
@@ -26854,7 +26679,7 @@
           </a:fontRef>
         </p:style>
         <p:txBody>
-          <a:bodyPr wrap="square" lIns="54864" tIns="0" rIns="54864" bIns="0" rtlCol="0" anchor="ctr"/>
+          <a:bodyPr rtlCol="0" anchor="ctr" wrap="square" lIns="54864" rIns="54864" tIns="0" bIns="0"/>
           <a:lstStyle/>
           <a:p>
             <a:pPr algn="ctr"/>
@@ -26915,7 +26740,6 @@
           <a:lstStyle/>
           <a:p>
             <a:pPr algn="ctr"/>
-            <a:endParaRPr/>
           </a:p>
         </p:txBody>
       </p:sp>
@@ -26936,7 +26760,7 @@
           <a:noFill/>
         </p:spPr>
         <p:txBody>
-          <a:bodyPr wrap="square" lIns="0" tIns="0" rIns="0" bIns="0" anchor="t">
+          <a:bodyPr wrap="square" anchor="t" lIns="0" rIns="0" tIns="0" bIns="0">
             <a:spAutoFit/>
           </a:bodyPr>
           <a:lstStyle/>
@@ -26975,7 +26799,7 @@
           <a:noFill/>
         </p:spPr>
         <p:txBody>
-          <a:bodyPr wrap="square" lIns="0" tIns="0" rIns="0" bIns="0" anchor="t">
+          <a:bodyPr wrap="square" anchor="t" lIns="0" rIns="0" tIns="0" bIns="0">
             <a:spAutoFit/>
           </a:bodyPr>
           <a:lstStyle/>
@@ -27038,7 +26862,7 @@
           </a:fontRef>
         </p:style>
         <p:txBody>
-          <a:bodyPr wrap="square" lIns="54864" tIns="0" rIns="54864" bIns="0" rtlCol="0" anchor="ctr"/>
+          <a:bodyPr rtlCol="0" anchor="ctr" wrap="square" lIns="54864" rIns="54864" tIns="0" bIns="0"/>
           <a:lstStyle/>
           <a:p>
             <a:pPr algn="ctr"/>
@@ -27099,7 +26923,6 @@
           <a:lstStyle/>
           <a:p>
             <a:pPr algn="ctr"/>
-            <a:endParaRPr/>
           </a:p>
         </p:txBody>
       </p:sp>
@@ -27120,7 +26943,7 @@
           <a:noFill/>
         </p:spPr>
         <p:txBody>
-          <a:bodyPr wrap="square" lIns="0" tIns="0" rIns="0" bIns="0" anchor="t">
+          <a:bodyPr wrap="square" anchor="t" lIns="0" rIns="0" tIns="0" bIns="0">
             <a:spAutoFit/>
           </a:bodyPr>
           <a:lstStyle/>
@@ -27159,7 +26982,7 @@
           <a:noFill/>
         </p:spPr>
         <p:txBody>
-          <a:bodyPr wrap="square" lIns="0" tIns="0" rIns="0" bIns="0" anchor="t">
+          <a:bodyPr wrap="square" anchor="t" lIns="0" rIns="0" tIns="0" bIns="0">
             <a:spAutoFit/>
           </a:bodyPr>
           <a:lstStyle/>
@@ -27222,7 +27045,7 @@
           </a:fontRef>
         </p:style>
         <p:txBody>
-          <a:bodyPr wrap="square" lIns="54864" tIns="0" rIns="54864" bIns="0" rtlCol="0" anchor="ctr"/>
+          <a:bodyPr rtlCol="0" anchor="ctr" wrap="square" lIns="54864" rIns="54864" tIns="0" bIns="0"/>
           <a:lstStyle/>
           <a:p>
             <a:pPr algn="ctr"/>
@@ -27283,7 +27106,6 @@
           <a:lstStyle/>
           <a:p>
             <a:pPr algn="ctr"/>
-            <a:endParaRPr/>
           </a:p>
         </p:txBody>
       </p:sp>
@@ -27304,7 +27126,7 @@
           <a:noFill/>
         </p:spPr>
         <p:txBody>
-          <a:bodyPr wrap="square" lIns="0" tIns="0" rIns="0" bIns="0" anchor="t">
+          <a:bodyPr wrap="square" anchor="t" lIns="0" rIns="0" tIns="0" bIns="0">
             <a:spAutoFit/>
           </a:bodyPr>
           <a:lstStyle/>
@@ -27343,7 +27165,7 @@
           <a:noFill/>
         </p:spPr>
         <p:txBody>
-          <a:bodyPr wrap="square" lIns="0" tIns="0" rIns="0" bIns="0" anchor="t">
+          <a:bodyPr wrap="square" anchor="t" lIns="0" rIns="0" tIns="0" bIns="0">
             <a:spAutoFit/>
           </a:bodyPr>
           <a:lstStyle/>
@@ -27406,7 +27228,7 @@
           </a:fontRef>
         </p:style>
         <p:txBody>
-          <a:bodyPr wrap="square" lIns="54864" tIns="0" rIns="54864" bIns="0" rtlCol="0" anchor="ctr"/>
+          <a:bodyPr rtlCol="0" anchor="ctr" wrap="square" lIns="54864" rIns="54864" tIns="0" bIns="0"/>
           <a:lstStyle/>
           <a:p>
             <a:pPr algn="ctr"/>
@@ -27467,7 +27289,6 @@
           <a:lstStyle/>
           <a:p>
             <a:pPr algn="ctr"/>
-            <a:endParaRPr/>
           </a:p>
         </p:txBody>
       </p:sp>
@@ -27488,7 +27309,7 @@
           <a:noFill/>
         </p:spPr>
         <p:txBody>
-          <a:bodyPr wrap="square" lIns="0" tIns="0" rIns="0" bIns="0" anchor="t">
+          <a:bodyPr wrap="square" anchor="t" lIns="0" rIns="0" tIns="0" bIns="0">
             <a:spAutoFit/>
           </a:bodyPr>
           <a:lstStyle/>
@@ -27527,7 +27348,7 @@
           <a:noFill/>
         </p:spPr>
         <p:txBody>
-          <a:bodyPr wrap="square" lIns="0" tIns="0" rIns="0" bIns="0" anchor="t">
+          <a:bodyPr wrap="square" anchor="t" lIns="0" rIns="0" tIns="0" bIns="0">
             <a:spAutoFit/>
           </a:bodyPr>
           <a:lstStyle/>
@@ -27590,7 +27411,7 @@
           </a:fontRef>
         </p:style>
         <p:txBody>
-          <a:bodyPr wrap="square" lIns="54864" tIns="0" rIns="54864" bIns="0" rtlCol="0" anchor="ctr"/>
+          <a:bodyPr rtlCol="0" anchor="ctr" wrap="square" lIns="54864" rIns="54864" tIns="0" bIns="0"/>
           <a:lstStyle/>
           <a:p>
             <a:pPr algn="ctr"/>
@@ -27623,7 +27444,7 @@
           <a:noFill/>
         </p:spPr>
         <p:txBody>
-          <a:bodyPr wrap="square" lIns="0" tIns="0" rIns="0" bIns="0" anchor="t">
+          <a:bodyPr wrap="square" anchor="t" lIns="0" rIns="0" tIns="0" bIns="0">
             <a:spAutoFit/>
           </a:bodyPr>
           <a:lstStyle/>
@@ -27662,7 +27483,7 @@
           <a:noFill/>
         </p:spPr>
         <p:txBody>
-          <a:bodyPr wrap="square" lIns="0" tIns="0" rIns="0" bIns="0" anchor="t">
+          <a:bodyPr wrap="square" anchor="t" lIns="0" rIns="0" tIns="0" bIns="0">
             <a:spAutoFit/>
           </a:bodyPr>
           <a:lstStyle/>
@@ -27701,7 +27522,7 @@
           <a:noFill/>
         </p:spPr>
         <p:txBody>
-          <a:bodyPr wrap="square" lIns="0" tIns="0" rIns="0" bIns="0" anchor="t">
+          <a:bodyPr wrap="square" anchor="t" lIns="0" rIns="0" tIns="0" bIns="0">
             <a:spAutoFit/>
           </a:bodyPr>
           <a:lstStyle/>
@@ -27728,23 +27549,11 @@
   <p:clrMapOvr>
     <a:masterClrMapping/>
   </p:clrMapOvr>
-  <mc:AlternateContent xmlns:mc="http://schemas.openxmlformats.org/markup-compatibility/2006">
-    <mc:Choice xmlns:p14="http://schemas.microsoft.com/office/powerpoint/2010/main" Requires="p14">
-      <p:transition spd="med" p14:dur="700">
-        <p:fade thruBlk="1"/>
-      </p:transition>
-    </mc:Choice>
-    <mc:Fallback>
-      <p:transition spd="med">
-        <p:fade thruBlk="1"/>
-      </p:transition>
-    </mc:Fallback>
-  </mc:AlternateContent>
 </p:sld>
 </file>
 
 <file path=ppt/slides/slide27.xml><?xml version="1.0" encoding="utf-8"?>
-<p:sld xmlns:a="http://schemas.openxmlformats.org/drawingml/2006/main" xmlns:r="http://schemas.openxmlformats.org/officeDocument/2006/relationships" xmlns:p="http://schemas.openxmlformats.org/presentationml/2006/main">
+<p:sld xmlns:a="http://schemas.openxmlformats.org/drawingml/2006/main" xmlns:p="http://schemas.openxmlformats.org/presentationml/2006/main" xmlns:r="http://schemas.openxmlformats.org/officeDocument/2006/relationships">
   <p:cSld>
     <p:spTree>
       <p:nvGrpSpPr>
@@ -27752,14 +27561,7 @@
         <p:cNvGrpSpPr/>
         <p:nvPr/>
       </p:nvGrpSpPr>
-      <p:grpSpPr>
-        <a:xfrm>
-          <a:off x="0" y="0"/>
-          <a:ext cx="0" cy="0"/>
-          <a:chOff x="0" y="0"/>
-          <a:chExt cx="0" cy="0"/>
-        </a:xfrm>
-      </p:grpSpPr>
+      <p:grpSpPr/>
       <p:pic>
         <p:nvPicPr>
           <p:cNvPr id="2" name="Picture 1" descr="bg_deep.png"/>
@@ -27769,7 +27571,7 @@
           <p:nvPr/>
         </p:nvPicPr>
         <p:blipFill>
-          <a:blip r:embed="rId3"/>
+          <a:blip r:embed="rId2"/>
           <a:stretch>
             <a:fillRect/>
           </a:stretch>
@@ -27801,7 +27603,7 @@
           <a:noFill/>
         </p:spPr>
         <p:txBody>
-          <a:bodyPr wrap="square" lIns="0" tIns="0" rIns="0" bIns="0" anchor="t">
+          <a:bodyPr wrap="square" anchor="t" lIns="0" rIns="0" tIns="0" bIns="0">
             <a:spAutoFit/>
           </a:bodyPr>
           <a:lstStyle/>
@@ -27840,7 +27642,7 @@
           <a:noFill/>
         </p:spPr>
         <p:txBody>
-          <a:bodyPr wrap="square" lIns="0" tIns="0" rIns="0" bIns="0" anchor="t">
+          <a:bodyPr wrap="square" anchor="t" lIns="0" rIns="0" tIns="0" bIns="0">
             <a:spAutoFit/>
           </a:bodyPr>
           <a:lstStyle/>
@@ -27879,7 +27681,7 @@
           <a:noFill/>
         </p:spPr>
         <p:txBody>
-          <a:bodyPr wrap="square" lIns="0" tIns="0" rIns="0" bIns="0" anchor="t">
+          <a:bodyPr wrap="square" anchor="t" lIns="0" rIns="0" tIns="0" bIns="0">
             <a:spAutoFit/>
           </a:bodyPr>
           <a:lstStyle/>
@@ -27942,7 +27744,7 @@
           </a:fontRef>
         </p:style>
         <p:txBody>
-          <a:bodyPr wrap="square" lIns="54864" tIns="0" rIns="54864" bIns="0" rtlCol="0" anchor="ctr"/>
+          <a:bodyPr rtlCol="0" anchor="ctr" wrap="square" lIns="54864" rIns="54864" tIns="0" bIns="0"/>
           <a:lstStyle/>
           <a:p>
             <a:pPr algn="ctr"/>
@@ -27975,7 +27777,7 @@
           <a:noFill/>
         </p:spPr>
         <p:txBody>
-          <a:bodyPr wrap="square" lIns="0" tIns="0" rIns="0" bIns="0" anchor="t">
+          <a:bodyPr wrap="square" anchor="t" lIns="0" rIns="0" tIns="0" bIns="0">
             <a:spAutoFit/>
           </a:bodyPr>
           <a:lstStyle/>
@@ -28038,7 +27840,7 @@
           </a:fontRef>
         </p:style>
         <p:txBody>
-          <a:bodyPr wrap="square" lIns="54864" tIns="0" rIns="54864" bIns="0" rtlCol="0" anchor="ctr"/>
+          <a:bodyPr rtlCol="0" anchor="ctr" wrap="square" lIns="54864" rIns="54864" tIns="0" bIns="0"/>
           <a:lstStyle/>
           <a:p>
             <a:pPr algn="ctr"/>
@@ -28071,7 +27873,7 @@
           <a:noFill/>
         </p:spPr>
         <p:txBody>
-          <a:bodyPr wrap="square" lIns="0" tIns="0" rIns="0" bIns="0" anchor="t">
+          <a:bodyPr wrap="square" anchor="t" lIns="0" rIns="0" tIns="0" bIns="0">
             <a:spAutoFit/>
           </a:bodyPr>
           <a:lstStyle/>
@@ -28134,7 +27936,7 @@
           </a:fontRef>
         </p:style>
         <p:txBody>
-          <a:bodyPr wrap="square" lIns="54864" tIns="0" rIns="54864" bIns="0" rtlCol="0" anchor="ctr"/>
+          <a:bodyPr rtlCol="0" anchor="ctr" wrap="square" lIns="54864" rIns="54864" tIns="0" bIns="0"/>
           <a:lstStyle/>
           <a:p>
             <a:pPr algn="ctr"/>
@@ -28167,7 +27969,7 @@
           <a:noFill/>
         </p:spPr>
         <p:txBody>
-          <a:bodyPr wrap="square" lIns="0" tIns="0" rIns="0" bIns="0" anchor="t">
+          <a:bodyPr wrap="square" anchor="t" lIns="0" rIns="0" tIns="0" bIns="0">
             <a:spAutoFit/>
           </a:bodyPr>
           <a:lstStyle/>
@@ -28230,7 +28032,7 @@
           </a:fontRef>
         </p:style>
         <p:txBody>
-          <a:bodyPr wrap="square" lIns="54864" tIns="0" rIns="54864" bIns="0" rtlCol="0" anchor="ctr"/>
+          <a:bodyPr rtlCol="0" anchor="ctr" wrap="square" lIns="54864" rIns="54864" tIns="0" bIns="0"/>
           <a:lstStyle/>
           <a:p>
             <a:pPr algn="ctr"/>
@@ -28263,7 +28065,7 @@
           <a:noFill/>
         </p:spPr>
         <p:txBody>
-          <a:bodyPr wrap="square" lIns="0" tIns="0" rIns="0" bIns="0" anchor="t">
+          <a:bodyPr wrap="square" anchor="t" lIns="0" rIns="0" tIns="0" bIns="0">
             <a:spAutoFit/>
           </a:bodyPr>
           <a:lstStyle/>
@@ -28280,7 +28082,7 @@
                 </a:solidFill>
                 <a:latin typeface="Segoe UI"/>
               </a:rPr>
-              <a:t>Payment checks run only against a local stub of Razorpay's API, outside the 757 — never a real account.</a:t>
+              <a:t>Payment checks run only against a local stub of Razorpay's API, outside the 760 — never a real account.</a:t>
             </a:r>
           </a:p>
         </p:txBody>
@@ -28326,7 +28128,7 @@
           </a:fontRef>
         </p:style>
         <p:txBody>
-          <a:bodyPr wrap="square" lIns="54864" tIns="0" rIns="54864" bIns="0" rtlCol="0" anchor="ctr"/>
+          <a:bodyPr rtlCol="0" anchor="ctr" wrap="square" lIns="54864" rIns="54864" tIns="0" bIns="0"/>
           <a:lstStyle/>
           <a:p>
             <a:pPr algn="ctr"/>
@@ -28359,7 +28161,7 @@
           <a:noFill/>
         </p:spPr>
         <p:txBody>
-          <a:bodyPr wrap="square" lIns="0" tIns="0" rIns="0" bIns="0" anchor="t">
+          <a:bodyPr wrap="square" anchor="t" lIns="0" rIns="0" tIns="0" bIns="0">
             <a:spAutoFit/>
           </a:bodyPr>
           <a:lstStyle/>
@@ -28422,7 +28224,7 @@
           </a:fontRef>
         </p:style>
         <p:txBody>
-          <a:bodyPr wrap="square" lIns="54864" tIns="0" rIns="54864" bIns="0" rtlCol="0" anchor="ctr"/>
+          <a:bodyPr rtlCol="0" anchor="ctr" wrap="square" lIns="54864" rIns="54864" tIns="0" bIns="0"/>
           <a:lstStyle/>
           <a:p>
             <a:pPr algn="ctr"/>
@@ -28455,7 +28257,7 @@
           <a:noFill/>
         </p:spPr>
         <p:txBody>
-          <a:bodyPr wrap="square" lIns="0" tIns="0" rIns="0" bIns="0" anchor="t">
+          <a:bodyPr wrap="square" anchor="t" lIns="0" rIns="0" tIns="0" bIns="0">
             <a:spAutoFit/>
           </a:bodyPr>
           <a:lstStyle/>
@@ -28518,7 +28320,7 @@
           </a:fontRef>
         </p:style>
         <p:txBody>
-          <a:bodyPr wrap="square" lIns="54864" tIns="0" rIns="54864" bIns="0" rtlCol="0" anchor="ctr"/>
+          <a:bodyPr rtlCol="0" anchor="ctr" wrap="square" lIns="54864" rIns="54864" tIns="0" bIns="0"/>
           <a:lstStyle/>
           <a:p>
             <a:pPr algn="ctr"/>
@@ -28551,7 +28353,7 @@
           <a:noFill/>
         </p:spPr>
         <p:txBody>
-          <a:bodyPr wrap="square" lIns="0" tIns="0" rIns="0" bIns="0" anchor="t">
+          <a:bodyPr wrap="square" anchor="t" lIns="0" rIns="0" tIns="0" bIns="0">
             <a:spAutoFit/>
           </a:bodyPr>
           <a:lstStyle/>
@@ -28614,7 +28416,7 @@
           </a:fontRef>
         </p:style>
         <p:txBody>
-          <a:bodyPr wrap="square" lIns="54864" tIns="0" rIns="54864" bIns="0" rtlCol="0" anchor="ctr"/>
+          <a:bodyPr rtlCol="0" anchor="ctr" wrap="square" lIns="54864" rIns="54864" tIns="0" bIns="0"/>
           <a:lstStyle/>
           <a:p>
             <a:pPr algn="ctr"/>
@@ -28647,7 +28449,7 @@
           <a:noFill/>
         </p:spPr>
         <p:txBody>
-          <a:bodyPr wrap="square" lIns="0" tIns="0" rIns="0" bIns="0" anchor="t">
+          <a:bodyPr wrap="square" anchor="t" lIns="0" rIns="0" tIns="0" bIns="0">
             <a:spAutoFit/>
           </a:bodyPr>
           <a:lstStyle/>
@@ -28710,7 +28512,7 @@
           </a:fontRef>
         </p:style>
         <p:txBody>
-          <a:bodyPr wrap="square" lIns="54864" tIns="0" rIns="54864" bIns="0" rtlCol="0" anchor="ctr"/>
+          <a:bodyPr rtlCol="0" anchor="ctr" wrap="square" lIns="54864" rIns="54864" tIns="0" bIns="0"/>
           <a:lstStyle/>
           <a:p>
             <a:pPr algn="ctr"/>
@@ -28743,7 +28545,7 @@
           <a:noFill/>
         </p:spPr>
         <p:txBody>
-          <a:bodyPr wrap="square" lIns="0" tIns="0" rIns="0" bIns="0" anchor="t">
+          <a:bodyPr wrap="square" anchor="t" lIns="0" rIns="0" tIns="0" bIns="0">
             <a:spAutoFit/>
           </a:bodyPr>
           <a:lstStyle/>
@@ -28782,7 +28584,7 @@
           <a:noFill/>
         </p:spPr>
         <p:txBody>
-          <a:bodyPr wrap="square" lIns="0" tIns="0" rIns="0" bIns="0" anchor="t">
+          <a:bodyPr wrap="square" anchor="t" lIns="0" rIns="0" tIns="0" bIns="0">
             <a:spAutoFit/>
           </a:bodyPr>
           <a:lstStyle/>
@@ -28821,7 +28623,7 @@
           <a:noFill/>
         </p:spPr>
         <p:txBody>
-          <a:bodyPr wrap="square" lIns="0" tIns="0" rIns="0" bIns="0" anchor="t">
+          <a:bodyPr wrap="square" anchor="t" lIns="0" rIns="0" tIns="0" bIns="0">
             <a:spAutoFit/>
           </a:bodyPr>
           <a:lstStyle/>
@@ -28848,23 +28650,11 @@
   <p:clrMapOvr>
     <a:masterClrMapping/>
   </p:clrMapOvr>
-  <mc:AlternateContent xmlns:mc="http://schemas.openxmlformats.org/markup-compatibility/2006">
-    <mc:Choice xmlns:p14="http://schemas.microsoft.com/office/powerpoint/2010/main" Requires="p14">
-      <p:transition spd="med" p14:dur="700">
-        <p:fade thruBlk="1"/>
-      </p:transition>
-    </mc:Choice>
-    <mc:Fallback>
-      <p:transition spd="med">
-        <p:fade thruBlk="1"/>
-      </p:transition>
-    </mc:Fallback>
-  </mc:AlternateContent>
 </p:sld>
 </file>
 
 <file path=ppt/slides/slide28.xml><?xml version="1.0" encoding="utf-8"?>
-<p:sld xmlns:a="http://schemas.openxmlformats.org/drawingml/2006/main" xmlns:r="http://schemas.openxmlformats.org/officeDocument/2006/relationships" xmlns:p="http://schemas.openxmlformats.org/presentationml/2006/main">
+<p:sld xmlns:a="http://schemas.openxmlformats.org/drawingml/2006/main" xmlns:p="http://schemas.openxmlformats.org/presentationml/2006/main" xmlns:r="http://schemas.openxmlformats.org/officeDocument/2006/relationships">
   <p:cSld>
     <p:spTree>
       <p:nvGrpSpPr>
@@ -28872,14 +28662,7 @@
         <p:cNvGrpSpPr/>
         <p:nvPr/>
       </p:nvGrpSpPr>
-      <p:grpSpPr>
-        <a:xfrm>
-          <a:off x="0" y="0"/>
-          <a:ext cx="0" cy="0"/>
-          <a:chOff x="0" y="0"/>
-          <a:chExt cx="0" cy="0"/>
-        </a:xfrm>
-      </p:grpSpPr>
+      <p:grpSpPr/>
       <p:pic>
         <p:nvPicPr>
           <p:cNvPr id="2" name="Picture 1" descr="bg_deep.png"/>
@@ -28921,7 +28704,7 @@
           <a:noFill/>
         </p:spPr>
         <p:txBody>
-          <a:bodyPr wrap="square" lIns="0" tIns="0" rIns="0" bIns="0" anchor="t">
+          <a:bodyPr wrap="square" anchor="t" lIns="0" rIns="0" tIns="0" bIns="0">
             <a:spAutoFit/>
           </a:bodyPr>
           <a:lstStyle/>
@@ -28960,7 +28743,7 @@
           <a:noFill/>
         </p:spPr>
         <p:txBody>
-          <a:bodyPr wrap="square" lIns="0" tIns="0" rIns="0" bIns="0" anchor="t">
+          <a:bodyPr wrap="square" anchor="t" lIns="0" rIns="0" tIns="0" bIns="0">
             <a:spAutoFit/>
           </a:bodyPr>
           <a:lstStyle/>
@@ -29027,7 +28810,6 @@
           <a:lstStyle/>
           <a:p>
             <a:pPr algn="ctr"/>
-            <a:endParaRPr/>
           </a:p>
         </p:txBody>
       </p:sp>
@@ -29048,7 +28830,7 @@
           <a:noFill/>
         </p:spPr>
         <p:txBody>
-          <a:bodyPr wrap="square" lIns="0" tIns="0" rIns="0" bIns="0" anchor="t">
+          <a:bodyPr wrap="square" anchor="t" lIns="0" rIns="0" tIns="0" bIns="0">
             <a:spAutoFit/>
           </a:bodyPr>
           <a:lstStyle/>
@@ -29087,7 +28869,7 @@
           <a:noFill/>
         </p:spPr>
         <p:txBody>
-          <a:bodyPr wrap="square" lIns="0" tIns="0" rIns="0" bIns="0" anchor="t">
+          <a:bodyPr wrap="square" anchor="t" lIns="0" rIns="0" tIns="0" bIns="0">
             <a:spAutoFit/>
           </a:bodyPr>
           <a:lstStyle/>
@@ -29126,7 +28908,7 @@
           <a:noFill/>
         </p:spPr>
         <p:txBody>
-          <a:bodyPr wrap="square" lIns="0" tIns="0" rIns="0" bIns="0" anchor="t">
+          <a:bodyPr wrap="square" anchor="t" lIns="0" rIns="0" tIns="0" bIns="0">
             <a:spAutoFit/>
           </a:bodyPr>
           <a:lstStyle/>
@@ -29165,7 +28947,7 @@
           <a:noFill/>
         </p:spPr>
         <p:txBody>
-          <a:bodyPr wrap="square" lIns="0" tIns="0" rIns="0" bIns="0" anchor="t">
+          <a:bodyPr wrap="square" anchor="t" lIns="0" rIns="0" tIns="0" bIns="0">
             <a:spAutoFit/>
           </a:bodyPr>
           <a:lstStyle/>
@@ -29204,7 +28986,7 @@
           <a:noFill/>
         </p:spPr>
         <p:txBody>
-          <a:bodyPr wrap="square" lIns="0" tIns="0" rIns="0" bIns="0" anchor="t">
+          <a:bodyPr wrap="square" anchor="t" lIns="0" rIns="0" tIns="0" bIns="0">
             <a:spAutoFit/>
           </a:bodyPr>
           <a:lstStyle/>
@@ -29271,7 +29053,6 @@
           <a:lstStyle/>
           <a:p>
             <a:pPr algn="ctr"/>
-            <a:endParaRPr/>
           </a:p>
         </p:txBody>
       </p:sp>
@@ -29292,7 +29073,7 @@
           <a:noFill/>
         </p:spPr>
         <p:txBody>
-          <a:bodyPr wrap="square" lIns="0" tIns="0" rIns="0" bIns="0" anchor="t">
+          <a:bodyPr wrap="square" anchor="t" lIns="0" rIns="0" tIns="0" bIns="0">
             <a:spAutoFit/>
           </a:bodyPr>
           <a:lstStyle/>
@@ -29331,7 +29112,7 @@
           <a:noFill/>
         </p:spPr>
         <p:txBody>
-          <a:bodyPr wrap="square" lIns="0" tIns="0" rIns="0" bIns="0" anchor="t">
+          <a:bodyPr wrap="square" anchor="t" lIns="0" rIns="0" tIns="0" bIns="0">
             <a:spAutoFit/>
           </a:bodyPr>
           <a:lstStyle/>
@@ -29370,7 +29151,7 @@
           <a:noFill/>
         </p:spPr>
         <p:txBody>
-          <a:bodyPr wrap="square" lIns="0" tIns="0" rIns="0" bIns="0" anchor="t">
+          <a:bodyPr wrap="square" anchor="t" lIns="0" rIns="0" tIns="0" bIns="0">
             <a:spAutoFit/>
           </a:bodyPr>
           <a:lstStyle/>
@@ -29409,7 +29190,7 @@
           <a:noFill/>
         </p:spPr>
         <p:txBody>
-          <a:bodyPr wrap="square" lIns="0" tIns="0" rIns="0" bIns="0" anchor="t">
+          <a:bodyPr wrap="square" anchor="t" lIns="0" rIns="0" tIns="0" bIns="0">
             <a:spAutoFit/>
           </a:bodyPr>
           <a:lstStyle/>
@@ -29448,7 +29229,7 @@
           <a:noFill/>
         </p:spPr>
         <p:txBody>
-          <a:bodyPr wrap="square" lIns="0" tIns="0" rIns="0" bIns="0" anchor="t">
+          <a:bodyPr wrap="square" anchor="t" lIns="0" rIns="0" tIns="0" bIns="0">
             <a:spAutoFit/>
           </a:bodyPr>
           <a:lstStyle/>
@@ -29515,7 +29296,6 @@
           <a:lstStyle/>
           <a:p>
             <a:pPr algn="ctr"/>
-            <a:endParaRPr/>
           </a:p>
         </p:txBody>
       </p:sp>
@@ -29536,7 +29316,7 @@
           <a:noFill/>
         </p:spPr>
         <p:txBody>
-          <a:bodyPr wrap="square" lIns="0" tIns="0" rIns="0" bIns="0" anchor="t">
+          <a:bodyPr wrap="square" anchor="t" lIns="0" rIns="0" tIns="0" bIns="0">
             <a:spAutoFit/>
           </a:bodyPr>
           <a:lstStyle/>
@@ -29575,7 +29355,7 @@
           <a:noFill/>
         </p:spPr>
         <p:txBody>
-          <a:bodyPr wrap="square" lIns="0" tIns="0" rIns="0" bIns="0" anchor="t">
+          <a:bodyPr wrap="square" anchor="t" lIns="0" rIns="0" tIns="0" bIns="0">
             <a:spAutoFit/>
           </a:bodyPr>
           <a:lstStyle/>
@@ -29614,7 +29394,7 @@
           <a:noFill/>
         </p:spPr>
         <p:txBody>
-          <a:bodyPr wrap="square" lIns="0" tIns="0" rIns="0" bIns="0" anchor="t">
+          <a:bodyPr wrap="square" anchor="t" lIns="0" rIns="0" tIns="0" bIns="0">
             <a:spAutoFit/>
           </a:bodyPr>
           <a:lstStyle/>
@@ -29653,7 +29433,7 @@
           <a:noFill/>
         </p:spPr>
         <p:txBody>
-          <a:bodyPr wrap="square" lIns="0" tIns="0" rIns="0" bIns="0" anchor="t">
+          <a:bodyPr wrap="square" anchor="t" lIns="0" rIns="0" tIns="0" bIns="0">
             <a:spAutoFit/>
           </a:bodyPr>
           <a:lstStyle/>
@@ -29692,7 +29472,7 @@
           <a:noFill/>
         </p:spPr>
         <p:txBody>
-          <a:bodyPr wrap="square" lIns="0" tIns="0" rIns="0" bIns="0" anchor="t">
+          <a:bodyPr wrap="square" anchor="t" lIns="0" rIns="0" tIns="0" bIns="0">
             <a:spAutoFit/>
           </a:bodyPr>
           <a:lstStyle/>
@@ -29731,7 +29511,7 @@
           <a:noFill/>
         </p:spPr>
         <p:txBody>
-          <a:bodyPr wrap="square" lIns="0" tIns="0" rIns="0" bIns="0" anchor="t">
+          <a:bodyPr wrap="square" anchor="t" lIns="0" rIns="0" tIns="0" bIns="0">
             <a:spAutoFit/>
           </a:bodyPr>
           <a:lstStyle/>
@@ -29770,7 +29550,7 @@
           <a:noFill/>
         </p:spPr>
         <p:txBody>
-          <a:bodyPr wrap="square" lIns="0" tIns="0" rIns="0" bIns="0" anchor="t">
+          <a:bodyPr wrap="square" anchor="t" lIns="0" rIns="0" tIns="0" bIns="0">
             <a:spAutoFit/>
           </a:bodyPr>
           <a:lstStyle/>
@@ -29809,7 +29589,7 @@
           <a:noFill/>
         </p:spPr>
         <p:txBody>
-          <a:bodyPr wrap="square" lIns="0" tIns="0" rIns="0" bIns="0" anchor="t">
+          <a:bodyPr wrap="square" anchor="t" lIns="0" rIns="0" tIns="0" bIns="0">
             <a:spAutoFit/>
           </a:bodyPr>
           <a:lstStyle/>
@@ -29848,7 +29628,7 @@
           <a:noFill/>
         </p:spPr>
         <p:txBody>
-          <a:bodyPr wrap="square" lIns="0" tIns="0" rIns="0" bIns="0" anchor="t">
+          <a:bodyPr wrap="square" anchor="t" lIns="0" rIns="0" tIns="0" bIns="0">
             <a:spAutoFit/>
           </a:bodyPr>
           <a:lstStyle/>
@@ -29875,23 +29655,11 @@
   <p:clrMapOvr>
     <a:masterClrMapping/>
   </p:clrMapOvr>
-  <mc:AlternateContent xmlns:mc="http://schemas.openxmlformats.org/markup-compatibility/2006">
-    <mc:Choice xmlns:p14="http://schemas.microsoft.com/office/powerpoint/2010/main" Requires="p14">
-      <p:transition spd="med" p14:dur="700">
-        <p:fade thruBlk="1"/>
-      </p:transition>
-    </mc:Choice>
-    <mc:Fallback>
-      <p:transition spd="med">
-        <p:fade thruBlk="1"/>
-      </p:transition>
-    </mc:Fallback>
-  </mc:AlternateContent>
 </p:sld>
 </file>
 
 <file path=ppt/slides/slide29.xml><?xml version="1.0" encoding="utf-8"?>
-<p:sld xmlns:a="http://schemas.openxmlformats.org/drawingml/2006/main" xmlns:r="http://schemas.openxmlformats.org/officeDocument/2006/relationships" xmlns:p="http://schemas.openxmlformats.org/presentationml/2006/main">
+<p:sld xmlns:a="http://schemas.openxmlformats.org/drawingml/2006/main" xmlns:p="http://schemas.openxmlformats.org/presentationml/2006/main" xmlns:r="http://schemas.openxmlformats.org/officeDocument/2006/relationships">
   <p:cSld>
     <p:spTree>
       <p:nvGrpSpPr>
@@ -29899,14 +29667,7 @@
         <p:cNvGrpSpPr/>
         <p:nvPr/>
       </p:nvGrpSpPr>
-      <p:grpSpPr>
-        <a:xfrm>
-          <a:off x="0" y="0"/>
-          <a:ext cx="0" cy="0"/>
-          <a:chOff x="0" y="0"/>
-          <a:chExt cx="0" cy="0"/>
-        </a:xfrm>
-      </p:grpSpPr>
+      <p:grpSpPr/>
       <p:pic>
         <p:nvPicPr>
           <p:cNvPr id="2" name="Picture 1" descr="bg_deep.png"/>
@@ -29948,7 +29709,7 @@
           <a:noFill/>
         </p:spPr>
         <p:txBody>
-          <a:bodyPr wrap="square" lIns="0" tIns="0" rIns="0" bIns="0" anchor="t">
+          <a:bodyPr wrap="square" anchor="t" lIns="0" rIns="0" tIns="0" bIns="0">
             <a:spAutoFit/>
           </a:bodyPr>
           <a:lstStyle/>
@@ -29987,7 +29748,7 @@
           <a:noFill/>
         </p:spPr>
         <p:txBody>
-          <a:bodyPr wrap="square" lIns="0" tIns="0" rIns="0" bIns="0" anchor="t">
+          <a:bodyPr wrap="square" anchor="t" lIns="0" rIns="0" tIns="0" bIns="0">
             <a:spAutoFit/>
           </a:bodyPr>
           <a:lstStyle/>
@@ -30026,7 +29787,7 @@
           <a:noFill/>
         </p:spPr>
         <p:txBody>
-          <a:bodyPr wrap="square" lIns="0" tIns="0" rIns="0" bIns="0" anchor="t">
+          <a:bodyPr wrap="square" anchor="t" lIns="0" rIns="0" tIns="0" bIns="0">
             <a:spAutoFit/>
           </a:bodyPr>
           <a:lstStyle/>
@@ -30089,7 +29850,7 @@
           </a:fontRef>
         </p:style>
         <p:txBody>
-          <a:bodyPr wrap="square" lIns="73152" tIns="36576" rIns="73152" bIns="36576" rtlCol="0" anchor="ctr"/>
+          <a:bodyPr rtlCol="0" anchor="ctr" wrap="square" lIns="73152" rIns="73152" tIns="36576" bIns="36576"/>
           <a:lstStyle/>
           <a:p>
             <a:pPr algn="ctr"/>
@@ -30162,7 +29923,7 @@
           </a:fontRef>
         </p:style>
         <p:txBody>
-          <a:bodyPr wrap="square" lIns="73152" tIns="36576" rIns="73152" bIns="36576" rtlCol="0" anchor="ctr"/>
+          <a:bodyPr rtlCol="0" anchor="ctr" wrap="square" lIns="73152" rIns="73152" tIns="36576" bIns="36576"/>
           <a:lstStyle/>
           <a:p>
             <a:pPr algn="ctr"/>
@@ -30235,7 +29996,7 @@
           </a:fontRef>
         </p:style>
         <p:txBody>
-          <a:bodyPr wrap="square" lIns="73152" tIns="36576" rIns="73152" bIns="36576" rtlCol="0" anchor="ctr"/>
+          <a:bodyPr rtlCol="0" anchor="ctr" wrap="square" lIns="73152" rIns="73152" tIns="36576" bIns="36576"/>
           <a:lstStyle/>
           <a:p>
             <a:pPr algn="ctr"/>
@@ -30308,7 +30069,7 @@
           </a:fontRef>
         </p:style>
         <p:txBody>
-          <a:bodyPr wrap="square" lIns="73152" tIns="36576" rIns="73152" bIns="36576" rtlCol="0" anchor="ctr"/>
+          <a:bodyPr rtlCol="0" anchor="ctr" wrap="square" lIns="73152" rIns="73152" tIns="36576" bIns="36576"/>
           <a:lstStyle/>
           <a:p>
             <a:pPr algn="ctr"/>
@@ -30385,7 +30146,6 @@
           <a:lstStyle/>
           <a:p>
             <a:pPr algn="ctr"/>
-            <a:endParaRPr/>
           </a:p>
         </p:txBody>
       </p:sp>
@@ -30406,7 +30166,7 @@
           <a:noFill/>
         </p:spPr>
         <p:txBody>
-          <a:bodyPr wrap="square" lIns="0" tIns="0" rIns="0" bIns="0" anchor="t">
+          <a:bodyPr wrap="square" anchor="t" lIns="0" rIns="0" tIns="0" bIns="0">
             <a:spAutoFit/>
           </a:bodyPr>
           <a:lstStyle/>
@@ -30461,7 +30221,7 @@
           <a:noFill/>
         </p:spPr>
         <p:txBody>
-          <a:bodyPr wrap="square" lIns="0" tIns="0" rIns="0" bIns="0" anchor="t">
+          <a:bodyPr wrap="square" anchor="t" lIns="0" rIns="0" tIns="0" bIns="0">
             <a:spAutoFit/>
           </a:bodyPr>
           <a:lstStyle/>
@@ -30500,7 +30260,7 @@
           <a:noFill/>
         </p:spPr>
         <p:txBody>
-          <a:bodyPr wrap="square" lIns="0" tIns="0" rIns="0" bIns="0" anchor="t">
+          <a:bodyPr wrap="square" anchor="t" lIns="0" rIns="0" tIns="0" bIns="0">
             <a:spAutoFit/>
           </a:bodyPr>
           <a:lstStyle/>
@@ -30539,7 +30299,7 @@
           <a:noFill/>
         </p:spPr>
         <p:txBody>
-          <a:bodyPr wrap="square" lIns="0" tIns="0" rIns="0" bIns="0" anchor="t">
+          <a:bodyPr wrap="square" anchor="t" lIns="0" rIns="0" tIns="0" bIns="0">
             <a:spAutoFit/>
           </a:bodyPr>
           <a:lstStyle/>
@@ -30566,23 +30326,11 @@
   <p:clrMapOvr>
     <a:masterClrMapping/>
   </p:clrMapOvr>
-  <mc:AlternateContent xmlns:mc="http://schemas.openxmlformats.org/markup-compatibility/2006">
-    <mc:Choice xmlns:p14="http://schemas.microsoft.com/office/powerpoint/2010/main" Requires="p14">
-      <p:transition spd="med" p14:dur="700">
-        <p:fade thruBlk="1"/>
-      </p:transition>
-    </mc:Choice>
-    <mc:Fallback>
-      <p:transition spd="med">
-        <p:fade thruBlk="1"/>
-      </p:transition>
-    </mc:Fallback>
-  </mc:AlternateContent>
 </p:sld>
 </file>
 
 <file path=ppt/slides/slide3.xml><?xml version="1.0" encoding="utf-8"?>
-<p:sld xmlns:a="http://schemas.openxmlformats.org/drawingml/2006/main" xmlns:r="http://schemas.openxmlformats.org/officeDocument/2006/relationships" xmlns:p="http://schemas.openxmlformats.org/presentationml/2006/main">
+<p:sld xmlns:a="http://schemas.openxmlformats.org/drawingml/2006/main" xmlns:p="http://schemas.openxmlformats.org/presentationml/2006/main" xmlns:r="http://schemas.openxmlformats.org/officeDocument/2006/relationships">
   <p:cSld>
     <p:spTree>
       <p:nvGrpSpPr>
@@ -30590,14 +30338,7 @@
         <p:cNvGrpSpPr/>
         <p:nvPr/>
       </p:nvGrpSpPr>
-      <p:grpSpPr>
-        <a:xfrm>
-          <a:off x="0" y="0"/>
-          <a:ext cx="0" cy="0"/>
-          <a:chOff x="0" y="0"/>
-          <a:chExt cx="0" cy="0"/>
-        </a:xfrm>
-      </p:grpSpPr>
+      <p:grpSpPr/>
       <p:pic>
         <p:nvPicPr>
           <p:cNvPr id="2" name="Picture 1" descr="bg_deep.png"/>
@@ -30607,7 +30348,7 @@
           <p:nvPr/>
         </p:nvPicPr>
         <p:blipFill>
-          <a:blip r:embed="rId3"/>
+          <a:blip r:embed="rId2"/>
           <a:stretch>
             <a:fillRect/>
           </a:stretch>
@@ -30639,7 +30380,7 @@
           <a:noFill/>
         </p:spPr>
         <p:txBody>
-          <a:bodyPr wrap="square" lIns="0" tIns="0" rIns="0" bIns="0" anchor="t">
+          <a:bodyPr wrap="square" anchor="t" lIns="0" rIns="0" tIns="0" bIns="0">
             <a:spAutoFit/>
           </a:bodyPr>
           <a:lstStyle/>
@@ -30678,7 +30419,7 @@
           <a:noFill/>
         </p:spPr>
         <p:txBody>
-          <a:bodyPr wrap="square" lIns="0" tIns="0" rIns="0" bIns="0" anchor="t">
+          <a:bodyPr wrap="square" anchor="t" lIns="0" rIns="0" tIns="0" bIns="0">
             <a:spAutoFit/>
           </a:bodyPr>
           <a:lstStyle/>
@@ -30741,7 +30482,7 @@
           </a:fontRef>
         </p:style>
         <p:txBody>
-          <a:bodyPr wrap="square" lIns="73152" tIns="36576" rIns="73152" bIns="36576" rtlCol="0" anchor="ctr"/>
+          <a:bodyPr rtlCol="0" anchor="ctr" wrap="square" lIns="73152" rIns="73152" tIns="36576" bIns="36576"/>
           <a:lstStyle/>
           <a:p>
             <a:pPr algn="ctr"/>
@@ -30850,7 +30591,7 @@
           </a:fontRef>
         </p:style>
         <p:txBody>
-          <a:bodyPr wrap="square" lIns="73152" tIns="36576" rIns="73152" bIns="36576" rtlCol="0" anchor="ctr"/>
+          <a:bodyPr rtlCol="0" anchor="ctr" wrap="square" lIns="73152" rIns="73152" tIns="36576" bIns="36576"/>
           <a:lstStyle/>
           <a:p>
             <a:pPr algn="ctr"/>
@@ -30959,7 +30700,7 @@
           </a:fontRef>
         </p:style>
         <p:txBody>
-          <a:bodyPr wrap="square" lIns="73152" tIns="36576" rIns="73152" bIns="36576" rtlCol="0" anchor="ctr"/>
+          <a:bodyPr rtlCol="0" anchor="ctr" wrap="square" lIns="73152" rIns="73152" tIns="36576" bIns="36576"/>
           <a:lstStyle/>
           <a:p>
             <a:pPr algn="ctr"/>
@@ -31070,7 +30811,7 @@
           </a:fontRef>
         </p:style>
         <p:txBody>
-          <a:bodyPr wrap="square" lIns="73152" tIns="36576" rIns="73152" bIns="36576" rtlCol="0" anchor="ctr"/>
+          <a:bodyPr rtlCol="0" anchor="ctr" wrap="square" lIns="73152" rIns="73152" tIns="36576" bIns="36576"/>
           <a:lstStyle/>
           <a:p>
             <a:pPr algn="ctr"/>
@@ -31180,7 +30921,7 @@
           </a:fontRef>
         </p:style>
         <p:txBody>
-          <a:bodyPr wrap="square" lIns="73152" tIns="36576" rIns="73152" bIns="36576" rtlCol="0" anchor="ctr"/>
+          <a:bodyPr rtlCol="0" anchor="ctr" wrap="square" lIns="73152" rIns="73152" tIns="36576" bIns="36576"/>
           <a:lstStyle/>
           <a:p>
             <a:pPr algn="ctr"/>
@@ -31290,7 +31031,7 @@
           </a:fontRef>
         </p:style>
         <p:txBody>
-          <a:bodyPr wrap="square" lIns="73152" tIns="36576" rIns="73152" bIns="36576" rtlCol="0" anchor="ctr"/>
+          <a:bodyPr rtlCol="0" anchor="ctr" wrap="square" lIns="73152" rIns="73152" tIns="36576" bIns="36576"/>
           <a:lstStyle/>
           <a:p>
             <a:pPr algn="ctr"/>
@@ -31368,7 +31109,6 @@
           <a:lstStyle/>
           <a:p>
             <a:pPr algn="ctr"/>
-            <a:endParaRPr/>
           </a:p>
         </p:txBody>
       </p:sp>
@@ -31389,7 +31129,7 @@
           <a:noFill/>
         </p:spPr>
         <p:txBody>
-          <a:bodyPr wrap="square" lIns="0" tIns="0" rIns="0" bIns="0" anchor="t">
+          <a:bodyPr wrap="square" anchor="t" lIns="0" rIns="0" tIns="0" bIns="0">
             <a:spAutoFit/>
           </a:bodyPr>
           <a:lstStyle/>
@@ -31428,7 +31168,7 @@
           <a:noFill/>
         </p:spPr>
         <p:txBody>
-          <a:bodyPr wrap="square" lIns="0" tIns="0" rIns="0" bIns="0" anchor="t">
+          <a:bodyPr wrap="square" anchor="t" lIns="0" rIns="0" tIns="0" bIns="0">
             <a:spAutoFit/>
           </a:bodyPr>
           <a:lstStyle/>
@@ -31467,7 +31207,7 @@
           <a:noFill/>
         </p:spPr>
         <p:txBody>
-          <a:bodyPr wrap="square" lIns="0" tIns="0" rIns="0" bIns="0" anchor="t">
+          <a:bodyPr wrap="square" anchor="t" lIns="0" rIns="0" tIns="0" bIns="0">
             <a:spAutoFit/>
           </a:bodyPr>
           <a:lstStyle/>
@@ -31494,23 +31234,11 @@
   <p:clrMapOvr>
     <a:masterClrMapping/>
   </p:clrMapOvr>
-  <mc:AlternateContent xmlns:mc="http://schemas.openxmlformats.org/markup-compatibility/2006">
-    <mc:Choice xmlns:p14="http://schemas.microsoft.com/office/powerpoint/2010/main" Requires="p14">
-      <p:transition spd="med" p14:dur="700">
-        <p:fade thruBlk="1"/>
-      </p:transition>
-    </mc:Choice>
-    <mc:Fallback>
-      <p:transition spd="med">
-        <p:fade thruBlk="1"/>
-      </p:transition>
-    </mc:Fallback>
-  </mc:AlternateContent>
 </p:sld>
 </file>
 
 <file path=ppt/slides/slide30.xml><?xml version="1.0" encoding="utf-8"?>
-<p:sld xmlns:a="http://schemas.openxmlformats.org/drawingml/2006/main" xmlns:r="http://schemas.openxmlformats.org/officeDocument/2006/relationships" xmlns:p="http://schemas.openxmlformats.org/presentationml/2006/main">
+<p:sld xmlns:a="http://schemas.openxmlformats.org/drawingml/2006/main" xmlns:p="http://schemas.openxmlformats.org/presentationml/2006/main" xmlns:r="http://schemas.openxmlformats.org/officeDocument/2006/relationships">
   <p:cSld>
     <p:spTree>
       <p:nvGrpSpPr>
@@ -31518,14 +31246,7 @@
         <p:cNvGrpSpPr/>
         <p:nvPr/>
       </p:nvGrpSpPr>
-      <p:grpSpPr>
-        <a:xfrm>
-          <a:off x="0" y="0"/>
-          <a:ext cx="0" cy="0"/>
-          <a:chOff x="0" y="0"/>
-          <a:chExt cx="0" cy="0"/>
-        </a:xfrm>
-      </p:grpSpPr>
+      <p:grpSpPr/>
       <p:pic>
         <p:nvPicPr>
           <p:cNvPr id="2" name="Picture 1" descr="bg_deep.png"/>
@@ -31567,7 +31288,7 @@
           <a:noFill/>
         </p:spPr>
         <p:txBody>
-          <a:bodyPr wrap="square" lIns="0" tIns="0" rIns="0" bIns="0" anchor="t">
+          <a:bodyPr wrap="square" anchor="t" lIns="0" rIns="0" tIns="0" bIns="0">
             <a:spAutoFit/>
           </a:bodyPr>
           <a:lstStyle/>
@@ -31606,7 +31327,7 @@
           <a:noFill/>
         </p:spPr>
         <p:txBody>
-          <a:bodyPr wrap="square" lIns="0" tIns="0" rIns="0" bIns="0" anchor="t">
+          <a:bodyPr wrap="square" anchor="t" lIns="0" rIns="0" tIns="0" bIns="0">
             <a:spAutoFit/>
           </a:bodyPr>
           <a:lstStyle/>
@@ -31645,7 +31366,7 @@
           <a:noFill/>
         </p:spPr>
         <p:txBody>
-          <a:bodyPr wrap="square" lIns="0" tIns="0" rIns="0" bIns="0" anchor="t">
+          <a:bodyPr wrap="square" anchor="t" lIns="0" rIns="0" tIns="0" bIns="0">
             <a:spAutoFit/>
           </a:bodyPr>
           <a:lstStyle/>
@@ -31712,7 +31433,6 @@
           <a:lstStyle/>
           <a:p>
             <a:pPr algn="ctr"/>
-            <a:endParaRPr/>
           </a:p>
         </p:txBody>
       </p:sp>
@@ -31733,7 +31453,7 @@
           <a:noFill/>
         </p:spPr>
         <p:txBody>
-          <a:bodyPr wrap="square" lIns="0" tIns="0" rIns="0" bIns="0" anchor="t">
+          <a:bodyPr wrap="square" anchor="t" lIns="0" rIns="0" tIns="0" bIns="0">
             <a:spAutoFit/>
           </a:bodyPr>
           <a:lstStyle/>
@@ -31772,7 +31492,7 @@
           <a:noFill/>
         </p:spPr>
         <p:txBody>
-          <a:bodyPr wrap="square" lIns="0" tIns="0" rIns="0" bIns="0" anchor="t">
+          <a:bodyPr wrap="square" anchor="t" lIns="0" rIns="0" tIns="0" bIns="0">
             <a:spAutoFit/>
           </a:bodyPr>
           <a:lstStyle/>
@@ -31839,7 +31559,6 @@
           <a:lstStyle/>
           <a:p>
             <a:pPr algn="ctr"/>
-            <a:endParaRPr/>
           </a:p>
         </p:txBody>
       </p:sp>
@@ -31860,7 +31579,7 @@
           <a:noFill/>
         </p:spPr>
         <p:txBody>
-          <a:bodyPr wrap="square" lIns="0" tIns="0" rIns="0" bIns="0" anchor="t">
+          <a:bodyPr wrap="square" anchor="t" lIns="0" rIns="0" tIns="0" bIns="0">
             <a:spAutoFit/>
           </a:bodyPr>
           <a:lstStyle/>
@@ -31899,7 +31618,7 @@
           <a:noFill/>
         </p:spPr>
         <p:txBody>
-          <a:bodyPr wrap="square" lIns="0" tIns="0" rIns="0" bIns="0" anchor="t">
+          <a:bodyPr wrap="square" anchor="t" lIns="0" rIns="0" tIns="0" bIns="0">
             <a:spAutoFit/>
           </a:bodyPr>
           <a:lstStyle/>
@@ -31966,7 +31685,6 @@
           <a:lstStyle/>
           <a:p>
             <a:pPr algn="ctr"/>
-            <a:endParaRPr/>
           </a:p>
         </p:txBody>
       </p:sp>
@@ -31987,7 +31705,7 @@
           <a:noFill/>
         </p:spPr>
         <p:txBody>
-          <a:bodyPr wrap="square" lIns="0" tIns="0" rIns="0" bIns="0" anchor="t">
+          <a:bodyPr wrap="square" anchor="t" lIns="0" rIns="0" tIns="0" bIns="0">
             <a:spAutoFit/>
           </a:bodyPr>
           <a:lstStyle/>
@@ -32026,7 +31744,7 @@
           <a:noFill/>
         </p:spPr>
         <p:txBody>
-          <a:bodyPr wrap="square" lIns="0" tIns="0" rIns="0" bIns="0" anchor="t">
+          <a:bodyPr wrap="square" anchor="t" lIns="0" rIns="0" tIns="0" bIns="0">
             <a:spAutoFit/>
           </a:bodyPr>
           <a:lstStyle/>
@@ -32093,7 +31811,6 @@
           <a:lstStyle/>
           <a:p>
             <a:pPr algn="ctr"/>
-            <a:endParaRPr/>
           </a:p>
         </p:txBody>
       </p:sp>
@@ -32114,7 +31831,7 @@
           <a:noFill/>
         </p:spPr>
         <p:txBody>
-          <a:bodyPr wrap="square" lIns="0" tIns="0" rIns="0" bIns="0" anchor="t">
+          <a:bodyPr wrap="square" anchor="t" lIns="0" rIns="0" tIns="0" bIns="0">
             <a:spAutoFit/>
           </a:bodyPr>
           <a:lstStyle/>
@@ -32153,7 +31870,7 @@
           <a:noFill/>
         </p:spPr>
         <p:txBody>
-          <a:bodyPr wrap="square" lIns="0" tIns="0" rIns="0" bIns="0" anchor="t">
+          <a:bodyPr wrap="square" anchor="t" lIns="0" rIns="0" tIns="0" bIns="0">
             <a:spAutoFit/>
           </a:bodyPr>
           <a:lstStyle/>
@@ -32220,7 +31937,6 @@
           <a:lstStyle/>
           <a:p>
             <a:pPr algn="ctr"/>
-            <a:endParaRPr/>
           </a:p>
         </p:txBody>
       </p:sp>
@@ -32241,7 +31957,7 @@
           <a:noFill/>
         </p:spPr>
         <p:txBody>
-          <a:bodyPr wrap="square" lIns="0" tIns="0" rIns="0" bIns="0" anchor="t">
+          <a:bodyPr wrap="square" anchor="t" lIns="0" rIns="0" tIns="0" bIns="0">
             <a:spAutoFit/>
           </a:bodyPr>
           <a:lstStyle/>
@@ -32280,7 +31996,7 @@
           <a:noFill/>
         </p:spPr>
         <p:txBody>
-          <a:bodyPr wrap="square" lIns="0" tIns="0" rIns="0" bIns="0" anchor="t">
+          <a:bodyPr wrap="square" anchor="t" lIns="0" rIns="0" tIns="0" bIns="0">
             <a:spAutoFit/>
           </a:bodyPr>
           <a:lstStyle/>
@@ -32319,7 +32035,7 @@
           <a:noFill/>
         </p:spPr>
         <p:txBody>
-          <a:bodyPr wrap="square" lIns="0" tIns="0" rIns="0" bIns="0" anchor="t">
+          <a:bodyPr wrap="square" anchor="t" lIns="0" rIns="0" tIns="0" bIns="0">
             <a:spAutoFit/>
           </a:bodyPr>
           <a:lstStyle/>
@@ -32358,7 +32074,7 @@
           <a:noFill/>
         </p:spPr>
         <p:txBody>
-          <a:bodyPr wrap="square" lIns="0" tIns="0" rIns="0" bIns="0" anchor="t">
+          <a:bodyPr wrap="square" anchor="t" lIns="0" rIns="0" tIns="0" bIns="0">
             <a:spAutoFit/>
           </a:bodyPr>
           <a:lstStyle/>
@@ -32385,23 +32101,11 @@
   <p:clrMapOvr>
     <a:masterClrMapping/>
   </p:clrMapOvr>
-  <mc:AlternateContent xmlns:mc="http://schemas.openxmlformats.org/markup-compatibility/2006">
-    <mc:Choice xmlns:p14="http://schemas.microsoft.com/office/powerpoint/2010/main" Requires="p14">
-      <p:transition spd="med" p14:dur="700">
-        <p:fade thruBlk="1"/>
-      </p:transition>
-    </mc:Choice>
-    <mc:Fallback>
-      <p:transition spd="med">
-        <p:fade thruBlk="1"/>
-      </p:transition>
-    </mc:Fallback>
-  </mc:AlternateContent>
 </p:sld>
 </file>
 
 <file path=ppt/slides/slide31.xml><?xml version="1.0" encoding="utf-8"?>
-<p:sld xmlns:a="http://schemas.openxmlformats.org/drawingml/2006/main" xmlns:r="http://schemas.openxmlformats.org/officeDocument/2006/relationships" xmlns:p="http://schemas.openxmlformats.org/presentationml/2006/main">
+<p:sld xmlns:a="http://schemas.openxmlformats.org/drawingml/2006/main" xmlns:p="http://schemas.openxmlformats.org/presentationml/2006/main" xmlns:r="http://schemas.openxmlformats.org/officeDocument/2006/relationships">
   <p:cSld>
     <p:spTree>
       <p:nvGrpSpPr>
@@ -32409,14 +32113,7 @@
         <p:cNvGrpSpPr/>
         <p:nvPr/>
       </p:nvGrpSpPr>
-      <p:grpSpPr>
-        <a:xfrm>
-          <a:off x="0" y="0"/>
-          <a:ext cx="0" cy="0"/>
-          <a:chOff x="0" y="0"/>
-          <a:chExt cx="0" cy="0"/>
-        </a:xfrm>
-      </p:grpSpPr>
+      <p:grpSpPr/>
       <p:pic>
         <p:nvPicPr>
           <p:cNvPr id="2" name="Picture 1" descr="bg_red.png"/>
@@ -32458,7 +32155,7 @@
           <a:noFill/>
         </p:spPr>
         <p:txBody>
-          <a:bodyPr wrap="square" lIns="0" tIns="0" rIns="0" bIns="0" anchor="t">
+          <a:bodyPr wrap="square" anchor="t" lIns="0" rIns="0" tIns="0" bIns="0">
             <a:spAutoFit/>
           </a:bodyPr>
           <a:lstStyle/>
@@ -32497,7 +32194,7 @@
           <a:noFill/>
         </p:spPr>
         <p:txBody>
-          <a:bodyPr wrap="square" lIns="0" tIns="0" rIns="0" bIns="0" anchor="t">
+          <a:bodyPr wrap="square" anchor="t" lIns="0" rIns="0" tIns="0" bIns="0">
             <a:spAutoFit/>
           </a:bodyPr>
           <a:lstStyle/>
@@ -32536,7 +32233,7 @@
           <a:noFill/>
         </p:spPr>
         <p:txBody>
-          <a:bodyPr wrap="square" lIns="0" tIns="0" rIns="0" bIns="0" anchor="t">
+          <a:bodyPr wrap="square" anchor="t" lIns="0" rIns="0" tIns="0" bIns="0">
             <a:spAutoFit/>
           </a:bodyPr>
           <a:lstStyle/>
@@ -32575,7 +32272,7 @@
           <a:noFill/>
         </p:spPr>
         <p:txBody>
-          <a:bodyPr wrap="square" lIns="0" tIns="0" rIns="0" bIns="0" anchor="t">
+          <a:bodyPr wrap="square" anchor="t" lIns="0" rIns="0" tIns="0" bIns="0">
             <a:spAutoFit/>
           </a:bodyPr>
           <a:lstStyle/>
@@ -32614,7 +32311,7 @@
           <a:noFill/>
         </p:spPr>
         <p:txBody>
-          <a:bodyPr wrap="square" lIns="0" tIns="0" rIns="0" bIns="0" anchor="t">
+          <a:bodyPr wrap="square" anchor="t" lIns="0" rIns="0" tIns="0" bIns="0">
             <a:spAutoFit/>
           </a:bodyPr>
           <a:lstStyle/>
@@ -32653,7 +32350,7 @@
           <a:noFill/>
         </p:spPr>
         <p:txBody>
-          <a:bodyPr wrap="square" lIns="0" tIns="0" rIns="0" bIns="0" anchor="t">
+          <a:bodyPr wrap="square" anchor="t" lIns="0" rIns="0" tIns="0" bIns="0">
             <a:spAutoFit/>
           </a:bodyPr>
           <a:lstStyle/>
@@ -32692,7 +32389,7 @@
           <a:noFill/>
         </p:spPr>
         <p:txBody>
-          <a:bodyPr wrap="square" lIns="0" tIns="0" rIns="0" bIns="0" anchor="t">
+          <a:bodyPr wrap="square" anchor="t" lIns="0" rIns="0" tIns="0" bIns="0">
             <a:spAutoFit/>
           </a:bodyPr>
           <a:lstStyle/>
@@ -32731,7 +32428,7 @@
           <a:noFill/>
         </p:spPr>
         <p:txBody>
-          <a:bodyPr wrap="square" lIns="0" tIns="0" rIns="0" bIns="0" anchor="t">
+          <a:bodyPr wrap="square" anchor="t" lIns="0" rIns="0" tIns="0" bIns="0">
             <a:spAutoFit/>
           </a:bodyPr>
           <a:lstStyle/>
@@ -32770,7 +32467,7 @@
           <a:noFill/>
         </p:spPr>
         <p:txBody>
-          <a:bodyPr wrap="square" lIns="0" tIns="0" rIns="0" bIns="0" anchor="t">
+          <a:bodyPr wrap="square" anchor="t" lIns="0" rIns="0" tIns="0" bIns="0">
             <a:spAutoFit/>
           </a:bodyPr>
           <a:lstStyle/>
@@ -32809,7 +32506,7 @@
           <a:noFill/>
         </p:spPr>
         <p:txBody>
-          <a:bodyPr wrap="square" lIns="0" tIns="0" rIns="0" bIns="0" anchor="t">
+          <a:bodyPr wrap="square" anchor="t" lIns="0" rIns="0" tIns="0" bIns="0">
             <a:spAutoFit/>
           </a:bodyPr>
           <a:lstStyle/>
@@ -32848,7 +32545,7 @@
           <a:noFill/>
         </p:spPr>
         <p:txBody>
-          <a:bodyPr wrap="square" lIns="0" tIns="0" rIns="0" bIns="0" anchor="t">
+          <a:bodyPr wrap="square" anchor="t" lIns="0" rIns="0" tIns="0" bIns="0">
             <a:spAutoFit/>
           </a:bodyPr>
           <a:lstStyle/>
@@ -32887,7 +32584,7 @@
           <a:noFill/>
         </p:spPr>
         <p:txBody>
-          <a:bodyPr wrap="square" lIns="0" tIns="0" rIns="0" bIns="0" anchor="t">
+          <a:bodyPr wrap="square" anchor="t" lIns="0" rIns="0" tIns="0" bIns="0">
             <a:spAutoFit/>
           </a:bodyPr>
           <a:lstStyle/>
@@ -32926,7 +32623,7 @@
           <a:noFill/>
         </p:spPr>
         <p:txBody>
-          <a:bodyPr wrap="square" lIns="0" tIns="0" rIns="0" bIns="0" anchor="t">
+          <a:bodyPr wrap="square" anchor="t" lIns="0" rIns="0" tIns="0" bIns="0">
             <a:spAutoFit/>
           </a:bodyPr>
           <a:lstStyle/>
@@ -32965,7 +32662,7 @@
           <a:noFill/>
         </p:spPr>
         <p:txBody>
-          <a:bodyPr wrap="square" lIns="0" tIns="0" rIns="0" bIns="0" anchor="t">
+          <a:bodyPr wrap="square" anchor="t" lIns="0" rIns="0" tIns="0" bIns="0">
             <a:spAutoFit/>
           </a:bodyPr>
           <a:lstStyle/>
@@ -33004,7 +32701,7 @@
           <a:noFill/>
         </p:spPr>
         <p:txBody>
-          <a:bodyPr wrap="square" lIns="0" tIns="0" rIns="0" bIns="0" anchor="t">
+          <a:bodyPr wrap="square" anchor="t" lIns="0" rIns="0" tIns="0" bIns="0">
             <a:spAutoFit/>
           </a:bodyPr>
           <a:lstStyle/>
@@ -33043,7 +32740,7 @@
           <a:noFill/>
         </p:spPr>
         <p:txBody>
-          <a:bodyPr wrap="square" lIns="0" tIns="0" rIns="0" bIns="0" anchor="t">
+          <a:bodyPr wrap="square" anchor="t" lIns="0" rIns="0" tIns="0" bIns="0">
             <a:spAutoFit/>
           </a:bodyPr>
           <a:lstStyle/>
@@ -33082,7 +32779,7 @@
           <a:noFill/>
         </p:spPr>
         <p:txBody>
-          <a:bodyPr wrap="square" lIns="0" tIns="0" rIns="0" bIns="0" anchor="t">
+          <a:bodyPr wrap="square" anchor="t" lIns="0" rIns="0" tIns="0" bIns="0">
             <a:spAutoFit/>
           </a:bodyPr>
           <a:lstStyle/>
@@ -33121,7 +32818,7 @@
           <a:noFill/>
         </p:spPr>
         <p:txBody>
-          <a:bodyPr wrap="square" lIns="0" tIns="0" rIns="0" bIns="0" anchor="t">
+          <a:bodyPr wrap="square" anchor="t" lIns="0" rIns="0" tIns="0" bIns="0">
             <a:spAutoFit/>
           </a:bodyPr>
           <a:lstStyle/>
@@ -33160,7 +32857,7 @@
           <a:noFill/>
         </p:spPr>
         <p:txBody>
-          <a:bodyPr wrap="square" lIns="0" tIns="0" rIns="0" bIns="0" anchor="t">
+          <a:bodyPr wrap="square" anchor="t" lIns="0" rIns="0" tIns="0" bIns="0">
             <a:spAutoFit/>
           </a:bodyPr>
           <a:lstStyle/>
@@ -33199,7 +32896,7 @@
           <a:noFill/>
         </p:spPr>
         <p:txBody>
-          <a:bodyPr wrap="square" lIns="0" tIns="0" rIns="0" bIns="0" anchor="t">
+          <a:bodyPr wrap="square" anchor="t" lIns="0" rIns="0" tIns="0" bIns="0">
             <a:spAutoFit/>
           </a:bodyPr>
           <a:lstStyle/>
@@ -33238,7 +32935,7 @@
           <a:noFill/>
         </p:spPr>
         <p:txBody>
-          <a:bodyPr wrap="square" lIns="0" tIns="0" rIns="0" bIns="0" anchor="t">
+          <a:bodyPr wrap="square" anchor="t" lIns="0" rIns="0" tIns="0" bIns="0">
             <a:spAutoFit/>
           </a:bodyPr>
           <a:lstStyle/>
@@ -33277,7 +32974,7 @@
           <a:noFill/>
         </p:spPr>
         <p:txBody>
-          <a:bodyPr wrap="square" lIns="0" tIns="0" rIns="0" bIns="0" anchor="t">
+          <a:bodyPr wrap="square" anchor="t" lIns="0" rIns="0" tIns="0" bIns="0">
             <a:spAutoFit/>
           </a:bodyPr>
           <a:lstStyle/>
@@ -33344,7 +33041,6 @@
           <a:lstStyle/>
           <a:p>
             <a:pPr algn="ctr"/>
-            <a:endParaRPr/>
           </a:p>
         </p:txBody>
       </p:sp>
@@ -33365,7 +33061,7 @@
           <a:noFill/>
         </p:spPr>
         <p:txBody>
-          <a:bodyPr wrap="square" lIns="0" tIns="0" rIns="0" bIns="0" anchor="t">
+          <a:bodyPr wrap="square" anchor="t" lIns="0" rIns="0" tIns="0" bIns="0">
             <a:spAutoFit/>
           </a:bodyPr>
           <a:lstStyle/>
@@ -33404,7 +33100,7 @@
           <a:noFill/>
         </p:spPr>
         <p:txBody>
-          <a:bodyPr wrap="square" lIns="0" tIns="0" rIns="0" bIns="0" anchor="t">
+          <a:bodyPr wrap="square" anchor="t" lIns="0" rIns="0" tIns="0" bIns="0">
             <a:spAutoFit/>
           </a:bodyPr>
           <a:lstStyle/>
@@ -33443,7 +33139,7 @@
           <a:noFill/>
         </p:spPr>
         <p:txBody>
-          <a:bodyPr wrap="square" lIns="0" tIns="0" rIns="0" bIns="0" anchor="t">
+          <a:bodyPr wrap="square" anchor="t" lIns="0" rIns="0" tIns="0" bIns="0">
             <a:spAutoFit/>
           </a:bodyPr>
           <a:lstStyle/>
@@ -33470,23 +33166,11 @@
   <p:clrMapOvr>
     <a:masterClrMapping/>
   </p:clrMapOvr>
-  <mc:AlternateContent xmlns:mc="http://schemas.openxmlformats.org/markup-compatibility/2006">
-    <mc:Choice xmlns:p14="http://schemas.microsoft.com/office/powerpoint/2010/main" Requires="p14">
-      <p:transition spd="med" p14:dur="700">
-        <p:fade thruBlk="1"/>
-      </p:transition>
-    </mc:Choice>
-    <mc:Fallback>
-      <p:transition spd="med">
-        <p:fade thruBlk="1"/>
-      </p:transition>
-    </mc:Fallback>
-  </mc:AlternateContent>
 </p:sld>
 </file>
 
 <file path=ppt/slides/slide32.xml><?xml version="1.0" encoding="utf-8"?>
-<p:sld xmlns:a="http://schemas.openxmlformats.org/drawingml/2006/main" xmlns:r="http://schemas.openxmlformats.org/officeDocument/2006/relationships" xmlns:p="http://schemas.openxmlformats.org/presentationml/2006/main">
+<p:sld xmlns:a="http://schemas.openxmlformats.org/drawingml/2006/main" xmlns:p="http://schemas.openxmlformats.org/presentationml/2006/main" xmlns:r="http://schemas.openxmlformats.org/officeDocument/2006/relationships">
   <p:cSld>
     <p:spTree>
       <p:nvGrpSpPr>
@@ -33494,14 +33178,7 @@
         <p:cNvGrpSpPr/>
         <p:nvPr/>
       </p:nvGrpSpPr>
-      <p:grpSpPr>
-        <a:xfrm>
-          <a:off x="0" y="0"/>
-          <a:ext cx="0" cy="0"/>
-          <a:chOff x="0" y="0"/>
-          <a:chExt cx="0" cy="0"/>
-        </a:xfrm>
-      </p:grpSpPr>
+      <p:grpSpPr/>
       <p:pic>
         <p:nvPicPr>
           <p:cNvPr id="2" name="Picture 1" descr="bg_hero.png"/>
@@ -33511,7 +33188,7 @@
           <p:nvPr/>
         </p:nvPicPr>
         <p:blipFill>
-          <a:blip r:embed="rId3"/>
+          <a:blip r:embed="rId2"/>
           <a:stretch>
             <a:fillRect/>
           </a:stretch>
@@ -33543,7 +33220,7 @@
           <a:noFill/>
         </p:spPr>
         <p:txBody>
-          <a:bodyPr wrap="square" lIns="0" tIns="0" rIns="0" bIns="0" anchor="t">
+          <a:bodyPr wrap="square" anchor="t" lIns="0" rIns="0" tIns="0" bIns="0">
             <a:spAutoFit/>
           </a:bodyPr>
           <a:lstStyle/>
@@ -33582,7 +33259,7 @@
           <a:noFill/>
         </p:spPr>
         <p:txBody>
-          <a:bodyPr wrap="square" lIns="0" tIns="0" rIns="0" bIns="0" anchor="t">
+          <a:bodyPr wrap="square" anchor="t" lIns="0" rIns="0" tIns="0" bIns="0">
             <a:spAutoFit/>
           </a:bodyPr>
           <a:lstStyle/>
@@ -33645,7 +33322,7 @@
           </a:fontRef>
         </p:style>
         <p:txBody>
-          <a:bodyPr wrap="square" lIns="73152" tIns="36576" rIns="73152" bIns="36576" rtlCol="0" anchor="ctr"/>
+          <a:bodyPr rtlCol="0" anchor="ctr" wrap="square" lIns="73152" rIns="73152" tIns="36576" bIns="36576"/>
           <a:lstStyle/>
           <a:p>
             <a:pPr algn="ctr"/>
@@ -33719,7 +33396,7 @@
           </a:fontRef>
         </p:style>
         <p:txBody>
-          <a:bodyPr wrap="square" lIns="73152" tIns="36576" rIns="73152" bIns="36576" rtlCol="0" anchor="ctr"/>
+          <a:bodyPr rtlCol="0" anchor="ctr" wrap="square" lIns="73152" rIns="73152" tIns="36576" bIns="36576"/>
           <a:lstStyle/>
           <a:p>
             <a:pPr algn="ctr"/>
@@ -33793,7 +33470,7 @@
           </a:fontRef>
         </p:style>
         <p:txBody>
-          <a:bodyPr wrap="square" lIns="73152" tIns="36576" rIns="73152" bIns="36576" rtlCol="0" anchor="ctr"/>
+          <a:bodyPr rtlCol="0" anchor="ctr" wrap="square" lIns="73152" rIns="73152" tIns="36576" bIns="36576"/>
           <a:lstStyle/>
           <a:p>
             <a:pPr algn="ctr"/>
@@ -33867,7 +33544,7 @@
           </a:fontRef>
         </p:style>
         <p:txBody>
-          <a:bodyPr wrap="square" lIns="73152" tIns="36576" rIns="73152" bIns="36576" rtlCol="0" anchor="ctr"/>
+          <a:bodyPr rtlCol="0" anchor="ctr" wrap="square" lIns="73152" rIns="73152" tIns="36576" bIns="36576"/>
           <a:lstStyle/>
           <a:p>
             <a:pPr algn="ctr"/>
@@ -33941,7 +33618,7 @@
           </a:fontRef>
         </p:style>
         <p:txBody>
-          <a:bodyPr wrap="square" lIns="73152" tIns="36576" rIns="73152" bIns="36576" rtlCol="0" anchor="ctr"/>
+          <a:bodyPr rtlCol="0" anchor="ctr" wrap="square" lIns="73152" rIns="73152" tIns="36576" bIns="36576"/>
           <a:lstStyle/>
           <a:p>
             <a:pPr algn="ctr"/>
@@ -34015,7 +33692,7 @@
           </a:fontRef>
         </p:style>
         <p:txBody>
-          <a:bodyPr wrap="square" lIns="73152" tIns="36576" rIns="73152" bIns="36576" rtlCol="0" anchor="ctr"/>
+          <a:bodyPr rtlCol="0" anchor="ctr" wrap="square" lIns="73152" rIns="73152" tIns="36576" bIns="36576"/>
           <a:lstStyle/>
           <a:p>
             <a:pPr algn="ctr"/>
@@ -34093,7 +33770,6 @@
           <a:lstStyle/>
           <a:p>
             <a:pPr algn="ctr"/>
-            <a:endParaRPr/>
           </a:p>
         </p:txBody>
       </p:sp>
@@ -34114,7 +33790,7 @@
           <a:noFill/>
         </p:spPr>
         <p:txBody>
-          <a:bodyPr wrap="square" lIns="0" tIns="0" rIns="0" bIns="0" anchor="t">
+          <a:bodyPr wrap="square" anchor="t" lIns="0" rIns="0" tIns="0" bIns="0">
             <a:spAutoFit/>
           </a:bodyPr>
           <a:lstStyle/>
@@ -34153,7 +33829,7 @@
           <a:noFill/>
         </p:spPr>
         <p:txBody>
-          <a:bodyPr wrap="square" lIns="0" tIns="0" rIns="0" bIns="0" anchor="t">
+          <a:bodyPr wrap="square" anchor="t" lIns="0" rIns="0" tIns="0" bIns="0">
             <a:spAutoFit/>
           </a:bodyPr>
           <a:lstStyle/>
@@ -34170,7 +33846,7 @@
                 </a:solidFill>
                 <a:latin typeface="Segoe UI"/>
               </a:rPr>
-              <a:t>757 assertions · 6 suites · 0 failures  •  56 tables · 67 routes · 11 ADRs  •  every claim on these slides is testable</a:t>
+              <a:t>760 assertions · 6 suites · 0 failures  •  56 tables · 68 routes · 11 ADRs  •  every claim on these slides is testable</a:t>
             </a:r>
           </a:p>
         </p:txBody>
@@ -34192,7 +33868,7 @@
           <a:noFill/>
         </p:spPr>
         <p:txBody>
-          <a:bodyPr wrap="square" lIns="0" tIns="0" rIns="0" bIns="0" anchor="t">
+          <a:bodyPr wrap="square" anchor="t" lIns="0" rIns="0" tIns="0" bIns="0">
             <a:spAutoFit/>
           </a:bodyPr>
           <a:lstStyle/>
@@ -34219,23 +33895,11 @@
   <p:clrMapOvr>
     <a:masterClrMapping/>
   </p:clrMapOvr>
-  <mc:AlternateContent xmlns:mc="http://schemas.openxmlformats.org/markup-compatibility/2006">
-    <mc:Choice xmlns:p14="http://schemas.microsoft.com/office/powerpoint/2010/main" Requires="p14">
-      <p:transition spd="med" p14:dur="700">
-        <p:fade thruBlk="1"/>
-      </p:transition>
-    </mc:Choice>
-    <mc:Fallback>
-      <p:transition spd="med">
-        <p:fade thruBlk="1"/>
-      </p:transition>
-    </mc:Fallback>
-  </mc:AlternateContent>
 </p:sld>
 </file>
 
 <file path=ppt/slides/slide4.xml><?xml version="1.0" encoding="utf-8"?>
-<p:sld xmlns:a="http://schemas.openxmlformats.org/drawingml/2006/main" xmlns:r="http://schemas.openxmlformats.org/officeDocument/2006/relationships" xmlns:p="http://schemas.openxmlformats.org/presentationml/2006/main">
+<p:sld xmlns:a="http://schemas.openxmlformats.org/drawingml/2006/main" xmlns:p="http://schemas.openxmlformats.org/presentationml/2006/main" xmlns:r="http://schemas.openxmlformats.org/officeDocument/2006/relationships">
   <p:cSld>
     <p:spTree>
       <p:nvGrpSpPr>
@@ -34243,14 +33907,7 @@
         <p:cNvGrpSpPr/>
         <p:nvPr/>
       </p:nvGrpSpPr>
-      <p:grpSpPr>
-        <a:xfrm>
-          <a:off x="0" y="0"/>
-          <a:ext cx="0" cy="0"/>
-          <a:chOff x="0" y="0"/>
-          <a:chExt cx="0" cy="0"/>
-        </a:xfrm>
-      </p:grpSpPr>
+      <p:grpSpPr/>
       <p:pic>
         <p:nvPicPr>
           <p:cNvPr id="2" name="Picture 1" descr="bg_deep.png"/>
@@ -34260,7 +33917,7 @@
           <p:nvPr/>
         </p:nvPicPr>
         <p:blipFill>
-          <a:blip r:embed="rId3"/>
+          <a:blip r:embed="rId2"/>
           <a:stretch>
             <a:fillRect/>
           </a:stretch>
@@ -34292,7 +33949,7 @@
           <a:noFill/>
         </p:spPr>
         <p:txBody>
-          <a:bodyPr wrap="square" lIns="0" tIns="0" rIns="0" bIns="0" anchor="t">
+          <a:bodyPr wrap="square" anchor="t" lIns="0" rIns="0" tIns="0" bIns="0">
             <a:spAutoFit/>
           </a:bodyPr>
           <a:lstStyle/>
@@ -34331,7 +33988,7 @@
           <a:noFill/>
         </p:spPr>
         <p:txBody>
-          <a:bodyPr wrap="square" lIns="0" tIns="0" rIns="0" bIns="0" anchor="t">
+          <a:bodyPr wrap="square" anchor="t" lIns="0" rIns="0" tIns="0" bIns="0">
             <a:spAutoFit/>
           </a:bodyPr>
           <a:lstStyle/>
@@ -34394,7 +34051,7 @@
           </a:fontRef>
         </p:style>
         <p:txBody>
-          <a:bodyPr wrap="square" lIns="73152" tIns="36576" rIns="73152" bIns="36576" rtlCol="0" anchor="ctr"/>
+          <a:bodyPr rtlCol="0" anchor="ctr" wrap="square" lIns="73152" rIns="73152" tIns="36576" bIns="36576"/>
           <a:lstStyle/>
           <a:p>
             <a:pPr algn="ctr"/>
@@ -34469,7 +34126,7 @@
           </a:fontRef>
         </p:style>
         <p:txBody>
-          <a:bodyPr wrap="square" lIns="73152" tIns="36576" rIns="73152" bIns="36576" rtlCol="0" anchor="ctr"/>
+          <a:bodyPr rtlCol="0" anchor="ctr" wrap="square" lIns="73152" rIns="73152" tIns="36576" bIns="36576"/>
           <a:lstStyle/>
           <a:p>
             <a:pPr algn="ctr"/>
@@ -34544,7 +34201,7 @@
           </a:fontRef>
         </p:style>
         <p:txBody>
-          <a:bodyPr wrap="square" lIns="73152" tIns="36576" rIns="73152" bIns="36576" rtlCol="0" anchor="ctr"/>
+          <a:bodyPr rtlCol="0" anchor="ctr" wrap="square" lIns="73152" rIns="73152" tIns="36576" bIns="36576"/>
           <a:lstStyle/>
           <a:p>
             <a:pPr algn="ctr"/>
@@ -34619,7 +34276,7 @@
           </a:fontRef>
         </p:style>
         <p:txBody>
-          <a:bodyPr wrap="square" lIns="73152" tIns="36576" rIns="73152" bIns="36576" rtlCol="0" anchor="ctr"/>
+          <a:bodyPr rtlCol="0" anchor="ctr" wrap="square" lIns="73152" rIns="73152" tIns="36576" bIns="36576"/>
           <a:lstStyle/>
           <a:p>
             <a:pPr algn="ctr"/>
@@ -34694,7 +34351,7 @@
           </a:fontRef>
         </p:style>
         <p:txBody>
-          <a:bodyPr wrap="square" lIns="73152" tIns="36576" rIns="73152" bIns="36576" rtlCol="0" anchor="ctr"/>
+          <a:bodyPr rtlCol="0" anchor="ctr" wrap="square" lIns="73152" rIns="73152" tIns="36576" bIns="36576"/>
           <a:lstStyle/>
           <a:p>
             <a:pPr algn="ctr"/>
@@ -34769,7 +34426,7 @@
           </a:fontRef>
         </p:style>
         <p:txBody>
-          <a:bodyPr wrap="square" lIns="73152" tIns="36576" rIns="73152" bIns="36576" rtlCol="0" anchor="ctr"/>
+          <a:bodyPr rtlCol="0" anchor="ctr" wrap="square" lIns="73152" rIns="73152" tIns="36576" bIns="36576"/>
           <a:lstStyle/>
           <a:p>
             <a:pPr algn="ctr"/>
@@ -34848,7 +34505,6 @@
           <a:lstStyle/>
           <a:p>
             <a:pPr algn="ctr"/>
-            <a:endParaRPr/>
           </a:p>
         </p:txBody>
       </p:sp>
@@ -34869,7 +34525,7 @@
           <a:noFill/>
         </p:spPr>
         <p:txBody>
-          <a:bodyPr wrap="square" lIns="0" tIns="0" rIns="0" bIns="0" anchor="t">
+          <a:bodyPr wrap="square" anchor="t" lIns="0" rIns="0" tIns="0" bIns="0">
             <a:spAutoFit/>
           </a:bodyPr>
           <a:lstStyle/>
@@ -34908,7 +34564,7 @@
           <a:noFill/>
         </p:spPr>
         <p:txBody>
-          <a:bodyPr wrap="square" lIns="0" tIns="0" rIns="0" bIns="0" anchor="t">
+          <a:bodyPr wrap="square" anchor="t" lIns="0" rIns="0" tIns="0" bIns="0">
             <a:spAutoFit/>
           </a:bodyPr>
           <a:lstStyle/>
@@ -34947,7 +34603,7 @@
           <a:noFill/>
         </p:spPr>
         <p:txBody>
-          <a:bodyPr wrap="square" lIns="0" tIns="0" rIns="0" bIns="0" anchor="t">
+          <a:bodyPr wrap="square" anchor="t" lIns="0" rIns="0" tIns="0" bIns="0">
             <a:spAutoFit/>
           </a:bodyPr>
           <a:lstStyle/>
@@ -34974,23 +34630,11 @@
   <p:clrMapOvr>
     <a:masterClrMapping/>
   </p:clrMapOvr>
-  <mc:AlternateContent xmlns:mc="http://schemas.openxmlformats.org/markup-compatibility/2006">
-    <mc:Choice xmlns:p14="http://schemas.microsoft.com/office/powerpoint/2010/main" Requires="p14">
-      <p:transition spd="med" p14:dur="700">
-        <p:fade thruBlk="1"/>
-      </p:transition>
-    </mc:Choice>
-    <mc:Fallback>
-      <p:transition spd="med">
-        <p:fade thruBlk="1"/>
-      </p:transition>
-    </mc:Fallback>
-  </mc:AlternateContent>
 </p:sld>
 </file>
 
 <file path=ppt/slides/slide5.xml><?xml version="1.0" encoding="utf-8"?>
-<p:sld xmlns:a="http://schemas.openxmlformats.org/drawingml/2006/main" xmlns:r="http://schemas.openxmlformats.org/officeDocument/2006/relationships" xmlns:p="http://schemas.openxmlformats.org/presentationml/2006/main">
+<p:sld xmlns:a="http://schemas.openxmlformats.org/drawingml/2006/main" xmlns:p="http://schemas.openxmlformats.org/presentationml/2006/main" xmlns:r="http://schemas.openxmlformats.org/officeDocument/2006/relationships">
   <p:cSld>
     <p:spTree>
       <p:nvGrpSpPr>
@@ -34998,14 +34642,7 @@
         <p:cNvGrpSpPr/>
         <p:nvPr/>
       </p:nvGrpSpPr>
-      <p:grpSpPr>
-        <a:xfrm>
-          <a:off x="0" y="0"/>
-          <a:ext cx="0" cy="0"/>
-          <a:chOff x="0" y="0"/>
-          <a:chExt cx="0" cy="0"/>
-        </a:xfrm>
-      </p:grpSpPr>
+      <p:grpSpPr/>
       <p:pic>
         <p:nvPicPr>
           <p:cNvPr id="2" name="Picture 1" descr="bg_deep.png"/>
@@ -35015,7 +34652,7 @@
           <p:nvPr/>
         </p:nvPicPr>
         <p:blipFill>
-          <a:blip r:embed="rId3"/>
+          <a:blip r:embed="rId2"/>
           <a:stretch>
             <a:fillRect/>
           </a:stretch>
@@ -35047,7 +34684,7 @@
           <a:noFill/>
         </p:spPr>
         <p:txBody>
-          <a:bodyPr wrap="square" lIns="0" tIns="0" rIns="0" bIns="0" anchor="t">
+          <a:bodyPr wrap="square" anchor="t" lIns="0" rIns="0" tIns="0" bIns="0">
             <a:spAutoFit/>
           </a:bodyPr>
           <a:lstStyle/>
@@ -35086,7 +34723,7 @@
           <a:noFill/>
         </p:spPr>
         <p:txBody>
-          <a:bodyPr wrap="square" lIns="0" tIns="0" rIns="0" bIns="0" anchor="t">
+          <a:bodyPr wrap="square" anchor="t" lIns="0" rIns="0" tIns="0" bIns="0">
             <a:spAutoFit/>
           </a:bodyPr>
           <a:lstStyle/>
@@ -35125,7 +34762,7 @@
           <a:noFill/>
         </p:spPr>
         <p:txBody>
-          <a:bodyPr wrap="square" lIns="0" tIns="0" rIns="0" bIns="0" anchor="t">
+          <a:bodyPr wrap="square" anchor="t" lIns="0" rIns="0" tIns="0" bIns="0">
             <a:spAutoFit/>
           </a:bodyPr>
           <a:lstStyle/>
@@ -35188,7 +34825,7 @@
           </a:fontRef>
         </p:style>
         <p:txBody>
-          <a:bodyPr wrap="square" lIns="73152" tIns="36576" rIns="73152" bIns="36576" rtlCol="0" anchor="ctr"/>
+          <a:bodyPr rtlCol="0" anchor="ctr" wrap="square" lIns="73152" rIns="73152" tIns="36576" bIns="36576"/>
           <a:lstStyle/>
           <a:p>
             <a:pPr algn="ctr"/>
@@ -35297,7 +34934,7 @@
           </a:fontRef>
         </p:style>
         <p:txBody>
-          <a:bodyPr wrap="square" lIns="73152" tIns="36576" rIns="73152" bIns="36576" rtlCol="0" anchor="ctr"/>
+          <a:bodyPr rtlCol="0" anchor="ctr" wrap="square" lIns="73152" rIns="73152" tIns="36576" bIns="36576"/>
           <a:lstStyle/>
           <a:p>
             <a:pPr algn="ctr"/>
@@ -35406,7 +35043,7 @@
           </a:fontRef>
         </p:style>
         <p:txBody>
-          <a:bodyPr wrap="square" lIns="73152" tIns="36576" rIns="73152" bIns="36576" rtlCol="0" anchor="ctr"/>
+          <a:bodyPr rtlCol="0" anchor="ctr" wrap="square" lIns="73152" rIns="73152" tIns="36576" bIns="36576"/>
           <a:lstStyle/>
           <a:p>
             <a:pPr algn="ctr"/>
@@ -35515,7 +35152,7 @@
           </a:fontRef>
         </p:style>
         <p:txBody>
-          <a:bodyPr wrap="square" lIns="73152" tIns="36576" rIns="73152" bIns="36576" rtlCol="0" anchor="ctr"/>
+          <a:bodyPr rtlCol="0" anchor="ctr" wrap="square" lIns="73152" rIns="73152" tIns="36576" bIns="36576"/>
           <a:lstStyle/>
           <a:p>
             <a:pPr algn="ctr"/>
@@ -35608,7 +35245,7 @@
           </a:fontRef>
         </p:style>
         <p:txBody>
-          <a:bodyPr wrap="square" lIns="73152" tIns="36576" rIns="73152" bIns="36576" rtlCol="0" anchor="ctr"/>
+          <a:bodyPr rtlCol="0" anchor="ctr" wrap="square" lIns="73152" rIns="73152" tIns="36576" bIns="36576"/>
           <a:lstStyle/>
           <a:p>
             <a:pPr algn="ctr"/>
@@ -35619,7 +35256,7 @@
                 </a:solidFill>
                 <a:latin typeface="Segoe UI Semibold"/>
               </a:rPr>
-              <a:t>FASTIFY API  ·  67 routes, 64 under /v1  ·  zod validation  ·  SSE stream</a:t>
+              <a:t>FASTIFY API  ·  68 routes, 65 under /v1  ·  zod validation  ·  SSE stream</a:t>
             </a:r>
           </a:p>
         </p:txBody>
@@ -35701,7 +35338,7 @@
           </a:fontRef>
         </p:style>
         <p:txBody>
-          <a:bodyPr wrap="square" lIns="73152" tIns="36576" rIns="73152" bIns="36576" rtlCol="0" anchor="ctr"/>
+          <a:bodyPr rtlCol="0" anchor="ctr" wrap="square" lIns="73152" rIns="73152" tIns="36576" bIns="36576"/>
           <a:lstStyle/>
           <a:p>
             <a:pPr algn="ctr"/>
@@ -35774,7 +35411,7 @@
           </a:fontRef>
         </p:style>
         <p:txBody>
-          <a:bodyPr wrap="square" lIns="73152" tIns="36576" rIns="73152" bIns="36576" rtlCol="0" anchor="ctr"/>
+          <a:bodyPr rtlCol="0" anchor="ctr" wrap="square" lIns="73152" rIns="73152" tIns="36576" bIns="36576"/>
           <a:lstStyle/>
           <a:p>
             <a:pPr algn="ctr"/>
@@ -35847,7 +35484,7 @@
           </a:fontRef>
         </p:style>
         <p:txBody>
-          <a:bodyPr wrap="square" lIns="73152" tIns="36576" rIns="73152" bIns="36576" rtlCol="0" anchor="ctr"/>
+          <a:bodyPr rtlCol="0" anchor="ctr" wrap="square" lIns="73152" rIns="73152" tIns="36576" bIns="36576"/>
           <a:lstStyle/>
           <a:p>
             <a:pPr algn="ctr"/>
@@ -35920,7 +35557,7 @@
           </a:fontRef>
         </p:style>
         <p:txBody>
-          <a:bodyPr wrap="square" lIns="73152" tIns="36576" rIns="73152" bIns="36576" rtlCol="0" anchor="ctr"/>
+          <a:bodyPr rtlCol="0" anchor="ctr" wrap="square" lIns="73152" rIns="73152" tIns="36576" bIns="36576"/>
           <a:lstStyle/>
           <a:p>
             <a:pPr algn="ctr"/>
@@ -35993,7 +35630,7 @@
           </a:fontRef>
         </p:style>
         <p:txBody>
-          <a:bodyPr wrap="square" lIns="73152" tIns="36576" rIns="73152" bIns="36576" rtlCol="0" anchor="ctr"/>
+          <a:bodyPr rtlCol="0" anchor="ctr" wrap="square" lIns="73152" rIns="73152" tIns="36576" bIns="36576"/>
           <a:lstStyle/>
           <a:p>
             <a:pPr algn="ctr"/>
@@ -36102,7 +35739,7 @@
           </a:fontRef>
         </p:style>
         <p:txBody>
-          <a:bodyPr wrap="square" lIns="73152" tIns="36576" rIns="73152" bIns="36576" rtlCol="0" anchor="ctr"/>
+          <a:bodyPr rtlCol="0" anchor="ctr" wrap="square" lIns="73152" rIns="73152" tIns="36576" bIns="36576"/>
           <a:lstStyle/>
           <a:p>
             <a:pPr algn="ctr"/>
@@ -36135,7 +35772,7 @@
           <a:noFill/>
         </p:spPr>
         <p:txBody>
-          <a:bodyPr wrap="square" lIns="0" tIns="0" rIns="0" bIns="0" anchor="t">
+          <a:bodyPr wrap="square" anchor="t" lIns="0" rIns="0" tIns="0" bIns="0">
             <a:spAutoFit/>
           </a:bodyPr>
           <a:lstStyle/>
@@ -36174,7 +35811,7 @@
           <a:noFill/>
         </p:spPr>
         <p:txBody>
-          <a:bodyPr wrap="square" lIns="0" tIns="0" rIns="0" bIns="0" anchor="t">
+          <a:bodyPr wrap="square" anchor="t" lIns="0" rIns="0" tIns="0" bIns="0">
             <a:spAutoFit/>
           </a:bodyPr>
           <a:lstStyle/>
@@ -36201,23 +35838,11 @@
   <p:clrMapOvr>
     <a:masterClrMapping/>
   </p:clrMapOvr>
-  <mc:AlternateContent xmlns:mc="http://schemas.openxmlformats.org/markup-compatibility/2006">
-    <mc:Choice xmlns:p14="http://schemas.microsoft.com/office/powerpoint/2010/main" Requires="p14">
-      <p:transition spd="med" p14:dur="700">
-        <p:fade thruBlk="1"/>
-      </p:transition>
-    </mc:Choice>
-    <mc:Fallback>
-      <p:transition spd="med">
-        <p:fade thruBlk="1"/>
-      </p:transition>
-    </mc:Fallback>
-  </mc:AlternateContent>
 </p:sld>
 </file>
 
 <file path=ppt/slides/slide6.xml><?xml version="1.0" encoding="utf-8"?>
-<p:sld xmlns:a="http://schemas.openxmlformats.org/drawingml/2006/main" xmlns:r="http://schemas.openxmlformats.org/officeDocument/2006/relationships" xmlns:p="http://schemas.openxmlformats.org/presentationml/2006/main">
+<p:sld xmlns:a="http://schemas.openxmlformats.org/drawingml/2006/main" xmlns:p="http://schemas.openxmlformats.org/presentationml/2006/main" xmlns:r="http://schemas.openxmlformats.org/officeDocument/2006/relationships">
   <p:cSld>
     <p:spTree>
       <p:nvGrpSpPr>
@@ -36225,14 +35850,7 @@
         <p:cNvGrpSpPr/>
         <p:nvPr/>
       </p:nvGrpSpPr>
-      <p:grpSpPr>
-        <a:xfrm>
-          <a:off x="0" y="0"/>
-          <a:ext cx="0" cy="0"/>
-          <a:chOff x="0" y="0"/>
-          <a:chExt cx="0" cy="0"/>
-        </a:xfrm>
-      </p:grpSpPr>
+      <p:grpSpPr/>
       <p:pic>
         <p:nvPicPr>
           <p:cNvPr id="2" name="Picture 1" descr="bg_red.png"/>
@@ -36242,7 +35860,7 @@
           <p:nvPr/>
         </p:nvPicPr>
         <p:blipFill>
-          <a:blip r:embed="rId3"/>
+          <a:blip r:embed="rId2"/>
           <a:stretch>
             <a:fillRect/>
           </a:stretch>
@@ -36274,7 +35892,7 @@
           <a:noFill/>
         </p:spPr>
         <p:txBody>
-          <a:bodyPr wrap="square" lIns="0" tIns="0" rIns="0" bIns="0" anchor="t">
+          <a:bodyPr wrap="square" anchor="t" lIns="0" rIns="0" tIns="0" bIns="0">
             <a:spAutoFit/>
           </a:bodyPr>
           <a:lstStyle/>
@@ -36313,7 +35931,7 @@
           <a:noFill/>
         </p:spPr>
         <p:txBody>
-          <a:bodyPr wrap="square" lIns="0" tIns="0" rIns="0" bIns="0" anchor="t">
+          <a:bodyPr wrap="square" anchor="t" lIns="0" rIns="0" tIns="0" bIns="0">
             <a:spAutoFit/>
           </a:bodyPr>
           <a:lstStyle/>
@@ -36380,7 +35998,6 @@
           <a:lstStyle/>
           <a:p>
             <a:pPr algn="ctr"/>
-            <a:endParaRPr/>
           </a:p>
         </p:txBody>
       </p:sp>
@@ -36401,7 +36018,7 @@
           <a:noFill/>
         </p:spPr>
         <p:txBody>
-          <a:bodyPr wrap="square" lIns="0" tIns="0" rIns="0" bIns="0" anchor="t">
+          <a:bodyPr wrap="square" anchor="t" lIns="0" rIns="0" tIns="0" bIns="0">
             <a:spAutoFit/>
           </a:bodyPr>
           <a:lstStyle/>
@@ -36464,7 +36081,7 @@
           </a:fontRef>
         </p:style>
         <p:txBody>
-          <a:bodyPr wrap="square" lIns="73152" tIns="36576" rIns="73152" bIns="36576" rtlCol="0" anchor="ctr"/>
+          <a:bodyPr rtlCol="0" anchor="ctr" wrap="square" lIns="73152" rIns="73152" tIns="36576" bIns="36576"/>
           <a:lstStyle/>
           <a:p>
             <a:pPr algn="ctr"/>
@@ -36557,7 +36174,7 @@
           </a:fontRef>
         </p:style>
         <p:txBody>
-          <a:bodyPr wrap="square" lIns="73152" tIns="36576" rIns="73152" bIns="36576" rtlCol="0" anchor="ctr"/>
+          <a:bodyPr rtlCol="0" anchor="ctr" wrap="square" lIns="73152" rIns="73152" tIns="36576" bIns="36576"/>
           <a:lstStyle/>
           <a:p>
             <a:pPr algn="ctr"/>
@@ -36650,7 +36267,7 @@
           </a:fontRef>
         </p:style>
         <p:txBody>
-          <a:bodyPr wrap="square" lIns="73152" tIns="36576" rIns="73152" bIns="36576" rtlCol="0" anchor="ctr"/>
+          <a:bodyPr rtlCol="0" anchor="ctr" wrap="square" lIns="73152" rIns="73152" tIns="36576" bIns="36576"/>
           <a:lstStyle/>
           <a:p>
             <a:pPr algn="ctr"/>
@@ -36743,7 +36360,7 @@
           </a:fontRef>
         </p:style>
         <p:txBody>
-          <a:bodyPr wrap="square" lIns="73152" tIns="36576" rIns="73152" bIns="36576" rtlCol="0" anchor="ctr"/>
+          <a:bodyPr rtlCol="0" anchor="ctr" wrap="square" lIns="73152" rIns="73152" tIns="36576" bIns="36576"/>
           <a:lstStyle/>
           <a:p>
             <a:pPr algn="ctr"/>
@@ -36804,7 +36421,6 @@
           <a:lstStyle/>
           <a:p>
             <a:pPr algn="ctr"/>
-            <a:endParaRPr/>
           </a:p>
         </p:txBody>
       </p:sp>
@@ -36825,7 +36441,7 @@
           <a:noFill/>
         </p:spPr>
         <p:txBody>
-          <a:bodyPr wrap="square" lIns="0" tIns="0" rIns="0" bIns="0" anchor="t">
+          <a:bodyPr wrap="square" anchor="t" lIns="0" rIns="0" tIns="0" bIns="0">
             <a:spAutoFit/>
           </a:bodyPr>
           <a:lstStyle/>
@@ -36888,7 +36504,7 @@
           </a:fontRef>
         </p:style>
         <p:txBody>
-          <a:bodyPr wrap="square" lIns="73152" tIns="36576" rIns="73152" bIns="36576" rtlCol="0" anchor="ctr"/>
+          <a:bodyPr rtlCol="0" anchor="ctr" wrap="square" lIns="73152" rIns="73152" tIns="36576" bIns="36576"/>
           <a:lstStyle/>
           <a:p>
             <a:pPr algn="ctr"/>
@@ -36981,7 +36597,7 @@
           </a:fontRef>
         </p:style>
         <p:txBody>
-          <a:bodyPr wrap="square" lIns="73152" tIns="36576" rIns="73152" bIns="36576" rtlCol="0" anchor="ctr"/>
+          <a:bodyPr rtlCol="0" anchor="ctr" wrap="square" lIns="73152" rIns="73152" tIns="36576" bIns="36576"/>
           <a:lstStyle/>
           <a:p>
             <a:pPr algn="ctr"/>
@@ -37074,7 +36690,7 @@
           </a:fontRef>
         </p:style>
         <p:txBody>
-          <a:bodyPr wrap="square" lIns="73152" tIns="36576" rIns="73152" bIns="36576" rtlCol="0" anchor="ctr"/>
+          <a:bodyPr rtlCol="0" anchor="ctr" wrap="square" lIns="73152" rIns="73152" tIns="36576" bIns="36576"/>
           <a:lstStyle/>
           <a:p>
             <a:pPr algn="ctr"/>
@@ -37167,7 +36783,7 @@
           </a:fontRef>
         </p:style>
         <p:txBody>
-          <a:bodyPr wrap="square" lIns="73152" tIns="36576" rIns="73152" bIns="36576" rtlCol="0" anchor="ctr"/>
+          <a:bodyPr rtlCol="0" anchor="ctr" wrap="square" lIns="73152" rIns="73152" tIns="36576" bIns="36576"/>
           <a:lstStyle/>
           <a:p>
             <a:pPr algn="ctr"/>
@@ -37200,7 +36816,7 @@
           <a:noFill/>
         </p:spPr>
         <p:txBody>
-          <a:bodyPr wrap="square" lIns="0" tIns="0" rIns="0" bIns="0" anchor="t">
+          <a:bodyPr wrap="square" anchor="t" lIns="0" rIns="0" tIns="0" bIns="0">
             <a:spAutoFit/>
           </a:bodyPr>
           <a:lstStyle/>
@@ -37239,7 +36855,7 @@
           <a:noFill/>
         </p:spPr>
         <p:txBody>
-          <a:bodyPr wrap="square" lIns="0" tIns="0" rIns="0" bIns="0" anchor="t">
+          <a:bodyPr wrap="square" anchor="t" lIns="0" rIns="0" tIns="0" bIns="0">
             <a:spAutoFit/>
           </a:bodyPr>
           <a:lstStyle/>
@@ -37278,7 +36894,7 @@
           <a:noFill/>
         </p:spPr>
         <p:txBody>
-          <a:bodyPr wrap="square" lIns="0" tIns="0" rIns="0" bIns="0" anchor="t">
+          <a:bodyPr wrap="square" anchor="t" lIns="0" rIns="0" tIns="0" bIns="0">
             <a:spAutoFit/>
           </a:bodyPr>
           <a:lstStyle/>
@@ -37305,23 +36921,11 @@
   <p:clrMapOvr>
     <a:masterClrMapping/>
   </p:clrMapOvr>
-  <mc:AlternateContent xmlns:mc="http://schemas.openxmlformats.org/markup-compatibility/2006">
-    <mc:Choice xmlns:p14="http://schemas.microsoft.com/office/powerpoint/2010/main" Requires="p14">
-      <p:transition spd="med" p14:dur="700">
-        <p:fade thruBlk="1"/>
-      </p:transition>
-    </mc:Choice>
-    <mc:Fallback>
-      <p:transition spd="med">
-        <p:fade thruBlk="1"/>
-      </p:transition>
-    </mc:Fallback>
-  </mc:AlternateContent>
 </p:sld>
 </file>
 
 <file path=ppt/slides/slide7.xml><?xml version="1.0" encoding="utf-8"?>
-<p:sld xmlns:a="http://schemas.openxmlformats.org/drawingml/2006/main" xmlns:r="http://schemas.openxmlformats.org/officeDocument/2006/relationships" xmlns:p="http://schemas.openxmlformats.org/presentationml/2006/main">
+<p:sld xmlns:a="http://schemas.openxmlformats.org/drawingml/2006/main" xmlns:p="http://schemas.openxmlformats.org/presentationml/2006/main" xmlns:r="http://schemas.openxmlformats.org/officeDocument/2006/relationships">
   <p:cSld>
     <p:spTree>
       <p:nvGrpSpPr>
@@ -37329,14 +36933,7 @@
         <p:cNvGrpSpPr/>
         <p:nvPr/>
       </p:nvGrpSpPr>
-      <p:grpSpPr>
-        <a:xfrm>
-          <a:off x="0" y="0"/>
-          <a:ext cx="0" cy="0"/>
-          <a:chOff x="0" y="0"/>
-          <a:chExt cx="0" cy="0"/>
-        </a:xfrm>
-      </p:grpSpPr>
+      <p:grpSpPr/>
       <p:pic>
         <p:nvPicPr>
           <p:cNvPr id="2" name="Picture 1" descr="bg_red.png"/>
@@ -37346,7 +36943,7 @@
           <p:nvPr/>
         </p:nvPicPr>
         <p:blipFill>
-          <a:blip r:embed="rId3"/>
+          <a:blip r:embed="rId2"/>
           <a:stretch>
             <a:fillRect/>
           </a:stretch>
@@ -37378,7 +36975,7 @@
           <a:noFill/>
         </p:spPr>
         <p:txBody>
-          <a:bodyPr wrap="square" lIns="0" tIns="0" rIns="0" bIns="0" anchor="t">
+          <a:bodyPr wrap="square" anchor="t" lIns="0" rIns="0" tIns="0" bIns="0">
             <a:spAutoFit/>
           </a:bodyPr>
           <a:lstStyle/>
@@ -37417,7 +37014,7 @@
           <a:noFill/>
         </p:spPr>
         <p:txBody>
-          <a:bodyPr wrap="square" lIns="0" tIns="0" rIns="0" bIns="0" anchor="t">
+          <a:bodyPr wrap="square" anchor="t" lIns="0" rIns="0" tIns="0" bIns="0">
             <a:spAutoFit/>
           </a:bodyPr>
           <a:lstStyle/>
@@ -37456,7 +37053,7 @@
           <a:noFill/>
         </p:spPr>
         <p:txBody>
-          <a:bodyPr wrap="square" lIns="0" tIns="0" rIns="0" bIns="0" anchor="t">
+          <a:bodyPr wrap="square" anchor="t" lIns="0" rIns="0" tIns="0" bIns="0">
             <a:spAutoFit/>
           </a:bodyPr>
           <a:lstStyle/>
@@ -37519,7 +37116,7 @@
           </a:fontRef>
         </p:style>
         <p:txBody>
-          <a:bodyPr wrap="square" lIns="73152" tIns="36576" rIns="73152" bIns="36576" rtlCol="0" anchor="ctr"/>
+          <a:bodyPr rtlCol="0" anchor="ctr" wrap="square" lIns="73152" rIns="73152" tIns="36576" bIns="36576"/>
           <a:lstStyle/>
           <a:p>
             <a:pPr algn="ctr"/>
@@ -37612,7 +37209,7 @@
           </a:fontRef>
         </p:style>
         <p:txBody>
-          <a:bodyPr wrap="square" lIns="73152" tIns="36576" rIns="73152" bIns="36576" rtlCol="0" anchor="ctr"/>
+          <a:bodyPr rtlCol="0" anchor="ctr" wrap="square" lIns="73152" rIns="73152" tIns="36576" bIns="36576"/>
           <a:lstStyle/>
           <a:p>
             <a:pPr algn="ctr"/>
@@ -37742,7 +37339,7 @@
           </a:fontRef>
         </p:style>
         <p:txBody>
-          <a:bodyPr wrap="square" lIns="73152" tIns="36576" rIns="73152" bIns="36576" rtlCol="0" anchor="ctr"/>
+          <a:bodyPr rtlCol="0" anchor="ctr" wrap="square" lIns="73152" rIns="73152" tIns="36576" bIns="36576"/>
           <a:lstStyle/>
           <a:p>
             <a:pPr algn="ctr"/>
@@ -37799,7 +37396,7 @@
           </a:fontRef>
         </p:style>
         <p:txBody>
-          <a:bodyPr wrap="square" lIns="73152" tIns="36576" rIns="73152" bIns="36576" rtlCol="0" anchor="ctr"/>
+          <a:bodyPr rtlCol="0" anchor="ctr" wrap="square" lIns="73152" rIns="73152" tIns="36576" bIns="36576"/>
           <a:lstStyle/>
           <a:p>
             <a:pPr algn="ctr"/>
@@ -37856,7 +37453,7 @@
           </a:fontRef>
         </p:style>
         <p:txBody>
-          <a:bodyPr wrap="square" lIns="73152" tIns="36576" rIns="73152" bIns="36576" rtlCol="0" anchor="ctr"/>
+          <a:bodyPr rtlCol="0" anchor="ctr" wrap="square" lIns="73152" rIns="73152" tIns="36576" bIns="36576"/>
           <a:lstStyle/>
           <a:p>
             <a:pPr algn="ctr"/>
@@ -37949,7 +37546,7 @@
           </a:fontRef>
         </p:style>
         <p:txBody>
-          <a:bodyPr wrap="square" lIns="73152" tIns="36576" rIns="73152" bIns="36576" rtlCol="0" anchor="ctr"/>
+          <a:bodyPr rtlCol="0" anchor="ctr" wrap="square" lIns="73152" rIns="73152" tIns="36576" bIns="36576"/>
           <a:lstStyle/>
           <a:p>
             <a:pPr algn="ctr"/>
@@ -38042,7 +37639,7 @@
           </a:fontRef>
         </p:style>
         <p:txBody>
-          <a:bodyPr wrap="square" lIns="73152" tIns="36576" rIns="73152" bIns="36576" rtlCol="0" anchor="ctr"/>
+          <a:bodyPr rtlCol="0" anchor="ctr" wrap="square" lIns="73152" rIns="73152" tIns="36576" bIns="36576"/>
           <a:lstStyle/>
           <a:p>
             <a:pPr algn="ctr"/>
@@ -38135,7 +37732,7 @@
           </a:fontRef>
         </p:style>
         <p:txBody>
-          <a:bodyPr wrap="square" lIns="73152" tIns="36576" rIns="73152" bIns="36576" rtlCol="0" anchor="ctr"/>
+          <a:bodyPr rtlCol="0" anchor="ctr" wrap="square" lIns="73152" rIns="73152" tIns="36576" bIns="36576"/>
           <a:lstStyle/>
           <a:p>
             <a:pPr algn="ctr"/>
@@ -38228,7 +37825,7 @@
           </a:fontRef>
         </p:style>
         <p:txBody>
-          <a:bodyPr wrap="square" lIns="73152" tIns="36576" rIns="73152" bIns="36576" rtlCol="0" anchor="ctr"/>
+          <a:bodyPr rtlCol="0" anchor="ctr" wrap="square" lIns="73152" rIns="73152" tIns="36576" bIns="36576"/>
           <a:lstStyle/>
           <a:p>
             <a:pPr algn="ctr"/>
@@ -38289,7 +37886,6 @@
           <a:lstStyle/>
           <a:p>
             <a:pPr algn="ctr"/>
-            <a:endParaRPr/>
           </a:p>
         </p:txBody>
       </p:sp>
@@ -38310,7 +37906,7 @@
           <a:noFill/>
         </p:spPr>
         <p:txBody>
-          <a:bodyPr wrap="square" lIns="0" tIns="0" rIns="0" bIns="0" anchor="t">
+          <a:bodyPr wrap="square" anchor="t" lIns="0" rIns="0" tIns="0" bIns="0">
             <a:spAutoFit/>
           </a:bodyPr>
           <a:lstStyle/>
@@ -38349,7 +37945,7 @@
           <a:noFill/>
         </p:spPr>
         <p:txBody>
-          <a:bodyPr wrap="square" lIns="0" tIns="0" rIns="0" bIns="0" anchor="t">
+          <a:bodyPr wrap="square" anchor="t" lIns="0" rIns="0" tIns="0" bIns="0">
             <a:spAutoFit/>
           </a:bodyPr>
           <a:lstStyle/>
@@ -38375,12 +37971,15 @@
                 <a:spcPct val="135000"/>
               </a:lnSpc>
             </a:pPr>
-            <a:endParaRPr sz="1000" b="0" i="0">
-              <a:solidFill>
-                <a:srgbClr val="F4F7FB"/>
-              </a:solidFill>
-              <a:latin typeface="Segoe UI"/>
-            </a:endParaRPr>
+            <a:r>
+              <a:rPr sz="1000" b="0" i="0">
+                <a:solidFill>
+                  <a:srgbClr val="F4F7FB"/>
+                </a:solidFill>
+                <a:latin typeface="Segoe UI"/>
+              </a:rPr>
+              <a:t/>
+            </a:r>
           </a:p>
           <a:p>
             <a:pPr algn="l">
@@ -38404,12 +38003,15 @@
                 <a:spcPct val="135000"/>
               </a:lnSpc>
             </a:pPr>
-            <a:endParaRPr sz="1000" b="0" i="0">
-              <a:solidFill>
-                <a:srgbClr val="F4F7FB"/>
-              </a:solidFill>
-              <a:latin typeface="Segoe UI"/>
-            </a:endParaRPr>
+            <a:r>
+              <a:rPr sz="1000" b="0" i="0">
+                <a:solidFill>
+                  <a:srgbClr val="F4F7FB"/>
+                </a:solidFill>
+                <a:latin typeface="Segoe UI"/>
+              </a:rPr>
+              <a:t/>
+            </a:r>
           </a:p>
           <a:p>
             <a:pPr algn="l">
@@ -38474,7 +38076,6 @@
           <a:lstStyle/>
           <a:p>
             <a:pPr algn="ctr"/>
-            <a:endParaRPr/>
           </a:p>
         </p:txBody>
       </p:sp>
@@ -38495,7 +38096,7 @@
           <a:noFill/>
         </p:spPr>
         <p:txBody>
-          <a:bodyPr wrap="square" lIns="0" tIns="0" rIns="0" bIns="0" anchor="t">
+          <a:bodyPr wrap="square" anchor="t" lIns="0" rIns="0" tIns="0" bIns="0">
             <a:spAutoFit/>
           </a:bodyPr>
           <a:lstStyle/>
@@ -38550,7 +38151,7 @@
           <a:noFill/>
         </p:spPr>
         <p:txBody>
-          <a:bodyPr wrap="square" lIns="0" tIns="0" rIns="0" bIns="0" anchor="t">
+          <a:bodyPr wrap="square" anchor="t" lIns="0" rIns="0" tIns="0" bIns="0">
             <a:spAutoFit/>
           </a:bodyPr>
           <a:lstStyle/>
@@ -38589,7 +38190,7 @@
           <a:noFill/>
         </p:spPr>
         <p:txBody>
-          <a:bodyPr wrap="square" lIns="0" tIns="0" rIns="0" bIns="0" anchor="t">
+          <a:bodyPr wrap="square" anchor="t" lIns="0" rIns="0" tIns="0" bIns="0">
             <a:spAutoFit/>
           </a:bodyPr>
           <a:lstStyle/>
@@ -38616,23 +38217,11 @@
   <p:clrMapOvr>
     <a:masterClrMapping/>
   </p:clrMapOvr>
-  <mc:AlternateContent xmlns:mc="http://schemas.openxmlformats.org/markup-compatibility/2006">
-    <mc:Choice xmlns:p14="http://schemas.microsoft.com/office/powerpoint/2010/main" Requires="p14">
-      <p:transition spd="med" p14:dur="700">
-        <p:fade thruBlk="1"/>
-      </p:transition>
-    </mc:Choice>
-    <mc:Fallback>
-      <p:transition spd="med">
-        <p:fade thruBlk="1"/>
-      </p:transition>
-    </mc:Fallback>
-  </mc:AlternateContent>
 </p:sld>
 </file>
 
 <file path=ppt/slides/slide8.xml><?xml version="1.0" encoding="utf-8"?>
-<p:sld xmlns:a="http://schemas.openxmlformats.org/drawingml/2006/main" xmlns:r="http://schemas.openxmlformats.org/officeDocument/2006/relationships" xmlns:p="http://schemas.openxmlformats.org/presentationml/2006/main">
+<p:sld xmlns:a="http://schemas.openxmlformats.org/drawingml/2006/main" xmlns:p="http://schemas.openxmlformats.org/presentationml/2006/main" xmlns:r="http://schemas.openxmlformats.org/officeDocument/2006/relationships">
   <p:cSld>
     <p:spTree>
       <p:nvGrpSpPr>
@@ -38640,14 +38229,7 @@
         <p:cNvGrpSpPr/>
         <p:nvPr/>
       </p:nvGrpSpPr>
-      <p:grpSpPr>
-        <a:xfrm>
-          <a:off x="0" y="0"/>
-          <a:ext cx="0" cy="0"/>
-          <a:chOff x="0" y="0"/>
-          <a:chExt cx="0" cy="0"/>
-        </a:xfrm>
-      </p:grpSpPr>
+      <p:grpSpPr/>
       <p:pic>
         <p:nvPicPr>
           <p:cNvPr id="2" name="Picture 1" descr="bg_deep.png"/>
@@ -38657,7 +38239,7 @@
           <p:nvPr/>
         </p:nvPicPr>
         <p:blipFill>
-          <a:blip r:embed="rId3"/>
+          <a:blip r:embed="rId2"/>
           <a:stretch>
             <a:fillRect/>
           </a:stretch>
@@ -38689,7 +38271,7 @@
           <a:noFill/>
         </p:spPr>
         <p:txBody>
-          <a:bodyPr wrap="square" lIns="0" tIns="0" rIns="0" bIns="0" anchor="t">
+          <a:bodyPr wrap="square" anchor="t" lIns="0" rIns="0" tIns="0" bIns="0">
             <a:spAutoFit/>
           </a:bodyPr>
           <a:lstStyle/>
@@ -38728,7 +38310,7 @@
           <a:noFill/>
         </p:spPr>
         <p:txBody>
-          <a:bodyPr wrap="square" lIns="0" tIns="0" rIns="0" bIns="0" anchor="t">
+          <a:bodyPr wrap="square" anchor="t" lIns="0" rIns="0" tIns="0" bIns="0">
             <a:spAutoFit/>
           </a:bodyPr>
           <a:lstStyle/>
@@ -38791,7 +38373,7 @@
           </a:fontRef>
         </p:style>
         <p:txBody>
-          <a:bodyPr wrap="square" lIns="73152" tIns="36576" rIns="73152" bIns="36576" rtlCol="0" anchor="ctr"/>
+          <a:bodyPr rtlCol="0" anchor="ctr" wrap="square" lIns="73152" rIns="73152" tIns="36576" bIns="36576"/>
           <a:lstStyle/>
           <a:p>
             <a:pPr algn="ctr"/>
@@ -38902,7 +38484,7 @@
           </a:fontRef>
         </p:style>
         <p:txBody>
-          <a:bodyPr wrap="square" lIns="73152" tIns="36576" rIns="73152" bIns="36576" rtlCol="0" anchor="ctr"/>
+          <a:bodyPr rtlCol="0" anchor="ctr" wrap="square" lIns="73152" rIns="73152" tIns="36576" bIns="36576"/>
           <a:lstStyle/>
           <a:p>
             <a:pPr algn="ctr"/>
@@ -39012,7 +38594,7 @@
           </a:fontRef>
         </p:style>
         <p:txBody>
-          <a:bodyPr wrap="square" lIns="73152" tIns="36576" rIns="73152" bIns="36576" rtlCol="0" anchor="ctr"/>
+          <a:bodyPr rtlCol="0" anchor="ctr" wrap="square" lIns="73152" rIns="73152" tIns="36576" bIns="36576"/>
           <a:lstStyle/>
           <a:p>
             <a:pPr algn="ctr"/>
@@ -39122,7 +38704,7 @@
           </a:fontRef>
         </p:style>
         <p:txBody>
-          <a:bodyPr wrap="square" lIns="73152" tIns="36576" rIns="73152" bIns="36576" rtlCol="0" anchor="ctr"/>
+          <a:bodyPr rtlCol="0" anchor="ctr" wrap="square" lIns="73152" rIns="73152" tIns="36576" bIns="36576"/>
           <a:lstStyle/>
           <a:p>
             <a:pPr algn="ctr"/>
@@ -39232,7 +38814,7 @@
           </a:fontRef>
         </p:style>
         <p:txBody>
-          <a:bodyPr wrap="square" lIns="73152" tIns="36576" rIns="73152" bIns="36576" rtlCol="0" anchor="ctr"/>
+          <a:bodyPr rtlCol="0" anchor="ctr" wrap="square" lIns="73152" rIns="73152" tIns="36576" bIns="36576"/>
           <a:lstStyle/>
           <a:p>
             <a:pPr algn="ctr"/>
@@ -39310,7 +38892,6 @@
           <a:lstStyle/>
           <a:p>
             <a:pPr algn="ctr"/>
-            <a:endParaRPr/>
           </a:p>
         </p:txBody>
       </p:sp>
@@ -39331,7 +38912,7 @@
           <a:noFill/>
         </p:spPr>
         <p:txBody>
-          <a:bodyPr wrap="square" lIns="0" tIns="0" rIns="0" bIns="0" anchor="t">
+          <a:bodyPr wrap="square" anchor="t" lIns="0" rIns="0" tIns="0" bIns="0">
             <a:spAutoFit/>
           </a:bodyPr>
           <a:lstStyle/>
@@ -39370,7 +38951,7 @@
           <a:noFill/>
         </p:spPr>
         <p:txBody>
-          <a:bodyPr wrap="square" lIns="0" tIns="0" rIns="0" bIns="0" anchor="t">
+          <a:bodyPr wrap="square" anchor="t" lIns="0" rIns="0" tIns="0" bIns="0">
             <a:spAutoFit/>
           </a:bodyPr>
           <a:lstStyle/>
@@ -39396,12 +38977,15 @@
                 <a:spcPct val="140000"/>
               </a:lnSpc>
             </a:pPr>
-            <a:endParaRPr sz="1100" b="0" i="0">
-              <a:solidFill>
-                <a:srgbClr val="F4F7FB"/>
-              </a:solidFill>
-              <a:latin typeface="Segoe UI"/>
-            </a:endParaRPr>
+            <a:r>
+              <a:rPr sz="1100" b="0" i="0">
+                <a:solidFill>
+                  <a:srgbClr val="F4F7FB"/>
+                </a:solidFill>
+                <a:latin typeface="Segoe UI"/>
+              </a:rPr>
+              <a:t/>
+            </a:r>
           </a:p>
           <a:p>
             <a:pPr algn="l">
@@ -39466,7 +39050,6 @@
           <a:lstStyle/>
           <a:p>
             <a:pPr algn="ctr"/>
-            <a:endParaRPr/>
           </a:p>
         </p:txBody>
       </p:sp>
@@ -39487,7 +39070,7 @@
           <a:noFill/>
         </p:spPr>
         <p:txBody>
-          <a:bodyPr wrap="square" lIns="0" tIns="0" rIns="0" bIns="0" anchor="t">
+          <a:bodyPr wrap="square" anchor="t" lIns="0" rIns="0" tIns="0" bIns="0">
             <a:spAutoFit/>
           </a:bodyPr>
           <a:lstStyle/>
@@ -39526,7 +39109,7 @@
           <a:noFill/>
         </p:spPr>
         <p:txBody>
-          <a:bodyPr wrap="square" lIns="0" tIns="0" rIns="0" bIns="0" anchor="t">
+          <a:bodyPr wrap="square" anchor="t" lIns="0" rIns="0" tIns="0" bIns="0">
             <a:spAutoFit/>
           </a:bodyPr>
           <a:lstStyle/>
@@ -39552,12 +39135,15 @@
                 <a:spcPct val="140000"/>
               </a:lnSpc>
             </a:pPr>
-            <a:endParaRPr sz="1100" b="0" i="0">
-              <a:solidFill>
-                <a:srgbClr val="F4F7FB"/>
-              </a:solidFill>
-              <a:latin typeface="Segoe UI"/>
-            </a:endParaRPr>
+            <a:r>
+              <a:rPr sz="1100" b="0" i="0">
+                <a:solidFill>
+                  <a:srgbClr val="F4F7FB"/>
+                </a:solidFill>
+                <a:latin typeface="Segoe UI"/>
+              </a:rPr>
+              <a:t/>
+            </a:r>
           </a:p>
           <a:p>
             <a:pPr algn="l">
@@ -39594,7 +39180,7 @@
           <a:noFill/>
         </p:spPr>
         <p:txBody>
-          <a:bodyPr wrap="square" lIns="0" tIns="0" rIns="0" bIns="0" anchor="t">
+          <a:bodyPr wrap="square" anchor="t" lIns="0" rIns="0" tIns="0" bIns="0">
             <a:spAutoFit/>
           </a:bodyPr>
           <a:lstStyle/>
@@ -39633,7 +39219,7 @@
           <a:noFill/>
         </p:spPr>
         <p:txBody>
-          <a:bodyPr wrap="square" lIns="0" tIns="0" rIns="0" bIns="0" anchor="t">
+          <a:bodyPr wrap="square" anchor="t" lIns="0" rIns="0" tIns="0" bIns="0">
             <a:spAutoFit/>
           </a:bodyPr>
           <a:lstStyle/>
@@ -39660,23 +39246,11 @@
   <p:clrMapOvr>
     <a:masterClrMapping/>
   </p:clrMapOvr>
-  <mc:AlternateContent xmlns:mc="http://schemas.openxmlformats.org/markup-compatibility/2006">
-    <mc:Choice xmlns:p14="http://schemas.microsoft.com/office/powerpoint/2010/main" Requires="p14">
-      <p:transition spd="med" p14:dur="700">
-        <p:fade thruBlk="1"/>
-      </p:transition>
-    </mc:Choice>
-    <mc:Fallback>
-      <p:transition spd="med">
-        <p:fade thruBlk="1"/>
-      </p:transition>
-    </mc:Fallback>
-  </mc:AlternateContent>
 </p:sld>
 </file>
 
 <file path=ppt/slides/slide9.xml><?xml version="1.0" encoding="utf-8"?>
-<p:sld xmlns:a="http://schemas.openxmlformats.org/drawingml/2006/main" xmlns:r="http://schemas.openxmlformats.org/officeDocument/2006/relationships" xmlns:p="http://schemas.openxmlformats.org/presentationml/2006/main">
+<p:sld xmlns:a="http://schemas.openxmlformats.org/drawingml/2006/main" xmlns:p="http://schemas.openxmlformats.org/presentationml/2006/main" xmlns:r="http://schemas.openxmlformats.org/officeDocument/2006/relationships">
   <p:cSld>
     <p:spTree>
       <p:nvGrpSpPr>
@@ -39684,14 +39258,7 @@
         <p:cNvGrpSpPr/>
         <p:nvPr/>
       </p:nvGrpSpPr>
-      <p:grpSpPr>
-        <a:xfrm>
-          <a:off x="0" y="0"/>
-          <a:ext cx="0" cy="0"/>
-          <a:chOff x="0" y="0"/>
-          <a:chExt cx="0" cy="0"/>
-        </a:xfrm>
-      </p:grpSpPr>
+      <p:grpSpPr/>
       <p:pic>
         <p:nvPicPr>
           <p:cNvPr id="2" name="Picture 1" descr="bg_deep.png"/>
@@ -39733,7 +39300,7 @@
           <a:noFill/>
         </p:spPr>
         <p:txBody>
-          <a:bodyPr wrap="square" lIns="0" tIns="0" rIns="0" bIns="0" anchor="t">
+          <a:bodyPr wrap="square" anchor="t" lIns="0" rIns="0" tIns="0" bIns="0">
             <a:spAutoFit/>
           </a:bodyPr>
           <a:lstStyle/>
@@ -39772,7 +39339,7 @@
           <a:noFill/>
         </p:spPr>
         <p:txBody>
-          <a:bodyPr wrap="square" lIns="0" tIns="0" rIns="0" bIns="0" anchor="t">
+          <a:bodyPr wrap="square" anchor="t" lIns="0" rIns="0" tIns="0" bIns="0">
             <a:spAutoFit/>
           </a:bodyPr>
           <a:lstStyle/>
@@ -39811,7 +39378,7 @@
           <a:noFill/>
         </p:spPr>
         <p:txBody>
-          <a:bodyPr wrap="square" lIns="0" tIns="0" rIns="0" bIns="0" anchor="t">
+          <a:bodyPr wrap="square" anchor="t" lIns="0" rIns="0" tIns="0" bIns="0">
             <a:spAutoFit/>
           </a:bodyPr>
           <a:lstStyle/>
@@ -39874,7 +39441,7 @@
           </a:fontRef>
         </p:style>
         <p:txBody>
-          <a:bodyPr wrap="square" lIns="73152" tIns="36576" rIns="73152" bIns="36576" rtlCol="0" anchor="ctr"/>
+          <a:bodyPr rtlCol="0" anchor="ctr" wrap="square" lIns="73152" rIns="73152" tIns="36576" bIns="36576"/>
           <a:lstStyle/>
           <a:p>
             <a:pPr algn="ctr"/>
@@ -39984,7 +39551,7 @@
           </a:fontRef>
         </p:style>
         <p:txBody>
-          <a:bodyPr wrap="square" lIns="73152" tIns="36576" rIns="73152" bIns="36576" rtlCol="0" anchor="ctr"/>
+          <a:bodyPr rtlCol="0" anchor="ctr" wrap="square" lIns="73152" rIns="73152" tIns="36576" bIns="36576"/>
           <a:lstStyle/>
           <a:p>
             <a:pPr algn="ctr"/>
@@ -40094,7 +39661,7 @@
           </a:fontRef>
         </p:style>
         <p:txBody>
-          <a:bodyPr wrap="square" lIns="73152" tIns="36576" rIns="73152" bIns="36576" rtlCol="0" anchor="ctr"/>
+          <a:bodyPr rtlCol="0" anchor="ctr" wrap="square" lIns="73152" rIns="73152" tIns="36576" bIns="36576"/>
           <a:lstStyle/>
           <a:p>
             <a:pPr algn="ctr"/>
@@ -40204,7 +39771,7 @@
           </a:fontRef>
         </p:style>
         <p:txBody>
-          <a:bodyPr wrap="square" lIns="73152" tIns="36576" rIns="73152" bIns="36576" rtlCol="0" anchor="ctr"/>
+          <a:bodyPr rtlCol="0" anchor="ctr" wrap="square" lIns="73152" rIns="73152" tIns="36576" bIns="36576"/>
           <a:lstStyle/>
           <a:p>
             <a:pPr algn="ctr"/>
@@ -40315,7 +39882,7 @@
           </a:fontRef>
         </p:style>
         <p:txBody>
-          <a:bodyPr wrap="square" lIns="73152" tIns="36576" rIns="73152" bIns="36576" rtlCol="0" anchor="ctr"/>
+          <a:bodyPr rtlCol="0" anchor="ctr" wrap="square" lIns="73152" rIns="73152" tIns="36576" bIns="36576"/>
           <a:lstStyle/>
           <a:p>
             <a:pPr algn="ctr"/>
@@ -40366,7 +39933,7 @@
           <a:noFill/>
         </p:spPr>
         <p:txBody>
-          <a:bodyPr wrap="square" lIns="0" tIns="0" rIns="0" bIns="0" anchor="t">
+          <a:bodyPr wrap="square" anchor="t" lIns="0" rIns="0" tIns="0" bIns="0">
             <a:spAutoFit/>
           </a:bodyPr>
           <a:lstStyle/>
@@ -40405,7 +39972,7 @@
           <a:noFill/>
         </p:spPr>
         <p:txBody>
-          <a:bodyPr wrap="square" lIns="0" tIns="0" rIns="0" bIns="0" anchor="t">
+          <a:bodyPr wrap="square" anchor="t" lIns="0" rIns="0" tIns="0" bIns="0">
             <a:spAutoFit/>
           </a:bodyPr>
           <a:lstStyle/>
@@ -40444,7 +40011,7 @@
           <a:noFill/>
         </p:spPr>
         <p:txBody>
-          <a:bodyPr wrap="square" lIns="0" tIns="0" rIns="0" bIns="0" anchor="t">
+          <a:bodyPr wrap="square" anchor="t" lIns="0" rIns="0" tIns="0" bIns="0">
             <a:spAutoFit/>
           </a:bodyPr>
           <a:lstStyle/>
@@ -40483,7 +40050,7 @@
           <a:noFill/>
         </p:spPr>
         <p:txBody>
-          <a:bodyPr wrap="square" lIns="0" tIns="0" rIns="0" bIns="0" anchor="t">
+          <a:bodyPr wrap="square" anchor="t" lIns="0" rIns="0" tIns="0" bIns="0">
             <a:spAutoFit/>
           </a:bodyPr>
           <a:lstStyle/>
@@ -40522,7 +40089,7 @@
           <a:noFill/>
         </p:spPr>
         <p:txBody>
-          <a:bodyPr wrap="square" lIns="0" tIns="0" rIns="0" bIns="0" anchor="t">
+          <a:bodyPr wrap="square" anchor="t" lIns="0" rIns="0" tIns="0" bIns="0">
             <a:spAutoFit/>
           </a:bodyPr>
           <a:lstStyle/>
@@ -40561,7 +40128,7 @@
           <a:noFill/>
         </p:spPr>
         <p:txBody>
-          <a:bodyPr wrap="square" lIns="0" tIns="0" rIns="0" bIns="0" anchor="t">
+          <a:bodyPr wrap="square" anchor="t" lIns="0" rIns="0" tIns="0" bIns="0">
             <a:spAutoFit/>
           </a:bodyPr>
           <a:lstStyle/>
@@ -40600,7 +40167,7 @@
           <a:noFill/>
         </p:spPr>
         <p:txBody>
-          <a:bodyPr wrap="square" lIns="0" tIns="0" rIns="0" bIns="0" anchor="t">
+          <a:bodyPr wrap="square" anchor="t" lIns="0" rIns="0" tIns="0" bIns="0">
             <a:spAutoFit/>
           </a:bodyPr>
           <a:lstStyle/>
@@ -40639,7 +40206,7 @@
           <a:noFill/>
         </p:spPr>
         <p:txBody>
-          <a:bodyPr wrap="square" lIns="0" tIns="0" rIns="0" bIns="0" anchor="t">
+          <a:bodyPr wrap="square" anchor="t" lIns="0" rIns="0" tIns="0" bIns="0">
             <a:spAutoFit/>
           </a:bodyPr>
           <a:lstStyle/>
@@ -40678,7 +40245,7 @@
           <a:noFill/>
         </p:spPr>
         <p:txBody>
-          <a:bodyPr wrap="square" lIns="0" tIns="0" rIns="0" bIns="0" anchor="t">
+          <a:bodyPr wrap="square" anchor="t" lIns="0" rIns="0" tIns="0" bIns="0">
             <a:spAutoFit/>
           </a:bodyPr>
           <a:lstStyle/>
@@ -40717,7 +40284,7 @@
           <a:noFill/>
         </p:spPr>
         <p:txBody>
-          <a:bodyPr wrap="square" lIns="0" tIns="0" rIns="0" bIns="0" anchor="t">
+          <a:bodyPr wrap="square" anchor="t" lIns="0" rIns="0" tIns="0" bIns="0">
             <a:spAutoFit/>
           </a:bodyPr>
           <a:lstStyle/>
@@ -40744,18 +40311,6 @@
   <p:clrMapOvr>
     <a:masterClrMapping/>
   </p:clrMapOvr>
-  <mc:AlternateContent xmlns:mc="http://schemas.openxmlformats.org/markup-compatibility/2006">
-    <mc:Choice xmlns:p14="http://schemas.microsoft.com/office/powerpoint/2010/main" Requires="p14">
-      <p:transition spd="med" p14:dur="700">
-        <p:fade thruBlk="1"/>
-      </p:transition>
-    </mc:Choice>
-    <mc:Fallback>
-      <p:transition spd="med">
-        <p:fade thruBlk="1"/>
-      </p:transition>
-    </mc:Fallback>
-  </mc:AlternateContent>
 </p:sld>
 </file>
 
@@ -41090,44 +40645,44 @@
         <a:sysClr val="window" lastClr="FFFFFF"/>
       </a:lt1>
       <a:dk2>
-        <a:srgbClr val="44546A"/>
+        <a:srgbClr val="1F497D"/>
       </a:dk2>
       <a:lt2>
-        <a:srgbClr val="E7E6E6"/>
+        <a:srgbClr val="EEECE1"/>
       </a:lt2>
       <a:accent1>
-        <a:srgbClr val="4472C4"/>
+        <a:srgbClr val="4F81BD"/>
       </a:accent1>
       <a:accent2>
-        <a:srgbClr val="ED7D31"/>
+        <a:srgbClr val="C0504D"/>
       </a:accent2>
       <a:accent3>
-        <a:srgbClr val="A5A5A5"/>
+        <a:srgbClr val="9BBB59"/>
       </a:accent3>
       <a:accent4>
-        <a:srgbClr val="FFC000"/>
+        <a:srgbClr val="8064A2"/>
       </a:accent4>
       <a:accent5>
-        <a:srgbClr val="5B9BD5"/>
+        <a:srgbClr val="4BACC6"/>
       </a:accent5>
       <a:accent6>
-        <a:srgbClr val="70AD47"/>
+        <a:srgbClr val="F79646"/>
       </a:accent6>
       <a:hlink>
-        <a:srgbClr val="0563C1"/>
+        <a:srgbClr val="0000FF"/>
       </a:hlink>
       <a:folHlink>
-        <a:srgbClr val="954F72"/>
+        <a:srgbClr val="800080"/>
       </a:folHlink>
     </a:clrScheme>
     <a:fontScheme name="Office">
       <a:majorFont>
-        <a:latin typeface="Calibri Light" panose="020F0302020204030204"/>
+        <a:latin typeface="Calibri"/>
         <a:ea typeface=""/>
         <a:cs typeface=""/>
-        <a:font script="Jpan" typeface="游ゴシック Light"/>
+        <a:font script="Jpan" typeface="ＭＳ Ｐゴシック"/>
         <a:font script="Hang" typeface="맑은 고딕"/>
-        <a:font script="Hans" typeface="等线 Light"/>
+        <a:font script="Hans" typeface="宋体"/>
         <a:font script="Hant" typeface="新細明體"/>
         <a:font script="Arab" typeface="Times New Roman"/>
         <a:font script="Hebr" typeface="Times New Roman"/>
@@ -41155,31 +40710,14 @@
         <a:font script="Viet" typeface="Times New Roman"/>
         <a:font script="Uigh" typeface="Microsoft Uighur"/>
         <a:font script="Geor" typeface="Sylfaen"/>
-        <a:font script="Armn" typeface="Arial"/>
-        <a:font script="Bugi" typeface="Leelawadee UI"/>
-        <a:font script="Bopo" typeface="Microsoft JhengHei"/>
-        <a:font script="Java" typeface="Javanese Text"/>
-        <a:font script="Lisu" typeface="Segoe UI"/>
-        <a:font script="Mymr" typeface="Myanmar Text"/>
-        <a:font script="Nkoo" typeface="Ebrima"/>
-        <a:font script="Olck" typeface="Nirmala UI"/>
-        <a:font script="Osma" typeface="Ebrima"/>
-        <a:font script="Phag" typeface="Phagspa"/>
-        <a:font script="Syrn" typeface="Estrangelo Edessa"/>
-        <a:font script="Syrj" typeface="Estrangelo Edessa"/>
-        <a:font script="Syre" typeface="Estrangelo Edessa"/>
-        <a:font script="Sora" typeface="Nirmala UI"/>
-        <a:font script="Tale" typeface="Microsoft Tai Le"/>
-        <a:font script="Talu" typeface="Microsoft New Tai Lue"/>
-        <a:font script="Tfng" typeface="Ebrima"/>
       </a:majorFont>
       <a:minorFont>
-        <a:latin typeface="Calibri" panose="020F0502020204030204"/>
+        <a:latin typeface="Calibri"/>
         <a:ea typeface=""/>
         <a:cs typeface=""/>
-        <a:font script="Jpan" typeface="游ゴシック"/>
+        <a:font script="Jpan" typeface="ＭＳ Ｐゴシック"/>
         <a:font script="Hang" typeface="맑은 고딕"/>
-        <a:font script="Hans" typeface="等线"/>
+        <a:font script="Hans" typeface="宋体"/>
         <a:font script="Hant" typeface="新細明體"/>
         <a:font script="Arab" typeface="Arial"/>
         <a:font script="Hebr" typeface="Arial"/>
@@ -41207,23 +40745,6 @@
         <a:font script="Viet" typeface="Arial"/>
         <a:font script="Uigh" typeface="Microsoft Uighur"/>
         <a:font script="Geor" typeface="Sylfaen"/>
-        <a:font script="Armn" typeface="Arial"/>
-        <a:font script="Bugi" typeface="Leelawadee UI"/>
-        <a:font script="Bopo" typeface="Microsoft JhengHei"/>
-        <a:font script="Java" typeface="Javanese Text"/>
-        <a:font script="Lisu" typeface="Segoe UI"/>
-        <a:font script="Mymr" typeface="Myanmar Text"/>
-        <a:font script="Nkoo" typeface="Ebrima"/>
-        <a:font script="Olck" typeface="Nirmala UI"/>
-        <a:font script="Osma" typeface="Ebrima"/>
-        <a:font script="Phag" typeface="Phagspa"/>
-        <a:font script="Syrn" typeface="Estrangelo Edessa"/>
-        <a:font script="Syrj" typeface="Estrangelo Edessa"/>
-        <a:font script="Syre" typeface="Estrangelo Edessa"/>
-        <a:font script="Sora" typeface="Nirmala UI"/>
-        <a:font script="Tale" typeface="Microsoft Tai Le"/>
-        <a:font script="Talu" typeface="Microsoft New Tai Lue"/>
-        <a:font script="Tfng" typeface="Ebrima"/>
       </a:minorFont>
     </a:fontScheme>
     <a:fmtScheme name="Office">
@@ -41235,141 +40756,200 @@
           <a:gsLst>
             <a:gs pos="0">
               <a:schemeClr val="phClr">
-                <a:lumMod val="110000"/>
-                <a:satMod val="105000"/>
-                <a:tint val="67000"/>
+                <a:tint val="50000"/>
+                <a:satMod val="300000"/>
               </a:schemeClr>
             </a:gs>
-            <a:gs pos="50000">
+            <a:gs pos="35000">
               <a:schemeClr val="phClr">
-                <a:lumMod val="105000"/>
-                <a:satMod val="103000"/>
-                <a:tint val="73000"/>
+                <a:tint val="37000"/>
+                <a:satMod val="300000"/>
               </a:schemeClr>
             </a:gs>
             <a:gs pos="100000">
               <a:schemeClr val="phClr">
-                <a:lumMod val="105000"/>
-                <a:satMod val="109000"/>
-                <a:tint val="81000"/>
+                <a:tint val="15000"/>
+                <a:satMod val="350000"/>
               </a:schemeClr>
             </a:gs>
           </a:gsLst>
-          <a:lin ang="5400000" scaled="0"/>
+          <a:lin ang="16200000" scaled="1"/>
         </a:gradFill>
         <a:gradFill rotWithShape="1">
           <a:gsLst>
             <a:gs pos="0">
               <a:schemeClr val="phClr">
-                <a:satMod val="103000"/>
-                <a:lumMod val="102000"/>
-                <a:tint val="94000"/>
-              </a:schemeClr>
-            </a:gs>
-            <a:gs pos="50000">
-              <a:schemeClr val="phClr">
-                <a:satMod val="110000"/>
-                <a:lumMod val="100000"/>
+                <a:tint val="100000"/>
                 <a:shade val="100000"/>
+                <a:satMod val="130000"/>
               </a:schemeClr>
             </a:gs>
             <a:gs pos="100000">
               <a:schemeClr val="phClr">
-                <a:lumMod val="99000"/>
-                <a:satMod val="120000"/>
-                <a:shade val="78000"/>
+                <a:tint val="50000"/>
+                <a:shade val="100000"/>
+                <a:satMod val="350000"/>
               </a:schemeClr>
             </a:gs>
           </a:gsLst>
-          <a:lin ang="5400000" scaled="0"/>
+          <a:lin ang="16200000" scaled="0"/>
         </a:gradFill>
       </a:fillStyleLst>
       <a:lnStyleLst>
-        <a:ln w="6350" cap="flat" cmpd="sng" algn="ctr">
+        <a:ln w="9525" cap="flat" cmpd="sng" algn="ctr">
+          <a:solidFill>
+            <a:schemeClr val="phClr">
+              <a:shade val="95000"/>
+              <a:satMod val="105000"/>
+            </a:schemeClr>
+          </a:solidFill>
+          <a:prstDash val="solid"/>
+        </a:ln>
+        <a:ln w="25400" cap="flat" cmpd="sng" algn="ctr">
           <a:solidFill>
             <a:schemeClr val="phClr"/>
           </a:solidFill>
           <a:prstDash val="solid"/>
-          <a:miter lim="800000"/>
         </a:ln>
-        <a:ln w="12700" cap="flat" cmpd="sng" algn="ctr">
+        <a:ln w="38100" cap="flat" cmpd="sng" algn="ctr">
           <a:solidFill>
             <a:schemeClr val="phClr"/>
           </a:solidFill>
           <a:prstDash val="solid"/>
-          <a:miter lim="800000"/>
-        </a:ln>
-        <a:ln w="19050" cap="flat" cmpd="sng" algn="ctr">
-          <a:solidFill>
-            <a:schemeClr val="phClr"/>
-          </a:solidFill>
-          <a:prstDash val="solid"/>
-          <a:miter lim="800000"/>
         </a:ln>
       </a:lnStyleLst>
       <a:effectStyleLst>
         <a:effectStyle>
-          <a:effectLst/>
-        </a:effectStyle>
-        <a:effectStyle>
-          <a:effectLst/>
+          <a:effectLst>
+            <a:outerShdw blurRad="40000" dist="20000" dir="5400000" rotWithShape="0">
+              <a:srgbClr val="000000">
+                <a:alpha val="38000"/>
+              </a:srgbClr>
+            </a:outerShdw>
+          </a:effectLst>
         </a:effectStyle>
         <a:effectStyle>
           <a:effectLst>
-            <a:outerShdw blurRad="57150" dist="19050" dir="5400000" algn="ctr" rotWithShape="0">
+            <a:outerShdw blurRad="40000" dist="23000" dir="5400000" rotWithShape="0">
               <a:srgbClr val="000000">
-                <a:alpha val="63000"/>
+                <a:alpha val="35000"/>
               </a:srgbClr>
             </a:outerShdw>
           </a:effectLst>
+        </a:effectStyle>
+        <a:effectStyle>
+          <a:effectLst>
+            <a:outerShdw blurRad="40000" dist="23000" dir="5400000" rotWithShape="0">
+              <a:srgbClr val="000000">
+                <a:alpha val="35000"/>
+              </a:srgbClr>
+            </a:outerShdw>
+          </a:effectLst>
+          <a:scene3d>
+            <a:camera prst="orthographicFront">
+              <a:rot lat="0" lon="0" rev="0"/>
+            </a:camera>
+            <a:lightRig rig="threePt" dir="t">
+              <a:rot lat="0" lon="0" rev="1200000"/>
+            </a:lightRig>
+          </a:scene3d>
+          <a:sp3d>
+            <a:bevelT w="63500" h="25400"/>
+          </a:sp3d>
         </a:effectStyle>
       </a:effectStyleLst>
       <a:bgFillStyleLst>
         <a:solidFill>
           <a:schemeClr val="phClr"/>
         </a:solidFill>
-        <a:solidFill>
-          <a:schemeClr val="phClr">
-            <a:tint val="95000"/>
-            <a:satMod val="170000"/>
-          </a:schemeClr>
-        </a:solidFill>
         <a:gradFill rotWithShape="1">
           <a:gsLst>
             <a:gs pos="0">
               <a:schemeClr val="phClr">
-                <a:tint val="93000"/>
-                <a:satMod val="150000"/>
-                <a:shade val="98000"/>
-                <a:lumMod val="102000"/>
+                <a:tint val="40000"/>
+                <a:satMod val="350000"/>
               </a:schemeClr>
             </a:gs>
-            <a:gs pos="50000">
+            <a:gs pos="40000">
               <a:schemeClr val="phClr">
-                <a:tint val="98000"/>
-                <a:satMod val="130000"/>
-                <a:shade val="90000"/>
-                <a:lumMod val="103000"/>
+                <a:tint val="45000"/>
+                <a:shade val="99000"/>
+                <a:satMod val="350000"/>
               </a:schemeClr>
             </a:gs>
             <a:gs pos="100000">
               <a:schemeClr val="phClr">
-                <a:shade val="63000"/>
-                <a:satMod val="120000"/>
+                <a:shade val="20000"/>
+                <a:satMod val="255000"/>
               </a:schemeClr>
             </a:gs>
           </a:gsLst>
-          <a:lin ang="5400000" scaled="0"/>
+          <a:path path="circle">
+            <a:fillToRect l="50000" t="-80000" r="50000" b="180000"/>
+          </a:path>
+        </a:gradFill>
+        <a:gradFill rotWithShape="1">
+          <a:gsLst>
+            <a:gs pos="0">
+              <a:schemeClr val="phClr">
+                <a:tint val="80000"/>
+                <a:satMod val="300000"/>
+              </a:schemeClr>
+            </a:gs>
+            <a:gs pos="100000">
+              <a:schemeClr val="phClr">
+                <a:shade val="30000"/>
+                <a:satMod val="200000"/>
+              </a:schemeClr>
+            </a:gs>
+          </a:gsLst>
+          <a:path path="circle">
+            <a:fillToRect l="50000" t="50000" r="50000" b="50000"/>
+          </a:path>
         </a:gradFill>
       </a:bgFillStyleLst>
     </a:fmtScheme>
   </a:themeElements>
-  <a:objectDefaults/>
+  <a:objectDefaults>
+    <a:spDef>
+      <a:spPr/>
+      <a:bodyPr/>
+      <a:lstStyle/>
+      <a:style>
+        <a:lnRef idx="1">
+          <a:schemeClr val="accent1"/>
+        </a:lnRef>
+        <a:fillRef idx="3">
+          <a:schemeClr val="accent1"/>
+        </a:fillRef>
+        <a:effectRef idx="2">
+          <a:schemeClr val="accent1"/>
+        </a:effectRef>
+        <a:fontRef idx="minor">
+          <a:schemeClr val="lt1"/>
+        </a:fontRef>
+      </a:style>
+    </a:spDef>
+    <a:lnDef>
+      <a:spPr/>
+      <a:bodyPr/>
+      <a:lstStyle/>
+      <a:style>
+        <a:lnRef idx="2">
+          <a:schemeClr val="accent1"/>
+        </a:lnRef>
+        <a:fillRef idx="0">
+          <a:schemeClr val="accent1"/>
+        </a:fillRef>
+        <a:effectRef idx="1">
+          <a:schemeClr val="accent1"/>
+        </a:effectRef>
+        <a:fontRef idx="minor">
+          <a:schemeClr val="tx1"/>
+        </a:fontRef>
+      </a:style>
+    </a:lnDef>
+  </a:objectDefaults>
   <a:extraClrSchemeLst/>
-  <a:extLst>
-    <a:ext uri="{05A4C25C-085E-4340-85A3-A5531E510DB2}">
-      <thm15:themeFamily xmlns:thm15="http://schemas.microsoft.com/office/thememl/2012/main" name="Office Theme" id="{62F939B6-93AF-4DB8-9C6B-D6C7DFDC589F}" vid="{4A3C46E8-61CC-4603-A589-7422A47A8E4A}"/>
-    </a:ext>
-  </a:extLst>
 </a:theme>
 </file>
--- a/ppt/RoadAssist-Bharat-FINAL.pptx
+++ b/ppt/RoadAssist-Bharat-FINAL.pptx
@@ -4,41 +4,44 @@
   <p:sldMasterIdLst>
     <p:sldMasterId id="2147483648" r:id="rId1"/>
   </p:sldMasterIdLst>
+  <p:notesMasterIdLst>
+    <p:notesMasterId r:id="rId34"/>
+  </p:notesMasterIdLst>
   <p:sldIdLst>
-    <p:sldId id="256" r:id="rId7"/>
-    <p:sldId id="257" r:id="rId9"/>
-    <p:sldId id="258" r:id="rId10"/>
-    <p:sldId id="259" r:id="rId11"/>
-    <p:sldId id="260" r:id="rId12"/>
-    <p:sldId id="261" r:id="rId13"/>
-    <p:sldId id="262" r:id="rId14"/>
-    <p:sldId id="263" r:id="rId15"/>
-    <p:sldId id="264" r:id="rId16"/>
-    <p:sldId id="265" r:id="rId17"/>
-    <p:sldId id="266" r:id="rId18"/>
-    <p:sldId id="267" r:id="rId19"/>
-    <p:sldId id="268" r:id="rId20"/>
-    <p:sldId id="269" r:id="rId21"/>
-    <p:sldId id="270" r:id="rId22"/>
-    <p:sldId id="271" r:id="rId23"/>
-    <p:sldId id="272" r:id="rId24"/>
-    <p:sldId id="273" r:id="rId25"/>
-    <p:sldId id="274" r:id="rId26"/>
-    <p:sldId id="275" r:id="rId27"/>
-    <p:sldId id="276" r:id="rId28"/>
-    <p:sldId id="277" r:id="rId29"/>
-    <p:sldId id="278" r:id="rId30"/>
-    <p:sldId id="279" r:id="rId31"/>
-    <p:sldId id="280" r:id="rId32"/>
-    <p:sldId id="281" r:id="rId33"/>
-    <p:sldId id="282" r:id="rId34"/>
-    <p:sldId id="283" r:id="rId35"/>
-    <p:sldId id="284" r:id="rId36"/>
-    <p:sldId id="285" r:id="rId37"/>
-    <p:sldId id="286" r:id="rId38"/>
-    <p:sldId id="287" r:id="rId39"/>
+    <p:sldId id="256" r:id="rId2"/>
+    <p:sldId id="257" r:id="rId3"/>
+    <p:sldId id="258" r:id="rId4"/>
+    <p:sldId id="259" r:id="rId5"/>
+    <p:sldId id="260" r:id="rId6"/>
+    <p:sldId id="261" r:id="rId7"/>
+    <p:sldId id="262" r:id="rId8"/>
+    <p:sldId id="263" r:id="rId9"/>
+    <p:sldId id="264" r:id="rId10"/>
+    <p:sldId id="265" r:id="rId11"/>
+    <p:sldId id="266" r:id="rId12"/>
+    <p:sldId id="267" r:id="rId13"/>
+    <p:sldId id="268" r:id="rId14"/>
+    <p:sldId id="269" r:id="rId15"/>
+    <p:sldId id="270" r:id="rId16"/>
+    <p:sldId id="271" r:id="rId17"/>
+    <p:sldId id="272" r:id="rId18"/>
+    <p:sldId id="273" r:id="rId19"/>
+    <p:sldId id="274" r:id="rId20"/>
+    <p:sldId id="275" r:id="rId21"/>
+    <p:sldId id="276" r:id="rId22"/>
+    <p:sldId id="277" r:id="rId23"/>
+    <p:sldId id="278" r:id="rId24"/>
+    <p:sldId id="279" r:id="rId25"/>
+    <p:sldId id="280" r:id="rId26"/>
+    <p:sldId id="281" r:id="rId27"/>
+    <p:sldId id="282" r:id="rId28"/>
+    <p:sldId id="283" r:id="rId29"/>
+    <p:sldId id="284" r:id="rId30"/>
+    <p:sldId id="285" r:id="rId31"/>
+    <p:sldId id="286" r:id="rId32"/>
+    <p:sldId id="287" r:id="rId33"/>
   </p:sldIdLst>
-  <p:sldSz cx="12191695" cy="6858000" type="screen4x3"/>
+  <p:sldSz cx="12192000" cy="6858000"/>
   <p:notesSz cx="6858000" cy="9144000"/>
   <p:defaultTextStyle>
     <a:defPPr>
@@ -135,11 +138,27 @@
       </a:defRPr>
     </a:lvl9pPr>
   </p:defaultTextStyle>
+  <p:extLst>
+    <p:ext uri="{EFAFB233-063F-42B5-8137-9DF3F51BA10A}">
+      <p15:sldGuideLst xmlns:p15="http://schemas.microsoft.com/office/powerpoint/2012/main">
+        <p15:guide id="1" orient="horz" pos="2160">
+          <p15:clr>
+            <a:srgbClr val="A4A3A4"/>
+          </p15:clr>
+        </p15:guide>
+        <p15:guide id="2" pos="2880">
+          <p15:clr>
+            <a:srgbClr val="A4A3A4"/>
+          </p15:clr>
+        </p15:guide>
+      </p15:sldGuideLst>
+    </p:ext>
+  </p:extLst>
 </p:presentation>
 </file>
 
 <file path=ppt/notesMasters/notesMaster1.xml><?xml version="1.0" encoding="utf-8"?>
-<p:notesMaster xmlns:a="http://schemas.openxmlformats.org/drawingml/2006/main" xmlns:p="http://schemas.openxmlformats.org/presentationml/2006/main" xmlns:r="http://schemas.openxmlformats.org/officeDocument/2006/relationships">
+<p:notesMaster xmlns:a="http://schemas.openxmlformats.org/drawingml/2006/main" xmlns:r="http://schemas.openxmlformats.org/officeDocument/2006/relationships" xmlns:p="http://schemas.openxmlformats.org/presentationml/2006/main">
   <p:cSld>
     <p:bg>
       <p:bgRef idx="1001">
@@ -160,241 +179,16 @@
           <a:chExt cx="0" cy="0"/>
         </a:xfrm>
       </p:grpSpPr>
-      <p:sp>
-        <p:nvSpPr>
-          <p:cNvPr id="2" name="Header Placeholder 1"/>
-          <p:cNvSpPr>
-            <a:spLocks noGrp="1"/>
-          </p:cNvSpPr>
-          <p:nvPr>
-            <p:ph type="hdr" sz="quarter"/>
-          </p:nvPr>
-        </p:nvSpPr>
-        <p:spPr>
-          <a:xfrm>
-            <a:off x="0" y="0"/>
-            <a:ext cx="2971800" cy="457200"/>
-          </a:xfrm>
-          <a:prstGeom prst="rect">
-            <a:avLst/>
-          </a:prstGeom>
-        </p:spPr>
-        <p:txBody>
-          <a:bodyPr vert="horz" lIns="91440" tIns="45720" rIns="91440" bIns="45720" rtlCol="0"/>
-          <a:lstStyle>
-            <a:lvl1pPr algn="l">
-              <a:defRPr sz="1200"/>
-            </a:lvl1pPr>
-          </a:lstStyle>
-          <a:p>
-            <a:endParaRPr lang="en-US"/>
-          </a:p>
-        </p:txBody>
-      </p:sp>
-      <p:sp>
-        <p:nvSpPr>
-          <p:cNvPr id="3" name="Date Placeholder 2"/>
-          <p:cNvSpPr>
-            <a:spLocks noGrp="1"/>
-          </p:cNvSpPr>
-          <p:nvPr>
-            <p:ph type="dt" idx="1"/>
-          </p:nvPr>
-        </p:nvSpPr>
-        <p:spPr>
-          <a:xfrm>
-            <a:off x="3884613" y="0"/>
-            <a:ext cx="2971800" cy="457200"/>
-          </a:xfrm>
-          <a:prstGeom prst="rect">
-            <a:avLst/>
-          </a:prstGeom>
-        </p:spPr>
-        <p:txBody>
-          <a:bodyPr vert="horz" lIns="91440" tIns="45720" rIns="91440" bIns="45720" rtlCol="0"/>
-          <a:lstStyle>
-            <a:lvl1pPr algn="r">
-              <a:defRPr sz="1200"/>
-            </a:lvl1pPr>
-          </a:lstStyle>
-          <a:p>
-            <a:fld id="{0F89C1C7-3DCD-1040-A9CF-14679D8B5DDD}" type="datetimeFigureOut">
-              <a:rPr lang="en-US" smtClean="0"/>
-              <a:t>10/17/16</a:t>
-            </a:fld>
-            <a:endParaRPr lang="en-US"/>
-          </a:p>
-        </p:txBody>
-      </p:sp>
-      <p:sp>
-        <p:nvSpPr>
-          <p:cNvPr id="4" name="Slide Image Placeholder 3"/>
-          <p:cNvSpPr>
-            <a:spLocks noGrp="1" noRot="1" noChangeAspect="1"/>
-          </p:cNvSpPr>
-          <p:nvPr>
-            <p:ph type="sldImg" idx="2"/>
-          </p:nvPr>
-        </p:nvSpPr>
-        <p:spPr>
-          <a:xfrm>
-            <a:off x="1143000" y="685800"/>
-            <a:ext cx="4572000" cy="3429000"/>
-          </a:xfrm>
-          <a:prstGeom prst="rect">
-            <a:avLst/>
-          </a:prstGeom>
-          <a:noFill/>
-          <a:ln w="12700">
-            <a:solidFill>
-              <a:prstClr val="black"/>
-            </a:solidFill>
-          </a:ln>
-        </p:spPr>
-        <p:txBody>
-          <a:bodyPr vert="horz" lIns="91440" tIns="45720" rIns="91440" bIns="45720" rtlCol="0" anchor="ctr"/>
-          <a:lstStyle/>
-          <a:p>
-            <a:endParaRPr lang="en-US"/>
-          </a:p>
-        </p:txBody>
-      </p:sp>
-      <p:sp>
-        <p:nvSpPr>
-          <p:cNvPr id="5" name="Notes Placeholder 4"/>
-          <p:cNvSpPr>
-            <a:spLocks noGrp="1"/>
-          </p:cNvSpPr>
-          <p:nvPr>
-            <p:ph type="body" sz="quarter" idx="3"/>
-          </p:nvPr>
-        </p:nvSpPr>
-        <p:spPr>
-          <a:xfrm>
-            <a:off x="685800" y="4343400"/>
-            <a:ext cx="5486400" cy="4114800"/>
-          </a:xfrm>
-          <a:prstGeom prst="rect">
-            <a:avLst/>
-          </a:prstGeom>
-        </p:spPr>
-        <p:txBody>
-          <a:bodyPr vert="horz" lIns="91440" tIns="45720" rIns="91440" bIns="45720" rtlCol="0"/>
-          <a:lstStyle/>
-          <a:p>
-            <a:pPr lvl="0"/>
-            <a:r>
-              <a:rPr lang="en-US" smtClean="0"/>
-              <a:t>Click to edit Master text styles</a:t>
-            </a:r>
-          </a:p>
-          <a:p>
-            <a:pPr lvl="1"/>
-            <a:r>
-              <a:rPr lang="en-US" smtClean="0"/>
-              <a:t>Second level</a:t>
-            </a:r>
-          </a:p>
-          <a:p>
-            <a:pPr lvl="2"/>
-            <a:r>
-              <a:rPr lang="en-US" smtClean="0"/>
-              <a:t>Third level</a:t>
-            </a:r>
-          </a:p>
-          <a:p>
-            <a:pPr lvl="3"/>
-            <a:r>
-              <a:rPr lang="en-US" smtClean="0"/>
-              <a:t>Fourth level</a:t>
-            </a:r>
-          </a:p>
-          <a:p>
-            <a:pPr lvl="4"/>
-            <a:r>
-              <a:rPr lang="en-US" smtClean="0"/>
-              <a:t>Fifth level</a:t>
-            </a:r>
-            <a:endParaRPr lang="en-US"/>
-          </a:p>
-        </p:txBody>
-      </p:sp>
-      <p:sp>
-        <p:nvSpPr>
-          <p:cNvPr id="6" name="Footer Placeholder 5"/>
-          <p:cNvSpPr>
-            <a:spLocks noGrp="1"/>
-          </p:cNvSpPr>
-          <p:nvPr>
-            <p:ph type="ftr" sz="quarter" idx="4"/>
-          </p:nvPr>
-        </p:nvSpPr>
-        <p:spPr>
-          <a:xfrm>
-            <a:off x="0" y="8685213"/>
-            <a:ext cx="2971800" cy="457200"/>
-          </a:xfrm>
-          <a:prstGeom prst="rect">
-            <a:avLst/>
-          </a:prstGeom>
-        </p:spPr>
-        <p:txBody>
-          <a:bodyPr vert="horz" lIns="91440" tIns="45720" rIns="91440" bIns="45720" rtlCol="0" anchor="b"/>
-          <a:lstStyle>
-            <a:lvl1pPr algn="l">
-              <a:defRPr sz="1200"/>
-            </a:lvl1pPr>
-          </a:lstStyle>
-          <a:p>
-            <a:endParaRPr lang="en-US"/>
-          </a:p>
-        </p:txBody>
-      </p:sp>
-      <p:sp>
-        <p:nvSpPr>
-          <p:cNvPr id="7" name="Slide Number Placeholder 6"/>
-          <p:cNvSpPr>
-            <a:spLocks noGrp="1"/>
-          </p:cNvSpPr>
-          <p:nvPr>
-            <p:ph type="sldNum" sz="quarter" idx="5"/>
-          </p:nvPr>
-        </p:nvSpPr>
-        <p:spPr>
-          <a:xfrm>
-            <a:off x="3884613" y="8685213"/>
-            <a:ext cx="2971800" cy="457200"/>
-          </a:xfrm>
-          <a:prstGeom prst="rect">
-            <a:avLst/>
-          </a:prstGeom>
-        </p:spPr>
-        <p:txBody>
-          <a:bodyPr vert="horz" lIns="91440" tIns="45720" rIns="91440" bIns="45720" rtlCol="0" anchor="b"/>
-          <a:lstStyle>
-            <a:lvl1pPr algn="r">
-              <a:defRPr sz="1200"/>
-            </a:lvl1pPr>
-          </a:lstStyle>
-          <a:p>
-            <a:fld id="{BB5E49A5-4136-284D-997B-48E1D791AD67}" type="slidenum">
-              <a:rPr lang="en-US" smtClean="0"/>
-              <a:t>‹#›</a:t>
-            </a:fld>
-            <a:endParaRPr lang="en-US"/>
-          </a:p>
-        </p:txBody>
-      </p:sp>
     </p:spTree>
     <p:extLst>
       <p:ext uri="{BB962C8B-B14F-4D97-AF65-F5344CB8AC3E}">
-        <p14:creationId xmlns:p14="http://schemas.microsoft.com/office/powerpoint/2010/main" val="2623252185"/>
+        <p14:creationId xmlns:p14="http://schemas.microsoft.com/office/powerpoint/2010/main" val="2696245552"/>
       </p:ext>
     </p:extLst>
   </p:cSld>
   <p:clrMap bg1="lt1" tx1="dk1" bg2="lt2" tx2="dk2" accent1="accent1" accent2="accent2" accent3="accent3" accent4="accent4" accent5="accent5" accent6="accent6" hlink="hlink" folHlink="folHlink"/>
   <p:notesStyle>
-    <a:lvl1pPr marL="0" algn="l" defTabSz="457200" rtl="0" eaLnBrk="1" latinLnBrk="0" hangingPunct="1">
+    <a:lvl1pPr marL="0" algn="l" defTabSz="914400" rtl="0" eaLnBrk="1" latinLnBrk="0" hangingPunct="1">
       <a:defRPr sz="1200" kern="1200">
         <a:solidFill>
           <a:schemeClr val="tx1"/>
@@ -404,7 +198,7 @@
         <a:cs typeface="+mn-cs"/>
       </a:defRPr>
     </a:lvl1pPr>
-    <a:lvl2pPr marL="457200" algn="l" defTabSz="457200" rtl="0" eaLnBrk="1" latinLnBrk="0" hangingPunct="1">
+    <a:lvl2pPr marL="457200" algn="l" defTabSz="914400" rtl="0" eaLnBrk="1" latinLnBrk="0" hangingPunct="1">
       <a:defRPr sz="1200" kern="1200">
         <a:solidFill>
           <a:schemeClr val="tx1"/>
@@ -414,7 +208,7 @@
         <a:cs typeface="+mn-cs"/>
       </a:defRPr>
     </a:lvl2pPr>
-    <a:lvl3pPr marL="914400" algn="l" defTabSz="457200" rtl="0" eaLnBrk="1" latinLnBrk="0" hangingPunct="1">
+    <a:lvl3pPr marL="914400" algn="l" defTabSz="914400" rtl="0" eaLnBrk="1" latinLnBrk="0" hangingPunct="1">
       <a:defRPr sz="1200" kern="1200">
         <a:solidFill>
           <a:schemeClr val="tx1"/>
@@ -424,7 +218,7 @@
         <a:cs typeface="+mn-cs"/>
       </a:defRPr>
     </a:lvl3pPr>
-    <a:lvl4pPr marL="1371600" algn="l" defTabSz="457200" rtl="0" eaLnBrk="1" latinLnBrk="0" hangingPunct="1">
+    <a:lvl4pPr marL="1371600" algn="l" defTabSz="914400" rtl="0" eaLnBrk="1" latinLnBrk="0" hangingPunct="1">
       <a:defRPr sz="1200" kern="1200">
         <a:solidFill>
           <a:schemeClr val="tx1"/>
@@ -434,7 +228,7 @@
         <a:cs typeface="+mn-cs"/>
       </a:defRPr>
     </a:lvl4pPr>
-    <a:lvl5pPr marL="1828800" algn="l" defTabSz="457200" rtl="0" eaLnBrk="1" latinLnBrk="0" hangingPunct="1">
+    <a:lvl5pPr marL="1828800" algn="l" defTabSz="914400" rtl="0" eaLnBrk="1" latinLnBrk="0" hangingPunct="1">
       <a:defRPr sz="1200" kern="1200">
         <a:solidFill>
           <a:schemeClr val="tx1"/>
@@ -444,7 +238,7 @@
         <a:cs typeface="+mn-cs"/>
       </a:defRPr>
     </a:lvl5pPr>
-    <a:lvl6pPr marL="2286000" algn="l" defTabSz="457200" rtl="0" eaLnBrk="1" latinLnBrk="0" hangingPunct="1">
+    <a:lvl6pPr marL="2286000" algn="l" defTabSz="914400" rtl="0" eaLnBrk="1" latinLnBrk="0" hangingPunct="1">
       <a:defRPr sz="1200" kern="1200">
         <a:solidFill>
           <a:schemeClr val="tx1"/>
@@ -454,7 +248,7 @@
         <a:cs typeface="+mn-cs"/>
       </a:defRPr>
     </a:lvl6pPr>
-    <a:lvl7pPr marL="2743200" algn="l" defTabSz="457200" rtl="0" eaLnBrk="1" latinLnBrk="0" hangingPunct="1">
+    <a:lvl7pPr marL="2743200" algn="l" defTabSz="914400" rtl="0" eaLnBrk="1" latinLnBrk="0" hangingPunct="1">
       <a:defRPr sz="1200" kern="1200">
         <a:solidFill>
           <a:schemeClr val="tx1"/>
@@ -464,7 +258,7 @@
         <a:cs typeface="+mn-cs"/>
       </a:defRPr>
     </a:lvl7pPr>
-    <a:lvl8pPr marL="3200400" algn="l" defTabSz="457200" rtl="0" eaLnBrk="1" latinLnBrk="0" hangingPunct="1">
+    <a:lvl8pPr marL="3200400" algn="l" defTabSz="914400" rtl="0" eaLnBrk="1" latinLnBrk="0" hangingPunct="1">
       <a:defRPr sz="1200" kern="1200">
         <a:solidFill>
           <a:schemeClr val="tx1"/>
@@ -474,7 +268,7 @@
         <a:cs typeface="+mn-cs"/>
       </a:defRPr>
     </a:lvl8pPr>
-    <a:lvl9pPr marL="3657600" algn="l" defTabSz="457200" rtl="0" eaLnBrk="1" latinLnBrk="0" hangingPunct="1">
+    <a:lvl9pPr marL="3657600" algn="l" defTabSz="914400" rtl="0" eaLnBrk="1" latinLnBrk="0" hangingPunct="1">
       <a:defRPr sz="1200" kern="1200">
         <a:solidFill>
           <a:schemeClr val="tx1"/>
@@ -489,7 +283,7 @@
 </file>
 
 <file path=ppt/notesSlides/notesSlide1.xml><?xml version="1.0" encoding="utf-8"?>
-<p:notes xmlns:a="http://schemas.openxmlformats.org/drawingml/2006/main" xmlns:p="http://schemas.openxmlformats.org/presentationml/2006/main" xmlns:r="http://schemas.openxmlformats.org/officeDocument/2006/relationships">
+<p:notes xmlns:a="http://schemas.openxmlformats.org/drawingml/2006/main" xmlns:r="http://schemas.openxmlformats.org/officeDocument/2006/relationships" xmlns:p="http://schemas.openxmlformats.org/presentationml/2006/main">
   <p:cSld>
     <p:spTree>
       <p:nvGrpSpPr>
@@ -509,7 +303,7 @@
         <p:nvSpPr>
           <p:cNvPr id="2" name="Slide Image Placeholder 1"/>
           <p:cNvSpPr>
-            <a:spLocks noGrp="1"/>
+            <a:spLocks noGrp="1" noRot="1" noChangeAspect="1"/>
           </p:cNvSpPr>
           <p:nvPr>
             <p:ph type="sldImg" idx="2"/>
@@ -524,7 +318,7 @@
             <a:spLocks noGrp="1"/>
           </p:cNvSpPr>
           <p:nvPr>
-            <p:ph type="body" idx="3" sz="quarter"/>
+            <p:ph type="body" sz="quarter" idx="3"/>
           </p:nvPr>
         </p:nvSpPr>
         <p:spPr/>
@@ -541,7 +335,9 @@
               <a:t>evidence is in the next thirty slides.</a:t>
             </a:r>
           </a:p>
-          <a:p/>
+          <a:p>
+            <a:endParaRPr/>
+          </a:p>
           <a:p>
             <a:r>
               <a:t>The three adjectives are ordered deliberately: AI is the least novel, cloud is</a:t>
@@ -561,7 +357,7 @@
             <a:spLocks noGrp="1"/>
           </p:cNvSpPr>
           <p:nvPr>
-            <p:ph type="sldNum" idx="5" sz="quarter"/>
+            <p:ph type="sldNum" sz="quarter" idx="5"/>
           </p:nvPr>
         </p:nvSpPr>
         <p:spPr/>
@@ -575,7 +371,7 @@
 </file>
 
 <file path=ppt/notesSlides/notesSlide10.xml><?xml version="1.0" encoding="utf-8"?>
-<p:notes xmlns:a="http://schemas.openxmlformats.org/drawingml/2006/main" xmlns:p="http://schemas.openxmlformats.org/presentationml/2006/main" xmlns:r="http://schemas.openxmlformats.org/officeDocument/2006/relationships">
+<p:notes xmlns:a="http://schemas.openxmlformats.org/drawingml/2006/main" xmlns:r="http://schemas.openxmlformats.org/officeDocument/2006/relationships" xmlns:p="http://schemas.openxmlformats.org/presentationml/2006/main">
   <p:cSld>
     <p:spTree>
       <p:nvGrpSpPr>
@@ -595,7 +391,7 @@
         <p:nvSpPr>
           <p:cNvPr id="2" name="Slide Image Placeholder 1"/>
           <p:cNvSpPr>
-            <a:spLocks noGrp="1"/>
+            <a:spLocks noGrp="1" noRot="1" noChangeAspect="1"/>
           </p:cNvSpPr>
           <p:nvPr>
             <p:ph type="sldImg" idx="2"/>
@@ -610,7 +406,7 @@
             <a:spLocks noGrp="1"/>
           </p:cNvSpPr>
           <p:nvPr>
-            <p:ph type="body" idx="3" sz="quarter"/>
+            <p:ph type="body" sz="quarter" idx="3"/>
           </p:nvPr>
         </p:nvSpPr>
         <p:spPr/>
@@ -641,7 +437,7 @@
             <a:spLocks noGrp="1"/>
           </p:cNvSpPr>
           <p:nvPr>
-            <p:ph type="sldNum" idx="5" sz="quarter"/>
+            <p:ph type="sldNum" sz="quarter" idx="5"/>
           </p:nvPr>
         </p:nvSpPr>
         <p:spPr/>
@@ -655,7 +451,7 @@
 </file>
 
 <file path=ppt/notesSlides/notesSlide2.xml><?xml version="1.0" encoding="utf-8"?>
-<p:notes xmlns:a="http://schemas.openxmlformats.org/drawingml/2006/main" xmlns:p="http://schemas.openxmlformats.org/presentationml/2006/main" xmlns:r="http://schemas.openxmlformats.org/officeDocument/2006/relationships">
+<p:notes xmlns:a="http://schemas.openxmlformats.org/drawingml/2006/main" xmlns:r="http://schemas.openxmlformats.org/officeDocument/2006/relationships" xmlns:p="http://schemas.openxmlformats.org/presentationml/2006/main">
   <p:cSld>
     <p:spTree>
       <p:nvGrpSpPr>
@@ -675,7 +471,7 @@
         <p:nvSpPr>
           <p:cNvPr id="2" name="Slide Image Placeholder 1"/>
           <p:cNvSpPr>
-            <a:spLocks noGrp="1"/>
+            <a:spLocks noGrp="1" noRot="1" noChangeAspect="1"/>
           </p:cNvSpPr>
           <p:nvPr>
             <p:ph type="sldImg" idx="2"/>
@@ -690,7 +486,7 @@
             <a:spLocks noGrp="1"/>
           </p:cNvSpPr>
           <p:nvPr>
-            <p:ph type="body" idx="3" sz="quarter"/>
+            <p:ph type="body" sz="quarter" idx="3"/>
           </p:nvPr>
         </p:nvSpPr>
         <p:spPr/>
@@ -716,7 +512,7 @@
             <a:spLocks noGrp="1"/>
           </p:cNvSpPr>
           <p:nvPr>
-            <p:ph type="sldNum" idx="5" sz="quarter"/>
+            <p:ph type="sldNum" sz="quarter" idx="5"/>
           </p:nvPr>
         </p:nvSpPr>
         <p:spPr/>
@@ -730,7 +526,7 @@
 </file>
 
 <file path=ppt/notesSlides/notesSlide3.xml><?xml version="1.0" encoding="utf-8"?>
-<p:notes xmlns:a="http://schemas.openxmlformats.org/drawingml/2006/main" xmlns:p="http://schemas.openxmlformats.org/presentationml/2006/main" xmlns:r="http://schemas.openxmlformats.org/officeDocument/2006/relationships">
+<p:notes xmlns:a="http://schemas.openxmlformats.org/drawingml/2006/main" xmlns:r="http://schemas.openxmlformats.org/officeDocument/2006/relationships" xmlns:p="http://schemas.openxmlformats.org/presentationml/2006/main">
   <p:cSld>
     <p:spTree>
       <p:nvGrpSpPr>
@@ -750,7 +546,7 @@
         <p:nvSpPr>
           <p:cNvPr id="2" name="Slide Image Placeholder 1"/>
           <p:cNvSpPr>
-            <a:spLocks noGrp="1"/>
+            <a:spLocks noGrp="1" noRot="1" noChangeAspect="1"/>
           </p:cNvSpPr>
           <p:nvPr>
             <p:ph type="sldImg" idx="2"/>
@@ -765,7 +561,7 @@
             <a:spLocks noGrp="1"/>
           </p:cNvSpPr>
           <p:nvPr>
-            <p:ph type="body" idx="3" sz="quarter"/>
+            <p:ph type="body" sz="quarter" idx="3"/>
           </p:nvPr>
         </p:nvSpPr>
         <p:spPr/>
@@ -791,7 +587,7 @@
             <a:spLocks noGrp="1"/>
           </p:cNvSpPr>
           <p:nvPr>
-            <p:ph type="sldNum" idx="5" sz="quarter"/>
+            <p:ph type="sldNum" sz="quarter" idx="5"/>
           </p:nvPr>
         </p:nvSpPr>
         <p:spPr/>
@@ -805,7 +601,7 @@
 </file>
 
 <file path=ppt/notesSlides/notesSlide4.xml><?xml version="1.0" encoding="utf-8"?>
-<p:notes xmlns:a="http://schemas.openxmlformats.org/drawingml/2006/main" xmlns:p="http://schemas.openxmlformats.org/presentationml/2006/main" xmlns:r="http://schemas.openxmlformats.org/officeDocument/2006/relationships">
+<p:notes xmlns:a="http://schemas.openxmlformats.org/drawingml/2006/main" xmlns:r="http://schemas.openxmlformats.org/officeDocument/2006/relationships" xmlns:p="http://schemas.openxmlformats.org/presentationml/2006/main">
   <p:cSld>
     <p:spTree>
       <p:nvGrpSpPr>
@@ -825,7 +621,7 @@
         <p:nvSpPr>
           <p:cNvPr id="2" name="Slide Image Placeholder 1"/>
           <p:cNvSpPr>
-            <a:spLocks noGrp="1"/>
+            <a:spLocks noGrp="1" noRot="1" noChangeAspect="1"/>
           </p:cNvSpPr>
           <p:nvPr>
             <p:ph type="sldImg" idx="2"/>
@@ -840,7 +636,7 @@
             <a:spLocks noGrp="1"/>
           </p:cNvSpPr>
           <p:nvPr>
-            <p:ph type="body" idx="3" sz="quarter"/>
+            <p:ph type="body" sz="quarter" idx="3"/>
           </p:nvPr>
         </p:nvSpPr>
         <p:spPr/>
@@ -866,7 +662,7 @@
             <a:spLocks noGrp="1"/>
           </p:cNvSpPr>
           <p:nvPr>
-            <p:ph type="sldNum" idx="5" sz="quarter"/>
+            <p:ph type="sldNum" sz="quarter" idx="5"/>
           </p:nvPr>
         </p:nvSpPr>
         <p:spPr/>
@@ -880,7 +676,7 @@
 </file>
 
 <file path=ppt/notesSlides/notesSlide5.xml><?xml version="1.0" encoding="utf-8"?>
-<p:notes xmlns:a="http://schemas.openxmlformats.org/drawingml/2006/main" xmlns:p="http://schemas.openxmlformats.org/presentationml/2006/main" xmlns:r="http://schemas.openxmlformats.org/officeDocument/2006/relationships">
+<p:notes xmlns:a="http://schemas.openxmlformats.org/drawingml/2006/main" xmlns:r="http://schemas.openxmlformats.org/officeDocument/2006/relationships" xmlns:p="http://schemas.openxmlformats.org/presentationml/2006/main">
   <p:cSld>
     <p:spTree>
       <p:nvGrpSpPr>
@@ -900,7 +696,7 @@
         <p:nvSpPr>
           <p:cNvPr id="2" name="Slide Image Placeholder 1"/>
           <p:cNvSpPr>
-            <a:spLocks noGrp="1"/>
+            <a:spLocks noGrp="1" noRot="1" noChangeAspect="1"/>
           </p:cNvSpPr>
           <p:nvPr>
             <p:ph type="sldImg" idx="2"/>
@@ -915,7 +711,7 @@
             <a:spLocks noGrp="1"/>
           </p:cNvSpPr>
           <p:nvPr>
-            <p:ph type="body" idx="3" sz="quarter"/>
+            <p:ph type="body" sz="quarter" idx="3"/>
           </p:nvPr>
         </p:nvSpPr>
         <p:spPr/>
@@ -946,7 +742,7 @@
             <a:spLocks noGrp="1"/>
           </p:cNvSpPr>
           <p:nvPr>
-            <p:ph type="sldNum" idx="5" sz="quarter"/>
+            <p:ph type="sldNum" sz="quarter" idx="5"/>
           </p:nvPr>
         </p:nvSpPr>
         <p:spPr/>
@@ -960,7 +756,7 @@
 </file>
 
 <file path=ppt/notesSlides/notesSlide6.xml><?xml version="1.0" encoding="utf-8"?>
-<p:notes xmlns:a="http://schemas.openxmlformats.org/drawingml/2006/main" xmlns:p="http://schemas.openxmlformats.org/presentationml/2006/main" xmlns:r="http://schemas.openxmlformats.org/officeDocument/2006/relationships">
+<p:notes xmlns:a="http://schemas.openxmlformats.org/drawingml/2006/main" xmlns:r="http://schemas.openxmlformats.org/officeDocument/2006/relationships" xmlns:p="http://schemas.openxmlformats.org/presentationml/2006/main">
   <p:cSld>
     <p:spTree>
       <p:nvGrpSpPr>
@@ -980,7 +776,7 @@
         <p:nvSpPr>
           <p:cNvPr id="2" name="Slide Image Placeholder 1"/>
           <p:cNvSpPr>
-            <a:spLocks noGrp="1"/>
+            <a:spLocks noGrp="1" noRot="1" noChangeAspect="1"/>
           </p:cNvSpPr>
           <p:nvPr>
             <p:ph type="sldImg" idx="2"/>
@@ -995,7 +791,7 @@
             <a:spLocks noGrp="1"/>
           </p:cNvSpPr>
           <p:nvPr>
-            <p:ph type="body" idx="3" sz="quarter"/>
+            <p:ph type="body" sz="quarter" idx="3"/>
           </p:nvPr>
         </p:nvSpPr>
         <p:spPr/>
@@ -1021,7 +817,7 @@
             <a:spLocks noGrp="1"/>
           </p:cNvSpPr>
           <p:nvPr>
-            <p:ph type="sldNum" idx="5" sz="quarter"/>
+            <p:ph type="sldNum" sz="quarter" idx="5"/>
           </p:nvPr>
         </p:nvSpPr>
         <p:spPr/>
@@ -1035,7 +831,7 @@
 </file>
 
 <file path=ppt/notesSlides/notesSlide7.xml><?xml version="1.0" encoding="utf-8"?>
-<p:notes xmlns:a="http://schemas.openxmlformats.org/drawingml/2006/main" xmlns:p="http://schemas.openxmlformats.org/presentationml/2006/main" xmlns:r="http://schemas.openxmlformats.org/officeDocument/2006/relationships">
+<p:notes xmlns:a="http://schemas.openxmlformats.org/drawingml/2006/main" xmlns:r="http://schemas.openxmlformats.org/officeDocument/2006/relationships" xmlns:p="http://schemas.openxmlformats.org/presentationml/2006/main">
   <p:cSld>
     <p:spTree>
       <p:nvGrpSpPr>
@@ -1055,7 +851,7 @@
         <p:nvSpPr>
           <p:cNvPr id="2" name="Slide Image Placeholder 1"/>
           <p:cNvSpPr>
-            <a:spLocks noGrp="1"/>
+            <a:spLocks noGrp="1" noRot="1" noChangeAspect="1"/>
           </p:cNvSpPr>
           <p:nvPr>
             <p:ph type="sldImg" idx="2"/>
@@ -1070,7 +866,7 @@
             <a:spLocks noGrp="1"/>
           </p:cNvSpPr>
           <p:nvPr>
-            <p:ph type="body" idx="3" sz="quarter"/>
+            <p:ph type="body" sz="quarter" idx="3"/>
           </p:nvPr>
         </p:nvSpPr>
         <p:spPr/>
@@ -1096,7 +892,7 @@
             <a:spLocks noGrp="1"/>
           </p:cNvSpPr>
           <p:nvPr>
-            <p:ph type="sldNum" idx="5" sz="quarter"/>
+            <p:ph type="sldNum" sz="quarter" idx="5"/>
           </p:nvPr>
         </p:nvSpPr>
         <p:spPr/>
@@ -1110,7 +906,7 @@
 </file>
 
 <file path=ppt/notesSlides/notesSlide8.xml><?xml version="1.0" encoding="utf-8"?>
-<p:notes xmlns:a="http://schemas.openxmlformats.org/drawingml/2006/main" xmlns:p="http://schemas.openxmlformats.org/presentationml/2006/main" xmlns:r="http://schemas.openxmlformats.org/officeDocument/2006/relationships">
+<p:notes xmlns:a="http://schemas.openxmlformats.org/drawingml/2006/main" xmlns:r="http://schemas.openxmlformats.org/officeDocument/2006/relationships" xmlns:p="http://schemas.openxmlformats.org/presentationml/2006/main">
   <p:cSld>
     <p:spTree>
       <p:nvGrpSpPr>
@@ -1130,7 +926,7 @@
         <p:nvSpPr>
           <p:cNvPr id="2" name="Slide Image Placeholder 1"/>
           <p:cNvSpPr>
-            <a:spLocks noGrp="1"/>
+            <a:spLocks noGrp="1" noRot="1" noChangeAspect="1"/>
           </p:cNvSpPr>
           <p:nvPr>
             <p:ph type="sldImg" idx="2"/>
@@ -1145,7 +941,7 @@
             <a:spLocks noGrp="1"/>
           </p:cNvSpPr>
           <p:nvPr>
-            <p:ph type="body" idx="3" sz="quarter"/>
+            <p:ph type="body" sz="quarter" idx="3"/>
           </p:nvPr>
         </p:nvSpPr>
         <p:spPr/>
@@ -1171,7 +967,7 @@
             <a:spLocks noGrp="1"/>
           </p:cNvSpPr>
           <p:nvPr>
-            <p:ph type="sldNum" idx="5" sz="quarter"/>
+            <p:ph type="sldNum" sz="quarter" idx="5"/>
           </p:nvPr>
         </p:nvSpPr>
         <p:spPr/>
@@ -1185,7 +981,7 @@
 </file>
 
 <file path=ppt/notesSlides/notesSlide9.xml><?xml version="1.0" encoding="utf-8"?>
-<p:notes xmlns:a="http://schemas.openxmlformats.org/drawingml/2006/main" xmlns:p="http://schemas.openxmlformats.org/presentationml/2006/main" xmlns:r="http://schemas.openxmlformats.org/officeDocument/2006/relationships">
+<p:notes xmlns:a="http://schemas.openxmlformats.org/drawingml/2006/main" xmlns:r="http://schemas.openxmlformats.org/officeDocument/2006/relationships" xmlns:p="http://schemas.openxmlformats.org/presentationml/2006/main">
   <p:cSld>
     <p:spTree>
       <p:nvGrpSpPr>
@@ -1205,7 +1001,7 @@
         <p:nvSpPr>
           <p:cNvPr id="2" name="Slide Image Placeholder 1"/>
           <p:cNvSpPr>
-            <a:spLocks noGrp="1"/>
+            <a:spLocks noGrp="1" noRot="1" noChangeAspect="1"/>
           </p:cNvSpPr>
           <p:nvPr>
             <p:ph type="sldImg" idx="2"/>
@@ -1220,7 +1016,7 @@
             <a:spLocks noGrp="1"/>
           </p:cNvSpPr>
           <p:nvPr>
-            <p:ph type="body" idx="3" sz="quarter"/>
+            <p:ph type="body" sz="quarter" idx="3"/>
           </p:nvPr>
         </p:nvSpPr>
         <p:spPr/>
@@ -1246,7 +1042,7 @@
             <a:spLocks noGrp="1"/>
           </p:cNvSpPr>
           <p:nvPr>
-            <p:ph type="sldNum" idx="5" sz="quarter"/>
+            <p:ph type="sldNum" sz="quarter" idx="5"/>
           </p:nvPr>
         </p:nvSpPr>
         <p:spPr/>
@@ -1297,10 +1093,9 @@
           <a:lstStyle/>
           <a:p>
             <a:r>
-              <a:rPr lang="en-US" smtClean="0"/>
+              <a:rPr lang="en-US"/>
               <a:t>Click to edit Master title style</a:t>
             </a:r>
-            <a:endParaRPr lang="en-US"/>
           </a:p>
         </p:txBody>
       </p:sp>
@@ -1416,10 +1211,9 @@
           </a:lstStyle>
           <a:p>
             <a:r>
-              <a:rPr lang="en-US" smtClean="0"/>
+              <a:rPr lang="en-US"/>
               <a:t>Click to edit Master subtitle style</a:t>
             </a:r>
-            <a:endParaRPr lang="en-US"/>
           </a:p>
         </p:txBody>
       </p:sp>
@@ -1440,7 +1234,7 @@
           <a:p>
             <a:fld id="{5BCAD085-E8A6-8845-BD4E-CB4CCA059FC4}" type="datetimeFigureOut">
               <a:rPr lang="en-US" smtClean="0"/>
-              <a:t>1/27/13</a:t>
+              <a:t>9/27/2026</a:t>
             </a:fld>
             <a:endParaRPr lang="en-US"/>
           </a:p>
@@ -1534,10 +1328,9 @@
           <a:lstStyle/>
           <a:p>
             <a:r>
-              <a:rPr lang="en-US" smtClean="0"/>
+              <a:rPr lang="en-US"/>
               <a:t>Click to edit Master title style</a:t>
             </a:r>
-            <a:endParaRPr lang="en-US"/>
           </a:p>
         </p:txBody>
       </p:sp>
@@ -1558,38 +1351,37 @@
           <a:p>
             <a:pPr lvl="0"/>
             <a:r>
-              <a:rPr lang="en-US" smtClean="0"/>
+              <a:rPr lang="en-US"/>
               <a:t>Click to edit Master text styles</a:t>
             </a:r>
           </a:p>
           <a:p>
             <a:pPr lvl="1"/>
             <a:r>
-              <a:rPr lang="en-US" smtClean="0"/>
+              <a:rPr lang="en-US"/>
               <a:t>Second level</a:t>
             </a:r>
           </a:p>
           <a:p>
             <a:pPr lvl="2"/>
             <a:r>
-              <a:rPr lang="en-US" smtClean="0"/>
+              <a:rPr lang="en-US"/>
               <a:t>Third level</a:t>
             </a:r>
           </a:p>
           <a:p>
             <a:pPr lvl="3"/>
             <a:r>
-              <a:rPr lang="en-US" smtClean="0"/>
+              <a:rPr lang="en-US"/>
               <a:t>Fourth level</a:t>
             </a:r>
           </a:p>
           <a:p>
             <a:pPr lvl="4"/>
             <a:r>
-              <a:rPr lang="en-US" smtClean="0"/>
+              <a:rPr lang="en-US"/>
               <a:t>Fifth level</a:t>
             </a:r>
-            <a:endParaRPr lang="en-US"/>
           </a:p>
         </p:txBody>
       </p:sp>
@@ -1610,7 +1402,7 @@
           <a:p>
             <a:fld id="{5BCAD085-E8A6-8845-BD4E-CB4CCA059FC4}" type="datetimeFigureOut">
               <a:rPr lang="en-US" smtClean="0"/>
-              <a:t>1/27/13</a:t>
+              <a:t>9/27/2026</a:t>
             </a:fld>
             <a:endParaRPr lang="en-US"/>
           </a:p>
@@ -1709,10 +1501,9 @@
           <a:lstStyle/>
           <a:p>
             <a:r>
-              <a:rPr lang="en-US" smtClean="0"/>
+              <a:rPr lang="en-US"/>
               <a:t>Click to edit Master title style</a:t>
             </a:r>
-            <a:endParaRPr lang="en-US"/>
           </a:p>
         </p:txBody>
       </p:sp>
@@ -1738,38 +1529,37 @@
           <a:p>
             <a:pPr lvl="0"/>
             <a:r>
-              <a:rPr lang="en-US" smtClean="0"/>
+              <a:rPr lang="en-US"/>
               <a:t>Click to edit Master text styles</a:t>
             </a:r>
           </a:p>
           <a:p>
             <a:pPr lvl="1"/>
             <a:r>
-              <a:rPr lang="en-US" smtClean="0"/>
+              <a:rPr lang="en-US"/>
               <a:t>Second level</a:t>
             </a:r>
           </a:p>
           <a:p>
             <a:pPr lvl="2"/>
             <a:r>
-              <a:rPr lang="en-US" smtClean="0"/>
+              <a:rPr lang="en-US"/>
               <a:t>Third level</a:t>
             </a:r>
           </a:p>
           <a:p>
             <a:pPr lvl="3"/>
             <a:r>
-              <a:rPr lang="en-US" smtClean="0"/>
+              <a:rPr lang="en-US"/>
               <a:t>Fourth level</a:t>
             </a:r>
           </a:p>
           <a:p>
             <a:pPr lvl="4"/>
             <a:r>
-              <a:rPr lang="en-US" smtClean="0"/>
+              <a:rPr lang="en-US"/>
               <a:t>Fifth level</a:t>
             </a:r>
-            <a:endParaRPr lang="en-US"/>
           </a:p>
         </p:txBody>
       </p:sp>
@@ -1790,7 +1580,7 @@
           <a:p>
             <a:fld id="{5BCAD085-E8A6-8845-BD4E-CB4CCA059FC4}" type="datetimeFigureOut">
               <a:rPr lang="en-US" smtClean="0"/>
-              <a:t>1/27/13</a:t>
+              <a:t>9/27/2026</a:t>
             </a:fld>
             <a:endParaRPr lang="en-US"/>
           </a:p>
@@ -1884,10 +1674,9 @@
           <a:lstStyle/>
           <a:p>
             <a:r>
-              <a:rPr lang="en-US" smtClean="0"/>
+              <a:rPr lang="en-US"/>
               <a:t>Click to edit Master title style</a:t>
             </a:r>
-            <a:endParaRPr lang="en-US"/>
           </a:p>
         </p:txBody>
       </p:sp>
@@ -1908,38 +1697,37 @@
           <a:p>
             <a:pPr lvl="0"/>
             <a:r>
-              <a:rPr lang="en-US" smtClean="0"/>
+              <a:rPr lang="en-US"/>
               <a:t>Click to edit Master text styles</a:t>
             </a:r>
           </a:p>
           <a:p>
             <a:pPr lvl="1"/>
             <a:r>
-              <a:rPr lang="en-US" smtClean="0"/>
+              <a:rPr lang="en-US"/>
               <a:t>Second level</a:t>
             </a:r>
           </a:p>
           <a:p>
             <a:pPr lvl="2"/>
             <a:r>
-              <a:rPr lang="en-US" smtClean="0"/>
+              <a:rPr lang="en-US"/>
               <a:t>Third level</a:t>
             </a:r>
           </a:p>
           <a:p>
             <a:pPr lvl="3"/>
             <a:r>
-              <a:rPr lang="en-US" smtClean="0"/>
+              <a:rPr lang="en-US"/>
               <a:t>Fourth level</a:t>
             </a:r>
           </a:p>
           <a:p>
             <a:pPr lvl="4"/>
             <a:r>
-              <a:rPr lang="en-US" smtClean="0"/>
+              <a:rPr lang="en-US"/>
               <a:t>Fifth level</a:t>
             </a:r>
-            <a:endParaRPr lang="en-US"/>
           </a:p>
         </p:txBody>
       </p:sp>
@@ -1960,7 +1748,7 @@
           <a:p>
             <a:fld id="{5BCAD085-E8A6-8845-BD4E-CB4CCA059FC4}" type="datetimeFigureOut">
               <a:rPr lang="en-US" smtClean="0"/>
-              <a:t>1/27/13</a:t>
+              <a:t>9/27/2026</a:t>
             </a:fld>
             <a:endParaRPr lang="en-US"/>
           </a:p>
@@ -2063,10 +1851,9 @@
           </a:lstStyle>
           <a:p>
             <a:r>
-              <a:rPr lang="en-US" smtClean="0"/>
+              <a:rPr lang="en-US"/>
               <a:t>Click to edit Master title style</a:t>
             </a:r>
-            <a:endParaRPr lang="en-US"/>
           </a:p>
         </p:txBody>
       </p:sp>
@@ -2183,7 +1970,7 @@
           <a:p>
             <a:pPr lvl="0"/>
             <a:r>
-              <a:rPr lang="en-US" smtClean="0"/>
+              <a:rPr lang="en-US"/>
               <a:t>Click to edit Master text styles</a:t>
             </a:r>
           </a:p>
@@ -2206,7 +1993,7 @@
           <a:p>
             <a:fld id="{5BCAD085-E8A6-8845-BD4E-CB4CCA059FC4}" type="datetimeFigureOut">
               <a:rPr lang="en-US" smtClean="0"/>
-              <a:t>1/27/13</a:t>
+              <a:t>9/27/2026</a:t>
             </a:fld>
             <a:endParaRPr lang="en-US"/>
           </a:p>
@@ -2300,10 +2087,9 @@
           <a:lstStyle/>
           <a:p>
             <a:r>
-              <a:rPr lang="en-US" smtClean="0"/>
+              <a:rPr lang="en-US"/>
               <a:t>Click to edit Master title style</a:t>
             </a:r>
-            <a:endParaRPr lang="en-US"/>
           </a:p>
         </p:txBody>
       </p:sp>
@@ -2357,38 +2143,37 @@
           <a:p>
             <a:pPr lvl="0"/>
             <a:r>
-              <a:rPr lang="en-US" smtClean="0"/>
+              <a:rPr lang="en-US"/>
               <a:t>Click to edit Master text styles</a:t>
             </a:r>
           </a:p>
           <a:p>
             <a:pPr lvl="1"/>
             <a:r>
-              <a:rPr lang="en-US" smtClean="0"/>
+              <a:rPr lang="en-US"/>
               <a:t>Second level</a:t>
             </a:r>
           </a:p>
           <a:p>
             <a:pPr lvl="2"/>
             <a:r>
-              <a:rPr lang="en-US" smtClean="0"/>
+              <a:rPr lang="en-US"/>
               <a:t>Third level</a:t>
             </a:r>
           </a:p>
           <a:p>
             <a:pPr lvl="3"/>
             <a:r>
-              <a:rPr lang="en-US" smtClean="0"/>
+              <a:rPr lang="en-US"/>
               <a:t>Fourth level</a:t>
             </a:r>
           </a:p>
           <a:p>
             <a:pPr lvl="4"/>
             <a:r>
-              <a:rPr lang="en-US" smtClean="0"/>
+              <a:rPr lang="en-US"/>
               <a:t>Fifth level</a:t>
             </a:r>
-            <a:endParaRPr lang="en-US"/>
           </a:p>
         </p:txBody>
       </p:sp>
@@ -2442,38 +2227,37 @@
           <a:p>
             <a:pPr lvl="0"/>
             <a:r>
-              <a:rPr lang="en-US" smtClean="0"/>
+              <a:rPr lang="en-US"/>
               <a:t>Click to edit Master text styles</a:t>
             </a:r>
           </a:p>
           <a:p>
             <a:pPr lvl="1"/>
             <a:r>
-              <a:rPr lang="en-US" smtClean="0"/>
+              <a:rPr lang="en-US"/>
               <a:t>Second level</a:t>
             </a:r>
           </a:p>
           <a:p>
             <a:pPr lvl="2"/>
             <a:r>
-              <a:rPr lang="en-US" smtClean="0"/>
+              <a:rPr lang="en-US"/>
               <a:t>Third level</a:t>
             </a:r>
           </a:p>
           <a:p>
             <a:pPr lvl="3"/>
             <a:r>
-              <a:rPr lang="en-US" smtClean="0"/>
+              <a:rPr lang="en-US"/>
               <a:t>Fourth level</a:t>
             </a:r>
           </a:p>
           <a:p>
             <a:pPr lvl="4"/>
             <a:r>
-              <a:rPr lang="en-US" smtClean="0"/>
+              <a:rPr lang="en-US"/>
               <a:t>Fifth level</a:t>
             </a:r>
-            <a:endParaRPr lang="en-US"/>
           </a:p>
         </p:txBody>
       </p:sp>
@@ -2494,7 +2278,7 @@
           <a:p>
             <a:fld id="{5BCAD085-E8A6-8845-BD4E-CB4CCA059FC4}" type="datetimeFigureOut">
               <a:rPr lang="en-US" smtClean="0"/>
-              <a:t>1/27/13</a:t>
+              <a:t>9/27/2026</a:t>
             </a:fld>
             <a:endParaRPr lang="en-US"/>
           </a:p>
@@ -2592,10 +2376,9 @@
           </a:lstStyle>
           <a:p>
             <a:r>
-              <a:rPr lang="en-US" smtClean="0"/>
+              <a:rPr lang="en-US"/>
               <a:t>Click to edit Master title style</a:t>
             </a:r>
-            <a:endParaRPr lang="en-US"/>
           </a:p>
         </p:txBody>
       </p:sp>
@@ -2658,7 +2441,7 @@
           <a:p>
             <a:pPr lvl="0"/>
             <a:r>
-              <a:rPr lang="en-US" smtClean="0"/>
+              <a:rPr lang="en-US"/>
               <a:t>Click to edit Master text styles</a:t>
             </a:r>
           </a:p>
@@ -2714,38 +2497,37 @@
           <a:p>
             <a:pPr lvl="0"/>
             <a:r>
-              <a:rPr lang="en-US" smtClean="0"/>
+              <a:rPr lang="en-US"/>
               <a:t>Click to edit Master text styles</a:t>
             </a:r>
           </a:p>
           <a:p>
             <a:pPr lvl="1"/>
             <a:r>
-              <a:rPr lang="en-US" smtClean="0"/>
+              <a:rPr lang="en-US"/>
               <a:t>Second level</a:t>
             </a:r>
           </a:p>
           <a:p>
             <a:pPr lvl="2"/>
             <a:r>
-              <a:rPr lang="en-US" smtClean="0"/>
+              <a:rPr lang="en-US"/>
               <a:t>Third level</a:t>
             </a:r>
           </a:p>
           <a:p>
             <a:pPr lvl="3"/>
             <a:r>
-              <a:rPr lang="en-US" smtClean="0"/>
+              <a:rPr lang="en-US"/>
               <a:t>Fourth level</a:t>
             </a:r>
           </a:p>
           <a:p>
             <a:pPr lvl="4"/>
             <a:r>
-              <a:rPr lang="en-US" smtClean="0"/>
+              <a:rPr lang="en-US"/>
               <a:t>Fifth level</a:t>
             </a:r>
-            <a:endParaRPr lang="en-US"/>
           </a:p>
         </p:txBody>
       </p:sp>
@@ -2808,7 +2590,7 @@
           <a:p>
             <a:pPr lvl="0"/>
             <a:r>
-              <a:rPr lang="en-US" smtClean="0"/>
+              <a:rPr lang="en-US"/>
               <a:t>Click to edit Master text styles</a:t>
             </a:r>
           </a:p>
@@ -2864,38 +2646,37 @@
           <a:p>
             <a:pPr lvl="0"/>
             <a:r>
-              <a:rPr lang="en-US" smtClean="0"/>
+              <a:rPr lang="en-US"/>
               <a:t>Click to edit Master text styles</a:t>
             </a:r>
           </a:p>
           <a:p>
             <a:pPr lvl="1"/>
             <a:r>
-              <a:rPr lang="en-US" smtClean="0"/>
+              <a:rPr lang="en-US"/>
               <a:t>Second level</a:t>
             </a:r>
           </a:p>
           <a:p>
             <a:pPr lvl="2"/>
             <a:r>
-              <a:rPr lang="en-US" smtClean="0"/>
+              <a:rPr lang="en-US"/>
               <a:t>Third level</a:t>
             </a:r>
           </a:p>
           <a:p>
             <a:pPr lvl="3"/>
             <a:r>
-              <a:rPr lang="en-US" smtClean="0"/>
+              <a:rPr lang="en-US"/>
               <a:t>Fourth level</a:t>
             </a:r>
           </a:p>
           <a:p>
             <a:pPr lvl="4"/>
             <a:r>
-              <a:rPr lang="en-US" smtClean="0"/>
+              <a:rPr lang="en-US"/>
               <a:t>Fifth level</a:t>
             </a:r>
-            <a:endParaRPr lang="en-US"/>
           </a:p>
         </p:txBody>
       </p:sp>
@@ -2916,7 +2697,7 @@
           <a:p>
             <a:fld id="{5BCAD085-E8A6-8845-BD4E-CB4CCA059FC4}" type="datetimeFigureOut">
               <a:rPr lang="en-US" smtClean="0"/>
-              <a:t>1/27/13</a:t>
+              <a:t>9/27/2026</a:t>
             </a:fld>
             <a:endParaRPr lang="en-US"/>
           </a:p>
@@ -3010,10 +2791,9 @@
           <a:lstStyle/>
           <a:p>
             <a:r>
-              <a:rPr lang="en-US" smtClean="0"/>
+              <a:rPr lang="en-US"/>
               <a:t>Click to edit Master title style</a:t>
             </a:r>
-            <a:endParaRPr lang="en-US"/>
           </a:p>
         </p:txBody>
       </p:sp>
@@ -3034,7 +2814,7 @@
           <a:p>
             <a:fld id="{5BCAD085-E8A6-8845-BD4E-CB4CCA059FC4}" type="datetimeFigureOut">
               <a:rPr lang="en-US" smtClean="0"/>
-              <a:t>1/27/13</a:t>
+              <a:t>9/27/2026</a:t>
             </a:fld>
             <a:endParaRPr lang="en-US"/>
           </a:p>
@@ -3129,7 +2909,7 @@
           <a:p>
             <a:fld id="{5BCAD085-E8A6-8845-BD4E-CB4CCA059FC4}" type="datetimeFigureOut">
               <a:rPr lang="en-US" smtClean="0"/>
-              <a:t>1/27/13</a:t>
+              <a:t>9/27/2026</a:t>
             </a:fld>
             <a:endParaRPr lang="en-US"/>
           </a:p>
@@ -3232,10 +3012,9 @@
           </a:lstStyle>
           <a:p>
             <a:r>
-              <a:rPr lang="en-US" smtClean="0"/>
+              <a:rPr lang="en-US"/>
               <a:t>Click to edit Master title style</a:t>
             </a:r>
-            <a:endParaRPr lang="en-US"/>
           </a:p>
         </p:txBody>
       </p:sp>
@@ -3289,38 +3068,37 @@
           <a:p>
             <a:pPr lvl="0"/>
             <a:r>
-              <a:rPr lang="en-US" smtClean="0"/>
+              <a:rPr lang="en-US"/>
               <a:t>Click to edit Master text styles</a:t>
             </a:r>
           </a:p>
           <a:p>
             <a:pPr lvl="1"/>
             <a:r>
-              <a:rPr lang="en-US" smtClean="0"/>
+              <a:rPr lang="en-US"/>
               <a:t>Second level</a:t>
             </a:r>
           </a:p>
           <a:p>
             <a:pPr lvl="2"/>
             <a:r>
-              <a:rPr lang="en-US" smtClean="0"/>
+              <a:rPr lang="en-US"/>
               <a:t>Third level</a:t>
             </a:r>
           </a:p>
           <a:p>
             <a:pPr lvl="3"/>
             <a:r>
-              <a:rPr lang="en-US" smtClean="0"/>
+              <a:rPr lang="en-US"/>
               <a:t>Fourth level</a:t>
             </a:r>
           </a:p>
           <a:p>
             <a:pPr lvl="4"/>
             <a:r>
-              <a:rPr lang="en-US" smtClean="0"/>
+              <a:rPr lang="en-US"/>
               <a:t>Fifth level</a:t>
             </a:r>
-            <a:endParaRPr lang="en-US"/>
           </a:p>
         </p:txBody>
       </p:sp>
@@ -3383,7 +3161,7 @@
           <a:p>
             <a:pPr lvl="0"/>
             <a:r>
-              <a:rPr lang="en-US" smtClean="0"/>
+              <a:rPr lang="en-US"/>
               <a:t>Click to edit Master text styles</a:t>
             </a:r>
           </a:p>
@@ -3406,7 +3184,7 @@
           <a:p>
             <a:fld id="{5BCAD085-E8A6-8845-BD4E-CB4CCA059FC4}" type="datetimeFigureOut">
               <a:rPr lang="en-US" smtClean="0"/>
-              <a:t>1/27/13</a:t>
+              <a:t>9/27/2026</a:t>
             </a:fld>
             <a:endParaRPr lang="en-US"/>
           </a:p>
@@ -3509,10 +3287,9 @@
           </a:lstStyle>
           <a:p>
             <a:r>
-              <a:rPr lang="en-US" smtClean="0"/>
+              <a:rPr lang="en-US"/>
               <a:t>Click to edit Master title style</a:t>
             </a:r>
-            <a:endParaRPr lang="en-US"/>
           </a:p>
         </p:txBody>
       </p:sp>
@@ -3636,7 +3413,7 @@
           <a:p>
             <a:pPr lvl="0"/>
             <a:r>
-              <a:rPr lang="en-US" smtClean="0"/>
+              <a:rPr lang="en-US"/>
               <a:t>Click to edit Master text styles</a:t>
             </a:r>
           </a:p>
@@ -3659,7 +3436,7 @@
           <a:p>
             <a:fld id="{5BCAD085-E8A6-8845-BD4E-CB4CCA059FC4}" type="datetimeFigureOut">
               <a:rPr lang="en-US" smtClean="0"/>
-              <a:t>1/27/13</a:t>
+              <a:t>9/27/2026</a:t>
             </a:fld>
             <a:endParaRPr lang="en-US"/>
           </a:p>
@@ -3768,10 +3545,9 @@
           <a:lstStyle/>
           <a:p>
             <a:r>
-              <a:rPr lang="en-US" smtClean="0"/>
+              <a:rPr lang="en-US"/>
               <a:t>Click to edit Master title style</a:t>
             </a:r>
-            <a:endParaRPr lang="en-US"/>
           </a:p>
         </p:txBody>
       </p:sp>
@@ -3802,38 +3578,37 @@
           <a:p>
             <a:pPr lvl="0"/>
             <a:r>
-              <a:rPr lang="en-US" smtClean="0"/>
+              <a:rPr lang="en-US"/>
               <a:t>Click to edit Master text styles</a:t>
             </a:r>
           </a:p>
           <a:p>
             <a:pPr lvl="1"/>
             <a:r>
-              <a:rPr lang="en-US" smtClean="0"/>
+              <a:rPr lang="en-US"/>
               <a:t>Second level</a:t>
             </a:r>
           </a:p>
           <a:p>
             <a:pPr lvl="2"/>
             <a:r>
-              <a:rPr lang="en-US" smtClean="0"/>
+              <a:rPr lang="en-US"/>
               <a:t>Third level</a:t>
             </a:r>
           </a:p>
           <a:p>
             <a:pPr lvl="3"/>
             <a:r>
-              <a:rPr lang="en-US" smtClean="0"/>
+              <a:rPr lang="en-US"/>
               <a:t>Fourth level</a:t>
             </a:r>
           </a:p>
           <a:p>
             <a:pPr lvl="4"/>
             <a:r>
-              <a:rPr lang="en-US" smtClean="0"/>
+              <a:rPr lang="en-US"/>
               <a:t>Fifth level</a:t>
             </a:r>
-            <a:endParaRPr lang="en-US"/>
           </a:p>
         </p:txBody>
       </p:sp>
@@ -3872,7 +3647,7 @@
           <a:p>
             <a:fld id="{5BCAD085-E8A6-8845-BD4E-CB4CCA059FC4}" type="datetimeFigureOut">
               <a:rPr lang="en-US" smtClean="0"/>
-              <a:t>1/27/13</a:t>
+              <a:t>9/27/2026</a:t>
             </a:fld>
             <a:endParaRPr lang="en-US"/>
           </a:p>
@@ -4231,7 +4006,7 @@
 </file>
 
 <file path=ppt/slides/slide1.xml><?xml version="1.0" encoding="utf-8"?>
-<p:sld xmlns:a="http://schemas.openxmlformats.org/drawingml/2006/main" xmlns:p="http://schemas.openxmlformats.org/presentationml/2006/main" xmlns:r="http://schemas.openxmlformats.org/officeDocument/2006/relationships">
+<p:sld xmlns:a="http://schemas.openxmlformats.org/drawingml/2006/main" xmlns:r="http://schemas.openxmlformats.org/officeDocument/2006/relationships" xmlns:p="http://schemas.openxmlformats.org/presentationml/2006/main">
   <p:cSld>
     <p:spTree>
       <p:nvGrpSpPr>
@@ -4239,7 +4014,14 @@
         <p:cNvGrpSpPr/>
         <p:nvPr/>
       </p:nvGrpSpPr>
-      <p:grpSpPr/>
+      <p:grpSpPr>
+        <a:xfrm>
+          <a:off x="0" y="0"/>
+          <a:ext cx="0" cy="0"/>
+          <a:chOff x="0" y="0"/>
+          <a:chExt cx="0" cy="0"/>
+        </a:xfrm>
+      </p:grpSpPr>
       <p:pic>
         <p:nvPicPr>
           <p:cNvPr id="2" name="Picture 1" descr="bg_hero.png"/>
@@ -4249,7 +4031,7 @@
           <p:nvPr/>
         </p:nvPicPr>
         <p:blipFill>
-          <a:blip r:embed="rId2"/>
+          <a:blip r:embed="rId3"/>
           <a:stretch>
             <a:fillRect/>
           </a:stretch>
@@ -4281,7 +4063,7 @@
           <a:noFill/>
         </p:spPr>
         <p:txBody>
-          <a:bodyPr wrap="square" anchor="t" lIns="0" rIns="0" tIns="0" bIns="0">
+          <a:bodyPr wrap="square" lIns="0" tIns="0" rIns="0" bIns="0" anchor="t">
             <a:spAutoFit/>
           </a:bodyPr>
           <a:lstStyle/>
@@ -4320,7 +4102,7 @@
           <a:noFill/>
         </p:spPr>
         <p:txBody>
-          <a:bodyPr wrap="square" anchor="t" lIns="0" rIns="0" tIns="0" bIns="0">
+          <a:bodyPr wrap="square" lIns="0" tIns="0" rIns="0" bIns="0" anchor="t">
             <a:spAutoFit/>
           </a:bodyPr>
           <a:lstStyle/>
@@ -4359,7 +4141,7 @@
           <a:noFill/>
         </p:spPr>
         <p:txBody>
-          <a:bodyPr wrap="square" anchor="t" lIns="0" rIns="0" tIns="0" bIns="0">
+          <a:bodyPr wrap="square" lIns="0" tIns="0" rIns="0" bIns="0" anchor="t">
             <a:spAutoFit/>
           </a:bodyPr>
           <a:lstStyle/>
@@ -4442,6 +4224,7 @@
           <a:lstStyle/>
           <a:p>
             <a:pPr algn="ctr"/>
+            <a:endParaRPr/>
           </a:p>
         </p:txBody>
       </p:sp>
@@ -4462,7 +4245,7 @@
           <a:noFill/>
         </p:spPr>
         <p:txBody>
-          <a:bodyPr wrap="square" anchor="t" lIns="0" rIns="0" tIns="0" bIns="0">
+          <a:bodyPr wrap="square" lIns="0" tIns="0" rIns="0" bIns="0" anchor="t">
             <a:spAutoFit/>
           </a:bodyPr>
           <a:lstStyle/>
@@ -4493,7 +4276,7 @@
           <p:nvPr/>
         </p:nvPicPr>
         <p:blipFill>
-          <a:blip r:embed="rId3"/>
+          <a:blip r:embed="rId4"/>
           <a:stretch>
             <a:fillRect/>
           </a:stretch>
@@ -4551,6 +4334,7 @@
           <a:lstStyle/>
           <a:p>
             <a:pPr algn="ctr"/>
+            <a:endParaRPr/>
           </a:p>
         </p:txBody>
       </p:sp>
@@ -4571,7 +4355,7 @@
           <a:noFill/>
         </p:spPr>
         <p:txBody>
-          <a:bodyPr wrap="square" anchor="t" lIns="0" rIns="0" tIns="0" bIns="0">
+          <a:bodyPr wrap="square" lIns="0" tIns="0" rIns="0" bIns="0" anchor="t">
             <a:spAutoFit/>
           </a:bodyPr>
           <a:lstStyle/>
@@ -4610,7 +4394,7 @@
           <a:noFill/>
         </p:spPr>
         <p:txBody>
-          <a:bodyPr wrap="square" anchor="t" lIns="0" rIns="0" tIns="0" bIns="0">
+          <a:bodyPr wrap="square" lIns="0" tIns="0" rIns="0" bIns="0" anchor="t">
             <a:spAutoFit/>
           </a:bodyPr>
           <a:lstStyle/>
@@ -4649,7 +4433,7 @@
           <a:noFill/>
         </p:spPr>
         <p:txBody>
-          <a:bodyPr wrap="square" anchor="t" lIns="0" rIns="0" tIns="0" bIns="0">
+          <a:bodyPr wrap="square" lIns="0" tIns="0" rIns="0" bIns="0" anchor="t">
             <a:spAutoFit/>
           </a:bodyPr>
           <a:lstStyle/>
@@ -4659,15 +4443,7 @@
                 <a:spcPct val="125000"/>
               </a:lnSpc>
             </a:pPr>
-            <a:r>
-              <a:rPr sz="900" b="1" i="0" spc="140">
-                <a:solidFill>
-                  <a:srgbClr val="22D3EE"/>
-                </a:solidFill>
-                <a:latin typeface="Segoe UI"/>
-              </a:rPr>
-              <a:t/>
-            </a:r>
+            <a:endParaRPr/>
           </a:p>
         </p:txBody>
       </p:sp>
@@ -4688,7 +4464,7 @@
           <a:noFill/>
         </p:spPr>
         <p:txBody>
-          <a:bodyPr wrap="square" anchor="t" lIns="0" rIns="0" tIns="0" bIns="0">
+          <a:bodyPr wrap="square" lIns="0" tIns="0" rIns="0" bIns="0" anchor="t">
             <a:spAutoFit/>
           </a:bodyPr>
           <a:lstStyle/>
@@ -4727,7 +4503,7 @@
           <a:noFill/>
         </p:spPr>
         <p:txBody>
-          <a:bodyPr wrap="square" anchor="t" lIns="0" rIns="0" tIns="0" bIns="0">
+          <a:bodyPr wrap="square" lIns="0" tIns="0" rIns="0" bIns="0" anchor="t">
             <a:spAutoFit/>
           </a:bodyPr>
           <a:lstStyle/>
@@ -4766,7 +4542,7 @@
           <a:noFill/>
         </p:spPr>
         <p:txBody>
-          <a:bodyPr wrap="square" anchor="t" lIns="0" rIns="0" tIns="0" bIns="0">
+          <a:bodyPr wrap="square" lIns="0" tIns="0" rIns="0" bIns="0" anchor="t">
             <a:spAutoFit/>
           </a:bodyPr>
           <a:lstStyle/>
@@ -4805,7 +4581,7 @@
           <a:noFill/>
         </p:spPr>
         <p:txBody>
-          <a:bodyPr wrap="square" anchor="t" lIns="0" rIns="0" tIns="0" bIns="0">
+          <a:bodyPr wrap="square" lIns="0" tIns="0" rIns="0" bIns="0" anchor="t">
             <a:spAutoFit/>
           </a:bodyPr>
           <a:lstStyle/>
@@ -4844,7 +4620,7 @@
           <a:noFill/>
         </p:spPr>
         <p:txBody>
-          <a:bodyPr wrap="square" anchor="t" lIns="0" rIns="0" tIns="0" bIns="0">
+          <a:bodyPr wrap="square" lIns="0" tIns="0" rIns="0" bIns="0" anchor="t">
             <a:spAutoFit/>
           </a:bodyPr>
           <a:lstStyle/>
@@ -4883,7 +4659,7 @@
           <a:noFill/>
         </p:spPr>
         <p:txBody>
-          <a:bodyPr wrap="square" anchor="t" lIns="0" rIns="0" tIns="0" bIns="0">
+          <a:bodyPr wrap="square" lIns="0" tIns="0" rIns="0" bIns="0" anchor="t">
             <a:spAutoFit/>
           </a:bodyPr>
           <a:lstStyle/>
@@ -4910,11 +4686,23 @@
   <p:clrMapOvr>
     <a:masterClrMapping/>
   </p:clrMapOvr>
+  <mc:AlternateContent xmlns:mc="http://schemas.openxmlformats.org/markup-compatibility/2006">
+    <mc:Choice xmlns:p14="http://schemas.microsoft.com/office/powerpoint/2010/main" Requires="p14">
+      <p:transition spd="med" p14:dur="700">
+        <p:fade thruBlk="1"/>
+      </p:transition>
+    </mc:Choice>
+    <mc:Fallback>
+      <p:transition spd="med">
+        <p:fade thruBlk="1"/>
+      </p:transition>
+    </mc:Fallback>
+  </mc:AlternateContent>
 </p:sld>
 </file>
 
 <file path=ppt/slides/slide10.xml><?xml version="1.0" encoding="utf-8"?>
-<p:sld xmlns:a="http://schemas.openxmlformats.org/drawingml/2006/main" xmlns:p="http://schemas.openxmlformats.org/presentationml/2006/main" xmlns:r="http://schemas.openxmlformats.org/officeDocument/2006/relationships">
+<p:sld xmlns:a="http://schemas.openxmlformats.org/drawingml/2006/main" xmlns:r="http://schemas.openxmlformats.org/officeDocument/2006/relationships" xmlns:p="http://schemas.openxmlformats.org/presentationml/2006/main">
   <p:cSld>
     <p:spTree>
       <p:nvGrpSpPr>
@@ -4922,7 +4710,14 @@
         <p:cNvGrpSpPr/>
         <p:nvPr/>
       </p:nvGrpSpPr>
-      <p:grpSpPr/>
+      <p:grpSpPr>
+        <a:xfrm>
+          <a:off x="0" y="0"/>
+          <a:ext cx="0" cy="0"/>
+          <a:chOff x="0" y="0"/>
+          <a:chExt cx="0" cy="0"/>
+        </a:xfrm>
+      </p:grpSpPr>
       <p:pic>
         <p:nvPicPr>
           <p:cNvPr id="2" name="Picture 1" descr="bg_deep.png"/>
@@ -4964,7 +4759,7 @@
           <a:noFill/>
         </p:spPr>
         <p:txBody>
-          <a:bodyPr wrap="square" anchor="t" lIns="0" rIns="0" tIns="0" bIns="0">
+          <a:bodyPr wrap="square" lIns="0" tIns="0" rIns="0" bIns="0" anchor="t">
             <a:spAutoFit/>
           </a:bodyPr>
           <a:lstStyle/>
@@ -5003,7 +4798,7 @@
           <a:noFill/>
         </p:spPr>
         <p:txBody>
-          <a:bodyPr wrap="square" anchor="t" lIns="0" rIns="0" tIns="0" bIns="0">
+          <a:bodyPr wrap="square" lIns="0" tIns="0" rIns="0" bIns="0" anchor="t">
             <a:spAutoFit/>
           </a:bodyPr>
           <a:lstStyle/>
@@ -5042,7 +4837,7 @@
           <a:noFill/>
         </p:spPr>
         <p:txBody>
-          <a:bodyPr wrap="square" anchor="t" lIns="0" rIns="0" tIns="0" bIns="0">
+          <a:bodyPr wrap="square" lIns="0" tIns="0" rIns="0" bIns="0" anchor="t">
             <a:spAutoFit/>
           </a:bodyPr>
           <a:lstStyle/>
@@ -5105,7 +4900,7 @@
           </a:fontRef>
         </p:style>
         <p:txBody>
-          <a:bodyPr rtlCol="0" anchor="ctr" wrap="square" lIns="73152" rIns="73152" tIns="36576" bIns="36576"/>
+          <a:bodyPr wrap="square" lIns="73152" tIns="36576" rIns="73152" bIns="36576" rtlCol="0" anchor="ctr"/>
           <a:lstStyle/>
           <a:p>
             <a:pPr algn="ctr"/>
@@ -5215,7 +5010,7 @@
           </a:fontRef>
         </p:style>
         <p:txBody>
-          <a:bodyPr rtlCol="0" anchor="ctr" wrap="square" lIns="73152" rIns="73152" tIns="36576" bIns="36576"/>
+          <a:bodyPr wrap="square" lIns="73152" tIns="36576" rIns="73152" bIns="36576" rtlCol="0" anchor="ctr"/>
           <a:lstStyle/>
           <a:p>
             <a:pPr algn="ctr"/>
@@ -5325,7 +5120,7 @@
           </a:fontRef>
         </p:style>
         <p:txBody>
-          <a:bodyPr rtlCol="0" anchor="ctr" wrap="square" lIns="73152" rIns="73152" tIns="36576" bIns="36576"/>
+          <a:bodyPr wrap="square" lIns="73152" tIns="36576" rIns="73152" bIns="36576" rtlCol="0" anchor="ctr"/>
           <a:lstStyle/>
           <a:p>
             <a:pPr algn="ctr"/>
@@ -5434,7 +5229,7 @@
           </a:fontRef>
         </p:style>
         <p:txBody>
-          <a:bodyPr rtlCol="0" anchor="ctr" wrap="square" lIns="73152" rIns="73152" tIns="36576" bIns="36576"/>
+          <a:bodyPr wrap="square" lIns="73152" tIns="36576" rIns="73152" bIns="36576" rtlCol="0" anchor="ctr"/>
           <a:lstStyle/>
           <a:p>
             <a:pPr algn="ctr"/>
@@ -5544,7 +5339,7 @@
           </a:fontRef>
         </p:style>
         <p:txBody>
-          <a:bodyPr rtlCol="0" anchor="ctr" wrap="square" lIns="73152" rIns="73152" tIns="36576" bIns="36576"/>
+          <a:bodyPr wrap="square" lIns="73152" tIns="36576" rIns="73152" bIns="36576" rtlCol="0" anchor="ctr"/>
           <a:lstStyle/>
           <a:p>
             <a:pPr algn="ctr"/>
@@ -5653,7 +5448,7 @@
           </a:fontRef>
         </p:style>
         <p:txBody>
-          <a:bodyPr rtlCol="0" anchor="ctr" wrap="square" lIns="73152" rIns="73152" tIns="36576" bIns="36576"/>
+          <a:bodyPr wrap="square" lIns="73152" tIns="36576" rIns="73152" bIns="36576" rtlCol="0" anchor="ctr"/>
           <a:lstStyle/>
           <a:p>
             <a:pPr algn="ctr"/>
@@ -5762,7 +5557,7 @@
           </a:fontRef>
         </p:style>
         <p:txBody>
-          <a:bodyPr rtlCol="0" anchor="ctr" wrap="square" lIns="73152" rIns="73152" tIns="36576" bIns="36576"/>
+          <a:bodyPr wrap="square" lIns="73152" tIns="36576" rIns="73152" bIns="36576" rtlCol="0" anchor="ctr"/>
           <a:lstStyle/>
           <a:p>
             <a:pPr algn="ctr"/>
@@ -5840,6 +5635,7 @@
           <a:lstStyle/>
           <a:p>
             <a:pPr algn="ctr"/>
+            <a:endParaRPr/>
           </a:p>
         </p:txBody>
       </p:sp>
@@ -5860,7 +5656,7 @@
           <a:noFill/>
         </p:spPr>
         <p:txBody>
-          <a:bodyPr wrap="square" anchor="t" lIns="0" rIns="0" tIns="0" bIns="0">
+          <a:bodyPr wrap="square" lIns="0" tIns="0" rIns="0" bIns="0" anchor="t">
             <a:spAutoFit/>
           </a:bodyPr>
           <a:lstStyle/>
@@ -5899,7 +5695,7 @@
           <a:noFill/>
         </p:spPr>
         <p:txBody>
-          <a:bodyPr wrap="square" anchor="t" lIns="0" rIns="0" tIns="0" bIns="0">
+          <a:bodyPr wrap="square" lIns="0" tIns="0" rIns="0" bIns="0" anchor="t">
             <a:spAutoFit/>
           </a:bodyPr>
           <a:lstStyle/>
@@ -5925,15 +5721,12 @@
                 <a:spcPct val="135000"/>
               </a:lnSpc>
             </a:pPr>
-            <a:r>
-              <a:rPr sz="1050" b="0" i="0">
-                <a:solidFill>
-                  <a:srgbClr val="F4F7FB"/>
-                </a:solidFill>
-                <a:latin typeface="Segoe UI"/>
-              </a:rPr>
-              <a:t/>
-            </a:r>
+            <a:endParaRPr sz="1050" b="0" i="0">
+              <a:solidFill>
+                <a:srgbClr val="F4F7FB"/>
+              </a:solidFill>
+              <a:latin typeface="Segoe UI"/>
+            </a:endParaRPr>
           </a:p>
           <a:p>
             <a:pPr algn="l">
@@ -5998,6 +5791,7 @@
           <a:lstStyle/>
           <a:p>
             <a:pPr algn="ctr"/>
+            <a:endParaRPr/>
           </a:p>
         </p:txBody>
       </p:sp>
@@ -6018,7 +5812,7 @@
           <a:noFill/>
         </p:spPr>
         <p:txBody>
-          <a:bodyPr wrap="square" anchor="t" lIns="0" rIns="0" tIns="0" bIns="0">
+          <a:bodyPr wrap="square" lIns="0" tIns="0" rIns="0" bIns="0" anchor="t">
             <a:spAutoFit/>
           </a:bodyPr>
           <a:lstStyle/>
@@ -6057,7 +5851,7 @@
           <a:noFill/>
         </p:spPr>
         <p:txBody>
-          <a:bodyPr wrap="square" anchor="t" lIns="0" rIns="0" tIns="0" bIns="0">
+          <a:bodyPr wrap="square" lIns="0" tIns="0" rIns="0" bIns="0" anchor="t">
             <a:spAutoFit/>
           </a:bodyPr>
           <a:lstStyle/>
@@ -6096,7 +5890,7 @@
           <a:noFill/>
         </p:spPr>
         <p:txBody>
-          <a:bodyPr wrap="square" anchor="t" lIns="0" rIns="0" tIns="0" bIns="0">
+          <a:bodyPr wrap="square" lIns="0" tIns="0" rIns="0" bIns="0" anchor="t">
             <a:spAutoFit/>
           </a:bodyPr>
           <a:lstStyle/>
@@ -6135,7 +5929,7 @@
           <a:noFill/>
         </p:spPr>
         <p:txBody>
-          <a:bodyPr wrap="square" anchor="t" lIns="0" rIns="0" tIns="0" bIns="0">
+          <a:bodyPr wrap="square" lIns="0" tIns="0" rIns="0" bIns="0" anchor="t">
             <a:spAutoFit/>
           </a:bodyPr>
           <a:lstStyle/>
@@ -6174,7 +5968,7 @@
           <a:noFill/>
         </p:spPr>
         <p:txBody>
-          <a:bodyPr wrap="square" anchor="t" lIns="0" rIns="0" tIns="0" bIns="0">
+          <a:bodyPr wrap="square" lIns="0" tIns="0" rIns="0" bIns="0" anchor="t">
             <a:spAutoFit/>
           </a:bodyPr>
           <a:lstStyle/>
@@ -6213,7 +6007,7 @@
           <a:noFill/>
         </p:spPr>
         <p:txBody>
-          <a:bodyPr wrap="square" anchor="t" lIns="0" rIns="0" tIns="0" bIns="0">
+          <a:bodyPr wrap="square" lIns="0" tIns="0" rIns="0" bIns="0" anchor="t">
             <a:spAutoFit/>
           </a:bodyPr>
           <a:lstStyle/>
@@ -6252,7 +6046,7 @@
           <a:noFill/>
         </p:spPr>
         <p:txBody>
-          <a:bodyPr wrap="square" anchor="t" lIns="0" rIns="0" tIns="0" bIns="0">
+          <a:bodyPr wrap="square" lIns="0" tIns="0" rIns="0" bIns="0" anchor="t">
             <a:spAutoFit/>
           </a:bodyPr>
           <a:lstStyle/>
@@ -6291,7 +6085,7 @@
           <a:noFill/>
         </p:spPr>
         <p:txBody>
-          <a:bodyPr wrap="square" anchor="t" lIns="0" rIns="0" tIns="0" bIns="0">
+          <a:bodyPr wrap="square" lIns="0" tIns="0" rIns="0" bIns="0" anchor="t">
             <a:spAutoFit/>
           </a:bodyPr>
           <a:lstStyle/>
@@ -6330,7 +6124,7 @@
           <a:noFill/>
         </p:spPr>
         <p:txBody>
-          <a:bodyPr wrap="square" anchor="t" lIns="0" rIns="0" tIns="0" bIns="0">
+          <a:bodyPr wrap="square" lIns="0" tIns="0" rIns="0" bIns="0" anchor="t">
             <a:spAutoFit/>
           </a:bodyPr>
           <a:lstStyle/>
@@ -6369,7 +6163,7 @@
           <a:noFill/>
         </p:spPr>
         <p:txBody>
-          <a:bodyPr wrap="square" anchor="t" lIns="0" rIns="0" tIns="0" bIns="0">
+          <a:bodyPr wrap="square" lIns="0" tIns="0" rIns="0" bIns="0" anchor="t">
             <a:spAutoFit/>
           </a:bodyPr>
           <a:lstStyle/>
@@ -6408,7 +6202,7 @@
           <a:noFill/>
         </p:spPr>
         <p:txBody>
-          <a:bodyPr wrap="square" anchor="t" lIns="0" rIns="0" tIns="0" bIns="0">
+          <a:bodyPr wrap="square" lIns="0" tIns="0" rIns="0" bIns="0" anchor="t">
             <a:spAutoFit/>
           </a:bodyPr>
           <a:lstStyle/>
@@ -6435,11 +6229,23 @@
   <p:clrMapOvr>
     <a:masterClrMapping/>
   </p:clrMapOvr>
+  <mc:AlternateContent xmlns:mc="http://schemas.openxmlformats.org/markup-compatibility/2006">
+    <mc:Choice xmlns:p14="http://schemas.microsoft.com/office/powerpoint/2010/main" Requires="p14">
+      <p:transition spd="med" p14:dur="700">
+        <p:fade thruBlk="1"/>
+      </p:transition>
+    </mc:Choice>
+    <mc:Fallback>
+      <p:transition spd="med">
+        <p:fade thruBlk="1"/>
+      </p:transition>
+    </mc:Fallback>
+  </mc:AlternateContent>
 </p:sld>
 </file>
 
 <file path=ppt/slides/slide11.xml><?xml version="1.0" encoding="utf-8"?>
-<p:sld xmlns:a="http://schemas.openxmlformats.org/drawingml/2006/main" xmlns:p="http://schemas.openxmlformats.org/presentationml/2006/main" xmlns:r="http://schemas.openxmlformats.org/officeDocument/2006/relationships">
+<p:sld xmlns:a="http://schemas.openxmlformats.org/drawingml/2006/main" xmlns:r="http://schemas.openxmlformats.org/officeDocument/2006/relationships" xmlns:p="http://schemas.openxmlformats.org/presentationml/2006/main">
   <p:cSld>
     <p:spTree>
       <p:nvGrpSpPr>
@@ -6447,7 +6253,14 @@
         <p:cNvGrpSpPr/>
         <p:nvPr/>
       </p:nvGrpSpPr>
-      <p:grpSpPr/>
+      <p:grpSpPr>
+        <a:xfrm>
+          <a:off x="0" y="0"/>
+          <a:ext cx="0" cy="0"/>
+          <a:chOff x="0" y="0"/>
+          <a:chExt cx="0" cy="0"/>
+        </a:xfrm>
+      </p:grpSpPr>
       <p:pic>
         <p:nvPicPr>
           <p:cNvPr id="2" name="Picture 1" descr="bg_deep.png"/>
@@ -6489,7 +6302,7 @@
           <a:noFill/>
         </p:spPr>
         <p:txBody>
-          <a:bodyPr wrap="square" anchor="t" lIns="0" rIns="0" tIns="0" bIns="0">
+          <a:bodyPr wrap="square" lIns="0" tIns="0" rIns="0" bIns="0" anchor="t">
             <a:spAutoFit/>
           </a:bodyPr>
           <a:lstStyle/>
@@ -6528,7 +6341,7 @@
           <a:noFill/>
         </p:spPr>
         <p:txBody>
-          <a:bodyPr wrap="square" anchor="t" lIns="0" rIns="0" tIns="0" bIns="0">
+          <a:bodyPr wrap="square" lIns="0" tIns="0" rIns="0" bIns="0" anchor="t">
             <a:spAutoFit/>
           </a:bodyPr>
           <a:lstStyle/>
@@ -6567,7 +6380,7 @@
           <a:noFill/>
         </p:spPr>
         <p:txBody>
-          <a:bodyPr wrap="square" anchor="t" lIns="0" rIns="0" tIns="0" bIns="0">
+          <a:bodyPr wrap="square" lIns="0" tIns="0" rIns="0" bIns="0" anchor="t">
             <a:spAutoFit/>
           </a:bodyPr>
           <a:lstStyle/>
@@ -6606,7 +6419,7 @@
           <a:noFill/>
         </p:spPr>
         <p:txBody>
-          <a:bodyPr wrap="square" anchor="t" lIns="0" rIns="0" tIns="0" bIns="0">
+          <a:bodyPr wrap="square" lIns="0" tIns="0" rIns="0" bIns="0" anchor="t">
             <a:spAutoFit/>
           </a:bodyPr>
           <a:lstStyle/>
@@ -6669,7 +6482,7 @@
           </a:fontRef>
         </p:style>
         <p:txBody>
-          <a:bodyPr rtlCol="0" anchor="ctr" wrap="square" lIns="73152" rIns="73152" tIns="36576" bIns="36576"/>
+          <a:bodyPr wrap="square" lIns="73152" tIns="36576" rIns="73152" bIns="36576" rtlCol="0" anchor="ctr"/>
           <a:lstStyle/>
           <a:p>
             <a:pPr algn="ctr"/>
@@ -6762,7 +6575,7 @@
           </a:fontRef>
         </p:style>
         <p:txBody>
-          <a:bodyPr rtlCol="0" anchor="ctr" wrap="square" lIns="73152" rIns="73152" tIns="36576" bIns="36576"/>
+          <a:bodyPr wrap="square" lIns="73152" tIns="36576" rIns="73152" bIns="36576" rtlCol="0" anchor="ctr"/>
           <a:lstStyle/>
           <a:p>
             <a:pPr algn="ctr"/>
@@ -6855,7 +6668,7 @@
           </a:fontRef>
         </p:style>
         <p:txBody>
-          <a:bodyPr rtlCol="0" anchor="ctr" wrap="square" lIns="73152" rIns="73152" tIns="36576" bIns="36576"/>
+          <a:bodyPr wrap="square" lIns="73152" tIns="36576" rIns="73152" bIns="36576" rtlCol="0" anchor="ctr"/>
           <a:lstStyle/>
           <a:p>
             <a:pPr algn="ctr"/>
@@ -6948,7 +6761,7 @@
           </a:fontRef>
         </p:style>
         <p:txBody>
-          <a:bodyPr rtlCol="0" anchor="ctr" wrap="square" lIns="73152" rIns="73152" tIns="36576" bIns="36576"/>
+          <a:bodyPr wrap="square" lIns="73152" tIns="36576" rIns="73152" bIns="36576" rtlCol="0" anchor="ctr"/>
           <a:lstStyle/>
           <a:p>
             <a:pPr algn="ctr"/>
@@ -7041,7 +6854,7 @@
           </a:fontRef>
         </p:style>
         <p:txBody>
-          <a:bodyPr rtlCol="0" anchor="ctr" wrap="square" lIns="73152" rIns="73152" tIns="36576" bIns="36576"/>
+          <a:bodyPr wrap="square" lIns="73152" tIns="36576" rIns="73152" bIns="36576" rtlCol="0" anchor="ctr"/>
           <a:lstStyle/>
           <a:p>
             <a:pPr algn="ctr"/>
@@ -7134,7 +6947,7 @@
           </a:fontRef>
         </p:style>
         <p:txBody>
-          <a:bodyPr rtlCol="0" anchor="ctr" wrap="square" lIns="73152" rIns="73152" tIns="36576" bIns="36576"/>
+          <a:bodyPr wrap="square" lIns="73152" tIns="36576" rIns="73152" bIns="36576" rtlCol="0" anchor="ctr"/>
           <a:lstStyle/>
           <a:p>
             <a:pPr algn="ctr"/>
@@ -7227,7 +7040,7 @@
           </a:fontRef>
         </p:style>
         <p:txBody>
-          <a:bodyPr rtlCol="0" anchor="ctr" wrap="square" lIns="73152" rIns="73152" tIns="36576" bIns="36576"/>
+          <a:bodyPr wrap="square" lIns="73152" tIns="36576" rIns="73152" bIns="36576" rtlCol="0" anchor="ctr"/>
           <a:lstStyle/>
           <a:p>
             <a:pPr algn="ctr"/>
@@ -7320,7 +7133,7 @@
           </a:fontRef>
         </p:style>
         <p:txBody>
-          <a:bodyPr rtlCol="0" anchor="ctr" wrap="square" lIns="73152" rIns="73152" tIns="36576" bIns="36576"/>
+          <a:bodyPr wrap="square" lIns="73152" tIns="36576" rIns="73152" bIns="36576" rtlCol="0" anchor="ctr"/>
           <a:lstStyle/>
           <a:p>
             <a:pPr algn="ctr"/>
@@ -7353,7 +7166,7 @@
           <a:noFill/>
         </p:spPr>
         <p:txBody>
-          <a:bodyPr wrap="square" anchor="t" lIns="0" rIns="0" tIns="0" bIns="0">
+          <a:bodyPr wrap="square" lIns="0" tIns="0" rIns="0" bIns="0" anchor="t">
             <a:spAutoFit/>
           </a:bodyPr>
           <a:lstStyle/>
@@ -7416,7 +7229,7 @@
           </a:fontRef>
         </p:style>
         <p:txBody>
-          <a:bodyPr rtlCol="0" anchor="ctr" wrap="square" lIns="73152" rIns="73152" tIns="36576" bIns="36576"/>
+          <a:bodyPr wrap="square" lIns="73152" tIns="36576" rIns="73152" bIns="36576" rtlCol="0" anchor="ctr"/>
           <a:lstStyle/>
           <a:p>
             <a:pPr algn="ctr"/>
@@ -7525,7 +7338,7 @@
           </a:fontRef>
         </p:style>
         <p:txBody>
-          <a:bodyPr rtlCol="0" anchor="ctr" wrap="square" lIns="73152" rIns="73152" tIns="36576" bIns="36576"/>
+          <a:bodyPr wrap="square" lIns="73152" tIns="36576" rIns="73152" bIns="36576" rtlCol="0" anchor="ctr"/>
           <a:lstStyle/>
           <a:p>
             <a:pPr algn="ctr"/>
@@ -7634,7 +7447,7 @@
           </a:fontRef>
         </p:style>
         <p:txBody>
-          <a:bodyPr rtlCol="0" anchor="ctr" wrap="square" lIns="73152" rIns="73152" tIns="36576" bIns="36576"/>
+          <a:bodyPr wrap="square" lIns="73152" tIns="36576" rIns="73152" bIns="36576" rtlCol="0" anchor="ctr"/>
           <a:lstStyle/>
           <a:p>
             <a:pPr algn="ctr"/>
@@ -7743,7 +7556,7 @@
           </a:fontRef>
         </p:style>
         <p:txBody>
-          <a:bodyPr rtlCol="0" anchor="ctr" wrap="square" lIns="73152" rIns="73152" tIns="36576" bIns="36576"/>
+          <a:bodyPr wrap="square" lIns="73152" tIns="36576" rIns="73152" bIns="36576" rtlCol="0" anchor="ctr"/>
           <a:lstStyle/>
           <a:p>
             <a:pPr algn="ctr"/>
@@ -7820,6 +7633,7 @@
           <a:lstStyle/>
           <a:p>
             <a:pPr algn="ctr"/>
+            <a:endParaRPr/>
           </a:p>
         </p:txBody>
       </p:sp>
@@ -7840,7 +7654,7 @@
           <a:noFill/>
         </p:spPr>
         <p:txBody>
-          <a:bodyPr wrap="square" anchor="t" lIns="0" rIns="0" tIns="0" bIns="0">
+          <a:bodyPr wrap="square" lIns="0" tIns="0" rIns="0" bIns="0" anchor="t">
             <a:spAutoFit/>
           </a:bodyPr>
           <a:lstStyle/>
@@ -7879,7 +7693,7 @@
           <a:noFill/>
         </p:spPr>
         <p:txBody>
-          <a:bodyPr wrap="square" anchor="t" lIns="0" rIns="0" tIns="0" bIns="0">
+          <a:bodyPr wrap="square" lIns="0" tIns="0" rIns="0" bIns="0" anchor="t">
             <a:spAutoFit/>
           </a:bodyPr>
           <a:lstStyle/>
@@ -7905,6 +7719,19 @@
                 <a:spcPct val="140000"/>
               </a:lnSpc>
             </a:pPr>
+            <a:endParaRPr sz="1050" b="0" i="0">
+              <a:solidFill>
+                <a:srgbClr val="F4F7FB"/>
+              </a:solidFill>
+              <a:latin typeface="Segoe UI"/>
+            </a:endParaRPr>
+          </a:p>
+          <a:p>
+            <a:pPr algn="l">
+              <a:lnSpc>
+                <a:spcPct val="140000"/>
+              </a:lnSpc>
+            </a:pPr>
             <a:r>
               <a:rPr sz="1050" b="0" i="0">
                 <a:solidFill>
@@ -7912,7 +7739,7 @@
                 </a:solidFill>
                 <a:latin typeface="Segoe UI"/>
               </a:rPr>
-              <a:t/>
+              <a:t>“escalate” is reachable only from CONFIRMED. There is no path from a model-detected crash to a dispatched responder that does not pass through a person.</a:t>
             </a:r>
           </a:p>
           <a:p>
@@ -7921,31 +7748,12 @@
                 <a:spcPct val="140000"/>
               </a:lnSpc>
             </a:pPr>
-            <a:r>
-              <a:rPr sz="1050" b="0" i="0">
-                <a:solidFill>
-                  <a:srgbClr val="F4F7FB"/>
-                </a:solidFill>
-                <a:latin typeface="Segoe UI"/>
-              </a:rPr>
-              <a:t>“escalate” is reachable only from CONFIRMED. There is no path from a model-detected crash to a dispatched responder that does not pass through a person.</a:t>
-            </a:r>
-          </a:p>
-          <a:p>
-            <a:pPr algn="l">
-              <a:lnSpc>
-                <a:spcPct val="140000"/>
-              </a:lnSpc>
-            </a:pPr>
-            <a:r>
-              <a:rPr sz="1050" b="0" i="0">
-                <a:solidFill>
-                  <a:srgbClr val="F4F7FB"/>
-                </a:solidFill>
-                <a:latin typeface="Segoe UI"/>
-              </a:rPr>
-              <a:t/>
-            </a:r>
+            <a:endParaRPr sz="1050" b="0" i="0">
+              <a:solidFill>
+                <a:srgbClr val="F4F7FB"/>
+              </a:solidFill>
+              <a:latin typeface="Segoe UI"/>
+            </a:endParaRPr>
           </a:p>
           <a:p>
             <a:pPr algn="l">
@@ -7982,7 +7790,7 @@
           <a:noFill/>
         </p:spPr>
         <p:txBody>
-          <a:bodyPr wrap="square" anchor="t" lIns="0" rIns="0" tIns="0" bIns="0">
+          <a:bodyPr wrap="square" lIns="0" tIns="0" rIns="0" bIns="0" anchor="t">
             <a:spAutoFit/>
           </a:bodyPr>
           <a:lstStyle/>
@@ -8021,7 +7829,7 @@
           <a:noFill/>
         </p:spPr>
         <p:txBody>
-          <a:bodyPr wrap="square" anchor="t" lIns="0" rIns="0" tIns="0" bIns="0">
+          <a:bodyPr wrap="square" lIns="0" tIns="0" rIns="0" bIns="0" anchor="t">
             <a:spAutoFit/>
           </a:bodyPr>
           <a:lstStyle/>
@@ -8048,11 +7856,23 @@
   <p:clrMapOvr>
     <a:masterClrMapping/>
   </p:clrMapOvr>
+  <mc:AlternateContent xmlns:mc="http://schemas.openxmlformats.org/markup-compatibility/2006">
+    <mc:Choice xmlns:p14="http://schemas.microsoft.com/office/powerpoint/2010/main" Requires="p14">
+      <p:transition spd="med" p14:dur="700">
+        <p:fade thruBlk="1"/>
+      </p:transition>
+    </mc:Choice>
+    <mc:Fallback>
+      <p:transition spd="med">
+        <p:fade thruBlk="1"/>
+      </p:transition>
+    </mc:Fallback>
+  </mc:AlternateContent>
 </p:sld>
 </file>
 
 <file path=ppt/slides/slide12.xml><?xml version="1.0" encoding="utf-8"?>
-<p:sld xmlns:a="http://schemas.openxmlformats.org/drawingml/2006/main" xmlns:p="http://schemas.openxmlformats.org/presentationml/2006/main" xmlns:r="http://schemas.openxmlformats.org/officeDocument/2006/relationships">
+<p:sld xmlns:a="http://schemas.openxmlformats.org/drawingml/2006/main" xmlns:r="http://schemas.openxmlformats.org/officeDocument/2006/relationships" xmlns:p="http://schemas.openxmlformats.org/presentationml/2006/main">
   <p:cSld>
     <p:spTree>
       <p:nvGrpSpPr>
@@ -8060,7 +7880,14 @@
         <p:cNvGrpSpPr/>
         <p:nvPr/>
       </p:nvGrpSpPr>
-      <p:grpSpPr/>
+      <p:grpSpPr>
+        <a:xfrm>
+          <a:off x="0" y="0"/>
+          <a:ext cx="0" cy="0"/>
+          <a:chOff x="0" y="0"/>
+          <a:chExt cx="0" cy="0"/>
+        </a:xfrm>
+      </p:grpSpPr>
       <p:pic>
         <p:nvPicPr>
           <p:cNvPr id="2" name="Picture 1" descr="bg_deep.png"/>
@@ -8102,7 +7929,7 @@
           <a:noFill/>
         </p:spPr>
         <p:txBody>
-          <a:bodyPr wrap="square" anchor="t" lIns="0" rIns="0" tIns="0" bIns="0">
+          <a:bodyPr wrap="square" lIns="0" tIns="0" rIns="0" bIns="0" anchor="t">
             <a:spAutoFit/>
           </a:bodyPr>
           <a:lstStyle/>
@@ -8141,7 +7968,7 @@
           <a:noFill/>
         </p:spPr>
         <p:txBody>
-          <a:bodyPr wrap="square" anchor="t" lIns="0" rIns="0" tIns="0" bIns="0">
+          <a:bodyPr wrap="square" lIns="0" tIns="0" rIns="0" bIns="0" anchor="t">
             <a:spAutoFit/>
           </a:bodyPr>
           <a:lstStyle/>
@@ -8180,7 +8007,7 @@
           <a:noFill/>
         </p:spPr>
         <p:txBody>
-          <a:bodyPr wrap="square" anchor="t" lIns="0" rIns="0" tIns="0" bIns="0">
+          <a:bodyPr wrap="square" lIns="0" tIns="0" rIns="0" bIns="0" anchor="t">
             <a:spAutoFit/>
           </a:bodyPr>
           <a:lstStyle/>
@@ -8243,7 +8070,7 @@
           </a:fontRef>
         </p:style>
         <p:txBody>
-          <a:bodyPr rtlCol="0" anchor="ctr" wrap="square" lIns="73152" rIns="73152" tIns="36576" bIns="36576"/>
+          <a:bodyPr wrap="square" lIns="73152" tIns="36576" rIns="73152" bIns="36576" rtlCol="0" anchor="ctr"/>
           <a:lstStyle/>
           <a:p>
             <a:pPr algn="ctr"/>
@@ -8352,7 +8179,7 @@
           </a:fontRef>
         </p:style>
         <p:txBody>
-          <a:bodyPr rtlCol="0" anchor="ctr" wrap="square" lIns="73152" rIns="73152" tIns="36576" bIns="36576"/>
+          <a:bodyPr wrap="square" lIns="73152" tIns="36576" rIns="73152" bIns="36576" rtlCol="0" anchor="ctr"/>
           <a:lstStyle/>
           <a:p>
             <a:pPr algn="ctr"/>
@@ -8462,7 +8289,7 @@
           </a:fontRef>
         </p:style>
         <p:txBody>
-          <a:bodyPr rtlCol="0" anchor="ctr" wrap="square" lIns="73152" rIns="73152" tIns="36576" bIns="36576"/>
+          <a:bodyPr wrap="square" lIns="73152" tIns="36576" rIns="73152" bIns="36576" rtlCol="0" anchor="ctr"/>
           <a:lstStyle/>
           <a:p>
             <a:pPr algn="ctr"/>
@@ -8572,7 +8399,7 @@
           </a:fontRef>
         </p:style>
         <p:txBody>
-          <a:bodyPr rtlCol="0" anchor="ctr" wrap="square" lIns="73152" rIns="73152" tIns="36576" bIns="36576"/>
+          <a:bodyPr wrap="square" lIns="73152" tIns="36576" rIns="73152" bIns="36576" rtlCol="0" anchor="ctr"/>
           <a:lstStyle/>
           <a:p>
             <a:pPr algn="ctr"/>
@@ -8650,6 +8477,7 @@
           <a:lstStyle/>
           <a:p>
             <a:pPr algn="ctr"/>
+            <a:endParaRPr/>
           </a:p>
         </p:txBody>
       </p:sp>
@@ -8670,7 +8498,7 @@
           <a:noFill/>
         </p:spPr>
         <p:txBody>
-          <a:bodyPr wrap="square" anchor="t" lIns="0" rIns="0" tIns="0" bIns="0">
+          <a:bodyPr wrap="square" lIns="0" tIns="0" rIns="0" bIns="0" anchor="t">
             <a:spAutoFit/>
           </a:bodyPr>
           <a:lstStyle/>
@@ -8709,7 +8537,7 @@
           <a:noFill/>
         </p:spPr>
         <p:txBody>
-          <a:bodyPr wrap="square" anchor="t" lIns="0" rIns="0" tIns="0" bIns="0">
+          <a:bodyPr wrap="square" lIns="0" tIns="0" rIns="0" bIns="0" anchor="t">
             <a:spAutoFit/>
           </a:bodyPr>
           <a:lstStyle/>
@@ -8748,7 +8576,7 @@
           <a:noFill/>
         </p:spPr>
         <p:txBody>
-          <a:bodyPr wrap="square" anchor="t" lIns="0" rIns="0" tIns="0" bIns="0">
+          <a:bodyPr wrap="square" lIns="0" tIns="0" rIns="0" bIns="0" anchor="t">
             <a:spAutoFit/>
           </a:bodyPr>
           <a:lstStyle/>
@@ -8787,7 +8615,7 @@
           <a:noFill/>
         </p:spPr>
         <p:txBody>
-          <a:bodyPr wrap="square" anchor="t" lIns="0" rIns="0" tIns="0" bIns="0">
+          <a:bodyPr wrap="square" lIns="0" tIns="0" rIns="0" bIns="0" anchor="t">
             <a:spAutoFit/>
           </a:bodyPr>
           <a:lstStyle/>
@@ -8826,7 +8654,7 @@
           <a:noFill/>
         </p:spPr>
         <p:txBody>
-          <a:bodyPr wrap="square" anchor="t" lIns="0" rIns="0" tIns="0" bIns="0">
+          <a:bodyPr wrap="square" lIns="0" tIns="0" rIns="0" bIns="0" anchor="t">
             <a:spAutoFit/>
           </a:bodyPr>
           <a:lstStyle/>
@@ -8865,7 +8693,7 @@
           <a:noFill/>
         </p:spPr>
         <p:txBody>
-          <a:bodyPr wrap="square" anchor="t" lIns="0" rIns="0" tIns="0" bIns="0">
+          <a:bodyPr wrap="square" lIns="0" tIns="0" rIns="0" bIns="0" anchor="t">
             <a:spAutoFit/>
           </a:bodyPr>
           <a:lstStyle/>
@@ -8904,7 +8732,7 @@
           <a:noFill/>
         </p:spPr>
         <p:txBody>
-          <a:bodyPr wrap="square" anchor="t" lIns="0" rIns="0" tIns="0" bIns="0">
+          <a:bodyPr wrap="square" lIns="0" tIns="0" rIns="0" bIns="0" anchor="t">
             <a:spAutoFit/>
           </a:bodyPr>
           <a:lstStyle/>
@@ -8971,6 +8799,7 @@
           <a:lstStyle/>
           <a:p>
             <a:pPr algn="ctr"/>
+            <a:endParaRPr/>
           </a:p>
         </p:txBody>
       </p:sp>
@@ -8991,7 +8820,7 @@
           <a:noFill/>
         </p:spPr>
         <p:txBody>
-          <a:bodyPr wrap="square" anchor="t" lIns="0" rIns="0" tIns="0" bIns="0">
+          <a:bodyPr wrap="square" lIns="0" tIns="0" rIns="0" bIns="0" anchor="t">
             <a:spAutoFit/>
           </a:bodyPr>
           <a:lstStyle/>
@@ -9030,7 +8859,7 @@
           <a:noFill/>
         </p:spPr>
         <p:txBody>
-          <a:bodyPr wrap="square" anchor="t" lIns="0" rIns="0" tIns="0" bIns="0">
+          <a:bodyPr wrap="square" lIns="0" tIns="0" rIns="0" bIns="0" anchor="t">
             <a:spAutoFit/>
           </a:bodyPr>
           <a:lstStyle/>
@@ -9056,15 +8885,12 @@
                 <a:spcPct val="135000"/>
               </a:lnSpc>
             </a:pPr>
-            <a:r>
-              <a:rPr sz="1050" b="0" i="0">
-                <a:solidFill>
-                  <a:srgbClr val="F4F7FB"/>
-                </a:solidFill>
-                <a:latin typeface="Segoe UI"/>
-              </a:rPr>
-              <a:t/>
-            </a:r>
+            <a:endParaRPr sz="1050" b="0" i="0">
+              <a:solidFill>
+                <a:srgbClr val="F4F7FB"/>
+              </a:solidFill>
+              <a:latin typeface="Segoe UI"/>
+            </a:endParaRPr>
           </a:p>
           <a:p>
             <a:pPr algn="l">
@@ -9101,7 +8927,7 @@
           <a:noFill/>
         </p:spPr>
         <p:txBody>
-          <a:bodyPr wrap="square" anchor="t" lIns="0" rIns="0" tIns="0" bIns="0">
+          <a:bodyPr wrap="square" lIns="0" tIns="0" rIns="0" bIns="0" anchor="t">
             <a:spAutoFit/>
           </a:bodyPr>
           <a:lstStyle/>
@@ -9140,7 +8966,7 @@
           <a:noFill/>
         </p:spPr>
         <p:txBody>
-          <a:bodyPr wrap="square" anchor="t" lIns="0" rIns="0" tIns="0" bIns="0">
+          <a:bodyPr wrap="square" lIns="0" tIns="0" rIns="0" bIns="0" anchor="t">
             <a:spAutoFit/>
           </a:bodyPr>
           <a:lstStyle/>
@@ -9167,11 +8993,23 @@
   <p:clrMapOvr>
     <a:masterClrMapping/>
   </p:clrMapOvr>
+  <mc:AlternateContent xmlns:mc="http://schemas.openxmlformats.org/markup-compatibility/2006">
+    <mc:Choice xmlns:p14="http://schemas.microsoft.com/office/powerpoint/2010/main" Requires="p14">
+      <p:transition spd="med" p14:dur="700">
+        <p:fade thruBlk="1"/>
+      </p:transition>
+    </mc:Choice>
+    <mc:Fallback>
+      <p:transition spd="med">
+        <p:fade thruBlk="1"/>
+      </p:transition>
+    </mc:Fallback>
+  </mc:AlternateContent>
 </p:sld>
 </file>
 
 <file path=ppt/slides/slide13.xml><?xml version="1.0" encoding="utf-8"?>
-<p:sld xmlns:a="http://schemas.openxmlformats.org/drawingml/2006/main" xmlns:p="http://schemas.openxmlformats.org/presentationml/2006/main" xmlns:r="http://schemas.openxmlformats.org/officeDocument/2006/relationships">
+<p:sld xmlns:a="http://schemas.openxmlformats.org/drawingml/2006/main" xmlns:r="http://schemas.openxmlformats.org/officeDocument/2006/relationships" xmlns:p="http://schemas.openxmlformats.org/presentationml/2006/main">
   <p:cSld>
     <p:spTree>
       <p:nvGrpSpPr>
@@ -9179,7 +9017,14 @@
         <p:cNvGrpSpPr/>
         <p:nvPr/>
       </p:nvGrpSpPr>
-      <p:grpSpPr/>
+      <p:grpSpPr>
+        <a:xfrm>
+          <a:off x="0" y="0"/>
+          <a:ext cx="0" cy="0"/>
+          <a:chOff x="0" y="0"/>
+          <a:chExt cx="0" cy="0"/>
+        </a:xfrm>
+      </p:grpSpPr>
       <p:pic>
         <p:nvPicPr>
           <p:cNvPr id="2" name="Picture 1" descr="bg_deep.png"/>
@@ -9221,7 +9066,7 @@
           <a:noFill/>
         </p:spPr>
         <p:txBody>
-          <a:bodyPr wrap="square" anchor="t" lIns="0" rIns="0" tIns="0" bIns="0">
+          <a:bodyPr wrap="square" lIns="0" tIns="0" rIns="0" bIns="0" anchor="t">
             <a:spAutoFit/>
           </a:bodyPr>
           <a:lstStyle/>
@@ -9260,7 +9105,7 @@
           <a:noFill/>
         </p:spPr>
         <p:txBody>
-          <a:bodyPr wrap="square" anchor="t" lIns="0" rIns="0" tIns="0" bIns="0">
+          <a:bodyPr wrap="square" lIns="0" tIns="0" rIns="0" bIns="0" anchor="t">
             <a:spAutoFit/>
           </a:bodyPr>
           <a:lstStyle/>
@@ -9349,6 +9194,7 @@
           <a:lstStyle/>
           <a:p>
             <a:pPr algn="ctr"/>
+            <a:endParaRPr/>
           </a:p>
         </p:txBody>
       </p:sp>
@@ -9369,7 +9215,7 @@
           <a:noFill/>
         </p:spPr>
         <p:txBody>
-          <a:bodyPr wrap="square" anchor="t" lIns="0" rIns="0" tIns="0" bIns="0">
+          <a:bodyPr wrap="square" lIns="0" tIns="0" rIns="0" bIns="0" anchor="t">
             <a:spAutoFit/>
           </a:bodyPr>
           <a:lstStyle/>
@@ -9458,6 +9304,7 @@
           <a:lstStyle/>
           <a:p>
             <a:pPr algn="ctr"/>
+            <a:endParaRPr/>
           </a:p>
         </p:txBody>
       </p:sp>
@@ -9478,7 +9325,7 @@
           <a:noFill/>
         </p:spPr>
         <p:txBody>
-          <a:bodyPr wrap="square" anchor="t" lIns="0" rIns="0" tIns="0" bIns="0">
+          <a:bodyPr wrap="square" lIns="0" tIns="0" rIns="0" bIns="0" anchor="t">
             <a:spAutoFit/>
           </a:bodyPr>
           <a:lstStyle/>
@@ -9567,6 +9414,7 @@
           <a:lstStyle/>
           <a:p>
             <a:pPr algn="ctr"/>
+            <a:endParaRPr/>
           </a:p>
         </p:txBody>
       </p:sp>
@@ -9587,7 +9435,7 @@
           <a:noFill/>
         </p:spPr>
         <p:txBody>
-          <a:bodyPr wrap="square" anchor="t" lIns="0" rIns="0" tIns="0" bIns="0">
+          <a:bodyPr wrap="square" lIns="0" tIns="0" rIns="0" bIns="0" anchor="t">
             <a:spAutoFit/>
           </a:bodyPr>
           <a:lstStyle/>
@@ -9676,6 +9524,7 @@
           <a:lstStyle/>
           <a:p>
             <a:pPr algn="ctr"/>
+            <a:endParaRPr/>
           </a:p>
         </p:txBody>
       </p:sp>
@@ -9696,7 +9545,7 @@
           <a:noFill/>
         </p:spPr>
         <p:txBody>
-          <a:bodyPr wrap="square" anchor="t" lIns="0" rIns="0" tIns="0" bIns="0">
+          <a:bodyPr wrap="square" lIns="0" tIns="0" rIns="0" bIns="0" anchor="t">
             <a:spAutoFit/>
           </a:bodyPr>
           <a:lstStyle/>
@@ -9785,6 +9634,7 @@
           <a:lstStyle/>
           <a:p>
             <a:pPr algn="ctr"/>
+            <a:endParaRPr/>
           </a:p>
         </p:txBody>
       </p:sp>
@@ -9805,7 +9655,7 @@
           <a:noFill/>
         </p:spPr>
         <p:txBody>
-          <a:bodyPr wrap="square" anchor="t" lIns="0" rIns="0" tIns="0" bIns="0">
+          <a:bodyPr wrap="square" lIns="0" tIns="0" rIns="0" bIns="0" anchor="t">
             <a:spAutoFit/>
           </a:bodyPr>
           <a:lstStyle/>
@@ -9844,7 +9694,7 @@
           <a:noFill/>
         </p:spPr>
         <p:txBody>
-          <a:bodyPr wrap="square" anchor="t" lIns="0" rIns="0" tIns="0" bIns="0">
+          <a:bodyPr wrap="square" lIns="0" tIns="0" rIns="0" bIns="0" anchor="t">
             <a:spAutoFit/>
           </a:bodyPr>
           <a:lstStyle/>
@@ -9883,7 +9733,7 @@
           <a:noFill/>
         </p:spPr>
         <p:txBody>
-          <a:bodyPr wrap="square" anchor="t" lIns="0" rIns="0" tIns="0" bIns="0">
+          <a:bodyPr wrap="square" lIns="0" tIns="0" rIns="0" bIns="0" anchor="t">
             <a:spAutoFit/>
           </a:bodyPr>
           <a:lstStyle/>
@@ -9922,7 +9772,7 @@
           <a:noFill/>
         </p:spPr>
         <p:txBody>
-          <a:bodyPr wrap="square" anchor="t" lIns="0" rIns="0" tIns="0" bIns="0">
+          <a:bodyPr wrap="square" lIns="0" tIns="0" rIns="0" bIns="0" anchor="t">
             <a:spAutoFit/>
           </a:bodyPr>
           <a:lstStyle/>
@@ -9949,11 +9799,23 @@
   <p:clrMapOvr>
     <a:masterClrMapping/>
   </p:clrMapOvr>
+  <mc:AlternateContent xmlns:mc="http://schemas.openxmlformats.org/markup-compatibility/2006">
+    <mc:Choice xmlns:p14="http://schemas.microsoft.com/office/powerpoint/2010/main" Requires="p14">
+      <p:transition spd="med" p14:dur="700">
+        <p:fade thruBlk="1"/>
+      </p:transition>
+    </mc:Choice>
+    <mc:Fallback>
+      <p:transition spd="med">
+        <p:fade thruBlk="1"/>
+      </p:transition>
+    </mc:Fallback>
+  </mc:AlternateContent>
 </p:sld>
 </file>
 
 <file path=ppt/slides/slide14.xml><?xml version="1.0" encoding="utf-8"?>
-<p:sld xmlns:a="http://schemas.openxmlformats.org/drawingml/2006/main" xmlns:p="http://schemas.openxmlformats.org/presentationml/2006/main" xmlns:r="http://schemas.openxmlformats.org/officeDocument/2006/relationships">
+<p:sld xmlns:a="http://schemas.openxmlformats.org/drawingml/2006/main" xmlns:r="http://schemas.openxmlformats.org/officeDocument/2006/relationships" xmlns:p="http://schemas.openxmlformats.org/presentationml/2006/main">
   <p:cSld>
     <p:spTree>
       <p:nvGrpSpPr>
@@ -9961,7 +9823,14 @@
         <p:cNvGrpSpPr/>
         <p:nvPr/>
       </p:nvGrpSpPr>
-      <p:grpSpPr/>
+      <p:grpSpPr>
+        <a:xfrm>
+          <a:off x="0" y="0"/>
+          <a:ext cx="0" cy="0"/>
+          <a:chOff x="0" y="0"/>
+          <a:chExt cx="0" cy="0"/>
+        </a:xfrm>
+      </p:grpSpPr>
       <p:pic>
         <p:nvPicPr>
           <p:cNvPr id="2" name="Picture 1" descr="bg_deep.png"/>
@@ -10003,7 +9872,7 @@
           <a:noFill/>
         </p:spPr>
         <p:txBody>
-          <a:bodyPr wrap="square" anchor="t" lIns="0" rIns="0" tIns="0" bIns="0">
+          <a:bodyPr wrap="square" lIns="0" tIns="0" rIns="0" bIns="0" anchor="t">
             <a:spAutoFit/>
           </a:bodyPr>
           <a:lstStyle/>
@@ -10042,7 +9911,7 @@
           <a:noFill/>
         </p:spPr>
         <p:txBody>
-          <a:bodyPr wrap="square" anchor="t" lIns="0" rIns="0" tIns="0" bIns="0">
+          <a:bodyPr wrap="square" lIns="0" tIns="0" rIns="0" bIns="0" anchor="t">
             <a:spAutoFit/>
           </a:bodyPr>
           <a:lstStyle/>
@@ -10131,6 +10000,7 @@
           <a:lstStyle/>
           <a:p>
             <a:pPr algn="ctr"/>
+            <a:endParaRPr/>
           </a:p>
         </p:txBody>
       </p:sp>
@@ -10151,7 +10021,7 @@
           <a:noFill/>
         </p:spPr>
         <p:txBody>
-          <a:bodyPr wrap="square" anchor="t" lIns="0" rIns="0" tIns="0" bIns="0">
+          <a:bodyPr wrap="square" lIns="0" tIns="0" rIns="0" bIns="0" anchor="t">
             <a:spAutoFit/>
           </a:bodyPr>
           <a:lstStyle/>
@@ -10240,6 +10110,7 @@
           <a:lstStyle/>
           <a:p>
             <a:pPr algn="ctr"/>
+            <a:endParaRPr/>
           </a:p>
         </p:txBody>
       </p:sp>
@@ -10260,7 +10131,7 @@
           <a:noFill/>
         </p:spPr>
         <p:txBody>
-          <a:bodyPr wrap="square" anchor="t" lIns="0" rIns="0" tIns="0" bIns="0">
+          <a:bodyPr wrap="square" lIns="0" tIns="0" rIns="0" bIns="0" anchor="t">
             <a:spAutoFit/>
           </a:bodyPr>
           <a:lstStyle/>
@@ -10299,7 +10170,7 @@
           <a:noFill/>
         </p:spPr>
         <p:txBody>
-          <a:bodyPr wrap="square" anchor="t" lIns="0" rIns="0" tIns="0" bIns="0">
+          <a:bodyPr wrap="square" lIns="0" tIns="0" rIns="0" bIns="0" anchor="t">
             <a:spAutoFit/>
           </a:bodyPr>
           <a:lstStyle/>
@@ -10338,7 +10209,7 @@
           <a:noFill/>
         </p:spPr>
         <p:txBody>
-          <a:bodyPr wrap="square" anchor="t" lIns="0" rIns="0" tIns="0" bIns="0">
+          <a:bodyPr wrap="square" lIns="0" tIns="0" rIns="0" bIns="0" anchor="t">
             <a:spAutoFit/>
           </a:bodyPr>
           <a:lstStyle/>
@@ -10377,7 +10248,7 @@
           <a:noFill/>
         </p:spPr>
         <p:txBody>
-          <a:bodyPr wrap="square" anchor="t" lIns="0" rIns="0" tIns="0" bIns="0">
+          <a:bodyPr wrap="square" lIns="0" tIns="0" rIns="0" bIns="0" anchor="t">
             <a:spAutoFit/>
           </a:bodyPr>
           <a:lstStyle/>
@@ -10404,11 +10275,23 @@
   <p:clrMapOvr>
     <a:masterClrMapping/>
   </p:clrMapOvr>
+  <mc:AlternateContent xmlns:mc="http://schemas.openxmlformats.org/markup-compatibility/2006">
+    <mc:Choice xmlns:p14="http://schemas.microsoft.com/office/powerpoint/2010/main" Requires="p14">
+      <p:transition spd="med" p14:dur="700">
+        <p:fade thruBlk="1"/>
+      </p:transition>
+    </mc:Choice>
+    <mc:Fallback>
+      <p:transition spd="med">
+        <p:fade thruBlk="1"/>
+      </p:transition>
+    </mc:Fallback>
+  </mc:AlternateContent>
 </p:sld>
 </file>
 
 <file path=ppt/slides/slide15.xml><?xml version="1.0" encoding="utf-8"?>
-<p:sld xmlns:a="http://schemas.openxmlformats.org/drawingml/2006/main" xmlns:p="http://schemas.openxmlformats.org/presentationml/2006/main" xmlns:r="http://schemas.openxmlformats.org/officeDocument/2006/relationships">
+<p:sld xmlns:a="http://schemas.openxmlformats.org/drawingml/2006/main" xmlns:r="http://schemas.openxmlformats.org/officeDocument/2006/relationships" xmlns:p="http://schemas.openxmlformats.org/presentationml/2006/main">
   <p:cSld>
     <p:spTree>
       <p:nvGrpSpPr>
@@ -10416,7 +10299,14 @@
         <p:cNvGrpSpPr/>
         <p:nvPr/>
       </p:nvGrpSpPr>
-      <p:grpSpPr/>
+      <p:grpSpPr>
+        <a:xfrm>
+          <a:off x="0" y="0"/>
+          <a:ext cx="0" cy="0"/>
+          <a:chOff x="0" y="0"/>
+          <a:chExt cx="0" cy="0"/>
+        </a:xfrm>
+      </p:grpSpPr>
       <p:pic>
         <p:nvPicPr>
           <p:cNvPr id="2" name="Picture 1" descr="bg_red.png"/>
@@ -10458,7 +10348,7 @@
           <a:noFill/>
         </p:spPr>
         <p:txBody>
-          <a:bodyPr wrap="square" anchor="t" lIns="0" rIns="0" tIns="0" bIns="0">
+          <a:bodyPr wrap="square" lIns="0" tIns="0" rIns="0" bIns="0" anchor="t">
             <a:spAutoFit/>
           </a:bodyPr>
           <a:lstStyle/>
@@ -10497,7 +10387,7 @@
           <a:noFill/>
         </p:spPr>
         <p:txBody>
-          <a:bodyPr wrap="square" anchor="t" lIns="0" rIns="0" tIns="0" bIns="0">
+          <a:bodyPr wrap="square" lIns="0" tIns="0" rIns="0" bIns="0" anchor="t">
             <a:spAutoFit/>
           </a:bodyPr>
           <a:lstStyle/>
@@ -10564,6 +10454,7 @@
           <a:lstStyle/>
           <a:p>
             <a:pPr algn="ctr"/>
+            <a:endParaRPr/>
           </a:p>
         </p:txBody>
       </p:sp>
@@ -10584,7 +10475,7 @@
           <a:noFill/>
         </p:spPr>
         <p:txBody>
-          <a:bodyPr wrap="square" anchor="t" lIns="0" rIns="0" tIns="0" bIns="0">
+          <a:bodyPr wrap="square" lIns="0" tIns="0" rIns="0" bIns="0" anchor="t">
             <a:spAutoFit/>
           </a:bodyPr>
           <a:lstStyle/>
@@ -10623,7 +10514,7 @@
           <a:noFill/>
         </p:spPr>
         <p:txBody>
-          <a:bodyPr wrap="square" anchor="t" lIns="0" rIns="0" tIns="0" bIns="0">
+          <a:bodyPr wrap="square" lIns="0" tIns="0" rIns="0" bIns="0" anchor="t">
             <a:spAutoFit/>
           </a:bodyPr>
           <a:lstStyle/>
@@ -10662,7 +10553,7 @@
           <a:noFill/>
         </p:spPr>
         <p:txBody>
-          <a:bodyPr wrap="square" anchor="t" lIns="0" rIns="0" tIns="0" bIns="0">
+          <a:bodyPr wrap="square" lIns="0" tIns="0" rIns="0" bIns="0" anchor="t">
             <a:spAutoFit/>
           </a:bodyPr>
           <a:lstStyle/>
@@ -10701,7 +10592,7 @@
           <a:noFill/>
         </p:spPr>
         <p:txBody>
-          <a:bodyPr wrap="square" anchor="t" lIns="0" rIns="0" tIns="0" bIns="0">
+          <a:bodyPr wrap="square" lIns="0" tIns="0" rIns="0" bIns="0" anchor="t">
             <a:spAutoFit/>
           </a:bodyPr>
           <a:lstStyle/>
@@ -10740,7 +10631,7 @@
           <a:noFill/>
         </p:spPr>
         <p:txBody>
-          <a:bodyPr wrap="square" anchor="t" lIns="0" rIns="0" tIns="0" bIns="0">
+          <a:bodyPr wrap="square" lIns="0" tIns="0" rIns="0" bIns="0" anchor="t">
             <a:spAutoFit/>
           </a:bodyPr>
           <a:lstStyle/>
@@ -10807,6 +10698,7 @@
           <a:lstStyle/>
           <a:p>
             <a:pPr algn="ctr"/>
+            <a:endParaRPr/>
           </a:p>
         </p:txBody>
       </p:sp>
@@ -10827,7 +10719,7 @@
           <a:noFill/>
         </p:spPr>
         <p:txBody>
-          <a:bodyPr wrap="square" anchor="t" lIns="0" rIns="0" tIns="0" bIns="0">
+          <a:bodyPr wrap="square" lIns="0" tIns="0" rIns="0" bIns="0" anchor="t">
             <a:spAutoFit/>
           </a:bodyPr>
           <a:lstStyle/>
@@ -10866,7 +10758,7 @@
           <a:noFill/>
         </p:spPr>
         <p:txBody>
-          <a:bodyPr wrap="square" anchor="t" lIns="0" rIns="0" tIns="0" bIns="0">
+          <a:bodyPr wrap="square" lIns="0" tIns="0" rIns="0" bIns="0" anchor="t">
             <a:spAutoFit/>
           </a:bodyPr>
           <a:lstStyle/>
@@ -10905,7 +10797,7 @@
           <a:noFill/>
         </p:spPr>
         <p:txBody>
-          <a:bodyPr wrap="square" anchor="t" lIns="0" rIns="0" tIns="0" bIns="0">
+          <a:bodyPr wrap="square" lIns="0" tIns="0" rIns="0" bIns="0" anchor="t">
             <a:spAutoFit/>
           </a:bodyPr>
           <a:lstStyle/>
@@ -10944,7 +10836,7 @@
           <a:noFill/>
         </p:spPr>
         <p:txBody>
-          <a:bodyPr wrap="square" anchor="t" lIns="0" rIns="0" tIns="0" bIns="0">
+          <a:bodyPr wrap="square" lIns="0" tIns="0" rIns="0" bIns="0" anchor="t">
             <a:spAutoFit/>
           </a:bodyPr>
           <a:lstStyle/>
@@ -10983,7 +10875,7 @@
           <a:noFill/>
         </p:spPr>
         <p:txBody>
-          <a:bodyPr wrap="square" anchor="t" lIns="0" rIns="0" tIns="0" bIns="0">
+          <a:bodyPr wrap="square" lIns="0" tIns="0" rIns="0" bIns="0" anchor="t">
             <a:spAutoFit/>
           </a:bodyPr>
           <a:lstStyle/>
@@ -11050,6 +10942,7 @@
           <a:lstStyle/>
           <a:p>
             <a:pPr algn="ctr"/>
+            <a:endParaRPr/>
           </a:p>
         </p:txBody>
       </p:sp>
@@ -11070,7 +10963,7 @@
           <a:noFill/>
         </p:spPr>
         <p:txBody>
-          <a:bodyPr wrap="square" anchor="t" lIns="0" rIns="0" tIns="0" bIns="0">
+          <a:bodyPr wrap="square" lIns="0" tIns="0" rIns="0" bIns="0" anchor="t">
             <a:spAutoFit/>
           </a:bodyPr>
           <a:lstStyle/>
@@ -11109,7 +11002,7 @@
           <a:noFill/>
         </p:spPr>
         <p:txBody>
-          <a:bodyPr wrap="square" anchor="t" lIns="0" rIns="0" tIns="0" bIns="0">
+          <a:bodyPr wrap="square" lIns="0" tIns="0" rIns="0" bIns="0" anchor="t">
             <a:spAutoFit/>
           </a:bodyPr>
           <a:lstStyle/>
@@ -11148,7 +11041,7 @@
           <a:noFill/>
         </p:spPr>
         <p:txBody>
-          <a:bodyPr wrap="square" anchor="t" lIns="0" rIns="0" tIns="0" bIns="0">
+          <a:bodyPr wrap="square" lIns="0" tIns="0" rIns="0" bIns="0" anchor="t">
             <a:spAutoFit/>
           </a:bodyPr>
           <a:lstStyle/>
@@ -11187,7 +11080,7 @@
           <a:noFill/>
         </p:spPr>
         <p:txBody>
-          <a:bodyPr wrap="square" anchor="t" lIns="0" rIns="0" tIns="0" bIns="0">
+          <a:bodyPr wrap="square" lIns="0" tIns="0" rIns="0" bIns="0" anchor="t">
             <a:spAutoFit/>
           </a:bodyPr>
           <a:lstStyle/>
@@ -11226,7 +11119,7 @@
           <a:noFill/>
         </p:spPr>
         <p:txBody>
-          <a:bodyPr wrap="square" anchor="t" lIns="0" rIns="0" tIns="0" bIns="0">
+          <a:bodyPr wrap="square" lIns="0" tIns="0" rIns="0" bIns="0" anchor="t">
             <a:spAutoFit/>
           </a:bodyPr>
           <a:lstStyle/>
@@ -11265,7 +11158,7 @@
           <a:noFill/>
         </p:spPr>
         <p:txBody>
-          <a:bodyPr wrap="square" anchor="t" lIns="0" rIns="0" tIns="0" bIns="0">
+          <a:bodyPr wrap="square" lIns="0" tIns="0" rIns="0" bIns="0" anchor="t">
             <a:spAutoFit/>
           </a:bodyPr>
           <a:lstStyle/>
@@ -11320,7 +11213,7 @@
           <a:noFill/>
         </p:spPr>
         <p:txBody>
-          <a:bodyPr wrap="square" anchor="t" lIns="0" rIns="0" tIns="0" bIns="0">
+          <a:bodyPr wrap="square" lIns="0" tIns="0" rIns="0" bIns="0" anchor="t">
             <a:spAutoFit/>
           </a:bodyPr>
           <a:lstStyle/>
@@ -11359,7 +11252,7 @@
           <a:noFill/>
         </p:spPr>
         <p:txBody>
-          <a:bodyPr wrap="square" anchor="t" lIns="0" rIns="0" tIns="0" bIns="0">
+          <a:bodyPr wrap="square" lIns="0" tIns="0" rIns="0" bIns="0" anchor="t">
             <a:spAutoFit/>
           </a:bodyPr>
           <a:lstStyle/>
@@ -11386,11 +11279,23 @@
   <p:clrMapOvr>
     <a:masterClrMapping/>
   </p:clrMapOvr>
+  <mc:AlternateContent xmlns:mc="http://schemas.openxmlformats.org/markup-compatibility/2006">
+    <mc:Choice xmlns:p14="http://schemas.microsoft.com/office/powerpoint/2010/main" Requires="p14">
+      <p:transition spd="med" p14:dur="700">
+        <p:fade thruBlk="1"/>
+      </p:transition>
+    </mc:Choice>
+    <mc:Fallback>
+      <p:transition spd="med">
+        <p:fade thruBlk="1"/>
+      </p:transition>
+    </mc:Fallback>
+  </mc:AlternateContent>
 </p:sld>
 </file>
 
 <file path=ppt/slides/slide16.xml><?xml version="1.0" encoding="utf-8"?>
-<p:sld xmlns:a="http://schemas.openxmlformats.org/drawingml/2006/main" xmlns:p="http://schemas.openxmlformats.org/presentationml/2006/main" xmlns:r="http://schemas.openxmlformats.org/officeDocument/2006/relationships">
+<p:sld xmlns:a="http://schemas.openxmlformats.org/drawingml/2006/main" xmlns:r="http://schemas.openxmlformats.org/officeDocument/2006/relationships" xmlns:p="http://schemas.openxmlformats.org/presentationml/2006/main">
   <p:cSld>
     <p:spTree>
       <p:nvGrpSpPr>
@@ -11398,7 +11303,14 @@
         <p:cNvGrpSpPr/>
         <p:nvPr/>
       </p:nvGrpSpPr>
-      <p:grpSpPr/>
+      <p:grpSpPr>
+        <a:xfrm>
+          <a:off x="0" y="0"/>
+          <a:ext cx="0" cy="0"/>
+          <a:chOff x="0" y="0"/>
+          <a:chExt cx="0" cy="0"/>
+        </a:xfrm>
+      </p:grpSpPr>
       <p:pic>
         <p:nvPicPr>
           <p:cNvPr id="2" name="Picture 1" descr="bg_deep.png"/>
@@ -11440,7 +11352,7 @@
           <a:noFill/>
         </p:spPr>
         <p:txBody>
-          <a:bodyPr wrap="square" anchor="t" lIns="0" rIns="0" tIns="0" bIns="0">
+          <a:bodyPr wrap="square" lIns="0" tIns="0" rIns="0" bIns="0" anchor="t">
             <a:spAutoFit/>
           </a:bodyPr>
           <a:lstStyle/>
@@ -11479,7 +11391,7 @@
           <a:noFill/>
         </p:spPr>
         <p:txBody>
-          <a:bodyPr wrap="square" anchor="t" lIns="0" rIns="0" tIns="0" bIns="0">
+          <a:bodyPr wrap="square" lIns="0" tIns="0" rIns="0" bIns="0" anchor="t">
             <a:spAutoFit/>
           </a:bodyPr>
           <a:lstStyle/>
@@ -11542,7 +11454,7 @@
           </a:fontRef>
         </p:style>
         <p:txBody>
-          <a:bodyPr rtlCol="0" anchor="ctr" wrap="square" lIns="73152" rIns="73152" tIns="36576" bIns="36576"/>
+          <a:bodyPr wrap="square" lIns="73152" tIns="36576" rIns="73152" bIns="36576" rtlCol="0" anchor="ctr"/>
           <a:lstStyle/>
           <a:p>
             <a:pPr algn="ctr"/>
@@ -11652,7 +11564,7 @@
           </a:fontRef>
         </p:style>
         <p:txBody>
-          <a:bodyPr rtlCol="0" anchor="ctr" wrap="square" lIns="73152" rIns="73152" tIns="36576" bIns="36576"/>
+          <a:bodyPr wrap="square" lIns="73152" tIns="36576" rIns="73152" bIns="36576" rtlCol="0" anchor="ctr"/>
           <a:lstStyle/>
           <a:p>
             <a:pPr algn="ctr"/>
@@ -11762,7 +11674,7 @@
           </a:fontRef>
         </p:style>
         <p:txBody>
-          <a:bodyPr rtlCol="0" anchor="ctr" wrap="square" lIns="73152" rIns="73152" tIns="36576" bIns="36576"/>
+          <a:bodyPr wrap="square" lIns="73152" tIns="36576" rIns="73152" bIns="36576" rtlCol="0" anchor="ctr"/>
           <a:lstStyle/>
           <a:p>
             <a:pPr algn="ctr"/>
@@ -11872,7 +11784,7 @@
           </a:fontRef>
         </p:style>
         <p:txBody>
-          <a:bodyPr rtlCol="0" anchor="ctr" wrap="square" lIns="73152" rIns="73152" tIns="36576" bIns="36576"/>
+          <a:bodyPr wrap="square" lIns="73152" tIns="36576" rIns="73152" bIns="36576" rtlCol="0" anchor="ctr"/>
           <a:lstStyle/>
           <a:p>
             <a:pPr algn="ctr"/>
@@ -11982,7 +11894,7 @@
           </a:fontRef>
         </p:style>
         <p:txBody>
-          <a:bodyPr rtlCol="0" anchor="ctr" wrap="square" lIns="73152" rIns="73152" tIns="36576" bIns="36576"/>
+          <a:bodyPr wrap="square" lIns="73152" tIns="36576" rIns="73152" bIns="36576" rtlCol="0" anchor="ctr"/>
           <a:lstStyle/>
           <a:p>
             <a:pPr algn="ctr"/>
@@ -12092,7 +12004,7 @@
           </a:fontRef>
         </p:style>
         <p:txBody>
-          <a:bodyPr rtlCol="0" anchor="ctr" wrap="square" lIns="73152" rIns="73152" tIns="36576" bIns="36576"/>
+          <a:bodyPr wrap="square" lIns="73152" tIns="36576" rIns="73152" bIns="36576" rtlCol="0" anchor="ctr"/>
           <a:lstStyle/>
           <a:p>
             <a:pPr algn="ctr"/>
@@ -12202,7 +12114,7 @@
           </a:fontRef>
         </p:style>
         <p:txBody>
-          <a:bodyPr rtlCol="0" anchor="ctr" wrap="square" lIns="73152" rIns="73152" tIns="36576" bIns="36576"/>
+          <a:bodyPr wrap="square" lIns="73152" tIns="36576" rIns="73152" bIns="36576" rtlCol="0" anchor="ctr"/>
           <a:lstStyle/>
           <a:p>
             <a:pPr algn="ctr"/>
@@ -12251,7 +12163,7 @@
           <a:noFill/>
         </p:spPr>
         <p:txBody>
-          <a:bodyPr wrap="square" anchor="t" lIns="0" rIns="0" tIns="0" bIns="0">
+          <a:bodyPr wrap="square" lIns="0" tIns="0" rIns="0" bIns="0" anchor="t">
             <a:spAutoFit/>
           </a:bodyPr>
           <a:lstStyle/>
@@ -12290,7 +12202,7 @@
           <a:noFill/>
         </p:spPr>
         <p:txBody>
-          <a:bodyPr wrap="square" anchor="t" lIns="0" rIns="0" tIns="0" bIns="0">
+          <a:bodyPr wrap="square" lIns="0" tIns="0" rIns="0" bIns="0" anchor="t">
             <a:spAutoFit/>
           </a:bodyPr>
           <a:lstStyle/>
@@ -12329,7 +12241,7 @@
           <a:noFill/>
         </p:spPr>
         <p:txBody>
-          <a:bodyPr wrap="square" anchor="t" lIns="0" rIns="0" tIns="0" bIns="0">
+          <a:bodyPr wrap="square" lIns="0" tIns="0" rIns="0" bIns="0" anchor="t">
             <a:spAutoFit/>
           </a:bodyPr>
           <a:lstStyle/>
@@ -12368,7 +12280,7 @@
           <a:noFill/>
         </p:spPr>
         <p:txBody>
-          <a:bodyPr wrap="square" anchor="t" lIns="0" rIns="0" tIns="0" bIns="0">
+          <a:bodyPr wrap="square" lIns="0" tIns="0" rIns="0" bIns="0" anchor="t">
             <a:spAutoFit/>
           </a:bodyPr>
           <a:lstStyle/>
@@ -12407,7 +12319,7 @@
           <a:noFill/>
         </p:spPr>
         <p:txBody>
-          <a:bodyPr wrap="square" anchor="t" lIns="0" rIns="0" tIns="0" bIns="0">
+          <a:bodyPr wrap="square" lIns="0" tIns="0" rIns="0" bIns="0" anchor="t">
             <a:spAutoFit/>
           </a:bodyPr>
           <a:lstStyle/>
@@ -12446,7 +12358,7 @@
           <a:noFill/>
         </p:spPr>
         <p:txBody>
-          <a:bodyPr wrap="square" anchor="t" lIns="0" rIns="0" tIns="0" bIns="0">
+          <a:bodyPr wrap="square" lIns="0" tIns="0" rIns="0" bIns="0" anchor="t">
             <a:spAutoFit/>
           </a:bodyPr>
           <a:lstStyle/>
@@ -12485,7 +12397,7 @@
           <a:noFill/>
         </p:spPr>
         <p:txBody>
-          <a:bodyPr wrap="square" anchor="t" lIns="0" rIns="0" tIns="0" bIns="0">
+          <a:bodyPr wrap="square" lIns="0" tIns="0" rIns="0" bIns="0" anchor="t">
             <a:spAutoFit/>
           </a:bodyPr>
           <a:lstStyle/>
@@ -12524,7 +12436,7 @@
           <a:noFill/>
         </p:spPr>
         <p:txBody>
-          <a:bodyPr wrap="square" anchor="t" lIns="0" rIns="0" tIns="0" bIns="0">
+          <a:bodyPr wrap="square" lIns="0" tIns="0" rIns="0" bIns="0" anchor="t">
             <a:spAutoFit/>
           </a:bodyPr>
           <a:lstStyle/>
@@ -12563,7 +12475,7 @@
           <a:noFill/>
         </p:spPr>
         <p:txBody>
-          <a:bodyPr wrap="square" anchor="t" lIns="0" rIns="0" tIns="0" bIns="0">
+          <a:bodyPr wrap="square" lIns="0" tIns="0" rIns="0" bIns="0" anchor="t">
             <a:spAutoFit/>
           </a:bodyPr>
           <a:lstStyle/>
@@ -12602,7 +12514,7 @@
           <a:noFill/>
         </p:spPr>
         <p:txBody>
-          <a:bodyPr wrap="square" anchor="t" lIns="0" rIns="0" tIns="0" bIns="0">
+          <a:bodyPr wrap="square" lIns="0" tIns="0" rIns="0" bIns="0" anchor="t">
             <a:spAutoFit/>
           </a:bodyPr>
           <a:lstStyle/>
@@ -12641,7 +12553,7 @@
           <a:noFill/>
         </p:spPr>
         <p:txBody>
-          <a:bodyPr wrap="square" anchor="t" lIns="0" rIns="0" tIns="0" bIns="0">
+          <a:bodyPr wrap="square" lIns="0" tIns="0" rIns="0" bIns="0" anchor="t">
             <a:spAutoFit/>
           </a:bodyPr>
           <a:lstStyle/>
@@ -12680,7 +12592,7 @@
           <a:noFill/>
         </p:spPr>
         <p:txBody>
-          <a:bodyPr wrap="square" anchor="t" lIns="0" rIns="0" tIns="0" bIns="0">
+          <a:bodyPr wrap="square" lIns="0" tIns="0" rIns="0" bIns="0" anchor="t">
             <a:spAutoFit/>
           </a:bodyPr>
           <a:lstStyle/>
@@ -12707,11 +12619,23 @@
   <p:clrMapOvr>
     <a:masterClrMapping/>
   </p:clrMapOvr>
+  <mc:AlternateContent xmlns:mc="http://schemas.openxmlformats.org/markup-compatibility/2006">
+    <mc:Choice xmlns:p14="http://schemas.microsoft.com/office/powerpoint/2010/main" Requires="p14">
+      <p:transition spd="med" p14:dur="700">
+        <p:fade thruBlk="1"/>
+      </p:transition>
+    </mc:Choice>
+    <mc:Fallback>
+      <p:transition spd="med">
+        <p:fade thruBlk="1"/>
+      </p:transition>
+    </mc:Fallback>
+  </mc:AlternateContent>
 </p:sld>
 </file>
 
 <file path=ppt/slides/slide17.xml><?xml version="1.0" encoding="utf-8"?>
-<p:sld xmlns:a="http://schemas.openxmlformats.org/drawingml/2006/main" xmlns:p="http://schemas.openxmlformats.org/presentationml/2006/main" xmlns:r="http://schemas.openxmlformats.org/officeDocument/2006/relationships">
+<p:sld xmlns:a="http://schemas.openxmlformats.org/drawingml/2006/main" xmlns:r="http://schemas.openxmlformats.org/officeDocument/2006/relationships" xmlns:p="http://schemas.openxmlformats.org/presentationml/2006/main">
   <p:cSld>
     <p:spTree>
       <p:nvGrpSpPr>
@@ -12719,7 +12643,14 @@
         <p:cNvGrpSpPr/>
         <p:nvPr/>
       </p:nvGrpSpPr>
-      <p:grpSpPr/>
+      <p:grpSpPr>
+        <a:xfrm>
+          <a:off x="0" y="0"/>
+          <a:ext cx="0" cy="0"/>
+          <a:chOff x="0" y="0"/>
+          <a:chExt cx="0" cy="0"/>
+        </a:xfrm>
+      </p:grpSpPr>
       <p:pic>
         <p:nvPicPr>
           <p:cNvPr id="2" name="Picture 1" descr="bg_deep.png"/>
@@ -12761,7 +12692,7 @@
           <a:noFill/>
         </p:spPr>
         <p:txBody>
-          <a:bodyPr wrap="square" anchor="t" lIns="0" rIns="0" tIns="0" bIns="0">
+          <a:bodyPr wrap="square" lIns="0" tIns="0" rIns="0" bIns="0" anchor="t">
             <a:spAutoFit/>
           </a:bodyPr>
           <a:lstStyle/>
@@ -12800,7 +12731,7 @@
           <a:noFill/>
         </p:spPr>
         <p:txBody>
-          <a:bodyPr wrap="square" anchor="t" lIns="0" rIns="0" tIns="0" bIns="0">
+          <a:bodyPr wrap="square" lIns="0" tIns="0" rIns="0" bIns="0" anchor="t">
             <a:spAutoFit/>
           </a:bodyPr>
           <a:lstStyle/>
@@ -12839,7 +12770,7 @@
           <a:noFill/>
         </p:spPr>
         <p:txBody>
-          <a:bodyPr wrap="square" anchor="t" lIns="0" rIns="0" tIns="0" bIns="0">
+          <a:bodyPr wrap="square" lIns="0" tIns="0" rIns="0" bIns="0" anchor="t">
             <a:spAutoFit/>
           </a:bodyPr>
           <a:lstStyle/>
@@ -12902,7 +12833,7 @@
           </a:fontRef>
         </p:style>
         <p:txBody>
-          <a:bodyPr rtlCol="0" anchor="ctr" wrap="square" lIns="73152" rIns="73152" tIns="36576" bIns="36576"/>
+          <a:bodyPr wrap="square" lIns="73152" tIns="36576" rIns="73152" bIns="36576" rtlCol="0" anchor="ctr"/>
           <a:lstStyle/>
           <a:p>
             <a:pPr algn="ctr"/>
@@ -12976,7 +12907,7 @@
           </a:fontRef>
         </p:style>
         <p:txBody>
-          <a:bodyPr rtlCol="0" anchor="ctr" wrap="square" lIns="73152" rIns="73152" tIns="36576" bIns="36576"/>
+          <a:bodyPr wrap="square" lIns="73152" tIns="36576" rIns="73152" bIns="36576" rtlCol="0" anchor="ctr"/>
           <a:lstStyle/>
           <a:p>
             <a:pPr algn="ctr"/>
@@ -13050,7 +12981,7 @@
           </a:fontRef>
         </p:style>
         <p:txBody>
-          <a:bodyPr rtlCol="0" anchor="ctr" wrap="square" lIns="73152" rIns="73152" tIns="36576" bIns="36576"/>
+          <a:bodyPr wrap="square" lIns="73152" tIns="36576" rIns="73152" bIns="36576" rtlCol="0" anchor="ctr"/>
           <a:lstStyle/>
           <a:p>
             <a:pPr algn="ctr"/>
@@ -13124,7 +13055,7 @@
           </a:fontRef>
         </p:style>
         <p:txBody>
-          <a:bodyPr rtlCol="0" anchor="ctr" wrap="square" lIns="73152" rIns="73152" tIns="36576" bIns="36576"/>
+          <a:bodyPr wrap="square" lIns="73152" tIns="36576" rIns="73152" bIns="36576" rtlCol="0" anchor="ctr"/>
           <a:lstStyle/>
           <a:p>
             <a:pPr algn="ctr"/>
@@ -13198,7 +13129,7 @@
           </a:fontRef>
         </p:style>
         <p:txBody>
-          <a:bodyPr rtlCol="0" anchor="ctr" wrap="square" lIns="73152" rIns="73152" tIns="36576" bIns="36576"/>
+          <a:bodyPr wrap="square" lIns="73152" tIns="36576" rIns="73152" bIns="36576" rtlCol="0" anchor="ctr"/>
           <a:lstStyle/>
           <a:p>
             <a:pPr algn="ctr"/>
@@ -13272,7 +13203,7 @@
           </a:fontRef>
         </p:style>
         <p:txBody>
-          <a:bodyPr rtlCol="0" anchor="ctr" wrap="square" lIns="73152" rIns="73152" tIns="36576" bIns="36576"/>
+          <a:bodyPr wrap="square" lIns="73152" tIns="36576" rIns="73152" bIns="36576" rtlCol="0" anchor="ctr"/>
           <a:lstStyle/>
           <a:p>
             <a:pPr algn="ctr"/>
@@ -13346,7 +13277,7 @@
           </a:fontRef>
         </p:style>
         <p:txBody>
-          <a:bodyPr rtlCol="0" anchor="ctr" wrap="square" lIns="73152" rIns="73152" tIns="36576" bIns="36576"/>
+          <a:bodyPr wrap="square" lIns="73152" tIns="36576" rIns="73152" bIns="36576" rtlCol="0" anchor="ctr"/>
           <a:lstStyle/>
           <a:p>
             <a:pPr algn="ctr"/>
@@ -13424,6 +13355,7 @@
           <a:lstStyle/>
           <a:p>
             <a:pPr algn="ctr"/>
+            <a:endParaRPr/>
           </a:p>
         </p:txBody>
       </p:sp>
@@ -13444,7 +13376,7 @@
           <a:noFill/>
         </p:spPr>
         <p:txBody>
-          <a:bodyPr wrap="square" anchor="t" lIns="0" rIns="0" tIns="0" bIns="0">
+          <a:bodyPr wrap="square" lIns="0" tIns="0" rIns="0" bIns="0" anchor="t">
             <a:spAutoFit/>
           </a:bodyPr>
           <a:lstStyle/>
@@ -13499,7 +13431,7 @@
           <a:noFill/>
         </p:spPr>
         <p:txBody>
-          <a:bodyPr wrap="square" anchor="t" lIns="0" rIns="0" tIns="0" bIns="0">
+          <a:bodyPr wrap="square" lIns="0" tIns="0" rIns="0" bIns="0" anchor="t">
             <a:spAutoFit/>
           </a:bodyPr>
           <a:lstStyle/>
@@ -13570,7 +13502,7 @@
           <a:noFill/>
         </p:spPr>
         <p:txBody>
-          <a:bodyPr wrap="square" anchor="t" lIns="0" rIns="0" tIns="0" bIns="0">
+          <a:bodyPr wrap="square" lIns="0" tIns="0" rIns="0" bIns="0" anchor="t">
             <a:spAutoFit/>
           </a:bodyPr>
           <a:lstStyle/>
@@ -13609,7 +13541,7 @@
           <a:noFill/>
         </p:spPr>
         <p:txBody>
-          <a:bodyPr wrap="square" anchor="t" lIns="0" rIns="0" tIns="0" bIns="0">
+          <a:bodyPr wrap="square" lIns="0" tIns="0" rIns="0" bIns="0" anchor="t">
             <a:spAutoFit/>
           </a:bodyPr>
           <a:lstStyle/>
@@ -13636,11 +13568,23 @@
   <p:clrMapOvr>
     <a:masterClrMapping/>
   </p:clrMapOvr>
+  <mc:AlternateContent xmlns:mc="http://schemas.openxmlformats.org/markup-compatibility/2006">
+    <mc:Choice xmlns:p14="http://schemas.microsoft.com/office/powerpoint/2010/main" Requires="p14">
+      <p:transition spd="med" p14:dur="700">
+        <p:fade thruBlk="1"/>
+      </p:transition>
+    </mc:Choice>
+    <mc:Fallback>
+      <p:transition spd="med">
+        <p:fade thruBlk="1"/>
+      </p:transition>
+    </mc:Fallback>
+  </mc:AlternateContent>
 </p:sld>
 </file>
 
 <file path=ppt/slides/slide18.xml><?xml version="1.0" encoding="utf-8"?>
-<p:sld xmlns:a="http://schemas.openxmlformats.org/drawingml/2006/main" xmlns:p="http://schemas.openxmlformats.org/presentationml/2006/main" xmlns:r="http://schemas.openxmlformats.org/officeDocument/2006/relationships">
+<p:sld xmlns:a="http://schemas.openxmlformats.org/drawingml/2006/main" xmlns:r="http://schemas.openxmlformats.org/officeDocument/2006/relationships" xmlns:p="http://schemas.openxmlformats.org/presentationml/2006/main">
   <p:cSld>
     <p:spTree>
       <p:nvGrpSpPr>
@@ -13648,7 +13592,14 @@
         <p:cNvGrpSpPr/>
         <p:nvPr/>
       </p:nvGrpSpPr>
-      <p:grpSpPr/>
+      <p:grpSpPr>
+        <a:xfrm>
+          <a:off x="0" y="0"/>
+          <a:ext cx="0" cy="0"/>
+          <a:chOff x="0" y="0"/>
+          <a:chExt cx="0" cy="0"/>
+        </a:xfrm>
+      </p:grpSpPr>
       <p:pic>
         <p:nvPicPr>
           <p:cNvPr id="2" name="Picture 1" descr="bg_deep.png"/>
@@ -13690,7 +13641,7 @@
           <a:noFill/>
         </p:spPr>
         <p:txBody>
-          <a:bodyPr wrap="square" anchor="t" lIns="0" rIns="0" tIns="0" bIns="0">
+          <a:bodyPr wrap="square" lIns="0" tIns="0" rIns="0" bIns="0" anchor="t">
             <a:spAutoFit/>
           </a:bodyPr>
           <a:lstStyle/>
@@ -13729,7 +13680,7 @@
           <a:noFill/>
         </p:spPr>
         <p:txBody>
-          <a:bodyPr wrap="square" anchor="t" lIns="0" rIns="0" tIns="0" bIns="0">
+          <a:bodyPr wrap="square" lIns="0" tIns="0" rIns="0" bIns="0" anchor="t">
             <a:spAutoFit/>
           </a:bodyPr>
           <a:lstStyle/>
@@ -13768,7 +13719,7 @@
           <a:noFill/>
         </p:spPr>
         <p:txBody>
-          <a:bodyPr wrap="square" anchor="t" lIns="0" rIns="0" tIns="0" bIns="0">
+          <a:bodyPr wrap="square" lIns="0" tIns="0" rIns="0" bIns="0" anchor="t">
             <a:spAutoFit/>
           </a:bodyPr>
           <a:lstStyle/>
@@ -13835,6 +13786,7 @@
           <a:lstStyle/>
           <a:p>
             <a:pPr algn="ctr"/>
+            <a:endParaRPr/>
           </a:p>
         </p:txBody>
       </p:sp>
@@ -13855,7 +13807,7 @@
           <a:noFill/>
         </p:spPr>
         <p:txBody>
-          <a:bodyPr wrap="square" anchor="t" lIns="0" rIns="0" tIns="0" bIns="0">
+          <a:bodyPr wrap="square" lIns="0" tIns="0" rIns="0" bIns="0" anchor="t">
             <a:spAutoFit/>
           </a:bodyPr>
           <a:lstStyle/>
@@ -13894,7 +13846,7 @@
           <a:noFill/>
         </p:spPr>
         <p:txBody>
-          <a:bodyPr wrap="square" anchor="t" lIns="0" rIns="0" tIns="0" bIns="0">
+          <a:bodyPr wrap="square" lIns="0" tIns="0" rIns="0" bIns="0" anchor="t">
             <a:spAutoFit/>
           </a:bodyPr>
           <a:lstStyle/>
@@ -13961,6 +13913,7 @@
           <a:lstStyle/>
           <a:p>
             <a:pPr algn="ctr"/>
+            <a:endParaRPr/>
           </a:p>
         </p:txBody>
       </p:sp>
@@ -13981,7 +13934,7 @@
           <a:noFill/>
         </p:spPr>
         <p:txBody>
-          <a:bodyPr wrap="square" anchor="t" lIns="0" rIns="0" tIns="0" bIns="0">
+          <a:bodyPr wrap="square" lIns="0" tIns="0" rIns="0" bIns="0" anchor="t">
             <a:spAutoFit/>
           </a:bodyPr>
           <a:lstStyle/>
@@ -14020,7 +13973,7 @@
           <a:noFill/>
         </p:spPr>
         <p:txBody>
-          <a:bodyPr wrap="square" anchor="t" lIns="0" rIns="0" tIns="0" bIns="0">
+          <a:bodyPr wrap="square" lIns="0" tIns="0" rIns="0" bIns="0" anchor="t">
             <a:spAutoFit/>
           </a:bodyPr>
           <a:lstStyle/>
@@ -14087,6 +14040,7 @@
           <a:lstStyle/>
           <a:p>
             <a:pPr algn="ctr"/>
+            <a:endParaRPr/>
           </a:p>
         </p:txBody>
       </p:sp>
@@ -14107,7 +14061,7 @@
           <a:noFill/>
         </p:spPr>
         <p:txBody>
-          <a:bodyPr wrap="square" anchor="t" lIns="0" rIns="0" tIns="0" bIns="0">
+          <a:bodyPr wrap="square" lIns="0" tIns="0" rIns="0" bIns="0" anchor="t">
             <a:spAutoFit/>
           </a:bodyPr>
           <a:lstStyle/>
@@ -14146,7 +14100,7 @@
           <a:noFill/>
         </p:spPr>
         <p:txBody>
-          <a:bodyPr wrap="square" anchor="t" lIns="0" rIns="0" tIns="0" bIns="0">
+          <a:bodyPr wrap="square" lIns="0" tIns="0" rIns="0" bIns="0" anchor="t">
             <a:spAutoFit/>
           </a:bodyPr>
           <a:lstStyle/>
@@ -14213,6 +14167,7 @@
           <a:lstStyle/>
           <a:p>
             <a:pPr algn="ctr"/>
+            <a:endParaRPr/>
           </a:p>
         </p:txBody>
       </p:sp>
@@ -14233,7 +14188,7 @@
           <a:noFill/>
         </p:spPr>
         <p:txBody>
-          <a:bodyPr wrap="square" anchor="t" lIns="0" rIns="0" tIns="0" bIns="0">
+          <a:bodyPr wrap="square" lIns="0" tIns="0" rIns="0" bIns="0" anchor="t">
             <a:spAutoFit/>
           </a:bodyPr>
           <a:lstStyle/>
@@ -14272,7 +14227,7 @@
           <a:noFill/>
         </p:spPr>
         <p:txBody>
-          <a:bodyPr wrap="square" anchor="t" lIns="0" rIns="0" tIns="0" bIns="0">
+          <a:bodyPr wrap="square" lIns="0" tIns="0" rIns="0" bIns="0" anchor="t">
             <a:spAutoFit/>
           </a:bodyPr>
           <a:lstStyle/>
@@ -14339,6 +14294,7 @@
           <a:lstStyle/>
           <a:p>
             <a:pPr algn="ctr"/>
+            <a:endParaRPr/>
           </a:p>
         </p:txBody>
       </p:sp>
@@ -14359,7 +14315,7 @@
           <a:noFill/>
         </p:spPr>
         <p:txBody>
-          <a:bodyPr wrap="square" anchor="t" lIns="0" rIns="0" tIns="0" bIns="0">
+          <a:bodyPr wrap="square" lIns="0" tIns="0" rIns="0" bIns="0" anchor="t">
             <a:spAutoFit/>
           </a:bodyPr>
           <a:lstStyle/>
@@ -14398,7 +14354,7 @@
           <a:noFill/>
         </p:spPr>
         <p:txBody>
-          <a:bodyPr wrap="square" anchor="t" lIns="0" rIns="0" tIns="0" bIns="0">
+          <a:bodyPr wrap="square" lIns="0" tIns="0" rIns="0" bIns="0" anchor="t">
             <a:spAutoFit/>
           </a:bodyPr>
           <a:lstStyle/>
@@ -14465,6 +14421,7 @@
           <a:lstStyle/>
           <a:p>
             <a:pPr algn="ctr"/>
+            <a:endParaRPr/>
           </a:p>
         </p:txBody>
       </p:sp>
@@ -14485,7 +14442,7 @@
           <a:noFill/>
         </p:spPr>
         <p:txBody>
-          <a:bodyPr wrap="square" anchor="t" lIns="0" rIns="0" tIns="0" bIns="0">
+          <a:bodyPr wrap="square" lIns="0" tIns="0" rIns="0" bIns="0" anchor="t">
             <a:spAutoFit/>
           </a:bodyPr>
           <a:lstStyle/>
@@ -14524,7 +14481,7 @@
           <a:noFill/>
         </p:spPr>
         <p:txBody>
-          <a:bodyPr wrap="square" anchor="t" lIns="0" rIns="0" tIns="0" bIns="0">
+          <a:bodyPr wrap="square" lIns="0" tIns="0" rIns="0" bIns="0" anchor="t">
             <a:spAutoFit/>
           </a:bodyPr>
           <a:lstStyle/>
@@ -14563,7 +14520,7 @@
           <a:noFill/>
         </p:spPr>
         <p:txBody>
-          <a:bodyPr wrap="square" anchor="t" lIns="0" rIns="0" tIns="0" bIns="0">
+          <a:bodyPr wrap="square" lIns="0" tIns="0" rIns="0" bIns="0" anchor="t">
             <a:spAutoFit/>
           </a:bodyPr>
           <a:lstStyle/>
@@ -14602,7 +14559,7 @@
           <a:noFill/>
         </p:spPr>
         <p:txBody>
-          <a:bodyPr wrap="square" anchor="t" lIns="0" rIns="0" tIns="0" bIns="0">
+          <a:bodyPr wrap="square" lIns="0" tIns="0" rIns="0" bIns="0" anchor="t">
             <a:spAutoFit/>
           </a:bodyPr>
           <a:lstStyle/>
@@ -14641,7 +14598,7 @@
           <a:noFill/>
         </p:spPr>
         <p:txBody>
-          <a:bodyPr wrap="square" anchor="t" lIns="0" rIns="0" tIns="0" bIns="0">
+          <a:bodyPr wrap="square" lIns="0" tIns="0" rIns="0" bIns="0" anchor="t">
             <a:spAutoFit/>
           </a:bodyPr>
           <a:lstStyle/>
@@ -14680,7 +14637,7 @@
           <a:noFill/>
         </p:spPr>
         <p:txBody>
-          <a:bodyPr wrap="square" anchor="t" lIns="0" rIns="0" tIns="0" bIns="0">
+          <a:bodyPr wrap="square" lIns="0" tIns="0" rIns="0" bIns="0" anchor="t">
             <a:spAutoFit/>
           </a:bodyPr>
           <a:lstStyle/>
@@ -14719,7 +14676,7 @@
           <a:noFill/>
         </p:spPr>
         <p:txBody>
-          <a:bodyPr wrap="square" anchor="t" lIns="0" rIns="0" tIns="0" bIns="0">
+          <a:bodyPr wrap="square" lIns="0" tIns="0" rIns="0" bIns="0" anchor="t">
             <a:spAutoFit/>
           </a:bodyPr>
           <a:lstStyle/>
@@ -14758,7 +14715,7 @@
           <a:noFill/>
         </p:spPr>
         <p:txBody>
-          <a:bodyPr wrap="square" anchor="t" lIns="0" rIns="0" tIns="0" bIns="0">
+          <a:bodyPr wrap="square" lIns="0" tIns="0" rIns="0" bIns="0" anchor="t">
             <a:spAutoFit/>
           </a:bodyPr>
           <a:lstStyle/>
@@ -14797,7 +14754,7 @@
           <a:noFill/>
         </p:spPr>
         <p:txBody>
-          <a:bodyPr wrap="square" anchor="t" lIns="0" rIns="0" tIns="0" bIns="0">
+          <a:bodyPr wrap="square" lIns="0" tIns="0" rIns="0" bIns="0" anchor="t">
             <a:spAutoFit/>
           </a:bodyPr>
           <a:lstStyle/>
@@ -14836,7 +14793,7 @@
           <a:noFill/>
         </p:spPr>
         <p:txBody>
-          <a:bodyPr wrap="square" anchor="t" lIns="0" rIns="0" tIns="0" bIns="0">
+          <a:bodyPr wrap="square" lIns="0" tIns="0" rIns="0" bIns="0" anchor="t">
             <a:spAutoFit/>
           </a:bodyPr>
           <a:lstStyle/>
@@ -14875,7 +14832,7 @@
           <a:noFill/>
         </p:spPr>
         <p:txBody>
-          <a:bodyPr wrap="square" anchor="t" lIns="0" rIns="0" tIns="0" bIns="0">
+          <a:bodyPr wrap="square" lIns="0" tIns="0" rIns="0" bIns="0" anchor="t">
             <a:spAutoFit/>
           </a:bodyPr>
           <a:lstStyle/>
@@ -14914,7 +14871,7 @@
           <a:noFill/>
         </p:spPr>
         <p:txBody>
-          <a:bodyPr wrap="square" anchor="t" lIns="0" rIns="0" tIns="0" bIns="0">
+          <a:bodyPr wrap="square" lIns="0" tIns="0" rIns="0" bIns="0" anchor="t">
             <a:spAutoFit/>
           </a:bodyPr>
           <a:lstStyle/>
@@ -14953,7 +14910,7 @@
           <a:noFill/>
         </p:spPr>
         <p:txBody>
-          <a:bodyPr wrap="square" anchor="t" lIns="0" rIns="0" tIns="0" bIns="0">
+          <a:bodyPr wrap="square" lIns="0" tIns="0" rIns="0" bIns="0" anchor="t">
             <a:spAutoFit/>
           </a:bodyPr>
           <a:lstStyle/>
@@ -14992,7 +14949,7 @@
           <a:noFill/>
         </p:spPr>
         <p:txBody>
-          <a:bodyPr wrap="square" anchor="t" lIns="0" rIns="0" tIns="0" bIns="0">
+          <a:bodyPr wrap="square" lIns="0" tIns="0" rIns="0" bIns="0" anchor="t">
             <a:spAutoFit/>
           </a:bodyPr>
           <a:lstStyle/>
@@ -15019,11 +14976,23 @@
   <p:clrMapOvr>
     <a:masterClrMapping/>
   </p:clrMapOvr>
+  <mc:AlternateContent xmlns:mc="http://schemas.openxmlformats.org/markup-compatibility/2006">
+    <mc:Choice xmlns:p14="http://schemas.microsoft.com/office/powerpoint/2010/main" Requires="p14">
+      <p:transition spd="med" p14:dur="700">
+        <p:fade thruBlk="1"/>
+      </p:transition>
+    </mc:Choice>
+    <mc:Fallback>
+      <p:transition spd="med">
+        <p:fade thruBlk="1"/>
+      </p:transition>
+    </mc:Fallback>
+  </mc:AlternateContent>
 </p:sld>
 </file>
 
 <file path=ppt/slides/slide19.xml><?xml version="1.0" encoding="utf-8"?>
-<p:sld xmlns:a="http://schemas.openxmlformats.org/drawingml/2006/main" xmlns:p="http://schemas.openxmlformats.org/presentationml/2006/main" xmlns:r="http://schemas.openxmlformats.org/officeDocument/2006/relationships">
+<p:sld xmlns:a="http://schemas.openxmlformats.org/drawingml/2006/main" xmlns:r="http://schemas.openxmlformats.org/officeDocument/2006/relationships" xmlns:p="http://schemas.openxmlformats.org/presentationml/2006/main">
   <p:cSld>
     <p:spTree>
       <p:nvGrpSpPr>
@@ -15031,7 +15000,14 @@
         <p:cNvGrpSpPr/>
         <p:nvPr/>
       </p:nvGrpSpPr>
-      <p:grpSpPr/>
+      <p:grpSpPr>
+        <a:xfrm>
+          <a:off x="0" y="0"/>
+          <a:ext cx="0" cy="0"/>
+          <a:chOff x="0" y="0"/>
+          <a:chExt cx="0" cy="0"/>
+        </a:xfrm>
+      </p:grpSpPr>
       <p:pic>
         <p:nvPicPr>
           <p:cNvPr id="2" name="Picture 1" descr="bg_mod.png"/>
@@ -15073,7 +15049,7 @@
           <a:noFill/>
         </p:spPr>
         <p:txBody>
-          <a:bodyPr wrap="square" anchor="t" lIns="0" rIns="0" tIns="0" bIns="0">
+          <a:bodyPr wrap="square" lIns="0" tIns="0" rIns="0" bIns="0" anchor="t">
             <a:spAutoFit/>
           </a:bodyPr>
           <a:lstStyle/>
@@ -15112,7 +15088,7 @@
           <a:noFill/>
         </p:spPr>
         <p:txBody>
-          <a:bodyPr wrap="square" anchor="t" lIns="0" rIns="0" tIns="0" bIns="0">
+          <a:bodyPr wrap="square" lIns="0" tIns="0" rIns="0" bIns="0" anchor="t">
             <a:spAutoFit/>
           </a:bodyPr>
           <a:lstStyle/>
@@ -15151,7 +15127,7 @@
           <a:noFill/>
         </p:spPr>
         <p:txBody>
-          <a:bodyPr wrap="square" anchor="t" lIns="0" rIns="0" tIns="0" bIns="0">
+          <a:bodyPr wrap="square" lIns="0" tIns="0" rIns="0" bIns="0" anchor="t">
             <a:spAutoFit/>
           </a:bodyPr>
           <a:lstStyle/>
@@ -15214,7 +15190,7 @@
           </a:fontRef>
         </p:style>
         <p:txBody>
-          <a:bodyPr rtlCol="0" anchor="ctr" wrap="square" lIns="73152" rIns="73152" tIns="36576" bIns="36576"/>
+          <a:bodyPr wrap="square" lIns="73152" tIns="36576" rIns="73152" bIns="36576" rtlCol="0" anchor="ctr"/>
           <a:lstStyle/>
           <a:p>
             <a:pPr algn="ctr"/>
@@ -15288,7 +15264,7 @@
           </a:fontRef>
         </p:style>
         <p:txBody>
-          <a:bodyPr rtlCol="0" anchor="ctr" wrap="square" lIns="54864" rIns="54864" tIns="0" bIns="0"/>
+          <a:bodyPr wrap="square" lIns="54864" tIns="0" rIns="54864" bIns="0" rtlCol="0" anchor="ctr"/>
           <a:lstStyle/>
           <a:p>
             <a:pPr algn="ctr"/>
@@ -15345,7 +15321,7 @@
           </a:fontRef>
         </p:style>
         <p:txBody>
-          <a:bodyPr rtlCol="0" anchor="ctr" wrap="square" lIns="73152" rIns="73152" tIns="36576" bIns="36576"/>
+          <a:bodyPr wrap="square" lIns="73152" tIns="36576" rIns="73152" bIns="36576" rtlCol="0" anchor="ctr"/>
           <a:lstStyle/>
           <a:p>
             <a:pPr algn="ctr"/>
@@ -15419,7 +15395,7 @@
           </a:fontRef>
         </p:style>
         <p:txBody>
-          <a:bodyPr rtlCol="0" anchor="ctr" wrap="square" lIns="54864" rIns="54864" tIns="0" bIns="0"/>
+          <a:bodyPr wrap="square" lIns="54864" tIns="0" rIns="54864" bIns="0" rtlCol="0" anchor="ctr"/>
           <a:lstStyle/>
           <a:p>
             <a:pPr algn="ctr"/>
@@ -15476,7 +15452,7 @@
           </a:fontRef>
         </p:style>
         <p:txBody>
-          <a:bodyPr rtlCol="0" anchor="ctr" wrap="square" lIns="73152" rIns="73152" tIns="36576" bIns="36576"/>
+          <a:bodyPr wrap="square" lIns="73152" tIns="36576" rIns="73152" bIns="36576" rtlCol="0" anchor="ctr"/>
           <a:lstStyle/>
           <a:p>
             <a:pPr algn="ctr"/>
@@ -15550,7 +15526,7 @@
           </a:fontRef>
         </p:style>
         <p:txBody>
-          <a:bodyPr rtlCol="0" anchor="ctr" wrap="square" lIns="54864" rIns="54864" tIns="0" bIns="0"/>
+          <a:bodyPr wrap="square" lIns="54864" tIns="0" rIns="54864" bIns="0" rtlCol="0" anchor="ctr"/>
           <a:lstStyle/>
           <a:p>
             <a:pPr algn="ctr"/>
@@ -15611,6 +15587,7 @@
           <a:lstStyle/>
           <a:p>
             <a:pPr algn="ctr"/>
+            <a:endParaRPr/>
           </a:p>
         </p:txBody>
       </p:sp>
@@ -15631,7 +15608,7 @@
           <a:noFill/>
         </p:spPr>
         <p:txBody>
-          <a:bodyPr wrap="square" anchor="t" lIns="0" rIns="0" tIns="0" bIns="0">
+          <a:bodyPr wrap="square" lIns="0" tIns="0" rIns="0" bIns="0" anchor="t">
             <a:spAutoFit/>
           </a:bodyPr>
           <a:lstStyle/>
@@ -15670,7 +15647,7 @@
           <a:noFill/>
         </p:spPr>
         <p:txBody>
-          <a:bodyPr wrap="square" anchor="t" lIns="0" rIns="0" tIns="0" bIns="0">
+          <a:bodyPr wrap="square" lIns="0" tIns="0" rIns="0" bIns="0" anchor="t">
             <a:spAutoFit/>
           </a:bodyPr>
           <a:lstStyle/>
@@ -15753,6 +15730,7 @@
           <a:lstStyle/>
           <a:p>
             <a:pPr algn="ctr"/>
+            <a:endParaRPr/>
           </a:p>
         </p:txBody>
       </p:sp>
@@ -15773,7 +15751,7 @@
           <a:noFill/>
         </p:spPr>
         <p:txBody>
-          <a:bodyPr wrap="square" anchor="t" lIns="0" rIns="0" tIns="0" bIns="0">
+          <a:bodyPr wrap="square" lIns="0" tIns="0" rIns="0" bIns="0" anchor="t">
             <a:spAutoFit/>
           </a:bodyPr>
           <a:lstStyle/>
@@ -15812,7 +15790,7 @@
           <a:noFill/>
         </p:spPr>
         <p:txBody>
-          <a:bodyPr wrap="square" anchor="t" lIns="0" rIns="0" tIns="0" bIns="0">
+          <a:bodyPr wrap="square" lIns="0" tIns="0" rIns="0" bIns="0" anchor="t">
             <a:spAutoFit/>
           </a:bodyPr>
           <a:lstStyle/>
@@ -15851,7 +15829,7 @@
           <a:noFill/>
         </p:spPr>
         <p:txBody>
-          <a:bodyPr wrap="square" anchor="t" lIns="0" rIns="0" tIns="0" bIns="0">
+          <a:bodyPr wrap="square" lIns="0" tIns="0" rIns="0" bIns="0" anchor="t">
             <a:spAutoFit/>
           </a:bodyPr>
           <a:lstStyle/>
@@ -15890,7 +15868,7 @@
           <a:noFill/>
         </p:spPr>
         <p:txBody>
-          <a:bodyPr wrap="square" anchor="t" lIns="0" rIns="0" tIns="0" bIns="0">
+          <a:bodyPr wrap="square" lIns="0" tIns="0" rIns="0" bIns="0" anchor="t">
             <a:spAutoFit/>
           </a:bodyPr>
           <a:lstStyle/>
@@ -15917,11 +15895,23 @@
   <p:clrMapOvr>
     <a:masterClrMapping/>
   </p:clrMapOvr>
+  <mc:AlternateContent xmlns:mc="http://schemas.openxmlformats.org/markup-compatibility/2006">
+    <mc:Choice xmlns:p14="http://schemas.microsoft.com/office/powerpoint/2010/main" Requires="p14">
+      <p:transition spd="med" p14:dur="700">
+        <p:fade thruBlk="1"/>
+      </p:transition>
+    </mc:Choice>
+    <mc:Fallback>
+      <p:transition spd="med">
+        <p:fade thruBlk="1"/>
+      </p:transition>
+    </mc:Fallback>
+  </mc:AlternateContent>
 </p:sld>
 </file>
 
 <file path=ppt/slides/slide2.xml><?xml version="1.0" encoding="utf-8"?>
-<p:sld xmlns:a="http://schemas.openxmlformats.org/drawingml/2006/main" xmlns:p="http://schemas.openxmlformats.org/presentationml/2006/main" xmlns:r="http://schemas.openxmlformats.org/officeDocument/2006/relationships">
+<p:sld xmlns:a="http://schemas.openxmlformats.org/drawingml/2006/main" xmlns:r="http://schemas.openxmlformats.org/officeDocument/2006/relationships" xmlns:p="http://schemas.openxmlformats.org/presentationml/2006/main">
   <p:cSld>
     <p:spTree>
       <p:nvGrpSpPr>
@@ -15929,7 +15919,14 @@
         <p:cNvGrpSpPr/>
         <p:nvPr/>
       </p:nvGrpSpPr>
-      <p:grpSpPr/>
+      <p:grpSpPr>
+        <a:xfrm>
+          <a:off x="0" y="0"/>
+          <a:ext cx="0" cy="0"/>
+          <a:chOff x="0" y="0"/>
+          <a:chExt cx="0" cy="0"/>
+        </a:xfrm>
+      </p:grpSpPr>
       <p:pic>
         <p:nvPicPr>
           <p:cNvPr id="2" name="Picture 1" descr="bg_deep.png"/>
@@ -15939,7 +15936,7 @@
           <p:nvPr/>
         </p:nvPicPr>
         <p:blipFill>
-          <a:blip r:embed="rId2"/>
+          <a:blip r:embed="rId3"/>
           <a:stretch>
             <a:fillRect/>
           </a:stretch>
@@ -15971,7 +15968,7 @@
           <a:noFill/>
         </p:spPr>
         <p:txBody>
-          <a:bodyPr wrap="square" anchor="t" lIns="0" rIns="0" tIns="0" bIns="0">
+          <a:bodyPr wrap="square" lIns="0" tIns="0" rIns="0" bIns="0" anchor="t">
             <a:spAutoFit/>
           </a:bodyPr>
           <a:lstStyle/>
@@ -16010,7 +16007,7 @@
           <a:noFill/>
         </p:spPr>
         <p:txBody>
-          <a:bodyPr wrap="square" anchor="t" lIns="0" rIns="0" tIns="0" bIns="0">
+          <a:bodyPr wrap="square" lIns="0" tIns="0" rIns="0" bIns="0" anchor="t">
             <a:spAutoFit/>
           </a:bodyPr>
           <a:lstStyle/>
@@ -16049,7 +16046,7 @@
           <a:noFill/>
         </p:spPr>
         <p:txBody>
-          <a:bodyPr wrap="square" anchor="t" lIns="0" rIns="0" tIns="0" bIns="0">
+          <a:bodyPr wrap="square" lIns="0" tIns="0" rIns="0" bIns="0" anchor="t">
             <a:spAutoFit/>
           </a:bodyPr>
           <a:lstStyle/>
@@ -16112,7 +16109,7 @@
           </a:fontRef>
         </p:style>
         <p:txBody>
-          <a:bodyPr rtlCol="0" anchor="ctr" wrap="square" lIns="54864" rIns="54864" tIns="0" bIns="0"/>
+          <a:bodyPr wrap="square" lIns="54864" tIns="0" rIns="54864" bIns="0" rtlCol="0" anchor="ctr"/>
           <a:lstStyle/>
           <a:p>
             <a:pPr algn="ctr"/>
@@ -16145,7 +16142,7 @@
           <a:noFill/>
         </p:spPr>
         <p:txBody>
-          <a:bodyPr wrap="square" anchor="t" lIns="0" rIns="0" tIns="0" bIns="0">
+          <a:bodyPr wrap="square" lIns="0" tIns="0" rIns="0" bIns="0" anchor="t">
             <a:spAutoFit/>
           </a:bodyPr>
           <a:lstStyle/>
@@ -16208,7 +16205,7 @@
           </a:fontRef>
         </p:style>
         <p:txBody>
-          <a:bodyPr rtlCol="0" anchor="ctr" wrap="square" lIns="54864" rIns="54864" tIns="0" bIns="0"/>
+          <a:bodyPr wrap="square" lIns="54864" tIns="0" rIns="54864" bIns="0" rtlCol="0" anchor="ctr"/>
           <a:lstStyle/>
           <a:p>
             <a:pPr algn="ctr"/>
@@ -16241,7 +16238,7 @@
           <a:noFill/>
         </p:spPr>
         <p:txBody>
-          <a:bodyPr wrap="square" anchor="t" lIns="0" rIns="0" tIns="0" bIns="0">
+          <a:bodyPr wrap="square" lIns="0" tIns="0" rIns="0" bIns="0" anchor="t">
             <a:spAutoFit/>
           </a:bodyPr>
           <a:lstStyle/>
@@ -16304,7 +16301,7 @@
           </a:fontRef>
         </p:style>
         <p:txBody>
-          <a:bodyPr rtlCol="0" anchor="ctr" wrap="square" lIns="54864" rIns="54864" tIns="0" bIns="0"/>
+          <a:bodyPr wrap="square" lIns="54864" tIns="0" rIns="54864" bIns="0" rtlCol="0" anchor="ctr"/>
           <a:lstStyle/>
           <a:p>
             <a:pPr algn="ctr"/>
@@ -16337,7 +16334,7 @@
           <a:noFill/>
         </p:spPr>
         <p:txBody>
-          <a:bodyPr wrap="square" anchor="t" lIns="0" rIns="0" tIns="0" bIns="0">
+          <a:bodyPr wrap="square" lIns="0" tIns="0" rIns="0" bIns="0" anchor="t">
             <a:spAutoFit/>
           </a:bodyPr>
           <a:lstStyle/>
@@ -16400,7 +16397,7 @@
           </a:fontRef>
         </p:style>
         <p:txBody>
-          <a:bodyPr rtlCol="0" anchor="ctr" wrap="square" lIns="54864" rIns="54864" tIns="0" bIns="0"/>
+          <a:bodyPr wrap="square" lIns="54864" tIns="0" rIns="54864" bIns="0" rtlCol="0" anchor="ctr"/>
           <a:lstStyle/>
           <a:p>
             <a:pPr algn="ctr"/>
@@ -16433,7 +16430,7 @@
           <a:noFill/>
         </p:spPr>
         <p:txBody>
-          <a:bodyPr wrap="square" anchor="t" lIns="0" rIns="0" tIns="0" bIns="0">
+          <a:bodyPr wrap="square" lIns="0" tIns="0" rIns="0" bIns="0" anchor="t">
             <a:spAutoFit/>
           </a:bodyPr>
           <a:lstStyle/>
@@ -16500,6 +16497,7 @@
           <a:lstStyle/>
           <a:p>
             <a:pPr algn="ctr"/>
+            <a:endParaRPr/>
           </a:p>
         </p:txBody>
       </p:sp>
@@ -16520,7 +16518,7 @@
           <a:noFill/>
         </p:spPr>
         <p:txBody>
-          <a:bodyPr wrap="square" anchor="t" lIns="0" rIns="0" tIns="0" bIns="0">
+          <a:bodyPr wrap="square" lIns="0" tIns="0" rIns="0" bIns="0" anchor="t">
             <a:spAutoFit/>
           </a:bodyPr>
           <a:lstStyle/>
@@ -16559,7 +16557,7 @@
           <a:noFill/>
         </p:spPr>
         <p:txBody>
-          <a:bodyPr wrap="square" anchor="t" lIns="0" rIns="0" tIns="0" bIns="0">
+          <a:bodyPr wrap="square" lIns="0" tIns="0" rIns="0" bIns="0" anchor="t">
             <a:spAutoFit/>
           </a:bodyPr>
           <a:lstStyle/>
@@ -16614,7 +16612,7 @@
           <a:noFill/>
         </p:spPr>
         <p:txBody>
-          <a:bodyPr wrap="square" anchor="t" lIns="0" rIns="0" tIns="0" bIns="0">
+          <a:bodyPr wrap="square" lIns="0" tIns="0" rIns="0" bIns="0" anchor="t">
             <a:spAutoFit/>
           </a:bodyPr>
           <a:lstStyle/>
@@ -16653,7 +16651,7 @@
           <a:noFill/>
         </p:spPr>
         <p:txBody>
-          <a:bodyPr wrap="square" anchor="t" lIns="0" rIns="0" tIns="0" bIns="0">
+          <a:bodyPr wrap="square" lIns="0" tIns="0" rIns="0" bIns="0" anchor="t">
             <a:spAutoFit/>
           </a:bodyPr>
           <a:lstStyle/>
@@ -16692,7 +16690,7 @@
           <a:noFill/>
         </p:spPr>
         <p:txBody>
-          <a:bodyPr wrap="square" anchor="t" lIns="0" rIns="0" tIns="0" bIns="0">
+          <a:bodyPr wrap="square" lIns="0" tIns="0" rIns="0" bIns="0" anchor="t">
             <a:spAutoFit/>
           </a:bodyPr>
           <a:lstStyle/>
@@ -16747,7 +16745,7 @@
           <a:noFill/>
         </p:spPr>
         <p:txBody>
-          <a:bodyPr wrap="square" anchor="t" lIns="0" rIns="0" tIns="0" bIns="0">
+          <a:bodyPr wrap="square" lIns="0" tIns="0" rIns="0" bIns="0" anchor="t">
             <a:spAutoFit/>
           </a:bodyPr>
           <a:lstStyle/>
@@ -16786,7 +16784,7 @@
           <a:noFill/>
         </p:spPr>
         <p:txBody>
-          <a:bodyPr wrap="square" anchor="t" lIns="0" rIns="0" tIns="0" bIns="0">
+          <a:bodyPr wrap="square" lIns="0" tIns="0" rIns="0" bIns="0" anchor="t">
             <a:spAutoFit/>
           </a:bodyPr>
           <a:lstStyle/>
@@ -16813,11 +16811,23 @@
   <p:clrMapOvr>
     <a:masterClrMapping/>
   </p:clrMapOvr>
+  <mc:AlternateContent xmlns:mc="http://schemas.openxmlformats.org/markup-compatibility/2006">
+    <mc:Choice xmlns:p14="http://schemas.microsoft.com/office/powerpoint/2010/main" Requires="p14">
+      <p:transition spd="med" p14:dur="700">
+        <p:fade thruBlk="1"/>
+      </p:transition>
+    </mc:Choice>
+    <mc:Fallback>
+      <p:transition spd="med">
+        <p:fade thruBlk="1"/>
+      </p:transition>
+    </mc:Fallback>
+  </mc:AlternateContent>
 </p:sld>
 </file>
 
 <file path=ppt/slides/slide20.xml><?xml version="1.0" encoding="utf-8"?>
-<p:sld xmlns:a="http://schemas.openxmlformats.org/drawingml/2006/main" xmlns:p="http://schemas.openxmlformats.org/presentationml/2006/main" xmlns:r="http://schemas.openxmlformats.org/officeDocument/2006/relationships">
+<p:sld xmlns:a="http://schemas.openxmlformats.org/drawingml/2006/main" xmlns:r="http://schemas.openxmlformats.org/officeDocument/2006/relationships" xmlns:p="http://schemas.openxmlformats.org/presentationml/2006/main">
   <p:cSld>
     <p:spTree>
       <p:nvGrpSpPr>
@@ -16825,7 +16835,14 @@
         <p:cNvGrpSpPr/>
         <p:nvPr/>
       </p:nvGrpSpPr>
-      <p:grpSpPr/>
+      <p:grpSpPr>
+        <a:xfrm>
+          <a:off x="0" y="0"/>
+          <a:ext cx="0" cy="0"/>
+          <a:chOff x="0" y="0"/>
+          <a:chExt cx="0" cy="0"/>
+        </a:xfrm>
+      </p:grpSpPr>
       <p:pic>
         <p:nvPicPr>
           <p:cNvPr id="2" name="Picture 1" descr="bg_mod.png"/>
@@ -16867,7 +16884,7 @@
           <a:noFill/>
         </p:spPr>
         <p:txBody>
-          <a:bodyPr wrap="square" anchor="t" lIns="0" rIns="0" tIns="0" bIns="0">
+          <a:bodyPr wrap="square" lIns="0" tIns="0" rIns="0" bIns="0" anchor="t">
             <a:spAutoFit/>
           </a:bodyPr>
           <a:lstStyle/>
@@ -16906,7 +16923,7 @@
           <a:noFill/>
         </p:spPr>
         <p:txBody>
-          <a:bodyPr wrap="square" anchor="t" lIns="0" rIns="0" tIns="0" bIns="0">
+          <a:bodyPr wrap="square" lIns="0" tIns="0" rIns="0" bIns="0" anchor="t">
             <a:spAutoFit/>
           </a:bodyPr>
           <a:lstStyle/>
@@ -16945,7 +16962,7 @@
           <a:noFill/>
         </p:spPr>
         <p:txBody>
-          <a:bodyPr wrap="square" anchor="t" lIns="0" rIns="0" tIns="0" bIns="0">
+          <a:bodyPr wrap="square" lIns="0" tIns="0" rIns="0" bIns="0" anchor="t">
             <a:spAutoFit/>
           </a:bodyPr>
           <a:lstStyle/>
@@ -17012,6 +17029,7 @@
           <a:lstStyle/>
           <a:p>
             <a:pPr algn="ctr"/>
+            <a:endParaRPr/>
           </a:p>
         </p:txBody>
       </p:sp>
@@ -17032,7 +17050,7 @@
           <a:noFill/>
         </p:spPr>
         <p:txBody>
-          <a:bodyPr wrap="square" anchor="t" lIns="0" rIns="0" tIns="0" bIns="0">
+          <a:bodyPr wrap="square" lIns="0" tIns="0" rIns="0" bIns="0" anchor="t">
             <a:spAutoFit/>
           </a:bodyPr>
           <a:lstStyle/>
@@ -17071,7 +17089,7 @@
           <a:noFill/>
         </p:spPr>
         <p:txBody>
-          <a:bodyPr wrap="square" anchor="t" lIns="0" rIns="0" tIns="0" bIns="0">
+          <a:bodyPr wrap="square" lIns="0" tIns="0" rIns="0" bIns="0" anchor="t">
             <a:spAutoFit/>
           </a:bodyPr>
           <a:lstStyle/>
@@ -17134,7 +17152,7 @@
           </a:fontRef>
         </p:style>
         <p:txBody>
-          <a:bodyPr rtlCol="0" anchor="ctr" wrap="square" lIns="54864" rIns="54864" tIns="0" bIns="0"/>
+          <a:bodyPr wrap="square" lIns="54864" tIns="0" rIns="54864" bIns="0" rtlCol="0" anchor="ctr"/>
           <a:lstStyle/>
           <a:p>
             <a:pPr algn="ctr"/>
@@ -17195,6 +17213,7 @@
           <a:lstStyle/>
           <a:p>
             <a:pPr algn="ctr"/>
+            <a:endParaRPr/>
           </a:p>
         </p:txBody>
       </p:sp>
@@ -17215,7 +17234,7 @@
           <a:noFill/>
         </p:spPr>
         <p:txBody>
-          <a:bodyPr wrap="square" anchor="t" lIns="0" rIns="0" tIns="0" bIns="0">
+          <a:bodyPr wrap="square" lIns="0" tIns="0" rIns="0" bIns="0" anchor="t">
             <a:spAutoFit/>
           </a:bodyPr>
           <a:lstStyle/>
@@ -17254,7 +17273,7 @@
           <a:noFill/>
         </p:spPr>
         <p:txBody>
-          <a:bodyPr wrap="square" anchor="t" lIns="0" rIns="0" tIns="0" bIns="0">
+          <a:bodyPr wrap="square" lIns="0" tIns="0" rIns="0" bIns="0" anchor="t">
             <a:spAutoFit/>
           </a:bodyPr>
           <a:lstStyle/>
@@ -17317,7 +17336,7 @@
           </a:fontRef>
         </p:style>
         <p:txBody>
-          <a:bodyPr rtlCol="0" anchor="ctr" wrap="square" lIns="54864" rIns="54864" tIns="0" bIns="0"/>
+          <a:bodyPr wrap="square" lIns="54864" tIns="0" rIns="54864" bIns="0" rtlCol="0" anchor="ctr"/>
           <a:lstStyle/>
           <a:p>
             <a:pPr algn="ctr"/>
@@ -17378,6 +17397,7 @@
           <a:lstStyle/>
           <a:p>
             <a:pPr algn="ctr"/>
+            <a:endParaRPr/>
           </a:p>
         </p:txBody>
       </p:sp>
@@ -17398,7 +17418,7 @@
           <a:noFill/>
         </p:spPr>
         <p:txBody>
-          <a:bodyPr wrap="square" anchor="t" lIns="0" rIns="0" tIns="0" bIns="0">
+          <a:bodyPr wrap="square" lIns="0" tIns="0" rIns="0" bIns="0" anchor="t">
             <a:spAutoFit/>
           </a:bodyPr>
           <a:lstStyle/>
@@ -17437,7 +17457,7 @@
           <a:noFill/>
         </p:spPr>
         <p:txBody>
-          <a:bodyPr wrap="square" anchor="t" lIns="0" rIns="0" tIns="0" bIns="0">
+          <a:bodyPr wrap="square" lIns="0" tIns="0" rIns="0" bIns="0" anchor="t">
             <a:spAutoFit/>
           </a:bodyPr>
           <a:lstStyle/>
@@ -17500,7 +17520,7 @@
           </a:fontRef>
         </p:style>
         <p:txBody>
-          <a:bodyPr rtlCol="0" anchor="ctr" wrap="square" lIns="54864" rIns="54864" tIns="0" bIns="0"/>
+          <a:bodyPr wrap="square" lIns="54864" tIns="0" rIns="54864" bIns="0" rtlCol="0" anchor="ctr"/>
           <a:lstStyle/>
           <a:p>
             <a:pPr algn="ctr"/>
@@ -17561,6 +17581,7 @@
           <a:lstStyle/>
           <a:p>
             <a:pPr algn="ctr"/>
+            <a:endParaRPr/>
           </a:p>
         </p:txBody>
       </p:sp>
@@ -17581,7 +17602,7 @@
           <a:noFill/>
         </p:spPr>
         <p:txBody>
-          <a:bodyPr wrap="square" anchor="t" lIns="0" rIns="0" tIns="0" bIns="0">
+          <a:bodyPr wrap="square" lIns="0" tIns="0" rIns="0" bIns="0" anchor="t">
             <a:spAutoFit/>
           </a:bodyPr>
           <a:lstStyle/>
@@ -17620,7 +17641,7 @@
           <a:noFill/>
         </p:spPr>
         <p:txBody>
-          <a:bodyPr wrap="square" anchor="t" lIns="0" rIns="0" tIns="0" bIns="0">
+          <a:bodyPr wrap="square" lIns="0" tIns="0" rIns="0" bIns="0" anchor="t">
             <a:spAutoFit/>
           </a:bodyPr>
           <a:lstStyle/>
@@ -17683,7 +17704,7 @@
           </a:fontRef>
         </p:style>
         <p:txBody>
-          <a:bodyPr rtlCol="0" anchor="ctr" wrap="square" lIns="54864" rIns="54864" tIns="0" bIns="0"/>
+          <a:bodyPr wrap="square" lIns="54864" tIns="0" rIns="54864" bIns="0" rtlCol="0" anchor="ctr"/>
           <a:lstStyle/>
           <a:p>
             <a:pPr algn="ctr"/>
@@ -17744,6 +17765,7 @@
           <a:lstStyle/>
           <a:p>
             <a:pPr algn="ctr"/>
+            <a:endParaRPr/>
           </a:p>
         </p:txBody>
       </p:sp>
@@ -17764,7 +17786,7 @@
           <a:noFill/>
         </p:spPr>
         <p:txBody>
-          <a:bodyPr wrap="square" anchor="t" lIns="0" rIns="0" tIns="0" bIns="0">
+          <a:bodyPr wrap="square" lIns="0" tIns="0" rIns="0" bIns="0" anchor="t">
             <a:spAutoFit/>
           </a:bodyPr>
           <a:lstStyle/>
@@ -17803,7 +17825,7 @@
           <a:noFill/>
         </p:spPr>
         <p:txBody>
-          <a:bodyPr wrap="square" anchor="t" lIns="0" rIns="0" tIns="0" bIns="0">
+          <a:bodyPr wrap="square" lIns="0" tIns="0" rIns="0" bIns="0" anchor="t">
             <a:spAutoFit/>
           </a:bodyPr>
           <a:lstStyle/>
@@ -17866,7 +17888,7 @@
           </a:fontRef>
         </p:style>
         <p:txBody>
-          <a:bodyPr rtlCol="0" anchor="ctr" wrap="square" lIns="54864" rIns="54864" tIns="0" bIns="0"/>
+          <a:bodyPr wrap="square" lIns="54864" tIns="0" rIns="54864" bIns="0" rtlCol="0" anchor="ctr"/>
           <a:lstStyle/>
           <a:p>
             <a:pPr algn="ctr"/>
@@ -17899,7 +17921,7 @@
           <a:noFill/>
         </p:spPr>
         <p:txBody>
-          <a:bodyPr wrap="square" anchor="t" lIns="0" rIns="0" tIns="0" bIns="0">
+          <a:bodyPr wrap="square" lIns="0" tIns="0" rIns="0" bIns="0" anchor="t">
             <a:spAutoFit/>
           </a:bodyPr>
           <a:lstStyle/>
@@ -17938,7 +17960,7 @@
           <a:noFill/>
         </p:spPr>
         <p:txBody>
-          <a:bodyPr wrap="square" anchor="t" lIns="0" rIns="0" tIns="0" bIns="0">
+          <a:bodyPr wrap="square" lIns="0" tIns="0" rIns="0" bIns="0" anchor="t">
             <a:spAutoFit/>
           </a:bodyPr>
           <a:lstStyle/>
@@ -17965,11 +17987,23 @@
   <p:clrMapOvr>
     <a:masterClrMapping/>
   </p:clrMapOvr>
+  <mc:AlternateContent xmlns:mc="http://schemas.openxmlformats.org/markup-compatibility/2006">
+    <mc:Choice xmlns:p14="http://schemas.microsoft.com/office/powerpoint/2010/main" Requires="p14">
+      <p:transition spd="med" p14:dur="700">
+        <p:fade thruBlk="1"/>
+      </p:transition>
+    </mc:Choice>
+    <mc:Fallback>
+      <p:transition spd="med">
+        <p:fade thruBlk="1"/>
+      </p:transition>
+    </mc:Fallback>
+  </mc:AlternateContent>
 </p:sld>
 </file>
 
 <file path=ppt/slides/slide21.xml><?xml version="1.0" encoding="utf-8"?>
-<p:sld xmlns:a="http://schemas.openxmlformats.org/drawingml/2006/main" xmlns:p="http://schemas.openxmlformats.org/presentationml/2006/main" xmlns:r="http://schemas.openxmlformats.org/officeDocument/2006/relationships">
+<p:sld xmlns:a="http://schemas.openxmlformats.org/drawingml/2006/main" xmlns:r="http://schemas.openxmlformats.org/officeDocument/2006/relationships" xmlns:p="http://schemas.openxmlformats.org/presentationml/2006/main">
   <p:cSld>
     <p:spTree>
       <p:nvGrpSpPr>
@@ -17977,7 +18011,14 @@
         <p:cNvGrpSpPr/>
         <p:nvPr/>
       </p:nvGrpSpPr>
-      <p:grpSpPr/>
+      <p:grpSpPr>
+        <a:xfrm>
+          <a:off x="0" y="0"/>
+          <a:ext cx="0" cy="0"/>
+          <a:chOff x="0" y="0"/>
+          <a:chExt cx="0" cy="0"/>
+        </a:xfrm>
+      </p:grpSpPr>
       <p:pic>
         <p:nvPicPr>
           <p:cNvPr id="2" name="Picture 1" descr="bg_mod.png"/>
@@ -18019,7 +18060,7 @@
           <a:noFill/>
         </p:spPr>
         <p:txBody>
-          <a:bodyPr wrap="square" anchor="t" lIns="0" rIns="0" tIns="0" bIns="0">
+          <a:bodyPr wrap="square" lIns="0" tIns="0" rIns="0" bIns="0" anchor="t">
             <a:spAutoFit/>
           </a:bodyPr>
           <a:lstStyle/>
@@ -18058,7 +18099,7 @@
           <a:noFill/>
         </p:spPr>
         <p:txBody>
-          <a:bodyPr wrap="square" anchor="t" lIns="0" rIns="0" tIns="0" bIns="0">
+          <a:bodyPr wrap="square" lIns="0" tIns="0" rIns="0" bIns="0" anchor="t">
             <a:spAutoFit/>
           </a:bodyPr>
           <a:lstStyle/>
@@ -18125,6 +18166,7 @@
           <a:lstStyle/>
           <a:p>
             <a:pPr algn="ctr"/>
+            <a:endParaRPr/>
           </a:p>
         </p:txBody>
       </p:sp>
@@ -18145,7 +18187,7 @@
           <a:noFill/>
         </p:spPr>
         <p:txBody>
-          <a:bodyPr wrap="square" anchor="t" lIns="0" rIns="0" tIns="0" bIns="0">
+          <a:bodyPr wrap="square" lIns="0" tIns="0" rIns="0" bIns="0" anchor="t">
             <a:spAutoFit/>
           </a:bodyPr>
           <a:lstStyle/>
@@ -18184,7 +18226,7 @@
           <a:noFill/>
         </p:spPr>
         <p:txBody>
-          <a:bodyPr wrap="square" anchor="t" lIns="0" rIns="0" tIns="0" bIns="0">
+          <a:bodyPr wrap="square" lIns="0" tIns="0" rIns="0" bIns="0" anchor="t">
             <a:spAutoFit/>
           </a:bodyPr>
           <a:lstStyle/>
@@ -18247,7 +18289,7 @@
           </a:fontRef>
         </p:style>
         <p:txBody>
-          <a:bodyPr rtlCol="0" anchor="ctr" wrap="square" lIns="54864" rIns="54864" tIns="0" bIns="0"/>
+          <a:bodyPr wrap="square" lIns="54864" tIns="0" rIns="54864" bIns="0" rtlCol="0" anchor="ctr"/>
           <a:lstStyle/>
           <a:p>
             <a:pPr algn="ctr"/>
@@ -18308,6 +18350,7 @@
           <a:lstStyle/>
           <a:p>
             <a:pPr algn="ctr"/>
+            <a:endParaRPr/>
           </a:p>
         </p:txBody>
       </p:sp>
@@ -18328,7 +18371,7 @@
           <a:noFill/>
         </p:spPr>
         <p:txBody>
-          <a:bodyPr wrap="square" anchor="t" lIns="0" rIns="0" tIns="0" bIns="0">
+          <a:bodyPr wrap="square" lIns="0" tIns="0" rIns="0" bIns="0" anchor="t">
             <a:spAutoFit/>
           </a:bodyPr>
           <a:lstStyle/>
@@ -18367,7 +18410,7 @@
           <a:noFill/>
         </p:spPr>
         <p:txBody>
-          <a:bodyPr wrap="square" anchor="t" lIns="0" rIns="0" tIns="0" bIns="0">
+          <a:bodyPr wrap="square" lIns="0" tIns="0" rIns="0" bIns="0" anchor="t">
             <a:spAutoFit/>
           </a:bodyPr>
           <a:lstStyle/>
@@ -18430,7 +18473,7 @@
           </a:fontRef>
         </p:style>
         <p:txBody>
-          <a:bodyPr rtlCol="0" anchor="ctr" wrap="square" lIns="54864" rIns="54864" tIns="0" bIns="0"/>
+          <a:bodyPr wrap="square" lIns="54864" tIns="0" rIns="54864" bIns="0" rtlCol="0" anchor="ctr"/>
           <a:lstStyle/>
           <a:p>
             <a:pPr algn="ctr"/>
@@ -18491,6 +18534,7 @@
           <a:lstStyle/>
           <a:p>
             <a:pPr algn="ctr"/>
+            <a:endParaRPr/>
           </a:p>
         </p:txBody>
       </p:sp>
@@ -18511,7 +18555,7 @@
           <a:noFill/>
         </p:spPr>
         <p:txBody>
-          <a:bodyPr wrap="square" anchor="t" lIns="0" rIns="0" tIns="0" bIns="0">
+          <a:bodyPr wrap="square" lIns="0" tIns="0" rIns="0" bIns="0" anchor="t">
             <a:spAutoFit/>
           </a:bodyPr>
           <a:lstStyle/>
@@ -18550,7 +18594,7 @@
           <a:noFill/>
         </p:spPr>
         <p:txBody>
-          <a:bodyPr wrap="square" anchor="t" lIns="0" rIns="0" tIns="0" bIns="0">
+          <a:bodyPr wrap="square" lIns="0" tIns="0" rIns="0" bIns="0" anchor="t">
             <a:spAutoFit/>
           </a:bodyPr>
           <a:lstStyle/>
@@ -18613,7 +18657,7 @@
           </a:fontRef>
         </p:style>
         <p:txBody>
-          <a:bodyPr rtlCol="0" anchor="ctr" wrap="square" lIns="54864" rIns="54864" tIns="0" bIns="0"/>
+          <a:bodyPr wrap="square" lIns="54864" tIns="0" rIns="54864" bIns="0" rtlCol="0" anchor="ctr"/>
           <a:lstStyle/>
           <a:p>
             <a:pPr algn="ctr"/>
@@ -18674,6 +18718,7 @@
           <a:lstStyle/>
           <a:p>
             <a:pPr algn="ctr"/>
+            <a:endParaRPr/>
           </a:p>
         </p:txBody>
       </p:sp>
@@ -18694,7 +18739,7 @@
           <a:noFill/>
         </p:spPr>
         <p:txBody>
-          <a:bodyPr wrap="square" anchor="t" lIns="0" rIns="0" tIns="0" bIns="0">
+          <a:bodyPr wrap="square" lIns="0" tIns="0" rIns="0" bIns="0" anchor="t">
             <a:spAutoFit/>
           </a:bodyPr>
           <a:lstStyle/>
@@ -18733,7 +18778,7 @@
           <a:noFill/>
         </p:spPr>
         <p:txBody>
-          <a:bodyPr wrap="square" anchor="t" lIns="0" rIns="0" tIns="0" bIns="0">
+          <a:bodyPr wrap="square" lIns="0" tIns="0" rIns="0" bIns="0" anchor="t">
             <a:spAutoFit/>
           </a:bodyPr>
           <a:lstStyle/>
@@ -18796,7 +18841,7 @@
           </a:fontRef>
         </p:style>
         <p:txBody>
-          <a:bodyPr rtlCol="0" anchor="ctr" wrap="square" lIns="54864" rIns="54864" tIns="0" bIns="0"/>
+          <a:bodyPr wrap="square" lIns="54864" tIns="0" rIns="54864" bIns="0" rtlCol="0" anchor="ctr"/>
           <a:lstStyle/>
           <a:p>
             <a:pPr algn="ctr"/>
@@ -18857,6 +18902,7 @@
           <a:lstStyle/>
           <a:p>
             <a:pPr algn="ctr"/>
+            <a:endParaRPr/>
           </a:p>
         </p:txBody>
       </p:sp>
@@ -18877,7 +18923,7 @@
           <a:noFill/>
         </p:spPr>
         <p:txBody>
-          <a:bodyPr wrap="square" anchor="t" lIns="0" rIns="0" tIns="0" bIns="0">
+          <a:bodyPr wrap="square" lIns="0" tIns="0" rIns="0" bIns="0" anchor="t">
             <a:spAutoFit/>
           </a:bodyPr>
           <a:lstStyle/>
@@ -18916,7 +18962,7 @@
           <a:noFill/>
         </p:spPr>
         <p:txBody>
-          <a:bodyPr wrap="square" anchor="t" lIns="0" rIns="0" tIns="0" bIns="0">
+          <a:bodyPr wrap="square" lIns="0" tIns="0" rIns="0" bIns="0" anchor="t">
             <a:spAutoFit/>
           </a:bodyPr>
           <a:lstStyle/>
@@ -18979,7 +19025,7 @@
           </a:fontRef>
         </p:style>
         <p:txBody>
-          <a:bodyPr rtlCol="0" anchor="ctr" wrap="square" lIns="54864" rIns="54864" tIns="0" bIns="0"/>
+          <a:bodyPr wrap="square" lIns="54864" tIns="0" rIns="54864" bIns="0" rtlCol="0" anchor="ctr"/>
           <a:lstStyle/>
           <a:p>
             <a:pPr algn="ctr"/>
@@ -19040,6 +19086,7 @@
           <a:lstStyle/>
           <a:p>
             <a:pPr algn="ctr"/>
+            <a:endParaRPr/>
           </a:p>
         </p:txBody>
       </p:sp>
@@ -19060,7 +19107,7 @@
           <a:noFill/>
         </p:spPr>
         <p:txBody>
-          <a:bodyPr wrap="square" anchor="t" lIns="0" rIns="0" tIns="0" bIns="0">
+          <a:bodyPr wrap="square" lIns="0" tIns="0" rIns="0" bIns="0" anchor="t">
             <a:spAutoFit/>
           </a:bodyPr>
           <a:lstStyle/>
@@ -19099,7 +19146,7 @@
           <a:noFill/>
         </p:spPr>
         <p:txBody>
-          <a:bodyPr wrap="square" anchor="t" lIns="0" rIns="0" tIns="0" bIns="0">
+          <a:bodyPr wrap="square" lIns="0" tIns="0" rIns="0" bIns="0" anchor="t">
             <a:spAutoFit/>
           </a:bodyPr>
           <a:lstStyle/>
@@ -19162,7 +19209,7 @@
           </a:fontRef>
         </p:style>
         <p:txBody>
-          <a:bodyPr rtlCol="0" anchor="ctr" wrap="square" lIns="54864" rIns="54864" tIns="0" bIns="0"/>
+          <a:bodyPr wrap="square" lIns="54864" tIns="0" rIns="54864" bIns="0" rtlCol="0" anchor="ctr"/>
           <a:lstStyle/>
           <a:p>
             <a:pPr algn="ctr"/>
@@ -19195,7 +19242,7 @@
           <a:noFill/>
         </p:spPr>
         <p:txBody>
-          <a:bodyPr wrap="square" anchor="t" lIns="0" rIns="0" tIns="0" bIns="0">
+          <a:bodyPr wrap="square" lIns="0" tIns="0" rIns="0" bIns="0" anchor="t">
             <a:spAutoFit/>
           </a:bodyPr>
           <a:lstStyle/>
@@ -19234,7 +19281,7 @@
           <a:noFill/>
         </p:spPr>
         <p:txBody>
-          <a:bodyPr wrap="square" anchor="t" lIns="0" rIns="0" tIns="0" bIns="0">
+          <a:bodyPr wrap="square" lIns="0" tIns="0" rIns="0" bIns="0" anchor="t">
             <a:spAutoFit/>
           </a:bodyPr>
           <a:lstStyle/>
@@ -19261,11 +19308,23 @@
   <p:clrMapOvr>
     <a:masterClrMapping/>
   </p:clrMapOvr>
+  <mc:AlternateContent xmlns:mc="http://schemas.openxmlformats.org/markup-compatibility/2006">
+    <mc:Choice xmlns:p14="http://schemas.microsoft.com/office/powerpoint/2010/main" Requires="p14">
+      <p:transition spd="med" p14:dur="700">
+        <p:fade thruBlk="1"/>
+      </p:transition>
+    </mc:Choice>
+    <mc:Fallback>
+      <p:transition spd="med">
+        <p:fade thruBlk="1"/>
+      </p:transition>
+    </mc:Fallback>
+  </mc:AlternateContent>
 </p:sld>
 </file>
 
 <file path=ppt/slides/slide22.xml><?xml version="1.0" encoding="utf-8"?>
-<p:sld xmlns:a="http://schemas.openxmlformats.org/drawingml/2006/main" xmlns:p="http://schemas.openxmlformats.org/presentationml/2006/main" xmlns:r="http://schemas.openxmlformats.org/officeDocument/2006/relationships">
+<p:sld xmlns:a="http://schemas.openxmlformats.org/drawingml/2006/main" xmlns:r="http://schemas.openxmlformats.org/officeDocument/2006/relationships" xmlns:p="http://schemas.openxmlformats.org/presentationml/2006/main">
   <p:cSld>
     <p:spTree>
       <p:nvGrpSpPr>
@@ -19273,7 +19332,14 @@
         <p:cNvGrpSpPr/>
         <p:nvPr/>
       </p:nvGrpSpPr>
-      <p:grpSpPr/>
+      <p:grpSpPr>
+        <a:xfrm>
+          <a:off x="0" y="0"/>
+          <a:ext cx="0" cy="0"/>
+          <a:chOff x="0" y="0"/>
+          <a:chExt cx="0" cy="0"/>
+        </a:xfrm>
+      </p:grpSpPr>
       <p:pic>
         <p:nvPicPr>
           <p:cNvPr id="2" name="Picture 1" descr="bg_mod.png"/>
@@ -19315,7 +19381,7 @@
           <a:noFill/>
         </p:spPr>
         <p:txBody>
-          <a:bodyPr wrap="square" anchor="t" lIns="0" rIns="0" tIns="0" bIns="0">
+          <a:bodyPr wrap="square" lIns="0" tIns="0" rIns="0" bIns="0" anchor="t">
             <a:spAutoFit/>
           </a:bodyPr>
           <a:lstStyle/>
@@ -19354,7 +19420,7 @@
           <a:noFill/>
         </p:spPr>
         <p:txBody>
-          <a:bodyPr wrap="square" anchor="t" lIns="0" rIns="0" tIns="0" bIns="0">
+          <a:bodyPr wrap="square" lIns="0" tIns="0" rIns="0" bIns="0" anchor="t">
             <a:spAutoFit/>
           </a:bodyPr>
           <a:lstStyle/>
@@ -19393,7 +19459,7 @@
           <a:noFill/>
         </p:spPr>
         <p:txBody>
-          <a:bodyPr wrap="square" anchor="t" lIns="0" rIns="0" tIns="0" bIns="0">
+          <a:bodyPr wrap="square" lIns="0" tIns="0" rIns="0" bIns="0" anchor="t">
             <a:spAutoFit/>
           </a:bodyPr>
           <a:lstStyle/>
@@ -19460,6 +19526,7 @@
           <a:lstStyle/>
           <a:p>
             <a:pPr algn="ctr"/>
+            <a:endParaRPr/>
           </a:p>
         </p:txBody>
       </p:sp>
@@ -19480,7 +19547,7 @@
           <a:noFill/>
         </p:spPr>
         <p:txBody>
-          <a:bodyPr wrap="square" anchor="t" lIns="0" rIns="0" tIns="0" bIns="0">
+          <a:bodyPr wrap="square" lIns="0" tIns="0" rIns="0" bIns="0" anchor="t">
             <a:spAutoFit/>
           </a:bodyPr>
           <a:lstStyle/>
@@ -19519,7 +19586,7 @@
           <a:noFill/>
         </p:spPr>
         <p:txBody>
-          <a:bodyPr wrap="square" anchor="t" lIns="0" rIns="0" tIns="0" bIns="0">
+          <a:bodyPr wrap="square" lIns="0" tIns="0" rIns="0" bIns="0" anchor="t">
             <a:spAutoFit/>
           </a:bodyPr>
           <a:lstStyle/>
@@ -19582,7 +19649,7 @@
           </a:fontRef>
         </p:style>
         <p:txBody>
-          <a:bodyPr rtlCol="0" anchor="ctr" wrap="square" lIns="54864" rIns="54864" tIns="0" bIns="0"/>
+          <a:bodyPr wrap="square" lIns="54864" tIns="0" rIns="54864" bIns="0" rtlCol="0" anchor="ctr"/>
           <a:lstStyle/>
           <a:p>
             <a:pPr algn="ctr"/>
@@ -19643,6 +19710,7 @@
           <a:lstStyle/>
           <a:p>
             <a:pPr algn="ctr"/>
+            <a:endParaRPr/>
           </a:p>
         </p:txBody>
       </p:sp>
@@ -19663,7 +19731,7 @@
           <a:noFill/>
         </p:spPr>
         <p:txBody>
-          <a:bodyPr wrap="square" anchor="t" lIns="0" rIns="0" tIns="0" bIns="0">
+          <a:bodyPr wrap="square" lIns="0" tIns="0" rIns="0" bIns="0" anchor="t">
             <a:spAutoFit/>
           </a:bodyPr>
           <a:lstStyle/>
@@ -19702,7 +19770,7 @@
           <a:noFill/>
         </p:spPr>
         <p:txBody>
-          <a:bodyPr wrap="square" anchor="t" lIns="0" rIns="0" tIns="0" bIns="0">
+          <a:bodyPr wrap="square" lIns="0" tIns="0" rIns="0" bIns="0" anchor="t">
             <a:spAutoFit/>
           </a:bodyPr>
           <a:lstStyle/>
@@ -19765,7 +19833,7 @@
           </a:fontRef>
         </p:style>
         <p:txBody>
-          <a:bodyPr rtlCol="0" anchor="ctr" wrap="square" lIns="54864" rIns="54864" tIns="0" bIns="0"/>
+          <a:bodyPr wrap="square" lIns="54864" tIns="0" rIns="54864" bIns="0" rtlCol="0" anchor="ctr"/>
           <a:lstStyle/>
           <a:p>
             <a:pPr algn="ctr"/>
@@ -19826,6 +19894,7 @@
           <a:lstStyle/>
           <a:p>
             <a:pPr algn="ctr"/>
+            <a:endParaRPr/>
           </a:p>
         </p:txBody>
       </p:sp>
@@ -19846,7 +19915,7 @@
           <a:noFill/>
         </p:spPr>
         <p:txBody>
-          <a:bodyPr wrap="square" anchor="t" lIns="0" rIns="0" tIns="0" bIns="0">
+          <a:bodyPr wrap="square" lIns="0" tIns="0" rIns="0" bIns="0" anchor="t">
             <a:spAutoFit/>
           </a:bodyPr>
           <a:lstStyle/>
@@ -19885,7 +19954,7 @@
           <a:noFill/>
         </p:spPr>
         <p:txBody>
-          <a:bodyPr wrap="square" anchor="t" lIns="0" rIns="0" tIns="0" bIns="0">
+          <a:bodyPr wrap="square" lIns="0" tIns="0" rIns="0" bIns="0" anchor="t">
             <a:spAutoFit/>
           </a:bodyPr>
           <a:lstStyle/>
@@ -19948,7 +20017,7 @@
           </a:fontRef>
         </p:style>
         <p:txBody>
-          <a:bodyPr rtlCol="0" anchor="ctr" wrap="square" lIns="54864" rIns="54864" tIns="0" bIns="0"/>
+          <a:bodyPr wrap="square" lIns="54864" tIns="0" rIns="54864" bIns="0" rtlCol="0" anchor="ctr"/>
           <a:lstStyle/>
           <a:p>
             <a:pPr algn="ctr"/>
@@ -20009,6 +20078,7 @@
           <a:lstStyle/>
           <a:p>
             <a:pPr algn="ctr"/>
+            <a:endParaRPr/>
           </a:p>
         </p:txBody>
       </p:sp>
@@ -20029,7 +20099,7 @@
           <a:noFill/>
         </p:spPr>
         <p:txBody>
-          <a:bodyPr wrap="square" anchor="t" lIns="0" rIns="0" tIns="0" bIns="0">
+          <a:bodyPr wrap="square" lIns="0" tIns="0" rIns="0" bIns="0" anchor="t">
             <a:spAutoFit/>
           </a:bodyPr>
           <a:lstStyle/>
@@ -20068,7 +20138,7 @@
           <a:noFill/>
         </p:spPr>
         <p:txBody>
-          <a:bodyPr wrap="square" anchor="t" lIns="0" rIns="0" tIns="0" bIns="0">
+          <a:bodyPr wrap="square" lIns="0" tIns="0" rIns="0" bIns="0" anchor="t">
             <a:spAutoFit/>
           </a:bodyPr>
           <a:lstStyle/>
@@ -20131,7 +20201,7 @@
           </a:fontRef>
         </p:style>
         <p:txBody>
-          <a:bodyPr rtlCol="0" anchor="ctr" wrap="square" lIns="54864" rIns="54864" tIns="0" bIns="0"/>
+          <a:bodyPr wrap="square" lIns="54864" tIns="0" rIns="54864" bIns="0" rtlCol="0" anchor="ctr"/>
           <a:lstStyle/>
           <a:p>
             <a:pPr algn="ctr"/>
@@ -20192,6 +20262,7 @@
           <a:lstStyle/>
           <a:p>
             <a:pPr algn="ctr"/>
+            <a:endParaRPr/>
           </a:p>
         </p:txBody>
       </p:sp>
@@ -20212,7 +20283,7 @@
           <a:noFill/>
         </p:spPr>
         <p:txBody>
-          <a:bodyPr wrap="square" anchor="t" lIns="0" rIns="0" tIns="0" bIns="0">
+          <a:bodyPr wrap="square" lIns="0" tIns="0" rIns="0" bIns="0" anchor="t">
             <a:spAutoFit/>
           </a:bodyPr>
           <a:lstStyle/>
@@ -20251,7 +20322,7 @@
           <a:noFill/>
         </p:spPr>
         <p:txBody>
-          <a:bodyPr wrap="square" anchor="t" lIns="0" rIns="0" tIns="0" bIns="0">
+          <a:bodyPr wrap="square" lIns="0" tIns="0" rIns="0" bIns="0" anchor="t">
             <a:spAutoFit/>
           </a:bodyPr>
           <a:lstStyle/>
@@ -20314,7 +20385,7 @@
           </a:fontRef>
         </p:style>
         <p:txBody>
-          <a:bodyPr rtlCol="0" anchor="ctr" wrap="square" lIns="54864" rIns="54864" tIns="0" bIns="0"/>
+          <a:bodyPr wrap="square" lIns="54864" tIns="0" rIns="54864" bIns="0" rtlCol="0" anchor="ctr"/>
           <a:lstStyle/>
           <a:p>
             <a:pPr algn="ctr"/>
@@ -20375,6 +20446,7 @@
           <a:lstStyle/>
           <a:p>
             <a:pPr algn="ctr"/>
+            <a:endParaRPr/>
           </a:p>
         </p:txBody>
       </p:sp>
@@ -20395,7 +20467,7 @@
           <a:noFill/>
         </p:spPr>
         <p:txBody>
-          <a:bodyPr wrap="square" anchor="t" lIns="0" rIns="0" tIns="0" bIns="0">
+          <a:bodyPr wrap="square" lIns="0" tIns="0" rIns="0" bIns="0" anchor="t">
             <a:spAutoFit/>
           </a:bodyPr>
           <a:lstStyle/>
@@ -20434,7 +20506,7 @@
           <a:noFill/>
         </p:spPr>
         <p:txBody>
-          <a:bodyPr wrap="square" anchor="t" lIns="0" rIns="0" tIns="0" bIns="0">
+          <a:bodyPr wrap="square" lIns="0" tIns="0" rIns="0" bIns="0" anchor="t">
             <a:spAutoFit/>
           </a:bodyPr>
           <a:lstStyle/>
@@ -20497,7 +20569,7 @@
           </a:fontRef>
         </p:style>
         <p:txBody>
-          <a:bodyPr rtlCol="0" anchor="ctr" wrap="square" lIns="54864" rIns="54864" tIns="0" bIns="0"/>
+          <a:bodyPr wrap="square" lIns="54864" tIns="0" rIns="54864" bIns="0" rtlCol="0" anchor="ctr"/>
           <a:lstStyle/>
           <a:p>
             <a:pPr algn="ctr"/>
@@ -20558,6 +20630,7 @@
           <a:lstStyle/>
           <a:p>
             <a:pPr algn="ctr"/>
+            <a:endParaRPr/>
           </a:p>
         </p:txBody>
       </p:sp>
@@ -20578,7 +20651,7 @@
           <a:noFill/>
         </p:spPr>
         <p:txBody>
-          <a:bodyPr wrap="square" anchor="t" lIns="0" rIns="0" tIns="0" bIns="0">
+          <a:bodyPr wrap="square" lIns="0" tIns="0" rIns="0" bIns="0" anchor="t">
             <a:spAutoFit/>
           </a:bodyPr>
           <a:lstStyle/>
@@ -20617,7 +20690,7 @@
           <a:noFill/>
         </p:spPr>
         <p:txBody>
-          <a:bodyPr wrap="square" anchor="t" lIns="0" rIns="0" tIns="0" bIns="0">
+          <a:bodyPr wrap="square" lIns="0" tIns="0" rIns="0" bIns="0" anchor="t">
             <a:spAutoFit/>
           </a:bodyPr>
           <a:lstStyle/>
@@ -20680,7 +20753,7 @@
           </a:fontRef>
         </p:style>
         <p:txBody>
-          <a:bodyPr rtlCol="0" anchor="ctr" wrap="square" lIns="54864" rIns="54864" tIns="0" bIns="0"/>
+          <a:bodyPr wrap="square" lIns="54864" tIns="0" rIns="54864" bIns="0" rtlCol="0" anchor="ctr"/>
           <a:lstStyle/>
           <a:p>
             <a:pPr algn="ctr"/>
@@ -20741,6 +20814,7 @@
           <a:lstStyle/>
           <a:p>
             <a:pPr algn="ctr"/>
+            <a:endParaRPr/>
           </a:p>
         </p:txBody>
       </p:sp>
@@ -20761,7 +20835,7 @@
           <a:noFill/>
         </p:spPr>
         <p:txBody>
-          <a:bodyPr wrap="square" anchor="t" lIns="0" rIns="0" tIns="0" bIns="0">
+          <a:bodyPr wrap="square" lIns="0" tIns="0" rIns="0" bIns="0" anchor="t">
             <a:spAutoFit/>
           </a:bodyPr>
           <a:lstStyle/>
@@ -20800,7 +20874,7 @@
           <a:noFill/>
         </p:spPr>
         <p:txBody>
-          <a:bodyPr wrap="square" anchor="t" lIns="0" rIns="0" tIns="0" bIns="0">
+          <a:bodyPr wrap="square" lIns="0" tIns="0" rIns="0" bIns="0" anchor="t">
             <a:spAutoFit/>
           </a:bodyPr>
           <a:lstStyle/>
@@ -20863,7 +20937,7 @@
           </a:fontRef>
         </p:style>
         <p:txBody>
-          <a:bodyPr rtlCol="0" anchor="ctr" wrap="square" lIns="54864" rIns="54864" tIns="0" bIns="0"/>
+          <a:bodyPr wrap="square" lIns="54864" tIns="0" rIns="54864" bIns="0" rtlCol="0" anchor="ctr"/>
           <a:lstStyle/>
           <a:p>
             <a:pPr algn="ctr"/>
@@ -20924,6 +20998,7 @@
           <a:lstStyle/>
           <a:p>
             <a:pPr algn="ctr"/>
+            <a:endParaRPr/>
           </a:p>
         </p:txBody>
       </p:sp>
@@ -20944,7 +21019,7 @@
           <a:noFill/>
         </p:spPr>
         <p:txBody>
-          <a:bodyPr wrap="square" anchor="t" lIns="0" rIns="0" tIns="0" bIns="0">
+          <a:bodyPr wrap="square" lIns="0" tIns="0" rIns="0" bIns="0" anchor="t">
             <a:spAutoFit/>
           </a:bodyPr>
           <a:lstStyle/>
@@ -20999,7 +21074,7 @@
           <a:noFill/>
         </p:spPr>
         <p:txBody>
-          <a:bodyPr wrap="square" anchor="t" lIns="0" rIns="0" tIns="0" bIns="0">
+          <a:bodyPr wrap="square" lIns="0" tIns="0" rIns="0" bIns="0" anchor="t">
             <a:spAutoFit/>
           </a:bodyPr>
           <a:lstStyle/>
@@ -21038,7 +21113,7 @@
           <a:noFill/>
         </p:spPr>
         <p:txBody>
-          <a:bodyPr wrap="square" anchor="t" lIns="0" rIns="0" tIns="0" bIns="0">
+          <a:bodyPr wrap="square" lIns="0" tIns="0" rIns="0" bIns="0" anchor="t">
             <a:spAutoFit/>
           </a:bodyPr>
           <a:lstStyle/>
@@ -21065,11 +21140,23 @@
   <p:clrMapOvr>
     <a:masterClrMapping/>
   </p:clrMapOvr>
+  <mc:AlternateContent xmlns:mc="http://schemas.openxmlformats.org/markup-compatibility/2006">
+    <mc:Choice xmlns:p14="http://schemas.microsoft.com/office/powerpoint/2010/main" Requires="p14">
+      <p:transition spd="med" p14:dur="700">
+        <p:fade thruBlk="1"/>
+      </p:transition>
+    </mc:Choice>
+    <mc:Fallback>
+      <p:transition spd="med">
+        <p:fade thruBlk="1"/>
+      </p:transition>
+    </mc:Fallback>
+  </mc:AlternateContent>
 </p:sld>
 </file>
 
 <file path=ppt/slides/slide23.xml><?xml version="1.0" encoding="utf-8"?>
-<p:sld xmlns:a="http://schemas.openxmlformats.org/drawingml/2006/main" xmlns:p="http://schemas.openxmlformats.org/presentationml/2006/main" xmlns:r="http://schemas.openxmlformats.org/officeDocument/2006/relationships">
+<p:sld xmlns:a="http://schemas.openxmlformats.org/drawingml/2006/main" xmlns:r="http://schemas.openxmlformats.org/officeDocument/2006/relationships" xmlns:p="http://schemas.openxmlformats.org/presentationml/2006/main">
   <p:cSld>
     <p:spTree>
       <p:nvGrpSpPr>
@@ -21077,7 +21164,14 @@
         <p:cNvGrpSpPr/>
         <p:nvPr/>
       </p:nvGrpSpPr>
-      <p:grpSpPr/>
+      <p:grpSpPr>
+        <a:xfrm>
+          <a:off x="0" y="0"/>
+          <a:ext cx="0" cy="0"/>
+          <a:chOff x="0" y="0"/>
+          <a:chExt cx="0" cy="0"/>
+        </a:xfrm>
+      </p:grpSpPr>
       <p:pic>
         <p:nvPicPr>
           <p:cNvPr id="2" name="Picture 1" descr="bg_mod.png"/>
@@ -21119,7 +21213,7 @@
           <a:noFill/>
         </p:spPr>
         <p:txBody>
-          <a:bodyPr wrap="square" anchor="t" lIns="0" rIns="0" tIns="0" bIns="0">
+          <a:bodyPr wrap="square" lIns="0" tIns="0" rIns="0" bIns="0" anchor="t">
             <a:spAutoFit/>
           </a:bodyPr>
           <a:lstStyle/>
@@ -21158,7 +21252,7 @@
           <a:noFill/>
         </p:spPr>
         <p:txBody>
-          <a:bodyPr wrap="square" anchor="t" lIns="0" rIns="0" tIns="0" bIns="0">
+          <a:bodyPr wrap="square" lIns="0" tIns="0" rIns="0" bIns="0" anchor="t">
             <a:spAutoFit/>
           </a:bodyPr>
           <a:lstStyle/>
@@ -21225,6 +21319,7 @@
           <a:lstStyle/>
           <a:p>
             <a:pPr algn="ctr"/>
+            <a:endParaRPr/>
           </a:p>
         </p:txBody>
       </p:sp>
@@ -21245,7 +21340,7 @@
           <a:noFill/>
         </p:spPr>
         <p:txBody>
-          <a:bodyPr wrap="square" anchor="t" lIns="0" rIns="0" tIns="0" bIns="0">
+          <a:bodyPr wrap="square" lIns="0" tIns="0" rIns="0" bIns="0" anchor="t">
             <a:spAutoFit/>
           </a:bodyPr>
           <a:lstStyle/>
@@ -21284,7 +21379,7 @@
           <a:noFill/>
         </p:spPr>
         <p:txBody>
-          <a:bodyPr wrap="square" anchor="t" lIns="0" rIns="0" tIns="0" bIns="0">
+          <a:bodyPr wrap="square" lIns="0" tIns="0" rIns="0" bIns="0" anchor="t">
             <a:spAutoFit/>
           </a:bodyPr>
           <a:lstStyle/>
@@ -21323,7 +21418,7 @@
           <a:noFill/>
         </p:spPr>
         <p:txBody>
-          <a:bodyPr wrap="square" anchor="t" lIns="0" rIns="0" tIns="0" bIns="0">
+          <a:bodyPr wrap="square" lIns="0" tIns="0" rIns="0" bIns="0" anchor="t">
             <a:spAutoFit/>
           </a:bodyPr>
           <a:lstStyle/>
@@ -21362,7 +21457,7 @@
           <a:noFill/>
         </p:spPr>
         <p:txBody>
-          <a:bodyPr wrap="square" anchor="t" lIns="0" rIns="0" tIns="0" bIns="0">
+          <a:bodyPr wrap="square" lIns="0" tIns="0" rIns="0" bIns="0" anchor="t">
             <a:spAutoFit/>
           </a:bodyPr>
           <a:lstStyle/>
@@ -21401,7 +21496,7 @@
           <a:noFill/>
         </p:spPr>
         <p:txBody>
-          <a:bodyPr wrap="square" anchor="t" lIns="0" rIns="0" tIns="0" bIns="0">
+          <a:bodyPr wrap="square" lIns="0" tIns="0" rIns="0" bIns="0" anchor="t">
             <a:spAutoFit/>
           </a:bodyPr>
           <a:lstStyle/>
@@ -21440,7 +21535,7 @@
           <a:noFill/>
         </p:spPr>
         <p:txBody>
-          <a:bodyPr wrap="square" anchor="t" lIns="0" rIns="0" tIns="0" bIns="0">
+          <a:bodyPr wrap="square" lIns="0" tIns="0" rIns="0" bIns="0" anchor="t">
             <a:spAutoFit/>
           </a:bodyPr>
           <a:lstStyle/>
@@ -21507,6 +21602,7 @@
           <a:lstStyle/>
           <a:p>
             <a:pPr algn="ctr"/>
+            <a:endParaRPr/>
           </a:p>
         </p:txBody>
       </p:sp>
@@ -21527,7 +21623,7 @@
           <a:noFill/>
         </p:spPr>
         <p:txBody>
-          <a:bodyPr wrap="square" anchor="t" lIns="0" rIns="0" tIns="0" bIns="0">
+          <a:bodyPr wrap="square" lIns="0" tIns="0" rIns="0" bIns="0" anchor="t">
             <a:spAutoFit/>
           </a:bodyPr>
           <a:lstStyle/>
@@ -21566,7 +21662,7 @@
           <a:noFill/>
         </p:spPr>
         <p:txBody>
-          <a:bodyPr wrap="square" anchor="t" lIns="0" rIns="0" tIns="0" bIns="0">
+          <a:bodyPr wrap="square" lIns="0" tIns="0" rIns="0" bIns="0" anchor="t">
             <a:spAutoFit/>
           </a:bodyPr>
           <a:lstStyle/>
@@ -21605,7 +21701,7 @@
           <a:noFill/>
         </p:spPr>
         <p:txBody>
-          <a:bodyPr wrap="square" anchor="t" lIns="0" rIns="0" tIns="0" bIns="0">
+          <a:bodyPr wrap="square" lIns="0" tIns="0" rIns="0" bIns="0" anchor="t">
             <a:spAutoFit/>
           </a:bodyPr>
           <a:lstStyle/>
@@ -21644,7 +21740,7 @@
           <a:noFill/>
         </p:spPr>
         <p:txBody>
-          <a:bodyPr wrap="square" anchor="t" lIns="0" rIns="0" tIns="0" bIns="0">
+          <a:bodyPr wrap="square" lIns="0" tIns="0" rIns="0" bIns="0" anchor="t">
             <a:spAutoFit/>
           </a:bodyPr>
           <a:lstStyle/>
@@ -21683,7 +21779,7 @@
           <a:noFill/>
         </p:spPr>
         <p:txBody>
-          <a:bodyPr wrap="square" anchor="t" lIns="0" rIns="0" tIns="0" bIns="0">
+          <a:bodyPr wrap="square" lIns="0" tIns="0" rIns="0" bIns="0" anchor="t">
             <a:spAutoFit/>
           </a:bodyPr>
           <a:lstStyle/>
@@ -21722,7 +21818,7 @@
           <a:noFill/>
         </p:spPr>
         <p:txBody>
-          <a:bodyPr wrap="square" anchor="t" lIns="0" rIns="0" tIns="0" bIns="0">
+          <a:bodyPr wrap="square" lIns="0" tIns="0" rIns="0" bIns="0" anchor="t">
             <a:spAutoFit/>
           </a:bodyPr>
           <a:lstStyle/>
@@ -21761,7 +21857,7 @@
           <a:noFill/>
         </p:spPr>
         <p:txBody>
-          <a:bodyPr wrap="square" anchor="t" lIns="0" rIns="0" tIns="0" bIns="0">
+          <a:bodyPr wrap="square" lIns="0" tIns="0" rIns="0" bIns="0" anchor="t">
             <a:spAutoFit/>
           </a:bodyPr>
           <a:lstStyle/>
@@ -21800,7 +21896,7 @@
           <a:noFill/>
         </p:spPr>
         <p:txBody>
-          <a:bodyPr wrap="square" anchor="t" lIns="0" rIns="0" tIns="0" bIns="0">
+          <a:bodyPr wrap="square" lIns="0" tIns="0" rIns="0" bIns="0" anchor="t">
             <a:spAutoFit/>
           </a:bodyPr>
           <a:lstStyle/>
@@ -21839,7 +21935,7 @@
           <a:noFill/>
         </p:spPr>
         <p:txBody>
-          <a:bodyPr wrap="square" anchor="t" lIns="0" rIns="0" tIns="0" bIns="0">
+          <a:bodyPr wrap="square" lIns="0" tIns="0" rIns="0" bIns="0" anchor="t">
             <a:spAutoFit/>
           </a:bodyPr>
           <a:lstStyle/>
@@ -21878,7 +21974,7 @@
           <a:noFill/>
         </p:spPr>
         <p:txBody>
-          <a:bodyPr wrap="square" anchor="t" lIns="0" rIns="0" tIns="0" bIns="0">
+          <a:bodyPr wrap="square" lIns="0" tIns="0" rIns="0" bIns="0" anchor="t">
             <a:spAutoFit/>
           </a:bodyPr>
           <a:lstStyle/>
@@ -21905,11 +22001,23 @@
   <p:clrMapOvr>
     <a:masterClrMapping/>
   </p:clrMapOvr>
+  <mc:AlternateContent xmlns:mc="http://schemas.openxmlformats.org/markup-compatibility/2006">
+    <mc:Choice xmlns:p14="http://schemas.microsoft.com/office/powerpoint/2010/main" Requires="p14">
+      <p:transition spd="med" p14:dur="700">
+        <p:fade thruBlk="1"/>
+      </p:transition>
+    </mc:Choice>
+    <mc:Fallback>
+      <p:transition spd="med">
+        <p:fade thruBlk="1"/>
+      </p:transition>
+    </mc:Fallback>
+  </mc:AlternateContent>
 </p:sld>
 </file>
 
 <file path=ppt/slides/slide24.xml><?xml version="1.0" encoding="utf-8"?>
-<p:sld xmlns:a="http://schemas.openxmlformats.org/drawingml/2006/main" xmlns:p="http://schemas.openxmlformats.org/presentationml/2006/main" xmlns:r="http://schemas.openxmlformats.org/officeDocument/2006/relationships">
+<p:sld xmlns:a="http://schemas.openxmlformats.org/drawingml/2006/main" xmlns:r="http://schemas.openxmlformats.org/officeDocument/2006/relationships" xmlns:p="http://schemas.openxmlformats.org/presentationml/2006/main">
   <p:cSld>
     <p:spTree>
       <p:nvGrpSpPr>
@@ -21917,7 +22025,14 @@
         <p:cNvGrpSpPr/>
         <p:nvPr/>
       </p:nvGrpSpPr>
-      <p:grpSpPr/>
+      <p:grpSpPr>
+        <a:xfrm>
+          <a:off x="0" y="0"/>
+          <a:ext cx="0" cy="0"/>
+          <a:chOff x="0" y="0"/>
+          <a:chExt cx="0" cy="0"/>
+        </a:xfrm>
+      </p:grpSpPr>
       <p:pic>
         <p:nvPicPr>
           <p:cNvPr id="2" name="Picture 1" descr="bg_deep.png"/>
@@ -21959,7 +22074,7 @@
           <a:noFill/>
         </p:spPr>
         <p:txBody>
-          <a:bodyPr wrap="square" anchor="t" lIns="0" rIns="0" tIns="0" bIns="0">
+          <a:bodyPr wrap="square" lIns="0" tIns="0" rIns="0" bIns="0" anchor="t">
             <a:spAutoFit/>
           </a:bodyPr>
           <a:lstStyle/>
@@ -21998,7 +22113,7 @@
           <a:noFill/>
         </p:spPr>
         <p:txBody>
-          <a:bodyPr wrap="square" anchor="t" lIns="0" rIns="0" tIns="0" bIns="0">
+          <a:bodyPr wrap="square" lIns="0" tIns="0" rIns="0" bIns="0" anchor="t">
             <a:spAutoFit/>
           </a:bodyPr>
           <a:lstStyle/>
@@ -22037,7 +22152,7 @@
           <a:noFill/>
         </p:spPr>
         <p:txBody>
-          <a:bodyPr wrap="square" anchor="t" lIns="0" rIns="0" tIns="0" bIns="0">
+          <a:bodyPr wrap="square" lIns="0" tIns="0" rIns="0" bIns="0" anchor="t">
             <a:spAutoFit/>
           </a:bodyPr>
           <a:lstStyle/>
@@ -22104,6 +22219,7 @@
           <a:lstStyle/>
           <a:p>
             <a:pPr algn="ctr"/>
+            <a:endParaRPr/>
           </a:p>
         </p:txBody>
       </p:sp>
@@ -22124,7 +22240,7 @@
           <a:noFill/>
         </p:spPr>
         <p:txBody>
-          <a:bodyPr wrap="square" anchor="t" lIns="0" rIns="0" tIns="0" bIns="0">
+          <a:bodyPr wrap="square" lIns="0" tIns="0" rIns="0" bIns="0" anchor="t">
             <a:spAutoFit/>
           </a:bodyPr>
           <a:lstStyle/>
@@ -22163,7 +22279,7 @@
           <a:noFill/>
         </p:spPr>
         <p:txBody>
-          <a:bodyPr wrap="square" anchor="t" lIns="0" rIns="0" tIns="0" bIns="0">
+          <a:bodyPr wrap="square" lIns="0" tIns="0" rIns="0" bIns="0" anchor="t">
             <a:spAutoFit/>
           </a:bodyPr>
           <a:lstStyle/>
@@ -22202,7 +22318,7 @@
           <a:noFill/>
         </p:spPr>
         <p:txBody>
-          <a:bodyPr wrap="square" anchor="t" lIns="0" rIns="0" tIns="0" bIns="0">
+          <a:bodyPr wrap="square" lIns="0" tIns="0" rIns="0" bIns="0" anchor="t">
             <a:spAutoFit/>
           </a:bodyPr>
           <a:lstStyle/>
@@ -22269,6 +22385,7 @@
           <a:lstStyle/>
           <a:p>
             <a:pPr algn="ctr"/>
+            <a:endParaRPr/>
           </a:p>
         </p:txBody>
       </p:sp>
@@ -22289,7 +22406,7 @@
           <a:noFill/>
         </p:spPr>
         <p:txBody>
-          <a:bodyPr wrap="square" anchor="t" lIns="0" rIns="0" tIns="0" bIns="0">
+          <a:bodyPr wrap="square" lIns="0" tIns="0" rIns="0" bIns="0" anchor="t">
             <a:spAutoFit/>
           </a:bodyPr>
           <a:lstStyle/>
@@ -22328,7 +22445,7 @@
           <a:noFill/>
         </p:spPr>
         <p:txBody>
-          <a:bodyPr wrap="square" anchor="t" lIns="0" rIns="0" tIns="0" bIns="0">
+          <a:bodyPr wrap="square" lIns="0" tIns="0" rIns="0" bIns="0" anchor="t">
             <a:spAutoFit/>
           </a:bodyPr>
           <a:lstStyle/>
@@ -22367,7 +22484,7 @@
           <a:noFill/>
         </p:spPr>
         <p:txBody>
-          <a:bodyPr wrap="square" anchor="t" lIns="0" rIns="0" tIns="0" bIns="0">
+          <a:bodyPr wrap="square" lIns="0" tIns="0" rIns="0" bIns="0" anchor="t">
             <a:spAutoFit/>
           </a:bodyPr>
           <a:lstStyle/>
@@ -22434,6 +22551,7 @@
           <a:lstStyle/>
           <a:p>
             <a:pPr algn="ctr"/>
+            <a:endParaRPr/>
           </a:p>
         </p:txBody>
       </p:sp>
@@ -22454,7 +22572,7 @@
           <a:noFill/>
         </p:spPr>
         <p:txBody>
-          <a:bodyPr wrap="square" anchor="t" lIns="0" rIns="0" tIns="0" bIns="0">
+          <a:bodyPr wrap="square" lIns="0" tIns="0" rIns="0" bIns="0" anchor="t">
             <a:spAutoFit/>
           </a:bodyPr>
           <a:lstStyle/>
@@ -22493,7 +22611,7 @@
           <a:noFill/>
         </p:spPr>
         <p:txBody>
-          <a:bodyPr wrap="square" anchor="t" lIns="0" rIns="0" tIns="0" bIns="0">
+          <a:bodyPr wrap="square" lIns="0" tIns="0" rIns="0" bIns="0" anchor="t">
             <a:spAutoFit/>
           </a:bodyPr>
           <a:lstStyle/>
@@ -22532,7 +22650,7 @@
           <a:noFill/>
         </p:spPr>
         <p:txBody>
-          <a:bodyPr wrap="square" anchor="t" lIns="0" rIns="0" tIns="0" bIns="0">
+          <a:bodyPr wrap="square" lIns="0" tIns="0" rIns="0" bIns="0" anchor="t">
             <a:spAutoFit/>
           </a:bodyPr>
           <a:lstStyle/>
@@ -22599,6 +22717,7 @@
           <a:lstStyle/>
           <a:p>
             <a:pPr algn="ctr"/>
+            <a:endParaRPr/>
           </a:p>
         </p:txBody>
       </p:sp>
@@ -22619,7 +22738,7 @@
           <a:noFill/>
         </p:spPr>
         <p:txBody>
-          <a:bodyPr wrap="square" anchor="t" lIns="0" rIns="0" tIns="0" bIns="0">
+          <a:bodyPr wrap="square" lIns="0" tIns="0" rIns="0" bIns="0" anchor="t">
             <a:spAutoFit/>
           </a:bodyPr>
           <a:lstStyle/>
@@ -22658,7 +22777,7 @@
           <a:noFill/>
         </p:spPr>
         <p:txBody>
-          <a:bodyPr wrap="square" anchor="t" lIns="0" rIns="0" tIns="0" bIns="0">
+          <a:bodyPr wrap="square" lIns="0" tIns="0" rIns="0" bIns="0" anchor="t">
             <a:spAutoFit/>
           </a:bodyPr>
           <a:lstStyle/>
@@ -22697,7 +22816,7 @@
           <a:noFill/>
         </p:spPr>
         <p:txBody>
-          <a:bodyPr wrap="square" anchor="t" lIns="0" rIns="0" tIns="0" bIns="0">
+          <a:bodyPr wrap="square" lIns="0" tIns="0" rIns="0" bIns="0" anchor="t">
             <a:spAutoFit/>
           </a:bodyPr>
           <a:lstStyle/>
@@ -22764,6 +22883,7 @@
           <a:lstStyle/>
           <a:p>
             <a:pPr algn="ctr"/>
+            <a:endParaRPr/>
           </a:p>
         </p:txBody>
       </p:sp>
@@ -22784,7 +22904,7 @@
           <a:noFill/>
         </p:spPr>
         <p:txBody>
-          <a:bodyPr wrap="square" anchor="t" lIns="0" rIns="0" tIns="0" bIns="0">
+          <a:bodyPr wrap="square" lIns="0" tIns="0" rIns="0" bIns="0" anchor="t">
             <a:spAutoFit/>
           </a:bodyPr>
           <a:lstStyle/>
@@ -22823,7 +22943,7 @@
           <a:noFill/>
         </p:spPr>
         <p:txBody>
-          <a:bodyPr wrap="square" anchor="t" lIns="0" rIns="0" tIns="0" bIns="0">
+          <a:bodyPr wrap="square" lIns="0" tIns="0" rIns="0" bIns="0" anchor="t">
             <a:spAutoFit/>
           </a:bodyPr>
           <a:lstStyle/>
@@ -22862,7 +22982,7 @@
           <a:noFill/>
         </p:spPr>
         <p:txBody>
-          <a:bodyPr wrap="square" anchor="t" lIns="0" rIns="0" tIns="0" bIns="0">
+          <a:bodyPr wrap="square" lIns="0" tIns="0" rIns="0" bIns="0" anchor="t">
             <a:spAutoFit/>
           </a:bodyPr>
           <a:lstStyle/>
@@ -22929,6 +23049,7 @@
           <a:lstStyle/>
           <a:p>
             <a:pPr algn="ctr"/>
+            <a:endParaRPr/>
           </a:p>
         </p:txBody>
       </p:sp>
@@ -22949,7 +23070,7 @@
           <a:noFill/>
         </p:spPr>
         <p:txBody>
-          <a:bodyPr wrap="square" anchor="t" lIns="0" rIns="0" tIns="0" bIns="0">
+          <a:bodyPr wrap="square" lIns="0" tIns="0" rIns="0" bIns="0" anchor="t">
             <a:spAutoFit/>
           </a:bodyPr>
           <a:lstStyle/>
@@ -22988,7 +23109,7 @@
           <a:noFill/>
         </p:spPr>
         <p:txBody>
-          <a:bodyPr wrap="square" anchor="t" lIns="0" rIns="0" tIns="0" bIns="0">
+          <a:bodyPr wrap="square" lIns="0" tIns="0" rIns="0" bIns="0" anchor="t">
             <a:spAutoFit/>
           </a:bodyPr>
           <a:lstStyle/>
@@ -23027,7 +23148,7 @@
           <a:noFill/>
         </p:spPr>
         <p:txBody>
-          <a:bodyPr wrap="square" anchor="t" lIns="0" rIns="0" tIns="0" bIns="0">
+          <a:bodyPr wrap="square" lIns="0" tIns="0" rIns="0" bIns="0" anchor="t">
             <a:spAutoFit/>
           </a:bodyPr>
           <a:lstStyle/>
@@ -23092,6 +23213,7 @@
           <a:lstStyle/>
           <a:p>
             <a:pPr algn="ctr"/>
+            <a:endParaRPr/>
           </a:p>
         </p:txBody>
       </p:sp>
@@ -23112,7 +23234,7 @@
           <a:noFill/>
         </p:spPr>
         <p:txBody>
-          <a:bodyPr wrap="square" anchor="t" lIns="0" rIns="0" tIns="0" bIns="0">
+          <a:bodyPr wrap="square" lIns="0" tIns="0" rIns="0" bIns="0" anchor="t">
             <a:spAutoFit/>
           </a:bodyPr>
           <a:lstStyle/>
@@ -23151,7 +23273,7 @@
           <a:noFill/>
         </p:spPr>
         <p:txBody>
-          <a:bodyPr wrap="square" anchor="t" lIns="0" rIns="0" tIns="0" bIns="0">
+          <a:bodyPr wrap="square" lIns="0" tIns="0" rIns="0" bIns="0" anchor="t">
             <a:spAutoFit/>
           </a:bodyPr>
           <a:lstStyle/>
@@ -23190,7 +23312,7 @@
           <a:noFill/>
         </p:spPr>
         <p:txBody>
-          <a:bodyPr wrap="square" anchor="t" lIns="0" rIns="0" tIns="0" bIns="0">
+          <a:bodyPr wrap="square" lIns="0" tIns="0" rIns="0" bIns="0" anchor="t">
             <a:spAutoFit/>
           </a:bodyPr>
           <a:lstStyle/>
@@ -23217,11 +23339,23 @@
   <p:clrMapOvr>
     <a:masterClrMapping/>
   </p:clrMapOvr>
+  <mc:AlternateContent xmlns:mc="http://schemas.openxmlformats.org/markup-compatibility/2006">
+    <mc:Choice xmlns:p14="http://schemas.microsoft.com/office/powerpoint/2010/main" Requires="p14">
+      <p:transition spd="med" p14:dur="700">
+        <p:fade thruBlk="1"/>
+      </p:transition>
+    </mc:Choice>
+    <mc:Fallback>
+      <p:transition spd="med">
+        <p:fade thruBlk="1"/>
+      </p:transition>
+    </mc:Fallback>
+  </mc:AlternateContent>
 </p:sld>
 </file>
 
 <file path=ppt/slides/slide25.xml><?xml version="1.0" encoding="utf-8"?>
-<p:sld xmlns:a="http://schemas.openxmlformats.org/drawingml/2006/main" xmlns:p="http://schemas.openxmlformats.org/presentationml/2006/main" xmlns:r="http://schemas.openxmlformats.org/officeDocument/2006/relationships">
+<p:sld xmlns:a="http://schemas.openxmlformats.org/drawingml/2006/main" xmlns:r="http://schemas.openxmlformats.org/officeDocument/2006/relationships" xmlns:p="http://schemas.openxmlformats.org/presentationml/2006/main">
   <p:cSld>
     <p:spTree>
       <p:nvGrpSpPr>
@@ -23229,7 +23363,14 @@
         <p:cNvGrpSpPr/>
         <p:nvPr/>
       </p:nvGrpSpPr>
-      <p:grpSpPr/>
+      <p:grpSpPr>
+        <a:xfrm>
+          <a:off x="0" y="0"/>
+          <a:ext cx="0" cy="0"/>
+          <a:chOff x="0" y="0"/>
+          <a:chExt cx="0" cy="0"/>
+        </a:xfrm>
+      </p:grpSpPr>
       <p:pic>
         <p:nvPicPr>
           <p:cNvPr id="2" name="Picture 1" descr="bg_deep.png"/>
@@ -23271,7 +23412,7 @@
           <a:noFill/>
         </p:spPr>
         <p:txBody>
-          <a:bodyPr wrap="square" anchor="t" lIns="0" rIns="0" tIns="0" bIns="0">
+          <a:bodyPr wrap="square" lIns="0" tIns="0" rIns="0" bIns="0" anchor="t">
             <a:spAutoFit/>
           </a:bodyPr>
           <a:lstStyle/>
@@ -23310,7 +23451,7 @@
           <a:noFill/>
         </p:spPr>
         <p:txBody>
-          <a:bodyPr wrap="square" anchor="t" lIns="0" rIns="0" tIns="0" bIns="0">
+          <a:bodyPr wrap="square" lIns="0" tIns="0" rIns="0" bIns="0" anchor="t">
             <a:spAutoFit/>
           </a:bodyPr>
           <a:lstStyle/>
@@ -23349,7 +23490,7 @@
           <a:noFill/>
         </p:spPr>
         <p:txBody>
-          <a:bodyPr wrap="square" anchor="t" lIns="0" rIns="0" tIns="0" bIns="0">
+          <a:bodyPr wrap="square" lIns="0" tIns="0" rIns="0" bIns="0" anchor="t">
             <a:spAutoFit/>
           </a:bodyPr>
           <a:lstStyle/>
@@ -23388,7 +23529,7 @@
           <a:noFill/>
         </p:spPr>
         <p:txBody>
-          <a:bodyPr wrap="square" anchor="t" lIns="0" rIns="0" tIns="0" bIns="0">
+          <a:bodyPr wrap="square" lIns="0" tIns="0" rIns="0" bIns="0" anchor="t">
             <a:spAutoFit/>
           </a:bodyPr>
           <a:lstStyle/>
@@ -23427,7 +23568,7 @@
           <a:noFill/>
         </p:spPr>
         <p:txBody>
-          <a:bodyPr wrap="square" anchor="t" lIns="0" rIns="0" tIns="0" bIns="0">
+          <a:bodyPr wrap="square" lIns="0" tIns="0" rIns="0" bIns="0" anchor="t">
             <a:spAutoFit/>
           </a:bodyPr>
           <a:lstStyle/>
@@ -23466,7 +23607,7 @@
           <a:noFill/>
         </p:spPr>
         <p:txBody>
-          <a:bodyPr wrap="square" anchor="t" lIns="0" rIns="0" tIns="0" bIns="0">
+          <a:bodyPr wrap="square" lIns="0" tIns="0" rIns="0" bIns="0" anchor="t">
             <a:spAutoFit/>
           </a:bodyPr>
           <a:lstStyle/>
@@ -23505,7 +23646,7 @@
           <a:noFill/>
         </p:spPr>
         <p:txBody>
-          <a:bodyPr wrap="square" anchor="t" lIns="0" rIns="0" tIns="0" bIns="0">
+          <a:bodyPr wrap="square" lIns="0" tIns="0" rIns="0" bIns="0" anchor="t">
             <a:spAutoFit/>
           </a:bodyPr>
           <a:lstStyle/>
@@ -23572,6 +23713,7 @@
           <a:lstStyle/>
           <a:p>
             <a:pPr algn="ctr"/>
+            <a:endParaRPr/>
           </a:p>
         </p:txBody>
       </p:sp>
@@ -23592,7 +23734,7 @@
           <a:noFill/>
         </p:spPr>
         <p:txBody>
-          <a:bodyPr wrap="square" anchor="t" lIns="0" rIns="0" tIns="0" bIns="0">
+          <a:bodyPr wrap="square" lIns="0" tIns="0" rIns="0" bIns="0" anchor="t">
             <a:spAutoFit/>
           </a:bodyPr>
           <a:lstStyle/>
@@ -23631,7 +23773,7 @@
           <a:noFill/>
         </p:spPr>
         <p:txBody>
-          <a:bodyPr wrap="square" anchor="t" lIns="0" rIns="0" tIns="0" bIns="0">
+          <a:bodyPr wrap="square" lIns="0" tIns="0" rIns="0" bIns="0" anchor="t">
             <a:spAutoFit/>
           </a:bodyPr>
           <a:lstStyle/>
@@ -23670,7 +23812,7 @@
           <a:noFill/>
         </p:spPr>
         <p:txBody>
-          <a:bodyPr wrap="square" anchor="t" lIns="0" rIns="0" tIns="0" bIns="0">
+          <a:bodyPr wrap="square" lIns="0" tIns="0" rIns="0" bIns="0" anchor="t">
             <a:spAutoFit/>
           </a:bodyPr>
           <a:lstStyle/>
@@ -23709,7 +23851,7 @@
           <a:noFill/>
         </p:spPr>
         <p:txBody>
-          <a:bodyPr wrap="square" anchor="t" lIns="0" rIns="0" tIns="0" bIns="0">
+          <a:bodyPr wrap="square" lIns="0" tIns="0" rIns="0" bIns="0" anchor="t">
             <a:spAutoFit/>
           </a:bodyPr>
           <a:lstStyle/>
@@ -23776,6 +23918,7 @@
           <a:lstStyle/>
           <a:p>
             <a:pPr algn="ctr"/>
+            <a:endParaRPr/>
           </a:p>
         </p:txBody>
       </p:sp>
@@ -23796,7 +23939,7 @@
           <a:noFill/>
         </p:spPr>
         <p:txBody>
-          <a:bodyPr wrap="square" anchor="t" lIns="0" rIns="0" tIns="0" bIns="0">
+          <a:bodyPr wrap="square" lIns="0" tIns="0" rIns="0" bIns="0" anchor="t">
             <a:spAutoFit/>
           </a:bodyPr>
           <a:lstStyle/>
@@ -23835,7 +23978,7 @@
           <a:noFill/>
         </p:spPr>
         <p:txBody>
-          <a:bodyPr wrap="square" anchor="t" lIns="0" rIns="0" tIns="0" bIns="0">
+          <a:bodyPr wrap="square" lIns="0" tIns="0" rIns="0" bIns="0" anchor="t">
             <a:spAutoFit/>
           </a:bodyPr>
           <a:lstStyle/>
@@ -23874,7 +24017,7 @@
           <a:noFill/>
         </p:spPr>
         <p:txBody>
-          <a:bodyPr wrap="square" anchor="t" lIns="0" rIns="0" tIns="0" bIns="0">
+          <a:bodyPr wrap="square" lIns="0" tIns="0" rIns="0" bIns="0" anchor="t">
             <a:spAutoFit/>
           </a:bodyPr>
           <a:lstStyle/>
@@ -23913,7 +24056,7 @@
           <a:noFill/>
         </p:spPr>
         <p:txBody>
-          <a:bodyPr wrap="square" anchor="t" lIns="0" rIns="0" tIns="0" bIns="0">
+          <a:bodyPr wrap="square" lIns="0" tIns="0" rIns="0" bIns="0" anchor="t">
             <a:spAutoFit/>
           </a:bodyPr>
           <a:lstStyle/>
@@ -23980,6 +24123,7 @@
           <a:lstStyle/>
           <a:p>
             <a:pPr algn="ctr"/>
+            <a:endParaRPr/>
           </a:p>
         </p:txBody>
       </p:sp>
@@ -24000,7 +24144,7 @@
           <a:noFill/>
         </p:spPr>
         <p:txBody>
-          <a:bodyPr wrap="square" anchor="t" lIns="0" rIns="0" tIns="0" bIns="0">
+          <a:bodyPr wrap="square" lIns="0" tIns="0" rIns="0" bIns="0" anchor="t">
             <a:spAutoFit/>
           </a:bodyPr>
           <a:lstStyle/>
@@ -24039,7 +24183,7 @@
           <a:noFill/>
         </p:spPr>
         <p:txBody>
-          <a:bodyPr wrap="square" anchor="t" lIns="0" rIns="0" tIns="0" bIns="0">
+          <a:bodyPr wrap="square" lIns="0" tIns="0" rIns="0" bIns="0" anchor="t">
             <a:spAutoFit/>
           </a:bodyPr>
           <a:lstStyle/>
@@ -24078,7 +24222,7 @@
           <a:noFill/>
         </p:spPr>
         <p:txBody>
-          <a:bodyPr wrap="square" anchor="t" lIns="0" rIns="0" tIns="0" bIns="0">
+          <a:bodyPr wrap="square" lIns="0" tIns="0" rIns="0" bIns="0" anchor="t">
             <a:spAutoFit/>
           </a:bodyPr>
           <a:lstStyle/>
@@ -24117,7 +24261,7 @@
           <a:noFill/>
         </p:spPr>
         <p:txBody>
-          <a:bodyPr wrap="square" anchor="t" lIns="0" rIns="0" tIns="0" bIns="0">
+          <a:bodyPr wrap="square" lIns="0" tIns="0" rIns="0" bIns="0" anchor="t">
             <a:spAutoFit/>
           </a:bodyPr>
           <a:lstStyle/>
@@ -24184,6 +24328,7 @@
           <a:lstStyle/>
           <a:p>
             <a:pPr algn="ctr"/>
+            <a:endParaRPr/>
           </a:p>
         </p:txBody>
       </p:sp>
@@ -24204,7 +24349,7 @@
           <a:noFill/>
         </p:spPr>
         <p:txBody>
-          <a:bodyPr wrap="square" anchor="t" lIns="0" rIns="0" tIns="0" bIns="0">
+          <a:bodyPr wrap="square" lIns="0" tIns="0" rIns="0" bIns="0" anchor="t">
             <a:spAutoFit/>
           </a:bodyPr>
           <a:lstStyle/>
@@ -24243,7 +24388,7 @@
           <a:noFill/>
         </p:spPr>
         <p:txBody>
-          <a:bodyPr wrap="square" anchor="t" lIns="0" rIns="0" tIns="0" bIns="0">
+          <a:bodyPr wrap="square" lIns="0" tIns="0" rIns="0" bIns="0" anchor="t">
             <a:spAutoFit/>
           </a:bodyPr>
           <a:lstStyle/>
@@ -24282,7 +24427,7 @@
           <a:noFill/>
         </p:spPr>
         <p:txBody>
-          <a:bodyPr wrap="square" anchor="t" lIns="0" rIns="0" tIns="0" bIns="0">
+          <a:bodyPr wrap="square" lIns="0" tIns="0" rIns="0" bIns="0" anchor="t">
             <a:spAutoFit/>
           </a:bodyPr>
           <a:lstStyle/>
@@ -24321,7 +24466,7 @@
           <a:noFill/>
         </p:spPr>
         <p:txBody>
-          <a:bodyPr wrap="square" anchor="t" lIns="0" rIns="0" tIns="0" bIns="0">
+          <a:bodyPr wrap="square" lIns="0" tIns="0" rIns="0" bIns="0" anchor="t">
             <a:spAutoFit/>
           </a:bodyPr>
           <a:lstStyle/>
@@ -24388,6 +24533,7 @@
           <a:lstStyle/>
           <a:p>
             <a:pPr algn="ctr"/>
+            <a:endParaRPr/>
           </a:p>
         </p:txBody>
       </p:sp>
@@ -24408,7 +24554,7 @@
           <a:noFill/>
         </p:spPr>
         <p:txBody>
-          <a:bodyPr wrap="square" anchor="t" lIns="0" rIns="0" tIns="0" bIns="0">
+          <a:bodyPr wrap="square" lIns="0" tIns="0" rIns="0" bIns="0" anchor="t">
             <a:spAutoFit/>
           </a:bodyPr>
           <a:lstStyle/>
@@ -24447,7 +24593,7 @@
           <a:noFill/>
         </p:spPr>
         <p:txBody>
-          <a:bodyPr wrap="square" anchor="t" lIns="0" rIns="0" tIns="0" bIns="0">
+          <a:bodyPr wrap="square" lIns="0" tIns="0" rIns="0" bIns="0" anchor="t">
             <a:spAutoFit/>
           </a:bodyPr>
           <a:lstStyle/>
@@ -24486,7 +24632,7 @@
           <a:noFill/>
         </p:spPr>
         <p:txBody>
-          <a:bodyPr wrap="square" anchor="t" lIns="0" rIns="0" tIns="0" bIns="0">
+          <a:bodyPr wrap="square" lIns="0" tIns="0" rIns="0" bIns="0" anchor="t">
             <a:spAutoFit/>
           </a:bodyPr>
           <a:lstStyle/>
@@ -24525,7 +24671,7 @@
           <a:noFill/>
         </p:spPr>
         <p:txBody>
-          <a:bodyPr wrap="square" anchor="t" lIns="0" rIns="0" tIns="0" bIns="0">
+          <a:bodyPr wrap="square" lIns="0" tIns="0" rIns="0" bIns="0" anchor="t">
             <a:spAutoFit/>
           </a:bodyPr>
           <a:lstStyle/>
@@ -24592,6 +24738,7 @@
           <a:lstStyle/>
           <a:p>
             <a:pPr algn="ctr"/>
+            <a:endParaRPr/>
           </a:p>
         </p:txBody>
       </p:sp>
@@ -24612,7 +24759,7 @@
           <a:noFill/>
         </p:spPr>
         <p:txBody>
-          <a:bodyPr wrap="square" anchor="t" lIns="0" rIns="0" tIns="0" bIns="0">
+          <a:bodyPr wrap="square" lIns="0" tIns="0" rIns="0" bIns="0" anchor="t">
             <a:spAutoFit/>
           </a:bodyPr>
           <a:lstStyle/>
@@ -24651,7 +24798,7 @@
           <a:noFill/>
         </p:spPr>
         <p:txBody>
-          <a:bodyPr wrap="square" anchor="t" lIns="0" rIns="0" tIns="0" bIns="0">
+          <a:bodyPr wrap="square" lIns="0" tIns="0" rIns="0" bIns="0" anchor="t">
             <a:spAutoFit/>
           </a:bodyPr>
           <a:lstStyle/>
@@ -24690,7 +24837,7 @@
           <a:noFill/>
         </p:spPr>
         <p:txBody>
-          <a:bodyPr wrap="square" anchor="t" lIns="0" rIns="0" tIns="0" bIns="0">
+          <a:bodyPr wrap="square" lIns="0" tIns="0" rIns="0" bIns="0" anchor="t">
             <a:spAutoFit/>
           </a:bodyPr>
           <a:lstStyle/>
@@ -24729,7 +24876,7 @@
           <a:noFill/>
         </p:spPr>
         <p:txBody>
-          <a:bodyPr wrap="square" anchor="t" lIns="0" rIns="0" tIns="0" bIns="0">
+          <a:bodyPr wrap="square" lIns="0" tIns="0" rIns="0" bIns="0" anchor="t">
             <a:spAutoFit/>
           </a:bodyPr>
           <a:lstStyle/>
@@ -24796,6 +24943,7 @@
           <a:lstStyle/>
           <a:p>
             <a:pPr algn="ctr"/>
+            <a:endParaRPr/>
           </a:p>
         </p:txBody>
       </p:sp>
@@ -24816,7 +24964,7 @@
           <a:noFill/>
         </p:spPr>
         <p:txBody>
-          <a:bodyPr wrap="square" anchor="t" lIns="0" rIns="0" tIns="0" bIns="0">
+          <a:bodyPr wrap="square" lIns="0" tIns="0" rIns="0" bIns="0" anchor="t">
             <a:spAutoFit/>
           </a:bodyPr>
           <a:lstStyle/>
@@ -24855,7 +25003,7 @@
           <a:noFill/>
         </p:spPr>
         <p:txBody>
-          <a:bodyPr wrap="square" anchor="t" lIns="0" rIns="0" tIns="0" bIns="0">
+          <a:bodyPr wrap="square" lIns="0" tIns="0" rIns="0" bIns="0" anchor="t">
             <a:spAutoFit/>
           </a:bodyPr>
           <a:lstStyle/>
@@ -24894,7 +25042,7 @@
           <a:noFill/>
         </p:spPr>
         <p:txBody>
-          <a:bodyPr wrap="square" anchor="t" lIns="0" rIns="0" tIns="0" bIns="0">
+          <a:bodyPr wrap="square" lIns="0" tIns="0" rIns="0" bIns="0" anchor="t">
             <a:spAutoFit/>
           </a:bodyPr>
           <a:lstStyle/>
@@ -24933,7 +25081,7 @@
           <a:noFill/>
         </p:spPr>
         <p:txBody>
-          <a:bodyPr wrap="square" anchor="t" lIns="0" rIns="0" tIns="0" bIns="0">
+          <a:bodyPr wrap="square" lIns="0" tIns="0" rIns="0" bIns="0" anchor="t">
             <a:spAutoFit/>
           </a:bodyPr>
           <a:lstStyle/>
@@ -24972,7 +25120,7 @@
           <a:noFill/>
         </p:spPr>
         <p:txBody>
-          <a:bodyPr wrap="square" anchor="t" lIns="0" rIns="0" tIns="0" bIns="0">
+          <a:bodyPr wrap="square" lIns="0" tIns="0" rIns="0" bIns="0" anchor="t">
             <a:spAutoFit/>
           </a:bodyPr>
           <a:lstStyle/>
@@ -25011,7 +25159,7 @@
           <a:noFill/>
         </p:spPr>
         <p:txBody>
-          <a:bodyPr wrap="square" anchor="t" lIns="0" rIns="0" tIns="0" bIns="0">
+          <a:bodyPr wrap="square" lIns="0" tIns="0" rIns="0" bIns="0" anchor="t">
             <a:spAutoFit/>
           </a:bodyPr>
           <a:lstStyle/>
@@ -25050,7 +25198,7 @@
           <a:noFill/>
         </p:spPr>
         <p:txBody>
-          <a:bodyPr wrap="square" anchor="t" lIns="0" rIns="0" tIns="0" bIns="0">
+          <a:bodyPr wrap="square" lIns="0" tIns="0" rIns="0" bIns="0" anchor="t">
             <a:spAutoFit/>
           </a:bodyPr>
           <a:lstStyle/>
@@ -25077,11 +25225,23 @@
   <p:clrMapOvr>
     <a:masterClrMapping/>
   </p:clrMapOvr>
+  <mc:AlternateContent xmlns:mc="http://schemas.openxmlformats.org/markup-compatibility/2006">
+    <mc:Choice xmlns:p14="http://schemas.microsoft.com/office/powerpoint/2010/main" Requires="p14">
+      <p:transition spd="med" p14:dur="700">
+        <p:fade thruBlk="1"/>
+      </p:transition>
+    </mc:Choice>
+    <mc:Fallback>
+      <p:transition spd="med">
+        <p:fade thruBlk="1"/>
+      </p:transition>
+    </mc:Fallback>
+  </mc:AlternateContent>
 </p:sld>
 </file>
 
 <file path=ppt/slides/slide26.xml><?xml version="1.0" encoding="utf-8"?>
-<p:sld xmlns:a="http://schemas.openxmlformats.org/drawingml/2006/main" xmlns:p="http://schemas.openxmlformats.org/presentationml/2006/main" xmlns:r="http://schemas.openxmlformats.org/officeDocument/2006/relationships">
+<p:sld xmlns:a="http://schemas.openxmlformats.org/drawingml/2006/main" xmlns:r="http://schemas.openxmlformats.org/officeDocument/2006/relationships" xmlns:p="http://schemas.openxmlformats.org/presentationml/2006/main">
   <p:cSld>
     <p:spTree>
       <p:nvGrpSpPr>
@@ -25089,7 +25249,14 @@
         <p:cNvGrpSpPr/>
         <p:nvPr/>
       </p:nvGrpSpPr>
-      <p:grpSpPr/>
+      <p:grpSpPr>
+        <a:xfrm>
+          <a:off x="0" y="0"/>
+          <a:ext cx="0" cy="0"/>
+          <a:chOff x="0" y="0"/>
+          <a:chExt cx="0" cy="0"/>
+        </a:xfrm>
+      </p:grpSpPr>
       <p:pic>
         <p:nvPicPr>
           <p:cNvPr id="2" name="Picture 1" descr="bg_deep.png"/>
@@ -25131,7 +25298,7 @@
           <a:noFill/>
         </p:spPr>
         <p:txBody>
-          <a:bodyPr wrap="square" anchor="t" lIns="0" rIns="0" tIns="0" bIns="0">
+          <a:bodyPr wrap="square" lIns="0" tIns="0" rIns="0" bIns="0" anchor="t">
             <a:spAutoFit/>
           </a:bodyPr>
           <a:lstStyle/>
@@ -25170,7 +25337,7 @@
           <a:noFill/>
         </p:spPr>
         <p:txBody>
-          <a:bodyPr wrap="square" anchor="t" lIns="0" rIns="0" tIns="0" bIns="0">
+          <a:bodyPr wrap="square" lIns="0" tIns="0" rIns="0" bIns="0" anchor="t">
             <a:spAutoFit/>
           </a:bodyPr>
           <a:lstStyle/>
@@ -25209,7 +25376,7 @@
           <a:noFill/>
         </p:spPr>
         <p:txBody>
-          <a:bodyPr wrap="square" anchor="t" lIns="0" rIns="0" tIns="0" bIns="0">
+          <a:bodyPr wrap="square" lIns="0" tIns="0" rIns="0" bIns="0" anchor="t">
             <a:spAutoFit/>
           </a:bodyPr>
           <a:lstStyle/>
@@ -25276,6 +25443,7 @@
           <a:lstStyle/>
           <a:p>
             <a:pPr algn="ctr"/>
+            <a:endParaRPr/>
           </a:p>
         </p:txBody>
       </p:sp>
@@ -25296,7 +25464,7 @@
           <a:noFill/>
         </p:spPr>
         <p:txBody>
-          <a:bodyPr wrap="square" anchor="t" lIns="0" rIns="0" tIns="0" bIns="0">
+          <a:bodyPr wrap="square" lIns="0" tIns="0" rIns="0" bIns="0" anchor="t">
             <a:spAutoFit/>
           </a:bodyPr>
           <a:lstStyle/>
@@ -25335,7 +25503,7 @@
           <a:noFill/>
         </p:spPr>
         <p:txBody>
-          <a:bodyPr wrap="square" anchor="t" lIns="0" rIns="0" tIns="0" bIns="0">
+          <a:bodyPr wrap="square" lIns="0" tIns="0" rIns="0" bIns="0" anchor="t">
             <a:spAutoFit/>
           </a:bodyPr>
           <a:lstStyle/>
@@ -25398,7 +25566,7 @@
           </a:fontRef>
         </p:style>
         <p:txBody>
-          <a:bodyPr rtlCol="0" anchor="ctr" wrap="square" lIns="54864" rIns="54864" tIns="0" bIns="0"/>
+          <a:bodyPr wrap="square" lIns="54864" tIns="0" rIns="54864" bIns="0" rtlCol="0" anchor="ctr"/>
           <a:lstStyle/>
           <a:p>
             <a:pPr algn="ctr"/>
@@ -25459,6 +25627,7 @@
           <a:lstStyle/>
           <a:p>
             <a:pPr algn="ctr"/>
+            <a:endParaRPr/>
           </a:p>
         </p:txBody>
       </p:sp>
@@ -25479,7 +25648,7 @@
           <a:noFill/>
         </p:spPr>
         <p:txBody>
-          <a:bodyPr wrap="square" anchor="t" lIns="0" rIns="0" tIns="0" bIns="0">
+          <a:bodyPr wrap="square" lIns="0" tIns="0" rIns="0" bIns="0" anchor="t">
             <a:spAutoFit/>
           </a:bodyPr>
           <a:lstStyle/>
@@ -25518,7 +25687,7 @@
           <a:noFill/>
         </p:spPr>
         <p:txBody>
-          <a:bodyPr wrap="square" anchor="t" lIns="0" rIns="0" tIns="0" bIns="0">
+          <a:bodyPr wrap="square" lIns="0" tIns="0" rIns="0" bIns="0" anchor="t">
             <a:spAutoFit/>
           </a:bodyPr>
           <a:lstStyle/>
@@ -25581,7 +25750,7 @@
           </a:fontRef>
         </p:style>
         <p:txBody>
-          <a:bodyPr rtlCol="0" anchor="ctr" wrap="square" lIns="54864" rIns="54864" tIns="0" bIns="0"/>
+          <a:bodyPr wrap="square" lIns="54864" tIns="0" rIns="54864" bIns="0" rtlCol="0" anchor="ctr"/>
           <a:lstStyle/>
           <a:p>
             <a:pPr algn="ctr"/>
@@ -25642,6 +25811,7 @@
           <a:lstStyle/>
           <a:p>
             <a:pPr algn="ctr"/>
+            <a:endParaRPr/>
           </a:p>
         </p:txBody>
       </p:sp>
@@ -25662,7 +25832,7 @@
           <a:noFill/>
         </p:spPr>
         <p:txBody>
-          <a:bodyPr wrap="square" anchor="t" lIns="0" rIns="0" tIns="0" bIns="0">
+          <a:bodyPr wrap="square" lIns="0" tIns="0" rIns="0" bIns="0" anchor="t">
             <a:spAutoFit/>
           </a:bodyPr>
           <a:lstStyle/>
@@ -25701,7 +25871,7 @@
           <a:noFill/>
         </p:spPr>
         <p:txBody>
-          <a:bodyPr wrap="square" anchor="t" lIns="0" rIns="0" tIns="0" bIns="0">
+          <a:bodyPr wrap="square" lIns="0" tIns="0" rIns="0" bIns="0" anchor="t">
             <a:spAutoFit/>
           </a:bodyPr>
           <a:lstStyle/>
@@ -25764,7 +25934,7 @@
           </a:fontRef>
         </p:style>
         <p:txBody>
-          <a:bodyPr rtlCol="0" anchor="ctr" wrap="square" lIns="54864" rIns="54864" tIns="0" bIns="0"/>
+          <a:bodyPr wrap="square" lIns="54864" tIns="0" rIns="54864" bIns="0" rtlCol="0" anchor="ctr"/>
           <a:lstStyle/>
           <a:p>
             <a:pPr algn="ctr"/>
@@ -25825,6 +25995,7 @@
           <a:lstStyle/>
           <a:p>
             <a:pPr algn="ctr"/>
+            <a:endParaRPr/>
           </a:p>
         </p:txBody>
       </p:sp>
@@ -25845,7 +26016,7 @@
           <a:noFill/>
         </p:spPr>
         <p:txBody>
-          <a:bodyPr wrap="square" anchor="t" lIns="0" rIns="0" tIns="0" bIns="0">
+          <a:bodyPr wrap="square" lIns="0" tIns="0" rIns="0" bIns="0" anchor="t">
             <a:spAutoFit/>
           </a:bodyPr>
           <a:lstStyle/>
@@ -25884,7 +26055,7 @@
           <a:noFill/>
         </p:spPr>
         <p:txBody>
-          <a:bodyPr wrap="square" anchor="t" lIns="0" rIns="0" tIns="0" bIns="0">
+          <a:bodyPr wrap="square" lIns="0" tIns="0" rIns="0" bIns="0" anchor="t">
             <a:spAutoFit/>
           </a:bodyPr>
           <a:lstStyle/>
@@ -25947,7 +26118,7 @@
           </a:fontRef>
         </p:style>
         <p:txBody>
-          <a:bodyPr rtlCol="0" anchor="ctr" wrap="square" lIns="54864" rIns="54864" tIns="0" bIns="0"/>
+          <a:bodyPr wrap="square" lIns="54864" tIns="0" rIns="54864" bIns="0" rtlCol="0" anchor="ctr"/>
           <a:lstStyle/>
           <a:p>
             <a:pPr algn="ctr"/>
@@ -26008,6 +26179,7 @@
           <a:lstStyle/>
           <a:p>
             <a:pPr algn="ctr"/>
+            <a:endParaRPr/>
           </a:p>
         </p:txBody>
       </p:sp>
@@ -26028,7 +26200,7 @@
           <a:noFill/>
         </p:spPr>
         <p:txBody>
-          <a:bodyPr wrap="square" anchor="t" lIns="0" rIns="0" tIns="0" bIns="0">
+          <a:bodyPr wrap="square" lIns="0" tIns="0" rIns="0" bIns="0" anchor="t">
             <a:spAutoFit/>
           </a:bodyPr>
           <a:lstStyle/>
@@ -26067,7 +26239,7 @@
           <a:noFill/>
         </p:spPr>
         <p:txBody>
-          <a:bodyPr wrap="square" anchor="t" lIns="0" rIns="0" tIns="0" bIns="0">
+          <a:bodyPr wrap="square" lIns="0" tIns="0" rIns="0" bIns="0" anchor="t">
             <a:spAutoFit/>
           </a:bodyPr>
           <a:lstStyle/>
@@ -26130,7 +26302,7 @@
           </a:fontRef>
         </p:style>
         <p:txBody>
-          <a:bodyPr rtlCol="0" anchor="ctr" wrap="square" lIns="54864" rIns="54864" tIns="0" bIns="0"/>
+          <a:bodyPr wrap="square" lIns="54864" tIns="0" rIns="54864" bIns="0" rtlCol="0" anchor="ctr"/>
           <a:lstStyle/>
           <a:p>
             <a:pPr algn="ctr"/>
@@ -26191,6 +26363,7 @@
           <a:lstStyle/>
           <a:p>
             <a:pPr algn="ctr"/>
+            <a:endParaRPr/>
           </a:p>
         </p:txBody>
       </p:sp>
@@ -26211,7 +26384,7 @@
           <a:noFill/>
         </p:spPr>
         <p:txBody>
-          <a:bodyPr wrap="square" anchor="t" lIns="0" rIns="0" tIns="0" bIns="0">
+          <a:bodyPr wrap="square" lIns="0" tIns="0" rIns="0" bIns="0" anchor="t">
             <a:spAutoFit/>
           </a:bodyPr>
           <a:lstStyle/>
@@ -26250,7 +26423,7 @@
           <a:noFill/>
         </p:spPr>
         <p:txBody>
-          <a:bodyPr wrap="square" anchor="t" lIns="0" rIns="0" tIns="0" bIns="0">
+          <a:bodyPr wrap="square" lIns="0" tIns="0" rIns="0" bIns="0" anchor="t">
             <a:spAutoFit/>
           </a:bodyPr>
           <a:lstStyle/>
@@ -26313,7 +26486,7 @@
           </a:fontRef>
         </p:style>
         <p:txBody>
-          <a:bodyPr rtlCol="0" anchor="ctr" wrap="square" lIns="54864" rIns="54864" tIns="0" bIns="0"/>
+          <a:bodyPr wrap="square" lIns="54864" tIns="0" rIns="54864" bIns="0" rtlCol="0" anchor="ctr"/>
           <a:lstStyle/>
           <a:p>
             <a:pPr algn="ctr"/>
@@ -26374,6 +26547,7 @@
           <a:lstStyle/>
           <a:p>
             <a:pPr algn="ctr"/>
+            <a:endParaRPr/>
           </a:p>
         </p:txBody>
       </p:sp>
@@ -26394,7 +26568,7 @@
           <a:noFill/>
         </p:spPr>
         <p:txBody>
-          <a:bodyPr wrap="square" anchor="t" lIns="0" rIns="0" tIns="0" bIns="0">
+          <a:bodyPr wrap="square" lIns="0" tIns="0" rIns="0" bIns="0" anchor="t">
             <a:spAutoFit/>
           </a:bodyPr>
           <a:lstStyle/>
@@ -26433,7 +26607,7 @@
           <a:noFill/>
         </p:spPr>
         <p:txBody>
-          <a:bodyPr wrap="square" anchor="t" lIns="0" rIns="0" tIns="0" bIns="0">
+          <a:bodyPr wrap="square" lIns="0" tIns="0" rIns="0" bIns="0" anchor="t">
             <a:spAutoFit/>
           </a:bodyPr>
           <a:lstStyle/>
@@ -26496,7 +26670,7 @@
           </a:fontRef>
         </p:style>
         <p:txBody>
-          <a:bodyPr rtlCol="0" anchor="ctr" wrap="square" lIns="54864" rIns="54864" tIns="0" bIns="0"/>
+          <a:bodyPr wrap="square" lIns="54864" tIns="0" rIns="54864" bIns="0" rtlCol="0" anchor="ctr"/>
           <a:lstStyle/>
           <a:p>
             <a:pPr algn="ctr"/>
@@ -26557,6 +26731,7 @@
           <a:lstStyle/>
           <a:p>
             <a:pPr algn="ctr"/>
+            <a:endParaRPr/>
           </a:p>
         </p:txBody>
       </p:sp>
@@ -26577,7 +26752,7 @@
           <a:noFill/>
         </p:spPr>
         <p:txBody>
-          <a:bodyPr wrap="square" anchor="t" lIns="0" rIns="0" tIns="0" bIns="0">
+          <a:bodyPr wrap="square" lIns="0" tIns="0" rIns="0" bIns="0" anchor="t">
             <a:spAutoFit/>
           </a:bodyPr>
           <a:lstStyle/>
@@ -26616,7 +26791,7 @@
           <a:noFill/>
         </p:spPr>
         <p:txBody>
-          <a:bodyPr wrap="square" anchor="t" lIns="0" rIns="0" tIns="0" bIns="0">
+          <a:bodyPr wrap="square" lIns="0" tIns="0" rIns="0" bIns="0" anchor="t">
             <a:spAutoFit/>
           </a:bodyPr>
           <a:lstStyle/>
@@ -26679,7 +26854,7 @@
           </a:fontRef>
         </p:style>
         <p:txBody>
-          <a:bodyPr rtlCol="0" anchor="ctr" wrap="square" lIns="54864" rIns="54864" tIns="0" bIns="0"/>
+          <a:bodyPr wrap="square" lIns="54864" tIns="0" rIns="54864" bIns="0" rtlCol="0" anchor="ctr"/>
           <a:lstStyle/>
           <a:p>
             <a:pPr algn="ctr"/>
@@ -26740,6 +26915,7 @@
           <a:lstStyle/>
           <a:p>
             <a:pPr algn="ctr"/>
+            <a:endParaRPr/>
           </a:p>
         </p:txBody>
       </p:sp>
@@ -26760,7 +26936,7 @@
           <a:noFill/>
         </p:spPr>
         <p:txBody>
-          <a:bodyPr wrap="square" anchor="t" lIns="0" rIns="0" tIns="0" bIns="0">
+          <a:bodyPr wrap="square" lIns="0" tIns="0" rIns="0" bIns="0" anchor="t">
             <a:spAutoFit/>
           </a:bodyPr>
           <a:lstStyle/>
@@ -26799,7 +26975,7 @@
           <a:noFill/>
         </p:spPr>
         <p:txBody>
-          <a:bodyPr wrap="square" anchor="t" lIns="0" rIns="0" tIns="0" bIns="0">
+          <a:bodyPr wrap="square" lIns="0" tIns="0" rIns="0" bIns="0" anchor="t">
             <a:spAutoFit/>
           </a:bodyPr>
           <a:lstStyle/>
@@ -26862,7 +27038,7 @@
           </a:fontRef>
         </p:style>
         <p:txBody>
-          <a:bodyPr rtlCol="0" anchor="ctr" wrap="square" lIns="54864" rIns="54864" tIns="0" bIns="0"/>
+          <a:bodyPr wrap="square" lIns="54864" tIns="0" rIns="54864" bIns="0" rtlCol="0" anchor="ctr"/>
           <a:lstStyle/>
           <a:p>
             <a:pPr algn="ctr"/>
@@ -26923,6 +27099,7 @@
           <a:lstStyle/>
           <a:p>
             <a:pPr algn="ctr"/>
+            <a:endParaRPr/>
           </a:p>
         </p:txBody>
       </p:sp>
@@ -26943,7 +27120,7 @@
           <a:noFill/>
         </p:spPr>
         <p:txBody>
-          <a:bodyPr wrap="square" anchor="t" lIns="0" rIns="0" tIns="0" bIns="0">
+          <a:bodyPr wrap="square" lIns="0" tIns="0" rIns="0" bIns="0" anchor="t">
             <a:spAutoFit/>
           </a:bodyPr>
           <a:lstStyle/>
@@ -26982,7 +27159,7 @@
           <a:noFill/>
         </p:spPr>
         <p:txBody>
-          <a:bodyPr wrap="square" anchor="t" lIns="0" rIns="0" tIns="0" bIns="0">
+          <a:bodyPr wrap="square" lIns="0" tIns="0" rIns="0" bIns="0" anchor="t">
             <a:spAutoFit/>
           </a:bodyPr>
           <a:lstStyle/>
@@ -27045,7 +27222,7 @@
           </a:fontRef>
         </p:style>
         <p:txBody>
-          <a:bodyPr rtlCol="0" anchor="ctr" wrap="square" lIns="54864" rIns="54864" tIns="0" bIns="0"/>
+          <a:bodyPr wrap="square" lIns="54864" tIns="0" rIns="54864" bIns="0" rtlCol="0" anchor="ctr"/>
           <a:lstStyle/>
           <a:p>
             <a:pPr algn="ctr"/>
@@ -27106,6 +27283,7 @@
           <a:lstStyle/>
           <a:p>
             <a:pPr algn="ctr"/>
+            <a:endParaRPr/>
           </a:p>
         </p:txBody>
       </p:sp>
@@ -27126,7 +27304,7 @@
           <a:noFill/>
         </p:spPr>
         <p:txBody>
-          <a:bodyPr wrap="square" anchor="t" lIns="0" rIns="0" tIns="0" bIns="0">
+          <a:bodyPr wrap="square" lIns="0" tIns="0" rIns="0" bIns="0" anchor="t">
             <a:spAutoFit/>
           </a:bodyPr>
           <a:lstStyle/>
@@ -27165,7 +27343,7 @@
           <a:noFill/>
         </p:spPr>
         <p:txBody>
-          <a:bodyPr wrap="square" anchor="t" lIns="0" rIns="0" tIns="0" bIns="0">
+          <a:bodyPr wrap="square" lIns="0" tIns="0" rIns="0" bIns="0" anchor="t">
             <a:spAutoFit/>
           </a:bodyPr>
           <a:lstStyle/>
@@ -27228,7 +27406,7 @@
           </a:fontRef>
         </p:style>
         <p:txBody>
-          <a:bodyPr rtlCol="0" anchor="ctr" wrap="square" lIns="54864" rIns="54864" tIns="0" bIns="0"/>
+          <a:bodyPr wrap="square" lIns="54864" tIns="0" rIns="54864" bIns="0" rtlCol="0" anchor="ctr"/>
           <a:lstStyle/>
           <a:p>
             <a:pPr algn="ctr"/>
@@ -27289,6 +27467,7 @@
           <a:lstStyle/>
           <a:p>
             <a:pPr algn="ctr"/>
+            <a:endParaRPr/>
           </a:p>
         </p:txBody>
       </p:sp>
@@ -27309,7 +27488,7 @@
           <a:noFill/>
         </p:spPr>
         <p:txBody>
-          <a:bodyPr wrap="square" anchor="t" lIns="0" rIns="0" tIns="0" bIns="0">
+          <a:bodyPr wrap="square" lIns="0" tIns="0" rIns="0" bIns="0" anchor="t">
             <a:spAutoFit/>
           </a:bodyPr>
           <a:lstStyle/>
@@ -27348,7 +27527,7 @@
           <a:noFill/>
         </p:spPr>
         <p:txBody>
-          <a:bodyPr wrap="square" anchor="t" lIns="0" rIns="0" tIns="0" bIns="0">
+          <a:bodyPr wrap="square" lIns="0" tIns="0" rIns="0" bIns="0" anchor="t">
             <a:spAutoFit/>
           </a:bodyPr>
           <a:lstStyle/>
@@ -27411,7 +27590,7 @@
           </a:fontRef>
         </p:style>
         <p:txBody>
-          <a:bodyPr rtlCol="0" anchor="ctr" wrap="square" lIns="54864" rIns="54864" tIns="0" bIns="0"/>
+          <a:bodyPr wrap="square" lIns="54864" tIns="0" rIns="54864" bIns="0" rtlCol="0" anchor="ctr"/>
           <a:lstStyle/>
           <a:p>
             <a:pPr algn="ctr"/>
@@ -27444,7 +27623,7 @@
           <a:noFill/>
         </p:spPr>
         <p:txBody>
-          <a:bodyPr wrap="square" anchor="t" lIns="0" rIns="0" tIns="0" bIns="0">
+          <a:bodyPr wrap="square" lIns="0" tIns="0" rIns="0" bIns="0" anchor="t">
             <a:spAutoFit/>
           </a:bodyPr>
           <a:lstStyle/>
@@ -27483,7 +27662,7 @@
           <a:noFill/>
         </p:spPr>
         <p:txBody>
-          <a:bodyPr wrap="square" anchor="t" lIns="0" rIns="0" tIns="0" bIns="0">
+          <a:bodyPr wrap="square" lIns="0" tIns="0" rIns="0" bIns="0" anchor="t">
             <a:spAutoFit/>
           </a:bodyPr>
           <a:lstStyle/>
@@ -27522,7 +27701,7 @@
           <a:noFill/>
         </p:spPr>
         <p:txBody>
-          <a:bodyPr wrap="square" anchor="t" lIns="0" rIns="0" tIns="0" bIns="0">
+          <a:bodyPr wrap="square" lIns="0" tIns="0" rIns="0" bIns="0" anchor="t">
             <a:spAutoFit/>
           </a:bodyPr>
           <a:lstStyle/>
@@ -27549,11 +27728,23 @@
   <p:clrMapOvr>
     <a:masterClrMapping/>
   </p:clrMapOvr>
+  <mc:AlternateContent xmlns:mc="http://schemas.openxmlformats.org/markup-compatibility/2006">
+    <mc:Choice xmlns:p14="http://schemas.microsoft.com/office/powerpoint/2010/main" Requires="p14">
+      <p:transition spd="med" p14:dur="700">
+        <p:fade thruBlk="1"/>
+      </p:transition>
+    </mc:Choice>
+    <mc:Fallback>
+      <p:transition spd="med">
+        <p:fade thruBlk="1"/>
+      </p:transition>
+    </mc:Fallback>
+  </mc:AlternateContent>
 </p:sld>
 </file>
 
 <file path=ppt/slides/slide27.xml><?xml version="1.0" encoding="utf-8"?>
-<p:sld xmlns:a="http://schemas.openxmlformats.org/drawingml/2006/main" xmlns:p="http://schemas.openxmlformats.org/presentationml/2006/main" xmlns:r="http://schemas.openxmlformats.org/officeDocument/2006/relationships">
+<p:sld xmlns:a="http://schemas.openxmlformats.org/drawingml/2006/main" xmlns:r="http://schemas.openxmlformats.org/officeDocument/2006/relationships" xmlns:p="http://schemas.openxmlformats.org/presentationml/2006/main">
   <p:cSld>
     <p:spTree>
       <p:nvGrpSpPr>
@@ -27561,7 +27752,14 @@
         <p:cNvGrpSpPr/>
         <p:nvPr/>
       </p:nvGrpSpPr>
-      <p:grpSpPr/>
+      <p:grpSpPr>
+        <a:xfrm>
+          <a:off x="0" y="0"/>
+          <a:ext cx="0" cy="0"/>
+          <a:chOff x="0" y="0"/>
+          <a:chExt cx="0" cy="0"/>
+        </a:xfrm>
+      </p:grpSpPr>
       <p:pic>
         <p:nvPicPr>
           <p:cNvPr id="2" name="Picture 1" descr="bg_deep.png"/>
@@ -27571,7 +27769,7 @@
           <p:nvPr/>
         </p:nvPicPr>
         <p:blipFill>
-          <a:blip r:embed="rId2"/>
+          <a:blip r:embed="rId3"/>
           <a:stretch>
             <a:fillRect/>
           </a:stretch>
@@ -27603,7 +27801,7 @@
           <a:noFill/>
         </p:spPr>
         <p:txBody>
-          <a:bodyPr wrap="square" anchor="t" lIns="0" rIns="0" tIns="0" bIns="0">
+          <a:bodyPr wrap="square" lIns="0" tIns="0" rIns="0" bIns="0" anchor="t">
             <a:spAutoFit/>
           </a:bodyPr>
           <a:lstStyle/>
@@ -27642,7 +27840,7 @@
           <a:noFill/>
         </p:spPr>
         <p:txBody>
-          <a:bodyPr wrap="square" anchor="t" lIns="0" rIns="0" tIns="0" bIns="0">
+          <a:bodyPr wrap="square" lIns="0" tIns="0" rIns="0" bIns="0" anchor="t">
             <a:spAutoFit/>
           </a:bodyPr>
           <a:lstStyle/>
@@ -27681,7 +27879,7 @@
           <a:noFill/>
         </p:spPr>
         <p:txBody>
-          <a:bodyPr wrap="square" anchor="t" lIns="0" rIns="0" tIns="0" bIns="0">
+          <a:bodyPr wrap="square" lIns="0" tIns="0" rIns="0" bIns="0" anchor="t">
             <a:spAutoFit/>
           </a:bodyPr>
           <a:lstStyle/>
@@ -27744,7 +27942,7 @@
           </a:fontRef>
         </p:style>
         <p:txBody>
-          <a:bodyPr rtlCol="0" anchor="ctr" wrap="square" lIns="54864" rIns="54864" tIns="0" bIns="0"/>
+          <a:bodyPr wrap="square" lIns="54864" tIns="0" rIns="54864" bIns="0" rtlCol="0" anchor="ctr"/>
           <a:lstStyle/>
           <a:p>
             <a:pPr algn="ctr"/>
@@ -27777,7 +27975,7 @@
           <a:noFill/>
         </p:spPr>
         <p:txBody>
-          <a:bodyPr wrap="square" anchor="t" lIns="0" rIns="0" tIns="0" bIns="0">
+          <a:bodyPr wrap="square" lIns="0" tIns="0" rIns="0" bIns="0" anchor="t">
             <a:spAutoFit/>
           </a:bodyPr>
           <a:lstStyle/>
@@ -27840,7 +28038,7 @@
           </a:fontRef>
         </p:style>
         <p:txBody>
-          <a:bodyPr rtlCol="0" anchor="ctr" wrap="square" lIns="54864" rIns="54864" tIns="0" bIns="0"/>
+          <a:bodyPr wrap="square" lIns="54864" tIns="0" rIns="54864" bIns="0" rtlCol="0" anchor="ctr"/>
           <a:lstStyle/>
           <a:p>
             <a:pPr algn="ctr"/>
@@ -27873,7 +28071,7 @@
           <a:noFill/>
         </p:spPr>
         <p:txBody>
-          <a:bodyPr wrap="square" anchor="t" lIns="0" rIns="0" tIns="0" bIns="0">
+          <a:bodyPr wrap="square" lIns="0" tIns="0" rIns="0" bIns="0" anchor="t">
             <a:spAutoFit/>
           </a:bodyPr>
           <a:lstStyle/>
@@ -27936,7 +28134,7 @@
           </a:fontRef>
         </p:style>
         <p:txBody>
-          <a:bodyPr rtlCol="0" anchor="ctr" wrap="square" lIns="54864" rIns="54864" tIns="0" bIns="0"/>
+          <a:bodyPr wrap="square" lIns="54864" tIns="0" rIns="54864" bIns="0" rtlCol="0" anchor="ctr"/>
           <a:lstStyle/>
           <a:p>
             <a:pPr algn="ctr"/>
@@ -27969,7 +28167,7 @@
           <a:noFill/>
         </p:spPr>
         <p:txBody>
-          <a:bodyPr wrap="square" anchor="t" lIns="0" rIns="0" tIns="0" bIns="0">
+          <a:bodyPr wrap="square" lIns="0" tIns="0" rIns="0" bIns="0" anchor="t">
             <a:spAutoFit/>
           </a:bodyPr>
           <a:lstStyle/>
@@ -28032,7 +28230,7 @@
           </a:fontRef>
         </p:style>
         <p:txBody>
-          <a:bodyPr rtlCol="0" anchor="ctr" wrap="square" lIns="54864" rIns="54864" tIns="0" bIns="0"/>
+          <a:bodyPr wrap="square" lIns="54864" tIns="0" rIns="54864" bIns="0" rtlCol="0" anchor="ctr"/>
           <a:lstStyle/>
           <a:p>
             <a:pPr algn="ctr"/>
@@ -28065,7 +28263,7 @@
           <a:noFill/>
         </p:spPr>
         <p:txBody>
-          <a:bodyPr wrap="square" anchor="t" lIns="0" rIns="0" tIns="0" bIns="0">
+          <a:bodyPr wrap="square" lIns="0" tIns="0" rIns="0" bIns="0" anchor="t">
             <a:spAutoFit/>
           </a:bodyPr>
           <a:lstStyle/>
@@ -28128,7 +28326,7 @@
           </a:fontRef>
         </p:style>
         <p:txBody>
-          <a:bodyPr rtlCol="0" anchor="ctr" wrap="square" lIns="54864" rIns="54864" tIns="0" bIns="0"/>
+          <a:bodyPr wrap="square" lIns="54864" tIns="0" rIns="54864" bIns="0" rtlCol="0" anchor="ctr"/>
           <a:lstStyle/>
           <a:p>
             <a:pPr algn="ctr"/>
@@ -28161,7 +28359,7 @@
           <a:noFill/>
         </p:spPr>
         <p:txBody>
-          <a:bodyPr wrap="square" anchor="t" lIns="0" rIns="0" tIns="0" bIns="0">
+          <a:bodyPr wrap="square" lIns="0" tIns="0" rIns="0" bIns="0" anchor="t">
             <a:spAutoFit/>
           </a:bodyPr>
           <a:lstStyle/>
@@ -28224,7 +28422,7 @@
           </a:fontRef>
         </p:style>
         <p:txBody>
-          <a:bodyPr rtlCol="0" anchor="ctr" wrap="square" lIns="54864" rIns="54864" tIns="0" bIns="0"/>
+          <a:bodyPr wrap="square" lIns="54864" tIns="0" rIns="54864" bIns="0" rtlCol="0" anchor="ctr"/>
           <a:lstStyle/>
           <a:p>
             <a:pPr algn="ctr"/>
@@ -28257,7 +28455,7 @@
           <a:noFill/>
         </p:spPr>
         <p:txBody>
-          <a:bodyPr wrap="square" anchor="t" lIns="0" rIns="0" tIns="0" bIns="0">
+          <a:bodyPr wrap="square" lIns="0" tIns="0" rIns="0" bIns="0" anchor="t">
             <a:spAutoFit/>
           </a:bodyPr>
           <a:lstStyle/>
@@ -28320,7 +28518,7 @@
           </a:fontRef>
         </p:style>
         <p:txBody>
-          <a:bodyPr rtlCol="0" anchor="ctr" wrap="square" lIns="54864" rIns="54864" tIns="0" bIns="0"/>
+          <a:bodyPr wrap="square" lIns="54864" tIns="0" rIns="54864" bIns="0" rtlCol="0" anchor="ctr"/>
           <a:lstStyle/>
           <a:p>
             <a:pPr algn="ctr"/>
@@ -28353,7 +28551,7 @@
           <a:noFill/>
         </p:spPr>
         <p:txBody>
-          <a:bodyPr wrap="square" anchor="t" lIns="0" rIns="0" tIns="0" bIns="0">
+          <a:bodyPr wrap="square" lIns="0" tIns="0" rIns="0" bIns="0" anchor="t">
             <a:spAutoFit/>
           </a:bodyPr>
           <a:lstStyle/>
@@ -28416,7 +28614,7 @@
           </a:fontRef>
         </p:style>
         <p:txBody>
-          <a:bodyPr rtlCol="0" anchor="ctr" wrap="square" lIns="54864" rIns="54864" tIns="0" bIns="0"/>
+          <a:bodyPr wrap="square" lIns="54864" tIns="0" rIns="54864" bIns="0" rtlCol="0" anchor="ctr"/>
           <a:lstStyle/>
           <a:p>
             <a:pPr algn="ctr"/>
@@ -28449,7 +28647,7 @@
           <a:noFill/>
         </p:spPr>
         <p:txBody>
-          <a:bodyPr wrap="square" anchor="t" lIns="0" rIns="0" tIns="0" bIns="0">
+          <a:bodyPr wrap="square" lIns="0" tIns="0" rIns="0" bIns="0" anchor="t">
             <a:spAutoFit/>
           </a:bodyPr>
           <a:lstStyle/>
@@ -28512,7 +28710,7 @@
           </a:fontRef>
         </p:style>
         <p:txBody>
-          <a:bodyPr rtlCol="0" anchor="ctr" wrap="square" lIns="54864" rIns="54864" tIns="0" bIns="0"/>
+          <a:bodyPr wrap="square" lIns="54864" tIns="0" rIns="54864" bIns="0" rtlCol="0" anchor="ctr"/>
           <a:lstStyle/>
           <a:p>
             <a:pPr algn="ctr"/>
@@ -28545,7 +28743,7 @@
           <a:noFill/>
         </p:spPr>
         <p:txBody>
-          <a:bodyPr wrap="square" anchor="t" lIns="0" rIns="0" tIns="0" bIns="0">
+          <a:bodyPr wrap="square" lIns="0" tIns="0" rIns="0" bIns="0" anchor="t">
             <a:spAutoFit/>
           </a:bodyPr>
           <a:lstStyle/>
@@ -28584,7 +28782,7 @@
           <a:noFill/>
         </p:spPr>
         <p:txBody>
-          <a:bodyPr wrap="square" anchor="t" lIns="0" rIns="0" tIns="0" bIns="0">
+          <a:bodyPr wrap="square" lIns="0" tIns="0" rIns="0" bIns="0" anchor="t">
             <a:spAutoFit/>
           </a:bodyPr>
           <a:lstStyle/>
@@ -28623,7 +28821,7 @@
           <a:noFill/>
         </p:spPr>
         <p:txBody>
-          <a:bodyPr wrap="square" anchor="t" lIns="0" rIns="0" tIns="0" bIns="0">
+          <a:bodyPr wrap="square" lIns="0" tIns="0" rIns="0" bIns="0" anchor="t">
             <a:spAutoFit/>
           </a:bodyPr>
           <a:lstStyle/>
@@ -28650,11 +28848,23 @@
   <p:clrMapOvr>
     <a:masterClrMapping/>
   </p:clrMapOvr>
+  <mc:AlternateContent xmlns:mc="http://schemas.openxmlformats.org/markup-compatibility/2006">
+    <mc:Choice xmlns:p14="http://schemas.microsoft.com/office/powerpoint/2010/main" Requires="p14">
+      <p:transition spd="med" p14:dur="700">
+        <p:fade thruBlk="1"/>
+      </p:transition>
+    </mc:Choice>
+    <mc:Fallback>
+      <p:transition spd="med">
+        <p:fade thruBlk="1"/>
+      </p:transition>
+    </mc:Fallback>
+  </mc:AlternateContent>
 </p:sld>
 </file>
 
 <file path=ppt/slides/slide28.xml><?xml version="1.0" encoding="utf-8"?>
-<p:sld xmlns:a="http://schemas.openxmlformats.org/drawingml/2006/main" xmlns:p="http://schemas.openxmlformats.org/presentationml/2006/main" xmlns:r="http://schemas.openxmlformats.org/officeDocument/2006/relationships">
+<p:sld xmlns:a="http://schemas.openxmlformats.org/drawingml/2006/main" xmlns:r="http://schemas.openxmlformats.org/officeDocument/2006/relationships" xmlns:p="http://schemas.openxmlformats.org/presentationml/2006/main">
   <p:cSld>
     <p:spTree>
       <p:nvGrpSpPr>
@@ -28662,7 +28872,14 @@
         <p:cNvGrpSpPr/>
         <p:nvPr/>
       </p:nvGrpSpPr>
-      <p:grpSpPr/>
+      <p:grpSpPr>
+        <a:xfrm>
+          <a:off x="0" y="0"/>
+          <a:ext cx="0" cy="0"/>
+          <a:chOff x="0" y="0"/>
+          <a:chExt cx="0" cy="0"/>
+        </a:xfrm>
+      </p:grpSpPr>
       <p:pic>
         <p:nvPicPr>
           <p:cNvPr id="2" name="Picture 1" descr="bg_deep.png"/>
@@ -28704,7 +28921,7 @@
           <a:noFill/>
         </p:spPr>
         <p:txBody>
-          <a:bodyPr wrap="square" anchor="t" lIns="0" rIns="0" tIns="0" bIns="0">
+          <a:bodyPr wrap="square" lIns="0" tIns="0" rIns="0" bIns="0" anchor="t">
             <a:spAutoFit/>
           </a:bodyPr>
           <a:lstStyle/>
@@ -28743,7 +28960,7 @@
           <a:noFill/>
         </p:spPr>
         <p:txBody>
-          <a:bodyPr wrap="square" anchor="t" lIns="0" rIns="0" tIns="0" bIns="0">
+          <a:bodyPr wrap="square" lIns="0" tIns="0" rIns="0" bIns="0" anchor="t">
             <a:spAutoFit/>
           </a:bodyPr>
           <a:lstStyle/>
@@ -28810,6 +29027,7 @@
           <a:lstStyle/>
           <a:p>
             <a:pPr algn="ctr"/>
+            <a:endParaRPr/>
           </a:p>
         </p:txBody>
       </p:sp>
@@ -28830,7 +29048,7 @@
           <a:noFill/>
         </p:spPr>
         <p:txBody>
-          <a:bodyPr wrap="square" anchor="t" lIns="0" rIns="0" tIns="0" bIns="0">
+          <a:bodyPr wrap="square" lIns="0" tIns="0" rIns="0" bIns="0" anchor="t">
             <a:spAutoFit/>
           </a:bodyPr>
           <a:lstStyle/>
@@ -28869,7 +29087,7 @@
           <a:noFill/>
         </p:spPr>
         <p:txBody>
-          <a:bodyPr wrap="square" anchor="t" lIns="0" rIns="0" tIns="0" bIns="0">
+          <a:bodyPr wrap="square" lIns="0" tIns="0" rIns="0" bIns="0" anchor="t">
             <a:spAutoFit/>
           </a:bodyPr>
           <a:lstStyle/>
@@ -28908,7 +29126,7 @@
           <a:noFill/>
         </p:spPr>
         <p:txBody>
-          <a:bodyPr wrap="square" anchor="t" lIns="0" rIns="0" tIns="0" bIns="0">
+          <a:bodyPr wrap="square" lIns="0" tIns="0" rIns="0" bIns="0" anchor="t">
             <a:spAutoFit/>
           </a:bodyPr>
           <a:lstStyle/>
@@ -28947,7 +29165,7 @@
           <a:noFill/>
         </p:spPr>
         <p:txBody>
-          <a:bodyPr wrap="square" anchor="t" lIns="0" rIns="0" tIns="0" bIns="0">
+          <a:bodyPr wrap="square" lIns="0" tIns="0" rIns="0" bIns="0" anchor="t">
             <a:spAutoFit/>
           </a:bodyPr>
           <a:lstStyle/>
@@ -28986,7 +29204,7 @@
           <a:noFill/>
         </p:spPr>
         <p:txBody>
-          <a:bodyPr wrap="square" anchor="t" lIns="0" rIns="0" tIns="0" bIns="0">
+          <a:bodyPr wrap="square" lIns="0" tIns="0" rIns="0" bIns="0" anchor="t">
             <a:spAutoFit/>
           </a:bodyPr>
           <a:lstStyle/>
@@ -29053,6 +29271,7 @@
           <a:lstStyle/>
           <a:p>
             <a:pPr algn="ctr"/>
+            <a:endParaRPr/>
           </a:p>
         </p:txBody>
       </p:sp>
@@ -29073,7 +29292,7 @@
           <a:noFill/>
         </p:spPr>
         <p:txBody>
-          <a:bodyPr wrap="square" anchor="t" lIns="0" rIns="0" tIns="0" bIns="0">
+          <a:bodyPr wrap="square" lIns="0" tIns="0" rIns="0" bIns="0" anchor="t">
             <a:spAutoFit/>
           </a:bodyPr>
           <a:lstStyle/>
@@ -29112,7 +29331,7 @@
           <a:noFill/>
         </p:spPr>
         <p:txBody>
-          <a:bodyPr wrap="square" anchor="t" lIns="0" rIns="0" tIns="0" bIns="0">
+          <a:bodyPr wrap="square" lIns="0" tIns="0" rIns="0" bIns="0" anchor="t">
             <a:spAutoFit/>
           </a:bodyPr>
           <a:lstStyle/>
@@ -29151,7 +29370,7 @@
           <a:noFill/>
         </p:spPr>
         <p:txBody>
-          <a:bodyPr wrap="square" anchor="t" lIns="0" rIns="0" tIns="0" bIns="0">
+          <a:bodyPr wrap="square" lIns="0" tIns="0" rIns="0" bIns="0" anchor="t">
             <a:spAutoFit/>
           </a:bodyPr>
           <a:lstStyle/>
@@ -29190,7 +29409,7 @@
           <a:noFill/>
         </p:spPr>
         <p:txBody>
-          <a:bodyPr wrap="square" anchor="t" lIns="0" rIns="0" tIns="0" bIns="0">
+          <a:bodyPr wrap="square" lIns="0" tIns="0" rIns="0" bIns="0" anchor="t">
             <a:spAutoFit/>
           </a:bodyPr>
           <a:lstStyle/>
@@ -29229,7 +29448,7 @@
           <a:noFill/>
         </p:spPr>
         <p:txBody>
-          <a:bodyPr wrap="square" anchor="t" lIns="0" rIns="0" tIns="0" bIns="0">
+          <a:bodyPr wrap="square" lIns="0" tIns="0" rIns="0" bIns="0" anchor="t">
             <a:spAutoFit/>
           </a:bodyPr>
           <a:lstStyle/>
@@ -29296,6 +29515,7 @@
           <a:lstStyle/>
           <a:p>
             <a:pPr algn="ctr"/>
+            <a:endParaRPr/>
           </a:p>
         </p:txBody>
       </p:sp>
@@ -29316,7 +29536,7 @@
           <a:noFill/>
         </p:spPr>
         <p:txBody>
-          <a:bodyPr wrap="square" anchor="t" lIns="0" rIns="0" tIns="0" bIns="0">
+          <a:bodyPr wrap="square" lIns="0" tIns="0" rIns="0" bIns="0" anchor="t">
             <a:spAutoFit/>
           </a:bodyPr>
           <a:lstStyle/>
@@ -29355,7 +29575,7 @@
           <a:noFill/>
         </p:spPr>
         <p:txBody>
-          <a:bodyPr wrap="square" anchor="t" lIns="0" rIns="0" tIns="0" bIns="0">
+          <a:bodyPr wrap="square" lIns="0" tIns="0" rIns="0" bIns="0" anchor="t">
             <a:spAutoFit/>
           </a:bodyPr>
           <a:lstStyle/>
@@ -29394,7 +29614,7 @@
           <a:noFill/>
         </p:spPr>
         <p:txBody>
-          <a:bodyPr wrap="square" anchor="t" lIns="0" rIns="0" tIns="0" bIns="0">
+          <a:bodyPr wrap="square" lIns="0" tIns="0" rIns="0" bIns="0" anchor="t">
             <a:spAutoFit/>
           </a:bodyPr>
           <a:lstStyle/>
@@ -29433,7 +29653,7 @@
           <a:noFill/>
         </p:spPr>
         <p:txBody>
-          <a:bodyPr wrap="square" anchor="t" lIns="0" rIns="0" tIns="0" bIns="0">
+          <a:bodyPr wrap="square" lIns="0" tIns="0" rIns="0" bIns="0" anchor="t">
             <a:spAutoFit/>
           </a:bodyPr>
           <a:lstStyle/>
@@ -29472,7 +29692,7 @@
           <a:noFill/>
         </p:spPr>
         <p:txBody>
-          <a:bodyPr wrap="square" anchor="t" lIns="0" rIns="0" tIns="0" bIns="0">
+          <a:bodyPr wrap="square" lIns="0" tIns="0" rIns="0" bIns="0" anchor="t">
             <a:spAutoFit/>
           </a:bodyPr>
           <a:lstStyle/>
@@ -29511,7 +29731,7 @@
           <a:noFill/>
         </p:spPr>
         <p:txBody>
-          <a:bodyPr wrap="square" anchor="t" lIns="0" rIns="0" tIns="0" bIns="0">
+          <a:bodyPr wrap="square" lIns="0" tIns="0" rIns="0" bIns="0" anchor="t">
             <a:spAutoFit/>
           </a:bodyPr>
           <a:lstStyle/>
@@ -29550,7 +29770,7 @@
           <a:noFill/>
         </p:spPr>
         <p:txBody>
-          <a:bodyPr wrap="square" anchor="t" lIns="0" rIns="0" tIns="0" bIns="0">
+          <a:bodyPr wrap="square" lIns="0" tIns="0" rIns="0" bIns="0" anchor="t">
             <a:spAutoFit/>
           </a:bodyPr>
           <a:lstStyle/>
@@ -29589,7 +29809,7 @@
           <a:noFill/>
         </p:spPr>
         <p:txBody>
-          <a:bodyPr wrap="square" anchor="t" lIns="0" rIns="0" tIns="0" bIns="0">
+          <a:bodyPr wrap="square" lIns="0" tIns="0" rIns="0" bIns="0" anchor="t">
             <a:spAutoFit/>
           </a:bodyPr>
           <a:lstStyle/>
@@ -29628,7 +29848,7 @@
           <a:noFill/>
         </p:spPr>
         <p:txBody>
-          <a:bodyPr wrap="square" anchor="t" lIns="0" rIns="0" tIns="0" bIns="0">
+          <a:bodyPr wrap="square" lIns="0" tIns="0" rIns="0" bIns="0" anchor="t">
             <a:spAutoFit/>
           </a:bodyPr>
           <a:lstStyle/>
@@ -29655,11 +29875,23 @@
   <p:clrMapOvr>
     <a:masterClrMapping/>
   </p:clrMapOvr>
+  <mc:AlternateContent xmlns:mc="http://schemas.openxmlformats.org/markup-compatibility/2006">
+    <mc:Choice xmlns:p14="http://schemas.microsoft.com/office/powerpoint/2010/main" Requires="p14">
+      <p:transition spd="med" p14:dur="700">
+        <p:fade thruBlk="1"/>
+      </p:transition>
+    </mc:Choice>
+    <mc:Fallback>
+      <p:transition spd="med">
+        <p:fade thruBlk="1"/>
+      </p:transition>
+    </mc:Fallback>
+  </mc:AlternateContent>
 </p:sld>
 </file>
 
 <file path=ppt/slides/slide29.xml><?xml version="1.0" encoding="utf-8"?>
-<p:sld xmlns:a="http://schemas.openxmlformats.org/drawingml/2006/main" xmlns:p="http://schemas.openxmlformats.org/presentationml/2006/main" xmlns:r="http://schemas.openxmlformats.org/officeDocument/2006/relationships">
+<p:sld xmlns:a="http://schemas.openxmlformats.org/drawingml/2006/main" xmlns:r="http://schemas.openxmlformats.org/officeDocument/2006/relationships" xmlns:p="http://schemas.openxmlformats.org/presentationml/2006/main">
   <p:cSld>
     <p:spTree>
       <p:nvGrpSpPr>
@@ -29667,7 +29899,14 @@
         <p:cNvGrpSpPr/>
         <p:nvPr/>
       </p:nvGrpSpPr>
-      <p:grpSpPr/>
+      <p:grpSpPr>
+        <a:xfrm>
+          <a:off x="0" y="0"/>
+          <a:ext cx="0" cy="0"/>
+          <a:chOff x="0" y="0"/>
+          <a:chExt cx="0" cy="0"/>
+        </a:xfrm>
+      </p:grpSpPr>
       <p:pic>
         <p:nvPicPr>
           <p:cNvPr id="2" name="Picture 1" descr="bg_deep.png"/>
@@ -29709,7 +29948,7 @@
           <a:noFill/>
         </p:spPr>
         <p:txBody>
-          <a:bodyPr wrap="square" anchor="t" lIns="0" rIns="0" tIns="0" bIns="0">
+          <a:bodyPr wrap="square" lIns="0" tIns="0" rIns="0" bIns="0" anchor="t">
             <a:spAutoFit/>
           </a:bodyPr>
           <a:lstStyle/>
@@ -29748,7 +29987,7 @@
           <a:noFill/>
         </p:spPr>
         <p:txBody>
-          <a:bodyPr wrap="square" anchor="t" lIns="0" rIns="0" tIns="0" bIns="0">
+          <a:bodyPr wrap="square" lIns="0" tIns="0" rIns="0" bIns="0" anchor="t">
             <a:spAutoFit/>
           </a:bodyPr>
           <a:lstStyle/>
@@ -29787,7 +30026,7 @@
           <a:noFill/>
         </p:spPr>
         <p:txBody>
-          <a:bodyPr wrap="square" anchor="t" lIns="0" rIns="0" tIns="0" bIns="0">
+          <a:bodyPr wrap="square" lIns="0" tIns="0" rIns="0" bIns="0" anchor="t">
             <a:spAutoFit/>
           </a:bodyPr>
           <a:lstStyle/>
@@ -29850,7 +30089,7 @@
           </a:fontRef>
         </p:style>
         <p:txBody>
-          <a:bodyPr rtlCol="0" anchor="ctr" wrap="square" lIns="73152" rIns="73152" tIns="36576" bIns="36576"/>
+          <a:bodyPr wrap="square" lIns="73152" tIns="36576" rIns="73152" bIns="36576" rtlCol="0" anchor="ctr"/>
           <a:lstStyle/>
           <a:p>
             <a:pPr algn="ctr"/>
@@ -29923,7 +30162,7 @@
           </a:fontRef>
         </p:style>
         <p:txBody>
-          <a:bodyPr rtlCol="0" anchor="ctr" wrap="square" lIns="73152" rIns="73152" tIns="36576" bIns="36576"/>
+          <a:bodyPr wrap="square" lIns="73152" tIns="36576" rIns="73152" bIns="36576" rtlCol="0" anchor="ctr"/>
           <a:lstStyle/>
           <a:p>
             <a:pPr algn="ctr"/>
@@ -29996,7 +30235,7 @@
           </a:fontRef>
         </p:style>
         <p:txBody>
-          <a:bodyPr rtlCol="0" anchor="ctr" wrap="square" lIns="73152" rIns="73152" tIns="36576" bIns="36576"/>
+          <a:bodyPr wrap="square" lIns="73152" tIns="36576" rIns="73152" bIns="36576" rtlCol="0" anchor="ctr"/>
           <a:lstStyle/>
           <a:p>
             <a:pPr algn="ctr"/>
@@ -30069,7 +30308,7 @@
           </a:fontRef>
         </p:style>
         <p:txBody>
-          <a:bodyPr rtlCol="0" anchor="ctr" wrap="square" lIns="73152" rIns="73152" tIns="36576" bIns="36576"/>
+          <a:bodyPr wrap="square" lIns="73152" tIns="36576" rIns="73152" bIns="36576" rtlCol="0" anchor="ctr"/>
           <a:lstStyle/>
           <a:p>
             <a:pPr algn="ctr"/>
@@ -30146,6 +30385,7 @@
           <a:lstStyle/>
           <a:p>
             <a:pPr algn="ctr"/>
+            <a:endParaRPr/>
           </a:p>
         </p:txBody>
       </p:sp>
@@ -30166,7 +30406,7 @@
           <a:noFill/>
         </p:spPr>
         <p:txBody>
-          <a:bodyPr wrap="square" anchor="t" lIns="0" rIns="0" tIns="0" bIns="0">
+          <a:bodyPr wrap="square" lIns="0" tIns="0" rIns="0" bIns="0" anchor="t">
             <a:spAutoFit/>
           </a:bodyPr>
           <a:lstStyle/>
@@ -30221,7 +30461,7 @@
           <a:noFill/>
         </p:spPr>
         <p:txBody>
-          <a:bodyPr wrap="square" anchor="t" lIns="0" rIns="0" tIns="0" bIns="0">
+          <a:bodyPr wrap="square" lIns="0" tIns="0" rIns="0" bIns="0" anchor="t">
             <a:spAutoFit/>
           </a:bodyPr>
           <a:lstStyle/>
@@ -30260,7 +30500,7 @@
           <a:noFill/>
         </p:spPr>
         <p:txBody>
-          <a:bodyPr wrap="square" anchor="t" lIns="0" rIns="0" tIns="0" bIns="0">
+          <a:bodyPr wrap="square" lIns="0" tIns="0" rIns="0" bIns="0" anchor="t">
             <a:spAutoFit/>
           </a:bodyPr>
           <a:lstStyle/>
@@ -30299,7 +30539,7 @@
           <a:noFill/>
         </p:spPr>
         <p:txBody>
-          <a:bodyPr wrap="square" anchor="t" lIns="0" rIns="0" tIns="0" bIns="0">
+          <a:bodyPr wrap="square" lIns="0" tIns="0" rIns="0" bIns="0" anchor="t">
             <a:spAutoFit/>
           </a:bodyPr>
           <a:lstStyle/>
@@ -30326,11 +30566,23 @@
   <p:clrMapOvr>
     <a:masterClrMapping/>
   </p:clrMapOvr>
+  <mc:AlternateContent xmlns:mc="http://schemas.openxmlformats.org/markup-compatibility/2006">
+    <mc:Choice xmlns:p14="http://schemas.microsoft.com/office/powerpoint/2010/main" Requires="p14">
+      <p:transition spd="med" p14:dur="700">
+        <p:fade thruBlk="1"/>
+      </p:transition>
+    </mc:Choice>
+    <mc:Fallback>
+      <p:transition spd="med">
+        <p:fade thruBlk="1"/>
+      </p:transition>
+    </mc:Fallback>
+  </mc:AlternateContent>
 </p:sld>
 </file>
 
 <file path=ppt/slides/slide3.xml><?xml version="1.0" encoding="utf-8"?>
-<p:sld xmlns:a="http://schemas.openxmlformats.org/drawingml/2006/main" xmlns:p="http://schemas.openxmlformats.org/presentationml/2006/main" xmlns:r="http://schemas.openxmlformats.org/officeDocument/2006/relationships">
+<p:sld xmlns:a="http://schemas.openxmlformats.org/drawingml/2006/main" xmlns:r="http://schemas.openxmlformats.org/officeDocument/2006/relationships" xmlns:p="http://schemas.openxmlformats.org/presentationml/2006/main">
   <p:cSld>
     <p:spTree>
       <p:nvGrpSpPr>
@@ -30338,7 +30590,14 @@
         <p:cNvGrpSpPr/>
         <p:nvPr/>
       </p:nvGrpSpPr>
-      <p:grpSpPr/>
+      <p:grpSpPr>
+        <a:xfrm>
+          <a:off x="0" y="0"/>
+          <a:ext cx="0" cy="0"/>
+          <a:chOff x="0" y="0"/>
+          <a:chExt cx="0" cy="0"/>
+        </a:xfrm>
+      </p:grpSpPr>
       <p:pic>
         <p:nvPicPr>
           <p:cNvPr id="2" name="Picture 1" descr="bg_deep.png"/>
@@ -30348,7 +30607,7 @@
           <p:nvPr/>
         </p:nvPicPr>
         <p:blipFill>
-          <a:blip r:embed="rId2"/>
+          <a:blip r:embed="rId3"/>
           <a:stretch>
             <a:fillRect/>
           </a:stretch>
@@ -30380,7 +30639,7 @@
           <a:noFill/>
         </p:spPr>
         <p:txBody>
-          <a:bodyPr wrap="square" anchor="t" lIns="0" rIns="0" tIns="0" bIns="0">
+          <a:bodyPr wrap="square" lIns="0" tIns="0" rIns="0" bIns="0" anchor="t">
             <a:spAutoFit/>
           </a:bodyPr>
           <a:lstStyle/>
@@ -30419,7 +30678,7 @@
           <a:noFill/>
         </p:spPr>
         <p:txBody>
-          <a:bodyPr wrap="square" anchor="t" lIns="0" rIns="0" tIns="0" bIns="0">
+          <a:bodyPr wrap="square" lIns="0" tIns="0" rIns="0" bIns="0" anchor="t">
             <a:spAutoFit/>
           </a:bodyPr>
           <a:lstStyle/>
@@ -30482,7 +30741,7 @@
           </a:fontRef>
         </p:style>
         <p:txBody>
-          <a:bodyPr rtlCol="0" anchor="ctr" wrap="square" lIns="73152" rIns="73152" tIns="36576" bIns="36576"/>
+          <a:bodyPr wrap="square" lIns="73152" tIns="36576" rIns="73152" bIns="36576" rtlCol="0" anchor="ctr"/>
           <a:lstStyle/>
           <a:p>
             <a:pPr algn="ctr"/>
@@ -30591,7 +30850,7 @@
           </a:fontRef>
         </p:style>
         <p:txBody>
-          <a:bodyPr rtlCol="0" anchor="ctr" wrap="square" lIns="73152" rIns="73152" tIns="36576" bIns="36576"/>
+          <a:bodyPr wrap="square" lIns="73152" tIns="36576" rIns="73152" bIns="36576" rtlCol="0" anchor="ctr"/>
           <a:lstStyle/>
           <a:p>
             <a:pPr algn="ctr"/>
@@ -30700,7 +30959,7 @@
           </a:fontRef>
         </p:style>
         <p:txBody>
-          <a:bodyPr rtlCol="0" anchor="ctr" wrap="square" lIns="73152" rIns="73152" tIns="36576" bIns="36576"/>
+          <a:bodyPr wrap="square" lIns="73152" tIns="36576" rIns="73152" bIns="36576" rtlCol="0" anchor="ctr"/>
           <a:lstStyle/>
           <a:p>
             <a:pPr algn="ctr"/>
@@ -30811,7 +31070,7 @@
           </a:fontRef>
         </p:style>
         <p:txBody>
-          <a:bodyPr rtlCol="0" anchor="ctr" wrap="square" lIns="73152" rIns="73152" tIns="36576" bIns="36576"/>
+          <a:bodyPr wrap="square" lIns="73152" tIns="36576" rIns="73152" bIns="36576" rtlCol="0" anchor="ctr"/>
           <a:lstStyle/>
           <a:p>
             <a:pPr algn="ctr"/>
@@ -30921,7 +31180,7 @@
           </a:fontRef>
         </p:style>
         <p:txBody>
-          <a:bodyPr rtlCol="0" anchor="ctr" wrap="square" lIns="73152" rIns="73152" tIns="36576" bIns="36576"/>
+          <a:bodyPr wrap="square" lIns="73152" tIns="36576" rIns="73152" bIns="36576" rtlCol="0" anchor="ctr"/>
           <a:lstStyle/>
           <a:p>
             <a:pPr algn="ctr"/>
@@ -31031,7 +31290,7 @@
           </a:fontRef>
         </p:style>
         <p:txBody>
-          <a:bodyPr rtlCol="0" anchor="ctr" wrap="square" lIns="73152" rIns="73152" tIns="36576" bIns="36576"/>
+          <a:bodyPr wrap="square" lIns="73152" tIns="36576" rIns="73152" bIns="36576" rtlCol="0" anchor="ctr"/>
           <a:lstStyle/>
           <a:p>
             <a:pPr algn="ctr"/>
@@ -31109,6 +31368,7 @@
           <a:lstStyle/>
           <a:p>
             <a:pPr algn="ctr"/>
+            <a:endParaRPr/>
           </a:p>
         </p:txBody>
       </p:sp>
@@ -31129,7 +31389,7 @@
           <a:noFill/>
         </p:spPr>
         <p:txBody>
-          <a:bodyPr wrap="square" anchor="t" lIns="0" rIns="0" tIns="0" bIns="0">
+          <a:bodyPr wrap="square" lIns="0" tIns="0" rIns="0" bIns="0" anchor="t">
             <a:spAutoFit/>
           </a:bodyPr>
           <a:lstStyle/>
@@ -31168,7 +31428,7 @@
           <a:noFill/>
         </p:spPr>
         <p:txBody>
-          <a:bodyPr wrap="square" anchor="t" lIns="0" rIns="0" tIns="0" bIns="0">
+          <a:bodyPr wrap="square" lIns="0" tIns="0" rIns="0" bIns="0" anchor="t">
             <a:spAutoFit/>
           </a:bodyPr>
           <a:lstStyle/>
@@ -31207,7 +31467,7 @@
           <a:noFill/>
         </p:spPr>
         <p:txBody>
-          <a:bodyPr wrap="square" anchor="t" lIns="0" rIns="0" tIns="0" bIns="0">
+          <a:bodyPr wrap="square" lIns="0" tIns="0" rIns="0" bIns="0" anchor="t">
             <a:spAutoFit/>
           </a:bodyPr>
           <a:lstStyle/>
@@ -31234,11 +31494,23 @@
   <p:clrMapOvr>
     <a:masterClrMapping/>
   </p:clrMapOvr>
+  <mc:AlternateContent xmlns:mc="http://schemas.openxmlformats.org/markup-compatibility/2006">
+    <mc:Choice xmlns:p14="http://schemas.microsoft.com/office/powerpoint/2010/main" Requires="p14">
+      <p:transition spd="med" p14:dur="700">
+        <p:fade thruBlk="1"/>
+      </p:transition>
+    </mc:Choice>
+    <mc:Fallback>
+      <p:transition spd="med">
+        <p:fade thruBlk="1"/>
+      </p:transition>
+    </mc:Fallback>
+  </mc:AlternateContent>
 </p:sld>
 </file>
 
 <file path=ppt/slides/slide30.xml><?xml version="1.0" encoding="utf-8"?>
-<p:sld xmlns:a="http://schemas.openxmlformats.org/drawingml/2006/main" xmlns:p="http://schemas.openxmlformats.org/presentationml/2006/main" xmlns:r="http://schemas.openxmlformats.org/officeDocument/2006/relationships">
+<p:sld xmlns:a="http://schemas.openxmlformats.org/drawingml/2006/main" xmlns:r="http://schemas.openxmlformats.org/officeDocument/2006/relationships" xmlns:p="http://schemas.openxmlformats.org/presentationml/2006/main">
   <p:cSld>
     <p:spTree>
       <p:nvGrpSpPr>
@@ -31246,7 +31518,14 @@
         <p:cNvGrpSpPr/>
         <p:nvPr/>
       </p:nvGrpSpPr>
-      <p:grpSpPr/>
+      <p:grpSpPr>
+        <a:xfrm>
+          <a:off x="0" y="0"/>
+          <a:ext cx="0" cy="0"/>
+          <a:chOff x="0" y="0"/>
+          <a:chExt cx="0" cy="0"/>
+        </a:xfrm>
+      </p:grpSpPr>
       <p:pic>
         <p:nvPicPr>
           <p:cNvPr id="2" name="Picture 1" descr="bg_deep.png"/>
@@ -31288,7 +31567,7 @@
           <a:noFill/>
         </p:spPr>
         <p:txBody>
-          <a:bodyPr wrap="square" anchor="t" lIns="0" rIns="0" tIns="0" bIns="0">
+          <a:bodyPr wrap="square" lIns="0" tIns="0" rIns="0" bIns="0" anchor="t">
             <a:spAutoFit/>
           </a:bodyPr>
           <a:lstStyle/>
@@ -31327,7 +31606,7 @@
           <a:noFill/>
         </p:spPr>
         <p:txBody>
-          <a:bodyPr wrap="square" anchor="t" lIns="0" rIns="0" tIns="0" bIns="0">
+          <a:bodyPr wrap="square" lIns="0" tIns="0" rIns="0" bIns="0" anchor="t">
             <a:spAutoFit/>
           </a:bodyPr>
           <a:lstStyle/>
@@ -31366,7 +31645,7 @@
           <a:noFill/>
         </p:spPr>
         <p:txBody>
-          <a:bodyPr wrap="square" anchor="t" lIns="0" rIns="0" tIns="0" bIns="0">
+          <a:bodyPr wrap="square" lIns="0" tIns="0" rIns="0" bIns="0" anchor="t">
             <a:spAutoFit/>
           </a:bodyPr>
           <a:lstStyle/>
@@ -31433,6 +31712,7 @@
           <a:lstStyle/>
           <a:p>
             <a:pPr algn="ctr"/>
+            <a:endParaRPr/>
           </a:p>
         </p:txBody>
       </p:sp>
@@ -31453,7 +31733,7 @@
           <a:noFill/>
         </p:spPr>
         <p:txBody>
-          <a:bodyPr wrap="square" anchor="t" lIns="0" rIns="0" tIns="0" bIns="0">
+          <a:bodyPr wrap="square" lIns="0" tIns="0" rIns="0" bIns="0" anchor="t">
             <a:spAutoFit/>
           </a:bodyPr>
           <a:lstStyle/>
@@ -31492,7 +31772,7 @@
           <a:noFill/>
         </p:spPr>
         <p:txBody>
-          <a:bodyPr wrap="square" anchor="t" lIns="0" rIns="0" tIns="0" bIns="0">
+          <a:bodyPr wrap="square" lIns="0" tIns="0" rIns="0" bIns="0" anchor="t">
             <a:spAutoFit/>
           </a:bodyPr>
           <a:lstStyle/>
@@ -31559,6 +31839,7 @@
           <a:lstStyle/>
           <a:p>
             <a:pPr algn="ctr"/>
+            <a:endParaRPr/>
           </a:p>
         </p:txBody>
       </p:sp>
@@ -31579,7 +31860,7 @@
           <a:noFill/>
         </p:spPr>
         <p:txBody>
-          <a:bodyPr wrap="square" anchor="t" lIns="0" rIns="0" tIns="0" bIns="0">
+          <a:bodyPr wrap="square" lIns="0" tIns="0" rIns="0" bIns="0" anchor="t">
             <a:spAutoFit/>
           </a:bodyPr>
           <a:lstStyle/>
@@ -31618,7 +31899,7 @@
           <a:noFill/>
         </p:spPr>
         <p:txBody>
-          <a:bodyPr wrap="square" anchor="t" lIns="0" rIns="0" tIns="0" bIns="0">
+          <a:bodyPr wrap="square" lIns="0" tIns="0" rIns="0" bIns="0" anchor="t">
             <a:spAutoFit/>
           </a:bodyPr>
           <a:lstStyle/>
@@ -31685,6 +31966,7 @@
           <a:lstStyle/>
           <a:p>
             <a:pPr algn="ctr"/>
+            <a:endParaRPr/>
           </a:p>
         </p:txBody>
       </p:sp>
@@ -31705,7 +31987,7 @@
           <a:noFill/>
         </p:spPr>
         <p:txBody>
-          <a:bodyPr wrap="square" anchor="t" lIns="0" rIns="0" tIns="0" bIns="0">
+          <a:bodyPr wrap="square" lIns="0" tIns="0" rIns="0" bIns="0" anchor="t">
             <a:spAutoFit/>
           </a:bodyPr>
           <a:lstStyle/>
@@ -31744,7 +32026,7 @@
           <a:noFill/>
         </p:spPr>
         <p:txBody>
-          <a:bodyPr wrap="square" anchor="t" lIns="0" rIns="0" tIns="0" bIns="0">
+          <a:bodyPr wrap="square" lIns="0" tIns="0" rIns="0" bIns="0" anchor="t">
             <a:spAutoFit/>
           </a:bodyPr>
           <a:lstStyle/>
@@ -31811,6 +32093,7 @@
           <a:lstStyle/>
           <a:p>
             <a:pPr algn="ctr"/>
+            <a:endParaRPr/>
           </a:p>
         </p:txBody>
       </p:sp>
@@ -31831,7 +32114,7 @@
           <a:noFill/>
         </p:spPr>
         <p:txBody>
-          <a:bodyPr wrap="square" anchor="t" lIns="0" rIns="0" tIns="0" bIns="0">
+          <a:bodyPr wrap="square" lIns="0" tIns="0" rIns="0" bIns="0" anchor="t">
             <a:spAutoFit/>
           </a:bodyPr>
           <a:lstStyle/>
@@ -31870,7 +32153,7 @@
           <a:noFill/>
         </p:spPr>
         <p:txBody>
-          <a:bodyPr wrap="square" anchor="t" lIns="0" rIns="0" tIns="0" bIns="0">
+          <a:bodyPr wrap="square" lIns="0" tIns="0" rIns="0" bIns="0" anchor="t">
             <a:spAutoFit/>
           </a:bodyPr>
           <a:lstStyle/>
@@ -31937,6 +32220,7 @@
           <a:lstStyle/>
           <a:p>
             <a:pPr algn="ctr"/>
+            <a:endParaRPr/>
           </a:p>
         </p:txBody>
       </p:sp>
@@ -31957,7 +32241,7 @@
           <a:noFill/>
         </p:spPr>
         <p:txBody>
-          <a:bodyPr wrap="square" anchor="t" lIns="0" rIns="0" tIns="0" bIns="0">
+          <a:bodyPr wrap="square" lIns="0" tIns="0" rIns="0" bIns="0" anchor="t">
             <a:spAutoFit/>
           </a:bodyPr>
           <a:lstStyle/>
@@ -31996,7 +32280,7 @@
           <a:noFill/>
         </p:spPr>
         <p:txBody>
-          <a:bodyPr wrap="square" anchor="t" lIns="0" rIns="0" tIns="0" bIns="0">
+          <a:bodyPr wrap="square" lIns="0" tIns="0" rIns="0" bIns="0" anchor="t">
             <a:spAutoFit/>
           </a:bodyPr>
           <a:lstStyle/>
@@ -32035,7 +32319,7 @@
           <a:noFill/>
         </p:spPr>
         <p:txBody>
-          <a:bodyPr wrap="square" anchor="t" lIns="0" rIns="0" tIns="0" bIns="0">
+          <a:bodyPr wrap="square" lIns="0" tIns="0" rIns="0" bIns="0" anchor="t">
             <a:spAutoFit/>
           </a:bodyPr>
           <a:lstStyle/>
@@ -32074,7 +32358,7 @@
           <a:noFill/>
         </p:spPr>
         <p:txBody>
-          <a:bodyPr wrap="square" anchor="t" lIns="0" rIns="0" tIns="0" bIns="0">
+          <a:bodyPr wrap="square" lIns="0" tIns="0" rIns="0" bIns="0" anchor="t">
             <a:spAutoFit/>
           </a:bodyPr>
           <a:lstStyle/>
@@ -32101,11 +32385,23 @@
   <p:clrMapOvr>
     <a:masterClrMapping/>
   </p:clrMapOvr>
+  <mc:AlternateContent xmlns:mc="http://schemas.openxmlformats.org/markup-compatibility/2006">
+    <mc:Choice xmlns:p14="http://schemas.microsoft.com/office/powerpoint/2010/main" Requires="p14">
+      <p:transition spd="med" p14:dur="700">
+        <p:fade thruBlk="1"/>
+      </p:transition>
+    </mc:Choice>
+    <mc:Fallback>
+      <p:transition spd="med">
+        <p:fade thruBlk="1"/>
+      </p:transition>
+    </mc:Fallback>
+  </mc:AlternateContent>
 </p:sld>
 </file>
 
 <file path=ppt/slides/slide31.xml><?xml version="1.0" encoding="utf-8"?>
-<p:sld xmlns:a="http://schemas.openxmlformats.org/drawingml/2006/main" xmlns:p="http://schemas.openxmlformats.org/presentationml/2006/main" xmlns:r="http://schemas.openxmlformats.org/officeDocument/2006/relationships">
+<p:sld xmlns:a="http://schemas.openxmlformats.org/drawingml/2006/main" xmlns:r="http://schemas.openxmlformats.org/officeDocument/2006/relationships" xmlns:p="http://schemas.openxmlformats.org/presentationml/2006/main">
   <p:cSld>
     <p:spTree>
       <p:nvGrpSpPr>
@@ -32113,7 +32409,14 @@
         <p:cNvGrpSpPr/>
         <p:nvPr/>
       </p:nvGrpSpPr>
-      <p:grpSpPr/>
+      <p:grpSpPr>
+        <a:xfrm>
+          <a:off x="0" y="0"/>
+          <a:ext cx="0" cy="0"/>
+          <a:chOff x="0" y="0"/>
+          <a:chExt cx="0" cy="0"/>
+        </a:xfrm>
+      </p:grpSpPr>
       <p:pic>
         <p:nvPicPr>
           <p:cNvPr id="2" name="Picture 1" descr="bg_red.png"/>
@@ -32155,7 +32458,7 @@
           <a:noFill/>
         </p:spPr>
         <p:txBody>
-          <a:bodyPr wrap="square" anchor="t" lIns="0" rIns="0" tIns="0" bIns="0">
+          <a:bodyPr wrap="square" lIns="0" tIns="0" rIns="0" bIns="0" anchor="t">
             <a:spAutoFit/>
           </a:bodyPr>
           <a:lstStyle/>
@@ -32194,7 +32497,7 @@
           <a:noFill/>
         </p:spPr>
         <p:txBody>
-          <a:bodyPr wrap="square" anchor="t" lIns="0" rIns="0" tIns="0" bIns="0">
+          <a:bodyPr wrap="square" lIns="0" tIns="0" rIns="0" bIns="0" anchor="t">
             <a:spAutoFit/>
           </a:bodyPr>
           <a:lstStyle/>
@@ -32233,7 +32536,7 @@
           <a:noFill/>
         </p:spPr>
         <p:txBody>
-          <a:bodyPr wrap="square" anchor="t" lIns="0" rIns="0" tIns="0" bIns="0">
+          <a:bodyPr wrap="square" lIns="0" tIns="0" rIns="0" bIns="0" anchor="t">
             <a:spAutoFit/>
           </a:bodyPr>
           <a:lstStyle/>
@@ -32272,7 +32575,7 @@
           <a:noFill/>
         </p:spPr>
         <p:txBody>
-          <a:bodyPr wrap="square" anchor="t" lIns="0" rIns="0" tIns="0" bIns="0">
+          <a:bodyPr wrap="square" lIns="0" tIns="0" rIns="0" bIns="0" anchor="t">
             <a:spAutoFit/>
           </a:bodyPr>
           <a:lstStyle/>
@@ -32311,7 +32614,7 @@
           <a:noFill/>
         </p:spPr>
         <p:txBody>
-          <a:bodyPr wrap="square" anchor="t" lIns="0" rIns="0" tIns="0" bIns="0">
+          <a:bodyPr wrap="square" lIns="0" tIns="0" rIns="0" bIns="0" anchor="t">
             <a:spAutoFit/>
           </a:bodyPr>
           <a:lstStyle/>
@@ -32350,7 +32653,7 @@
           <a:noFill/>
         </p:spPr>
         <p:txBody>
-          <a:bodyPr wrap="square" anchor="t" lIns="0" rIns="0" tIns="0" bIns="0">
+          <a:bodyPr wrap="square" lIns="0" tIns="0" rIns="0" bIns="0" anchor="t">
             <a:spAutoFit/>
           </a:bodyPr>
           <a:lstStyle/>
@@ -32389,7 +32692,7 @@
           <a:noFill/>
         </p:spPr>
         <p:txBody>
-          <a:bodyPr wrap="square" anchor="t" lIns="0" rIns="0" tIns="0" bIns="0">
+          <a:bodyPr wrap="square" lIns="0" tIns="0" rIns="0" bIns="0" anchor="t">
             <a:spAutoFit/>
           </a:bodyPr>
           <a:lstStyle/>
@@ -32428,7 +32731,7 @@
           <a:noFill/>
         </p:spPr>
         <p:txBody>
-          <a:bodyPr wrap="square" anchor="t" lIns="0" rIns="0" tIns="0" bIns="0">
+          <a:bodyPr wrap="square" lIns="0" tIns="0" rIns="0" bIns="0" anchor="t">
             <a:spAutoFit/>
           </a:bodyPr>
           <a:lstStyle/>
@@ -32467,7 +32770,7 @@
           <a:noFill/>
         </p:spPr>
         <p:txBody>
-          <a:bodyPr wrap="square" anchor="t" lIns="0" rIns="0" tIns="0" bIns="0">
+          <a:bodyPr wrap="square" lIns="0" tIns="0" rIns="0" bIns="0" anchor="t">
             <a:spAutoFit/>
           </a:bodyPr>
           <a:lstStyle/>
@@ -32506,7 +32809,7 @@
           <a:noFill/>
         </p:spPr>
         <p:txBody>
-          <a:bodyPr wrap="square" anchor="t" lIns="0" rIns="0" tIns="0" bIns="0">
+          <a:bodyPr wrap="square" lIns="0" tIns="0" rIns="0" bIns="0" anchor="t">
             <a:spAutoFit/>
           </a:bodyPr>
           <a:lstStyle/>
@@ -32545,7 +32848,7 @@
           <a:noFill/>
         </p:spPr>
         <p:txBody>
-          <a:bodyPr wrap="square" anchor="t" lIns="0" rIns="0" tIns="0" bIns="0">
+          <a:bodyPr wrap="square" lIns="0" tIns="0" rIns="0" bIns="0" anchor="t">
             <a:spAutoFit/>
           </a:bodyPr>
           <a:lstStyle/>
@@ -32584,7 +32887,7 @@
           <a:noFill/>
         </p:spPr>
         <p:txBody>
-          <a:bodyPr wrap="square" anchor="t" lIns="0" rIns="0" tIns="0" bIns="0">
+          <a:bodyPr wrap="square" lIns="0" tIns="0" rIns="0" bIns="0" anchor="t">
             <a:spAutoFit/>
           </a:bodyPr>
           <a:lstStyle/>
@@ -32623,7 +32926,7 @@
           <a:noFill/>
         </p:spPr>
         <p:txBody>
-          <a:bodyPr wrap="square" anchor="t" lIns="0" rIns="0" tIns="0" bIns="0">
+          <a:bodyPr wrap="square" lIns="0" tIns="0" rIns="0" bIns="0" anchor="t">
             <a:spAutoFit/>
           </a:bodyPr>
           <a:lstStyle/>
@@ -32662,7 +32965,7 @@
           <a:noFill/>
         </p:spPr>
         <p:txBody>
-          <a:bodyPr wrap="square" anchor="t" lIns="0" rIns="0" tIns="0" bIns="0">
+          <a:bodyPr wrap="square" lIns="0" tIns="0" rIns="0" bIns="0" anchor="t">
             <a:spAutoFit/>
           </a:bodyPr>
           <a:lstStyle/>
@@ -32701,7 +33004,7 @@
           <a:noFill/>
         </p:spPr>
         <p:txBody>
-          <a:bodyPr wrap="square" anchor="t" lIns="0" rIns="0" tIns="0" bIns="0">
+          <a:bodyPr wrap="square" lIns="0" tIns="0" rIns="0" bIns="0" anchor="t">
             <a:spAutoFit/>
           </a:bodyPr>
           <a:lstStyle/>
@@ -32740,7 +33043,7 @@
           <a:noFill/>
         </p:spPr>
         <p:txBody>
-          <a:bodyPr wrap="square" anchor="t" lIns="0" rIns="0" tIns="0" bIns="0">
+          <a:bodyPr wrap="square" lIns="0" tIns="0" rIns="0" bIns="0" anchor="t">
             <a:spAutoFit/>
           </a:bodyPr>
           <a:lstStyle/>
@@ -32779,7 +33082,7 @@
           <a:noFill/>
         </p:spPr>
         <p:txBody>
-          <a:bodyPr wrap="square" anchor="t" lIns="0" rIns="0" tIns="0" bIns="0">
+          <a:bodyPr wrap="square" lIns="0" tIns="0" rIns="0" bIns="0" anchor="t">
             <a:spAutoFit/>
           </a:bodyPr>
           <a:lstStyle/>
@@ -32818,7 +33121,7 @@
           <a:noFill/>
         </p:spPr>
         <p:txBody>
-          <a:bodyPr wrap="square" anchor="t" lIns="0" rIns="0" tIns="0" bIns="0">
+          <a:bodyPr wrap="square" lIns="0" tIns="0" rIns="0" bIns="0" anchor="t">
             <a:spAutoFit/>
           </a:bodyPr>
           <a:lstStyle/>
@@ -32857,7 +33160,7 @@
           <a:noFill/>
         </p:spPr>
         <p:txBody>
-          <a:bodyPr wrap="square" anchor="t" lIns="0" rIns="0" tIns="0" bIns="0">
+          <a:bodyPr wrap="square" lIns="0" tIns="0" rIns="0" bIns="0" anchor="t">
             <a:spAutoFit/>
           </a:bodyPr>
           <a:lstStyle/>
@@ -32896,7 +33199,7 @@
           <a:noFill/>
         </p:spPr>
         <p:txBody>
-          <a:bodyPr wrap="square" anchor="t" lIns="0" rIns="0" tIns="0" bIns="0">
+          <a:bodyPr wrap="square" lIns="0" tIns="0" rIns="0" bIns="0" anchor="t">
             <a:spAutoFit/>
           </a:bodyPr>
           <a:lstStyle/>
@@ -32935,7 +33238,7 @@
           <a:noFill/>
         </p:spPr>
         <p:txBody>
-          <a:bodyPr wrap="square" anchor="t" lIns="0" rIns="0" tIns="0" bIns="0">
+          <a:bodyPr wrap="square" lIns="0" tIns="0" rIns="0" bIns="0" anchor="t">
             <a:spAutoFit/>
           </a:bodyPr>
           <a:lstStyle/>
@@ -32974,7 +33277,7 @@
           <a:noFill/>
         </p:spPr>
         <p:txBody>
-          <a:bodyPr wrap="square" anchor="t" lIns="0" rIns="0" tIns="0" bIns="0">
+          <a:bodyPr wrap="square" lIns="0" tIns="0" rIns="0" bIns="0" anchor="t">
             <a:spAutoFit/>
           </a:bodyPr>
           <a:lstStyle/>
@@ -33041,6 +33344,7 @@
           <a:lstStyle/>
           <a:p>
             <a:pPr algn="ctr"/>
+            <a:endParaRPr/>
           </a:p>
         </p:txBody>
       </p:sp>
@@ -33061,7 +33365,7 @@
           <a:noFill/>
         </p:spPr>
         <p:txBody>
-          <a:bodyPr wrap="square" anchor="t" lIns="0" rIns="0" tIns="0" bIns="0">
+          <a:bodyPr wrap="square" lIns="0" tIns="0" rIns="0" bIns="0" anchor="t">
             <a:spAutoFit/>
           </a:bodyPr>
           <a:lstStyle/>
@@ -33100,7 +33404,7 @@
           <a:noFill/>
         </p:spPr>
         <p:txBody>
-          <a:bodyPr wrap="square" anchor="t" lIns="0" rIns="0" tIns="0" bIns="0">
+          <a:bodyPr wrap="square" lIns="0" tIns="0" rIns="0" bIns="0" anchor="t">
             <a:spAutoFit/>
           </a:bodyPr>
           <a:lstStyle/>
@@ -33139,7 +33443,7 @@
           <a:noFill/>
         </p:spPr>
         <p:txBody>
-          <a:bodyPr wrap="square" anchor="t" lIns="0" rIns="0" tIns="0" bIns="0">
+          <a:bodyPr wrap="square" lIns="0" tIns="0" rIns="0" bIns="0" anchor="t">
             <a:spAutoFit/>
           </a:bodyPr>
           <a:lstStyle/>
@@ -33166,11 +33470,23 @@
   <p:clrMapOvr>
     <a:masterClrMapping/>
   </p:clrMapOvr>
+  <mc:AlternateContent xmlns:mc="http://schemas.openxmlformats.org/markup-compatibility/2006">
+    <mc:Choice xmlns:p14="http://schemas.microsoft.com/office/powerpoint/2010/main" Requires="p14">
+      <p:transition spd="med" p14:dur="700">
+        <p:fade thruBlk="1"/>
+      </p:transition>
+    </mc:Choice>
+    <mc:Fallback>
+      <p:transition spd="med">
+        <p:fade thruBlk="1"/>
+      </p:transition>
+    </mc:Fallback>
+  </mc:AlternateContent>
 </p:sld>
 </file>
 
 <file path=ppt/slides/slide32.xml><?xml version="1.0" encoding="utf-8"?>
-<p:sld xmlns:a="http://schemas.openxmlformats.org/drawingml/2006/main" xmlns:p="http://schemas.openxmlformats.org/presentationml/2006/main" xmlns:r="http://schemas.openxmlformats.org/officeDocument/2006/relationships">
+<p:sld xmlns:a="http://schemas.openxmlformats.org/drawingml/2006/main" xmlns:r="http://schemas.openxmlformats.org/officeDocument/2006/relationships" xmlns:p="http://schemas.openxmlformats.org/presentationml/2006/main">
   <p:cSld>
     <p:spTree>
       <p:nvGrpSpPr>
@@ -33178,7 +33494,14 @@
         <p:cNvGrpSpPr/>
         <p:nvPr/>
       </p:nvGrpSpPr>
-      <p:grpSpPr/>
+      <p:grpSpPr>
+        <a:xfrm>
+          <a:off x="0" y="0"/>
+          <a:ext cx="0" cy="0"/>
+          <a:chOff x="0" y="0"/>
+          <a:chExt cx="0" cy="0"/>
+        </a:xfrm>
+      </p:grpSpPr>
       <p:pic>
         <p:nvPicPr>
           <p:cNvPr id="2" name="Picture 1" descr="bg_hero.png"/>
@@ -33188,7 +33511,7 @@
           <p:nvPr/>
         </p:nvPicPr>
         <p:blipFill>
-          <a:blip r:embed="rId2"/>
+          <a:blip r:embed="rId3"/>
           <a:stretch>
             <a:fillRect/>
           </a:stretch>
@@ -33220,7 +33543,7 @@
           <a:noFill/>
         </p:spPr>
         <p:txBody>
-          <a:bodyPr wrap="square" anchor="t" lIns="0" rIns="0" tIns="0" bIns="0">
+          <a:bodyPr wrap="square" lIns="0" tIns="0" rIns="0" bIns="0" anchor="t">
             <a:spAutoFit/>
           </a:bodyPr>
           <a:lstStyle/>
@@ -33259,7 +33582,7 @@
           <a:noFill/>
         </p:spPr>
         <p:txBody>
-          <a:bodyPr wrap="square" anchor="t" lIns="0" rIns="0" tIns="0" bIns="0">
+          <a:bodyPr wrap="square" lIns="0" tIns="0" rIns="0" bIns="0" anchor="t">
             <a:spAutoFit/>
           </a:bodyPr>
           <a:lstStyle/>
@@ -33322,7 +33645,7 @@
           </a:fontRef>
         </p:style>
         <p:txBody>
-          <a:bodyPr rtlCol="0" anchor="ctr" wrap="square" lIns="73152" rIns="73152" tIns="36576" bIns="36576"/>
+          <a:bodyPr wrap="square" lIns="73152" tIns="36576" rIns="73152" bIns="36576" rtlCol="0" anchor="ctr"/>
           <a:lstStyle/>
           <a:p>
             <a:pPr algn="ctr"/>
@@ -33396,7 +33719,7 @@
           </a:fontRef>
         </p:style>
         <p:txBody>
-          <a:bodyPr rtlCol="0" anchor="ctr" wrap="square" lIns="73152" rIns="73152" tIns="36576" bIns="36576"/>
+          <a:bodyPr wrap="square" lIns="73152" tIns="36576" rIns="73152" bIns="36576" rtlCol="0" anchor="ctr"/>
           <a:lstStyle/>
           <a:p>
             <a:pPr algn="ctr"/>
@@ -33470,7 +33793,7 @@
           </a:fontRef>
         </p:style>
         <p:txBody>
-          <a:bodyPr rtlCol="0" anchor="ctr" wrap="square" lIns="73152" rIns="73152" tIns="36576" bIns="36576"/>
+          <a:bodyPr wrap="square" lIns="73152" tIns="36576" rIns="73152" bIns="36576" rtlCol="0" anchor="ctr"/>
           <a:lstStyle/>
           <a:p>
             <a:pPr algn="ctr"/>
@@ -33544,7 +33867,7 @@
           </a:fontRef>
         </p:style>
         <p:txBody>
-          <a:bodyPr rtlCol="0" anchor="ctr" wrap="square" lIns="73152" rIns="73152" tIns="36576" bIns="36576"/>
+          <a:bodyPr wrap="square" lIns="73152" tIns="36576" rIns="73152" bIns="36576" rtlCol="0" anchor="ctr"/>
           <a:lstStyle/>
           <a:p>
             <a:pPr algn="ctr"/>
@@ -33618,7 +33941,7 @@
           </a:fontRef>
         </p:style>
         <p:txBody>
-          <a:bodyPr rtlCol="0" anchor="ctr" wrap="square" lIns="73152" rIns="73152" tIns="36576" bIns="36576"/>
+          <a:bodyPr wrap="square" lIns="73152" tIns="36576" rIns="73152" bIns="36576" rtlCol="0" anchor="ctr"/>
           <a:lstStyle/>
           <a:p>
             <a:pPr algn="ctr"/>
@@ -33692,7 +34015,7 @@
           </a:fontRef>
         </p:style>
         <p:txBody>
-          <a:bodyPr rtlCol="0" anchor="ctr" wrap="square" lIns="73152" rIns="73152" tIns="36576" bIns="36576"/>
+          <a:bodyPr wrap="square" lIns="73152" tIns="36576" rIns="73152" bIns="36576" rtlCol="0" anchor="ctr"/>
           <a:lstStyle/>
           <a:p>
             <a:pPr algn="ctr"/>
@@ -33770,6 +34093,7 @@
           <a:lstStyle/>
           <a:p>
             <a:pPr algn="ctr"/>
+            <a:endParaRPr/>
           </a:p>
         </p:txBody>
       </p:sp>
@@ -33790,7 +34114,7 @@
           <a:noFill/>
         </p:spPr>
         <p:txBody>
-          <a:bodyPr wrap="square" anchor="t" lIns="0" rIns="0" tIns="0" bIns="0">
+          <a:bodyPr wrap="square" lIns="0" tIns="0" rIns="0" bIns="0" anchor="t">
             <a:spAutoFit/>
           </a:bodyPr>
           <a:lstStyle/>
@@ -33829,7 +34153,7 @@
           <a:noFill/>
         </p:spPr>
         <p:txBody>
-          <a:bodyPr wrap="square" anchor="t" lIns="0" rIns="0" tIns="0" bIns="0">
+          <a:bodyPr wrap="square" lIns="0" tIns="0" rIns="0" bIns="0" anchor="t">
             <a:spAutoFit/>
           </a:bodyPr>
           <a:lstStyle/>
@@ -33868,7 +34192,7 @@
           <a:noFill/>
         </p:spPr>
         <p:txBody>
-          <a:bodyPr wrap="square" anchor="t" lIns="0" rIns="0" tIns="0" bIns="0">
+          <a:bodyPr wrap="square" lIns="0" tIns="0" rIns="0" bIns="0" anchor="t">
             <a:spAutoFit/>
           </a:bodyPr>
           <a:lstStyle/>
@@ -33895,11 +34219,23 @@
   <p:clrMapOvr>
     <a:masterClrMapping/>
   </p:clrMapOvr>
+  <mc:AlternateContent xmlns:mc="http://schemas.openxmlformats.org/markup-compatibility/2006">
+    <mc:Choice xmlns:p14="http://schemas.microsoft.com/office/powerpoint/2010/main" Requires="p14">
+      <p:transition spd="med" p14:dur="700">
+        <p:fade thruBlk="1"/>
+      </p:transition>
+    </mc:Choice>
+    <mc:Fallback>
+      <p:transition spd="med">
+        <p:fade thruBlk="1"/>
+      </p:transition>
+    </mc:Fallback>
+  </mc:AlternateContent>
 </p:sld>
 </file>
 
 <file path=ppt/slides/slide4.xml><?xml version="1.0" encoding="utf-8"?>
-<p:sld xmlns:a="http://schemas.openxmlformats.org/drawingml/2006/main" xmlns:p="http://schemas.openxmlformats.org/presentationml/2006/main" xmlns:r="http://schemas.openxmlformats.org/officeDocument/2006/relationships">
+<p:sld xmlns:a="http://schemas.openxmlformats.org/drawingml/2006/main" xmlns:r="http://schemas.openxmlformats.org/officeDocument/2006/relationships" xmlns:p="http://schemas.openxmlformats.org/presentationml/2006/main">
   <p:cSld>
     <p:spTree>
       <p:nvGrpSpPr>
@@ -33907,7 +34243,14 @@
         <p:cNvGrpSpPr/>
         <p:nvPr/>
       </p:nvGrpSpPr>
-      <p:grpSpPr/>
+      <p:grpSpPr>
+        <a:xfrm>
+          <a:off x="0" y="0"/>
+          <a:ext cx="0" cy="0"/>
+          <a:chOff x="0" y="0"/>
+          <a:chExt cx="0" cy="0"/>
+        </a:xfrm>
+      </p:grpSpPr>
       <p:pic>
         <p:nvPicPr>
           <p:cNvPr id="2" name="Picture 1" descr="bg_deep.png"/>
@@ -33917,7 +34260,7 @@
           <p:nvPr/>
         </p:nvPicPr>
         <p:blipFill>
-          <a:blip r:embed="rId2"/>
+          <a:blip r:embed="rId3"/>
           <a:stretch>
             <a:fillRect/>
           </a:stretch>
@@ -33949,7 +34292,7 @@
           <a:noFill/>
         </p:spPr>
         <p:txBody>
-          <a:bodyPr wrap="square" anchor="t" lIns="0" rIns="0" tIns="0" bIns="0">
+          <a:bodyPr wrap="square" lIns="0" tIns="0" rIns="0" bIns="0" anchor="t">
             <a:spAutoFit/>
           </a:bodyPr>
           <a:lstStyle/>
@@ -33988,7 +34331,7 @@
           <a:noFill/>
         </p:spPr>
         <p:txBody>
-          <a:bodyPr wrap="square" anchor="t" lIns="0" rIns="0" tIns="0" bIns="0">
+          <a:bodyPr wrap="square" lIns="0" tIns="0" rIns="0" bIns="0" anchor="t">
             <a:spAutoFit/>
           </a:bodyPr>
           <a:lstStyle/>
@@ -34051,7 +34394,7 @@
           </a:fontRef>
         </p:style>
         <p:txBody>
-          <a:bodyPr rtlCol="0" anchor="ctr" wrap="square" lIns="73152" rIns="73152" tIns="36576" bIns="36576"/>
+          <a:bodyPr wrap="square" lIns="73152" tIns="36576" rIns="73152" bIns="36576" rtlCol="0" anchor="ctr"/>
           <a:lstStyle/>
           <a:p>
             <a:pPr algn="ctr"/>
@@ -34126,7 +34469,7 @@
           </a:fontRef>
         </p:style>
         <p:txBody>
-          <a:bodyPr rtlCol="0" anchor="ctr" wrap="square" lIns="73152" rIns="73152" tIns="36576" bIns="36576"/>
+          <a:bodyPr wrap="square" lIns="73152" tIns="36576" rIns="73152" bIns="36576" rtlCol="0" anchor="ctr"/>
           <a:lstStyle/>
           <a:p>
             <a:pPr algn="ctr"/>
@@ -34201,7 +34544,7 @@
           </a:fontRef>
         </p:style>
         <p:txBody>
-          <a:bodyPr rtlCol="0" anchor="ctr" wrap="square" lIns="73152" rIns="73152" tIns="36576" bIns="36576"/>
+          <a:bodyPr wrap="square" lIns="73152" tIns="36576" rIns="73152" bIns="36576" rtlCol="0" anchor="ctr"/>
           <a:lstStyle/>
           <a:p>
             <a:pPr algn="ctr"/>
@@ -34276,7 +34619,7 @@
           </a:fontRef>
         </p:style>
         <p:txBody>
-          <a:bodyPr rtlCol="0" anchor="ctr" wrap="square" lIns="73152" rIns="73152" tIns="36576" bIns="36576"/>
+          <a:bodyPr wrap="square" lIns="73152" tIns="36576" rIns="73152" bIns="36576" rtlCol="0" anchor="ctr"/>
           <a:lstStyle/>
           <a:p>
             <a:pPr algn="ctr"/>
@@ -34351,7 +34694,7 @@
           </a:fontRef>
         </p:style>
         <p:txBody>
-          <a:bodyPr rtlCol="0" anchor="ctr" wrap="square" lIns="73152" rIns="73152" tIns="36576" bIns="36576"/>
+          <a:bodyPr wrap="square" lIns="73152" tIns="36576" rIns="73152" bIns="36576" rtlCol="0" anchor="ctr"/>
           <a:lstStyle/>
           <a:p>
             <a:pPr algn="ctr"/>
@@ -34426,7 +34769,7 @@
           </a:fontRef>
         </p:style>
         <p:txBody>
-          <a:bodyPr rtlCol="0" anchor="ctr" wrap="square" lIns="73152" rIns="73152" tIns="36576" bIns="36576"/>
+          <a:bodyPr wrap="square" lIns="73152" tIns="36576" rIns="73152" bIns="36576" rtlCol="0" anchor="ctr"/>
           <a:lstStyle/>
           <a:p>
             <a:pPr algn="ctr"/>
@@ -34505,6 +34848,7 @@
           <a:lstStyle/>
           <a:p>
             <a:pPr algn="ctr"/>
+            <a:endParaRPr/>
           </a:p>
         </p:txBody>
       </p:sp>
@@ -34525,7 +34869,7 @@
           <a:noFill/>
         </p:spPr>
         <p:txBody>
-          <a:bodyPr wrap="square" anchor="t" lIns="0" rIns="0" tIns="0" bIns="0">
+          <a:bodyPr wrap="square" lIns="0" tIns="0" rIns="0" bIns="0" anchor="t">
             <a:spAutoFit/>
           </a:bodyPr>
           <a:lstStyle/>
@@ -34564,7 +34908,7 @@
           <a:noFill/>
         </p:spPr>
         <p:txBody>
-          <a:bodyPr wrap="square" anchor="t" lIns="0" rIns="0" tIns="0" bIns="0">
+          <a:bodyPr wrap="square" lIns="0" tIns="0" rIns="0" bIns="0" anchor="t">
             <a:spAutoFit/>
           </a:bodyPr>
           <a:lstStyle/>
@@ -34603,7 +34947,7 @@
           <a:noFill/>
         </p:spPr>
         <p:txBody>
-          <a:bodyPr wrap="square" anchor="t" lIns="0" rIns="0" tIns="0" bIns="0">
+          <a:bodyPr wrap="square" lIns="0" tIns="0" rIns="0" bIns="0" anchor="t">
             <a:spAutoFit/>
           </a:bodyPr>
           <a:lstStyle/>
@@ -34630,11 +34974,23 @@
   <p:clrMapOvr>
     <a:masterClrMapping/>
   </p:clrMapOvr>
+  <mc:AlternateContent xmlns:mc="http://schemas.openxmlformats.org/markup-compatibility/2006">
+    <mc:Choice xmlns:p14="http://schemas.microsoft.com/office/powerpoint/2010/main" Requires="p14">
+      <p:transition spd="med" p14:dur="700">
+        <p:fade thruBlk="1"/>
+      </p:transition>
+    </mc:Choice>
+    <mc:Fallback>
+      <p:transition spd="med">
+        <p:fade thruBlk="1"/>
+      </p:transition>
+    </mc:Fallback>
+  </mc:AlternateContent>
 </p:sld>
 </file>
 
 <file path=ppt/slides/slide5.xml><?xml version="1.0" encoding="utf-8"?>
-<p:sld xmlns:a="http://schemas.openxmlformats.org/drawingml/2006/main" xmlns:p="http://schemas.openxmlformats.org/presentationml/2006/main" xmlns:r="http://schemas.openxmlformats.org/officeDocument/2006/relationships">
+<p:sld xmlns:a="http://schemas.openxmlformats.org/drawingml/2006/main" xmlns:r="http://schemas.openxmlformats.org/officeDocument/2006/relationships" xmlns:p="http://schemas.openxmlformats.org/presentationml/2006/main">
   <p:cSld>
     <p:spTree>
       <p:nvGrpSpPr>
@@ -34642,7 +34998,14 @@
         <p:cNvGrpSpPr/>
         <p:nvPr/>
       </p:nvGrpSpPr>
-      <p:grpSpPr/>
+      <p:grpSpPr>
+        <a:xfrm>
+          <a:off x="0" y="0"/>
+          <a:ext cx="0" cy="0"/>
+          <a:chOff x="0" y="0"/>
+          <a:chExt cx="0" cy="0"/>
+        </a:xfrm>
+      </p:grpSpPr>
       <p:pic>
         <p:nvPicPr>
           <p:cNvPr id="2" name="Picture 1" descr="bg_deep.png"/>
@@ -34652,7 +35015,7 @@
           <p:nvPr/>
         </p:nvPicPr>
         <p:blipFill>
-          <a:blip r:embed="rId2"/>
+          <a:blip r:embed="rId3"/>
           <a:stretch>
             <a:fillRect/>
           </a:stretch>
@@ -34684,7 +35047,7 @@
           <a:noFill/>
         </p:spPr>
         <p:txBody>
-          <a:bodyPr wrap="square" anchor="t" lIns="0" rIns="0" tIns="0" bIns="0">
+          <a:bodyPr wrap="square" lIns="0" tIns="0" rIns="0" bIns="0" anchor="t">
             <a:spAutoFit/>
           </a:bodyPr>
           <a:lstStyle/>
@@ -34723,7 +35086,7 @@
           <a:noFill/>
         </p:spPr>
         <p:txBody>
-          <a:bodyPr wrap="square" anchor="t" lIns="0" rIns="0" tIns="0" bIns="0">
+          <a:bodyPr wrap="square" lIns="0" tIns="0" rIns="0" bIns="0" anchor="t">
             <a:spAutoFit/>
           </a:bodyPr>
           <a:lstStyle/>
@@ -34762,7 +35125,7 @@
           <a:noFill/>
         </p:spPr>
         <p:txBody>
-          <a:bodyPr wrap="square" anchor="t" lIns="0" rIns="0" tIns="0" bIns="0">
+          <a:bodyPr wrap="square" lIns="0" tIns="0" rIns="0" bIns="0" anchor="t">
             <a:spAutoFit/>
           </a:bodyPr>
           <a:lstStyle/>
@@ -34825,7 +35188,7 @@
           </a:fontRef>
         </p:style>
         <p:txBody>
-          <a:bodyPr rtlCol="0" anchor="ctr" wrap="square" lIns="73152" rIns="73152" tIns="36576" bIns="36576"/>
+          <a:bodyPr wrap="square" lIns="73152" tIns="36576" rIns="73152" bIns="36576" rtlCol="0" anchor="ctr"/>
           <a:lstStyle/>
           <a:p>
             <a:pPr algn="ctr"/>
@@ -34934,7 +35297,7 @@
           </a:fontRef>
         </p:style>
         <p:txBody>
-          <a:bodyPr rtlCol="0" anchor="ctr" wrap="square" lIns="73152" rIns="73152" tIns="36576" bIns="36576"/>
+          <a:bodyPr wrap="square" lIns="73152" tIns="36576" rIns="73152" bIns="36576" rtlCol="0" anchor="ctr"/>
           <a:lstStyle/>
           <a:p>
             <a:pPr algn="ctr"/>
@@ -35043,7 +35406,7 @@
           </a:fontRef>
         </p:style>
         <p:txBody>
-          <a:bodyPr rtlCol="0" anchor="ctr" wrap="square" lIns="73152" rIns="73152" tIns="36576" bIns="36576"/>
+          <a:bodyPr wrap="square" lIns="73152" tIns="36576" rIns="73152" bIns="36576" rtlCol="0" anchor="ctr"/>
           <a:lstStyle/>
           <a:p>
             <a:pPr algn="ctr"/>
@@ -35152,7 +35515,7 @@
           </a:fontRef>
         </p:style>
         <p:txBody>
-          <a:bodyPr rtlCol="0" anchor="ctr" wrap="square" lIns="73152" rIns="73152" tIns="36576" bIns="36576"/>
+          <a:bodyPr wrap="square" lIns="73152" tIns="36576" rIns="73152" bIns="36576" rtlCol="0" anchor="ctr"/>
           <a:lstStyle/>
           <a:p>
             <a:pPr algn="ctr"/>
@@ -35245,7 +35608,7 @@
           </a:fontRef>
         </p:style>
         <p:txBody>
-          <a:bodyPr rtlCol="0" anchor="ctr" wrap="square" lIns="73152" rIns="73152" tIns="36576" bIns="36576"/>
+          <a:bodyPr wrap="square" lIns="73152" tIns="36576" rIns="73152" bIns="36576" rtlCol="0" anchor="ctr"/>
           <a:lstStyle/>
           <a:p>
             <a:pPr algn="ctr"/>
@@ -35338,7 +35701,7 @@
           </a:fontRef>
         </p:style>
         <p:txBody>
-          <a:bodyPr rtlCol="0" anchor="ctr" wrap="square" lIns="73152" rIns="73152" tIns="36576" bIns="36576"/>
+          <a:bodyPr wrap="square" lIns="73152" tIns="36576" rIns="73152" bIns="36576" rtlCol="0" anchor="ctr"/>
           <a:lstStyle/>
           <a:p>
             <a:pPr algn="ctr"/>
@@ -35411,7 +35774,7 @@
           </a:fontRef>
         </p:style>
         <p:txBody>
-          <a:bodyPr rtlCol="0" anchor="ctr" wrap="square" lIns="73152" rIns="73152" tIns="36576" bIns="36576"/>
+          <a:bodyPr wrap="square" lIns="73152" tIns="36576" rIns="73152" bIns="36576" rtlCol="0" anchor="ctr"/>
           <a:lstStyle/>
           <a:p>
             <a:pPr algn="ctr"/>
@@ -35484,7 +35847,7 @@
           </a:fontRef>
         </p:style>
         <p:txBody>
-          <a:bodyPr rtlCol="0" anchor="ctr" wrap="square" lIns="73152" rIns="73152" tIns="36576" bIns="36576"/>
+          <a:bodyPr wrap="square" lIns="73152" tIns="36576" rIns="73152" bIns="36576" rtlCol="0" anchor="ctr"/>
           <a:lstStyle/>
           <a:p>
             <a:pPr algn="ctr"/>
@@ -35557,7 +35920,7 @@
           </a:fontRef>
         </p:style>
         <p:txBody>
-          <a:bodyPr rtlCol="0" anchor="ctr" wrap="square" lIns="73152" rIns="73152" tIns="36576" bIns="36576"/>
+          <a:bodyPr wrap="square" lIns="73152" tIns="36576" rIns="73152" bIns="36576" rtlCol="0" anchor="ctr"/>
           <a:lstStyle/>
           <a:p>
             <a:pPr algn="ctr"/>
@@ -35630,7 +35993,7 @@
           </a:fontRef>
         </p:style>
         <p:txBody>
-          <a:bodyPr rtlCol="0" anchor="ctr" wrap="square" lIns="73152" rIns="73152" tIns="36576" bIns="36576"/>
+          <a:bodyPr wrap="square" lIns="73152" tIns="36576" rIns="73152" bIns="36576" rtlCol="0" anchor="ctr"/>
           <a:lstStyle/>
           <a:p>
             <a:pPr algn="ctr"/>
@@ -35739,7 +36102,7 @@
           </a:fontRef>
         </p:style>
         <p:txBody>
-          <a:bodyPr rtlCol="0" anchor="ctr" wrap="square" lIns="73152" rIns="73152" tIns="36576" bIns="36576"/>
+          <a:bodyPr wrap="square" lIns="73152" tIns="36576" rIns="73152" bIns="36576" rtlCol="0" anchor="ctr"/>
           <a:lstStyle/>
           <a:p>
             <a:pPr algn="ctr"/>
@@ -35772,7 +36135,7 @@
           <a:noFill/>
         </p:spPr>
         <p:txBody>
-          <a:bodyPr wrap="square" anchor="t" lIns="0" rIns="0" tIns="0" bIns="0">
+          <a:bodyPr wrap="square" lIns="0" tIns="0" rIns="0" bIns="0" anchor="t">
             <a:spAutoFit/>
           </a:bodyPr>
           <a:lstStyle/>
@@ -35811,7 +36174,7 @@
           <a:noFill/>
         </p:spPr>
         <p:txBody>
-          <a:bodyPr wrap="square" anchor="t" lIns="0" rIns="0" tIns="0" bIns="0">
+          <a:bodyPr wrap="square" lIns="0" tIns="0" rIns="0" bIns="0" anchor="t">
             <a:spAutoFit/>
           </a:bodyPr>
           <a:lstStyle/>
@@ -35838,11 +36201,23 @@
   <p:clrMapOvr>
     <a:masterClrMapping/>
   </p:clrMapOvr>
+  <mc:AlternateContent xmlns:mc="http://schemas.openxmlformats.org/markup-compatibility/2006">
+    <mc:Choice xmlns:p14="http://schemas.microsoft.com/office/powerpoint/2010/main" Requires="p14">
+      <p:transition spd="med" p14:dur="700">
+        <p:fade thruBlk="1"/>
+      </p:transition>
+    </mc:Choice>
+    <mc:Fallback>
+      <p:transition spd="med">
+        <p:fade thruBlk="1"/>
+      </p:transition>
+    </mc:Fallback>
+  </mc:AlternateContent>
 </p:sld>
 </file>
 
 <file path=ppt/slides/slide6.xml><?xml version="1.0" encoding="utf-8"?>
-<p:sld xmlns:a="http://schemas.openxmlformats.org/drawingml/2006/main" xmlns:p="http://schemas.openxmlformats.org/presentationml/2006/main" xmlns:r="http://schemas.openxmlformats.org/officeDocument/2006/relationships">
+<p:sld xmlns:a="http://schemas.openxmlformats.org/drawingml/2006/main" xmlns:r="http://schemas.openxmlformats.org/officeDocument/2006/relationships" xmlns:p="http://schemas.openxmlformats.org/presentationml/2006/main">
   <p:cSld>
     <p:spTree>
       <p:nvGrpSpPr>
@@ -35850,7 +36225,14 @@
         <p:cNvGrpSpPr/>
         <p:nvPr/>
       </p:nvGrpSpPr>
-      <p:grpSpPr/>
+      <p:grpSpPr>
+        <a:xfrm>
+          <a:off x="0" y="0"/>
+          <a:ext cx="0" cy="0"/>
+          <a:chOff x="0" y="0"/>
+          <a:chExt cx="0" cy="0"/>
+        </a:xfrm>
+      </p:grpSpPr>
       <p:pic>
         <p:nvPicPr>
           <p:cNvPr id="2" name="Picture 1" descr="bg_red.png"/>
@@ -35860,7 +36242,7 @@
           <p:nvPr/>
         </p:nvPicPr>
         <p:blipFill>
-          <a:blip r:embed="rId2"/>
+          <a:blip r:embed="rId3"/>
           <a:stretch>
             <a:fillRect/>
           </a:stretch>
@@ -35892,7 +36274,7 @@
           <a:noFill/>
         </p:spPr>
         <p:txBody>
-          <a:bodyPr wrap="square" anchor="t" lIns="0" rIns="0" tIns="0" bIns="0">
+          <a:bodyPr wrap="square" lIns="0" tIns="0" rIns="0" bIns="0" anchor="t">
             <a:spAutoFit/>
           </a:bodyPr>
           <a:lstStyle/>
@@ -35931,7 +36313,7 @@
           <a:noFill/>
         </p:spPr>
         <p:txBody>
-          <a:bodyPr wrap="square" anchor="t" lIns="0" rIns="0" tIns="0" bIns="0">
+          <a:bodyPr wrap="square" lIns="0" tIns="0" rIns="0" bIns="0" anchor="t">
             <a:spAutoFit/>
           </a:bodyPr>
           <a:lstStyle/>
@@ -35998,6 +36380,7 @@
           <a:lstStyle/>
           <a:p>
             <a:pPr algn="ctr"/>
+            <a:endParaRPr/>
           </a:p>
         </p:txBody>
       </p:sp>
@@ -36018,7 +36401,7 @@
           <a:noFill/>
         </p:spPr>
         <p:txBody>
-          <a:bodyPr wrap="square" anchor="t" lIns="0" rIns="0" tIns="0" bIns="0">
+          <a:bodyPr wrap="square" lIns="0" tIns="0" rIns="0" bIns="0" anchor="t">
             <a:spAutoFit/>
           </a:bodyPr>
           <a:lstStyle/>
@@ -36081,7 +36464,7 @@
           </a:fontRef>
         </p:style>
         <p:txBody>
-          <a:bodyPr rtlCol="0" anchor="ctr" wrap="square" lIns="73152" rIns="73152" tIns="36576" bIns="36576"/>
+          <a:bodyPr wrap="square" lIns="73152" tIns="36576" rIns="73152" bIns="36576" rtlCol="0" anchor="ctr"/>
           <a:lstStyle/>
           <a:p>
             <a:pPr algn="ctr"/>
@@ -36174,7 +36557,7 @@
           </a:fontRef>
         </p:style>
         <p:txBody>
-          <a:bodyPr rtlCol="0" anchor="ctr" wrap="square" lIns="73152" rIns="73152" tIns="36576" bIns="36576"/>
+          <a:bodyPr wrap="square" lIns="73152" tIns="36576" rIns="73152" bIns="36576" rtlCol="0" anchor="ctr"/>
           <a:lstStyle/>
           <a:p>
             <a:pPr algn="ctr"/>
@@ -36267,7 +36650,7 @@
           </a:fontRef>
         </p:style>
         <p:txBody>
-          <a:bodyPr rtlCol="0" anchor="ctr" wrap="square" lIns="73152" rIns="73152" tIns="36576" bIns="36576"/>
+          <a:bodyPr wrap="square" lIns="73152" tIns="36576" rIns="73152" bIns="36576" rtlCol="0" anchor="ctr"/>
           <a:lstStyle/>
           <a:p>
             <a:pPr algn="ctr"/>
@@ -36360,7 +36743,7 @@
           </a:fontRef>
         </p:style>
         <p:txBody>
-          <a:bodyPr rtlCol="0" anchor="ctr" wrap="square" lIns="73152" rIns="73152" tIns="36576" bIns="36576"/>
+          <a:bodyPr wrap="square" lIns="73152" tIns="36576" rIns="73152" bIns="36576" rtlCol="0" anchor="ctr"/>
           <a:lstStyle/>
           <a:p>
             <a:pPr algn="ctr"/>
@@ -36421,6 +36804,7 @@
           <a:lstStyle/>
           <a:p>
             <a:pPr algn="ctr"/>
+            <a:endParaRPr/>
           </a:p>
         </p:txBody>
       </p:sp>
@@ -36441,7 +36825,7 @@
           <a:noFill/>
         </p:spPr>
         <p:txBody>
-          <a:bodyPr wrap="square" anchor="t" lIns="0" rIns="0" tIns="0" bIns="0">
+          <a:bodyPr wrap="square" lIns="0" tIns="0" rIns="0" bIns="0" anchor="t">
             <a:spAutoFit/>
           </a:bodyPr>
           <a:lstStyle/>
@@ -36504,7 +36888,7 @@
           </a:fontRef>
         </p:style>
         <p:txBody>
-          <a:bodyPr rtlCol="0" anchor="ctr" wrap="square" lIns="73152" rIns="73152" tIns="36576" bIns="36576"/>
+          <a:bodyPr wrap="square" lIns="73152" tIns="36576" rIns="73152" bIns="36576" rtlCol="0" anchor="ctr"/>
           <a:lstStyle/>
           <a:p>
             <a:pPr algn="ctr"/>
@@ -36597,7 +36981,7 @@
           </a:fontRef>
         </p:style>
         <p:txBody>
-          <a:bodyPr rtlCol="0" anchor="ctr" wrap="square" lIns="73152" rIns="73152" tIns="36576" bIns="36576"/>
+          <a:bodyPr wrap="square" lIns="73152" tIns="36576" rIns="73152" bIns="36576" rtlCol="0" anchor="ctr"/>
           <a:lstStyle/>
           <a:p>
             <a:pPr algn="ctr"/>
@@ -36690,7 +37074,7 @@
           </a:fontRef>
         </p:style>
         <p:txBody>
-          <a:bodyPr rtlCol="0" anchor="ctr" wrap="square" lIns="73152" rIns="73152" tIns="36576" bIns="36576"/>
+          <a:bodyPr wrap="square" lIns="73152" tIns="36576" rIns="73152" bIns="36576" rtlCol="0" anchor="ctr"/>
           <a:lstStyle/>
           <a:p>
             <a:pPr algn="ctr"/>
@@ -36783,7 +37167,7 @@
           </a:fontRef>
         </p:style>
         <p:txBody>
-          <a:bodyPr rtlCol="0" anchor="ctr" wrap="square" lIns="73152" rIns="73152" tIns="36576" bIns="36576"/>
+          <a:bodyPr wrap="square" lIns="73152" tIns="36576" rIns="73152" bIns="36576" rtlCol="0" anchor="ctr"/>
           <a:lstStyle/>
           <a:p>
             <a:pPr algn="ctr"/>
@@ -36816,7 +37200,7 @@
           <a:noFill/>
         </p:spPr>
         <p:txBody>
-          <a:bodyPr wrap="square" anchor="t" lIns="0" rIns="0" tIns="0" bIns="0">
+          <a:bodyPr wrap="square" lIns="0" tIns="0" rIns="0" bIns="0" anchor="t">
             <a:spAutoFit/>
           </a:bodyPr>
           <a:lstStyle/>
@@ -36855,7 +37239,7 @@
           <a:noFill/>
         </p:spPr>
         <p:txBody>
-          <a:bodyPr wrap="square" anchor="t" lIns="0" rIns="0" tIns="0" bIns="0">
+          <a:bodyPr wrap="square" lIns="0" tIns="0" rIns="0" bIns="0" anchor="t">
             <a:spAutoFit/>
           </a:bodyPr>
           <a:lstStyle/>
@@ -36894,7 +37278,7 @@
           <a:noFill/>
         </p:spPr>
         <p:txBody>
-          <a:bodyPr wrap="square" anchor="t" lIns="0" rIns="0" tIns="0" bIns="0">
+          <a:bodyPr wrap="square" lIns="0" tIns="0" rIns="0" bIns="0" anchor="t">
             <a:spAutoFit/>
           </a:bodyPr>
           <a:lstStyle/>
@@ -36921,11 +37305,23 @@
   <p:clrMapOvr>
     <a:masterClrMapping/>
   </p:clrMapOvr>
+  <mc:AlternateContent xmlns:mc="http://schemas.openxmlformats.org/markup-compatibility/2006">
+    <mc:Choice xmlns:p14="http://schemas.microsoft.com/office/powerpoint/2010/main" Requires="p14">
+      <p:transition spd="med" p14:dur="700">
+        <p:fade thruBlk="1"/>
+      </p:transition>
+    </mc:Choice>
+    <mc:Fallback>
+      <p:transition spd="med">
+        <p:fade thruBlk="1"/>
+      </p:transition>
+    </mc:Fallback>
+  </mc:AlternateContent>
 </p:sld>
 </file>
 
 <file path=ppt/slides/slide7.xml><?xml version="1.0" encoding="utf-8"?>
-<p:sld xmlns:a="http://schemas.openxmlformats.org/drawingml/2006/main" xmlns:p="http://schemas.openxmlformats.org/presentationml/2006/main" xmlns:r="http://schemas.openxmlformats.org/officeDocument/2006/relationships">
+<p:sld xmlns:a="http://schemas.openxmlformats.org/drawingml/2006/main" xmlns:r="http://schemas.openxmlformats.org/officeDocument/2006/relationships" xmlns:p="http://schemas.openxmlformats.org/presentationml/2006/main">
   <p:cSld>
     <p:spTree>
       <p:nvGrpSpPr>
@@ -36933,7 +37329,14 @@
         <p:cNvGrpSpPr/>
         <p:nvPr/>
       </p:nvGrpSpPr>
-      <p:grpSpPr/>
+      <p:grpSpPr>
+        <a:xfrm>
+          <a:off x="0" y="0"/>
+          <a:ext cx="0" cy="0"/>
+          <a:chOff x="0" y="0"/>
+          <a:chExt cx="0" cy="0"/>
+        </a:xfrm>
+      </p:grpSpPr>
       <p:pic>
         <p:nvPicPr>
           <p:cNvPr id="2" name="Picture 1" descr="bg_red.png"/>
@@ -36943,7 +37346,7 @@
           <p:nvPr/>
         </p:nvPicPr>
         <p:blipFill>
-          <a:blip r:embed="rId2"/>
+          <a:blip r:embed="rId3"/>
           <a:stretch>
             <a:fillRect/>
           </a:stretch>
@@ -36975,7 +37378,7 @@
           <a:noFill/>
         </p:spPr>
         <p:txBody>
-          <a:bodyPr wrap="square" anchor="t" lIns="0" rIns="0" tIns="0" bIns="0">
+          <a:bodyPr wrap="square" lIns="0" tIns="0" rIns="0" bIns="0" anchor="t">
             <a:spAutoFit/>
           </a:bodyPr>
           <a:lstStyle/>
@@ -37014,7 +37417,7 @@
           <a:noFill/>
         </p:spPr>
         <p:txBody>
-          <a:bodyPr wrap="square" anchor="t" lIns="0" rIns="0" tIns="0" bIns="0">
+          <a:bodyPr wrap="square" lIns="0" tIns="0" rIns="0" bIns="0" anchor="t">
             <a:spAutoFit/>
           </a:bodyPr>
           <a:lstStyle/>
@@ -37053,7 +37456,7 @@
           <a:noFill/>
         </p:spPr>
         <p:txBody>
-          <a:bodyPr wrap="square" anchor="t" lIns="0" rIns="0" tIns="0" bIns="0">
+          <a:bodyPr wrap="square" lIns="0" tIns="0" rIns="0" bIns="0" anchor="t">
             <a:spAutoFit/>
           </a:bodyPr>
           <a:lstStyle/>
@@ -37116,7 +37519,7 @@
           </a:fontRef>
         </p:style>
         <p:txBody>
-          <a:bodyPr rtlCol="0" anchor="ctr" wrap="square" lIns="73152" rIns="73152" tIns="36576" bIns="36576"/>
+          <a:bodyPr wrap="square" lIns="73152" tIns="36576" rIns="73152" bIns="36576" rtlCol="0" anchor="ctr"/>
           <a:lstStyle/>
           <a:p>
             <a:pPr algn="ctr"/>
@@ -37209,7 +37612,7 @@
           </a:fontRef>
         </p:style>
         <p:txBody>
-          <a:bodyPr rtlCol="0" anchor="ctr" wrap="square" lIns="73152" rIns="73152" tIns="36576" bIns="36576"/>
+          <a:bodyPr wrap="square" lIns="73152" tIns="36576" rIns="73152" bIns="36576" rtlCol="0" anchor="ctr"/>
           <a:lstStyle/>
           <a:p>
             <a:pPr algn="ctr"/>
@@ -37339,7 +37742,7 @@
           </a:fontRef>
         </p:style>
         <p:txBody>
-          <a:bodyPr rtlCol="0" anchor="ctr" wrap="square" lIns="73152" rIns="73152" tIns="36576" bIns="36576"/>
+          <a:bodyPr wrap="square" lIns="73152" tIns="36576" rIns="73152" bIns="36576" rtlCol="0" anchor="ctr"/>
           <a:lstStyle/>
           <a:p>
             <a:pPr algn="ctr"/>
@@ -37396,7 +37799,7 @@
           </a:fontRef>
         </p:style>
         <p:txBody>
-          <a:bodyPr rtlCol="0" anchor="ctr" wrap="square" lIns="73152" rIns="73152" tIns="36576" bIns="36576"/>
+          <a:bodyPr wrap="square" lIns="73152" tIns="36576" rIns="73152" bIns="36576" rtlCol="0" anchor="ctr"/>
           <a:lstStyle/>
           <a:p>
             <a:pPr algn="ctr"/>
@@ -37453,7 +37856,7 @@
           </a:fontRef>
         </p:style>
         <p:txBody>
-          <a:bodyPr rtlCol="0" anchor="ctr" wrap="square" lIns="73152" rIns="73152" tIns="36576" bIns="36576"/>
+          <a:bodyPr wrap="square" lIns="73152" tIns="36576" rIns="73152" bIns="36576" rtlCol="0" anchor="ctr"/>
           <a:lstStyle/>
           <a:p>
             <a:pPr algn="ctr"/>
@@ -37546,7 +37949,7 @@
           </a:fontRef>
         </p:style>
         <p:txBody>
-          <a:bodyPr rtlCol="0" anchor="ctr" wrap="square" lIns="73152" rIns="73152" tIns="36576" bIns="36576"/>
+          <a:bodyPr wrap="square" lIns="73152" tIns="36576" rIns="73152" bIns="36576" rtlCol="0" anchor="ctr"/>
           <a:lstStyle/>
           <a:p>
             <a:pPr algn="ctr"/>
@@ -37639,7 +38042,7 @@
           </a:fontRef>
         </p:style>
         <p:txBody>
-          <a:bodyPr rtlCol="0" anchor="ctr" wrap="square" lIns="73152" rIns="73152" tIns="36576" bIns="36576"/>
+          <a:bodyPr wrap="square" lIns="73152" tIns="36576" rIns="73152" bIns="36576" rtlCol="0" anchor="ctr"/>
           <a:lstStyle/>
           <a:p>
             <a:pPr algn="ctr"/>
@@ -37732,7 +38135,7 @@
           </a:fontRef>
         </p:style>
         <p:txBody>
-          <a:bodyPr rtlCol="0" anchor="ctr" wrap="square" lIns="73152" rIns="73152" tIns="36576" bIns="36576"/>
+          <a:bodyPr wrap="square" lIns="73152" tIns="36576" rIns="73152" bIns="36576" rtlCol="0" anchor="ctr"/>
           <a:lstStyle/>
           <a:p>
             <a:pPr algn="ctr"/>
@@ -37825,7 +38228,7 @@
           </a:fontRef>
         </p:style>
         <p:txBody>
-          <a:bodyPr rtlCol="0" anchor="ctr" wrap="square" lIns="73152" rIns="73152" tIns="36576" bIns="36576"/>
+          <a:bodyPr wrap="square" lIns="73152" tIns="36576" rIns="73152" bIns="36576" rtlCol="0" anchor="ctr"/>
           <a:lstStyle/>
           <a:p>
             <a:pPr algn="ctr"/>
@@ -37886,6 +38289,7 @@
           <a:lstStyle/>
           <a:p>
             <a:pPr algn="ctr"/>
+            <a:endParaRPr/>
           </a:p>
         </p:txBody>
       </p:sp>
@@ -37906,7 +38310,7 @@
           <a:noFill/>
         </p:spPr>
         <p:txBody>
-          <a:bodyPr wrap="square" anchor="t" lIns="0" rIns="0" tIns="0" bIns="0">
+          <a:bodyPr wrap="square" lIns="0" tIns="0" rIns="0" bIns="0" anchor="t">
             <a:spAutoFit/>
           </a:bodyPr>
           <a:lstStyle/>
@@ -37945,7 +38349,7 @@
           <a:noFill/>
         </p:spPr>
         <p:txBody>
-          <a:bodyPr wrap="square" anchor="t" lIns="0" rIns="0" tIns="0" bIns="0">
+          <a:bodyPr wrap="square" lIns="0" tIns="0" rIns="0" bIns="0" anchor="t">
             <a:spAutoFit/>
           </a:bodyPr>
           <a:lstStyle/>
@@ -37971,6 +38375,19 @@
                 <a:spcPct val="135000"/>
               </a:lnSpc>
             </a:pPr>
+            <a:endParaRPr sz="1000" b="0" i="0">
+              <a:solidFill>
+                <a:srgbClr val="F4F7FB"/>
+              </a:solidFill>
+              <a:latin typeface="Segoe UI"/>
+            </a:endParaRPr>
+          </a:p>
+          <a:p>
+            <a:pPr algn="l">
+              <a:lnSpc>
+                <a:spcPct val="135000"/>
+              </a:lnSpc>
+            </a:pPr>
             <a:r>
               <a:rPr sz="1000" b="0" i="0">
                 <a:solidFill>
@@ -37978,7 +38395,7 @@
                 </a:solidFill>
                 <a:latin typeface="Segoe UI"/>
               </a:rPr>
-              <a:t/>
+              <a:t>No network connection detected.</a:t>
             </a:r>
           </a:p>
           <a:p>
@@ -37987,31 +38404,12 @@
                 <a:spcPct val="135000"/>
               </a:lnSpc>
             </a:pPr>
-            <a:r>
-              <a:rPr sz="1000" b="0" i="0">
-                <a:solidFill>
-                  <a:srgbClr val="F4F7FB"/>
-                </a:solidFill>
-                <a:latin typeface="Segoe UI"/>
-              </a:rPr>
-              <a:t>No network connection detected.</a:t>
-            </a:r>
-          </a:p>
-          <a:p>
-            <a:pPr algn="l">
-              <a:lnSpc>
-                <a:spcPct val="135000"/>
-              </a:lnSpc>
-            </a:pPr>
-            <a:r>
-              <a:rPr sz="1000" b="0" i="0">
-                <a:solidFill>
-                  <a:srgbClr val="F4F7FB"/>
-                </a:solidFill>
-                <a:latin typeface="Segoe UI"/>
-              </a:rPr>
-              <a:t/>
-            </a:r>
+            <a:endParaRPr sz="1000" b="0" i="0">
+              <a:solidFill>
+                <a:srgbClr val="F4F7FB"/>
+              </a:solidFill>
+              <a:latin typeface="Segoe UI"/>
+            </a:endParaRPr>
           </a:p>
           <a:p>
             <a:pPr algn="l">
@@ -38076,6 +38474,7 @@
           <a:lstStyle/>
           <a:p>
             <a:pPr algn="ctr"/>
+            <a:endParaRPr/>
           </a:p>
         </p:txBody>
       </p:sp>
@@ -38096,7 +38495,7 @@
           <a:noFill/>
         </p:spPr>
         <p:txBody>
-          <a:bodyPr wrap="square" anchor="t" lIns="0" rIns="0" tIns="0" bIns="0">
+          <a:bodyPr wrap="square" lIns="0" tIns="0" rIns="0" bIns="0" anchor="t">
             <a:spAutoFit/>
           </a:bodyPr>
           <a:lstStyle/>
@@ -38151,7 +38550,7 @@
           <a:noFill/>
         </p:spPr>
         <p:txBody>
-          <a:bodyPr wrap="square" anchor="t" lIns="0" rIns="0" tIns="0" bIns="0">
+          <a:bodyPr wrap="square" lIns="0" tIns="0" rIns="0" bIns="0" anchor="t">
             <a:spAutoFit/>
           </a:bodyPr>
           <a:lstStyle/>
@@ -38190,7 +38589,7 @@
           <a:noFill/>
         </p:spPr>
         <p:txBody>
-          <a:bodyPr wrap="square" anchor="t" lIns="0" rIns="0" tIns="0" bIns="0">
+          <a:bodyPr wrap="square" lIns="0" tIns="0" rIns="0" bIns="0" anchor="t">
             <a:spAutoFit/>
           </a:bodyPr>
           <a:lstStyle/>
@@ -38217,11 +38616,23 @@
   <p:clrMapOvr>
     <a:masterClrMapping/>
   </p:clrMapOvr>
+  <mc:AlternateContent xmlns:mc="http://schemas.openxmlformats.org/markup-compatibility/2006">
+    <mc:Choice xmlns:p14="http://schemas.microsoft.com/office/powerpoint/2010/main" Requires="p14">
+      <p:transition spd="med" p14:dur="700">
+        <p:fade thruBlk="1"/>
+      </p:transition>
+    </mc:Choice>
+    <mc:Fallback>
+      <p:transition spd="med">
+        <p:fade thruBlk="1"/>
+      </p:transition>
+    </mc:Fallback>
+  </mc:AlternateContent>
 </p:sld>
 </file>
 
 <file path=ppt/slides/slide8.xml><?xml version="1.0" encoding="utf-8"?>
-<p:sld xmlns:a="http://schemas.openxmlformats.org/drawingml/2006/main" xmlns:p="http://schemas.openxmlformats.org/presentationml/2006/main" xmlns:r="http://schemas.openxmlformats.org/officeDocument/2006/relationships">
+<p:sld xmlns:a="http://schemas.openxmlformats.org/drawingml/2006/main" xmlns:r="http://schemas.openxmlformats.org/officeDocument/2006/relationships" xmlns:p="http://schemas.openxmlformats.org/presentationml/2006/main">
   <p:cSld>
     <p:spTree>
       <p:nvGrpSpPr>
@@ -38229,7 +38640,14 @@
         <p:cNvGrpSpPr/>
         <p:nvPr/>
       </p:nvGrpSpPr>
-      <p:grpSpPr/>
+      <p:grpSpPr>
+        <a:xfrm>
+          <a:off x="0" y="0"/>
+          <a:ext cx="0" cy="0"/>
+          <a:chOff x="0" y="0"/>
+          <a:chExt cx="0" cy="0"/>
+        </a:xfrm>
+      </p:grpSpPr>
       <p:pic>
         <p:nvPicPr>
           <p:cNvPr id="2" name="Picture 1" descr="bg_deep.png"/>
@@ -38239,7 +38657,7 @@
           <p:nvPr/>
         </p:nvPicPr>
         <p:blipFill>
-          <a:blip r:embed="rId2"/>
+          <a:blip r:embed="rId3"/>
           <a:stretch>
             <a:fillRect/>
           </a:stretch>
@@ -38271,7 +38689,7 @@
           <a:noFill/>
         </p:spPr>
         <p:txBody>
-          <a:bodyPr wrap="square" anchor="t" lIns="0" rIns="0" tIns="0" bIns="0">
+          <a:bodyPr wrap="square" lIns="0" tIns="0" rIns="0" bIns="0" anchor="t">
             <a:spAutoFit/>
           </a:bodyPr>
           <a:lstStyle/>
@@ -38310,7 +38728,7 @@
           <a:noFill/>
         </p:spPr>
         <p:txBody>
-          <a:bodyPr wrap="square" anchor="t" lIns="0" rIns="0" tIns="0" bIns="0">
+          <a:bodyPr wrap="square" lIns="0" tIns="0" rIns="0" bIns="0" anchor="t">
             <a:spAutoFit/>
           </a:bodyPr>
           <a:lstStyle/>
@@ -38373,7 +38791,7 @@
           </a:fontRef>
         </p:style>
         <p:txBody>
-          <a:bodyPr rtlCol="0" anchor="ctr" wrap="square" lIns="73152" rIns="73152" tIns="36576" bIns="36576"/>
+          <a:bodyPr wrap="square" lIns="73152" tIns="36576" rIns="73152" bIns="36576" rtlCol="0" anchor="ctr"/>
           <a:lstStyle/>
           <a:p>
             <a:pPr algn="ctr"/>
@@ -38484,7 +38902,7 @@
           </a:fontRef>
         </p:style>
         <p:txBody>
-          <a:bodyPr rtlCol="0" anchor="ctr" wrap="square" lIns="73152" rIns="73152" tIns="36576" bIns="36576"/>
+          <a:bodyPr wrap="square" lIns="73152" tIns="36576" rIns="73152" bIns="36576" rtlCol="0" anchor="ctr"/>
           <a:lstStyle/>
           <a:p>
             <a:pPr algn="ctr"/>
@@ -38594,7 +39012,7 @@
           </a:fontRef>
         </p:style>
         <p:txBody>
-          <a:bodyPr rtlCol="0" anchor="ctr" wrap="square" lIns="73152" rIns="73152" tIns="36576" bIns="36576"/>
+          <a:bodyPr wrap="square" lIns="73152" tIns="36576" rIns="73152" bIns="36576" rtlCol="0" anchor="ctr"/>
           <a:lstStyle/>
           <a:p>
             <a:pPr algn="ctr"/>
@@ -38704,7 +39122,7 @@
           </a:fontRef>
         </p:style>
         <p:txBody>
-          <a:bodyPr rtlCol="0" anchor="ctr" wrap="square" lIns="73152" rIns="73152" tIns="36576" bIns="36576"/>
+          <a:bodyPr wrap="square" lIns="73152" tIns="36576" rIns="73152" bIns="36576" rtlCol="0" anchor="ctr"/>
           <a:lstStyle/>
           <a:p>
             <a:pPr algn="ctr"/>
@@ -38814,7 +39232,7 @@
           </a:fontRef>
         </p:style>
         <p:txBody>
-          <a:bodyPr rtlCol="0" anchor="ctr" wrap="square" lIns="73152" rIns="73152" tIns="36576" bIns="36576"/>
+          <a:bodyPr wrap="square" lIns="73152" tIns="36576" rIns="73152" bIns="36576" rtlCol="0" anchor="ctr"/>
           <a:lstStyle/>
           <a:p>
             <a:pPr algn="ctr"/>
@@ -38892,6 +39310,7 @@
           <a:lstStyle/>
           <a:p>
             <a:pPr algn="ctr"/>
+            <a:endParaRPr/>
           </a:p>
         </p:txBody>
       </p:sp>
@@ -38912,7 +39331,7 @@
           <a:noFill/>
         </p:spPr>
         <p:txBody>
-          <a:bodyPr wrap="square" anchor="t" lIns="0" rIns="0" tIns="0" bIns="0">
+          <a:bodyPr wrap="square" lIns="0" tIns="0" rIns="0" bIns="0" anchor="t">
             <a:spAutoFit/>
           </a:bodyPr>
           <a:lstStyle/>
@@ -38951,7 +39370,7 @@
           <a:noFill/>
         </p:spPr>
         <p:txBody>
-          <a:bodyPr wrap="square" anchor="t" lIns="0" rIns="0" tIns="0" bIns="0">
+          <a:bodyPr wrap="square" lIns="0" tIns="0" rIns="0" bIns="0" anchor="t">
             <a:spAutoFit/>
           </a:bodyPr>
           <a:lstStyle/>
@@ -38977,15 +39396,12 @@
                 <a:spcPct val="140000"/>
               </a:lnSpc>
             </a:pPr>
-            <a:r>
-              <a:rPr sz="1100" b="0" i="0">
-                <a:solidFill>
-                  <a:srgbClr val="F4F7FB"/>
-                </a:solidFill>
-                <a:latin typeface="Segoe UI"/>
-              </a:rPr>
-              <a:t/>
-            </a:r>
+            <a:endParaRPr sz="1100" b="0" i="0">
+              <a:solidFill>
+                <a:srgbClr val="F4F7FB"/>
+              </a:solidFill>
+              <a:latin typeface="Segoe UI"/>
+            </a:endParaRPr>
           </a:p>
           <a:p>
             <a:pPr algn="l">
@@ -39050,6 +39466,7 @@
           <a:lstStyle/>
           <a:p>
             <a:pPr algn="ctr"/>
+            <a:endParaRPr/>
           </a:p>
         </p:txBody>
       </p:sp>
@@ -39070,7 +39487,7 @@
           <a:noFill/>
         </p:spPr>
         <p:txBody>
-          <a:bodyPr wrap="square" anchor="t" lIns="0" rIns="0" tIns="0" bIns="0">
+          <a:bodyPr wrap="square" lIns="0" tIns="0" rIns="0" bIns="0" anchor="t">
             <a:spAutoFit/>
           </a:bodyPr>
           <a:lstStyle/>
@@ -39109,7 +39526,7 @@
           <a:noFill/>
         </p:spPr>
         <p:txBody>
-          <a:bodyPr wrap="square" anchor="t" lIns="0" rIns="0" tIns="0" bIns="0">
+          <a:bodyPr wrap="square" lIns="0" tIns="0" rIns="0" bIns="0" anchor="t">
             <a:spAutoFit/>
           </a:bodyPr>
           <a:lstStyle/>
@@ -39135,15 +39552,12 @@
                 <a:spcPct val="140000"/>
               </a:lnSpc>
             </a:pPr>
-            <a:r>
-              <a:rPr sz="1100" b="0" i="0">
-                <a:solidFill>
-                  <a:srgbClr val="F4F7FB"/>
-                </a:solidFill>
-                <a:latin typeface="Segoe UI"/>
-              </a:rPr>
-              <a:t/>
-            </a:r>
+            <a:endParaRPr sz="1100" b="0" i="0">
+              <a:solidFill>
+                <a:srgbClr val="F4F7FB"/>
+              </a:solidFill>
+              <a:latin typeface="Segoe UI"/>
+            </a:endParaRPr>
           </a:p>
           <a:p>
             <a:pPr algn="l">
@@ -39180,7 +39594,7 @@
           <a:noFill/>
         </p:spPr>
         <p:txBody>
-          <a:bodyPr wrap="square" anchor="t" lIns="0" rIns="0" tIns="0" bIns="0">
+          <a:bodyPr wrap="square" lIns="0" tIns="0" rIns="0" bIns="0" anchor="t">
             <a:spAutoFit/>
           </a:bodyPr>
           <a:lstStyle/>
@@ -39219,7 +39633,7 @@
           <a:noFill/>
         </p:spPr>
         <p:txBody>
-          <a:bodyPr wrap="square" anchor="t" lIns="0" rIns="0" tIns="0" bIns="0">
+          <a:bodyPr wrap="square" lIns="0" tIns="0" rIns="0" bIns="0" anchor="t">
             <a:spAutoFit/>
           </a:bodyPr>
           <a:lstStyle/>
@@ -39246,11 +39660,23 @@
   <p:clrMapOvr>
     <a:masterClrMapping/>
   </p:clrMapOvr>
+  <mc:AlternateContent xmlns:mc="http://schemas.openxmlformats.org/markup-compatibility/2006">
+    <mc:Choice xmlns:p14="http://schemas.microsoft.com/office/powerpoint/2010/main" Requires="p14">
+      <p:transition spd="med" p14:dur="700">
+        <p:fade thruBlk="1"/>
+      </p:transition>
+    </mc:Choice>
+    <mc:Fallback>
+      <p:transition spd="med">
+        <p:fade thruBlk="1"/>
+      </p:transition>
+    </mc:Fallback>
+  </mc:AlternateContent>
 </p:sld>
 </file>
 
 <file path=ppt/slides/slide9.xml><?xml version="1.0" encoding="utf-8"?>
-<p:sld xmlns:a="http://schemas.openxmlformats.org/drawingml/2006/main" xmlns:p="http://schemas.openxmlformats.org/presentationml/2006/main" xmlns:r="http://schemas.openxmlformats.org/officeDocument/2006/relationships">
+<p:sld xmlns:a="http://schemas.openxmlformats.org/drawingml/2006/main" xmlns:r="http://schemas.openxmlformats.org/officeDocument/2006/relationships" xmlns:p="http://schemas.openxmlformats.org/presentationml/2006/main">
   <p:cSld>
     <p:spTree>
       <p:nvGrpSpPr>
@@ -39258,7 +39684,14 @@
         <p:cNvGrpSpPr/>
         <p:nvPr/>
       </p:nvGrpSpPr>
-      <p:grpSpPr/>
+      <p:grpSpPr>
+        <a:xfrm>
+          <a:off x="0" y="0"/>
+          <a:ext cx="0" cy="0"/>
+          <a:chOff x="0" y="0"/>
+          <a:chExt cx="0" cy="0"/>
+        </a:xfrm>
+      </p:grpSpPr>
       <p:pic>
         <p:nvPicPr>
           <p:cNvPr id="2" name="Picture 1" descr="bg_deep.png"/>
@@ -39300,7 +39733,7 @@
           <a:noFill/>
         </p:spPr>
         <p:txBody>
-          <a:bodyPr wrap="square" anchor="t" lIns="0" rIns="0" tIns="0" bIns="0">
+          <a:bodyPr wrap="square" lIns="0" tIns="0" rIns="0" bIns="0" anchor="t">
             <a:spAutoFit/>
           </a:bodyPr>
           <a:lstStyle/>
@@ -39339,7 +39772,7 @@
           <a:noFill/>
         </p:spPr>
         <p:txBody>
-          <a:bodyPr wrap="square" anchor="t" lIns="0" rIns="0" tIns="0" bIns="0">
+          <a:bodyPr wrap="square" lIns="0" tIns="0" rIns="0" bIns="0" anchor="t">
             <a:spAutoFit/>
           </a:bodyPr>
           <a:lstStyle/>
@@ -39378,7 +39811,7 @@
           <a:noFill/>
         </p:spPr>
         <p:txBody>
-          <a:bodyPr wrap="square" anchor="t" lIns="0" rIns="0" tIns="0" bIns="0">
+          <a:bodyPr wrap="square" lIns="0" tIns="0" rIns="0" bIns="0" anchor="t">
             <a:spAutoFit/>
           </a:bodyPr>
           <a:lstStyle/>
@@ -39441,7 +39874,7 @@
           </a:fontRef>
         </p:style>
         <p:txBody>
-          <a:bodyPr rtlCol="0" anchor="ctr" wrap="square" lIns="73152" rIns="73152" tIns="36576" bIns="36576"/>
+          <a:bodyPr wrap="square" lIns="73152" tIns="36576" rIns="73152" bIns="36576" rtlCol="0" anchor="ctr"/>
           <a:lstStyle/>
           <a:p>
             <a:pPr algn="ctr"/>
@@ -39551,7 +39984,7 @@
           </a:fontRef>
         </p:style>
         <p:txBody>
-          <a:bodyPr rtlCol="0" anchor="ctr" wrap="square" lIns="73152" rIns="73152" tIns="36576" bIns="36576"/>
+          <a:bodyPr wrap="square" lIns="73152" tIns="36576" rIns="73152" bIns="36576" rtlCol="0" anchor="ctr"/>
           <a:lstStyle/>
           <a:p>
             <a:pPr algn="ctr"/>
@@ -39661,7 +40094,7 @@
           </a:fontRef>
         </p:style>
         <p:txBody>
-          <a:bodyPr rtlCol="0" anchor="ctr" wrap="square" lIns="73152" rIns="73152" tIns="36576" bIns="36576"/>
+          <a:bodyPr wrap="square" lIns="73152" tIns="36576" rIns="73152" bIns="36576" rtlCol="0" anchor="ctr"/>
           <a:lstStyle/>
           <a:p>
             <a:pPr algn="ctr"/>
@@ -39771,7 +40204,7 @@
           </a:fontRef>
         </p:style>
         <p:txBody>
-          <a:bodyPr rtlCol="0" anchor="ctr" wrap="square" lIns="73152" rIns="73152" tIns="36576" bIns="36576"/>
+          <a:bodyPr wrap="square" lIns="73152" tIns="36576" rIns="73152" bIns="36576" rtlCol="0" anchor="ctr"/>
           <a:lstStyle/>
           <a:p>
             <a:pPr algn="ctr"/>
@@ -39882,7 +40315,7 @@
           </a:fontRef>
         </p:style>
         <p:txBody>
-          <a:bodyPr rtlCol="0" anchor="ctr" wrap="square" lIns="73152" rIns="73152" tIns="36576" bIns="36576"/>
+          <a:bodyPr wrap="square" lIns="73152" tIns="36576" rIns="73152" bIns="36576" rtlCol="0" anchor="ctr"/>
           <a:lstStyle/>
           <a:p>
             <a:pPr algn="ctr"/>
@@ -39933,7 +40366,7 @@
           <a:noFill/>
         </p:spPr>
         <p:txBody>
-          <a:bodyPr wrap="square" anchor="t" lIns="0" rIns="0" tIns="0" bIns="0">
+          <a:bodyPr wrap="square" lIns="0" tIns="0" rIns="0" bIns="0" anchor="t">
             <a:spAutoFit/>
           </a:bodyPr>
           <a:lstStyle/>
@@ -39972,7 +40405,7 @@
           <a:noFill/>
         </p:spPr>
         <p:txBody>
-          <a:bodyPr wrap="square" anchor="t" lIns="0" rIns="0" tIns="0" bIns="0">
+          <a:bodyPr wrap="square" lIns="0" tIns="0" rIns="0" bIns="0" anchor="t">
             <a:spAutoFit/>
           </a:bodyPr>
           <a:lstStyle/>
@@ -40011,7 +40444,7 @@
           <a:noFill/>
         </p:spPr>
         <p:txBody>
-          <a:bodyPr wrap="square" anchor="t" lIns="0" rIns="0" tIns="0" bIns="0">
+          <a:bodyPr wrap="square" lIns="0" tIns="0" rIns="0" bIns="0" anchor="t">
             <a:spAutoFit/>
           </a:bodyPr>
           <a:lstStyle/>
@@ -40050,7 +40483,7 @@
           <a:noFill/>
         </p:spPr>
         <p:txBody>
-          <a:bodyPr wrap="square" anchor="t" lIns="0" rIns="0" tIns="0" bIns="0">
+          <a:bodyPr wrap="square" lIns="0" tIns="0" rIns="0" bIns="0" anchor="t">
             <a:spAutoFit/>
           </a:bodyPr>
           <a:lstStyle/>
@@ -40089,7 +40522,7 @@
           <a:noFill/>
         </p:spPr>
         <p:txBody>
-          <a:bodyPr wrap="square" anchor="t" lIns="0" rIns="0" tIns="0" bIns="0">
+          <a:bodyPr wrap="square" lIns="0" tIns="0" rIns="0" bIns="0" anchor="t">
             <a:spAutoFit/>
           </a:bodyPr>
           <a:lstStyle/>
@@ -40128,7 +40561,7 @@
           <a:noFill/>
         </p:spPr>
         <p:txBody>
-          <a:bodyPr wrap="square" anchor="t" lIns="0" rIns="0" tIns="0" bIns="0">
+          <a:bodyPr wrap="square" lIns="0" tIns="0" rIns="0" bIns="0" anchor="t">
             <a:spAutoFit/>
           </a:bodyPr>
           <a:lstStyle/>
@@ -40167,7 +40600,7 @@
           <a:noFill/>
         </p:spPr>
         <p:txBody>
-          <a:bodyPr wrap="square" anchor="t" lIns="0" rIns="0" tIns="0" bIns="0">
+          <a:bodyPr wrap="square" lIns="0" tIns="0" rIns="0" bIns="0" anchor="t">
             <a:spAutoFit/>
           </a:bodyPr>
           <a:lstStyle/>
@@ -40206,7 +40639,7 @@
           <a:noFill/>
         </p:spPr>
         <p:txBody>
-          <a:bodyPr wrap="square" anchor="t" lIns="0" rIns="0" tIns="0" bIns="0">
+          <a:bodyPr wrap="square" lIns="0" tIns="0" rIns="0" bIns="0" anchor="t">
             <a:spAutoFit/>
           </a:bodyPr>
           <a:lstStyle/>
@@ -40245,7 +40678,7 @@
           <a:noFill/>
         </p:spPr>
         <p:txBody>
-          <a:bodyPr wrap="square" anchor="t" lIns="0" rIns="0" tIns="0" bIns="0">
+          <a:bodyPr wrap="square" lIns="0" tIns="0" rIns="0" bIns="0" anchor="t">
             <a:spAutoFit/>
           </a:bodyPr>
           <a:lstStyle/>
@@ -40284,7 +40717,7 @@
           <a:noFill/>
         </p:spPr>
         <p:txBody>
-          <a:bodyPr wrap="square" anchor="t" lIns="0" rIns="0" tIns="0" bIns="0">
+          <a:bodyPr wrap="square" lIns="0" tIns="0" rIns="0" bIns="0" anchor="t">
             <a:spAutoFit/>
           </a:bodyPr>
           <a:lstStyle/>
@@ -40311,6 +40744,18 @@
   <p:clrMapOvr>
     <a:masterClrMapping/>
   </p:clrMapOvr>
+  <mc:AlternateContent xmlns:mc="http://schemas.openxmlformats.org/markup-compatibility/2006">
+    <mc:Choice xmlns:p14="http://schemas.microsoft.com/office/powerpoint/2010/main" Requires="p14">
+      <p:transition spd="med" p14:dur="700">
+        <p:fade thruBlk="1"/>
+      </p:transition>
+    </mc:Choice>
+    <mc:Fallback>
+      <p:transition spd="med">
+        <p:fade thruBlk="1"/>
+      </p:transition>
+    </mc:Fallback>
+  </mc:AlternateContent>
 </p:sld>
 </file>
 
@@ -40645,44 +41090,44 @@
         <a:sysClr val="window" lastClr="FFFFFF"/>
       </a:lt1>
       <a:dk2>
-        <a:srgbClr val="1F497D"/>
+        <a:srgbClr val="44546A"/>
       </a:dk2>
       <a:lt2>
-        <a:srgbClr val="EEECE1"/>
+        <a:srgbClr val="E7E6E6"/>
       </a:lt2>
       <a:accent1>
-        <a:srgbClr val="4F81BD"/>
+        <a:srgbClr val="4472C4"/>
       </a:accent1>
       <a:accent2>
-        <a:srgbClr val="C0504D"/>
+        <a:srgbClr val="ED7D31"/>
       </a:accent2>
       <a:accent3>
-        <a:srgbClr val="9BBB59"/>
+        <a:srgbClr val="A5A5A5"/>
       </a:accent3>
       <a:accent4>
-        <a:srgbClr val="8064A2"/>
+        <a:srgbClr val="FFC000"/>
       </a:accent4>
       <a:accent5>
-        <a:srgbClr val="4BACC6"/>
+        <a:srgbClr val="5B9BD5"/>
       </a:accent5>
       <a:accent6>
-        <a:srgbClr val="F79646"/>
+        <a:srgbClr val="70AD47"/>
       </a:accent6>
       <a:hlink>
-        <a:srgbClr val="0000FF"/>
+        <a:srgbClr val="0563C1"/>
       </a:hlink>
       <a:folHlink>
-        <a:srgbClr val="800080"/>
+        <a:srgbClr val="954F72"/>
       </a:folHlink>
     </a:clrScheme>
     <a:fontScheme name="Office">
       <a:majorFont>
-        <a:latin typeface="Calibri"/>
+        <a:latin typeface="Calibri Light" panose="020F0302020204030204"/>
         <a:ea typeface=""/>
         <a:cs typeface=""/>
-        <a:font script="Jpan" typeface="ＭＳ Ｐゴシック"/>
+        <a:font script="Jpan" typeface="游ゴシック Light"/>
         <a:font script="Hang" typeface="맑은 고딕"/>
-        <a:font script="Hans" typeface="宋体"/>
+        <a:font script="Hans" typeface="等线 Light"/>
         <a:font script="Hant" typeface="新細明體"/>
         <a:font script="Arab" typeface="Times New Roman"/>
         <a:font script="Hebr" typeface="Times New Roman"/>
@@ -40710,14 +41155,31 @@
         <a:font script="Viet" typeface="Times New Roman"/>
         <a:font script="Uigh" typeface="Microsoft Uighur"/>
         <a:font script="Geor" typeface="Sylfaen"/>
+        <a:font script="Armn" typeface="Arial"/>
+        <a:font script="Bugi" typeface="Leelawadee UI"/>
+        <a:font script="Bopo" typeface="Microsoft JhengHei"/>
+        <a:font script="Java" typeface="Javanese Text"/>
+        <a:font script="Lisu" typeface="Segoe UI"/>
+        <a:font script="Mymr" typeface="Myanmar Text"/>
+        <a:font script="Nkoo" typeface="Ebrima"/>
+        <a:font script="Olck" typeface="Nirmala UI"/>
+        <a:font script="Osma" typeface="Ebrima"/>
+        <a:font script="Phag" typeface="Phagspa"/>
+        <a:font script="Syrn" typeface="Estrangelo Edessa"/>
+        <a:font script="Syrj" typeface="Estrangelo Edessa"/>
+        <a:font script="Syre" typeface="Estrangelo Edessa"/>
+        <a:font script="Sora" typeface="Nirmala UI"/>
+        <a:font script="Tale" typeface="Microsoft Tai Le"/>
+        <a:font script="Talu" typeface="Microsoft New Tai Lue"/>
+        <a:font script="Tfng" typeface="Ebrima"/>
       </a:majorFont>
       <a:minorFont>
-        <a:latin typeface="Calibri"/>
+        <a:latin typeface="Calibri" panose="020F0502020204030204"/>
         <a:ea typeface=""/>
         <a:cs typeface=""/>
-        <a:font script="Jpan" typeface="ＭＳ Ｐゴシック"/>
+        <a:font script="Jpan" typeface="游ゴシック"/>
         <a:font script="Hang" typeface="맑은 고딕"/>
-        <a:font script="Hans" typeface="宋体"/>
+        <a:font script="Hans" typeface="等线"/>
         <a:font script="Hant" typeface="新細明體"/>
         <a:font script="Arab" typeface="Arial"/>
         <a:font script="Hebr" typeface="Arial"/>
@@ -40745,6 +41207,23 @@
         <a:font script="Viet" typeface="Arial"/>
         <a:font script="Uigh" typeface="Microsoft Uighur"/>
         <a:font script="Geor" typeface="Sylfaen"/>
+        <a:font script="Armn" typeface="Arial"/>
+        <a:font script="Bugi" typeface="Leelawadee UI"/>
+        <a:font script="Bopo" typeface="Microsoft JhengHei"/>
+        <a:font script="Java" typeface="Javanese Text"/>
+        <a:font script="Lisu" typeface="Segoe UI"/>
+        <a:font script="Mymr" typeface="Myanmar Text"/>
+        <a:font script="Nkoo" typeface="Ebrima"/>
+        <a:font script="Olck" typeface="Nirmala UI"/>
+        <a:font script="Osma" typeface="Ebrima"/>
+        <a:font script="Phag" typeface="Phagspa"/>
+        <a:font script="Syrn" typeface="Estrangelo Edessa"/>
+        <a:font script="Syrj" typeface="Estrangelo Edessa"/>
+        <a:font script="Syre" typeface="Estrangelo Edessa"/>
+        <a:font script="Sora" typeface="Nirmala UI"/>
+        <a:font script="Tale" typeface="Microsoft Tai Le"/>
+        <a:font script="Talu" typeface="Microsoft New Tai Lue"/>
+        <a:font script="Tfng" typeface="Ebrima"/>
       </a:minorFont>
     </a:fontScheme>
     <a:fmtScheme name="Office">
@@ -40756,200 +41235,141 @@
           <a:gsLst>
             <a:gs pos="0">
               <a:schemeClr val="phClr">
-                <a:tint val="50000"/>
-                <a:satMod val="300000"/>
+                <a:lumMod val="110000"/>
+                <a:satMod val="105000"/>
+                <a:tint val="67000"/>
               </a:schemeClr>
             </a:gs>
-            <a:gs pos="35000">
+            <a:gs pos="50000">
               <a:schemeClr val="phClr">
-                <a:tint val="37000"/>
-                <a:satMod val="300000"/>
+                <a:lumMod val="105000"/>
+                <a:satMod val="103000"/>
+                <a:tint val="73000"/>
               </a:schemeClr>
             </a:gs>
             <a:gs pos="100000">
               <a:schemeClr val="phClr">
-                <a:tint val="15000"/>
-                <a:satMod val="350000"/>
+                <a:lumMod val="105000"/>
+                <a:satMod val="109000"/>
+                <a:tint val="81000"/>
               </a:schemeClr>
             </a:gs>
           </a:gsLst>
-          <a:lin ang="16200000" scaled="1"/>
+          <a:lin ang="5400000" scaled="0"/>
         </a:gradFill>
         <a:gradFill rotWithShape="1">
           <a:gsLst>
             <a:gs pos="0">
               <a:schemeClr val="phClr">
-                <a:tint val="100000"/>
+                <a:satMod val="103000"/>
+                <a:lumMod val="102000"/>
+                <a:tint val="94000"/>
+              </a:schemeClr>
+            </a:gs>
+            <a:gs pos="50000">
+              <a:schemeClr val="phClr">
+                <a:satMod val="110000"/>
+                <a:lumMod val="100000"/>
                 <a:shade val="100000"/>
-                <a:satMod val="130000"/>
               </a:schemeClr>
             </a:gs>
             <a:gs pos="100000">
               <a:schemeClr val="phClr">
-                <a:tint val="50000"/>
-                <a:shade val="100000"/>
-                <a:satMod val="350000"/>
+                <a:lumMod val="99000"/>
+                <a:satMod val="120000"/>
+                <a:shade val="78000"/>
               </a:schemeClr>
             </a:gs>
           </a:gsLst>
-          <a:lin ang="16200000" scaled="0"/>
+          <a:lin ang="5400000" scaled="0"/>
         </a:gradFill>
       </a:fillStyleLst>
       <a:lnStyleLst>
-        <a:ln w="9525" cap="flat" cmpd="sng" algn="ctr">
-          <a:solidFill>
-            <a:schemeClr val="phClr">
-              <a:shade val="95000"/>
-              <a:satMod val="105000"/>
-            </a:schemeClr>
-          </a:solidFill>
-          <a:prstDash val="solid"/>
-        </a:ln>
-        <a:ln w="25400" cap="flat" cmpd="sng" algn="ctr">
+        <a:ln w="6350" cap="flat" cmpd="sng" algn="ctr">
           <a:solidFill>
             <a:schemeClr val="phClr"/>
           </a:solidFill>
           <a:prstDash val="solid"/>
+          <a:miter lim="800000"/>
         </a:ln>
-        <a:ln w="38100" cap="flat" cmpd="sng" algn="ctr">
+        <a:ln w="12700" cap="flat" cmpd="sng" algn="ctr">
           <a:solidFill>
             <a:schemeClr val="phClr"/>
           </a:solidFill>
           <a:prstDash val="solid"/>
+          <a:miter lim="800000"/>
+        </a:ln>
+        <a:ln w="19050" cap="flat" cmpd="sng" algn="ctr">
+          <a:solidFill>
+            <a:schemeClr val="phClr"/>
+          </a:solidFill>
+          <a:prstDash val="solid"/>
+          <a:miter lim="800000"/>
         </a:ln>
       </a:lnStyleLst>
       <a:effectStyleLst>
         <a:effectStyle>
+          <a:effectLst/>
+        </a:effectStyle>
+        <a:effectStyle>
+          <a:effectLst/>
+        </a:effectStyle>
+        <a:effectStyle>
           <a:effectLst>
-            <a:outerShdw blurRad="40000" dist="20000" dir="5400000" rotWithShape="0">
+            <a:outerShdw blurRad="57150" dist="19050" dir="5400000" algn="ctr" rotWithShape="0">
               <a:srgbClr val="000000">
-                <a:alpha val="38000"/>
+                <a:alpha val="63000"/>
               </a:srgbClr>
             </a:outerShdw>
           </a:effectLst>
-        </a:effectStyle>
-        <a:effectStyle>
-          <a:effectLst>
-            <a:outerShdw blurRad="40000" dist="23000" dir="5400000" rotWithShape="0">
-              <a:srgbClr val="000000">
-                <a:alpha val="35000"/>
-              </a:srgbClr>
-            </a:outerShdw>
-          </a:effectLst>
-        </a:effectStyle>
-        <a:effectStyle>
-          <a:effectLst>
-            <a:outerShdw blurRad="40000" dist="23000" dir="5400000" rotWithShape="0">
-              <a:srgbClr val="000000">
-                <a:alpha val="35000"/>
-              </a:srgbClr>
-            </a:outerShdw>
-          </a:effectLst>
-          <a:scene3d>
-            <a:camera prst="orthographicFront">
-              <a:rot lat="0" lon="0" rev="0"/>
-            </a:camera>
-            <a:lightRig rig="threePt" dir="t">
-              <a:rot lat="0" lon="0" rev="1200000"/>
-            </a:lightRig>
-          </a:scene3d>
-          <a:sp3d>
-            <a:bevelT w="63500" h="25400"/>
-          </a:sp3d>
         </a:effectStyle>
       </a:effectStyleLst>
       <a:bgFillStyleLst>
         <a:solidFill>
           <a:schemeClr val="phClr"/>
         </a:solidFill>
+        <a:solidFill>
+          <a:schemeClr val="phClr">
+            <a:tint val="95000"/>
+            <a:satMod val="170000"/>
+          </a:schemeClr>
+        </a:solidFill>
         <a:gradFill rotWithShape="1">
           <a:gsLst>
             <a:gs pos="0">
               <a:schemeClr val="phClr">
-                <a:tint val="40000"/>
-                <a:satMod val="350000"/>
+                <a:tint val="93000"/>
+                <a:satMod val="150000"/>
+                <a:shade val="98000"/>
+                <a:lumMod val="102000"/>
               </a:schemeClr>
             </a:gs>
-            <a:gs pos="40000">
+            <a:gs pos="50000">
               <a:schemeClr val="phClr">
-                <a:tint val="45000"/>
-                <a:shade val="99000"/>
-                <a:satMod val="350000"/>
+                <a:tint val="98000"/>
+                <a:satMod val="130000"/>
+                <a:shade val="90000"/>
+                <a:lumMod val="103000"/>
               </a:schemeClr>
             </a:gs>
             <a:gs pos="100000">
               <a:schemeClr val="phClr">
-                <a:shade val="20000"/>
-                <a:satMod val="255000"/>
+                <a:shade val="63000"/>
+                <a:satMod val="120000"/>
               </a:schemeClr>
             </a:gs>
           </a:gsLst>
-          <a:path path="circle">
-            <a:fillToRect l="50000" t="-80000" r="50000" b="180000"/>
-          </a:path>
-        </a:gradFill>
-        <a:gradFill rotWithShape="1">
-          <a:gsLst>
-            <a:gs pos="0">
-              <a:schemeClr val="phClr">
-                <a:tint val="80000"/>
-                <a:satMod val="300000"/>
-              </a:schemeClr>
-            </a:gs>
-            <a:gs pos="100000">
-              <a:schemeClr val="phClr">
-                <a:shade val="30000"/>
-                <a:satMod val="200000"/>
-              </a:schemeClr>
-            </a:gs>
-          </a:gsLst>
-          <a:path path="circle">
-            <a:fillToRect l="50000" t="50000" r="50000" b="50000"/>
-          </a:path>
+          <a:lin ang="5400000" scaled="0"/>
         </a:gradFill>
       </a:bgFillStyleLst>
     </a:fmtScheme>
   </a:themeElements>
-  <a:objectDefaults>
-    <a:spDef>
-      <a:spPr/>
-      <a:bodyPr/>
-      <a:lstStyle/>
-      <a:style>
-        <a:lnRef idx="1">
-          <a:schemeClr val="accent1"/>
-        </a:lnRef>
-        <a:fillRef idx="3">
-          <a:schemeClr val="accent1"/>
-        </a:fillRef>
-        <a:effectRef idx="2">
-          <a:schemeClr val="accent1"/>
-        </a:effectRef>
-        <a:fontRef idx="minor">
-          <a:schemeClr val="lt1"/>
-        </a:fontRef>
-      </a:style>
-    </a:spDef>
-    <a:lnDef>
-      <a:spPr/>
-      <a:bodyPr/>
-      <a:lstStyle/>
-      <a:style>
-        <a:lnRef idx="2">
-          <a:schemeClr val="accent1"/>
-        </a:lnRef>
-        <a:fillRef idx="0">
-          <a:schemeClr val="accent1"/>
-        </a:fillRef>
-        <a:effectRef idx="1">
-          <a:schemeClr val="accent1"/>
-        </a:effectRef>
-        <a:fontRef idx="minor">
-          <a:schemeClr val="tx1"/>
-        </a:fontRef>
-      </a:style>
-    </a:lnDef>
-  </a:objectDefaults>
+  <a:objectDefaults/>
   <a:extraClrSchemeLst/>
+  <a:extLst>
+    <a:ext uri="{05A4C25C-085E-4340-85A3-A5531E510DB2}">
+      <thm15:themeFamily xmlns:thm15="http://schemas.microsoft.com/office/thememl/2012/main" name="Office Theme" id="{62F939B6-93AF-4DB8-9C6B-D6C7DFDC589F}" vid="{4A3C46E8-61CC-4603-A589-7422A47A8E4A}"/>
+    </a:ext>
+  </a:extLst>
 </a:theme>
 </file>